--- a/presentation/azure-devops-to-github-the-great-migration-FULL-DECK.pptx
+++ b/presentation/azure-devops-to-github-the-great-migration-FULL-DECK.pptx
@@ -12,7 +12,6 @@
     <p:sldId id="257" r:id="rId3"/>
     <p:sldId id="258" r:id="rId4"/>
     <p:sldId id="259" r:id="rId5"/>
-    <p:sldId id="260" r:id="rId6"/>
     <p:sldId id="261" r:id="rId7"/>
     <p:sldId id="262" r:id="rId8"/>
     <p:sldId id="265" r:id="rId9"/>
@@ -31,7 +30,6 @@
     <p:sldId id="278" r:id="rId22"/>
     <p:sldId id="279" r:id="rId23"/>
     <p:sldId id="280" r:id="rId24"/>
-    <p:sldId id="282" r:id="rId25"/>
     <p:sldId id="281" r:id="rId26"/>
     <p:sldId id="313" r:id="rId27"/>
     <p:sldId id="283" r:id="rId28"/>
@@ -41,17 +39,13 @@
     <p:sldId id="287" r:id="rId32"/>
     <p:sldId id="288" r:id="rId33"/>
     <p:sldId id="289" r:id="rId34"/>
-    <p:sldId id="290" r:id="rId35"/>
-    <p:sldId id="314" r:id="rId36"/>
     <p:sldId id="291" r:id="rId37"/>
     <p:sldId id="292" r:id="rId38"/>
     <p:sldId id="293" r:id="rId39"/>
-    <p:sldId id="294" r:id="rId40"/>
     <p:sldId id="295" r:id="rId41"/>
     <p:sldId id="296" r:id="rId42"/>
     <p:sldId id="297" r:id="rId43"/>
     <p:sldId id="298" r:id="rId44"/>
-    <p:sldId id="299" r:id="rId45"/>
     <p:sldId id="301" r:id="rId46"/>
     <p:sldId id="300" r:id="rId47"/>
     <p:sldId id="302" r:id="rId48"/>
@@ -64,6 +58,7 @@
     <p:sldId id="308" r:id="rId55"/>
     <p:sldId id="311" r:id="rId56"/>
     <p:sldId id="312" r:id="rId57"/>
+    <p:sldId id="282" r:id="rId25"/>
   </p:sldIdLst>
   <p:sldSz cx="12192000" cy="6858000"/>
   <p:notesSz cx="6858000" cy="12192000"/>
@@ -526,85 +521,40 @@
           <a:lstStyle/>
           <a:p>
             <a:r>
-              <a:rPr lang="en-US" dirty="0"/>
-              <a:t>Straight delivery. Git is git (so commit history is easy), and PRs most branch policies migrate without much drama via tooling.</a:t>
-            </a:r>
-          </a:p>
-          <a:p>
-            <a:endParaRPr lang="en-US" dirty="0"/>
-          </a:p>
-          <a:p>
-            <a:r>
-              <a:rPr lang="en-US" dirty="0"/>
-              <a:t>The asterisk is what doesn’t: </a:t>
-            </a:r>
-          </a:p>
-          <a:p>
-            <a:pPr marL="171450" indent="-171450">
-              <a:buFontTx/>
-              <a:buChar char="-"/>
-            </a:pPr>
-            <a:r>
-              <a:rPr lang="en-US" dirty="0"/>
-              <a:t>repo permissions get rebuilt as two GitHub teams per team project</a:t>
-            </a:r>
-          </a:p>
-          <a:p>
-            <a:pPr marL="171450" indent="-171450">
-              <a:buFontTx/>
-              <a:buChar char="-"/>
-            </a:pPr>
-            <a:r>
-              <a:rPr lang="en-US" dirty="0"/>
-              <a:t>Git LFS objects need their own handling, user-scoped or cross-repo branch policies need manual rebuilding</a:t>
-            </a:r>
-          </a:p>
-          <a:p>
-            <a:pPr marL="171450" marR="0" lvl="0" indent="-171450" algn="l" defTabSz="914400" rtl="0" eaLnBrk="1" fontAlgn="auto" latinLnBrk="0" hangingPunct="1">
-              <a:lnSpc>
-                <a:spcPct val="100000"/>
-              </a:lnSpc>
-              <a:spcBef>
-                <a:spcPts val="0"/>
-              </a:spcBef>
-              <a:spcAft>
-                <a:spcPts val="0"/>
-              </a:spcAft>
-              <a:buClrTx/>
-              <a:buSzTx/>
-              <a:buFontTx/>
-              <a:buChar char="-"/>
-              <a:tabLst/>
-              <a:defRPr/>
-            </a:pPr>
-            <a:r>
-              <a:rPr lang="en-US" sz="1200" b="0" i="0" kern="1200" dirty="0">
-                <a:solidFill>
-                  <a:schemeClr val="tx1"/>
-                </a:solidFill>
-                <a:effectLst/>
-                <a:latin typeface="+mn-lt"/>
-                <a:ea typeface="+mn-ea"/>
-                <a:cs typeface="+mn-cs"/>
-              </a:rPr>
+              <a:t>Straight delivery. Git is Git, so commit history is easy, and pull requests plus most branch policies migrate without much drama through GitHub Enterprise Importer.</a:t>
+            </a:r>
+          </a:p>
+          <a:p/>
+          <a:p>
+            <a:r>
+              <a:t>The asterisk is what doesn’t:</a:t>
+            </a:r>
+          </a:p>
+          <a:p>
+            <a:r>
+              <a:t>- Repo permissions get rebuilt as two GitHub teams per team project.</a:t>
+            </a:r>
+          </a:p>
+          <a:p>
+            <a:r>
+              <a:t>- Git LFS objects are not migrated. GEI moves the repository; you push the LFS objects separately.</a:t>
+            </a:r>
+          </a:p>
+          <a:p>
+            <a:r>
+              <a:t>- User-scoped and cross-repo branch policies need rebuilding by hand.</a:t>
+            </a:r>
+          </a:p>
+          <a:p/>
+          <a:p>
+            <a:r>
               <a:t>Verify target visibility during the trial migration. Migration scripts can preserve or explicitly set visibility, but enterprise policies and managed-user configurations may constrain the available choices.</a:t>
             </a:r>
           </a:p>
-          <a:p>
-            <a:pPr marL="171450" indent="-171450">
-              <a:buFontTx/>
-              <a:buChar char="-"/>
-            </a:pPr>
-            <a:endParaRPr lang="en-US" dirty="0"/>
-          </a:p>
-          <a:p>
-            <a:pPr marL="0" indent="0">
-              <a:buFontTx/>
-              <a:buNone/>
-            </a:pPr>
-            <a:r>
-              <a:rPr lang="en-US" dirty="0"/>
-              <a:t>Worth a quick mention of the four hard size limits too if there's time (2 GiB/commit, 2 GiB/push, 100 MiB/file, 40 GiB/repo) but don't let the slide's bullets run long reciting them — they're in the written notes if anyone asks.</a:t>
+          <a:p/>
+          <a:p>
+            <a:r>
+              <a:t>If there’s time, mention the hard limits: during migration, 40 GiB per repository and 400 MiB per file; afterwards, GitHub’s normal 100 MiB per file, 2 GiB per commit and 2 GiB per push. Don’t recite them from the slide.</a:t>
             </a:r>
           </a:p>
         </p:txBody>
@@ -690,15 +640,19 @@
           <a:lstStyle/>
           <a:p>
             <a:r>
-              <a:t>Straight delivery, quick — this is the shortest stop in the section because there's genuinely not much to it. Both wikis are Git repos, so it's clone-and-push, full stop. The only real conversation is permissions: Azure DevOps' per-page permission model is richer than GitHub wiki's, and you lose the tight integration with Boards and pipelines that Azure DevOps wiki has. Land the pull-quote line — content migration is trivial, permissions is the whole conversation — it's the one-sentence takeaway.</a:t>
-            </a:r>
-          </a:p>
-          <a:p>
-            <a:endParaRPr/>
-          </a:p>
-          <a:p>
-            <a:r>
-              <a:t>OPTIONAL LAUGH LINE — keeps the wildlife frame alive in a section that otherwise has none between the openers: “Every field guide has one species that just walks across the river without drama. This is it. Enjoy it — the slide is forty seconds long.”</a:t>
+              <a:t>Straight delivery, quick. Both wikis are Git repos, so the pages themselves copy with a clone and a push. The work is everything the Azure DevOps wiki layered on top: .order files and nested folders set page order and hierarchy, and GitHub’s wiki doesn’t read .order and shows a flat page list; Azure DevOps-only markdown ([[_TOC_]], ::: mermaid blocks, #123 work-item links, @mentions) renders as plain text or breaks; attachments live in a .attachments folder that page links point into.</a:t>
+            </a:r>
+          </a:p>
+          <a:p/>
+          <a:p>
+            <a:r>
+              <a:t>Two things worth knowing if asked. Azure DevOps wiki permissions apply to the whole wiki, not to individual pages (Microsoft’s docs say so explicitly), so permissions are not the big conversation. And a code wiki, a repo folder published as a wiki, is just Markdown in the repository, so it travels with the repo migration. Many teams use the move to put the project wiki into a docs folder too.</a:t>
+            </a:r>
+          </a:p>
+          <a:p/>
+          <a:p>
+            <a:r>
+              <a:t>OPTIONAL LAUGH LINE — “Every field guide has one species that just walks across the river. This is it. Mostly. Enjoy it — the slide is forty seconds long.”</a:t>
             </a:r>
           </a:p>
         </p:txBody>
@@ -784,8 +738,13 @@
           <a:lstStyle/>
           <a:p>
             <a:r>
-              <a:rPr lang="en-US" dirty="0"/>
               <a:t>Straight delivery. Unlike Repos or Wiki, this one isn't a clean migration path — it's a genuine three-way decision: keep Azure Artifacts as-is, move fully to GitHub Packages, or dual-publish during a transition window. The realistic PoC target for most enterprises is the first option done well: GitHub Actions publishing to and consuming from an existing Azure Artifacts feed, because repointing every downstream consumer at cutover usually isn't realistic. This is a decision, not a rewrite — say that line plainly, it's the slide's title for a reason.</a:t>
+            </a:r>
+          </a:p>
+          <a:p/>
+          <a:p>
+            <a:r>
+              <a:t>If you’re weighing option two, check the feed types first. GitHub Packages covers npm, NuGet, Maven, Gradle, RubyGems and containers, but not PyPI or Universal Packages, and it has no equivalent of Azure Artifacts upstream sources (proxying nuget.org or npmjs). Any of those keeps Azure Artifacts in the picture.</a:t>
             </a:r>
           </a:p>
         </p:txBody>
@@ -1059,52 +1018,27 @@
           <a:bodyPr/>
           <a:lstStyle/>
           <a:p>
-            <a:pPr marL="0" marR="0" lvl="0" indent="0" algn="l" defTabSz="914400" rtl="0" eaLnBrk="1" fontAlgn="auto" latinLnBrk="0" hangingPunct="1">
-              <a:lnSpc>
-                <a:spcPct val="100000"/>
-              </a:lnSpc>
-              <a:spcBef>
-                <a:spcPts val="0"/>
-              </a:spcBef>
-              <a:spcAft>
-                <a:spcPts val="0"/>
-              </a:spcAft>
-              <a:buClrTx/>
-              <a:buSzTx/>
-              <a:buFontTx/>
-              <a:buNone/>
-              <a:tabLst/>
-              <a:defRPr/>
-            </a:pPr>
-            <a:r>
-              <a:rPr lang="en-US" dirty="0"/>
-              <a:t>Straight delivery, land this one deliberately — it's the thesis the whole talk hangs on. Three audiences, one pattern: developers move to GitHub and get Copilot + Actions; managers keep Azure Boards, capacity charts, and Power BI exactly as-is; and the budget conversation is easy because GHEC includes free Azure DevOps Basic access. Explicitly reframe: this is the shape the rest of the talk builds toward, not a fallback — section 4 comes back to this exact point on Boards vs. Projects.</a:t>
-            </a:r>
-            <a:br>
-              <a:rPr lang="en-US" dirty="0"/>
-            </a:br>
-            <a:br>
-              <a:rPr lang="en-US" dirty="0"/>
-            </a:br>
-            <a:r>
-              <a:rPr lang="en-US" dirty="0"/>
-              <a:t>T</a:t>
-            </a:r>
-            <a:r>
-              <a:rPr lang="en-US" sz="1200" b="0" i="0" kern="1200" dirty="0">
-                <a:solidFill>
-                  <a:schemeClr val="tx1"/>
-                </a:solidFill>
-                <a:effectLst/>
-                <a:latin typeface="+mn-lt"/>
-                <a:ea typeface="+mn-ea"/>
-                <a:cs typeface="+mn-cs"/>
-              </a:rPr>
-              <a:t>est Plans, Copilot, Advanced Security, Actions overages, larger runners, and migration work are separate cost considerations.</a:t>
-            </a:r>
-          </a:p>
-          <a:p>
-            <a:endParaRPr lang="en-US" dirty="0"/>
+            <a:r>
+              <a:t>Straight delivery, land this one deliberately — it’s the thesis the whole talk hangs on. Three audiences, one pattern: developers move to GitHub and get Copilot and Actions; managers keep Azure Boards, capacity charts and Power BI exactly as they are; and the budget conversation starts easier because GitHub Enterprise Cloud includes Azure DevOps Basic access for users who sign in with Entra ID.</a:t>
+            </a:r>
+          </a:p>
+          <a:p/>
+          <a:p>
+            <a:r>
+              <a:t>Be precise about that grant: it covers Basic only. Test Plans (which section 4 tells you to keep) is a separate Azure DevOps licence, and Copilot, Secret Protection and Code Security, Actions overages, larger runners and the migration work itself are all separate costs.</a:t>
+            </a:r>
+          </a:p>
+          <a:p/>
+          <a:p>
+            <a:r>
+              <a:t>What holds the two halves together is the integration layer: work-item traceability, commit and pull-request links, pipeline integration, identity mapping, and cross-platform reporting.</a:t>
+            </a:r>
+          </a:p>
+          <a:p/>
+          <a:p>
+            <a:r>
+              <a:t>Explicitly reframe: this is the shape the rest of the talk builds toward, not a fallback. Section 4 comes back to this exact point for Boards and Projects.</a:t>
+            </a:r>
           </a:p>
         </p:txBody>
       </p:sp>
@@ -1189,8 +1123,7 @@
           <a:lstStyle/>
           <a:p>
             <a:r>
-              <a:rPr lang="en-US" dirty="0"/>
-              <a:t>Brief check-in, not a discussion window — about a minute. Take one quick question if a hand is up, otherwise move straight into section 3. The real Q&amp;A time is banked for the 10-minute block at the end.</a:t>
+              <a:t>Brief check-in, not a discussion window — about a minute. Take one quick question if a hand is up, otherwise move straight into section 3. The real Q&amp;A time is banked for the open Q&amp;A at the end.</a:t>
             </a:r>
           </a:p>
         </p:txBody>
@@ -1639,36 +1572,19 @@
           <a:lstStyle/>
           <a:p>
             <a:r>
-              <a:rPr lang="en-US" dirty="0"/>
-              <a:t>Open the slide — “Both platforms use YAML, in the same way that Java and JavaScript both contain the word ‘Java.’”</a:t>
-            </a:r>
-            <a:br>
-              <a:rPr lang="en-US" dirty="0"/>
-            </a:br>
-            <a:br>
-              <a:rPr lang="en-US" dirty="0"/>
-            </a:br>
-            <a:r>
-              <a:rPr dirty="0"/>
-              <a:t>Straight delivery. Use the table as a vocabulary guide, not a transliteration recipe. Ask what security or lifecycle boundary each stage represented. Manual judgment is needed where service connections, templates, approvals, runners, conditions, and failure behavior do not map one-to-one.</a:t>
-            </a:r>
-          </a:p>
-          <a:p>
-            <a:endParaRPr dirty="0"/>
-          </a:p>
-          <a:p>
-            <a:r>
-              <a:rPr dirty="0"/>
-              <a:t>OPTIONAL LAUGH LINE — stop on the Service Connection row and say: “Four words on the left, four words on the right, and about three weeks in between.” This is the driest stretch of the deck and this is the row the whole room has personally lost a sprint to.</a:t>
-            </a:r>
-          </a:p>
-          <a:p>
-            <a:endParaRPr dirty="0"/>
-          </a:p>
-          <a:p>
-            <a:r>
-              <a:rPr dirty="0"/>
-              <a:t>It gets the laugh and it is also the slide's entire thesis: same syntax, different language. Say it once and move on.</a:t>
+              <a:t>Open the slide with the line: “Both platforms use YAML, in the same way that Java and JavaScript both contain the word ‘Java.’” It is also in the session abstract, so deliver it as a callback. It gets the laugh and it is the slide’s entire thesis: same syntax, different language. Say it once and move on.</a:t>
+            </a:r>
+          </a:p>
+          <a:p/>
+          <a:p>
+            <a:r>
+              <a:t>Straight delivery after that. Use the table as a vocabulary guide, not a transliteration recipe. Ask what security or lifecycle boundary each stage represented. Manual judgment is needed where service connections, templates, approvals, runners, conditions and failure behavior do not map one to one. Worth saying out loud: Actions has no stages, so a multi-stage pipeline becomes jobs linked by needs, usually with environments carrying the approvals.</a:t>
+            </a:r>
+          </a:p>
+          <a:p/>
+          <a:p>
+            <a:r>
+              <a:t>OPTIONAL LAUGH LINE — stop on the Service Connection row: “Two words on the left, three on the right, and about three weeks in between.” This is the row the whole room has personally lost a sprint to.</a:t>
             </a:r>
           </a:p>
         </p:txBody>
@@ -1966,174 +1882,61 @@
           <a:lstStyle/>
           <a:p>
             <a:r>
-              <a:rPr dirty="0"/>
-              <a:t>Straight delivery. Say the full name out loud the first time — Enterprise Live Migrations — and note it also appeared on the methods table a few slides back.</a:t>
-            </a:r>
-          </a:p>
-          <a:p>
-            <a:endParaRPr dirty="0"/>
-          </a:p>
-          <a:p>
-            <a:r>
-              <a:rPr dirty="0"/>
+              <a:t>APPENDIX SLIDE. Moved out of the main flow for time; show it only if someone asks about ELM or near-zero-downtime cutover. Straight delivery. Enterprise Live Migrations was named on the methods table in section 3.</a:t>
+            </a:r>
+          </a:p>
+          <a:p/>
+          <a:p>
+            <a:r>
               <a:t>STATUS, stated precisely, because the two paths differ: GitHub Enterprise Server to GHEC-with-data-residency went GA on 1 September 2026, but the AZURE DEVOPS path — the only one that matters here — is still public preview. Say “public preview for the Azure DevOps path,” not just “preview,” or somebody who read the GA changelog will correct you.</a:t>
             </a:r>
           </a:p>
-          <a:p>
-            <a:endParaRPr dirty="0"/>
-          </a:p>
-          <a:p>
-            <a:r>
-              <a:rPr dirty="0"/>
+          <a:p/>
+          <a:p>
+            <a:r>
               <a:t>It is also research-only for us: Hunter's current tenant does not meet the data-residency prerequisite, so we have not run it.</a:t>
             </a:r>
           </a:p>
-          <a:p>
-            <a:endParaRPr dirty="0"/>
-          </a:p>
-          <a:p>
-            <a:r>
-              <a:rPr dirty="0"/>
+          <a:p/>
+          <a:p>
+            <a:r>
               <a:t>THE CAPS ARE THE POINT. Thirty repositories total — twenty initial, ten incremental — and the cutover has to complete within twenty-one days of starting. Repositories only: no work items, pipelines, wikis, test plans or artifacts. That reframes ELM from “the better option” to “a pilot mechanism,” which is the more useful thing for this room to hear. If anyone is picturing it as the way to move a thousand repositories, the 30-repo cap answers that before they build a plan around it.</a:t>
             </a:r>
           </a:p>
-          <a:p>
-            <a:endParaRPr dirty="0"/>
-          </a:p>
-          <a:p>
-            <a:r>
-              <a:rPr dirty="0"/>
-              <a:t>Keep the GEI comparison honest: gh-ado2gh --all already does the configuration work. What ELM genuinely adds is continuous delta synchroni</a:t>
-            </a:r>
-            <a:r>
-              <a:rPr lang="en-US" dirty="0"/>
-              <a:t>z</a:t>
-            </a:r>
-            <a:r>
-              <a:rPr dirty="0"/>
-              <a:t>ation and a scheduled cutover with a read-only window under thirty minutes. Pipeline logic and non-repository systems still need separate migration and validation — that is the takeaway line.</a:t>
-            </a:r>
-            <a:endParaRPr lang="en-US" dirty="0"/>
-          </a:p>
-          <a:p>
-            <a:endParaRPr lang="en-US" dirty="0"/>
-          </a:p>
-          <a:p>
-            <a:r>
-              <a:rPr lang="en-US" sz="1200" b="1" kern="1200" dirty="0">
-                <a:solidFill>
-                  <a:schemeClr val="tx1"/>
-                </a:solidFill>
-                <a:effectLst/>
-                <a:latin typeface="+mn-lt"/>
-                <a:ea typeface="+mn-ea"/>
-                <a:cs typeface="+mn-cs"/>
-              </a:rPr>
-              <a:t>GitHub Enterprise Cloud (GHEC) with Data Residency</a:t>
-            </a:r>
-            <a:r>
-              <a:rPr lang="en-US" sz="1200" kern="1200" dirty="0">
-                <a:solidFill>
-                  <a:schemeClr val="tx1"/>
-                </a:solidFill>
-                <a:effectLst/>
-                <a:latin typeface="+mn-lt"/>
-                <a:ea typeface="+mn-ea"/>
-                <a:cs typeface="+mn-cs"/>
-              </a:rPr>
-              <a:t> is a distinct deployment model where:</a:t>
-            </a:r>
-          </a:p>
-          <a:p>
-            <a:pPr lvl="0" rtl="0" fontAlgn="ctr"/>
-            <a:r>
-              <a:rPr lang="en-US" sz="1200" kern="1200" dirty="0">
-                <a:solidFill>
-                  <a:schemeClr val="tx1"/>
-                </a:solidFill>
-                <a:effectLst/>
-                <a:latin typeface="+mn-lt"/>
-                <a:ea typeface="+mn-ea"/>
-                <a:cs typeface="+mn-cs"/>
-              </a:rPr>
+          <a:p/>
+          <a:p>
+            <a:r>
+              <a:t>Keep the GEI comparison honest: gh-ado2gh --all already does the configuration work. What ELM genuinely adds is continuous delta synchronization and a scheduled cutover with a read-only window under thirty minutes. Pipeline logic and non-repository systems still need separate migration and validation — that is the takeaway line.</a:t>
+            </a:r>
+          </a:p>
+          <a:p/>
+          <a:p>
+            <a:r>
+              <a:t>GitHub Enterprise Cloud (GHEC) with Data Residency is a distinct deployment model where:</a:t>
+            </a:r>
+          </a:p>
+          <a:p>
+            <a:r>
               <a:t> - Your enterprise is hosted on a dedicated ghe.com subdomain (instead of github.com&lt;org&gt;).</a:t>
             </a:r>
           </a:p>
           <a:p>
-            <a:pPr lvl="0" rtl="0" fontAlgn="ctr"/>
-            <a:r>
-              <a:rPr lang="en-US" sz="1200" kern="1200" dirty="0">
-                <a:solidFill>
-                  <a:schemeClr val="tx1"/>
-                </a:solidFill>
-                <a:effectLst/>
-                <a:latin typeface="+mn-lt"/>
-                <a:ea typeface="+mn-ea"/>
-                <a:cs typeface="+mn-cs"/>
-              </a:rPr>
+            <a:r>
               <a:t> - You choose the geographic region where your code and repository data are stored (currently including U.S., EU, Australia, and Japan).</a:t>
             </a:r>
           </a:p>
           <a:p>
-            <a:pPr lvl="0" rtl="0" fontAlgn="ctr"/>
-            <a:r>
-              <a:rPr lang="en-US" sz="1200" kern="1200" dirty="0">
-                <a:solidFill>
-                  <a:schemeClr val="tx1"/>
-                </a:solidFill>
-                <a:effectLst/>
-                <a:latin typeface="+mn-lt"/>
-                <a:ea typeface="+mn-ea"/>
-                <a:cs typeface="+mn-cs"/>
-              </a:rPr>
+            <a:r>
               <a:t> - The environment is isolated from the broader github.com ecosystem.</a:t>
             </a:r>
           </a:p>
           <a:p>
-            <a:pPr lvl="0" rtl="0" fontAlgn="ctr"/>
-            <a:r>
-              <a:rPr lang="en-US" sz="1200" kern="1200" dirty="0">
-                <a:solidFill>
-                  <a:schemeClr val="tx1"/>
-                </a:solidFill>
-                <a:effectLst/>
-                <a:latin typeface="+mn-lt"/>
-                <a:ea typeface="+mn-ea"/>
-                <a:cs typeface="+mn-cs"/>
-              </a:rPr>
-              <a:t> - It requires </a:t>
-            </a:r>
-            <a:r>
-              <a:rPr lang="en-US" sz="1200" b="1" kern="1200" dirty="0">
-                <a:solidFill>
-                  <a:schemeClr val="tx1"/>
-                </a:solidFill>
-                <a:effectLst/>
-                <a:latin typeface="+mn-lt"/>
-                <a:ea typeface="+mn-ea"/>
-                <a:cs typeface="+mn-cs"/>
-              </a:rPr>
-              <a:t>Enterprise Managed Users (EMU)</a:t>
-            </a:r>
-            <a:r>
-              <a:rPr lang="en-US" sz="1200" kern="1200" dirty="0">
-                <a:solidFill>
-                  <a:schemeClr val="tx1"/>
-                </a:solidFill>
-                <a:effectLst/>
-                <a:latin typeface="+mn-lt"/>
-                <a:ea typeface="+mn-ea"/>
-                <a:cs typeface="+mn-cs"/>
-              </a:rPr>
-              <a:t>. </a:t>
-            </a:r>
-          </a:p>
-          <a:p>
-            <a:endParaRPr dirty="0"/>
-          </a:p>
-          <a:p>
-            <a:endParaRPr dirty="0"/>
-          </a:p>
+            <a:r>
+              <a:t> - It requires Enterprise Managed Users (EMU). </a:t>
+            </a:r>
+          </a:p>
+          <a:p/>
+          <a:p/>
         </p:txBody>
       </p:sp>
       <p:sp>
@@ -2723,48 +2526,15 @@
           <a:bodyPr/>
           <a:lstStyle/>
           <a:p>
-            <a:pPr marL="0" marR="0" lvl="0" indent="0" algn="l" defTabSz="914400" rtl="0" eaLnBrk="1" fontAlgn="auto" latinLnBrk="0" hangingPunct="1">
-              <a:lnSpc>
-                <a:spcPct val="100000"/>
-              </a:lnSpc>
-              <a:spcBef>
-                <a:spcPts val="0"/>
-              </a:spcBef>
-              <a:spcAft>
-                <a:spcPts val="0"/>
-              </a:spcAft>
-              <a:buClrTx/>
-              <a:buSzTx/>
-              <a:buFontTx/>
-              <a:buNone/>
-              <a:tabLst/>
-              <a:defRPr/>
-            </a:pPr>
-            <a:r>
-              <a:rPr lang="en-US" dirty="0"/>
-              <a:t>Straight delivery. Walk the six-leg structure quickly — roughly 13–16 min each, ~80 min of content plus small Q&amp;A pockets between sections and one 10-minute Q&amp;A block at the end. </a:t>
-            </a:r>
-            <a:br>
-              <a:rPr lang="en-US" dirty="0"/>
-            </a:br>
-            <a:br>
-              <a:rPr lang="en-US" dirty="0"/>
-            </a:br>
-            <a:r>
-              <a:rPr lang="en-US" sz="1200" b="0" i="0" kern="1200" dirty="0">
-                <a:solidFill>
-                  <a:schemeClr val="tx1"/>
-                </a:solidFill>
-                <a:effectLst/>
-                <a:latin typeface="+mn-lt"/>
-                <a:ea typeface="+mn-ea"/>
-                <a:cs typeface="+mn-cs"/>
-              </a:rPr>
+            <a:r>
+              <a:t>Straight delivery. Walk the six legs quickly. Budget for the 90-minute slot: section 1 about 8 minutes (including the opening), section 2 about 13, section 3 about 21, section 4 about 10, section 5 about 12, section 6 about 8. That is roughly 72 minutes of content plus four one-minute Q&amp;A pockets, which leaves about 14 minutes of open Q&amp;A on the thank-you slide. The ELM slide now sits in the appendix after the thank-you slide; pull it up only if someone asks.</a:t>
+            </a:r>
+          </a:p>
+          <a:p/>
+          <a:p>
+            <a:r>
               <a:t>This is not a GitHub sales pitch. It is a field guide to what transfers cleanly, what must be redesigned, and what should deliberately remain in Azure DevOps.</a:t>
             </a:r>
-          </a:p>
-          <a:p>
-            <a:endParaRPr lang="en-US" dirty="0"/>
           </a:p>
         </p:txBody>
       </p:sp>
@@ -2849,8 +2619,7 @@
           <a:lstStyle/>
           <a:p>
             <a:r>
-              <a:rPr lang="en-US" dirty="0"/>
-              <a:t>Brief check-in, not a discussion window — about 30 seconds given how much ground this section covers. Take one quick question if a hand is up, otherwise move straight into section 4. The real Q&amp;A time is banked for the 10-minute block at the end.</a:t>
+              <a:t>Brief check-in, not a discussion window — about 30 seconds given how much ground this section covers. Take one quick question if a hand is up, otherwise move straight into section 4. The real Q&amp;A time is banked for the open Q&amp;A at the end.</a:t>
             </a:r>
           </a:p>
         </p:txBody>
@@ -2936,8 +2705,7 @@
           <a:lstStyle/>
           <a:p>
             <a:r>
-              <a:rPr lang="en-US" dirty="0"/>
-              <a:t>DOCUMENTARY VOICE — the only register for this slide. Deliver slowly, deadpan, faintly awed, same conceit as the earlier section openers. Pause after the line, then go straight back to normal delivery for the Boards-vs-Projects framing slide. This is the shortest section in the deck — keep every slide brisk, the payoff is the Test Plans slide and the recommendation, not length.</a:t>
+              <a:t>DOCUMENTARY VOICE — the only register for this slide. Deliver slowly, deadpan, faintly awed, same conceit as the earlier section openers. Pause after the line, then go straight back to normal delivery for the Boards-vs-Projects framing slide. Keep this section brisk: five slides, and the payoff is the Test Plans slide and the recommendation, not length.</a:t>
             </a:r>
           </a:p>
         </p:txBody>
@@ -3026,28 +2794,22 @@
               <a:t>Straight delivery. Frame this before comparing feature by feature — Azure Boards and GitHub Projects are not two competitors in one category, they are two different models.</a:t>
             </a:r>
           </a:p>
-          <a:p>
-            <a:endParaRPr/>
-          </a:p>
+          <a:p/>
           <a:p>
             <a:r>
               <a:t>Azure Boards is a full enterprise work-tracking system organized around a process template: hierarchy, states, rules, capacity, cross-team reporting. GitHub Projects is a real planning layer organized around custom fields and views — org-level, spanning repositories, with sub-issues, issue types and dependencies all GA.</a:t>
             </a:r>
           </a:p>
-          <a:p>
-            <a:endParaRPr/>
-          </a:p>
-          <a:p>
-            <a:r>
-              <a:t>Do NOT call Projects a lightweight kanban board. That was fair a few years ago and this room will know it isn't now; understating it makes the Boards recommendation later sound motivated rather than reasoned. Naming the difference as two models rather than a feature gap is what stops the next two slides reading as a scored competition.</a:t>
-            </a:r>
-          </a:p>
-          <a:p>
-            <a:endParaRPr/>
-          </a:p>
-          <a:p>
-            <a:r>
-              <a:t>The next two slides take each tool on its own terms before comparing what's lost in a migration — say that as a transition, don't put it on the slide.</a:t>
+          <a:p/>
+          <a:p>
+            <a:r>
+              <a:t>Do NOT call Projects a lightweight kanban board. That was fair a few years ago and this room will know it isn't now; understating it makes the Boards recommendation later sound motivated rather than reasoned. Naming the difference as two models rather than a feature gap is what stops the next slide reading as a scored competition.</a:t>
+            </a:r>
+          </a:p>
+          <a:p/>
+          <a:p>
+            <a:r>
+              <a:t>The next slide takes each tool on its own terms before comparing what's lost in a migration — say that as a transition, don't put it on the slide.</a:t>
             </a:r>
           </a:p>
         </p:txBody>
@@ -3133,8 +2895,25 @@
           <a:lstStyle/>
           <a:p>
             <a:r>
-              <a:rPr lang="en-US" dirty="0"/>
-              <a:t>Straight delivery. This is the enterprise case, stated plainly and without hedging: hierarchical work items from Epics down to Tasks, built-in sprint planning and capacity management, Delivery Plans for dependencies that cross team boundaries, and Boards Analytics feeding Power BI for reporting that goes well beyond a single team's board. It organizes around Project, Team, and Area Path — a structure built for portfolios, not just one team's kanban.</a:t>
+              <a:t>Straight delivery. Take each tool on its own terms before comparing what a migration loses.</a:t>
+            </a:r>
+          </a:p>
+          <a:p/>
+          <a:p>
+            <a:r>
+              <a:t>Left card, the enterprise case, stated plainly: hierarchical work items from Epics down to Tasks, built-in sprint planning and capacity management, Delivery Plans for dependencies across teams, and Boards Analytics feeding Power BI. It organizes around Project, Team and Area Path — a structure built for portfolios, not one team’s board.</a:t>
+            </a:r>
+          </a:p>
+          <a:p/>
+          <a:p>
+            <a:r>
+              <a:t>Right card, and give Projects real credit, because the recommendation at the end of this section only carries weight if this half was honest. Projects is organized around custom fields (iteration, single-select, date, number) rather than a fixed process template. Sub-issues, issue types and dependencies are all GA, there are board, table and roadmap layouts, and automation comes built in or through Actions. It is org-level, not repo-scoped, and it lives next to the issues and PRs it tracks.</a:t>
+            </a:r>
+          </a:p>
+          <a:p/>
+          <a:p>
+            <a:r>
+              <a:t>The contrast is process template versus fields and views, not enterprise versus toy. If asked about limits: a project holds up to 50 fields, counting the built-in ones.</a:t>
             </a:r>
           </a:p>
         </p:txBody>
@@ -3157,196 +2936,6 @@
             <a:fld id="{F7021451-1387-4CA6-816F-3879F97B5CBC}" type="slidenum">
               <a:rPr lang="en-US"/>
               <a:t>33</a:t>
-            </a:fld>
-            <a:endParaRPr lang="en-US"/>
-          </a:p>
-        </p:txBody>
-      </p:sp>
-    </p:spTree>
-    <p:extLst>
-      <p:ext uri="{BB962C8B-B14F-4D97-AF65-F5344CB8AC3E}">
-        <p14:creationId xmlns:p14="http://schemas.microsoft.com/office/powerpoint/2010/main" val="1024086991"/>
-      </p:ext>
-    </p:extLst>
-  </p:cSld>
-  <p:clrMapOvr>
-    <a:masterClrMapping/>
-  </p:clrMapOvr>
-</p:notes>
-</file>
-
-<file path=ppt/notesSlides/notesSlide34.xml><?xml version="1.0" encoding="utf-8"?>
-<p:notes xmlns:a="http://schemas.openxmlformats.org/drawingml/2006/main" xmlns:r="http://schemas.openxmlformats.org/officeDocument/2006/relationships" xmlns:p="http://schemas.openxmlformats.org/presentationml/2006/main">
-  <p:cSld>
-    <p:spTree>
-      <p:nvGrpSpPr>
-        <p:cNvPr id="1" name=""/>
-        <p:cNvGrpSpPr/>
-        <p:nvPr/>
-      </p:nvGrpSpPr>
-      <p:grpSpPr>
-        <a:xfrm>
-          <a:off x="0" y="0"/>
-          <a:ext cx="0" cy="0"/>
-          <a:chOff x="0" y="0"/>
-          <a:chExt cx="0" cy="0"/>
-        </a:xfrm>
-      </p:grpSpPr>
-      <p:sp>
-        <p:nvSpPr>
-          <p:cNvPr id="2" name="Slide Image Placeholder 1"/>
-          <p:cNvSpPr>
-            <a:spLocks noGrp="1" noRot="1" noChangeAspect="1"/>
-          </p:cNvSpPr>
-          <p:nvPr>
-            <p:ph type="sldImg"/>
-          </p:nvPr>
-        </p:nvSpPr>
-        <p:spPr/>
-      </p:sp>
-      <p:sp>
-        <p:nvSpPr>
-          <p:cNvPr id="3" name="Notes Placeholder 2"/>
-          <p:cNvSpPr>
-            <a:spLocks noGrp="1"/>
-          </p:cNvSpPr>
-          <p:nvPr>
-            <p:ph type="body" idx="1"/>
-          </p:nvPr>
-        </p:nvSpPr>
-        <p:spPr/>
-        <p:txBody>
-          <a:bodyPr/>
-          <a:lstStyle/>
-          <a:p>
-            <a:r>
-              <a:t>Straight delivery, and give Projects real credit here — the recommendation in a few slides only carries weight if this slide was honest.</a:t>
-            </a:r>
-          </a:p>
-          <a:p>
-            <a:endParaRPr/>
-          </a:p>
-          <a:p>
-            <a:r>
-              <a:t>Projects is organized around custom fields (iteration, single-select, date, number) rather than a fixed process template. Sub-issues, issue types and dependencies are all GA, there are three layouts including roadmap, and automation comes either built in or through Actions. Crucially it is org-level, not repo-scoped — a single project spans repositories.</a:t>
-            </a:r>
-          </a:p>
-          <a:p>
-            <a:endParaRPr/>
-          </a:p>
-          <a:p>
-            <a:r>
-              <a:t>It lives next to the issues and PRs it tracks rather than in a separate system, which is the whole argument. The structural contrast with the previous slide is process template versus fields and views — not enterprise versus toy.</a:t>
-            </a:r>
-          </a:p>
-        </p:txBody>
-      </p:sp>
-      <p:sp>
-        <p:nvSpPr>
-          <p:cNvPr id="4" name="Slide Number Placeholder 3"/>
-          <p:cNvSpPr>
-            <a:spLocks noGrp="1"/>
-          </p:cNvSpPr>
-          <p:nvPr>
-            <p:ph type="sldNum" sz="quarter" idx="10"/>
-          </p:nvPr>
-        </p:nvSpPr>
-        <p:spPr/>
-        <p:txBody>
-          <a:bodyPr/>
-          <a:lstStyle/>
-          <a:p>
-            <a:fld id="{F7021451-1387-4CA6-816F-3879F97B5CBC}" type="slidenum">
-              <a:rPr lang="en-US"/>
-              <a:t>34</a:t>
-            </a:fld>
-            <a:endParaRPr lang="en-US"/>
-          </a:p>
-        </p:txBody>
-      </p:sp>
-    </p:spTree>
-    <p:extLst>
-      <p:ext uri="{BB962C8B-B14F-4D97-AF65-F5344CB8AC3E}">
-        <p14:creationId xmlns:p14="http://schemas.microsoft.com/office/powerpoint/2010/main" val="1024086991"/>
-      </p:ext>
-    </p:extLst>
-  </p:cSld>
-  <p:clrMapOvr>
-    <a:masterClrMapping/>
-  </p:clrMapOvr>
-</p:notes>
-</file>
-
-<file path=ppt/notesSlides/notesSlide35.xml><?xml version="1.0" encoding="utf-8"?>
-<p:notes xmlns:a="http://schemas.openxmlformats.org/drawingml/2006/main" xmlns:r="http://schemas.openxmlformats.org/officeDocument/2006/relationships" xmlns:p="http://schemas.openxmlformats.org/presentationml/2006/main">
-  <p:cSld>
-    <p:spTree>
-      <p:nvGrpSpPr>
-        <p:cNvPr id="1" name=""/>
-        <p:cNvGrpSpPr/>
-        <p:nvPr/>
-      </p:nvGrpSpPr>
-      <p:grpSpPr>
-        <a:xfrm>
-          <a:off x="0" y="0"/>
-          <a:ext cx="0" cy="0"/>
-          <a:chOff x="0" y="0"/>
-          <a:chExt cx="0" cy="0"/>
-        </a:xfrm>
-      </p:grpSpPr>
-      <p:sp>
-        <p:nvSpPr>
-          <p:cNvPr id="2" name="Slide Image Placeholder 1"/>
-          <p:cNvSpPr>
-            <a:spLocks noGrp="1" noRot="1" noChangeAspect="1"/>
-          </p:cNvSpPr>
-          <p:nvPr>
-            <p:ph type="sldImg"/>
-          </p:nvPr>
-        </p:nvSpPr>
-        <p:spPr/>
-      </p:sp>
-      <p:sp>
-        <p:nvSpPr>
-          <p:cNvPr id="3" name="Notes Placeholder 2"/>
-          <p:cNvSpPr>
-            <a:spLocks noGrp="1"/>
-          </p:cNvSpPr>
-          <p:nvPr>
-            <p:ph type="body" idx="1"/>
-          </p:nvPr>
-        </p:nvSpPr>
-        <p:spPr/>
-        <p:txBody>
-          <a:bodyPr/>
-          <a:lstStyle/>
-          <a:p>
-            <a:r>
-              <a:rPr lang="en-US" dirty="0"/>
-              <a:t>HISTORY: Original 'Projects' shipped 2016 as simple Trello-like kanban cards (free-text or linked to issues/PRs). 'Projects (beta)' launched 2020 as a full rewrite on a spreadsheet-like data model (items x fields, multiple saved views). Went GA in 2022 as the current 'Projects'; the old version was renamed 'Projects (classic)' and is on a deprecation path -- new projects default to the current version.
-DELIVERY NOTE: the right card is the one that surprises Azure DevOps veterans -- not that Projects is worse, but that GitHub deliberately ships no opinion on process. Teams coming from Agile/Scrum templates feel the gap as 'less structured' until they rebuild it with custom fields themselves.</a:t>
-            </a:r>
-          </a:p>
-        </p:txBody>
-      </p:sp>
-      <p:sp>
-        <p:nvSpPr>
-          <p:cNvPr id="4" name="Slide Number Placeholder 3"/>
-          <p:cNvSpPr>
-            <a:spLocks noGrp="1"/>
-          </p:cNvSpPr>
-          <p:nvPr>
-            <p:ph type="sldNum" sz="quarter" idx="10"/>
-          </p:nvPr>
-        </p:nvSpPr>
-        <p:spPr/>
-        <p:txBody>
-          <a:bodyPr/>
-          <a:lstStyle/>
-          <a:p>
-            <a:fld id="{F7021451-1387-4CA6-816F-3879F97B5CBC}" type="slidenum">
-              <a:rPr lang="en-US"/>
-              <a:t>35</a:t>
             </a:fld>
             <a:endParaRPr lang="en-US"/>
           </a:p>
@@ -3410,12 +2999,16 @@
           <a:lstStyle/>
           <a:p>
             <a:r>
-              <a:t>Straight delivery. Be concrete about the loss rather than vague: sprint history, capacity data, custom process fields, and the entire Project/Team/Area Path hierarchy don't have a clean landing spot in GitHub Projects. There is open-source help — azure-devops-migration-tools can move work items over — but set expectations honestly: this is real manual-mapping work because the two data models don't line up, not a one-command migration. This sets up the Test Plans slide and the hybrid-pattern resolution that follows.</a:t>
-            </a:r>
-          </a:p>
-          <a:p>
-            <a:endParaRPr/>
-          </a:p>
+              <a:t>Straight delivery. Be concrete about the loss: sprint history and capacity data, custom process fields and rules, the process template itself, and the Project / Team / Area Path structure have no clean landing spot in GitHub Projects. Parent-child links are the exception; they can map to sub-issues, which go up to eight levels deep.</a:t>
+            </a:r>
+          </a:p>
+          <a:p/>
+          <a:p>
+            <a:r>
+              <a:t>Set expectations on tooling honestly. There is no first-party tool that moves Azure Boards work items into GitHub Issues. The well-known azure-devops-migration-tools project moves work items between Azure DevOps projects and organizations, not to GitHub. What exists for GitHub is community scripts against the two APIs, and the data models still don’t line up, so this is a mapping project, not a one-command migration. This sets up the Test Plans slide and the recommendation that follows.</a:t>
+            </a:r>
+          </a:p>
+          <a:p/>
           <a:p>
             <a:r>
               <a:t>OPTIONAL LAUGH LINE — on losing sprint history and capacity data: “Nobody has ever asked to see sprint history from three years ago. They will ask exactly once, about six weeks after you delete it.”</a:t>
@@ -3591,8 +3184,19 @@
           <a:lstStyle/>
           <a:p>
             <a:r>
-              <a:rPr lang="en-US" dirty="0"/>
-              <a:t>Straight delivery. This is section 1's hybrid pattern coming back around, applied specifically to Boards vs. Projects: connect Azure Boards to GitHub repos before touching anything else. Developers get to work in GitHub, right next to Copilot and the issues that matter to them day to day; managers keep the sprint hub, capacity charts, and Power BI reporting exactly where they already are. The framing matters — Microsoft designed this as the intended shape for mixed estates, not a stopgap. Internally, call it the answer, not the fallback.</a:t>
+              <a:t>Straight delivery. This is the explicit takeaway for the section, and it is section 2’s hybrid pattern applied to planning: connect Azure Boards to your GitHub repos before touching anything else. Developers work in GitHub, next to Copilot and their pull requests; managers keep the sprint hub, capacity charts and Power BI reporting exactly where they are. The Azure Boards app for GitHub links commits and PRs back to work items with AB# mentions, and the Copilot cloud agent can be started from a Boards item.</a:t>
+            </a:r>
+          </a:p>
+          <a:p/>
+          <a:p>
+            <a:r>
+              <a:t>Say the recommendation plainly: don’t migrate to GitHub Issues unless your planning needs are genuinely simple. For most teams past a handful of people, the hierarchy, capacity planning and reporting Azure Boards already gives you are worth keeping.</a:t>
+            </a:r>
+          </a:p>
+          <a:p/>
+          <a:p>
+            <a:r>
+              <a:t>Then the nuance, which is the bottom bar: this isn’t an argument for Azure Boards forever. It’s an argument against defaulting to GitHub Issues just because the code moved. Where you plan work is a separate decision from where the code lives, so leave that door open.</a:t>
             </a:r>
           </a:p>
         </p:txBody>
@@ -3615,93 +3219,6 @@
             <a:fld id="{F7021451-1387-4CA6-816F-3879F97B5CBC}" type="slidenum">
               <a:rPr lang="en-US"/>
               <a:t>38</a:t>
-            </a:fld>
-            <a:endParaRPr lang="en-US"/>
-          </a:p>
-        </p:txBody>
-      </p:sp>
-    </p:spTree>
-    <p:extLst>
-      <p:ext uri="{BB962C8B-B14F-4D97-AF65-F5344CB8AC3E}">
-        <p14:creationId xmlns:p14="http://schemas.microsoft.com/office/powerpoint/2010/main" val="1024086991"/>
-      </p:ext>
-    </p:extLst>
-  </p:cSld>
-  <p:clrMapOvr>
-    <a:masterClrMapping/>
-  </p:clrMapOvr>
-</p:notes>
-</file>
-
-<file path=ppt/notesSlides/notesSlide39.xml><?xml version="1.0" encoding="utf-8"?>
-<p:notes xmlns:a="http://schemas.openxmlformats.org/drawingml/2006/main" xmlns:r="http://schemas.openxmlformats.org/officeDocument/2006/relationships" xmlns:p="http://schemas.openxmlformats.org/presentationml/2006/main">
-  <p:cSld>
-    <p:spTree>
-      <p:nvGrpSpPr>
-        <p:cNvPr id="1" name=""/>
-        <p:cNvGrpSpPr/>
-        <p:nvPr/>
-      </p:nvGrpSpPr>
-      <p:grpSpPr>
-        <a:xfrm>
-          <a:off x="0" y="0"/>
-          <a:ext cx="0" cy="0"/>
-          <a:chOff x="0" y="0"/>
-          <a:chExt cx="0" cy="0"/>
-        </a:xfrm>
-      </p:grpSpPr>
-      <p:sp>
-        <p:nvSpPr>
-          <p:cNvPr id="2" name="Slide Image Placeholder 1"/>
-          <p:cNvSpPr>
-            <a:spLocks noGrp="1" noRot="1" noChangeAspect="1"/>
-          </p:cNvSpPr>
-          <p:nvPr>
-            <p:ph type="sldImg"/>
-          </p:nvPr>
-        </p:nvSpPr>
-        <p:spPr/>
-      </p:sp>
-      <p:sp>
-        <p:nvSpPr>
-          <p:cNvPr id="3" name="Notes Placeholder 2"/>
-          <p:cNvSpPr>
-            <a:spLocks noGrp="1"/>
-          </p:cNvSpPr>
-          <p:nvPr>
-            <p:ph type="body" idx="1"/>
-          </p:nvPr>
-        </p:nvSpPr>
-        <p:spPr/>
-        <p:txBody>
-          <a:bodyPr/>
-          <a:lstStyle/>
-          <a:p>
-            <a:r>
-              <a:rPr lang="en-US" dirty="0"/>
-              <a:t>Straight delivery, this is the explicit takeaway slide for the section — say it plainly. Don't migrate to GitHub Issues unless your PM needs are genuinely simple; for most teams past a handful of people, keep Azure Boards connected rather than replaced. Important nuance worth saying out loud: this isn't an argument for Azure Boards forever, it's an argument against defaulting to GitHub Issues just because the code moved. Where you plan work is a separate decision from where your code lives — leave that door open.</a:t>
-            </a:r>
-          </a:p>
-        </p:txBody>
-      </p:sp>
-      <p:sp>
-        <p:nvSpPr>
-          <p:cNvPr id="4" name="Slide Number Placeholder 3"/>
-          <p:cNvSpPr>
-            <a:spLocks noGrp="1"/>
-          </p:cNvSpPr>
-          <p:nvPr>
-            <p:ph type="sldNum" sz="quarter" idx="10"/>
-          </p:nvPr>
-        </p:nvSpPr>
-        <p:spPr/>
-        <p:txBody>
-          <a:bodyPr/>
-          <a:lstStyle/>
-          <a:p>
-            <a:fld id="{F7021451-1387-4CA6-816F-3879F97B5CBC}" type="slidenum">
-              <a:rPr lang="en-US"/>
-              <a:t>39</a:t>
             </a:fld>
             <a:endParaRPr lang="en-US"/>
           </a:p>
@@ -3765,8 +3282,7 @@
           <a:lstStyle/>
           <a:p>
             <a:r>
-              <a:rPr lang="en-US" dirty="0"/>
-              <a:t>DOCUMENTARY VOICE — the only register for this slide. Deliver slowly, deadpan, faintly awed. Do not wink at the joke. This is the first of six opener cards plus a closer — it establishes the conceit. Pause after delivering the line before moving to slide 4, where we go straight back to normal delivery.</a:t>
+              <a:t>DOCUMENTARY VOICE — the only register for this slide. Deliver slowly, deadpan, faintly awed. Do not wink at the joke. This is the first of six opener cards plus a closer — it establishes the conceit. Pause after delivering the line before moving on. The next slide goes straight back to normal delivery.</a:t>
             </a:r>
           </a:p>
         </p:txBody>
@@ -3852,8 +3368,7 @@
           <a:lstStyle/>
           <a:p>
             <a:r>
-              <a:rPr lang="en-US" dirty="0"/>
-              <a:t>Brief check-in, not a discussion window — about a minute. Take one quick question if a hand is up, otherwise move straight into section 5. The real Q&amp;A time is banked for the 10-minute block at the end.</a:t>
+              <a:t>Brief check-in, not a discussion window — about a minute. Take one quick question if a hand is up, otherwise move straight into section 5. The real Q&amp;A time is banked for the open Q&amp;A at the end.</a:t>
             </a:r>
           </a:p>
         </p:txBody>
@@ -4026,8 +3541,7 @@
           <a:lstStyle/>
           <a:p>
             <a:r>
-              <a:rPr lang="en-US" dirty="0"/>
-              <a:t>Straight delivery, this is the section's thesis statement — land it early and come back to it. Migrations that fail almost never fail because the tooling didn't work; gh-ado2gh and gh-actions-importer do what they say. They fail because of three predictable human failures: no real selection process (the tool got picked by momentum, not evaluated on merit), customization starting before anyone actually understood the new tool, and a rollout that felt like it was done TO people rather than WITH them. Everything else in this section is about avoiding those three things specifically.</a:t>
+              <a:t>Straight delivery. This is the section’s thesis — land it early and come back to it. Most migrations that fail don’t fail in the converter; gh-ado2gh and Actions Importer do what they say. The execution-environment work from section 3 is real, but it is engineering you can plan. What sinks migrations is three predictable human failures: no real selection process (a choice made by momentum rather than evaluated on merit), customization starting before anyone understood the new tool, and a rollout that felt done TO people rather than WITH them. The rest of this section is about avoiding those three.</a:t>
             </a:r>
           </a:p>
         </p:txBody>
@@ -4113,17 +3627,19 @@
           <a:lstStyle/>
           <a:p>
             <a:r>
-              <a:rPr lang="en-US" dirty="0"/>
-              <a:t>Before walking the five steps: “In most organizations the real selection process is that somebody senior used it at their last job.” Reliable laugh, and it is precisely failure mode one from the previous slide, so it earns its place.</a:t>
-            </a:r>
-          </a:p>
-          <a:p>
-            <a:endParaRPr lang="en-US" dirty="0"/>
-          </a:p>
-          <a:p>
-            <a:r>
-              <a:rPr dirty="0"/>
-              <a:t>Straight delivery, walk this quickly — it's five steps, don't dwell on any one. Define must-haves before shopping, assess real constraints like data residency and compliance, model one real increment of actual work in each candidate tool rather than watching a vendor demo, score the results with a weighted rubric so the decision is defensible later, and run a real 4–6 week pilot with outcomes decided in advance. This is the antidote to the first failure mode from the thesis slide — no real selection process.</a:t>
+              <a:t>Before walking the steps: “In most organizations the real selection process is that somebody senior used it at their last job.” OPTIONAL LAUGH LINE, and it is precisely failure mode one from the previous slide.</a:t>
+            </a:r>
+          </a:p>
+          <a:p/>
+          <a:p>
+            <a:r>
+              <a:t>Straight delivery, walk this quickly. Frame it for this room: you have already chosen GitHub, so this is for the choices inside the migration — Boards or Projects, hosted or self-hosted runners, Azure Artifacts or GitHub Packages. Define must-haves, assess real constraints like data residency and compliance, model one real increment of actual work in each option rather than watching a demo, score it with a weighted rubric so the decision is defensible later, then pilot.</a:t>
+            </a:r>
+          </a:p>
+          <a:p/>
+          <a:p>
+            <a:r>
+              <a:t>Step five carries the second failure mode: customizing on day one locks in decisions made by people who didn’t understand the tool yet. Every custom field, automation rule or process tweak added before the pilot is a bet placed with the least information you’ll ever have — that’s the bottom bar. Run the pilot on defaults, then customize with real usage data instead of guesses.</a:t>
             </a:r>
           </a:p>
         </p:txBody>
@@ -4146,93 +3662,6 @@
             <a:fld id="{F7021451-1387-4CA6-816F-3879F97B5CBC}" type="slidenum">
               <a:rPr lang="en-US"/>
               <a:t>43</a:t>
-            </a:fld>
-            <a:endParaRPr lang="en-US"/>
-          </a:p>
-        </p:txBody>
-      </p:sp>
-    </p:spTree>
-    <p:extLst>
-      <p:ext uri="{BB962C8B-B14F-4D97-AF65-F5344CB8AC3E}">
-        <p14:creationId xmlns:p14="http://schemas.microsoft.com/office/powerpoint/2010/main" val="1024086991"/>
-      </p:ext>
-    </p:extLst>
-  </p:cSld>
-  <p:clrMapOvr>
-    <a:masterClrMapping/>
-  </p:clrMapOvr>
-</p:notes>
-</file>
-
-<file path=ppt/notesSlides/notesSlide44.xml><?xml version="1.0" encoding="utf-8"?>
-<p:notes xmlns:a="http://schemas.openxmlformats.org/drawingml/2006/main" xmlns:r="http://schemas.openxmlformats.org/officeDocument/2006/relationships" xmlns:p="http://schemas.openxmlformats.org/presentationml/2006/main">
-  <p:cSld>
-    <p:spTree>
-      <p:nvGrpSpPr>
-        <p:cNvPr id="1" name=""/>
-        <p:cNvGrpSpPr/>
-        <p:nvPr/>
-      </p:nvGrpSpPr>
-      <p:grpSpPr>
-        <a:xfrm>
-          <a:off x="0" y="0"/>
-          <a:ext cx="0" cy="0"/>
-          <a:chOff x="0" y="0"/>
-          <a:chExt cx="0" cy="0"/>
-        </a:xfrm>
-      </p:grpSpPr>
-      <p:sp>
-        <p:nvSpPr>
-          <p:cNvPr id="2" name="Slide Image Placeholder 1"/>
-          <p:cNvSpPr>
-            <a:spLocks noGrp="1" noRot="1" noChangeAspect="1"/>
-          </p:cNvSpPr>
-          <p:nvPr>
-            <p:ph type="sldImg"/>
-          </p:nvPr>
-        </p:nvSpPr>
-        <p:spPr/>
-      </p:sp>
-      <p:sp>
-        <p:nvSpPr>
-          <p:cNvPr id="3" name="Notes Placeholder 2"/>
-          <p:cNvSpPr>
-            <a:spLocks noGrp="1"/>
-          </p:cNvSpPr>
-          <p:nvPr>
-            <p:ph type="body" idx="1"/>
-          </p:nvPr>
-        </p:nvSpPr>
-        <p:spPr/>
-        <p:txBody>
-          <a:bodyPr/>
-          <a:lstStyle/>
-          <a:p>
-            <a:r>
-              <a:rPr lang="en-US" dirty="0"/>
-              <a:t>Straight delivery. This is the antidote to the second failure mode — customization starting before anyone understood the new tool. Every custom field, automation rule, or process tweak added before the pilot is a decision made with the least information the team will ever have about how the tool actually gets used. Run the pilot on defaults first, then customize afterward with real usage data instead of guesses about what people will need.</a:t>
-            </a:r>
-          </a:p>
-        </p:txBody>
-      </p:sp>
-      <p:sp>
-        <p:nvSpPr>
-          <p:cNvPr id="4" name="Slide Number Placeholder 3"/>
-          <p:cNvSpPr>
-            <a:spLocks noGrp="1"/>
-          </p:cNvSpPr>
-          <p:nvPr>
-            <p:ph type="sldNum" sz="quarter" idx="10"/>
-          </p:nvPr>
-        </p:nvSpPr>
-        <p:spPr/>
-        <p:txBody>
-          <a:bodyPr/>
-          <a:lstStyle/>
-          <a:p>
-            <a:fld id="{F7021451-1387-4CA6-816F-3879F97B5CBC}" type="slidenum">
-              <a:rPr lang="en-US"/>
-              <a:t>44</a:t>
             </a:fld>
             <a:endParaRPr lang="en-US"/>
           </a:p>
@@ -4383,12 +3812,16 @@
           <a:lstStyle/>
           <a:p>
             <a:r>
-              <a:t>Straight delivery. Sticker-price comparisons are the easiest way to make a bad decision look rigorous. Compare the whole bill: licensing tiers, GitHub Advanced Security as an add-on rather than bundled, runner and compute minutes, and the real admin and migration effort to get there — that last one is easy to leave off a spreadsheet entirely. The rule of thumb: past roughly 100 engineers, governance and reporting time saved usually outweighs a modest per-seat price difference, but say plainly that this is a rule of thumb, not a substitute for running the actual math against your own numbers.</a:t>
-            </a:r>
-          </a:p>
-          <a:p>
-            <a:endParaRPr/>
-          </a:p>
+              <a:t>Straight delivery. Sticker-price comparisons are the easiest way to make a bad decision look rigorous. Compare the whole bill: licensing tiers; GitHub Secret Protection and GitHub Code Security, which since April 2025 are sold as two separate add-ons rather than one Advanced Security bundle (Azure DevOps sells the same two products, so security alone doesn’t tip the decision); runner and compute minutes; and the real admin and migration effort, which is easy to leave off a spreadsheet entirely.</a:t>
+            </a:r>
+          </a:p>
+          <a:p/>
+          <a:p>
+            <a:r>
+              <a:t>The bottom bar is the part most business cases skip: price the migration and the steady state as two separate numbers, and count the months when both platforms are billing at once. Dual-running is where the estimate usually goes wrong.</a:t>
+            </a:r>
+          </a:p>
+          <a:p/>
           <a:p>
             <a:r>
               <a:t>OPTIONAL LAUGH LINE — on the last item of the cost model: “Every migration business case has a line called *migration effort*, and it is always the number nobody wanted to be the person to estimate.”</a:t>
@@ -4480,52 +3913,40 @@
               <a:t>Straight delivery. This is the counterweight to section 1. AI is the honest reason most teams are migrating — this slide is where you pay that argument down so it reads as analysis rather than a pitch. Frame the four as a to-do list, not as reasons to doubt the move.</a:t>
             </a:r>
           </a:p>
-          <a:p>
-            <a:endParaRPr/>
-          </a:p>
-          <a:p>
-            <a:r>
-              <a:t>1. WORK ITEMS. Verified behaviour, and it closes the loop with the Boards recommendation two sections back: when the Copilot cloud agent is triggered from an Azure Boards work item it captures the text fields — description, repro steps — plus the last 50 comments. So keeping Boards does not cost you the AI payoff; it just means the Boards item literally is the prompt.</a:t>
-            </a:r>
-          </a:p>
-          <a:p>
-            <a:endParaRPr/>
-          </a:p>
+          <a:p/>
+          <a:p>
+            <a:r>
+              <a:t>1. WORK ITEMS. Verified behavior, and it closes the loop with the Boards recommendation in section 4: when the Copilot cloud agent is triggered from an Azure Boards work item it captures the text fields — description, repro steps — plus the last 50 comments. So keeping Boards does not cost you the AI payoff; it just means the Boards item literally is the prompt.</a:t>
+            </a:r>
+          </a:p>
+          <a:p/>
           <a:p>
             <a:r>
               <a:t>   WORTH SAYING FOR A REGULATED ROOM: that captured context is stored in the pull request and is visible to anyone with access to the repository. A work item that was private in Azure DevOps becomes readable in GitHub the moment an agent picks it up. Most people have not thought about that, and for anyone with compliance obligations it is the most useful thirty seconds on the slide.</a:t>
             </a:r>
           </a:p>
-          <a:p>
-            <a:endParaRPr/>
-          </a:p>
+          <a:p/>
           <a:p>
             <a:r>
               <a:t>2. CONVENTIONS. Three supported files: .github/copilot-instructions.md repository-wide, path-specific NAME.instructions.md under .github/instructions (cloud agent and code review only), and AGENTS.md anywhere in the tree, nearest one winning. Without them the agent infers house style from whatever it can see, which on a large legacy repo is whatever is oldest.</a:t>
             </a:r>
           </a:p>
-          <a:p>
-            <a:endParaRPr/>
-          </a:p>
+          <a:p/>
           <a:p>
             <a:r>
               <a:t>3. TESTS. Tie this back to the crossing section — a green build is evidence, not acceptance. Agent throughput is capped by human review capacity until CI carries real weight, so teams with thin or flaky suites do not get faster, they just move the bottleneck onto reviewers.</a:t>
             </a:r>
           </a:p>
-          <a:p>
-            <a:endParaRPr/>
-          </a:p>
-          <a:p>
-            <a:r>
-              <a:t>4. LICENSING. Moving the repository turns nothing on. The cloud agent needs a paid Copilot plan, it must be enabled on each connected repository, and an organisation owner has to install the Azure Boards GitHub app before anyone can use the integration.</a:t>
-            </a:r>
-          </a:p>
-          <a:p>
-            <a:endParaRPr/>
-          </a:p>
-          <a:p>
-            <a:r>
-              <a:t>OPTIONAL LAUGH LINE — after “a vague ticket produces a vague PR”: “Garbage in, garbage out — except now the garbage arrives with unit tests and a confident summary.”</a:t>
+          <a:p/>
+          <a:p>
+            <a:r>
+              <a:t>4. LICENSING. Moving the repository turns nothing on. The cloud agent needs a paid Copilot plan, it must be enabled on each connected repository, and an organization owner has to install the Azure Boards GitHub app before anyone can use the integration.</a:t>
+            </a:r>
+          </a:p>
+          <a:p/>
+          <a:p>
+            <a:r>
+              <a:t>OPTIONAL LAUGH LINE — after “The work item is the prompt”: “Garbage in, garbage out — except now the garbage arrives with unit tests and a confident summary.”</a:t>
             </a:r>
           </a:p>
         </p:txBody>
@@ -4611,8 +4032,7 @@
           <a:lstStyle/>
           <a:p>
             <a:r>
-              <a:rPr lang="en-US" dirty="0"/>
-              <a:t>Documentary aside — same voice as the opener cards, played for a beat, then straight delivery resumes. This is the section's closing synthesis: startups and one-to-three-squad teams should just take GitHub Projects' lightweight fit, no enterprise overhead needed. Scaled agile, regulated industries, and multi-team portfolios are exactly where Azure Boards' hierarchy and reporting earn their keep. Mixed estates get the hybrid pattern, deliberately — a fit, not a compromise. Then the documentary callback: the Senior Engineer from the opener card isn't wrong to be cautious about change, they're just defending the old pipeline with the wrong argument ('it's always worked') instead of the right one ('here's the rubric score'). Land this warmly, not as a dunk — the point is to hear the objection out and then hand them the data from the selection process a few slides back.</a:t>
+              <a:t>Documentary aside — same voice as the opener cards, played for a beat, then straight delivery resumes. This is the section's closing synthesis: startups and one-to-three-squad teams should just take GitHub Projects' lightweight fit, no enterprise overhead needed. Scaled agile, regulated industries, and multi-team portfolios are exactly where Azure Boards' hierarchy and reporting earn their keep. Mixed estates get the hybrid pattern, deliberately — a fit, not a compromise. Then the documentary callback: the Senior Engineer from the opener card isn't wrong to be cautious about change, they're just defending the old pipeline with the wrong argument ('it's always worked') instead of the right one ('here's what the audit says'). Land this warmly, not as a dunk — the point is to hear the objection out and then hand them the Actions Importer audit from section 3. The bucket their pipeline landed in is the conversation.</a:t>
             </a:r>
           </a:p>
         </p:txBody>
@@ -4698,8 +4118,7 @@
           <a:lstStyle/>
           <a:p>
             <a:r>
-              <a:rPr lang="en-US" dirty="0"/>
-              <a:t>Brief check-in, not a discussion window — about a minute. Take one quick question if a hand is up, otherwise move straight into section 6, the final section. The real Q&amp;A time is banked for the 10-minute block at the end.</a:t>
+              <a:t>Brief check-in, not a discussion window — about a minute. Take one quick question if a hand is up, otherwise move straight into section 6, the final section. The real Q&amp;A time is banked for the open Q&amp;A at the end.</a:t>
             </a:r>
           </a:p>
         </p:txBody>
@@ -4722,93 +4141,6 @@
             <a:fld id="{F7021451-1387-4CA6-816F-3879F97B5CBC}" type="slidenum">
               <a:rPr lang="en-US"/>
               <a:t>49</a:t>
-            </a:fld>
-            <a:endParaRPr lang="en-US"/>
-          </a:p>
-        </p:txBody>
-      </p:sp>
-    </p:spTree>
-    <p:extLst>
-      <p:ext uri="{BB962C8B-B14F-4D97-AF65-F5344CB8AC3E}">
-        <p14:creationId xmlns:p14="http://schemas.microsoft.com/office/powerpoint/2010/main" val="1024086991"/>
-      </p:ext>
-    </p:extLst>
-  </p:cSld>
-  <p:clrMapOvr>
-    <a:masterClrMapping/>
-  </p:clrMapOvr>
-</p:notes>
-</file>
-
-<file path=ppt/notesSlides/notesSlide5.xml><?xml version="1.0" encoding="utf-8"?>
-<p:notes xmlns:a="http://schemas.openxmlformats.org/drawingml/2006/main" xmlns:r="http://schemas.openxmlformats.org/officeDocument/2006/relationships" xmlns:p="http://schemas.openxmlformats.org/presentationml/2006/main">
-  <p:cSld>
-    <p:spTree>
-      <p:nvGrpSpPr>
-        <p:cNvPr id="1" name=""/>
-        <p:cNvGrpSpPr/>
-        <p:nvPr/>
-      </p:nvGrpSpPr>
-      <p:grpSpPr>
-        <a:xfrm>
-          <a:off x="0" y="0"/>
-          <a:ext cx="0" cy="0"/>
-          <a:chOff x="0" y="0"/>
-          <a:chExt cx="0" cy="0"/>
-        </a:xfrm>
-      </p:grpSpPr>
-      <p:sp>
-        <p:nvSpPr>
-          <p:cNvPr id="2" name="Slide Image Placeholder 1"/>
-          <p:cNvSpPr>
-            <a:spLocks noGrp="1" noRot="1" noChangeAspect="1"/>
-          </p:cNvSpPr>
-          <p:nvPr>
-            <p:ph type="sldImg"/>
-          </p:nvPr>
-        </p:nvSpPr>
-        <p:spPr/>
-      </p:sp>
-      <p:sp>
-        <p:nvSpPr>
-          <p:cNvPr id="3" name="Notes Placeholder 2"/>
-          <p:cNvSpPr>
-            <a:spLocks noGrp="1"/>
-          </p:cNvSpPr>
-          <p:nvPr>
-            <p:ph type="body" idx="1"/>
-          </p:nvPr>
-        </p:nvSpPr>
-        <p:spPr/>
-        <p:txBody>
-          <a:bodyPr/>
-          <a:lstStyle/>
-          <a:p>
-            <a:r>
-              <a:rPr lang="en-US" dirty="0"/>
-              <a:t>Straight delivery. Name the real reason teams migrate before the polite reasons: AI investment is concentrated on GitHub — Chat, Coding Agent, Autofix, Agentic Code Review, Agent HQ all shipped there first. Be fair to Microsoft here: Azure DevOps is getting AI features too, just on a slower cadence and a thinner feature set today — don't overstate the gap as 'Azure DevOps has none.' The point isn't that Azure DevOps has nothing, it's that the frontier is on GitHub right now. Sets up the Copilot capability list next and the AI-approach payoff in section 3.</a:t>
-            </a:r>
-          </a:p>
-        </p:txBody>
-      </p:sp>
-      <p:sp>
-        <p:nvSpPr>
-          <p:cNvPr id="4" name="Slide Number Placeholder 3"/>
-          <p:cNvSpPr>
-            <a:spLocks noGrp="1"/>
-          </p:cNvSpPr>
-          <p:nvPr>
-            <p:ph type="sldNum" sz="quarter" idx="10"/>
-          </p:nvPr>
-        </p:nvSpPr>
-        <p:spPr/>
-        <p:txBody>
-          <a:bodyPr/>
-          <a:lstStyle/>
-          <a:p>
-            <a:fld id="{F7021451-1387-4CA6-816F-3879F97B5CBC}" type="slidenum">
-              <a:rPr lang="en-US"/>
-              <a:t>5</a:t>
             </a:fld>
             <a:endParaRPr lang="en-US"/>
           </a:p>
@@ -4959,8 +4291,7 @@
           <a:lstStyle/>
           <a:p>
             <a:r>
-              <a:rPr lang="en-US" dirty="0"/>
-              <a:t>STRAIGHT delivery. This is the practical, checklist-voiced part of the section. The four rows are meant to be read as "here is where these hide" — invite the room to mentally add their own fifth row, because every org has one nobody else would guess.</a:t>
+              <a:t>STRAIGHT delivery. This is the practical, checklist-voiced part of the section. The five rows are meant to be read as "here is where these hide" — invite the room to mentally add their own sixth row, because every org has one nobody else would guess.</a:t>
             </a:r>
           </a:p>
         </p:txBody>
@@ -5046,25 +4377,24 @@
           <a:lstStyle/>
           <a:p>
             <a:r>
-              <a:rPr dirty="0"/>
               <a:t>Two registers on this one slide. STRAIGHT for the top two cards — this is real mechanical risk, say it plainly.</a:t>
             </a:r>
           </a:p>
-          <a:p>
-            <a:endParaRPr dirty="0"/>
-          </a:p>
-          <a:p>
-            <a:r>
-              <a:rPr dirty="0"/>
-              <a:t>The precision that matters: an org owner sends the attribution invitation, but nothing is reattributed until the person accepts it. Which means your reclaim rate depends on people reading email — that is its own migration risk, and it usually gets a laugh because everyone knows it is true. Enterprise Managed Users are the exception, where the reclaim completes immediately without an invitation. Git commits are attributed by email and are unaffected either way.</a:t>
-            </a:r>
-          </a:p>
-          <a:p>
-            <a:endParaRPr dirty="0"/>
-          </a:p>
-          <a:p>
-            <a:r>
-              <a:rPr dirty="0"/>
+          <a:p/>
+          <a:p>
+            <a:r>
+              <a:t>The precision that matters: an org owner sends the attribution invitation, but nothing is reattributed until the person accepts it. Which means your reclaim rate depends on people reading email — that is its own migration risk, and it usually gets a laugh because everyone knows it is true. Enterprise Managed Users are the exception, where the reclaim completes immediately without an invitation. Git commits are attributed by email and are unaffected either way. The EMU exception is no longer on the slide, so say it here.</a:t>
+            </a:r>
+          </a:p>
+          <a:p/>
+          <a:p>
+            <a:r>
+              <a:t>Be precise about what sits on a mannequin: pull-request data only — authorship, comments and reviews. Work items don’t migrate at all, so there is no work-item history to reclaim.</a:t>
+            </a:r>
+          </a:p>
+          <a:p/>
+          <a:p>
+            <a:r>
               <a:t>Then shift into DOCUMENTARY VOICE for the on-slide aside at the bottom, read as written, then straight back to conference delivery. The mannequin framing is the callback that ties this section's watering-hole metaphor to identity specifically.</a:t>
             </a:r>
           </a:p>
@@ -5473,23 +4803,25 @@
           <a:lstStyle/>
           <a:p>
             <a:r>
-              <a:t>STRAIGHT delivery, warm. This is the handoff into the single 10-minute final Q&amp;A block — there has been no interim pocket since section 5, so the room has been banking questions. Invite them explicitly rather than just stopping talking.</a:t>
-            </a:r>
-          </a:p>
-          <a:p>
-            <a:endParaRPr/>
-          </a:p>
+              <a:t>STRAIGHT delivery, warm. This is the handoff into the open Q&amp;A, roughly 14 minutes — there has been no interim pocket since section 5, so the room has been banking questions. Invite them explicitly rather than just stopping talking.</a:t>
+            </a:r>
+          </a:p>
+          <a:p/>
           <a:p>
             <a:r>
               <a:t>The QR now lives here instead of on its own slide, which means it stays on screen for the whole Q&amp;A instead of flashing past. Say once what is behind it — GitHub's official Azure Pipelines to Actions guide, gh-ado2gh, gh-actions-importer, the AI analyze / convert / validate prompts, and every note behind this talk, all public — then stop talking about it and take questions. People will scan while somebody else is asking.</a:t>
             </a:r>
           </a:p>
-          <a:p>
-            <a:endParaRPr/>
-          </a:p>
+          <a:p/>
           <a:p>
             <a:r>
               <a:t>If a question needs more than the time you have, point at the code: the long answer is almost certainly already in the repo.</a:t>
+            </a:r>
+          </a:p>
+          <a:p/>
+          <a:p>
+            <a:r>
+              <a:t>The ELM slide is in the appendix, right after this one, if someone asks about live migration or near-zero-downtime cutover.</a:t>
             </a:r>
           </a:p>
         </p:txBody>
@@ -5574,97 +4906,61 @@
           <a:bodyPr/>
           <a:lstStyle/>
           <a:p>
-            <a:pPr marL="0" marR="0" lvl="0" indent="0" algn="l" defTabSz="914400" rtl="0" eaLnBrk="1" fontAlgn="auto" latinLnBrk="0" hangingPunct="1">
-              <a:lnSpc>
-                <a:spcPct val="100000"/>
-              </a:lnSpc>
-              <a:spcBef>
-                <a:spcPts val="0"/>
-              </a:spcBef>
-              <a:spcAft>
-                <a:spcPts val="0"/>
-              </a:spcAft>
-              <a:buClrTx/>
-              <a:buSzTx/>
-              <a:buFontTx/>
-              <a:buNone/>
-              <a:tabLst/>
-              <a:defRPr/>
-            </a:pPr>
-            <a:r>
-              <a:rPr lang="en-US" dirty="0"/>
-              <a:t>Open the slide by getting ahead of the heckle: “Field guides go out of date, and so do capability tables. Everything here has a shelf life measured in sprints.” Then walk four rows, not nine.</a:t>
-            </a:r>
-          </a:p>
-          <a:p>
-            <a:endParaRPr lang="en-US" dirty="0"/>
-          </a:p>
-          <a:p>
-            <a:r>
-              <a:rPr dirty="0"/>
-              <a:t>Speaker emphasis:</a:t>
-            </a:r>
-          </a:p>
-          <a:p>
-            <a:r>
-              <a:rPr dirty="0"/>
+            <a:r>
+              <a:t>Straight delivery. Name the real reason teams migrate before the polite reasons: most of the agentic Copilot work (cloud agent, agentic code review, agentic Autofix, Agent HQ) ships on GitHub first. Be fair to Microsoft: Azure DevOps is gaining AI features too, and Copilot in the IDE works wherever the repository is hosted. The point is not that Azure DevOps has nothing; it is that the frontier depends on where the repository lives.</a:t>
+            </a:r>
+          </a:p>
+          <a:p/>
+          <a:p>
+            <a:r>
+              <a:t>Open the table by getting ahead of the heckle: “Field guides go out of date, and so do capability tables. Everything here has a shelf life measured in sprints.” Then walk the four rows. The last one is the one that matters: the cloud agent needs a GitHub-hosted repository even when it is started from Azure Boards.</a:t>
+            </a:r>
+          </a:p>
+          <a:p/>
+          <a:p>
+            <a:r>
               <a:t>Do not frame this as “GitHub has AI and Azure DevOps does not.” Frame it as a difference in native depth, integration, and repository dependency.</a:t>
             </a:r>
           </a:p>
-          <a:p>
-            <a:endParaRPr dirty="0"/>
-          </a:p>
-          <a:p>
-            <a:r>
-              <a:rPr dirty="0"/>
-              <a:t>The capability gap is real, but it is neither absolute nor static. As of September 21, 2026: Azure DevOps Remote MCP Server is generally available; Copilot Code Review for Azure Repos is in public preview; Copilot </a:t>
-            </a:r>
-            <a:r>
-              <a:rPr dirty="0" err="1"/>
-              <a:t>Autofix</a:t>
-            </a:r>
-            <a:r>
-              <a:rPr dirty="0"/>
-              <a:t> for Azure DevOps remains in limited public preview; and GitHub Copilot cloud agent still requires a GitHub-hosted repository even when initiated from Azure Boards.</a:t>
-            </a:r>
-          </a:p>
-          <a:p>
-            <a:endParaRPr dirty="0"/>
-          </a:p>
-          <a:p>
-            <a:r>
-              <a:rPr dirty="0"/>
-              <a:t>Sources (accessed September 21, 2026): GitHub Docs — About GitHub Copilot cloud agent; Integrating Copilot cloud agent with Azure Boards; About agent management; About </a:t>
-            </a:r>
-            <a:r>
-              <a:rPr dirty="0" err="1"/>
-              <a:t>autofix</a:t>
-            </a:r>
-            <a:r>
-              <a:rPr dirty="0"/>
-              <a:t> for code scanning. Microsoft Learn — Azure DevOps Sprint 278 and Sprint 279 release notes; Azure DevOps MCP Server overview; Copilot code review for Azure Repos; Copilot </a:t>
-            </a:r>
-            <a:r>
-              <a:rPr dirty="0" err="1"/>
-              <a:t>Autofix</a:t>
-            </a:r>
-            <a:r>
-              <a:rPr dirty="0"/>
-              <a:t> for GitHub Advanced Security for Azure DevOps. GitHub Changelog — Copilot code review now runs on an agentic architecture (March 5, 2026).</a:t>
-            </a:r>
-          </a:p>
-          <a:p>
-            <a:endParaRPr dirty="0"/>
-          </a:p>
-          <a:p>
-            <a:r>
-              <a:rPr dirty="0"/>
-              <a:t>* Azure DevOps MCP Server itself is free; normal Azure DevOps pricing and AI-platform usage charges may still apply.</a:t>
-            </a:r>
-          </a:p>
-          <a:p>
-            <a:endParaRPr dirty="0"/>
-          </a:p>
+          <a:p/>
+          <a:p>
+            <a:r>
+              <a:t>CUT FROM THE SLIDE, for Q&amp;A:</a:t>
+            </a:r>
+          </a:p>
+          <a:p>
+            <a:r>
+              <a:t>- Repository-aware chat. GitHub: native workspace and repository context. Azure DevOps: local repo context, plus Azure DevOps service context through MCP.</a:t>
+            </a:r>
+          </a:p>
+          <a:p>
+            <a:r>
+              <a:t>- Multi-agent orchestration. GitHub: a central hub running Copilot, Claude and Codex sessions in parallel. Azure DevOps: no native equivalent; external agents connect through MCP.</a:t>
+            </a:r>
+          </a:p>
+          <a:p>
+            <a:r>
+              <a:t>- Azure DevOps MCP. The Remote MCP Server is GA and the server itself is free; normal Azure DevOps pricing and AI-platform usage charges may still apply. The next slide covers MCP.</a:t>
+            </a:r>
+          </a:p>
+          <a:p>
+            <a:r>
+              <a:t>- Licensing. Paid Copilot for agents and review; GitHub Code Security where Autofix is needed.</a:t>
+            </a:r>
+          </a:p>
+          <a:p/>
+          <a:p>
+            <a:r>
+              <a:t>The capability gap is real, but it is neither absolute nor static. As of September 21, 2026: Azure DevOps Remote MCP Server is generally available; Copilot Code Review for Azure Repos is in public preview; Copilot Autofix for Azure DevOps remains in limited public preview; and GitHub Copilot cloud agent still requires a GitHub-hosted repository even when initiated from Azure Boards.</a:t>
+            </a:r>
+          </a:p>
+          <a:p/>
+          <a:p>
+            <a:r>
+              <a:t>Sources (accessed September 21, 2026): GitHub Docs — About GitHub Copilot cloud agent; Integrating Copilot cloud agent with Azure Boards; About agent management; About autofix for code scanning. Microsoft Learn — Azure DevOps Sprint 278 and Sprint 279 release notes; Azure DevOps MCP Server overview; Copilot code review for Azure Repos; Copilot Autofix for GitHub Advanced Security for Azure DevOps. GitHub Changelog — Copilot code review now runs on an agentic architecture (March 5, 2026).</a:t>
+            </a:r>
+          </a:p>
+          <a:p/>
         </p:txBody>
       </p:sp>
       <p:sp>
@@ -8951,7 +8247,7 @@
                 <a:ea typeface="Calibri" pitchFamily="34" charset="-122"/>
                 <a:cs typeface="Calibri" pitchFamily="34" charset="-120"/>
               </a:rPr>
-              <a:t>Git LFS objects might not come along for free</a:t>
+              <a:t>Git LFS objects don’t migrate — push them separately</a:t>
             </a:r>
             <a:endParaRPr lang="en-US" sz="1600" dirty="0"/>
           </a:p>
@@ -9022,7 +8318,7 @@
                 <a:ea typeface="Calibri" pitchFamily="34" charset="-122"/>
                 <a:cs typeface="Calibri" pitchFamily="34" charset="-120"/>
               </a:rPr>
-              <a:t>Identities carried over as mannequins </a:t>
+              <a:t>Identities carried over as mannequins</a:t>
             </a:r>
             <a:endParaRPr lang="en-US" sz="1600" dirty="0"/>
           </a:p>
@@ -9184,7 +8480,7 @@
                 <a:ea typeface="Cambria" pitchFamily="34" charset="-122"/>
                 <a:cs typeface="Cambria" pitchFamily="34" charset="-120"/>
               </a:rPr>
-              <a:t>Wiki: Travels Clean — Same Git Underneath</a:t>
+              <a:t>Wiki: The Pages Travel, the Structure Doesn’t</a:t>
             </a:r>
             <a:endParaRPr lang="en-US" sz="3200" dirty="0"/>
           </a:p>
@@ -9267,7 +8563,7 @@
                 <a:ea typeface="Calibri" pitchFamily="34" charset="-122"/>
                 <a:cs typeface="Calibri" pitchFamily="34" charset="-120"/>
               </a:rPr>
-              <a:t>Both Azure DevOps wiki and GitHub wiki are Git repos under the hood — clone-and-push is the whole migration. </a:t>
+              <a:t>Both wikis are Git repos under the hood, so the pages copy with a clone and a push. </a:t>
             </a:r>
             <a:r>
               <a:rPr lang="en-US" sz="2000" b="1" dirty="0">
@@ -9278,7 +8574,7 @@
                 <a:ea typeface="Calibri" pitchFamily="34" charset="-122"/>
                 <a:cs typeface="Calibri" pitchFamily="34" charset="-120"/>
               </a:rPr>
-              <a:t>What doesn’t come along: </a:t>
+              <a:t>What doesn’t copy cleanly: </a:t>
             </a:r>
             <a:r>
               <a:rPr lang="en-US" sz="2000" dirty="0">
@@ -9289,7 +8585,7 @@
                 <a:ea typeface="Calibri" pitchFamily="34" charset="-122"/>
                 <a:cs typeface="Calibri" pitchFamily="34" charset="-120"/>
               </a:rPr>
-              <a:t>Azure DevOps’ richer per-page permissions, its tight integration with Boards and pipelines, navigation, embedded content, …</a:t>
+              <a:t>page order and nesting (Azure DevOps’ .order files and folders; GitHub’s wiki page list is flat), and Azure DevOps-only markdown such as [[_TOC_]], ::: mermaid blocks and #123 work-item links.</a:t>
             </a:r>
             <a:endParaRPr lang="en-US" sz="2000" dirty="0"/>
           </a:p>
@@ -9353,7 +8649,7 @@
                 </a:solidFill>
                 <a:latin typeface="Calibri"/>
               </a:rPr>
-              <a:t>Content migration is trivial. Permissions and integrations are the whole conversation.</a:t>
+              <a:t>The pages copy in minutes. The structure and the Azure DevOps-only markdown are the real work.</a:t>
             </a:r>
           </a:p>
         </p:txBody>
@@ -9854,7 +9150,7 @@
                 <a:ea typeface="Calibri" pitchFamily="34" charset="-122"/>
                 <a:cs typeface="Calibri" pitchFamily="34" charset="-120"/>
               </a:rPr>
-              <a:t>Consolidate onto one platform — the right call for teams starting fresh or already small.</a:t>
+              <a:t>Consolidate onto one platform, if your feeds fit: no PyPI, Universal Packages or upstream sources.</a:t>
             </a:r>
             <a:endParaRPr lang="en-US" sz="1400" dirty="0"/>
           </a:p>
@@ -10369,7 +9665,7 @@
         <p:spPr>
           <a:xfrm>
             <a:off x="548640" y="4572000"/>
-            <a:ext cx="11064240" cy="1417320"/>
+            <a:ext cx="11064240" cy="868680"/>
           </a:xfrm>
           <a:prstGeom prst="roundRect">
             <a:avLst>
@@ -10408,7 +9704,7 @@
         <p:spPr>
           <a:xfrm>
             <a:off x="548640" y="4572000"/>
-            <a:ext cx="11064240" cy="1417320"/>
+            <a:ext cx="11064240" cy="868680"/>
           </a:xfrm>
           <a:prstGeom prst="rect">
             <a:avLst/>
@@ -10442,7 +9738,7 @@
                 </a:solidFill>
                 <a:latin typeface="Calibri"/>
               </a:rPr>
-              <a:t>The reframe: neither platform hands you DORA. Stop comparing widgets one-for-one — agree on deployment frequency, lead time, change failure rate and time to restore, then instrument them yourselves. That baseline language outlives the migration either way.</a:t>
+              <a:t>Neither platform hands you DORA. Agree on the four metrics first, then instrument them yourselves. That baseline outlives the migration.</a:t>
             </a:r>
             <a:endParaRPr lang="en-US" sz="1600" dirty="0"/>
           </a:p>
@@ -11082,7 +10378,7 @@
                 <a:ea typeface="Cambria" pitchFamily="34" charset="-122"/>
                 <a:cs typeface="Cambria" pitchFamily="34" charset="-120"/>
               </a:rPr>
-              <a:t>Hybrid – Leave What Makes Sense</a:t>
+              <a:t>Hybrid: Leave What Makes Sense</a:t>
             </a:r>
             <a:endParaRPr lang="en-US" sz="3200" dirty="0"/>
           </a:p>
@@ -11131,7 +10427,7 @@
         <p:spPr>
           <a:xfrm>
             <a:off x="548640" y="2011680"/>
-            <a:ext cx="5349240" cy="2377440"/>
+            <a:ext cx="5349240" cy="3017520"/>
           </a:xfrm>
           <a:prstGeom prst="roundRect">
             <a:avLst>
@@ -11165,7 +10461,7 @@
         <p:spPr>
           <a:xfrm>
             <a:off x="6263640" y="2011680"/>
-            <a:ext cx="5349240" cy="2377440"/>
+            <a:ext cx="5349240" cy="3017520"/>
           </a:xfrm>
           <a:prstGeom prst="roundRect">
             <a:avLst>
@@ -11268,8 +10564,8 @@
         </p:nvSpPr>
         <p:spPr>
           <a:xfrm>
-            <a:off x="822960" y="2907792"/>
-            <a:ext cx="4709160" cy="1298448"/>
+            <a:off x="822960" y="2971800"/>
+            <a:ext cx="4709160" cy="1874519"/>
           </a:xfrm>
           <a:prstGeom prst="rect">
             <a:avLst/>
@@ -11284,14 +10580,14 @@
           <a:p>
             <a:pPr algn="l">
               <a:lnSpc>
-                <a:spcPts val="1750"/>
+                <a:spcPts val="2100"/>
               </a:lnSpc>
               <a:spcAft>
-                <a:spcPts val="400"/>
+                <a:spcPts val="700"/>
               </a:spcAft>
             </a:pPr>
             <a:r>
-              <a:rPr lang="en-US" sz="1450">
+              <a:rPr lang="en-US" sz="1600">
                 <a:solidFill>
                   <a:srgbClr val="2B2B2B"/>
                 </a:solidFill>
@@ -11303,14 +10599,14 @@
           <a:p>
             <a:pPr algn="l">
               <a:lnSpc>
-                <a:spcPts val="1750"/>
+                <a:spcPts val="2100"/>
               </a:lnSpc>
               <a:spcAft>
-                <a:spcPts val="400"/>
+                <a:spcPts val="700"/>
               </a:spcAft>
             </a:pPr>
             <a:r>
-              <a:rPr lang="en-US" sz="1450">
+              <a:rPr lang="en-US" sz="1600">
                 <a:solidFill>
                   <a:srgbClr val="2B2B2B"/>
                 </a:solidFill>
@@ -11322,14 +10618,14 @@
           <a:p>
             <a:pPr algn="l">
               <a:lnSpc>
-                <a:spcPts val="1750"/>
+                <a:spcPts val="2100"/>
               </a:lnSpc>
               <a:spcAft>
-                <a:spcPts val="400"/>
+                <a:spcPts val="700"/>
               </a:spcAft>
             </a:pPr>
             <a:r>
-              <a:rPr lang="en-US" sz="1450">
+              <a:rPr lang="en-US" sz="1600">
                 <a:solidFill>
                   <a:srgbClr val="2B2B2B"/>
                 </a:solidFill>
@@ -11341,14 +10637,14 @@
           <a:p>
             <a:pPr algn="l">
               <a:lnSpc>
-                <a:spcPts val="1750"/>
+                <a:spcPts val="2100"/>
               </a:lnSpc>
               <a:spcAft>
-                <a:spcPts val="400"/>
+                <a:spcPts val="700"/>
               </a:spcAft>
             </a:pPr>
             <a:r>
-              <a:rPr lang="en-US" sz="1450">
+              <a:rPr lang="en-US" sz="1600">
                 <a:solidFill>
                   <a:srgbClr val="2B2B2B"/>
                 </a:solidFill>
@@ -11360,14 +10656,14 @@
           <a:p>
             <a:pPr algn="l">
               <a:lnSpc>
-                <a:spcPts val="1750"/>
+                <a:spcPts val="2100"/>
               </a:lnSpc>
               <a:spcAft>
-                <a:spcPts val="400"/>
+                <a:spcPts val="700"/>
               </a:spcAft>
             </a:pPr>
             <a:r>
-              <a:rPr lang="en-US" sz="1450">
+              <a:rPr lang="en-US" sz="1600">
                 <a:solidFill>
                   <a:srgbClr val="2B2B2B"/>
                 </a:solidFill>
@@ -11460,8 +10756,8 @@
         </p:nvSpPr>
         <p:spPr>
           <a:xfrm>
-            <a:off x="6537960" y="2907792"/>
-            <a:ext cx="4709160" cy="1298448"/>
+            <a:off x="6537960" y="2971800"/>
+            <a:ext cx="4709160" cy="1874519"/>
           </a:xfrm>
           <a:prstGeom prst="rect">
             <a:avLst/>
@@ -11476,14 +10772,14 @@
           <a:p>
             <a:pPr algn="l">
               <a:lnSpc>
-                <a:spcPts val="1750"/>
+                <a:spcPts val="2100"/>
               </a:lnSpc>
               <a:spcAft>
-                <a:spcPts val="400"/>
+                <a:spcPts val="700"/>
               </a:spcAft>
             </a:pPr>
             <a:r>
-              <a:rPr sz="1450">
+              <a:rPr sz="1600">
                 <a:solidFill>
                   <a:srgbClr val="2B2B2B"/>
                 </a:solidFill>
@@ -11495,14 +10791,14 @@
           <a:p>
             <a:pPr algn="l">
               <a:lnSpc>
-                <a:spcPts val="1750"/>
+                <a:spcPts val="2100"/>
               </a:lnSpc>
               <a:spcAft>
-                <a:spcPts val="400"/>
+                <a:spcPts val="700"/>
               </a:spcAft>
             </a:pPr>
             <a:r>
-              <a:rPr sz="1450">
+              <a:rPr sz="1600">
                 <a:solidFill>
                   <a:srgbClr val="2B2B2B"/>
                 </a:solidFill>
@@ -11514,448 +10810,20 @@
           <a:p>
             <a:pPr algn="l">
               <a:lnSpc>
-                <a:spcPts val="1750"/>
+                <a:spcPts val="2100"/>
               </a:lnSpc>
               <a:spcAft>
-                <a:spcPts val="400"/>
+                <a:spcPts val="700"/>
               </a:spcAft>
             </a:pPr>
             <a:r>
-              <a:rPr sz="1450">
+              <a:rPr sz="1600">
                 <a:solidFill>
                   <a:srgbClr val="2B2B2B"/>
                 </a:solidFill>
                 <a:latin typeface="Calibri"/>
               </a:rPr>
               <a:t>•  Azure Pipelines—retained temporarily or deliberately</a:t>
-            </a:r>
-          </a:p>
-        </p:txBody>
-      </p:sp>
-      <p:sp>
-        <p:nvSpPr>
-          <p:cNvPr id="15" name="Rectangle 14"/>
-          <p:cNvSpPr>
-            <a:spLocks/>
-          </p:cNvSpPr>
-          <p:nvPr/>
-        </p:nvSpPr>
-        <p:spPr>
-          <a:xfrm>
-            <a:off x="548640" y="4599432"/>
-            <a:ext cx="11064240" cy="32004"/>
-          </a:xfrm>
-          <a:prstGeom prst="rect">
-            <a:avLst/>
-          </a:prstGeom>
-          <a:solidFill>
-            <a:srgbClr val="C1440E"/>
-          </a:solidFill>
-          <a:ln>
-            <a:noFill/>
-          </a:ln>
-        </p:spPr>
-        <p:txBody>
-          <a:bodyPr rtlCol="0" anchor="ctr"/>
-          <a:lstStyle/>
-          <a:p>
-            <a:pPr algn="ctr"/>
-            <a:endParaRPr lang="en-US"/>
-          </a:p>
-        </p:txBody>
-      </p:sp>
-      <p:sp>
-        <p:nvSpPr>
-          <p:cNvPr id="16" name="TextBox 15"/>
-          <p:cNvSpPr txBox="1"/>
-          <p:nvPr/>
-        </p:nvSpPr>
-        <p:spPr>
-          <a:xfrm>
-            <a:off x="548640" y="4718304"/>
-            <a:ext cx="2286000" cy="292608"/>
-          </a:xfrm>
-          <a:prstGeom prst="rect">
-            <a:avLst/>
-          </a:prstGeom>
-          <a:noFill/>
-        </p:spPr>
-        <p:txBody>
-          <a:bodyPr wrap="square" lIns="0" tIns="0" rIns="0" bIns="0" anchor="t">
-            <a:spAutoFit/>
-          </a:bodyPr>
-          <a:lstStyle/>
-          <a:p>
-            <a:pPr algn="l"/>
-            <a:r>
-              <a:rPr lang="en-US" sz="1800" b="1" i="0">
-                <a:solidFill>
-                  <a:srgbClr val="1F3D2C"/>
-                </a:solidFill>
-                <a:latin typeface="Cambria"/>
-              </a:rPr>
-              <a:t>Integration layer</a:t>
-            </a:r>
-          </a:p>
-        </p:txBody>
-      </p:sp>
-      <p:sp>
-        <p:nvSpPr>
-          <p:cNvPr id="17" name="TextBox 16"/>
-          <p:cNvSpPr txBox="1">
-            <a:spLocks/>
-          </p:cNvSpPr>
-          <p:nvPr/>
-        </p:nvSpPr>
-        <p:spPr>
-          <a:xfrm>
-            <a:off x="2788920" y="4727448"/>
-            <a:ext cx="8823960" cy="256032"/>
-          </a:xfrm>
-          <a:prstGeom prst="rect">
-            <a:avLst/>
-          </a:prstGeom>
-          <a:noFill/>
-        </p:spPr>
-        <p:txBody>
-          <a:bodyPr wrap="square" lIns="0" tIns="0" rIns="0" bIns="0" anchor="t">
-            <a:spAutoFit/>
-          </a:bodyPr>
-          <a:lstStyle/>
-          <a:p>
-            <a:pPr algn="l"/>
-            <a:r>
-              <a:rPr lang="en-US" sz="1400" b="0" i="0">
-                <a:solidFill>
-                  <a:srgbClr val="2B2B2B"/>
-                </a:solidFill>
-                <a:latin typeface="Calibri"/>
-              </a:rPr>
-              <a:t>The connective tissue that keeps planning, code, delivery, and reporting coherent.</a:t>
-            </a:r>
-          </a:p>
-        </p:txBody>
-      </p:sp>
-      <p:sp>
-        <p:nvSpPr>
-          <p:cNvPr id="18" name="TextBox 17"/>
-          <p:cNvSpPr txBox="1">
-            <a:spLocks/>
-          </p:cNvSpPr>
-          <p:nvPr/>
-        </p:nvSpPr>
-        <p:spPr>
-          <a:xfrm>
-            <a:off x="548640" y="5102352"/>
-            <a:ext cx="2011680" cy="512064"/>
-          </a:xfrm>
-          <a:prstGeom prst="rect">
-            <a:avLst/>
-          </a:prstGeom>
-          <a:noFill/>
-        </p:spPr>
-        <p:txBody>
-          <a:bodyPr wrap="square" lIns="0" tIns="0" rIns="0" bIns="0" anchor="ctr">
-            <a:spAutoFit/>
-          </a:bodyPr>
-          <a:lstStyle/>
-          <a:p>
-            <a:pPr algn="ctr">
-              <a:lnSpc>
-                <a:spcPts val="1600"/>
-              </a:lnSpc>
-            </a:pPr>
-            <a:r>
-              <a:rPr lang="en-US" sz="1450" b="1" i="0">
-                <a:solidFill>
-                  <a:srgbClr val="1F3D2C"/>
-                </a:solidFill>
-                <a:latin typeface="Calibri"/>
-              </a:rPr>
-              <a:t>Work-item
-traceability</a:t>
-            </a:r>
-          </a:p>
-        </p:txBody>
-      </p:sp>
-      <p:sp>
-        <p:nvSpPr>
-          <p:cNvPr id="19" name="Rectangle 18"/>
-          <p:cNvSpPr/>
-          <p:nvPr/>
-        </p:nvSpPr>
-        <p:spPr>
-          <a:xfrm>
-            <a:off x="2686050" y="5175504"/>
-            <a:ext cx="10972" cy="365760"/>
-          </a:xfrm>
-          <a:prstGeom prst="rect">
-            <a:avLst/>
-          </a:prstGeom>
-          <a:solidFill>
-            <a:srgbClr val="DDD8CC"/>
-          </a:solidFill>
-          <a:ln>
-            <a:noFill/>
-          </a:ln>
-        </p:spPr>
-        <p:txBody>
-          <a:bodyPr rtlCol="0" anchor="ctr"/>
-          <a:lstStyle/>
-          <a:p>
-            <a:pPr algn="ctr"/>
-            <a:endParaRPr/>
-          </a:p>
-        </p:txBody>
-      </p:sp>
-      <p:sp>
-        <p:nvSpPr>
-          <p:cNvPr id="20" name="TextBox 19"/>
-          <p:cNvSpPr txBox="1"/>
-          <p:nvPr/>
-        </p:nvSpPr>
-        <p:spPr>
-          <a:xfrm>
-            <a:off x="2811780" y="5102352"/>
-            <a:ext cx="2011680" cy="512064"/>
-          </a:xfrm>
-          <a:prstGeom prst="rect">
-            <a:avLst/>
-          </a:prstGeom>
-          <a:noFill/>
-        </p:spPr>
-        <p:txBody>
-          <a:bodyPr wrap="square" lIns="0" tIns="0" rIns="0" bIns="0" anchor="ctr">
-            <a:spAutoFit/>
-          </a:bodyPr>
-          <a:lstStyle/>
-          <a:p>
-            <a:pPr algn="ctr">
-              <a:lnSpc>
-                <a:spcPts val="1600"/>
-              </a:lnSpc>
-            </a:pPr>
-            <a:r>
-              <a:rPr lang="en-US" sz="1450" b="1" i="0">
-                <a:solidFill>
-                  <a:srgbClr val="1F3D2C"/>
-                </a:solidFill>
-                <a:latin typeface="Calibri"/>
-              </a:rPr>
-              <a:t>Commit + pull-request
-links</a:t>
-            </a:r>
-          </a:p>
-        </p:txBody>
-      </p:sp>
-      <p:sp>
-        <p:nvSpPr>
-          <p:cNvPr id="21" name="Rectangle 20"/>
-          <p:cNvSpPr>
-            <a:spLocks/>
-          </p:cNvSpPr>
-          <p:nvPr/>
-        </p:nvSpPr>
-        <p:spPr>
-          <a:xfrm>
-            <a:off x="4949190" y="5175504"/>
-            <a:ext cx="10972" cy="365760"/>
-          </a:xfrm>
-          <a:prstGeom prst="rect">
-            <a:avLst/>
-          </a:prstGeom>
-          <a:solidFill>
-            <a:srgbClr val="DDD8CC"/>
-          </a:solidFill>
-          <a:ln>
-            <a:noFill/>
-          </a:ln>
-        </p:spPr>
-        <p:txBody>
-          <a:bodyPr rtlCol="0" anchor="ctr"/>
-          <a:lstStyle/>
-          <a:p>
-            <a:pPr algn="ctr"/>
-            <a:endParaRPr lang="en-US"/>
-          </a:p>
-        </p:txBody>
-      </p:sp>
-      <p:sp>
-        <p:nvSpPr>
-          <p:cNvPr id="22" name="TextBox 21"/>
-          <p:cNvSpPr txBox="1"/>
-          <p:nvPr/>
-        </p:nvSpPr>
-        <p:spPr>
-          <a:xfrm>
-            <a:off x="5074920" y="5102352"/>
-            <a:ext cx="2011680" cy="512064"/>
-          </a:xfrm>
-          <a:prstGeom prst="rect">
-            <a:avLst/>
-          </a:prstGeom>
-          <a:noFill/>
-        </p:spPr>
-        <p:txBody>
-          <a:bodyPr wrap="square" lIns="0" tIns="0" rIns="0" bIns="0" anchor="ctr">
-            <a:spAutoFit/>
-          </a:bodyPr>
-          <a:lstStyle/>
-          <a:p>
-            <a:pPr algn="ctr">
-              <a:lnSpc>
-                <a:spcPts val="1600"/>
-              </a:lnSpc>
-            </a:pPr>
-            <a:r>
-              <a:rPr lang="en-US" sz="1450" b="1" i="0">
-                <a:solidFill>
-                  <a:srgbClr val="1F3D2C"/>
-                </a:solidFill>
-                <a:latin typeface="Calibri"/>
-              </a:rPr>
-              <a:t>Pipeline
-integration</a:t>
-            </a:r>
-          </a:p>
-        </p:txBody>
-      </p:sp>
-      <p:sp>
-        <p:nvSpPr>
-          <p:cNvPr id="23" name="Rectangle 22"/>
-          <p:cNvSpPr/>
-          <p:nvPr/>
-        </p:nvSpPr>
-        <p:spPr>
-          <a:xfrm>
-            <a:off x="7212330" y="5175504"/>
-            <a:ext cx="10972" cy="365760"/>
-          </a:xfrm>
-          <a:prstGeom prst="rect">
-            <a:avLst/>
-          </a:prstGeom>
-          <a:solidFill>
-            <a:srgbClr val="DDD8CC"/>
-          </a:solidFill>
-          <a:ln>
-            <a:noFill/>
-          </a:ln>
-        </p:spPr>
-        <p:txBody>
-          <a:bodyPr rtlCol="0" anchor="ctr"/>
-          <a:lstStyle/>
-          <a:p>
-            <a:pPr algn="ctr"/>
-            <a:endParaRPr/>
-          </a:p>
-        </p:txBody>
-      </p:sp>
-      <p:sp>
-        <p:nvSpPr>
-          <p:cNvPr id="24" name="TextBox 23"/>
-          <p:cNvSpPr txBox="1"/>
-          <p:nvPr/>
-        </p:nvSpPr>
-        <p:spPr>
-          <a:xfrm>
-            <a:off x="7338060" y="5102352"/>
-            <a:ext cx="2011680" cy="512064"/>
-          </a:xfrm>
-          <a:prstGeom prst="rect">
-            <a:avLst/>
-          </a:prstGeom>
-          <a:noFill/>
-        </p:spPr>
-        <p:txBody>
-          <a:bodyPr wrap="square" lIns="0" tIns="0" rIns="0" bIns="0" anchor="ctr">
-            <a:spAutoFit/>
-          </a:bodyPr>
-          <a:lstStyle/>
-          <a:p>
-            <a:pPr algn="ctr">
-              <a:lnSpc>
-                <a:spcPts val="1600"/>
-              </a:lnSpc>
-            </a:pPr>
-            <a:r>
-              <a:rPr sz="1450" b="1" i="0">
-                <a:solidFill>
-                  <a:srgbClr val="1F3D2C"/>
-                </a:solidFill>
-                <a:latin typeface="Calibri"/>
-              </a:rPr>
-              <a:t>Identity
-mapping</a:t>
-            </a:r>
-          </a:p>
-        </p:txBody>
-      </p:sp>
-      <p:sp>
-        <p:nvSpPr>
-          <p:cNvPr id="25" name="Rectangle 24"/>
-          <p:cNvSpPr/>
-          <p:nvPr/>
-        </p:nvSpPr>
-        <p:spPr>
-          <a:xfrm>
-            <a:off x="9475470" y="5175504"/>
-            <a:ext cx="10972" cy="365760"/>
-          </a:xfrm>
-          <a:prstGeom prst="rect">
-            <a:avLst/>
-          </a:prstGeom>
-          <a:solidFill>
-            <a:srgbClr val="DDD8CC"/>
-          </a:solidFill>
-          <a:ln>
-            <a:noFill/>
-          </a:ln>
-        </p:spPr>
-        <p:txBody>
-          <a:bodyPr rtlCol="0" anchor="ctr"/>
-          <a:lstStyle/>
-          <a:p>
-            <a:pPr algn="ctr"/>
-            <a:endParaRPr/>
-          </a:p>
-        </p:txBody>
-      </p:sp>
-      <p:sp>
-        <p:nvSpPr>
-          <p:cNvPr id="26" name="TextBox 25"/>
-          <p:cNvSpPr txBox="1"/>
-          <p:nvPr/>
-        </p:nvSpPr>
-        <p:spPr>
-          <a:xfrm>
-            <a:off x="9601200" y="5102352"/>
-            <a:ext cx="2011680" cy="512064"/>
-          </a:xfrm>
-          <a:prstGeom prst="rect">
-            <a:avLst/>
-          </a:prstGeom>
-          <a:noFill/>
-        </p:spPr>
-        <p:txBody>
-          <a:bodyPr wrap="square" lIns="0" tIns="0" rIns="0" bIns="0" anchor="ctr">
-            <a:spAutoFit/>
-          </a:bodyPr>
-          <a:lstStyle/>
-          <a:p>
-            <a:pPr algn="ctr">
-              <a:lnSpc>
-                <a:spcPts val="1600"/>
-              </a:lnSpc>
-            </a:pPr>
-            <a:r>
-              <a:rPr sz="1450" b="1" i="0">
-                <a:solidFill>
-                  <a:srgbClr val="1F3D2C"/>
-                </a:solidFill>
-                <a:latin typeface="Calibri"/>
-              </a:rPr>
-              <a:t>Cross-platform
-reporting</a:t>
             </a:r>
           </a:p>
         </p:txBody>
@@ -11974,7 +10842,7 @@
         </p:nvSpPr>
         <p:spPr>
           <a:xfrm>
-            <a:off x="548640" y="5864093"/>
+            <a:off x="548640" y="5349240"/>
             <a:ext cx="11064240" cy="713232"/>
           </a:xfrm>
           <a:prstGeom prst="roundRect">
@@ -12292,7 +11160,7 @@
                 <a:ea typeface="Cambria" pitchFamily="34" charset="-122"/>
                 <a:cs typeface="Cambria" pitchFamily="34" charset="-120"/>
               </a:rPr>
-              <a:t>Crossing the River </a:t>
+              <a:t>Crossing the River</a:t>
             </a:r>
             <a:endParaRPr lang="en-US" sz="4400" dirty="0"/>
           </a:p>
@@ -13179,7 +12047,7 @@
                 </a:solidFill>
                 <a:latin typeface="Cambria"/>
               </a:rPr>
-              <a:t>Migration methods</a:t>
+              <a:t>Migration Methods</a:t>
             </a:r>
             <a:endParaRPr lang="en-US" sz="3200" dirty="0"/>
           </a:p>
@@ -15164,7 +14032,7 @@
                 </a:solidFill>
                 <a:latin typeface="Calibri"/>
               </a:rPr>
-              <a:t>Translation is a design exercise: preserve the original security and lifecycle intent, then validate `if`, `needs`, shell and error handling, approvals, runners and environment behaviour.</a:t>
+              <a:t>Translation is a design exercise: preserve the original security and lifecycle intent, then validate conditions, needs, shell and error handling, approvals, runners and environment behavior.</a:t>
             </a:r>
             <a:endParaRPr lang="en-US" sz="1350" dirty="0"/>
           </a:p>
@@ -16278,7 +15146,7 @@
                 <a:ea typeface="Calibri" pitchFamily="34" charset="-122"/>
                 <a:cs typeface="Calibri" pitchFamily="34" charset="-120"/>
               </a:rPr>
-              <a:t>CROSSING THE RIVER</a:t>
+              <a:t>APPENDIX  ·  CROSSING THE RIVER</a:t>
             </a:r>
             <a:endParaRPr lang="en-US" sz="1500" dirty="0"/>
           </a:p>
@@ -16883,7 +15751,7 @@
                 </a:solidFill>
                 <a:latin typeface="Calibri"/>
               </a:rPr>
-              <a:t>ELM changes the synchronisation and cutover experience — not the boundaries of what must be migrated and validated.</a:t>
+              <a:t>ELM changes the synchronization and cutover experience — not the boundaries of what must be migrated and validated.</a:t>
             </a:r>
           </a:p>
         </p:txBody>
@@ -18817,7 +17685,7 @@
         <p:spPr>
           <a:xfrm>
             <a:off x="548640" y="5120640"/>
-            <a:ext cx="11064240" cy="1417320"/>
+            <a:ext cx="9418320" cy="1417320"/>
           </a:xfrm>
           <a:prstGeom prst="rect">
             <a:avLst/>
@@ -21985,8 +20853,8 @@
         </p:nvSpPr>
         <p:spPr>
           <a:xfrm>
-            <a:off x="1234440" y="804672"/>
-            <a:ext cx="10515600" cy="658368"/>
+            <a:off x="1234440" y="749808"/>
+            <a:ext cx="10515600" cy="594360"/>
           </a:xfrm>
           <a:prstGeom prst="rect">
             <a:avLst/>
@@ -22002,7 +20870,7 @@
               <a:buNone/>
             </a:pPr>
             <a:r>
-              <a:rPr lang="en-US" sz="2800" b="1" dirty="0">
+              <a:rPr lang="en-US" sz="3200" b="1" dirty="0">
                 <a:solidFill>
                   <a:srgbClr val="1F3D2C"/>
                 </a:solidFill>
@@ -22010,7 +20878,7 @@
                 <a:ea typeface="Cambria" pitchFamily="34" charset="-122"/>
                 <a:cs typeface="Cambria" pitchFamily="34" charset="-120"/>
               </a:rPr>
-              <a:t>Boards: Not an Easy Transplant — Where the Gap Is Widest</a:t>
+              <a:t>Boards and Projects Are Two Different Models</a:t>
             </a:r>
             <a:endParaRPr lang="en-US" sz="3200" dirty="0"/>
           </a:p>
@@ -22093,7 +20961,7 @@
                 <a:ea typeface="Calibri" pitchFamily="34" charset="-122"/>
                 <a:cs typeface="Calibri" pitchFamily="34" charset="-120"/>
               </a:rPr>
-              <a:t>Azure Boards is a full enterprise work-tracking system built around a process template. GitHub Projects is a real planning layer built around custom fields and views. This isn’t a feature gap so much as two different models.</a:t>
+              <a:t>Azure Boards is a work-tracking system built around a process template. GitHub Projects is a planning layer built around custom fields and views.</a:t>
             </a:r>
             <a:endParaRPr lang="en-US" sz="1900" dirty="0"/>
           </a:p>
@@ -22493,7 +21361,7 @@
                 <a:ea typeface="Cambria" pitchFamily="34" charset="-122"/>
                 <a:cs typeface="Cambria" pitchFamily="34" charset="-120"/>
               </a:rPr>
-              <a:t>Azure Boards’ Strengths</a:t>
+              <a:t>Each Tool on Its Own Terms</a:t>
             </a:r>
             <a:endParaRPr lang="en-US" sz="3200" dirty="0"/>
           </a:p>
@@ -22508,7 +21376,7 @@
         <p:spPr>
           <a:xfrm>
             <a:off x="548640" y="1645920"/>
-            <a:ext cx="11064240" cy="3566160"/>
+            <a:ext cx="5440680" cy="3566160"/>
           </a:xfrm>
           <a:prstGeom prst="roundRect">
             <a:avLst>
@@ -22542,376 +21410,14 @@
       </p:sp>
       <p:sp>
         <p:nvSpPr>
-          <p:cNvPr id="7" name="Text 4"/>
-          <p:cNvSpPr txBox="1"/>
-          <p:nvPr/>
-        </p:nvSpPr>
-        <p:spPr>
-          <a:xfrm>
-            <a:off x="914400" y="1874520"/>
-            <a:ext cx="10332720" cy="3200400"/>
-          </a:xfrm>
-          <a:prstGeom prst="rect">
-            <a:avLst/>
-          </a:prstGeom>
-          <a:noFill/>
-          <a:ln/>
-        </p:spPr>
-        <p:txBody>
-          <a:bodyPr wrap="square" lIns="0" tIns="0" rIns="0" bIns="0" rtlCol="0" anchor="ctr"/>
-          <a:lstStyle/>
-          <a:p>
-            <a:pPr marL="342900" indent="-342900">
-              <a:lnSpc>
-                <a:spcPct val="115000"/>
-              </a:lnSpc>
-              <a:spcAft>
-                <a:spcPts val="1400"/>
-              </a:spcAft>
-              <a:buSzPct val="100000"/>
-              <a:buChar char="•"/>
-            </a:pPr>
-            <a:r>
-              <a:rPr lang="en-US" sz="1900" dirty="0">
-                <a:solidFill>
-                  <a:srgbClr val="2B2B2B"/>
-                </a:solidFill>
-                <a:latin typeface="Calibri" pitchFamily="34" charset="0"/>
-                <a:ea typeface="Calibri" pitchFamily="34" charset="-122"/>
-                <a:cs typeface="Calibri" pitchFamily="34" charset="-120"/>
-              </a:rPr>
-              <a:t>Hierarchical work items — Epics → Features → Stories → Tasks</a:t>
-            </a:r>
-            <a:endParaRPr lang="en-US" sz="1900" dirty="0"/>
-          </a:p>
-          <a:p>
-            <a:pPr marL="342900" indent="-342900">
-              <a:lnSpc>
-                <a:spcPct val="115000"/>
-              </a:lnSpc>
-              <a:spcAft>
-                <a:spcPts val="1400"/>
-              </a:spcAft>
-              <a:buSzPct val="100000"/>
-              <a:buChar char="•"/>
-            </a:pPr>
-            <a:r>
-              <a:rPr lang="en-US" sz="1900" dirty="0">
-                <a:solidFill>
-                  <a:srgbClr val="2B2B2B"/>
-                </a:solidFill>
-                <a:latin typeface="Calibri" pitchFamily="34" charset="0"/>
-                <a:ea typeface="Calibri" pitchFamily="34" charset="-122"/>
-                <a:cs typeface="Calibri" pitchFamily="34" charset="-120"/>
-              </a:rPr>
-              <a:t>Sprint planning and capacity management, built in</a:t>
-            </a:r>
-            <a:endParaRPr lang="en-US" sz="1900" dirty="0"/>
-          </a:p>
-          <a:p>
-            <a:pPr marL="342900" indent="-342900">
-              <a:lnSpc>
-                <a:spcPct val="115000"/>
-              </a:lnSpc>
-              <a:spcAft>
-                <a:spcPts val="1400"/>
-              </a:spcAft>
-              <a:buSzPct val="100000"/>
-              <a:buChar char="•"/>
-            </a:pPr>
-            <a:r>
-              <a:rPr lang="en-US" sz="1900" dirty="0">
-                <a:solidFill>
-                  <a:srgbClr val="2B2B2B"/>
-                </a:solidFill>
-                <a:latin typeface="Calibri" pitchFamily="34" charset="0"/>
-                <a:ea typeface="Calibri" pitchFamily="34" charset="-122"/>
-                <a:cs typeface="Calibri" pitchFamily="34" charset="-120"/>
-              </a:rPr>
-              <a:t>Delivery Plans for cross-team dependencies</a:t>
-            </a:r>
-            <a:endParaRPr lang="en-US" sz="1900" dirty="0"/>
-          </a:p>
-          <a:p>
-            <a:pPr marL="342900" indent="-342900">
-              <a:lnSpc>
-                <a:spcPct val="115000"/>
-              </a:lnSpc>
-              <a:buSzPct val="100000"/>
-              <a:buChar char="•"/>
-            </a:pPr>
-            <a:r>
-              <a:rPr lang="en-US" sz="1900" dirty="0">
-                <a:solidFill>
-                  <a:srgbClr val="2B2B2B"/>
-                </a:solidFill>
-                <a:latin typeface="Calibri" pitchFamily="34" charset="0"/>
-                <a:ea typeface="Calibri" pitchFamily="34" charset="-122"/>
-                <a:cs typeface="Calibri" pitchFamily="34" charset="-120"/>
-              </a:rPr>
-              <a:t>Boards Analytics plus Power BI reporting</a:t>
-            </a:r>
-            <a:endParaRPr lang="en-US" sz="1900" dirty="0"/>
-          </a:p>
-        </p:txBody>
-      </p:sp>
-      <p:sp>
-        <p:nvSpPr>
-          <p:cNvPr id="8" name="Shape 5"/>
+          <p:cNvPr id="10" name="Shape 3 right"/>
           <p:cNvSpPr/>
           <p:nvPr/>
         </p:nvSpPr>
         <p:spPr>
           <a:xfrm>
-            <a:off x="548640" y="5440680"/>
-            <a:ext cx="11064240" cy="868680"/>
-          </a:xfrm>
-          <a:prstGeom prst="roundRect">
-            <a:avLst>
-              <a:gd name="adj" fmla="val 12632"/>
-            </a:avLst>
-          </a:prstGeom>
-          <a:solidFill>
-            <a:srgbClr val="1F3D2C"/>
-          </a:solidFill>
-          <a:ln w="12700">
-            <a:noFill/>
-            <a:prstDash val="solid"/>
-          </a:ln>
-          <a:effectLst>
-            <a:outerShdw blurRad="76200" dist="25400" dir="5400000" algn="bl" rotWithShape="0">
-              <a:srgbClr val="000000">
-                <a:alpha val="12000"/>
-              </a:srgbClr>
-            </a:outerShdw>
-          </a:effectLst>
-        </p:spPr>
-        <p:txBody>
-          <a:bodyPr/>
-          <a:lstStyle/>
-          <a:p>
-            <a:endParaRPr lang="en-US"/>
-          </a:p>
-        </p:txBody>
-      </p:sp>
-      <p:sp>
-        <p:nvSpPr>
-          <p:cNvPr id="9" name="Text 6"/>
-          <p:cNvSpPr txBox="1"/>
-          <p:nvPr/>
-        </p:nvSpPr>
-        <p:spPr>
-          <a:xfrm>
-            <a:off x="548640" y="5440680"/>
-            <a:ext cx="11064240" cy="868680"/>
-          </a:xfrm>
-          <a:prstGeom prst="rect">
-            <a:avLst/>
-          </a:prstGeom>
-          <a:noFill/>
-          <a:ln/>
-        </p:spPr>
-        <p:txBody>
-          <a:bodyPr wrap="square" lIns="256032" tIns="54864" rIns="256032" bIns="54864" rtlCol="0" anchor="ctr"/>
-          <a:lstStyle/>
-          <a:p>
-            <a:pPr marL="0" indent="0" algn="l">
-              <a:buNone/>
-            </a:pPr>
-            <a:r>
-              <a:rPr sz="1050" b="1" spc="120">
-                <a:solidFill>
-                  <a:srgbClr val="8C6A3F"/>
-                </a:solidFill>
-                <a:latin typeface="Calibri"/>
-              </a:rPr>
-              <a:t>ORGANIZES BY </a:t>
-            </a:r>
-            <a:r>
-              <a:rPr sz="1500" b="0">
-                <a:solidFill>
-                  <a:srgbClr val="F5F5F0"/>
-                </a:solidFill>
-                <a:latin typeface="Calibri"/>
-              </a:rPr>
-              <a:t>Project → Team → Area Path</a:t>
-            </a:r>
-            <a:endParaRPr lang="en-US" sz="1600" dirty="0"/>
-          </a:p>
-        </p:txBody>
-      </p:sp>
-    </p:spTree>
-  </p:cSld>
-  <p:clrMapOvr>
-    <a:masterClrMapping/>
-  </p:clrMapOvr>
-</p:sld>
-</file>
-
-<file path=ppt/slides/slide34.xml><?xml version="1.0" encoding="utf-8"?>
-<p:sld xmlns:a="http://schemas.openxmlformats.org/drawingml/2006/main" xmlns:r="http://schemas.openxmlformats.org/officeDocument/2006/relationships" xmlns:p="http://schemas.openxmlformats.org/presentationml/2006/main">
-  <p:cSld name="Slide 35">
-    <p:bg>
-      <p:bgPr>
-        <a:solidFill>
-          <a:srgbClr val="FFFFFF"/>
-        </a:solidFill>
-        <a:effectLst/>
-      </p:bgPr>
-    </p:bg>
-    <p:spTree>
-      <p:nvGrpSpPr>
-        <p:cNvPr id="1" name=""/>
-        <p:cNvGrpSpPr/>
-        <p:nvPr/>
-      </p:nvGrpSpPr>
-      <p:grpSpPr>
-        <a:xfrm>
-          <a:off x="0" y="0"/>
-          <a:ext cx="0" cy="0"/>
-          <a:chOff x="0" y="0"/>
-          <a:chExt cx="0" cy="0"/>
-        </a:xfrm>
-      </p:grpSpPr>
-      <p:sp>
-        <p:nvSpPr>
-          <p:cNvPr id="2" name="Shape 0"/>
-          <p:cNvSpPr/>
-          <p:nvPr/>
-        </p:nvSpPr>
-        <p:spPr>
-          <a:xfrm>
-            <a:off x="548640" y="457200"/>
-            <a:ext cx="566928" cy="566928"/>
-          </a:xfrm>
-          <a:prstGeom prst="ellipse">
-            <a:avLst/>
-          </a:prstGeom>
-          <a:solidFill>
-            <a:srgbClr val="C1440E"/>
-          </a:solidFill>
-          <a:ln/>
-        </p:spPr>
-        <p:txBody>
-          <a:bodyPr/>
-          <a:lstStyle/>
-          <a:p>
-            <a:endParaRPr lang="en-US"/>
-          </a:p>
-        </p:txBody>
-      </p:sp>
-      <p:pic>
-        <p:nvPicPr>
-          <p:cNvPr id="3" name="Image 0" descr="/home/claude/pptx-build/assets/icons/FaColumns-FFFFFF-200.png"/>
-          <p:cNvPicPr>
-            <a:picLocks noChangeAspect="1"/>
-          </p:cNvPicPr>
-          <p:nvPr/>
-        </p:nvPicPr>
-        <p:blipFill>
-          <a:blip r:embed="rId3"/>
-          <a:stretch>
-            <a:fillRect/>
-          </a:stretch>
-        </p:blipFill>
-        <p:spPr>
-          <a:xfrm>
-            <a:off x="685800" y="594360"/>
-            <a:ext cx="292608" cy="292608"/>
-          </a:xfrm>
-          <a:prstGeom prst="rect">
-            <a:avLst/>
-          </a:prstGeom>
-        </p:spPr>
-      </p:pic>
-      <p:sp>
-        <p:nvSpPr>
-          <p:cNvPr id="4" name="Text 1"/>
-          <p:cNvSpPr txBox="1"/>
-          <p:nvPr/>
-        </p:nvSpPr>
-        <p:spPr>
-          <a:xfrm>
-            <a:off x="1234440" y="420624"/>
-            <a:ext cx="9875520" cy="320040"/>
-          </a:xfrm>
-          <a:prstGeom prst="rect">
-            <a:avLst/>
-          </a:prstGeom>
-          <a:noFill/>
-          <a:ln/>
-        </p:spPr>
-        <p:txBody>
-          <a:bodyPr wrap="square" lIns="0" tIns="0" rIns="0" bIns="0" rtlCol="0" anchor="ctr"/>
-          <a:lstStyle/>
-          <a:p>
-            <a:pPr marL="0" indent="0">
-              <a:buNone/>
-            </a:pPr>
-            <a:r>
-              <a:rPr lang="en-US" sz="1500" b="1" kern="0" spc="200" dirty="0">
-                <a:solidFill>
-                  <a:srgbClr val="C1440E"/>
-                </a:solidFill>
-                <a:latin typeface="Calibri" pitchFamily="34" charset="0"/>
-                <a:ea typeface="Calibri" pitchFamily="34" charset="-122"/>
-                <a:cs typeface="Calibri" pitchFamily="34" charset="-120"/>
-              </a:rPr>
-              <a:t>SPRINT PLANNING IN ITS NATURAL HABITAT</a:t>
-            </a:r>
-            <a:endParaRPr lang="en-US" sz="1500" dirty="0"/>
-          </a:p>
-        </p:txBody>
-      </p:sp>
-      <p:sp>
-        <p:nvSpPr>
-          <p:cNvPr id="5" name="Text 2"/>
-          <p:cNvSpPr txBox="1"/>
-          <p:nvPr/>
-        </p:nvSpPr>
-        <p:spPr>
-          <a:xfrm>
-            <a:off x="1234440" y="749808"/>
-            <a:ext cx="10515600" cy="594360"/>
-          </a:xfrm>
-          <a:prstGeom prst="rect">
-            <a:avLst/>
-          </a:prstGeom>
-          <a:noFill/>
-          <a:ln/>
-        </p:spPr>
-        <p:txBody>
-          <a:bodyPr wrap="square" lIns="0" tIns="0" rIns="0" bIns="0" rtlCol="0" anchor="ctr"/>
-          <a:lstStyle/>
-          <a:p>
-            <a:pPr marL="0" indent="0">
-              <a:buNone/>
-            </a:pPr>
-            <a:r>
-              <a:rPr lang="en-US" sz="3200" b="1" dirty="0">
-                <a:solidFill>
-                  <a:srgbClr val="1F3D2C"/>
-                </a:solidFill>
-                <a:latin typeface="Cambria" pitchFamily="34" charset="0"/>
-                <a:ea typeface="Cambria" pitchFamily="34" charset="-122"/>
-                <a:cs typeface="Cambria" pitchFamily="34" charset="-120"/>
-              </a:rPr>
-              <a:t>GitHub Projects’ Strengths</a:t>
-            </a:r>
-            <a:endParaRPr lang="en-US" sz="3200" dirty="0"/>
-          </a:p>
-        </p:txBody>
-      </p:sp>
-      <p:sp>
-        <p:nvSpPr>
-          <p:cNvPr id="6" name="Shape 3"/>
-          <p:cNvSpPr/>
-          <p:nvPr/>
-        </p:nvSpPr>
-        <p:spPr>
-          <a:xfrm>
-            <a:off x="548640" y="1645920"/>
-            <a:ext cx="11064240" cy="3566160"/>
+            <a:off x="6172200" y="1645920"/>
+            <a:ext cx="5440680" cy="3566160"/>
           </a:xfrm>
           <a:prstGeom prst="roundRect">
             <a:avLst>
@@ -22951,8 +21457,8 @@
         </p:nvSpPr>
         <p:spPr>
           <a:xfrm>
-            <a:off x="914400" y="1874520"/>
-            <a:ext cx="10332720" cy="3200400"/>
+            <a:off x="868680" y="2395728"/>
+            <a:ext cx="4846320" cy="2651760"/>
           </a:xfrm>
           <a:prstGeom prst="rect">
             <a:avLst/>
@@ -22961,7 +21467,7 @@
           <a:ln/>
         </p:spPr>
         <p:txBody>
-          <a:bodyPr wrap="square" lIns="0" tIns="0" rIns="0" bIns="0" rtlCol="0" anchor="ctr"/>
+          <a:bodyPr wrap="square" lIns="0" tIns="0" rIns="0" bIns="0" rtlCol="0" anchor="t"/>
           <a:lstStyle/>
           <a:p>
             <a:pPr marL="342900" indent="-342900">
@@ -22975,7 +21481,7 @@
               <a:buChar char="•"/>
             </a:pPr>
             <a:r>
-              <a:rPr lang="en-US" sz="1900" dirty="0">
+              <a:rPr lang="en-US" sz="1550" dirty="0">
                 <a:solidFill>
                   <a:srgbClr val="2B2B2B"/>
                 </a:solidFill>
@@ -22983,7 +21489,7 @@
                 <a:ea typeface="Calibri" pitchFamily="34" charset="-122"/>
                 <a:cs typeface="Calibri" pitchFamily="34" charset="-120"/>
               </a:rPr>
-              <a:t>Custom fields rather than a fixed process — iteration, single-select, date, number</a:t>
+              <a:t>Hierarchical work items — Epics → Features → Stories → Tasks</a:t>
             </a:r>
             <a:endParaRPr lang="en-US" sz="1900" dirty="0"/>
           </a:p>
@@ -22999,7 +21505,7 @@
               <a:buChar char="•"/>
             </a:pPr>
             <a:r>
-              <a:rPr lang="en-US" sz="1900" dirty="0">
+              <a:rPr lang="en-US" sz="1550" dirty="0">
                 <a:solidFill>
                   <a:srgbClr val="2B2B2B"/>
                 </a:solidFill>
@@ -23007,7 +21513,7 @@
                 <a:ea typeface="Calibri" pitchFamily="34" charset="-122"/>
                 <a:cs typeface="Calibri" pitchFamily="34" charset="-120"/>
               </a:rPr>
-              <a:t>Lives right next to the actual issues and PRs it tracks</a:t>
+              <a:t>Sprint planning and capacity management, built in</a:t>
             </a:r>
             <a:endParaRPr lang="en-US" sz="1900" dirty="0"/>
           </a:p>
@@ -23023,7 +21529,7 @@
               <a:buChar char="•"/>
             </a:pPr>
             <a:r>
-              <a:rPr lang="en-US" sz="1900" dirty="0">
+              <a:rPr lang="en-US" sz="1550" dirty="0">
                 <a:solidFill>
                   <a:srgbClr val="2B2B2B"/>
                 </a:solidFill>
@@ -23031,7 +21537,7 @@
                 <a:ea typeface="Calibri" pitchFamily="34" charset="-122"/>
                 <a:cs typeface="Calibri" pitchFamily="34" charset="-120"/>
               </a:rPr>
-              <a:t>Fast for small-team daily triage — no context switch to a separate system</a:t>
+              <a:t>Delivery Plans for cross-team dependencies</a:t>
             </a:r>
             <a:endParaRPr lang="en-US" sz="1900" dirty="0"/>
           </a:p>
@@ -23044,7 +21550,7 @@
               <a:buChar char="•"/>
             </a:pPr>
             <a:r>
-              <a:rPr lang="en-US" sz="1900" dirty="0">
+              <a:rPr lang="en-US" sz="1550" dirty="0">
                 <a:solidFill>
                   <a:srgbClr val="2B2B2B"/>
                 </a:solidFill>
@@ -23052,7 +21558,7 @@
                 <a:ea typeface="Calibri" pitchFamily="34" charset="-122"/>
                 <a:cs typeface="Calibri" pitchFamily="34" charset="-120"/>
               </a:rPr>
-              <a:t>Sub-issues, issue types and dependencies (all GA); roadmap layout; built-in or Actions-driven automation</a:t>
+              <a:t>Boards Analytics plus Power BI reporting</a:t>
             </a:r>
             <a:endParaRPr lang="en-US" sz="1900" dirty="0"/>
           </a:p>
@@ -23137,76 +21643,22 @@
                 </a:solidFill>
                 <a:latin typeface="Calibri"/>
               </a:rPr>
-              <a:t>Custom fields and iterations — org-level, spanning repositories</a:t>
+              <a:t>Boards: Project → Team → Area Path.   Projects: custom fields and iterations, org-wide across repositories.</a:t>
             </a:r>
             <a:endParaRPr lang="en-US" sz="1600" dirty="0"/>
           </a:p>
         </p:txBody>
       </p:sp>
-    </p:spTree>
-  </p:cSld>
-  <p:clrMapOvr>
-    <a:masterClrMapping/>
-  </p:clrMapOvr>
-</p:sld>
-</file>
-
-<file path=ppt/slides/slide35.xml><?xml version="1.0" encoding="utf-8"?>
-<p:sld xmlns:a="http://schemas.openxmlformats.org/drawingml/2006/main" xmlns:r="http://schemas.openxmlformats.org/officeDocument/2006/relationships" xmlns:p="http://schemas.openxmlformats.org/presentationml/2006/main">
-  <p:cSld>
-    <p:spTree>
-      <p:nvGrpSpPr>
-        <p:cNvPr id="1" name=""/>
-        <p:cNvGrpSpPr/>
-        <p:nvPr/>
-      </p:nvGrpSpPr>
-      <p:grpSpPr>
-        <a:xfrm>
-          <a:off x="0" y="0"/>
-          <a:ext cx="0" cy="0"/>
-          <a:chOff x="0" y="0"/>
-          <a:chExt cx="0" cy="0"/>
-        </a:xfrm>
-      </p:grpSpPr>
-      <p:sp>
-        <p:nvSpPr>
-          <p:cNvPr id="2" name="Shape 0"/>
-          <p:cNvSpPr/>
-          <p:nvPr/>
-        </p:nvSpPr>
-        <p:spPr>
-          <a:xfrm>
-            <a:off x="548640" y="457200"/>
-            <a:ext cx="566928" cy="566928"/>
-          </a:xfrm>
-          <a:prstGeom prst="roundRect">
-            <a:avLst>
-              <a:gd name="adj" fmla="val 16129"/>
-            </a:avLst>
-          </a:prstGeom>
-          <a:solidFill>
-            <a:srgbClr val="C1440E"/>
-          </a:solidFill>
-          <a:ln/>
-        </p:spPr>
-        <p:txBody>
-          <a:bodyPr/>
-          <a:lstStyle/>
-          <a:p>
-            <a:endParaRPr lang="en-US"/>
-          </a:p>
-        </p:txBody>
-      </p:sp>
-      <p:sp>
-        <p:nvSpPr>
-          <p:cNvPr id="3" name="Text 1"/>
+      <p:sp>
+        <p:nvSpPr>
+          <p:cNvPr id="11" name="Header left"/>
           <p:cNvSpPr txBox="1"/>
           <p:nvPr/>
         </p:nvSpPr>
         <p:spPr>
           <a:xfrm>
-            <a:off x="548640" y="457200"/>
-            <a:ext cx="566928" cy="566928"/>
+            <a:off x="868680" y="1828800"/>
+            <a:ext cx="4846320" cy="457200"/>
           </a:xfrm>
           <a:prstGeom prst="rect">
             <a:avLst/>
@@ -23218,200 +21670,144 @@
           <a:bodyPr wrap="square" lIns="0" tIns="0" rIns="0" bIns="0" rtlCol="0" anchor="ctr"/>
           <a:lstStyle/>
           <a:p>
-            <a:pPr marL="0" indent="0" algn="ctr">
+            <a:pPr marL="0" indent="0">
               <a:buNone/>
             </a:pPr>
             <a:r>
-              <a:rPr lang="en-US" sz="2200" b="1" dirty="0">
-                <a:solidFill>
-                  <a:srgbClr val="F5F5F0"/>
+              <a:rPr lang="en-US" sz="2000" b="1" dirty="0">
+                <a:solidFill>
+                  <a:srgbClr val="1F3D2C"/>
+                </a:solidFill>
+                <a:latin typeface="Cambria" pitchFamily="34" charset="0"/>
+                <a:ea typeface="Cambria" pitchFamily="34" charset="-122"/>
+                <a:cs typeface="Cambria" pitchFamily="34" charset="-120"/>
+              </a:rPr>
+              <a:t>Azure Boards</a:t>
+            </a:r>
+            <a:endParaRPr lang="en-US" sz="2000" dirty="0"/>
+          </a:p>
+        </p:txBody>
+      </p:sp>
+      <p:sp>
+        <p:nvSpPr>
+          <p:cNvPr id="12" name="Header right"/>
+          <p:cNvSpPr txBox="1"/>
+          <p:nvPr/>
+        </p:nvSpPr>
+        <p:spPr>
+          <a:xfrm>
+            <a:off x="6492240" y="1828800"/>
+            <a:ext cx="4846320" cy="457200"/>
+          </a:xfrm>
+          <a:prstGeom prst="rect">
+            <a:avLst/>
+          </a:prstGeom>
+          <a:noFill/>
+          <a:ln/>
+        </p:spPr>
+        <p:txBody>
+          <a:bodyPr wrap="square" lIns="0" tIns="0" rIns="0" bIns="0" rtlCol="0" anchor="ctr"/>
+          <a:lstStyle/>
+          <a:p>
+            <a:pPr marL="0" indent="0">
+              <a:buNone/>
+            </a:pPr>
+            <a:r>
+              <a:rPr lang="en-US" sz="2000" b="1" dirty="0">
+                <a:solidFill>
+                  <a:srgbClr val="1F3D2C"/>
+                </a:solidFill>
+                <a:latin typeface="Cambria" pitchFamily="34" charset="0"/>
+                <a:ea typeface="Cambria" pitchFamily="34" charset="-122"/>
+                <a:cs typeface="Cambria" pitchFamily="34" charset="-120"/>
+              </a:rPr>
+              <a:t>GitHub Projects</a:t>
+            </a:r>
+            <a:endParaRPr lang="en-US" sz="2000" dirty="0"/>
+          </a:p>
+        </p:txBody>
+      </p:sp>
+      <p:sp>
+        <p:nvSpPr>
+          <p:cNvPr id="13" name="Text 4 right"/>
+          <p:cNvSpPr txBox="1"/>
+          <p:nvPr/>
+        </p:nvSpPr>
+        <p:spPr>
+          <a:xfrm>
+            <a:off x="6492240" y="2395728"/>
+            <a:ext cx="4846320" cy="2651760"/>
+          </a:xfrm>
+          <a:prstGeom prst="rect">
+            <a:avLst/>
+          </a:prstGeom>
+          <a:noFill/>
+          <a:ln/>
+        </p:spPr>
+        <p:txBody>
+          <a:bodyPr wrap="square" lIns="0" tIns="0" rIns="0" bIns="0" rtlCol="0" anchor="t"/>
+          <a:lstStyle/>
+          <a:p>
+            <a:pPr marL="342900" indent="-342900">
+              <a:lnSpc>
+                <a:spcPct val="115000"/>
+              </a:lnSpc>
+              <a:spcAft>
+                <a:spcPts val="1400"/>
+              </a:spcAft>
+              <a:buSzPct val="100000"/>
+              <a:buChar char="•"/>
+            </a:pPr>
+            <a:r>
+              <a:rPr lang="en-US" sz="1550" dirty="0">
+                <a:solidFill>
+                  <a:srgbClr val="2B2B2B"/>
                 </a:solidFill>
                 <a:latin typeface="Calibri" pitchFamily="34" charset="0"/>
                 <a:ea typeface="Calibri" pitchFamily="34" charset="-122"/>
                 <a:cs typeface="Calibri" pitchFamily="34" charset="-120"/>
               </a:rPr>
-              <a:t>⊞</a:t>
-            </a:r>
-            <a:endParaRPr lang="en-US" sz="2200" dirty="0"/>
-          </a:p>
-        </p:txBody>
-      </p:sp>
-      <p:sp>
-        <p:nvSpPr>
-          <p:cNvPr id="4" name="Text 2"/>
-          <p:cNvSpPr txBox="1"/>
-          <p:nvPr/>
-        </p:nvSpPr>
-        <p:spPr>
-          <a:xfrm>
-            <a:off x="1234440" y="420624"/>
-            <a:ext cx="7315200" cy="320040"/>
-          </a:xfrm>
-          <a:prstGeom prst="rect">
-            <a:avLst/>
-          </a:prstGeom>
-          <a:noFill/>
-          <a:ln/>
-        </p:spPr>
-        <p:txBody>
-          <a:bodyPr wrap="square" lIns="0" tIns="0" rIns="0" bIns="0" rtlCol="0" anchor="ctr"/>
-          <a:lstStyle/>
-          <a:p>
-            <a:pPr marL="0" indent="0">
-              <a:buNone/>
-            </a:pPr>
-            <a:r>
-              <a:rPr lang="en-US" sz="1500" b="1" kern="0" spc="100" dirty="0">
-                <a:solidFill>
-                  <a:srgbClr val="C1440E"/>
+              <a:t>Custom fields instead of a fixed process: iteration, single-select, date, number</a:t>
+            </a:r>
+            <a:endParaRPr lang="en-US" sz="1900" dirty="0"/>
+          </a:p>
+          <a:p>
+            <a:pPr marL="342900" indent="-342900">
+              <a:lnSpc>
+                <a:spcPct val="115000"/>
+              </a:lnSpc>
+              <a:spcAft>
+                <a:spcPts val="1400"/>
+              </a:spcAft>
+              <a:buSzPct val="100000"/>
+              <a:buChar char="•"/>
+            </a:pPr>
+            <a:r>
+              <a:rPr lang="en-US" sz="1550" dirty="0">
+                <a:solidFill>
+                  <a:srgbClr val="2B2B2B"/>
                 </a:solidFill>
                 <a:latin typeface="Calibri" pitchFamily="34" charset="0"/>
                 <a:ea typeface="Calibri" pitchFamily="34" charset="-122"/>
                 <a:cs typeface="Calibri" pitchFamily="34" charset="-120"/>
               </a:rPr>
-              <a:t>PLANNING &amp; TRACKING</a:t>
-            </a:r>
-            <a:endParaRPr lang="en-US" sz="1500" dirty="0"/>
-          </a:p>
-        </p:txBody>
-      </p:sp>
-      <p:sp>
-        <p:nvSpPr>
-          <p:cNvPr id="5" name="Text 3"/>
-          <p:cNvSpPr txBox="1"/>
-          <p:nvPr/>
-        </p:nvSpPr>
-        <p:spPr>
-          <a:xfrm>
-            <a:off x="1234440" y="749808"/>
-            <a:ext cx="10515600" cy="658368"/>
-          </a:xfrm>
-          <a:prstGeom prst="rect">
-            <a:avLst/>
-          </a:prstGeom>
-          <a:noFill/>
-          <a:ln/>
-        </p:spPr>
-        <p:txBody>
-          <a:bodyPr wrap="square" lIns="0" tIns="0" rIns="0" bIns="0" rtlCol="0" anchor="t"/>
-          <a:lstStyle/>
-          <a:p>
-            <a:pPr marL="0" indent="0">
-              <a:buNone/>
-            </a:pPr>
-            <a:r>
-              <a:rPr lang="en-US" sz="3200" b="1" dirty="0">
-                <a:solidFill>
-                  <a:srgbClr val="1F3D2C"/>
-                </a:solidFill>
-                <a:latin typeface="Cambria" pitchFamily="34" charset="0"/>
-                <a:ea typeface="Cambria" pitchFamily="34" charset="-122"/>
-                <a:cs typeface="Cambria" pitchFamily="34" charset="-120"/>
-              </a:rPr>
-              <a:t>Azure Boards vs. GitHub Projects</a:t>
-            </a:r>
-            <a:endParaRPr lang="en-US" sz="3200" dirty="0"/>
-          </a:p>
-        </p:txBody>
-      </p:sp>
-      <p:sp>
-        <p:nvSpPr>
-          <p:cNvPr id="6" name="Shape 4"/>
-          <p:cNvSpPr/>
-          <p:nvPr/>
-        </p:nvSpPr>
-        <p:spPr>
-          <a:xfrm>
-            <a:off x="548640" y="1417320"/>
-            <a:ext cx="5257800" cy="3794760"/>
-          </a:xfrm>
-          <a:prstGeom prst="roundRect">
-            <a:avLst>
-              <a:gd name="adj" fmla="val 1558"/>
-            </a:avLst>
-          </a:prstGeom>
-          <a:solidFill>
-            <a:srgbClr val="F7F6F2"/>
-          </a:solidFill>
-          <a:ln/>
-        </p:spPr>
-        <p:txBody>
-          <a:bodyPr/>
-          <a:lstStyle/>
-          <a:p>
-            <a:endParaRPr lang="en-US"/>
-          </a:p>
-        </p:txBody>
-      </p:sp>
-      <p:sp>
-        <p:nvSpPr>
-          <p:cNvPr id="7" name="Text 5"/>
-          <p:cNvSpPr txBox="1"/>
-          <p:nvPr/>
-        </p:nvSpPr>
-        <p:spPr>
-          <a:xfrm>
-            <a:off x="804672" y="1673352"/>
-            <a:ext cx="4617720" cy="411480"/>
-          </a:xfrm>
-          <a:prstGeom prst="rect">
-            <a:avLst/>
-          </a:prstGeom>
-          <a:noFill/>
-          <a:ln/>
-        </p:spPr>
-        <p:txBody>
-          <a:bodyPr wrap="square" lIns="0" tIns="0" rIns="0" bIns="0" rtlCol="0" anchor="t"/>
-          <a:lstStyle/>
-          <a:p>
-            <a:pPr marL="0" indent="0">
-              <a:buNone/>
-            </a:pPr>
-            <a:r>
-              <a:rPr lang="en-US" sz="1700" b="1" dirty="0">
-                <a:solidFill>
-                  <a:srgbClr val="1F3D2C"/>
-                </a:solidFill>
-                <a:latin typeface="Cambria" pitchFamily="34" charset="0"/>
-                <a:ea typeface="Cambria" pitchFamily="34" charset="-122"/>
-                <a:cs typeface="Cambria" pitchFamily="34" charset="-120"/>
-              </a:rPr>
-              <a:t>What Carries Over</a:t>
-            </a:r>
-            <a:endParaRPr lang="en-US" sz="1700" dirty="0"/>
-          </a:p>
-        </p:txBody>
-      </p:sp>
-      <p:sp>
-        <p:nvSpPr>
-          <p:cNvPr id="8" name="Text 6"/>
-          <p:cNvSpPr txBox="1"/>
-          <p:nvPr/>
-        </p:nvSpPr>
-        <p:spPr>
-          <a:xfrm>
-            <a:off x="868680" y="2057400"/>
-            <a:ext cx="4617720" cy="2926080"/>
-          </a:xfrm>
-          <a:prstGeom prst="rect">
-            <a:avLst/>
-          </a:prstGeom>
-          <a:noFill/>
-          <a:ln/>
-        </p:spPr>
-        <p:txBody>
-          <a:bodyPr wrap="square" lIns="0" tIns="0" rIns="0" bIns="0" rtlCol="0" anchor="t"/>
-          <a:lstStyle/>
-          <a:p>
-            <a:pPr marL="228600" indent="-228600">
+              <a:t>Lives next to the issues and PRs it tracks</a:t>
+            </a:r>
+            <a:endParaRPr lang="en-US" sz="1900" dirty="0"/>
+          </a:p>
+          <a:p>
+            <a:pPr marL="342900" indent="-342900">
+              <a:lnSpc>
+                <a:spcPct val="115000"/>
+              </a:lnSpc>
               <a:spcAft>
-                <a:spcPts val="1000"/>
+                <a:spcPts val="1400"/>
               </a:spcAft>
               <a:buSzPct val="100000"/>
               <a:buChar char="•"/>
             </a:pPr>
             <a:r>
-              <a:rPr lang="en-US" sz="1400" dirty="0">
+              <a:rPr lang="en-US" sz="1550" dirty="0">
                 <a:solidFill>
                   <a:srgbClr val="2B2B2B"/>
                 </a:solidFill>
@@ -23419,20 +21815,23 @@
                 <a:ea typeface="Calibri" pitchFamily="34" charset="-122"/>
                 <a:cs typeface="Calibri" pitchFamily="34" charset="-120"/>
               </a:rPr>
-              <a:t>Kanban board, table, and roadmap views of the same underlying items</a:t>
-            </a:r>
-            <a:endParaRPr lang="en-US" sz="1400" dirty="0"/>
-          </a:p>
-          <a:p>
-            <a:pPr marL="228600" indent="-228600">
+              <a:t>Fast daily triage, with no context switch to a separate system</a:t>
+            </a:r>
+            <a:endParaRPr lang="en-US" sz="1900" dirty="0"/>
+          </a:p>
+          <a:p>
+            <a:pPr marL="342900" indent="-342900">
+              <a:lnSpc>
+                <a:spcPct val="115000"/>
+              </a:lnSpc>
               <a:spcAft>
-                <a:spcPts val="1000"/>
+                <a:spcPts val="1400"/>
               </a:spcAft>
               <a:buSzPct val="100000"/>
               <a:buChar char="•"/>
             </a:pPr>
             <a:r>
-              <a:rPr lang="en-US" sz="1400" dirty="0">
+              <a:rPr lang="en-US" sz="1550" dirty="0">
                 <a:solidFill>
                   <a:srgbClr val="2B2B2B"/>
                 </a:solidFill>
@@ -23440,401 +21839,9 @@
                 <a:ea typeface="Calibri" pitchFamily="34" charset="-122"/>
                 <a:cs typeface="Calibri" pitchFamily="34" charset="-120"/>
               </a:rPr>
-              <a:t>Custom fields — single-select, number, date, iteration — up to 50 per project</a:t>
-            </a:r>
-            <a:endParaRPr lang="en-US" sz="1400" dirty="0"/>
-          </a:p>
-          <a:p>
-            <a:pPr marL="228600" indent="-228600">
-              <a:spcAft>
-                <a:spcPts val="1000"/>
-              </a:spcAft>
-              <a:buSzPct val="100000"/>
-              <a:buChar char="•"/>
-            </a:pPr>
-            <a:r>
-              <a:rPr lang="en-US" sz="1400" dirty="0">
-                <a:solidFill>
-                  <a:srgbClr val="2B2B2B"/>
-                </a:solidFill>
-                <a:latin typeface="Calibri" pitchFamily="34" charset="0"/>
-                <a:ea typeface="Calibri" pitchFamily="34" charset="-122"/>
-                <a:cs typeface="Calibri" pitchFamily="34" charset="-120"/>
-              </a:rPr>
-              <a:t>Drag-and-drop status changes that sync back to the issue or PR</a:t>
-            </a:r>
-            <a:endParaRPr lang="en-US" sz="1400" dirty="0"/>
-          </a:p>
-          <a:p>
-            <a:pPr marL="228600" indent="-228600">
-              <a:spcAft>
-                <a:spcPts val="1000"/>
-              </a:spcAft>
-              <a:buSzPct val="100000"/>
-              <a:buChar char="•"/>
-            </a:pPr>
-            <a:r>
-              <a:rPr lang="en-US" sz="1400" dirty="0">
-                <a:solidFill>
-                  <a:srgbClr val="2B2B2B"/>
-                </a:solidFill>
-                <a:latin typeface="Calibri" pitchFamily="34" charset="0"/>
-                <a:ea typeface="Calibri" pitchFamily="34" charset="-122"/>
-                <a:cs typeface="Calibri" pitchFamily="34" charset="-120"/>
-              </a:rPr>
-              <a:t>Cross-repo, cross-org rollups into one view</a:t>
-            </a:r>
-            <a:endParaRPr lang="en-US" sz="1400" dirty="0"/>
-          </a:p>
-          <a:p>
-            <a:pPr marL="228600" indent="-228600">
-              <a:spcAft>
-                <a:spcPts val="1000"/>
-              </a:spcAft>
-              <a:buSzPct val="100000"/>
-              <a:buChar char="•"/>
-            </a:pPr>
-            <a:r>
-              <a:rPr lang="en-US" sz="1400" dirty="0">
-                <a:solidFill>
-                  <a:srgbClr val="2B2B2B"/>
-                </a:solidFill>
-                <a:latin typeface="Calibri" pitchFamily="34" charset="0"/>
-                <a:ea typeface="Calibri" pitchFamily="34" charset="-122"/>
-                <a:cs typeface="Calibri" pitchFamily="34" charset="-120"/>
-              </a:rPr>
-              <a:t>Automation rules (e.g., auto-close on merge) — same instinct as Boards' state links</a:t>
-            </a:r>
-            <a:endParaRPr lang="en-US" sz="1400" dirty="0"/>
-          </a:p>
-        </p:txBody>
-      </p:sp>
-      <p:sp>
-        <p:nvSpPr>
-          <p:cNvPr id="9" name="Shape 7"/>
-          <p:cNvSpPr/>
-          <p:nvPr/>
-        </p:nvSpPr>
-        <p:spPr>
-          <a:xfrm>
-            <a:off x="6355080" y="1417320"/>
-            <a:ext cx="5257800" cy="3794760"/>
-          </a:xfrm>
-          <a:prstGeom prst="roundRect">
-            <a:avLst>
-              <a:gd name="adj" fmla="val 1558"/>
-            </a:avLst>
-          </a:prstGeom>
-          <a:solidFill>
-            <a:srgbClr val="F7F6F2"/>
-          </a:solidFill>
-          <a:ln/>
-        </p:spPr>
-        <p:txBody>
-          <a:bodyPr/>
-          <a:lstStyle/>
-          <a:p>
-            <a:endParaRPr lang="en-US"/>
-          </a:p>
-        </p:txBody>
-      </p:sp>
-      <p:sp>
-        <p:nvSpPr>
-          <p:cNvPr id="10" name="Text 8"/>
-          <p:cNvSpPr txBox="1"/>
-          <p:nvPr/>
-        </p:nvSpPr>
-        <p:spPr>
-          <a:xfrm>
-            <a:off x="6675120" y="1645920"/>
-            <a:ext cx="4617720" cy="411480"/>
-          </a:xfrm>
-          <a:prstGeom prst="rect">
-            <a:avLst/>
-          </a:prstGeom>
-          <a:noFill/>
-          <a:ln/>
-        </p:spPr>
-        <p:txBody>
-          <a:bodyPr wrap="square" lIns="0" tIns="0" rIns="0" bIns="0" rtlCol="0" anchor="t"/>
-          <a:lstStyle/>
-          <a:p>
-            <a:pPr marL="0" indent="0">
-              <a:buNone/>
-            </a:pPr>
-            <a:r>
-              <a:rPr lang="en-US" sz="1700" b="1" dirty="0">
-                <a:solidFill>
-                  <a:srgbClr val="C1440E"/>
-                </a:solidFill>
-                <a:latin typeface="Cambria" pitchFamily="34" charset="0"/>
-                <a:ea typeface="Cambria" pitchFamily="34" charset="-122"/>
-                <a:cs typeface="Cambria" pitchFamily="34" charset="-120"/>
-              </a:rPr>
-              <a:t>What You Rebuild Yourself</a:t>
-            </a:r>
-            <a:endParaRPr lang="en-US" sz="1700" dirty="0"/>
-          </a:p>
-        </p:txBody>
-      </p:sp>
-      <p:sp>
-        <p:nvSpPr>
-          <p:cNvPr id="11" name="Text 9"/>
-          <p:cNvSpPr txBox="1"/>
-          <p:nvPr/>
-        </p:nvSpPr>
-        <p:spPr>
-          <a:xfrm>
-            <a:off x="6675120" y="2084832"/>
-            <a:ext cx="4617720" cy="2898648"/>
-          </a:xfrm>
-          <a:prstGeom prst="rect">
-            <a:avLst/>
-          </a:prstGeom>
-          <a:noFill/>
-          <a:ln/>
-        </p:spPr>
-        <p:txBody>
-          <a:bodyPr wrap="square" lIns="0" tIns="0" rIns="0" bIns="0" rtlCol="0" anchor="t"/>
-          <a:lstStyle/>
-          <a:p>
-            <a:pPr marL="228600" indent="-228600">
-              <a:spcAft>
-                <a:spcPts val="1000"/>
-              </a:spcAft>
-              <a:buSzPct val="100000"/>
-              <a:buChar char="•"/>
-            </a:pPr>
-            <a:r>
-              <a:rPr lang="en-US" sz="1400" dirty="0">
-                <a:solidFill>
-                  <a:srgbClr val="2B2B2B"/>
-                </a:solidFill>
-                <a:latin typeface="Calibri" pitchFamily="34" charset="0"/>
-                <a:ea typeface="Calibri" pitchFamily="34" charset="-122"/>
-                <a:cs typeface="Calibri" pitchFamily="34" charset="-120"/>
-              </a:rPr>
-              <a:t>No typed work items — everything is an issue, a PR, or a draft issue</a:t>
-            </a:r>
-            <a:endParaRPr lang="en-US" sz="1400" dirty="0"/>
-          </a:p>
-          <a:p>
-            <a:pPr marL="228600" indent="-228600">
-              <a:spcAft>
-                <a:spcPts val="1000"/>
-              </a:spcAft>
-              <a:buSzPct val="100000"/>
-              <a:buChar char="•"/>
-            </a:pPr>
-            <a:r>
-              <a:rPr lang="en-US" sz="1400" dirty="0">
-                <a:solidFill>
-                  <a:srgbClr val="2B2B2B"/>
-                </a:solidFill>
-                <a:latin typeface="Calibri" pitchFamily="34" charset="0"/>
-                <a:ea typeface="Calibri" pitchFamily="34" charset="-122"/>
-                <a:cs typeface="Calibri" pitchFamily="34" charset="-120"/>
-              </a:rPr>
-              <a:t>No process templates (Agile/Scrum/CMMI) — no enforced Epic → Feature → Story</a:t>
-            </a:r>
-            <a:endParaRPr lang="en-US" sz="1400" dirty="0"/>
-          </a:p>
-          <a:p>
-            <a:pPr marL="228600" indent="-228600">
-              <a:spcAft>
-                <a:spcPts val="1000"/>
-              </a:spcAft>
-              <a:buSzPct val="100000"/>
-              <a:buChar char="•"/>
-            </a:pPr>
-            <a:r>
-              <a:rPr lang="en-US" sz="1400" dirty="0">
-                <a:solidFill>
-                  <a:srgbClr val="2B2B2B"/>
-                </a:solidFill>
-                <a:latin typeface="Calibri" pitchFamily="34" charset="0"/>
-                <a:ea typeface="Calibri" pitchFamily="34" charset="-122"/>
-                <a:cs typeface="Calibri" pitchFamily="34" charset="-120"/>
-              </a:rPr>
-              <a:t>No native sprints — "iteration" is a field you configure, with no built-in capacity or burndown</a:t>
-            </a:r>
-            <a:endParaRPr lang="en-US" sz="1400" dirty="0"/>
-          </a:p>
-          <a:p>
-            <a:pPr marL="228600" indent="-228600">
-              <a:spcAft>
-                <a:spcPts val="1000"/>
-              </a:spcAft>
-              <a:buSzPct val="100000"/>
-              <a:buChar char="•"/>
-            </a:pPr>
-            <a:r>
-              <a:rPr lang="en-US" sz="1400" dirty="0">
-                <a:solidFill>
-                  <a:srgbClr val="2B2B2B"/>
-                </a:solidFill>
-                <a:latin typeface="Calibri" pitchFamily="34" charset="0"/>
-                <a:ea typeface="Calibri" pitchFamily="34" charset="-122"/>
-                <a:cs typeface="Calibri" pitchFamily="34" charset="-120"/>
-              </a:rPr>
-              <a:t>Hierarchy is manual, via "Tracks / Tracked by" links, not a structural backlog level</a:t>
-            </a:r>
-            <a:endParaRPr lang="en-US" sz="1400" dirty="0"/>
-          </a:p>
-          <a:p>
-            <a:pPr marL="228600" indent="-228600">
-              <a:spcAft>
-                <a:spcPts val="1000"/>
-              </a:spcAft>
-              <a:buSzPct val="100000"/>
-              <a:buChar char="•"/>
-            </a:pPr>
-            <a:r>
-              <a:rPr lang="en-US" sz="1400" dirty="0">
-                <a:solidFill>
-                  <a:srgbClr val="2B2B2B"/>
-                </a:solidFill>
-                <a:latin typeface="Calibri" pitchFamily="34" charset="0"/>
-                <a:ea typeface="Calibri" pitchFamily="34" charset="-122"/>
-                <a:cs typeface="Calibri" pitchFamily="34" charset="-120"/>
-              </a:rPr>
-              <a:t>Analytics are thin — no Azure DevOps-style dashboards or cumulative flow out of the box</a:t>
-            </a:r>
-            <a:endParaRPr lang="en-US" sz="1400" dirty="0"/>
-          </a:p>
-        </p:txBody>
-      </p:sp>
-      <p:sp>
-        <p:nvSpPr>
-          <p:cNvPr id="12" name="Shape 10"/>
-          <p:cNvSpPr/>
-          <p:nvPr/>
-        </p:nvSpPr>
-        <p:spPr>
-          <a:xfrm>
-            <a:off x="548640" y="5440680"/>
-            <a:ext cx="11064240" cy="868680"/>
-          </a:xfrm>
-          <a:prstGeom prst="roundRect">
-            <a:avLst/>
-          </a:prstGeom>
-          <a:solidFill>
-            <a:srgbClr val="1F3D2C"/>
-          </a:solidFill>
-          <a:ln/>
-        </p:spPr>
-        <p:txBody>
-          <a:bodyPr/>
-          <a:lstStyle/>
-          <a:p>
-            <a:endParaRPr lang="en-US"/>
-          </a:p>
-        </p:txBody>
-      </p:sp>
-      <p:sp>
-        <p:nvSpPr>
-          <p:cNvPr id="13" name="Shape 11"/>
-          <p:cNvSpPr/>
-          <p:nvPr/>
-        </p:nvSpPr>
-        <p:spPr>
-          <a:xfrm>
-            <a:off x="548640" y="5440680"/>
-            <a:ext cx="11064240" cy="868680"/>
-          </a:xfrm>
-          <a:prstGeom prst="roundRect">
-            <a:avLst>
-              <a:gd name="adj" fmla="val 12632"/>
-            </a:avLst>
-          </a:prstGeom>
-          <a:solidFill>
-            <a:srgbClr val="1F3D2C"/>
-          </a:solidFill>
-          <a:ln/>
-        </p:spPr>
-        <p:txBody>
-          <a:bodyPr/>
-          <a:lstStyle/>
-          <a:p>
-            <a:endParaRPr lang="en-US"/>
-          </a:p>
-        </p:txBody>
-      </p:sp>
-      <p:sp>
-        <p:nvSpPr>
-          <p:cNvPr id="14" name="Text 12"/>
-          <p:cNvSpPr txBox="1"/>
-          <p:nvPr/>
-        </p:nvSpPr>
-        <p:spPr>
-          <a:xfrm>
-            <a:off x="804672" y="5440680"/>
-            <a:ext cx="1463040" cy="868680"/>
-          </a:xfrm>
-          <a:prstGeom prst="rect">
-            <a:avLst/>
-          </a:prstGeom>
-          <a:noFill/>
-          <a:ln/>
-        </p:spPr>
-        <p:txBody>
-          <a:bodyPr wrap="square" lIns="0" tIns="0" rIns="0" bIns="0" rtlCol="0" anchor="ctr"/>
-          <a:lstStyle/>
-          <a:p>
-            <a:pPr marL="0" indent="0">
-              <a:buNone/>
-            </a:pPr>
-            <a:r>
-              <a:rPr lang="en-US" sz="1050" b="1" kern="0" spc="100" dirty="0">
-                <a:solidFill>
-                  <a:srgbClr val="8C6A3F"/>
-                </a:solidFill>
-                <a:latin typeface="Calibri" pitchFamily="34" charset="0"/>
-                <a:ea typeface="Calibri" pitchFamily="34" charset="-122"/>
-                <a:cs typeface="Calibri" pitchFamily="34" charset="-120"/>
-              </a:rPr>
-              <a:t>TAKEAWAY</a:t>
-            </a:r>
-            <a:endParaRPr lang="en-US" sz="1050" dirty="0"/>
-          </a:p>
-        </p:txBody>
-      </p:sp>
-      <p:sp>
-        <p:nvSpPr>
-          <p:cNvPr id="15" name="Text 13"/>
-          <p:cNvSpPr txBox="1"/>
-          <p:nvPr/>
-        </p:nvSpPr>
-        <p:spPr>
-          <a:xfrm>
-            <a:off x="2148840" y="5440680"/>
-            <a:ext cx="9189720" cy="868680"/>
-          </a:xfrm>
-          <a:prstGeom prst="rect">
-            <a:avLst/>
-          </a:prstGeom>
-          <a:noFill/>
-          <a:ln/>
-        </p:spPr>
-        <p:txBody>
-          <a:bodyPr wrap="square" lIns="0" tIns="0" rIns="0" bIns="0" rtlCol="0" anchor="ctr"/>
-          <a:lstStyle/>
-          <a:p>
-            <a:pPr marL="0" indent="0">
-              <a:buNone/>
-            </a:pPr>
-            <a:r>
-              <a:rPr lang="en-US" sz="1500" dirty="0">
-                <a:solidFill>
-                  <a:srgbClr val="F5F5F0"/>
-                </a:solidFill>
-                <a:latin typeface="Calibri" pitchFamily="34" charset="0"/>
-                <a:ea typeface="Calibri" pitchFamily="34" charset="-122"/>
-                <a:cs typeface="Calibri" pitchFamily="34" charset="-120"/>
-              </a:rPr>
-              <a:t>Azure Boards ships a data model. GitHub Projects ships a spreadsheet — you build the model yourself.</a:t>
-            </a:r>
-            <a:endParaRPr lang="en-US" sz="1500" dirty="0"/>
+              <a:t>Sub-issues, issue types and dependencies (all GA); roadmap layout; built-in or Actions automation</a:t>
+            </a:r>
+            <a:endParaRPr lang="en-US" sz="1900" dirty="0"/>
           </a:p>
         </p:txBody>
       </p:sp>
@@ -24073,7 +22080,7 @@
               <a:buChar char="•"/>
             </a:pPr>
             <a:r>
-              <a:rPr lang="en-US" sz="1900" dirty="0">
+              <a:rPr lang="en-US" sz="1800" dirty="0">
                 <a:solidFill>
                   <a:srgbClr val="2B2B2B"/>
                 </a:solidFill>
@@ -24081,7 +22088,7 @@
                 <a:ea typeface="Calibri" pitchFamily="34" charset="-122"/>
                 <a:cs typeface="Calibri" pitchFamily="34" charset="-120"/>
               </a:rPr>
-              <a:t>Sprint history</a:t>
+              <a:t>Sprint history and capacity data</a:t>
             </a:r>
             <a:endParaRPr lang="en-US" sz="1900" dirty="0"/>
           </a:p>
@@ -24097,7 +22104,7 @@
               <a:buChar char="•"/>
             </a:pPr>
             <a:r>
-              <a:rPr lang="en-US" sz="1900" dirty="0">
+              <a:rPr lang="en-US" sz="1800" dirty="0">
                 <a:solidFill>
                   <a:srgbClr val="2B2B2B"/>
                 </a:solidFill>
@@ -24105,7 +22112,7 @@
                 <a:ea typeface="Calibri" pitchFamily="34" charset="-122"/>
                 <a:cs typeface="Calibri" pitchFamily="34" charset="-120"/>
               </a:rPr>
-              <a:t>Capacity data</a:t>
+              <a:t>Custom process fields and work-item rules</a:t>
             </a:r>
             <a:endParaRPr lang="en-US" sz="1900" dirty="0"/>
           </a:p>
@@ -24121,7 +22128,7 @@
               <a:buChar char="•"/>
             </a:pPr>
             <a:r>
-              <a:rPr lang="en-US" sz="1900" dirty="0">
+              <a:rPr lang="en-US" sz="1800" dirty="0">
                 <a:solidFill>
                   <a:srgbClr val="2B2B2B"/>
                 </a:solidFill>
@@ -24129,7 +22136,7 @@
                 <a:ea typeface="Calibri" pitchFamily="34" charset="-122"/>
                 <a:cs typeface="Calibri" pitchFamily="34" charset="-120"/>
               </a:rPr>
-              <a:t>Custom process fields</a:t>
+              <a:t>The process template itself: no Agile/Scrum/CMMI equivalent, no built-in capacity or burndown</a:t>
             </a:r>
             <a:endParaRPr lang="en-US" sz="1900" dirty="0"/>
           </a:p>
@@ -24138,11 +22145,14 @@
               <a:lnSpc>
                 <a:spcPct val="120000"/>
               </a:lnSpc>
+              <a:spcAft>
+                <a:spcPts val="1200"/>
+              </a:spcAft>
               <a:buSzPct val="100000"/>
               <a:buChar char="•"/>
             </a:pPr>
             <a:r>
-              <a:rPr lang="en-US" sz="1900" dirty="0">
+              <a:rPr lang="en-US" sz="1800" dirty="0">
                 <a:solidFill>
                   <a:srgbClr val="2B2B2B"/>
                 </a:solidFill>
@@ -24150,7 +22160,7 @@
                 <a:ea typeface="Calibri" pitchFamily="34" charset="-122"/>
                 <a:cs typeface="Calibri" pitchFamily="34" charset="-120"/>
               </a:rPr>
-              <a:t>The whole Project → Team → Area Path hierarchy</a:t>
+              <a:t>The Project → Team → Area Path structure (parent–child links can map to sub-issues)</a:t>
             </a:r>
             <a:endParaRPr lang="en-US" sz="1900" dirty="0"/>
           </a:p>
@@ -24238,7 +22248,7 @@
                 </a:solidFill>
                 <a:latin typeface="Calibri"/>
               </a:rPr>
-              <a:t>`azure-devops-migration-tools` can move work items, but the two data models don’t line up — budget real manual-mapping time. This is a project, not a script you run once.</a:t>
+              <a:t>There’s no first-party tool that moves Azure Boards work items into GitHub Issues, and the data models don’t line up. Budget real manual mapping: this is a project, not a script you run once.</a:t>
             </a:r>
             <a:endParaRPr lang="en-US" sz="1500" dirty="0"/>
           </a:p>
@@ -24840,7 +22850,7 @@
                 <a:ea typeface="Cambria" pitchFamily="34" charset="-122"/>
                 <a:cs typeface="Cambria" pitchFamily="34" charset="-120"/>
               </a:rPr>
-              <a:t>The Hybrid Pattern — the Resolution, Not the Compromise</a:t>
+              <a:t>Recommendation: Connect Boards, Don’t Migrate Work Items</a:t>
             </a:r>
             <a:endParaRPr lang="en-US" sz="3200" dirty="0"/>
           </a:p>
@@ -24879,7 +22889,7 @@
                 <a:ea typeface="Cambria" pitchFamily="34" charset="-122"/>
                 <a:cs typeface="Cambria" pitchFamily="34" charset="-120"/>
               </a:rPr>
-              <a:t>Connect Azure Boards to GitHub repos before touching anything else.</a:t>
+              <a:t>Connect Boards to GitHub; migrate work items only if planning is simple.</a:t>
             </a:r>
             <a:endParaRPr lang="en-US" sz="2100" dirty="0"/>
           </a:p>
@@ -25202,353 +23212,9 @@
                 </a:solidFill>
                 <a:latin typeface="Calibri"/>
               </a:rPr>
-              <a:t>Microsoft designed this as the intended shape. Call it the answer, not the fallback.</a:t>
+              <a:t>Not “Azure Boards forever”: just don’t default to GitHub Issues because the code moved. Where you plan work is a separate decision from where the code lives.</a:t>
             </a:r>
             <a:endParaRPr lang="en-US" sz="1800" dirty="0"/>
-          </a:p>
-        </p:txBody>
-      </p:sp>
-    </p:spTree>
-  </p:cSld>
-  <p:clrMapOvr>
-    <a:masterClrMapping/>
-  </p:clrMapOvr>
-</p:sld>
-</file>
-
-<file path=ppt/slides/slide39.xml><?xml version="1.0" encoding="utf-8"?>
-<p:sld xmlns:a="http://schemas.openxmlformats.org/drawingml/2006/main" xmlns:r="http://schemas.openxmlformats.org/officeDocument/2006/relationships" xmlns:p="http://schemas.openxmlformats.org/presentationml/2006/main">
-  <p:cSld name="Slide 39">
-    <p:bg>
-      <p:bgPr>
-        <a:solidFill>
-          <a:srgbClr val="FFFFFF"/>
-        </a:solidFill>
-        <a:effectLst/>
-      </p:bgPr>
-    </p:bg>
-    <p:spTree>
-      <p:nvGrpSpPr>
-        <p:cNvPr id="1" name=""/>
-        <p:cNvGrpSpPr/>
-        <p:nvPr/>
-      </p:nvGrpSpPr>
-      <p:grpSpPr>
-        <a:xfrm>
-          <a:off x="0" y="0"/>
-          <a:ext cx="0" cy="0"/>
-          <a:chOff x="0" y="0"/>
-          <a:chExt cx="0" cy="0"/>
-        </a:xfrm>
-      </p:grpSpPr>
-      <p:sp>
-        <p:nvSpPr>
-          <p:cNvPr id="2" name="Shape 0"/>
-          <p:cNvSpPr/>
-          <p:nvPr/>
-        </p:nvSpPr>
-        <p:spPr>
-          <a:xfrm>
-            <a:off x="548640" y="457200"/>
-            <a:ext cx="566928" cy="566928"/>
-          </a:xfrm>
-          <a:prstGeom prst="ellipse">
-            <a:avLst/>
-          </a:prstGeom>
-          <a:solidFill>
-            <a:srgbClr val="C1440E"/>
-          </a:solidFill>
-          <a:ln/>
-        </p:spPr>
-        <p:txBody>
-          <a:bodyPr/>
-          <a:lstStyle/>
-          <a:p>
-            <a:endParaRPr lang="en-US"/>
-          </a:p>
-        </p:txBody>
-      </p:sp>
-      <p:pic>
-        <p:nvPicPr>
-          <p:cNvPr id="3" name="Image 0" descr="/home/claude/pptx-build/assets/icons/FaThumbsUp-FFFFFF-200.png"/>
-          <p:cNvPicPr>
-            <a:picLocks noChangeAspect="1"/>
-          </p:cNvPicPr>
-          <p:nvPr/>
-        </p:nvPicPr>
-        <p:blipFill>
-          <a:blip r:embed="rId3"/>
-          <a:stretch>
-            <a:fillRect/>
-          </a:stretch>
-        </p:blipFill>
-        <p:spPr>
-          <a:xfrm>
-            <a:off x="685800" y="594360"/>
-            <a:ext cx="292608" cy="292608"/>
-          </a:xfrm>
-          <a:prstGeom prst="rect">
-            <a:avLst/>
-          </a:prstGeom>
-        </p:spPr>
-      </p:pic>
-      <p:sp>
-        <p:nvSpPr>
-          <p:cNvPr id="4" name="Text 1"/>
-          <p:cNvSpPr txBox="1"/>
-          <p:nvPr/>
-        </p:nvSpPr>
-        <p:spPr>
-          <a:xfrm>
-            <a:off x="1234440" y="420624"/>
-            <a:ext cx="9875520" cy="320040"/>
-          </a:xfrm>
-          <a:prstGeom prst="rect">
-            <a:avLst/>
-          </a:prstGeom>
-          <a:noFill/>
-          <a:ln/>
-        </p:spPr>
-        <p:txBody>
-          <a:bodyPr wrap="square" lIns="0" tIns="0" rIns="0" bIns="0" rtlCol="0" anchor="ctr"/>
-          <a:lstStyle/>
-          <a:p>
-            <a:pPr marL="0" indent="0">
-              <a:buNone/>
-            </a:pPr>
-            <a:r>
-              <a:rPr lang="en-US" sz="1500" b="1" kern="0" spc="200" dirty="0">
-                <a:solidFill>
-                  <a:srgbClr val="C1440E"/>
-                </a:solidFill>
-                <a:latin typeface="Calibri" pitchFamily="34" charset="0"/>
-                <a:ea typeface="Calibri" pitchFamily="34" charset="-122"/>
-                <a:cs typeface="Calibri" pitchFamily="34" charset="-120"/>
-              </a:rPr>
-              <a:t>SPRINT PLANNING IN ITS NATURAL HABITAT</a:t>
-            </a:r>
-            <a:endParaRPr lang="en-US" sz="1500" dirty="0"/>
-          </a:p>
-        </p:txBody>
-      </p:sp>
-      <p:sp>
-        <p:nvSpPr>
-          <p:cNvPr id="5" name="Text 2"/>
-          <p:cNvSpPr txBox="1"/>
-          <p:nvPr/>
-        </p:nvSpPr>
-        <p:spPr>
-          <a:xfrm>
-            <a:off x="1234440" y="804672"/>
-            <a:ext cx="10515600" cy="658368"/>
-          </a:xfrm>
-          <a:prstGeom prst="rect">
-            <a:avLst/>
-          </a:prstGeom>
-          <a:noFill/>
-          <a:ln/>
-        </p:spPr>
-        <p:txBody>
-          <a:bodyPr wrap="square" lIns="0" tIns="0" rIns="0" bIns="0" rtlCol="0" anchor="t"/>
-          <a:lstStyle/>
-          <a:p>
-            <a:pPr marL="0" indent="0">
-              <a:buNone/>
-            </a:pPr>
-            <a:r>
-              <a:rPr lang="en-US" sz="2800" b="1" dirty="0">
-                <a:solidFill>
-                  <a:srgbClr val="1F3D2C"/>
-                </a:solidFill>
-                <a:latin typeface="Cambria" pitchFamily="34" charset="0"/>
-                <a:ea typeface="Cambria" pitchFamily="34" charset="-122"/>
-                <a:cs typeface="Cambria" pitchFamily="34" charset="-120"/>
-              </a:rPr>
-              <a:t>Recommendation: Connect Boards, Don’t Migrate Work Items</a:t>
-            </a:r>
-            <a:endParaRPr lang="en-US" sz="3200" dirty="0"/>
-          </a:p>
-        </p:txBody>
-      </p:sp>
-      <p:sp>
-        <p:nvSpPr>
-          <p:cNvPr id="6" name="Shape 3"/>
-          <p:cNvSpPr/>
-          <p:nvPr/>
-        </p:nvSpPr>
-        <p:spPr>
-          <a:xfrm>
-            <a:off x="548640" y="1691640"/>
-            <a:ext cx="11064240" cy="2286000"/>
-          </a:xfrm>
-          <a:prstGeom prst="roundRect">
-            <a:avLst>
-              <a:gd name="adj" fmla="val 4800"/>
-            </a:avLst>
-          </a:prstGeom>
-          <a:solidFill>
-            <a:srgbClr val="F7F6F2"/>
-          </a:solidFill>
-          <a:ln w="12700">
-            <a:solidFill>
-              <a:srgbClr val="DDD8CC"/>
-            </a:solidFill>
-            <a:prstDash val="solid"/>
-          </a:ln>
-          <a:effectLst>
-            <a:outerShdw blurRad="76200" dist="25400" dir="5400000" algn="bl" rotWithShape="0">
-              <a:srgbClr val="000000">
-                <a:alpha val="12000"/>
-              </a:srgbClr>
-            </a:outerShdw>
-          </a:effectLst>
-        </p:spPr>
-        <p:txBody>
-          <a:bodyPr/>
-          <a:lstStyle/>
-          <a:p>
-            <a:endParaRPr lang="en-US"/>
-          </a:p>
-        </p:txBody>
-      </p:sp>
-      <p:sp>
-        <p:nvSpPr>
-          <p:cNvPr id="7" name="Text 4"/>
-          <p:cNvSpPr txBox="1"/>
-          <p:nvPr/>
-        </p:nvSpPr>
-        <p:spPr>
-          <a:xfrm>
-            <a:off x="822960" y="1920240"/>
-            <a:ext cx="10332720" cy="1920240"/>
-          </a:xfrm>
-          <a:prstGeom prst="rect">
-            <a:avLst/>
-          </a:prstGeom>
-          <a:noFill/>
-          <a:ln/>
-        </p:spPr>
-        <p:txBody>
-          <a:bodyPr wrap="square" lIns="0" tIns="0" rIns="0" bIns="0" rtlCol="0" anchor="ctr"/>
-          <a:lstStyle/>
-          <a:p>
-            <a:pPr marL="0" indent="0">
-              <a:lnSpc>
-                <a:spcPct val="125000"/>
-              </a:lnSpc>
-              <a:buNone/>
-            </a:pPr>
-            <a:r>
-              <a:rPr lang="en-US" sz="1900" b="1" dirty="0">
-                <a:solidFill>
-                  <a:srgbClr val="2B2B2B"/>
-                </a:solidFill>
-                <a:latin typeface="Calibri" pitchFamily="34" charset="0"/>
-                <a:ea typeface="Calibri" pitchFamily="34" charset="-122"/>
-                <a:cs typeface="Calibri" pitchFamily="34" charset="-120"/>
-              </a:rPr>
-              <a:t>Don’t migrate to GitHub Issues unless your PM needs are genuinely simple. </a:t>
-            </a:r>
-            <a:r>
-              <a:rPr lang="en-US" sz="1900" dirty="0">
-                <a:solidFill>
-                  <a:srgbClr val="2B2B2B"/>
-                </a:solidFill>
-                <a:latin typeface="Calibri" pitchFamily="34" charset="0"/>
-                <a:ea typeface="Calibri" pitchFamily="34" charset="-122"/>
-                <a:cs typeface="Calibri" pitchFamily="34" charset="-120"/>
-              </a:rPr>
-              <a:t>For most teams past a handful of people, the hierarchy, capacity planning, and reporting Azure Boards already gives you are worth keeping — connect it instead of replacing it.</a:t>
-            </a:r>
-            <a:endParaRPr lang="en-US" sz="1900" dirty="0"/>
-          </a:p>
-        </p:txBody>
-      </p:sp>
-      <p:sp>
-        <p:nvSpPr>
-          <p:cNvPr id="8" name="Shape 5"/>
-          <p:cNvSpPr/>
-          <p:nvPr/>
-        </p:nvSpPr>
-        <p:spPr>
-          <a:xfrm>
-            <a:off x="548640" y="4206240"/>
-            <a:ext cx="11064240" cy="1691640"/>
-          </a:xfrm>
-          <a:prstGeom prst="roundRect">
-            <a:avLst>
-              <a:gd name="adj" fmla="val 12632"/>
-            </a:avLst>
-          </a:prstGeom>
-          <a:solidFill>
-            <a:srgbClr val="F7F6F2"/>
-          </a:solidFill>
-          <a:ln w="12700">
-            <a:noFill/>
-            <a:prstDash val="solid"/>
-          </a:ln>
-          <a:effectLst>
-            <a:outerShdw blurRad="76200" dist="25400" dir="5400000" algn="bl" rotWithShape="0">
-              <a:srgbClr val="000000">
-                <a:alpha val="12000"/>
-              </a:srgbClr>
-            </a:outerShdw>
-          </a:effectLst>
-        </p:spPr>
-        <p:txBody>
-          <a:bodyPr/>
-          <a:lstStyle/>
-          <a:p>
-            <a:endParaRPr lang="en-US"/>
-          </a:p>
-        </p:txBody>
-      </p:sp>
-      <p:sp>
-        <p:nvSpPr>
-          <p:cNvPr id="9" name="Text 6"/>
-          <p:cNvSpPr txBox="1"/>
-          <p:nvPr/>
-        </p:nvSpPr>
-        <p:spPr>
-          <a:xfrm>
-            <a:off x="548640" y="4206240"/>
-            <a:ext cx="11064240" cy="1691640"/>
-          </a:xfrm>
-          <a:prstGeom prst="rect">
-            <a:avLst/>
-          </a:prstGeom>
-          <a:noFill/>
-          <a:ln/>
-        </p:spPr>
-        <p:txBody>
-          <a:bodyPr wrap="square" lIns="256032" tIns="54864" rIns="256032" bIns="54864" rtlCol="0" anchor="ctr"/>
-          <a:lstStyle/>
-          <a:p>
-            <a:pPr marL="0" indent="0" algn="l">
-              <a:lnSpc>
-                <a:spcPct val="115000"/>
-              </a:lnSpc>
-              <a:buNone/>
-            </a:pPr>
-            <a:r>
-              <a:rPr sz="1050" b="1" spc="120">
-                <a:solidFill>
-                  <a:srgbClr val="C1440E"/>
-                </a:solidFill>
-                <a:latin typeface="Calibri"/>
-              </a:rPr>
-              <a:t>CAVEAT </a:t>
-            </a:r>
-            <a:r>
-              <a:rPr sz="1500" b="0">
-                <a:solidFill>
-                  <a:srgbClr val="2B2B2B"/>
-                </a:solidFill>
-                <a:latin typeface="Calibri"/>
-              </a:rPr>
-              <a:t>This isn’t “Azure Boards forever.” It’s “don’t default to GitHub Issues just because the code moved.” Where you plan work is a separate decision from where it lives.</a:t>
-            </a:r>
-            <a:endParaRPr lang="en-US" sz="1500" dirty="0"/>
           </a:p>
         </p:txBody>
       </p:sp>
@@ -25710,7 +23376,7 @@
                 <a:ea typeface="Cambria" pitchFamily="34" charset="-122"/>
                 <a:cs typeface="Cambria" pitchFamily="34" charset="-120"/>
               </a:rPr>
-              <a:t>Why Leave the Herd </a:t>
+              <a:t>Why Leave the Herd</a:t>
             </a:r>
             <a:endParaRPr lang="en-US" sz="4400" dirty="0"/>
           </a:p>
@@ -26368,7 +24034,7 @@
                 <a:ea typeface="Calibri" pitchFamily="34" charset="-122"/>
                 <a:cs typeface="Calibri" pitchFamily="34" charset="-120"/>
               </a:rPr>
-              <a:t>Migrations that fail, fail on change management, not mechanics. </a:t>
+              <a:t>Most migrations that fail don’t fail in the converter. </a:t>
             </a:r>
             <a:r>
               <a:rPr lang="en-US" sz="2000" dirty="0">
@@ -26379,7 +24045,7 @@
                 <a:ea typeface="Calibri" pitchFamily="34" charset="-122"/>
                 <a:cs typeface="Calibri" pitchFamily="34" charset="-120"/>
               </a:rPr>
-              <a:t>The tooling almost always works. What breaks is everything around it.</a:t>
+              <a:t>The tooling almost always works. What breaks is everything around it, starting with the people.</a:t>
             </a:r>
             <a:endParaRPr lang="en-US" sz="2000" dirty="0"/>
           </a:p>
@@ -26781,7 +24447,7 @@
                 <a:ea typeface="Cambria" pitchFamily="34" charset="-122"/>
                 <a:cs typeface="Cambria" pitchFamily="34" charset="-120"/>
               </a:rPr>
-              <a:t>The Disciplined Selection Process</a:t>
+              <a:t>Choose With Evidence, Then Pilot on Defaults</a:t>
             </a:r>
             <a:endParaRPr lang="en-US" sz="3200" dirty="0"/>
           </a:p>
@@ -26795,8 +24461,8 @@
         </p:nvSpPr>
         <p:spPr>
           <a:xfrm>
-            <a:off x="548640" y="1645920"/>
-            <a:ext cx="11064240" cy="786384"/>
+            <a:off x="548640" y="1554480"/>
+            <a:ext cx="11064240" cy="713232"/>
           </a:xfrm>
           <a:prstGeom prst="roundRect">
             <a:avLst>
@@ -26836,7 +24502,7 @@
         </p:nvSpPr>
         <p:spPr>
           <a:xfrm>
-            <a:off x="777240" y="1746504"/>
+            <a:off x="777240" y="1618488"/>
             <a:ext cx="585216" cy="585216"/>
           </a:xfrm>
           <a:prstGeom prst="ellipse">
@@ -26863,7 +24529,7 @@
         </p:nvSpPr>
         <p:spPr>
           <a:xfrm>
-            <a:off x="777240" y="1746504"/>
+            <a:off x="777240" y="1618488"/>
             <a:ext cx="585216" cy="585216"/>
           </a:xfrm>
           <a:prstGeom prst="rect">
@@ -26902,7 +24568,7 @@
         </p:nvSpPr>
         <p:spPr>
           <a:xfrm>
-            <a:off x="1554480" y="1719072"/>
+            <a:off x="1554480" y="1591056"/>
             <a:ext cx="3200400" cy="640080"/>
           </a:xfrm>
           <a:prstGeom prst="rect">
@@ -26941,7 +24607,7 @@
         </p:nvSpPr>
         <p:spPr>
           <a:xfrm>
-            <a:off x="4892040" y="1719072"/>
+            <a:off x="4892040" y="1591056"/>
             <a:ext cx="6492240" cy="640080"/>
           </a:xfrm>
           <a:prstGeom prst="rect">
@@ -26966,7 +24632,7 @@
                 <a:ea typeface="Calibri" pitchFamily="34" charset="-122"/>
                 <a:cs typeface="Calibri" pitchFamily="34" charset="-120"/>
               </a:rPr>
-              <a:t>What the tool has to do, not what would be nice.</a:t>
+              <a:t>What each option has to do, not what would be nice.</a:t>
             </a:r>
             <a:endParaRPr lang="en-US" sz="1350" dirty="0"/>
           </a:p>
@@ -26980,8 +24646,8 @@
         </p:nvSpPr>
         <p:spPr>
           <a:xfrm>
-            <a:off x="548640" y="2487168"/>
-            <a:ext cx="11064240" cy="786384"/>
+            <a:off x="548640" y="2359152"/>
+            <a:ext cx="11064240" cy="713232"/>
           </a:xfrm>
           <a:prstGeom prst="roundRect">
             <a:avLst>
@@ -27021,7 +24687,7 @@
         </p:nvSpPr>
         <p:spPr>
           <a:xfrm>
-            <a:off x="777240" y="2587752"/>
+            <a:off x="777240" y="2423160"/>
             <a:ext cx="585216" cy="585216"/>
           </a:xfrm>
           <a:prstGeom prst="ellipse">
@@ -27048,7 +24714,7 @@
         </p:nvSpPr>
         <p:spPr>
           <a:xfrm>
-            <a:off x="777240" y="2587752"/>
+            <a:off x="777240" y="2423160"/>
             <a:ext cx="585216" cy="585216"/>
           </a:xfrm>
           <a:prstGeom prst="rect">
@@ -27087,7 +24753,7 @@
         </p:nvSpPr>
         <p:spPr>
           <a:xfrm>
-            <a:off x="1554480" y="2560320"/>
+            <a:off x="1554480" y="2395728"/>
             <a:ext cx="3200400" cy="640080"/>
           </a:xfrm>
           <a:prstGeom prst="rect">
@@ -27126,7 +24792,7 @@
         </p:nvSpPr>
         <p:spPr>
           <a:xfrm>
-            <a:off x="4892040" y="2560320"/>
+            <a:off x="4892040" y="2395728"/>
             <a:ext cx="6492240" cy="640080"/>
           </a:xfrm>
           <a:prstGeom prst="rect">
@@ -27165,8 +24831,8 @@
         </p:nvSpPr>
         <p:spPr>
           <a:xfrm>
-            <a:off x="548640" y="3328416"/>
-            <a:ext cx="11064240" cy="786384"/>
+            <a:off x="548640" y="3163824"/>
+            <a:ext cx="11064240" cy="713232"/>
           </a:xfrm>
           <a:prstGeom prst="roundRect">
             <a:avLst>
@@ -27206,7 +24872,7 @@
         </p:nvSpPr>
         <p:spPr>
           <a:xfrm>
-            <a:off x="777240" y="3429000"/>
+            <a:off x="777240" y="3227832"/>
             <a:ext cx="585216" cy="585216"/>
           </a:xfrm>
           <a:prstGeom prst="ellipse">
@@ -27233,7 +24899,7 @@
         </p:nvSpPr>
         <p:spPr>
           <a:xfrm>
-            <a:off x="777240" y="3429000"/>
+            <a:off x="777240" y="3227832"/>
             <a:ext cx="585216" cy="585216"/>
           </a:xfrm>
           <a:prstGeom prst="rect">
@@ -27272,7 +24938,7 @@
         </p:nvSpPr>
         <p:spPr>
           <a:xfrm>
-            <a:off x="1554480" y="3401568"/>
+            <a:off x="1554480" y="3200400"/>
             <a:ext cx="3200400" cy="640080"/>
           </a:xfrm>
           <a:prstGeom prst="rect">
@@ -27311,7 +24977,7 @@
         </p:nvSpPr>
         <p:spPr>
           <a:xfrm>
-            <a:off x="4892040" y="3401568"/>
+            <a:off x="4892040" y="3200400"/>
             <a:ext cx="6492240" cy="640080"/>
           </a:xfrm>
           <a:prstGeom prst="rect">
@@ -27336,7 +25002,7 @@
                 <a:ea typeface="Calibri" pitchFamily="34" charset="-122"/>
                 <a:cs typeface="Calibri" pitchFamily="34" charset="-120"/>
               </a:rPr>
-              <a:t>In each candidate tool — a real slice of real work, not a vendor demo.</a:t>
+              <a:t>In each candidate option: a real slice of real work, not a vendor demo.</a:t>
             </a:r>
             <a:endParaRPr lang="en-US" sz="1350" dirty="0"/>
           </a:p>
@@ -27350,8 +25016,8 @@
         </p:nvSpPr>
         <p:spPr>
           <a:xfrm>
-            <a:off x="548640" y="4169664"/>
-            <a:ext cx="11064240" cy="786384"/>
+            <a:off x="548640" y="3968496"/>
+            <a:ext cx="11064240" cy="713232"/>
           </a:xfrm>
           <a:prstGeom prst="roundRect">
             <a:avLst>
@@ -27391,7 +25057,7 @@
         </p:nvSpPr>
         <p:spPr>
           <a:xfrm>
-            <a:off x="777240" y="4270248"/>
+            <a:off x="777240" y="4032504"/>
             <a:ext cx="585216" cy="585216"/>
           </a:xfrm>
           <a:prstGeom prst="ellipse">
@@ -27418,7 +25084,7 @@
         </p:nvSpPr>
         <p:spPr>
           <a:xfrm>
-            <a:off x="777240" y="4270248"/>
+            <a:off x="777240" y="4032504"/>
             <a:ext cx="585216" cy="585216"/>
           </a:xfrm>
           <a:prstGeom prst="rect">
@@ -27457,7 +25123,7 @@
         </p:nvSpPr>
         <p:spPr>
           <a:xfrm>
-            <a:off x="1554480" y="4242816"/>
+            <a:off x="1554480" y="4005072"/>
             <a:ext cx="3200400" cy="640080"/>
           </a:xfrm>
           <a:prstGeom prst="rect">
@@ -27496,7 +25162,7 @@
         </p:nvSpPr>
         <p:spPr>
           <a:xfrm>
-            <a:off x="4892040" y="4242816"/>
+            <a:off x="4892040" y="4005072"/>
             <a:ext cx="6492240" cy="640080"/>
           </a:xfrm>
           <a:prstGeom prst="rect">
@@ -27535,8 +25201,8 @@
         </p:nvSpPr>
         <p:spPr>
           <a:xfrm>
-            <a:off x="548640" y="5010912"/>
-            <a:ext cx="11064240" cy="786384"/>
+            <a:off x="548640" y="4773168"/>
+            <a:ext cx="11064240" cy="713232"/>
           </a:xfrm>
           <a:prstGeom prst="roundRect">
             <a:avLst>
@@ -27576,7 +25242,7 @@
         </p:nvSpPr>
         <p:spPr>
           <a:xfrm>
-            <a:off x="777240" y="5111496"/>
+            <a:off x="777240" y="4837176"/>
             <a:ext cx="585216" cy="585216"/>
           </a:xfrm>
           <a:prstGeom prst="ellipse">
@@ -27603,7 +25269,7 @@
         </p:nvSpPr>
         <p:spPr>
           <a:xfrm>
-            <a:off x="777240" y="5111496"/>
+            <a:off x="777240" y="4837176"/>
             <a:ext cx="585216" cy="585216"/>
           </a:xfrm>
           <a:prstGeom prst="rect">
@@ -27642,7 +25308,7 @@
         </p:nvSpPr>
         <p:spPr>
           <a:xfrm>
-            <a:off x="1554480" y="5084064"/>
+            <a:off x="1554480" y="4809744"/>
             <a:ext cx="3200400" cy="640080"/>
           </a:xfrm>
           <a:prstGeom prst="rect">
@@ -27667,7 +25333,7 @@
                 <a:ea typeface="Cambria" pitchFamily="34" charset="-122"/>
                 <a:cs typeface="Cambria" pitchFamily="34" charset="-120"/>
               </a:rPr>
-              <a:t>Run a 4–6 week pilot</a:t>
+              <a:t>Pilot on defaults</a:t>
             </a:r>
             <a:endParaRPr lang="en-US" sz="1600" dirty="0"/>
           </a:p>
@@ -27681,7 +25347,7 @@
         </p:nvSpPr>
         <p:spPr>
           <a:xfrm>
-            <a:off x="4892040" y="5084064"/>
+            <a:off x="4892040" y="4809744"/>
             <a:ext cx="6492240" cy="640080"/>
           </a:xfrm>
           <a:prstGeom prst="rect">
@@ -27706,278 +25372,22 @@
                 <a:ea typeface="Calibri" pitchFamily="34" charset="-122"/>
                 <a:cs typeface="Calibri" pitchFamily="34" charset="-120"/>
               </a:rPr>
-              <a:t>With measurable outcomes decided in advance, not vibes after the fact.</a:t>
+              <a:t>4–6 weeks, outcomes decided in advance. Customize only after, with real usage data.</a:t>
             </a:r>
             <a:endParaRPr lang="en-US" sz="1350" dirty="0"/>
           </a:p>
         </p:txBody>
       </p:sp>
-    </p:spTree>
-  </p:cSld>
-  <p:clrMapOvr>
-    <a:masterClrMapping/>
-  </p:clrMapOvr>
-</p:sld>
-</file>
-
-<file path=ppt/slides/slide44.xml><?xml version="1.0" encoding="utf-8"?>
-<p:sld xmlns:a="http://schemas.openxmlformats.org/drawingml/2006/main" xmlns:r="http://schemas.openxmlformats.org/officeDocument/2006/relationships" xmlns:p="http://schemas.openxmlformats.org/presentationml/2006/main">
-  <p:cSld name="Slide 44">
-    <p:bg>
-      <p:bgPr>
-        <a:solidFill>
-          <a:srgbClr val="FFFFFF"/>
-        </a:solidFill>
-        <a:effectLst/>
-      </p:bgPr>
-    </p:bg>
-    <p:spTree>
-      <p:nvGrpSpPr>
-        <p:cNvPr id="1" name=""/>
-        <p:cNvGrpSpPr/>
-        <p:nvPr/>
-      </p:nvGrpSpPr>
-      <p:grpSpPr>
-        <a:xfrm>
-          <a:off x="0" y="0"/>
-          <a:ext cx="0" cy="0"/>
-          <a:chOff x="0" y="0"/>
-          <a:chExt cx="0" cy="0"/>
-        </a:xfrm>
-      </p:grpSpPr>
-      <p:sp>
-        <p:nvSpPr>
-          <p:cNvPr id="2" name="Shape 0"/>
+      <p:sp>
+        <p:nvSpPr>
+          <p:cNvPr id="31" name="Takeaway bar"/>
           <p:cNvSpPr/>
           <p:nvPr/>
         </p:nvSpPr>
         <p:spPr>
           <a:xfrm>
-            <a:off x="548640" y="457200"/>
-            <a:ext cx="566928" cy="566928"/>
-          </a:xfrm>
-          <a:prstGeom prst="ellipse">
-            <a:avLst/>
-          </a:prstGeom>
-          <a:solidFill>
-            <a:srgbClr val="C1440E"/>
-          </a:solidFill>
-          <a:ln/>
-        </p:spPr>
-        <p:txBody>
-          <a:bodyPr/>
-          <a:lstStyle/>
-          <a:p>
-            <a:endParaRPr lang="en-US"/>
-          </a:p>
-        </p:txBody>
-      </p:sp>
-      <p:pic>
-        <p:nvPicPr>
-          <p:cNvPr id="3" name="Image 0" descr="/home/claude/pptx-build/assets/icons/FaFlask-FFFFFF-200.png"/>
-          <p:cNvPicPr>
-            <a:picLocks noChangeAspect="1"/>
-          </p:cNvPicPr>
-          <p:nvPr/>
-        </p:nvPicPr>
-        <p:blipFill>
-          <a:blip r:embed="rId3"/>
-          <a:stretch>
-            <a:fillRect/>
-          </a:stretch>
-        </p:blipFill>
-        <p:spPr>
-          <a:xfrm>
-            <a:off x="685800" y="594360"/>
-            <a:ext cx="292608" cy="292608"/>
-          </a:xfrm>
-          <a:prstGeom prst="rect">
-            <a:avLst/>
-          </a:prstGeom>
-        </p:spPr>
-      </p:pic>
-      <p:sp>
-        <p:nvSpPr>
-          <p:cNvPr id="4" name="Text 1"/>
-          <p:cNvSpPr txBox="1"/>
-          <p:nvPr/>
-        </p:nvSpPr>
-        <p:spPr>
-          <a:xfrm>
-            <a:off x="1234440" y="420624"/>
-            <a:ext cx="9875520" cy="320040"/>
-          </a:xfrm>
-          <a:prstGeom prst="rect">
-            <a:avLst/>
-          </a:prstGeom>
-          <a:noFill/>
-          <a:ln/>
-        </p:spPr>
-        <p:txBody>
-          <a:bodyPr wrap="square" lIns="0" tIns="0" rIns="0" bIns="0" rtlCol="0" anchor="ctr"/>
-          <a:lstStyle/>
-          <a:p>
-            <a:pPr marL="0" indent="0">
-              <a:buNone/>
-            </a:pPr>
-            <a:r>
-              <a:rPr lang="en-US" sz="1500" b="1" kern="0" spc="200" dirty="0">
-                <a:solidFill>
-                  <a:srgbClr val="C1440E"/>
-                </a:solidFill>
-                <a:latin typeface="Calibri" pitchFamily="34" charset="0"/>
-                <a:ea typeface="Calibri" pitchFamily="34" charset="-122"/>
-                <a:cs typeface="Calibri" pitchFamily="34" charset="-120"/>
-              </a:rPr>
-              <a:t>PREVENTING THE UPRISING</a:t>
-            </a:r>
-            <a:endParaRPr lang="en-US" sz="1500" dirty="0"/>
-          </a:p>
-        </p:txBody>
-      </p:sp>
-      <p:sp>
-        <p:nvSpPr>
-          <p:cNvPr id="5" name="Text 2"/>
-          <p:cNvSpPr txBox="1"/>
-          <p:nvPr/>
-        </p:nvSpPr>
-        <p:spPr>
-          <a:xfrm>
-            <a:off x="1234440" y="749808"/>
-            <a:ext cx="10515600" cy="868680"/>
-          </a:xfrm>
-          <a:prstGeom prst="rect">
-            <a:avLst/>
-          </a:prstGeom>
-          <a:noFill/>
-          <a:ln/>
-        </p:spPr>
-        <p:txBody>
-          <a:bodyPr wrap="square" lIns="0" tIns="0" rIns="0" bIns="0" rtlCol="0" anchor="t"/>
-          <a:lstStyle/>
-          <a:p>
-            <a:pPr marL="0" indent="0">
-              <a:buNone/>
-            </a:pPr>
-            <a:r>
-              <a:rPr lang="en-US" sz="3200" b="1" dirty="0">
-                <a:solidFill>
-                  <a:srgbClr val="1F3D2C"/>
-                </a:solidFill>
-                <a:latin typeface="Cambria" pitchFamily="34" charset="0"/>
-                <a:ea typeface="Cambria" pitchFamily="34" charset="-122"/>
-                <a:cs typeface="Cambria" pitchFamily="34" charset="-120"/>
-              </a:rPr>
-              <a:t>Run the Pilot First — Delay Customization Until After</a:t>
-            </a:r>
-            <a:endParaRPr lang="en-US" sz="3200" dirty="0"/>
-          </a:p>
-        </p:txBody>
-      </p:sp>
-      <p:sp>
-        <p:nvSpPr>
-          <p:cNvPr id="6" name="Shape 3"/>
-          <p:cNvSpPr/>
-          <p:nvPr/>
-        </p:nvSpPr>
-        <p:spPr>
-          <a:xfrm>
-            <a:off x="548640" y="1737360"/>
-            <a:ext cx="11064240" cy="2743200"/>
-          </a:xfrm>
-          <a:prstGeom prst="roundRect">
-            <a:avLst>
-              <a:gd name="adj" fmla="val 4000"/>
-            </a:avLst>
-          </a:prstGeom>
-          <a:solidFill>
-            <a:srgbClr val="F7F6F2"/>
-          </a:solidFill>
-          <a:ln w="12700">
-            <a:solidFill>
-              <a:srgbClr val="DDD8CC"/>
-            </a:solidFill>
-            <a:prstDash val="solid"/>
-          </a:ln>
-          <a:effectLst>
-            <a:outerShdw blurRad="76200" dist="25400" dir="5400000" algn="bl" rotWithShape="0">
-              <a:srgbClr val="000000">
-                <a:alpha val="12000"/>
-              </a:srgbClr>
-            </a:outerShdw>
-          </a:effectLst>
-        </p:spPr>
-        <p:txBody>
-          <a:bodyPr/>
-          <a:lstStyle/>
-          <a:p>
-            <a:endParaRPr lang="en-US"/>
-          </a:p>
-        </p:txBody>
-      </p:sp>
-      <p:sp>
-        <p:nvSpPr>
-          <p:cNvPr id="7" name="Text 4"/>
-          <p:cNvSpPr txBox="1"/>
-          <p:nvPr/>
-        </p:nvSpPr>
-        <p:spPr>
-          <a:xfrm>
-            <a:off x="822960" y="1920240"/>
-            <a:ext cx="10515600" cy="2377440"/>
-          </a:xfrm>
-          <a:prstGeom prst="rect">
-            <a:avLst/>
-          </a:prstGeom>
-          <a:noFill/>
-          <a:ln/>
-        </p:spPr>
-        <p:txBody>
-          <a:bodyPr wrap="square" lIns="0" tIns="0" rIns="0" bIns="0" rtlCol="0" anchor="ctr"/>
-          <a:lstStyle/>
-          <a:p>
-            <a:pPr marL="0" indent="0">
-              <a:lnSpc>
-                <a:spcPct val="130000"/>
-              </a:lnSpc>
-              <a:buNone/>
-            </a:pPr>
-            <a:r>
-              <a:rPr lang="en-US" sz="2000" b="1" dirty="0">
-                <a:solidFill>
-                  <a:srgbClr val="2B2B2B"/>
-                </a:solidFill>
-                <a:latin typeface="Calibri" pitchFamily="34" charset="0"/>
-                <a:ea typeface="Calibri" pitchFamily="34" charset="-122"/>
-                <a:cs typeface="Calibri" pitchFamily="34" charset="-120"/>
-              </a:rPr>
-              <a:t>Customizing on day one locks in decisions </a:t>
-            </a:r>
-            <a:r>
-              <a:rPr lang="en-US" sz="2000" dirty="0">
-                <a:solidFill>
-                  <a:srgbClr val="2B2B2B"/>
-                </a:solidFill>
-                <a:latin typeface="Calibri" pitchFamily="34" charset="0"/>
-                <a:ea typeface="Calibri" pitchFamily="34" charset="-122"/>
-                <a:cs typeface="Calibri" pitchFamily="34" charset="-120"/>
-              </a:rPr>
-              <a:t>made by people who didn’t understand the tool yet. Every custom field, every automation rule, every process tweak added before the pilot is a bet placed with the least information you’ll ever have.</a:t>
-            </a:r>
-            <a:endParaRPr lang="en-US" sz="2000" dirty="0"/>
-          </a:p>
-        </p:txBody>
-      </p:sp>
-      <p:sp>
-        <p:nvSpPr>
-          <p:cNvPr id="8" name="Shape 5"/>
-          <p:cNvSpPr/>
-          <p:nvPr/>
-        </p:nvSpPr>
-        <p:spPr>
-          <a:xfrm>
-            <a:off x="548640" y="4709160"/>
-            <a:ext cx="11064240" cy="1325880"/>
+            <a:off x="548640" y="5669280"/>
+            <a:ext cx="11064240" cy="777240"/>
           </a:xfrm>
           <a:prstGeom prst="roundRect">
             <a:avLst>
@@ -28009,14 +25419,14 @@
       </p:sp>
       <p:sp>
         <p:nvSpPr>
-          <p:cNvPr id="9" name="Text 6"/>
+          <p:cNvPr id="32" name="Takeaway text"/>
           <p:cNvSpPr txBox="1"/>
           <p:nvPr/>
         </p:nvSpPr>
         <p:spPr>
           <a:xfrm>
-            <a:off x="548640" y="4709160"/>
-            <a:ext cx="11064240" cy="1325880"/>
+            <a:off x="548640" y="5669280"/>
+            <a:ext cx="11064240" cy="777240"/>
           </a:xfrm>
           <a:prstGeom prst="rect">
             <a:avLst/>
@@ -28047,7 +25457,7 @@
                 </a:solidFill>
                 <a:latin typeface="Calibri"/>
               </a:rPr>
-              <a:t>Run the pilot with defaults. Customize afterward, with real usage data instead of guesses.</a:t>
+              <a:t>Every customization made before the pilot is a bet placed with the least information you’ll ever have.</a:t>
             </a:r>
             <a:endParaRPr lang="en-US" sz="1700" dirty="0"/>
           </a:p>
@@ -29280,7 +26690,7 @@
                 <a:ea typeface="Calibri" pitchFamily="34" charset="-122"/>
                 <a:cs typeface="Calibri" pitchFamily="34" charset="-120"/>
               </a:rPr>
-              <a:t>licensing tiers, GitHub Advanced Security as an add-on, runner and compute minutes, and the admin and migration effort it actually takes to get there.</a:t>
+              <a:t>licensing tiers, GitHub Secret Protection and Code Security as add-ons, runner and compute minutes, and the admin and migration effort it actually takes to get there.</a:t>
             </a:r>
             <a:endParaRPr lang="en-US" sz="1900" dirty="0"/>
           </a:p>
@@ -29295,7 +26705,7 @@
         <p:spPr>
           <a:xfrm>
             <a:off x="548640" y="4526280"/>
-            <a:ext cx="11064240" cy="1508760"/>
+            <a:ext cx="11064240" cy="868680"/>
           </a:xfrm>
           <a:prstGeom prst="roundRect">
             <a:avLst>
@@ -29334,7 +26744,7 @@
         <p:spPr>
           <a:xfrm>
             <a:off x="548640" y="4526280"/>
-            <a:ext cx="11064240" cy="1508760"/>
+            <a:ext cx="11064240" cy="868680"/>
           </a:xfrm>
           <a:prstGeom prst="rect">
             <a:avLst/>
@@ -29368,7 +26778,7 @@
                 </a:solidFill>
                 <a:latin typeface="Calibri"/>
               </a:rPr>
-              <a:t>A rule of thumb, not a model: past roughly 100 engineers the governance and reporting time saved usually outweighs a modest per-seat difference. Run your own numbers.</a:t>
+              <a:t>Price the migration and the steady state separately, and count the months when both platforms are billing at once.</a:t>
             </a:r>
             <a:endParaRPr lang="en-US" sz="1500" dirty="0"/>
           </a:p>
@@ -30403,7 +27813,7 @@
                 </a:solidFill>
                 <a:latin typeface="Calibri"/>
               </a:rPr>
-              <a:t>The Senior Engineer guarding that ancient pipeline isn’t wrong to be cautious — they’re defending it with the wrong argument (“it’s always worked”) instead of the right one (“here’s the rubric score”).</a:t>
+              <a:t>The Senior Engineer guarding that ancient pipeline isn’t wrong to be cautious — they’re defending it with the wrong argument (“it’s always worked”) instead of the right one (“here’s what the audit says”).</a:t>
             </a:r>
             <a:endParaRPr lang="en-US" sz="1450" dirty="0"/>
           </a:p>
@@ -30528,535 +27938,6 @@
 </p:sld>
 </file>
 
-<file path=ppt/slides/slide5.xml><?xml version="1.0" encoding="utf-8"?>
-<p:sld xmlns:a="http://schemas.openxmlformats.org/drawingml/2006/main" xmlns:r="http://schemas.openxmlformats.org/officeDocument/2006/relationships" xmlns:p="http://schemas.openxmlformats.org/presentationml/2006/main">
-  <p:cSld name="Slide 5">
-    <p:bg>
-      <p:bgPr>
-        <a:solidFill>
-          <a:srgbClr val="FFFFFF"/>
-        </a:solidFill>
-        <a:effectLst/>
-      </p:bgPr>
-    </p:bg>
-    <p:spTree>
-      <p:nvGrpSpPr>
-        <p:cNvPr id="1" name=""/>
-        <p:cNvGrpSpPr/>
-        <p:nvPr/>
-      </p:nvGrpSpPr>
-      <p:grpSpPr>
-        <a:xfrm>
-          <a:off x="0" y="0"/>
-          <a:ext cx="0" cy="0"/>
-          <a:chOff x="0" y="0"/>
-          <a:chExt cx="0" cy="0"/>
-        </a:xfrm>
-      </p:grpSpPr>
-      <p:sp>
-        <p:nvSpPr>
-          <p:cNvPr id="2" name="Shape 0"/>
-          <p:cNvSpPr/>
-          <p:nvPr/>
-        </p:nvSpPr>
-        <p:spPr>
-          <a:xfrm>
-            <a:off x="548640" y="457200"/>
-            <a:ext cx="566928" cy="566928"/>
-          </a:xfrm>
-          <a:prstGeom prst="ellipse">
-            <a:avLst/>
-          </a:prstGeom>
-          <a:solidFill>
-            <a:srgbClr val="C1440E"/>
-          </a:solidFill>
-          <a:ln/>
-        </p:spPr>
-        <p:txBody>
-          <a:bodyPr/>
-          <a:lstStyle/>
-          <a:p>
-            <a:endParaRPr lang="en-US"/>
-          </a:p>
-        </p:txBody>
-      </p:sp>
-      <p:pic>
-        <p:nvPicPr>
-          <p:cNvPr id="3" name="Image 0" descr="/home/claude/pptx-build/assets/icons/FaRobot-FFFFFF-200.png"/>
-          <p:cNvPicPr>
-            <a:picLocks noChangeAspect="1"/>
-          </p:cNvPicPr>
-          <p:nvPr/>
-        </p:nvPicPr>
-        <p:blipFill>
-          <a:blip r:embed="rId3"/>
-          <a:stretch>
-            <a:fillRect/>
-          </a:stretch>
-        </p:blipFill>
-        <p:spPr>
-          <a:xfrm>
-            <a:off x="685800" y="594360"/>
-            <a:ext cx="292608" cy="292608"/>
-          </a:xfrm>
-          <a:prstGeom prst="rect">
-            <a:avLst/>
-          </a:prstGeom>
-        </p:spPr>
-      </p:pic>
-      <p:sp>
-        <p:nvSpPr>
-          <p:cNvPr id="4" name="Text 1"/>
-          <p:cNvSpPr txBox="1"/>
-          <p:nvPr/>
-        </p:nvSpPr>
-        <p:spPr>
-          <a:xfrm>
-            <a:off x="1234440" y="420624"/>
-            <a:ext cx="9875520" cy="320040"/>
-          </a:xfrm>
-          <a:prstGeom prst="rect">
-            <a:avLst/>
-          </a:prstGeom>
-          <a:noFill/>
-          <a:ln/>
-        </p:spPr>
-        <p:txBody>
-          <a:bodyPr wrap="square" lIns="0" tIns="0" rIns="0" bIns="0" rtlCol="0" anchor="ctr"/>
-          <a:lstStyle/>
-          <a:p>
-            <a:pPr marL="0" indent="0">
-              <a:buNone/>
-            </a:pPr>
-            <a:r>
-              <a:rPr lang="en-US" sz="1500" b="1" kern="0" spc="200" dirty="0">
-                <a:solidFill>
-                  <a:srgbClr val="C1440E"/>
-                </a:solidFill>
-                <a:latin typeface="Calibri" pitchFamily="34" charset="0"/>
-                <a:ea typeface="Calibri" pitchFamily="34" charset="-122"/>
-                <a:cs typeface="Calibri" pitchFamily="34" charset="-120"/>
-              </a:rPr>
-              <a:t>WHY LEAVE THE HERD</a:t>
-            </a:r>
-            <a:endParaRPr lang="en-US" sz="1500" dirty="0"/>
-          </a:p>
-        </p:txBody>
-      </p:sp>
-      <p:sp>
-        <p:nvSpPr>
-          <p:cNvPr id="5" name="Text 2"/>
-          <p:cNvSpPr txBox="1"/>
-          <p:nvPr/>
-        </p:nvSpPr>
-        <p:spPr>
-          <a:xfrm>
-            <a:off x="1234440" y="749808"/>
-            <a:ext cx="10515600" cy="594360"/>
-          </a:xfrm>
-          <a:prstGeom prst="rect">
-            <a:avLst/>
-          </a:prstGeom>
-          <a:noFill/>
-          <a:ln/>
-        </p:spPr>
-        <p:txBody>
-          <a:bodyPr wrap="square" lIns="0" tIns="0" rIns="0" bIns="0" rtlCol="0" anchor="ctr"/>
-          <a:lstStyle/>
-          <a:p>
-            <a:pPr marL="0" indent="0">
-              <a:buNone/>
-            </a:pPr>
-            <a:r>
-              <a:rPr lang="en-US" sz="3200" b="1" dirty="0">
-                <a:solidFill>
-                  <a:srgbClr val="1F3D2C"/>
-                </a:solidFill>
-                <a:latin typeface="Cambria" pitchFamily="34" charset="0"/>
-                <a:ea typeface="Cambria" pitchFamily="34" charset="-122"/>
-                <a:cs typeface="Cambria" pitchFamily="34" charset="-120"/>
-              </a:rPr>
-              <a:t>Why Repository Location Matters</a:t>
-            </a:r>
-            <a:endParaRPr lang="en-US" sz="3200" dirty="0"/>
-          </a:p>
-        </p:txBody>
-      </p:sp>
-      <p:sp>
-        <p:nvSpPr>
-          <p:cNvPr id="6" name="Shape 3"/>
-          <p:cNvSpPr/>
-          <p:nvPr/>
-        </p:nvSpPr>
-        <p:spPr>
-          <a:xfrm>
-            <a:off x="548640" y="1645920"/>
-            <a:ext cx="11064240" cy="2286000"/>
-          </a:xfrm>
-          <a:prstGeom prst="roundRect">
-            <a:avLst>
-              <a:gd name="adj" fmla="val 4800"/>
-            </a:avLst>
-          </a:prstGeom>
-          <a:solidFill>
-            <a:srgbClr val="F7F6F2"/>
-          </a:solidFill>
-          <a:ln w="12700">
-            <a:solidFill>
-              <a:srgbClr val="DDD8CC"/>
-            </a:solidFill>
-            <a:prstDash val="solid"/>
-          </a:ln>
-          <a:effectLst>
-            <a:outerShdw blurRad="76200" dist="25400" dir="5400000" algn="bl" rotWithShape="0">
-              <a:srgbClr val="000000">
-                <a:alpha val="12000"/>
-              </a:srgbClr>
-            </a:outerShdw>
-          </a:effectLst>
-        </p:spPr>
-        <p:txBody>
-          <a:bodyPr/>
-          <a:lstStyle/>
-          <a:p>
-            <a:endParaRPr lang="en-US" dirty="0"/>
-          </a:p>
-        </p:txBody>
-      </p:sp>
-      <p:sp>
-        <p:nvSpPr>
-          <p:cNvPr id="7" name="Text 4"/>
-          <p:cNvSpPr txBox="1"/>
-          <p:nvPr/>
-        </p:nvSpPr>
-        <p:spPr>
-          <a:xfrm>
-            <a:off x="914400" y="1828800"/>
-            <a:ext cx="10332720" cy="2011680"/>
-          </a:xfrm>
-          <a:prstGeom prst="rect">
-            <a:avLst/>
-          </a:prstGeom>
-          <a:noFill/>
-          <a:ln/>
-        </p:spPr>
-        <p:txBody>
-          <a:bodyPr wrap="square" lIns="0" tIns="0" rIns="0" bIns="0" rtlCol="0" anchor="ctr"/>
-          <a:lstStyle/>
-          <a:p>
-            <a:pPr marL="0" indent="0">
-              <a:lnSpc>
-                <a:spcPct val="100000"/>
-              </a:lnSpc>
-              <a:buNone/>
-            </a:pPr>
-            <a:r>
-              <a:rPr lang="en-US" sz="2000" dirty="0">
-                <a:solidFill>
-                  <a:srgbClr val="2B2B2B"/>
-                </a:solidFill>
-                <a:latin typeface="Calibri" pitchFamily="34" charset="0"/>
-                <a:ea typeface="Calibri" pitchFamily="34" charset="-122"/>
-                <a:cs typeface="Calibri" pitchFamily="34" charset="-120"/>
-              </a:rPr>
-              <a:t>Every dollar of Copilot investment </a:t>
-            </a:r>
-            <a:r>
-              <a:rPr lang="en-US" sz="2000" b="1" dirty="0">
-                <a:solidFill>
-                  <a:srgbClr val="2B2B2B"/>
-                </a:solidFill>
-                <a:latin typeface="Calibri" pitchFamily="34" charset="0"/>
-                <a:ea typeface="Calibri" pitchFamily="34" charset="-122"/>
-                <a:cs typeface="Calibri" pitchFamily="34" charset="-120"/>
-              </a:rPr>
-              <a:t>lands on GitHub first. </a:t>
-            </a:r>
-          </a:p>
-          <a:p>
-            <a:pPr marL="0" indent="0">
-              <a:lnSpc>
-                <a:spcPct val="100000"/>
-              </a:lnSpc>
-              <a:buNone/>
-            </a:pPr>
-            <a:endParaRPr lang="en-US" sz="2000" b="1" dirty="0">
-              <a:solidFill>
-                <a:srgbClr val="2B2B2B"/>
-              </a:solidFill>
-              <a:latin typeface="Calibri" pitchFamily="34" charset="0"/>
-              <a:ea typeface="Calibri" pitchFamily="34" charset="-122"/>
-              <a:cs typeface="Calibri" pitchFamily="34" charset="-120"/>
-            </a:endParaRPr>
-          </a:p>
-          <a:p>
-            <a:pPr marL="0" indent="0">
-              <a:lnSpc>
-                <a:spcPct val="100000"/>
-              </a:lnSpc>
-              <a:buNone/>
-            </a:pPr>
-            <a:r>
-              <a:rPr lang="en-US" sz="2000" dirty="0">
-                <a:solidFill>
-                  <a:srgbClr val="2B2B2B"/>
-                </a:solidFill>
-                <a:latin typeface="Calibri" pitchFamily="34" charset="0"/>
-                <a:ea typeface="Calibri" pitchFamily="34" charset="-122"/>
-                <a:cs typeface="Calibri" pitchFamily="34" charset="-120"/>
-              </a:rPr>
-              <a:t>Azure DevOps continues to gain AI capabilities, but repository location still determines which workflows are available natively.</a:t>
-            </a:r>
-            <a:endParaRPr lang="en-US" sz="2000" dirty="0"/>
-          </a:p>
-        </p:txBody>
-      </p:sp>
-      <p:sp>
-        <p:nvSpPr>
-          <p:cNvPr id="8" name="Shape 5"/>
-          <p:cNvSpPr/>
-          <p:nvPr/>
-        </p:nvSpPr>
-        <p:spPr>
-          <a:xfrm>
-            <a:off x="548640" y="4114800"/>
-            <a:ext cx="5349240" cy="1508760"/>
-          </a:xfrm>
-          <a:prstGeom prst="roundRect">
-            <a:avLst>
-              <a:gd name="adj" fmla="val 7273"/>
-            </a:avLst>
-          </a:prstGeom>
-          <a:solidFill>
-            <a:srgbClr val="1F3D2C"/>
-          </a:solidFill>
-          <a:ln w="12700">
-            <a:solidFill>
-              <a:srgbClr val="DDD8CC"/>
-            </a:solidFill>
-            <a:prstDash val="solid"/>
-          </a:ln>
-          <a:effectLst>
-            <a:outerShdw blurRad="76200" dist="25400" dir="5400000" algn="bl" rotWithShape="0">
-              <a:srgbClr val="000000">
-                <a:alpha val="12000"/>
-              </a:srgbClr>
-            </a:outerShdw>
-          </a:effectLst>
-        </p:spPr>
-        <p:txBody>
-          <a:bodyPr/>
-          <a:lstStyle/>
-          <a:p>
-            <a:endParaRPr lang="en-US"/>
-          </a:p>
-        </p:txBody>
-      </p:sp>
-      <p:sp>
-        <p:nvSpPr>
-          <p:cNvPr id="9" name="Text 6"/>
-          <p:cNvSpPr txBox="1"/>
-          <p:nvPr/>
-        </p:nvSpPr>
-        <p:spPr>
-          <a:xfrm>
-            <a:off x="822960" y="4251960"/>
-            <a:ext cx="4800600" cy="502920"/>
-          </a:xfrm>
-          <a:prstGeom prst="rect">
-            <a:avLst/>
-          </a:prstGeom>
-          <a:noFill/>
-          <a:ln/>
-        </p:spPr>
-        <p:txBody>
-          <a:bodyPr wrap="square" lIns="0" tIns="0" rIns="0" bIns="0" rtlCol="0" anchor="ctr"/>
-          <a:lstStyle/>
-          <a:p>
-            <a:pPr marL="0" indent="0">
-              <a:buNone/>
-            </a:pPr>
-            <a:r>
-              <a:rPr lang="en-US" sz="1900" b="1" dirty="0">
-                <a:solidFill>
-                  <a:srgbClr val="F5F5F0"/>
-                </a:solidFill>
-                <a:latin typeface="Cambria" pitchFamily="34" charset="0"/>
-                <a:ea typeface="Cambria" pitchFamily="34" charset="-122"/>
-                <a:cs typeface="Cambria" pitchFamily="34" charset="-120"/>
-              </a:rPr>
-              <a:t>GitHub</a:t>
-            </a:r>
-            <a:endParaRPr lang="en-US" sz="1900" dirty="0"/>
-          </a:p>
-        </p:txBody>
-      </p:sp>
-      <p:sp>
-        <p:nvSpPr>
-          <p:cNvPr id="10" name="Text 7"/>
-          <p:cNvSpPr txBox="1"/>
-          <p:nvPr/>
-        </p:nvSpPr>
-        <p:spPr>
-          <a:xfrm>
-            <a:off x="822960" y="4773168"/>
-            <a:ext cx="4800600" cy="777240"/>
-          </a:xfrm>
-          <a:prstGeom prst="rect">
-            <a:avLst/>
-          </a:prstGeom>
-          <a:noFill/>
-          <a:ln/>
-        </p:spPr>
-        <p:txBody>
-          <a:bodyPr wrap="square" lIns="0" tIns="0" rIns="0" bIns="0" rtlCol="0" anchor="ctr"/>
-          <a:lstStyle/>
-          <a:p>
-            <a:pPr marL="0" indent="0">
-              <a:buNone/>
-            </a:pPr>
-            <a:r>
-              <a:rPr lang="en-US" sz="1600" dirty="0">
-                <a:solidFill>
-                  <a:srgbClr val="F5F5F0"/>
-                </a:solidFill>
-                <a:latin typeface="Calibri" pitchFamily="34" charset="0"/>
-                <a:ea typeface="Calibri" pitchFamily="34" charset="-122"/>
-                <a:cs typeface="Calibri" pitchFamily="34" charset="-120"/>
-              </a:rPr>
-              <a:t>Full agentic Copilot suite, shipping now</a:t>
-            </a:r>
-            <a:endParaRPr lang="en-US" sz="1600" dirty="0"/>
-          </a:p>
-        </p:txBody>
-      </p:sp>
-      <p:sp>
-        <p:nvSpPr>
-          <p:cNvPr id="11" name="Shape 8"/>
-          <p:cNvSpPr/>
-          <p:nvPr/>
-        </p:nvSpPr>
-        <p:spPr>
-          <a:xfrm>
-            <a:off x="6172200" y="4114800"/>
-            <a:ext cx="5349240" cy="1508760"/>
-          </a:xfrm>
-          <a:prstGeom prst="roundRect">
-            <a:avLst>
-              <a:gd name="adj" fmla="val 7273"/>
-            </a:avLst>
-          </a:prstGeom>
-          <a:solidFill>
-            <a:srgbClr val="F7F6F2"/>
-          </a:solidFill>
-          <a:ln w="12700">
-            <a:solidFill>
-              <a:srgbClr val="DDD8CC"/>
-            </a:solidFill>
-            <a:prstDash val="solid"/>
-          </a:ln>
-          <a:effectLst>
-            <a:outerShdw blurRad="76200" dist="25400" dir="5400000" algn="bl" rotWithShape="0">
-              <a:srgbClr val="000000">
-                <a:alpha val="12000"/>
-              </a:srgbClr>
-            </a:outerShdw>
-          </a:effectLst>
-        </p:spPr>
-        <p:txBody>
-          <a:bodyPr/>
-          <a:lstStyle/>
-          <a:p>
-            <a:endParaRPr lang="en-US"/>
-          </a:p>
-        </p:txBody>
-      </p:sp>
-      <p:sp>
-        <p:nvSpPr>
-          <p:cNvPr id="12" name="Text 9"/>
-          <p:cNvSpPr txBox="1"/>
-          <p:nvPr/>
-        </p:nvSpPr>
-        <p:spPr>
-          <a:xfrm>
-            <a:off x="6446520" y="4251960"/>
-            <a:ext cx="4800600" cy="502920"/>
-          </a:xfrm>
-          <a:prstGeom prst="rect">
-            <a:avLst/>
-          </a:prstGeom>
-          <a:noFill/>
-          <a:ln/>
-        </p:spPr>
-        <p:txBody>
-          <a:bodyPr wrap="square" lIns="0" tIns="0" rIns="0" bIns="0" rtlCol="0" anchor="ctr"/>
-          <a:lstStyle/>
-          <a:p>
-            <a:pPr marL="0" indent="0">
-              <a:buNone/>
-            </a:pPr>
-            <a:r>
-              <a:rPr lang="en-US" sz="1900" b="1" dirty="0">
-                <a:solidFill>
-                  <a:srgbClr val="1F3D2C"/>
-                </a:solidFill>
-                <a:latin typeface="Cambria" pitchFamily="34" charset="0"/>
-                <a:ea typeface="Cambria" pitchFamily="34" charset="-122"/>
-                <a:cs typeface="Cambria" pitchFamily="34" charset="-120"/>
-              </a:rPr>
-              <a:t>Azure DevOps</a:t>
-            </a:r>
-            <a:endParaRPr lang="en-US" sz="1900" dirty="0"/>
-          </a:p>
-        </p:txBody>
-      </p:sp>
-      <p:sp>
-        <p:nvSpPr>
-          <p:cNvPr id="13" name="Text 10"/>
-          <p:cNvSpPr txBox="1"/>
-          <p:nvPr/>
-        </p:nvSpPr>
-        <p:spPr>
-          <a:xfrm>
-            <a:off x="6446520" y="4773168"/>
-            <a:ext cx="4800600" cy="777240"/>
-          </a:xfrm>
-          <a:prstGeom prst="rect">
-            <a:avLst/>
-          </a:prstGeom>
-          <a:noFill/>
-          <a:ln/>
-        </p:spPr>
-        <p:txBody>
-          <a:bodyPr wrap="square" lIns="0" tIns="0" rIns="0" bIns="0" rtlCol="0" anchor="ctr"/>
-          <a:lstStyle/>
-          <a:p>
-            <a:pPr marL="0" indent="0">
-              <a:buNone/>
-            </a:pPr>
-            <a:r>
-              <a:rPr lang="en-US" sz="1600" dirty="0">
-                <a:solidFill>
-                  <a:srgbClr val="2B2B2B"/>
-                </a:solidFill>
-                <a:latin typeface="Calibri" pitchFamily="34" charset="0"/>
-                <a:ea typeface="Calibri" pitchFamily="34" charset="-122"/>
-                <a:cs typeface="Calibri" pitchFamily="34" charset="-120"/>
-              </a:rPr>
-              <a:t>AI features arriving, roadmap still catching up</a:t>
-            </a:r>
-            <a:endParaRPr lang="en-US" sz="1600" dirty="0"/>
-          </a:p>
-        </p:txBody>
-      </p:sp>
-    </p:spTree>
-  </p:cSld>
-  <p:clrMapOvr>
-    <a:masterClrMapping/>
-  </p:clrMapOvr>
-</p:sld>
-</file>
-
 <file path=ppt/slides/slide50.xml><?xml version="1.0" encoding="utf-8"?>
 <p:sld xmlns:a="http://schemas.openxmlformats.org/drawingml/2006/main" xmlns:r="http://schemas.openxmlformats.org/officeDocument/2006/relationships" xmlns:p="http://schemas.openxmlformats.org/presentationml/2006/main">
   <p:cSld name="Slide 50">
@@ -32104,7 +28985,7 @@
         <p:spPr>
           <a:xfrm>
             <a:off x="548640" y="1417320"/>
-            <a:ext cx="11064240" cy="1600200"/>
+            <a:ext cx="11064240" cy="1097280"/>
           </a:xfrm>
           <a:prstGeom prst="roundRect">
             <a:avLst>
@@ -32144,8 +29025,8 @@
         </p:nvSpPr>
         <p:spPr>
           <a:xfrm>
-            <a:off x="868680" y="1600200"/>
-            <a:ext cx="10424160" cy="1234440"/>
+            <a:off x="868680" y="1572768"/>
+            <a:ext cx="10424160" cy="822960"/>
           </a:xfrm>
           <a:prstGeom prst="rect">
             <a:avLst/>
@@ -32194,8 +29075,8 @@
         </p:nvSpPr>
         <p:spPr>
           <a:xfrm>
-            <a:off x="548640" y="3246120"/>
-            <a:ext cx="11064240" cy="1691640"/>
+            <a:off x="548640" y="2697480"/>
+            <a:ext cx="11064240" cy="1280160"/>
           </a:xfrm>
           <a:prstGeom prst="roundRect">
             <a:avLst>
@@ -32223,8 +29104,8 @@
         </p:nvSpPr>
         <p:spPr>
           <a:xfrm>
-            <a:off x="868680" y="3429000"/>
-            <a:ext cx="10424160" cy="1371600"/>
+            <a:off x="868680" y="2862072"/>
+            <a:ext cx="10424160" cy="960120"/>
           </a:xfrm>
           <a:prstGeom prst="rect">
             <a:avLst/>
@@ -32248,38 +29129,8 @@
                 <a:ea typeface="Calibri" pitchFamily="34" charset="-122"/>
                 <a:cs typeface="Calibri" pitchFamily="34" charset="-120"/>
               </a:rPr>
-              <a:t>Everything except Git commits — issue comments, PR reviews, work-item history — stays on the mannequin until it is reclaimed. An organization owner sends the attribution invitation, but nothing is reattributed until the person accepts it. </a:t>
-            </a:r>
-          </a:p>
-          <a:p>
-            <a:pPr marL="0" indent="0">
-              <a:buNone/>
-            </a:pPr>
-            <a:endParaRPr lang="en-US" sz="1700" dirty="0">
-              <a:solidFill>
-                <a:srgbClr val="FFFFFF"/>
-              </a:solidFill>
-              <a:latin typeface="Calibri" pitchFamily="34" charset="0"/>
-              <a:ea typeface="Calibri" pitchFamily="34" charset="-122"/>
-              <a:cs typeface="Calibri" pitchFamily="34" charset="-120"/>
-            </a:endParaRPr>
-          </a:p>
-          <a:p>
-            <a:pPr marL="0" indent="0">
-              <a:buNone/>
-            </a:pPr>
-            <a:r>
-              <a:rPr lang="en-US" sz="1700" dirty="0">
-                <a:solidFill>
-                  <a:srgbClr val="FFFFFF"/>
-                </a:solidFill>
-                <a:latin typeface="Calibri" pitchFamily="34" charset="0"/>
-                <a:ea typeface="Calibri" pitchFamily="34" charset="-122"/>
-                <a:cs typeface="Calibri" pitchFamily="34" charset="-120"/>
-              </a:rPr>
-              <a:t>Enterprise Managed Users are the exception: there it completes immediately, without an invitation.</a:t>
-            </a:r>
-            <a:endParaRPr lang="en-US" sz="1700" dirty="0"/>
+              <a:t>Everything except Git commits — pull-request authorship, comments and reviews — stays on the mannequin until it is reclaimed. An organization owner sends the attribution invitation, but nothing is reattributed until the person accepts it.</a:t>
+            </a:r>
           </a:p>
         </p:txBody>
       </p:sp>
@@ -32291,7 +29142,7 @@
         </p:nvSpPr>
         <p:spPr>
           <a:xfrm>
-            <a:off x="548640" y="5065776"/>
+            <a:off x="548640" y="4160520"/>
             <a:ext cx="11064240" cy="859536"/>
           </a:xfrm>
           <a:prstGeom prst="roundRect">
@@ -32324,7 +29175,7 @@
         </p:nvSpPr>
         <p:spPr>
           <a:xfrm>
-            <a:off x="548640" y="5065776"/>
+            <a:off x="548640" y="4160520"/>
             <a:ext cx="11064240" cy="859536"/>
           </a:xfrm>
           <a:prstGeom prst="rect">
@@ -32370,7 +29221,7 @@
         </p:nvSpPr>
         <p:spPr>
           <a:xfrm>
-            <a:off x="548640" y="5989320"/>
+            <a:off x="548640" y="5257800"/>
             <a:ext cx="11064240" cy="0"/>
           </a:xfrm>
           <a:prstGeom prst="line">
@@ -32400,7 +29251,7 @@
         </p:nvSpPr>
         <p:spPr>
           <a:xfrm>
-            <a:off x="548640" y="6108192"/>
+            <a:off x="548640" y="5367528"/>
             <a:ext cx="11064240" cy="640080"/>
           </a:xfrm>
           <a:prstGeom prst="rect">
@@ -34570,8 +31421,8 @@
           </p:nvPr>
         </p:nvGraphicFramePr>
         <p:xfrm>
-          <a:off x="548640" y="1417320"/>
-          <a:ext cx="11064240" cy="4389120"/>
+          <a:off x="548640" y="2331720"/>
+          <a:ext cx="11064240" cy="3108960"/>
         </p:xfrm>
         <a:graphic>
           <a:graphicData uri="http://schemas.openxmlformats.org/drawingml/2006/table">
@@ -34600,7 +31451,7 @@
                   </a:extLst>
                 </a:gridCol>
               </a:tblGrid>
-              <a:tr h="487680">
+              <a:tr h="621792">
                 <a:tc>
                   <a:txBody>
                     <a:bodyPr/>
@@ -34814,221 +31665,7 @@
                   </a:ext>
                 </a:extLst>
               </a:tr>
-              <a:tr h="487680">
-                <a:tc>
-                  <a:txBody>
-                    <a:bodyPr/>
-                    <a:lstStyle/>
-                    <a:p>
-                      <a:pPr marL="0" indent="0">
-                        <a:lnSpc>
-                          <a:spcPct val="92000"/>
-                        </a:lnSpc>
-                        <a:buNone/>
-                      </a:pPr>
-                      <a:r>
-                        <a:rPr lang="en-US" sz="1400" b="1">
-                          <a:solidFill>
-                            <a:srgbClr val="1F3D2C"/>
-                          </a:solidFill>
-                          <a:latin typeface="Cambria"/>
-                        </a:rPr>
-                        <a:t>Repository-aware chat</a:t>
-                      </a:r>
-                      <a:endParaRPr lang="en-US" sz="1400">
-                        <a:latin typeface="Cambria" charset="0"/>
-                        <a:ea typeface="Cambria" charset="0"/>
-                        <a:cs typeface="Cambria" charset="0"/>
-                      </a:endParaRPr>
-                    </a:p>
-                  </a:txBody>
-                  <a:tcPr marL="82296" marR="82296" marT="32004" marB="32004" anchor="ctr">
-                    <a:lnL w="6350" cap="flat" cmpd="sng" algn="ctr">
-                      <a:solidFill>
-                        <a:srgbClr val="DDD8CC"/>
-                      </a:solidFill>
-                      <a:prstDash val="solid"/>
-                      <a:round/>
-                      <a:headEnd type="none" w="med" len="med"/>
-                      <a:tailEnd type="none" w="med" len="med"/>
-                    </a:lnL>
-                    <a:lnR w="6350" cap="flat" cmpd="sng" algn="ctr">
-                      <a:solidFill>
-                        <a:srgbClr val="DDD8CC"/>
-                      </a:solidFill>
-                      <a:prstDash val="solid"/>
-                      <a:round/>
-                      <a:headEnd type="none" w="med" len="med"/>
-                      <a:tailEnd type="none" w="med" len="med"/>
-                    </a:lnR>
-                    <a:lnT w="6350" cap="flat" cmpd="sng" algn="ctr">
-                      <a:solidFill>
-                        <a:srgbClr val="DDD8CC"/>
-                      </a:solidFill>
-                      <a:prstDash val="solid"/>
-                      <a:round/>
-                      <a:headEnd type="none" w="med" len="med"/>
-                      <a:tailEnd type="none" w="med" len="med"/>
-                    </a:lnT>
-                    <a:lnB w="6350" cap="flat" cmpd="sng" algn="ctr">
-                      <a:solidFill>
-                        <a:srgbClr val="DDD8CC"/>
-                      </a:solidFill>
-                      <a:prstDash val="solid"/>
-                      <a:round/>
-                      <a:headEnd type="none" w="med" len="med"/>
-                      <a:tailEnd type="none" w="med" len="med"/>
-                    </a:lnB>
-                    <a:solidFill>
-                      <a:srgbClr val="F7F6F2"/>
-                    </a:solidFill>
-                  </a:tcPr>
-                </a:tc>
-                <a:tc>
-                  <a:txBody>
-                    <a:bodyPr/>
-                    <a:lstStyle/>
-                    <a:p>
-                      <a:pPr marL="0" indent="0">
-                        <a:lnSpc>
-                          <a:spcPct val="92000"/>
-                        </a:lnSpc>
-                        <a:buNone/>
-                      </a:pPr>
-                      <a:r>
-                        <a:rPr lang="en-US" sz="1400" b="0">
-                          <a:solidFill>
-                            <a:srgbClr val="2B2B2B"/>
-                          </a:solidFill>
-                          <a:latin typeface="Calibri"/>
-                        </a:rPr>
-                        <a:t>Native workspace and repository context</a:t>
-                      </a:r>
-                      <a:endParaRPr lang="en-US" sz="1400">
-                        <a:latin typeface="Calibri" charset="0"/>
-                        <a:ea typeface="Calibri" charset="0"/>
-                        <a:cs typeface="Calibri" charset="0"/>
-                      </a:endParaRPr>
-                    </a:p>
-                  </a:txBody>
-                  <a:tcPr marL="82296" marR="82296" marT="32004" marB="32004" anchor="ctr">
-                    <a:lnL w="6350" cap="flat" cmpd="sng" algn="ctr">
-                      <a:solidFill>
-                        <a:srgbClr val="DDD8CC"/>
-                      </a:solidFill>
-                      <a:prstDash val="solid"/>
-                      <a:round/>
-                      <a:headEnd type="none" w="med" len="med"/>
-                      <a:tailEnd type="none" w="med" len="med"/>
-                    </a:lnL>
-                    <a:lnR w="6350" cap="flat" cmpd="sng" algn="ctr">
-                      <a:solidFill>
-                        <a:srgbClr val="DDD8CC"/>
-                      </a:solidFill>
-                      <a:prstDash val="solid"/>
-                      <a:round/>
-                      <a:headEnd type="none" w="med" len="med"/>
-                      <a:tailEnd type="none" w="med" len="med"/>
-                    </a:lnR>
-                    <a:lnT w="6350" cap="flat" cmpd="sng" algn="ctr">
-                      <a:solidFill>
-                        <a:srgbClr val="DDD8CC"/>
-                      </a:solidFill>
-                      <a:prstDash val="solid"/>
-                      <a:round/>
-                      <a:headEnd type="none" w="med" len="med"/>
-                      <a:tailEnd type="none" w="med" len="med"/>
-                    </a:lnT>
-                    <a:lnB w="6350" cap="flat" cmpd="sng" algn="ctr">
-                      <a:solidFill>
-                        <a:srgbClr val="DDD8CC"/>
-                      </a:solidFill>
-                      <a:prstDash val="solid"/>
-                      <a:round/>
-                      <a:headEnd type="none" w="med" len="med"/>
-                      <a:tailEnd type="none" w="med" len="med"/>
-                    </a:lnB>
-                    <a:solidFill>
-                      <a:srgbClr val="F7F6F2"/>
-                    </a:solidFill>
-                  </a:tcPr>
-                </a:tc>
-                <a:tc>
-                  <a:txBody>
-                    <a:bodyPr/>
-                    <a:lstStyle/>
-                    <a:p>
-                      <a:pPr marL="0" indent="0">
-                        <a:lnSpc>
-                          <a:spcPct val="92000"/>
-                        </a:lnSpc>
-                        <a:buNone/>
-                      </a:pPr>
-                      <a:r>
-                        <a:rPr lang="en-US" sz="1400" b="0">
-                          <a:solidFill>
-                            <a:srgbClr val="2B2B2B"/>
-                          </a:solidFill>
-                          <a:latin typeface="Calibri"/>
-                        </a:rPr>
-                        <a:t>Local repo context; Azure DevOps service context through MCP</a:t>
-                      </a:r>
-                      <a:endParaRPr lang="en-US" sz="1400">
-                        <a:latin typeface="Calibri" charset="0"/>
-                        <a:ea typeface="Calibri" charset="0"/>
-                        <a:cs typeface="Calibri" charset="0"/>
-                      </a:endParaRPr>
-                    </a:p>
-                  </a:txBody>
-                  <a:tcPr marL="82296" marR="82296" marT="32004" marB="32004" anchor="ctr">
-                    <a:lnL w="6350" cap="flat" cmpd="sng" algn="ctr">
-                      <a:solidFill>
-                        <a:srgbClr val="DDD8CC"/>
-                      </a:solidFill>
-                      <a:prstDash val="solid"/>
-                      <a:round/>
-                      <a:headEnd type="none" w="med" len="med"/>
-                      <a:tailEnd type="none" w="med" len="med"/>
-                    </a:lnL>
-                    <a:lnR w="6350" cap="flat" cmpd="sng" algn="ctr">
-                      <a:solidFill>
-                        <a:srgbClr val="DDD8CC"/>
-                      </a:solidFill>
-                      <a:prstDash val="solid"/>
-                      <a:round/>
-                      <a:headEnd type="none" w="med" len="med"/>
-                      <a:tailEnd type="none" w="med" len="med"/>
-                    </a:lnR>
-                    <a:lnT w="6350" cap="flat" cmpd="sng" algn="ctr">
-                      <a:solidFill>
-                        <a:srgbClr val="DDD8CC"/>
-                      </a:solidFill>
-                      <a:prstDash val="solid"/>
-                      <a:round/>
-                      <a:headEnd type="none" w="med" len="med"/>
-                      <a:tailEnd type="none" w="med" len="med"/>
-                    </a:lnT>
-                    <a:lnB w="6350" cap="flat" cmpd="sng" algn="ctr">
-                      <a:solidFill>
-                        <a:srgbClr val="DDD8CC"/>
-                      </a:solidFill>
-                      <a:prstDash val="solid"/>
-                      <a:round/>
-                      <a:headEnd type="none" w="med" len="med"/>
-                      <a:tailEnd type="none" w="med" len="med"/>
-                    </a:lnB>
-                    <a:solidFill>
-                      <a:srgbClr val="F7F6F2"/>
-                    </a:solidFill>
-                  </a:tcPr>
-                </a:tc>
-                <a:extLst>
-                  <a:ext uri="{0D108BD9-81ED-4DB2-BD59-A6C34878D82A}">
-                    <a16:rowId xmlns:a16="http://schemas.microsoft.com/office/drawing/2014/main" val="10001"/>
-                  </a:ext>
-                </a:extLst>
-              </a:tr>
-              <a:tr h="487680">
+              <a:tr h="621792">
                 <a:tc>
                   <a:txBody>
                     <a:bodyPr/>
@@ -35242,7 +31879,7 @@
                   </a:ext>
                 </a:extLst>
               </a:tr>
-              <a:tr h="487680">
+              <a:tr h="621792">
                 <a:tc>
                   <a:txBody>
                     <a:bodyPr/>
@@ -35456,7 +32093,7 @@
                   </a:ext>
                 </a:extLst>
               </a:tr>
-              <a:tr h="487680">
+              <a:tr h="621792">
                 <a:tc>
                   <a:txBody>
                     <a:bodyPr/>
@@ -35670,435 +32307,7 @@
                   </a:ext>
                 </a:extLst>
               </a:tr>
-              <a:tr h="487680">
-                <a:tc>
-                  <a:txBody>
-                    <a:bodyPr/>
-                    <a:lstStyle/>
-                    <a:p>
-                      <a:pPr marL="0" indent="0">
-                        <a:lnSpc>
-                          <a:spcPct val="92000"/>
-                        </a:lnSpc>
-                        <a:buNone/>
-                      </a:pPr>
-                      <a:r>
-                        <a:rPr lang="en-US" sz="1400" b="1">
-                          <a:solidFill>
-                            <a:srgbClr val="1F3D2C"/>
-                          </a:solidFill>
-                          <a:latin typeface="Cambria"/>
-                        </a:rPr>
-                        <a:t>Multi-agent orchestration</a:t>
-                      </a:r>
-                      <a:endParaRPr lang="en-US" sz="1400">
-                        <a:latin typeface="Cambria" charset="0"/>
-                        <a:ea typeface="Cambria" charset="0"/>
-                        <a:cs typeface="Cambria" charset="0"/>
-                      </a:endParaRPr>
-                    </a:p>
-                  </a:txBody>
-                  <a:tcPr marL="82296" marR="82296" marT="32004" marB="32004" anchor="ctr">
-                    <a:lnL w="6350" cap="flat" cmpd="sng" algn="ctr">
-                      <a:solidFill>
-                        <a:srgbClr val="DDD8CC"/>
-                      </a:solidFill>
-                      <a:prstDash val="solid"/>
-                      <a:round/>
-                      <a:headEnd type="none" w="med" len="med"/>
-                      <a:tailEnd type="none" w="med" len="med"/>
-                    </a:lnL>
-                    <a:lnR w="6350" cap="flat" cmpd="sng" algn="ctr">
-                      <a:solidFill>
-                        <a:srgbClr val="DDD8CC"/>
-                      </a:solidFill>
-                      <a:prstDash val="solid"/>
-                      <a:round/>
-                      <a:headEnd type="none" w="med" len="med"/>
-                      <a:tailEnd type="none" w="med" len="med"/>
-                    </a:lnR>
-                    <a:lnT w="6350" cap="flat" cmpd="sng" algn="ctr">
-                      <a:solidFill>
-                        <a:srgbClr val="DDD8CC"/>
-                      </a:solidFill>
-                      <a:prstDash val="solid"/>
-                      <a:round/>
-                      <a:headEnd type="none" w="med" len="med"/>
-                      <a:tailEnd type="none" w="med" len="med"/>
-                    </a:lnT>
-                    <a:lnB w="6350" cap="flat" cmpd="sng" algn="ctr">
-                      <a:solidFill>
-                        <a:srgbClr val="DDD8CC"/>
-                      </a:solidFill>
-                      <a:prstDash val="solid"/>
-                      <a:round/>
-                      <a:headEnd type="none" w="med" len="med"/>
-                      <a:tailEnd type="none" w="med" len="med"/>
-                    </a:lnB>
-                    <a:solidFill>
-                      <a:srgbClr val="F7F6F2"/>
-                    </a:solidFill>
-                  </a:tcPr>
-                </a:tc>
-                <a:tc>
-                  <a:txBody>
-                    <a:bodyPr/>
-                    <a:lstStyle/>
-                    <a:p>
-                      <a:pPr marL="0" indent="0">
-                        <a:lnSpc>
-                          <a:spcPct val="92000"/>
-                        </a:lnSpc>
-                        <a:buNone/>
-                      </a:pPr>
-                      <a:r>
-                        <a:rPr lang="en-US" sz="1400" b="0">
-                          <a:solidFill>
-                            <a:srgbClr val="2B2B2B"/>
-                          </a:solidFill>
-                          <a:latin typeface="Calibri"/>
-                        </a:rPr>
-                        <a:t>Central hub; parallel Copilot, Claude, and Codex sessions</a:t>
-                      </a:r>
-                      <a:endParaRPr lang="en-US" sz="1400">
-                        <a:latin typeface="Calibri" charset="0"/>
-                        <a:ea typeface="Calibri" charset="0"/>
-                        <a:cs typeface="Calibri" charset="0"/>
-                      </a:endParaRPr>
-                    </a:p>
-                  </a:txBody>
-                  <a:tcPr marL="82296" marR="82296" marT="32004" marB="32004" anchor="ctr">
-                    <a:lnL w="6350" cap="flat" cmpd="sng" algn="ctr">
-                      <a:solidFill>
-                        <a:srgbClr val="DDD8CC"/>
-                      </a:solidFill>
-                      <a:prstDash val="solid"/>
-                      <a:round/>
-                      <a:headEnd type="none" w="med" len="med"/>
-                      <a:tailEnd type="none" w="med" len="med"/>
-                    </a:lnL>
-                    <a:lnR w="6350" cap="flat" cmpd="sng" algn="ctr">
-                      <a:solidFill>
-                        <a:srgbClr val="DDD8CC"/>
-                      </a:solidFill>
-                      <a:prstDash val="solid"/>
-                      <a:round/>
-                      <a:headEnd type="none" w="med" len="med"/>
-                      <a:tailEnd type="none" w="med" len="med"/>
-                    </a:lnR>
-                    <a:lnT w="6350" cap="flat" cmpd="sng" algn="ctr">
-                      <a:solidFill>
-                        <a:srgbClr val="DDD8CC"/>
-                      </a:solidFill>
-                      <a:prstDash val="solid"/>
-                      <a:round/>
-                      <a:headEnd type="none" w="med" len="med"/>
-                      <a:tailEnd type="none" w="med" len="med"/>
-                    </a:lnT>
-                    <a:lnB w="6350" cap="flat" cmpd="sng" algn="ctr">
-                      <a:solidFill>
-                        <a:srgbClr val="DDD8CC"/>
-                      </a:solidFill>
-                      <a:prstDash val="solid"/>
-                      <a:round/>
-                      <a:headEnd type="none" w="med" len="med"/>
-                      <a:tailEnd type="none" w="med" len="med"/>
-                    </a:lnB>
-                    <a:solidFill>
-                      <a:srgbClr val="F7F6F2"/>
-                    </a:solidFill>
-                  </a:tcPr>
-                </a:tc>
-                <a:tc>
-                  <a:txBody>
-                    <a:bodyPr/>
-                    <a:lstStyle/>
-                    <a:p>
-                      <a:pPr marL="0" indent="0">
-                        <a:lnSpc>
-                          <a:spcPct val="92000"/>
-                        </a:lnSpc>
-                        <a:buNone/>
-                      </a:pPr>
-                      <a:r>
-                        <a:rPr lang="en-US" sz="1400" b="0">
-                          <a:solidFill>
-                            <a:srgbClr val="2B2B2B"/>
-                          </a:solidFill>
-                          <a:latin typeface="Calibri"/>
-                        </a:rPr>
-                        <a:t>No native equivalent; external agents can connect through MCP</a:t>
-                      </a:r>
-                      <a:endParaRPr lang="en-US" sz="1400">
-                        <a:latin typeface="Calibri" charset="0"/>
-                        <a:ea typeface="Calibri" charset="0"/>
-                        <a:cs typeface="Calibri" charset="0"/>
-                      </a:endParaRPr>
-                    </a:p>
-                  </a:txBody>
-                  <a:tcPr marL="82296" marR="82296" marT="32004" marB="32004" anchor="ctr">
-                    <a:lnL w="6350" cap="flat" cmpd="sng" algn="ctr">
-                      <a:solidFill>
-                        <a:srgbClr val="DDD8CC"/>
-                      </a:solidFill>
-                      <a:prstDash val="solid"/>
-                      <a:round/>
-                      <a:headEnd type="none" w="med" len="med"/>
-                      <a:tailEnd type="none" w="med" len="med"/>
-                    </a:lnL>
-                    <a:lnR w="6350" cap="flat" cmpd="sng" algn="ctr">
-                      <a:solidFill>
-                        <a:srgbClr val="DDD8CC"/>
-                      </a:solidFill>
-                      <a:prstDash val="solid"/>
-                      <a:round/>
-                      <a:headEnd type="none" w="med" len="med"/>
-                      <a:tailEnd type="none" w="med" len="med"/>
-                    </a:lnR>
-                    <a:lnT w="6350" cap="flat" cmpd="sng" algn="ctr">
-                      <a:solidFill>
-                        <a:srgbClr val="DDD8CC"/>
-                      </a:solidFill>
-                      <a:prstDash val="solid"/>
-                      <a:round/>
-                      <a:headEnd type="none" w="med" len="med"/>
-                      <a:tailEnd type="none" w="med" len="med"/>
-                    </a:lnT>
-                    <a:lnB w="6350" cap="flat" cmpd="sng" algn="ctr">
-                      <a:solidFill>
-                        <a:srgbClr val="DDD8CC"/>
-                      </a:solidFill>
-                      <a:prstDash val="solid"/>
-                      <a:round/>
-                      <a:headEnd type="none" w="med" len="med"/>
-                      <a:tailEnd type="none" w="med" len="med"/>
-                    </a:lnB>
-                    <a:solidFill>
-                      <a:srgbClr val="F7F6F2"/>
-                    </a:solidFill>
-                  </a:tcPr>
-                </a:tc>
-                <a:extLst>
-                  <a:ext uri="{0D108BD9-81ED-4DB2-BD59-A6C34878D82A}">
-                    <a16:rowId xmlns:a16="http://schemas.microsoft.com/office/drawing/2014/main" val="10005"/>
-                  </a:ext>
-                </a:extLst>
-              </a:tr>
-              <a:tr h="487680">
-                <a:tc>
-                  <a:txBody>
-                    <a:bodyPr/>
-                    <a:lstStyle/>
-                    <a:p>
-                      <a:pPr marL="0" indent="0">
-                        <a:lnSpc>
-                          <a:spcPct val="92000"/>
-                        </a:lnSpc>
-                        <a:buNone/>
-                      </a:pPr>
-                      <a:r>
-                        <a:rPr sz="1400" b="1">
-                          <a:solidFill>
-                            <a:srgbClr val="1F3D2C"/>
-                          </a:solidFill>
-                          <a:latin typeface="Cambria"/>
-                        </a:rPr>
-                        <a:t>Azure DevOps context through MCP</a:t>
-                      </a:r>
-                      <a:endParaRPr lang="en-US" sz="1400">
-                        <a:latin typeface="Cambria" charset="0"/>
-                        <a:ea typeface="Cambria" charset="0"/>
-                        <a:cs typeface="Cambria" charset="0"/>
-                      </a:endParaRPr>
-                    </a:p>
-                  </a:txBody>
-                  <a:tcPr marL="82296" marR="82296" marT="32004" marB="32004" anchor="ctr">
-                    <a:lnL w="6350" cap="flat" cmpd="sng" algn="ctr">
-                      <a:solidFill>
-                        <a:srgbClr val="DDD8CC"/>
-                      </a:solidFill>
-                      <a:prstDash val="solid"/>
-                      <a:round/>
-                      <a:headEnd type="none" w="med" len="med"/>
-                      <a:tailEnd type="none" w="med" len="med"/>
-                    </a:lnL>
-                    <a:lnR w="6350" cap="flat" cmpd="sng" algn="ctr">
-                      <a:solidFill>
-                        <a:srgbClr val="DDD8CC"/>
-                      </a:solidFill>
-                      <a:prstDash val="solid"/>
-                      <a:round/>
-                      <a:headEnd type="none" w="med" len="med"/>
-                      <a:tailEnd type="none" w="med" len="med"/>
-                    </a:lnR>
-                    <a:lnT w="6350" cap="flat" cmpd="sng" algn="ctr">
-                      <a:solidFill>
-                        <a:srgbClr val="DDD8CC"/>
-                      </a:solidFill>
-                      <a:prstDash val="solid"/>
-                      <a:round/>
-                      <a:headEnd type="none" w="med" len="med"/>
-                      <a:tailEnd type="none" w="med" len="med"/>
-                    </a:lnT>
-                    <a:lnB w="6350" cap="flat" cmpd="sng" algn="ctr">
-                      <a:solidFill>
-                        <a:srgbClr val="DDD8CC"/>
-                      </a:solidFill>
-                      <a:prstDash val="solid"/>
-                      <a:round/>
-                      <a:headEnd type="none" w="med" len="med"/>
-                      <a:tailEnd type="none" w="med" len="med"/>
-                    </a:lnB>
-                    <a:solidFill>
-                      <a:srgbClr val="FFFFFF"/>
-                    </a:solidFill>
-                  </a:tcPr>
-                </a:tc>
-                <a:tc>
-                  <a:txBody>
-                    <a:bodyPr/>
-                    <a:lstStyle/>
-                    <a:p>
-                      <a:pPr marL="0" indent="0">
-                        <a:lnSpc>
-                          <a:spcPct val="92000"/>
-                        </a:lnSpc>
-                        <a:buNone/>
-                      </a:pPr>
-                      <a:r>
-                        <a:rPr sz="1400" b="0">
-                          <a:solidFill>
-                            <a:srgbClr val="2B2B2B"/>
-                          </a:solidFill>
-                          <a:latin typeface="Calibri"/>
-                        </a:rPr>
-                        <a:t>GitHub agents can consume Azure DevOps MCP context</a:t>
-                      </a:r>
-                      <a:endParaRPr lang="en-US" sz="1400">
-                        <a:latin typeface="Calibri" charset="0"/>
-                        <a:ea typeface="Calibri" charset="0"/>
-                        <a:cs typeface="Calibri" charset="0"/>
-                      </a:endParaRPr>
-                    </a:p>
-                  </a:txBody>
-                  <a:tcPr marL="82296" marR="82296" marT="32004" marB="32004" anchor="ctr">
-                    <a:lnL w="6350" cap="flat" cmpd="sng" algn="ctr">
-                      <a:solidFill>
-                        <a:srgbClr val="DDD8CC"/>
-                      </a:solidFill>
-                      <a:prstDash val="solid"/>
-                      <a:round/>
-                      <a:headEnd type="none" w="med" len="med"/>
-                      <a:tailEnd type="none" w="med" len="med"/>
-                    </a:lnL>
-                    <a:lnR w="6350" cap="flat" cmpd="sng" algn="ctr">
-                      <a:solidFill>
-                        <a:srgbClr val="DDD8CC"/>
-                      </a:solidFill>
-                      <a:prstDash val="solid"/>
-                      <a:round/>
-                      <a:headEnd type="none" w="med" len="med"/>
-                      <a:tailEnd type="none" w="med" len="med"/>
-                    </a:lnR>
-                    <a:lnT w="6350" cap="flat" cmpd="sng" algn="ctr">
-                      <a:solidFill>
-                        <a:srgbClr val="DDD8CC"/>
-                      </a:solidFill>
-                      <a:prstDash val="solid"/>
-                      <a:round/>
-                      <a:headEnd type="none" w="med" len="med"/>
-                      <a:tailEnd type="none" w="med" len="med"/>
-                    </a:lnT>
-                    <a:lnB w="6350" cap="flat" cmpd="sng" algn="ctr">
-                      <a:solidFill>
-                        <a:srgbClr val="DDD8CC"/>
-                      </a:solidFill>
-                      <a:prstDash val="solid"/>
-                      <a:round/>
-                      <a:headEnd type="none" w="med" len="med"/>
-                      <a:tailEnd type="none" w="med" len="med"/>
-                    </a:lnB>
-                    <a:solidFill>
-                      <a:srgbClr val="FFFFFF"/>
-                    </a:solidFill>
-                  </a:tcPr>
-                </a:tc>
-                <a:tc>
-                  <a:txBody>
-                    <a:bodyPr/>
-                    <a:lstStyle/>
-                    <a:p>
-                      <a:pPr marL="0" indent="0">
-                        <a:lnSpc>
-                          <a:spcPct val="92000"/>
-                        </a:lnSpc>
-                        <a:buNone/>
-                      </a:pPr>
-                      <a:r>
-                        <a:rPr sz="1400" b="0">
-                          <a:solidFill>
-                            <a:srgbClr val="2B2B2B"/>
-                          </a:solidFill>
-                          <a:latin typeface="Calibri"/>
-                        </a:rPr>
-                        <a:t>Remote MCP Server is GA; hosted and free*</a:t>
-                      </a:r>
-                      <a:endParaRPr lang="en-US" sz="1400">
-                        <a:latin typeface="Calibri" charset="0"/>
-                        <a:ea typeface="Calibri" charset="0"/>
-                        <a:cs typeface="Calibri" charset="0"/>
-                      </a:endParaRPr>
-                    </a:p>
-                  </a:txBody>
-                  <a:tcPr marL="82296" marR="82296" marT="32004" marB="32004" anchor="ctr">
-                    <a:lnL w="6350" cap="flat" cmpd="sng" algn="ctr">
-                      <a:solidFill>
-                        <a:srgbClr val="DDD8CC"/>
-                      </a:solidFill>
-                      <a:prstDash val="solid"/>
-                      <a:round/>
-                      <a:headEnd type="none" w="med" len="med"/>
-                      <a:tailEnd type="none" w="med" len="med"/>
-                    </a:lnL>
-                    <a:lnR w="6350" cap="flat" cmpd="sng" algn="ctr">
-                      <a:solidFill>
-                        <a:srgbClr val="DDD8CC"/>
-                      </a:solidFill>
-                      <a:prstDash val="solid"/>
-                      <a:round/>
-                      <a:headEnd type="none" w="med" len="med"/>
-                      <a:tailEnd type="none" w="med" len="med"/>
-                    </a:lnR>
-                    <a:lnT w="6350" cap="flat" cmpd="sng" algn="ctr">
-                      <a:solidFill>
-                        <a:srgbClr val="DDD8CC"/>
-                      </a:solidFill>
-                      <a:prstDash val="solid"/>
-                      <a:round/>
-                      <a:headEnd type="none" w="med" len="med"/>
-                      <a:tailEnd type="none" w="med" len="med"/>
-                    </a:lnT>
-                    <a:lnB w="6350" cap="flat" cmpd="sng" algn="ctr">
-                      <a:solidFill>
-                        <a:srgbClr val="DDD8CC"/>
-                      </a:solidFill>
-                      <a:prstDash val="solid"/>
-                      <a:round/>
-                      <a:headEnd type="none" w="med" len="med"/>
-                      <a:tailEnd type="none" w="med" len="med"/>
-                    </a:lnB>
-                    <a:solidFill>
-                      <a:srgbClr val="FFFFFF"/>
-                    </a:solidFill>
-                  </a:tcPr>
-                </a:tc>
-                <a:extLst>
-                  <a:ext uri="{0D108BD9-81ED-4DB2-BD59-A6C34878D82A}">
-                    <a16:rowId xmlns:a16="http://schemas.microsoft.com/office/drawing/2014/main" val="1940428834"/>
-                  </a:ext>
-                </a:extLst>
-              </a:tr>
-              <a:tr h="487680">
+              <a:tr h="621792">
                 <a:tc>
                   <a:txBody>
                     <a:bodyPr/>
@@ -36312,238 +32521,6 @@
                   </a:ext>
                 </a:extLst>
               </a:tr>
-              <a:tr h="487680">
-                <a:tc>
-                  <a:txBody>
-                    <a:bodyPr/>
-                    <a:lstStyle/>
-                    <a:p>
-                      <a:pPr marL="0" indent="0">
-                        <a:lnSpc>
-                          <a:spcPct val="92000"/>
-                        </a:lnSpc>
-                        <a:buNone/>
-                      </a:pPr>
-                      <a:r>
-                        <a:rPr sz="1400" b="1">
-                          <a:solidFill>
-                            <a:srgbClr val="1F3D2C"/>
-                          </a:solidFill>
-                          <a:latin typeface="Cambria"/>
-                        </a:rPr>
-                        <a:t>Licensing and preview status</a:t>
-                      </a:r>
-                      <a:endParaRPr lang="en-US" sz="1400">
-                        <a:latin typeface="Cambria" charset="0"/>
-                        <a:ea typeface="Cambria" charset="0"/>
-                        <a:cs typeface="Cambria" charset="0"/>
-                      </a:endParaRPr>
-                    </a:p>
-                  </a:txBody>
-                  <a:tcPr marL="82296" marR="82296" marT="32004" marB="32004" anchor="ctr">
-                    <a:lnL w="6350" cap="flat" cmpd="sng" algn="ctr">
-                      <a:solidFill>
-                        <a:srgbClr val="DDD8CC"/>
-                      </a:solidFill>
-                      <a:prstDash val="solid"/>
-                      <a:round/>
-                      <a:headEnd type="none" w="med" len="med"/>
-                      <a:tailEnd type="none" w="med" len="med"/>
-                    </a:lnL>
-                    <a:lnR w="6350" cap="flat" cmpd="sng" algn="ctr">
-                      <a:solidFill>
-                        <a:srgbClr val="DDD8CC"/>
-                      </a:solidFill>
-                      <a:prstDash val="solid"/>
-                      <a:round/>
-                      <a:headEnd type="none" w="med" len="med"/>
-                      <a:tailEnd type="none" w="med" len="med"/>
-                    </a:lnR>
-                    <a:lnT w="6350" cap="flat" cmpd="sng" algn="ctr">
-                      <a:solidFill>
-                        <a:srgbClr val="DDD8CC"/>
-                      </a:solidFill>
-                      <a:prstDash val="solid"/>
-                      <a:round/>
-                      <a:headEnd type="none" w="med" len="med"/>
-                      <a:tailEnd type="none" w="med" len="med"/>
-                    </a:lnT>
-                    <a:lnB w="6350" cap="flat" cmpd="sng" algn="ctr">
-                      <a:solidFill>
-                        <a:srgbClr val="DDD8CC"/>
-                      </a:solidFill>
-                      <a:prstDash val="solid"/>
-                      <a:round/>
-                      <a:headEnd type="none" w="med" len="med"/>
-                      <a:tailEnd type="none" w="med" len="med"/>
-                    </a:lnB>
-                    <a:solidFill>
-                      <a:srgbClr val="FFFFFF"/>
-                    </a:solidFill>
-                  </a:tcPr>
-                </a:tc>
-                <a:tc>
-                  <a:txBody>
-                    <a:bodyPr/>
-                    <a:lstStyle/>
-                    <a:p>
-                      <a:pPr marL="0" indent="0">
-                        <a:lnSpc>
-                          <a:spcPct val="92000"/>
-                        </a:lnSpc>
-                        <a:buNone/>
-                      </a:pPr>
-                      <a:r>
-                        <a:rPr sz="1400" b="0">
-                          <a:solidFill>
-                            <a:srgbClr val="2B2B2B"/>
-                          </a:solidFill>
-                          <a:latin typeface="Calibri"/>
-                        </a:rPr>
-                        <a:t>Paid Copilot for agents/review; Code Security where required</a:t>
-                      </a:r>
-                      <a:endParaRPr lang="en-US" sz="1400">
-                        <a:latin typeface="Calibri" charset="0"/>
-                        <a:ea typeface="Calibri" charset="0"/>
-                        <a:cs typeface="Calibri" charset="0"/>
-                      </a:endParaRPr>
-                    </a:p>
-                  </a:txBody>
-                  <a:tcPr marL="82296" marR="82296" marT="32004" marB="32004" anchor="ctr">
-                    <a:lnL w="6350" cap="flat" cmpd="sng" algn="ctr">
-                      <a:solidFill>
-                        <a:srgbClr val="DDD8CC"/>
-                      </a:solidFill>
-                      <a:prstDash val="solid"/>
-                      <a:round/>
-                      <a:headEnd type="none" w="med" len="med"/>
-                      <a:tailEnd type="none" w="med" len="med"/>
-                    </a:lnL>
-                    <a:lnR w="6350" cap="flat" cmpd="sng" algn="ctr">
-                      <a:solidFill>
-                        <a:srgbClr val="DDD8CC"/>
-                      </a:solidFill>
-                      <a:prstDash val="solid"/>
-                      <a:round/>
-                      <a:headEnd type="none" w="med" len="med"/>
-                      <a:tailEnd type="none" w="med" len="med"/>
-                    </a:lnR>
-                    <a:lnT w="6350" cap="flat" cmpd="sng" algn="ctr">
-                      <a:solidFill>
-                        <a:srgbClr val="DDD8CC"/>
-                      </a:solidFill>
-                      <a:prstDash val="solid"/>
-                      <a:round/>
-                      <a:headEnd type="none" w="med" len="med"/>
-                      <a:tailEnd type="none" w="med" len="med"/>
-                    </a:lnT>
-                    <a:lnB w="6350" cap="flat" cmpd="sng" algn="ctr">
-                      <a:solidFill>
-                        <a:srgbClr val="DDD8CC"/>
-                      </a:solidFill>
-                      <a:prstDash val="solid"/>
-                      <a:round/>
-                      <a:headEnd type="none" w="med" len="med"/>
-                      <a:tailEnd type="none" w="med" len="med"/>
-                    </a:lnB>
-                    <a:solidFill>
-                      <a:srgbClr val="FFFFFF"/>
-                    </a:solidFill>
-                  </a:tcPr>
-                </a:tc>
-                <a:tc>
-                  <a:txBody>
-                    <a:bodyPr/>
-                    <a:lstStyle/>
-                    <a:p>
-                      <a:pPr marL="0" indent="0">
-                        <a:lnSpc>
-                          <a:spcPct val="92000"/>
-                        </a:lnSpc>
-                        <a:buNone/>
-                      </a:pPr>
-                      <a:r>
-                        <a:rPr sz="1400" b="0" dirty="0">
-                          <a:solidFill>
-                            <a:srgbClr val="2B2B2B"/>
-                          </a:solidFill>
-                          <a:latin typeface="Calibri"/>
-                        </a:rPr>
-                        <a:t>MCP GA; review preview; </a:t>
-                      </a:r>
-                      <a:r>
-                        <a:rPr sz="1400" b="0" dirty="0" err="1">
-                          <a:solidFill>
-                            <a:srgbClr val="2B2B2B"/>
-                          </a:solidFill>
-                          <a:latin typeface="Calibri"/>
-                        </a:rPr>
-                        <a:t>Autofix</a:t>
-                      </a:r>
-                      <a:r>
-                        <a:rPr sz="1400" b="0" dirty="0">
-                          <a:solidFill>
-                            <a:srgbClr val="2B2B2B"/>
-                          </a:solidFill>
-                          <a:latin typeface="Calibri"/>
-                        </a:rPr>
-                        <a:t> limited preview + Code Security</a:t>
-                      </a:r>
-                      <a:endParaRPr lang="en-US" sz="1400" dirty="0">
-                        <a:latin typeface="Calibri" charset="0"/>
-                        <a:ea typeface="Calibri" charset="0"/>
-                        <a:cs typeface="Calibri" charset="0"/>
-                      </a:endParaRPr>
-                    </a:p>
-                  </a:txBody>
-                  <a:tcPr marL="82296" marR="82296" marT="32004" marB="32004" anchor="ctr">
-                    <a:lnL w="6350" cap="flat" cmpd="sng" algn="ctr">
-                      <a:solidFill>
-                        <a:srgbClr val="DDD8CC"/>
-                      </a:solidFill>
-                      <a:prstDash val="solid"/>
-                      <a:round/>
-                      <a:headEnd type="none" w="med" len="med"/>
-                      <a:tailEnd type="none" w="med" len="med"/>
-                    </a:lnL>
-                    <a:lnR w="6350" cap="flat" cmpd="sng" algn="ctr">
-                      <a:solidFill>
-                        <a:srgbClr val="DDD8CC"/>
-                      </a:solidFill>
-                      <a:prstDash val="solid"/>
-                      <a:round/>
-                      <a:headEnd type="none" w="med" len="med"/>
-                      <a:tailEnd type="none" w="med" len="med"/>
-                    </a:lnR>
-                    <a:lnT w="6350" cap="flat" cmpd="sng" algn="ctr">
-                      <a:solidFill>
-                        <a:srgbClr val="DDD8CC"/>
-                      </a:solidFill>
-                      <a:prstDash val="solid"/>
-                      <a:round/>
-                      <a:headEnd type="none" w="med" len="med"/>
-                      <a:tailEnd type="none" w="med" len="med"/>
-                    </a:lnT>
-                    <a:lnB w="6350" cap="flat" cmpd="sng" algn="ctr">
-                      <a:solidFill>
-                        <a:srgbClr val="DDD8CC"/>
-                      </a:solidFill>
-                      <a:prstDash val="solid"/>
-                      <a:round/>
-                      <a:headEnd type="none" w="med" len="med"/>
-                      <a:tailEnd type="none" w="med" len="med"/>
-                    </a:lnB>
-                    <a:solidFill>
-                      <a:srgbClr val="FFFFFF"/>
-                    </a:solidFill>
-                  </a:tcPr>
-                </a:tc>
-                <a:extLst>
-                  <a:ext uri="{0D108BD9-81ED-4DB2-BD59-A6C34878D82A}">
-                    <a16:rowId xmlns:a16="http://schemas.microsoft.com/office/drawing/2014/main" val="1456293908"/>
-                  </a:ext>
-                </a:extLst>
-              </a:tr>
             </a:tbl>
           </a:graphicData>
         </a:graphic>
@@ -36635,6 +32612,49 @@
           </a:prstGeom>
         </p:spPr>
       </p:pic>
+      <p:sp>
+        <p:nvSpPr>
+          <p:cNvPr id="13" name="Lead"/>
+          <p:cNvSpPr txBox="1"/>
+          <p:nvPr/>
+        </p:nvSpPr>
+        <p:spPr>
+          <a:xfrm>
+            <a:off x="548640" y="1444752"/>
+            <a:ext cx="11064240" cy="731520"/>
+          </a:xfrm>
+          <a:prstGeom prst="rect">
+            <a:avLst/>
+          </a:prstGeom>
+          <a:noFill/>
+        </p:spPr>
+        <p:txBody>
+          <a:bodyPr wrap="square" lIns="0" rIns="0" tIns="0" bIns="0">
+            <a:spAutoFit/>
+          </a:bodyPr>
+          <a:lstStyle/>
+          <a:p>
+            <a:r>
+              <a:rPr sz="1800" b="1">
+                <a:solidFill>
+                  <a:srgbClr val="2B2B2B"/>
+                </a:solidFill>
+                <a:latin typeface="Calibri"/>
+              </a:rPr>
+              <a:t>Most agentic Copilot features ship on GitHub first. </a:t>
+            </a:r>
+            <a:r>
+              <a:rPr sz="1800" b="0">
+                <a:solidFill>
+                  <a:srgbClr val="2B2B2B"/>
+                </a:solidFill>
+                <a:latin typeface="Calibri"/>
+              </a:rPr>
+              <a:t>Azure DevOps keeps gaining AI features, but where the repository lives still decides which workflows run natively.</a:t>
+            </a:r>
+          </a:p>
+        </p:txBody>
+      </p:sp>
     </p:spTree>
   </p:cSld>
   <p:clrMapOvr>
@@ -38321,7 +34341,7 @@
                 <a:ea typeface="Calibri" pitchFamily="34" charset="-122"/>
                 <a:cs typeface="Calibri" pitchFamily="34" charset="-120"/>
               </a:rPr>
-              <a:t>Tools like `act` execute a specific Actions definition right on your machine — debug without waiting on a hosted-runner queue.</a:t>
+              <a:t>Tools like act run a workflow in a local container: fast feedback on syntax and job order, not a stand-in for CI.</a:t>
             </a:r>
             <a:endParaRPr lang="en-US" sz="1400" dirty="0"/>
           </a:p>

--- a/presentation/azure-devops-to-github-the-great-migration-FULL-DECK.pptx
+++ b/presentation/azure-devops-to-github-the-great-migration-FULL-DECK.pptx
@@ -5,60 +5,60 @@
     <p:sldMasterId id="2147483648" r:id="rId1"/>
   </p:sldMasterIdLst>
   <p:notesMasterIdLst>
-    <p:notesMasterId r:id="rId58"/>
+    <p:notesMasterId r:id="rId53"/>
   </p:notesMasterIdLst>
   <p:sldIdLst>
     <p:sldId id="256" r:id="rId2"/>
     <p:sldId id="257" r:id="rId3"/>
     <p:sldId id="258" r:id="rId4"/>
     <p:sldId id="259" r:id="rId5"/>
-    <p:sldId id="261" r:id="rId7"/>
-    <p:sldId id="262" r:id="rId8"/>
-    <p:sldId id="265" r:id="rId9"/>
-    <p:sldId id="267" r:id="rId10"/>
-    <p:sldId id="268" r:id="rId11"/>
-    <p:sldId id="269" r:id="rId12"/>
-    <p:sldId id="270" r:id="rId13"/>
-    <p:sldId id="271" r:id="rId14"/>
-    <p:sldId id="272" r:id="rId15"/>
-    <p:sldId id="273" r:id="rId16"/>
-    <p:sldId id="264" r:id="rId17"/>
-    <p:sldId id="274" r:id="rId18"/>
-    <p:sldId id="275" r:id="rId19"/>
-    <p:sldId id="276" r:id="rId20"/>
-    <p:sldId id="277" r:id="rId21"/>
-    <p:sldId id="278" r:id="rId22"/>
-    <p:sldId id="279" r:id="rId23"/>
-    <p:sldId id="280" r:id="rId24"/>
-    <p:sldId id="281" r:id="rId26"/>
-    <p:sldId id="313" r:id="rId27"/>
-    <p:sldId id="283" r:id="rId28"/>
-    <p:sldId id="284" r:id="rId29"/>
-    <p:sldId id="285" r:id="rId30"/>
-    <p:sldId id="286" r:id="rId31"/>
-    <p:sldId id="287" r:id="rId32"/>
-    <p:sldId id="288" r:id="rId33"/>
-    <p:sldId id="289" r:id="rId34"/>
-    <p:sldId id="291" r:id="rId37"/>
-    <p:sldId id="292" r:id="rId38"/>
-    <p:sldId id="293" r:id="rId39"/>
-    <p:sldId id="295" r:id="rId41"/>
-    <p:sldId id="296" r:id="rId42"/>
-    <p:sldId id="297" r:id="rId43"/>
-    <p:sldId id="298" r:id="rId44"/>
-    <p:sldId id="301" r:id="rId46"/>
-    <p:sldId id="300" r:id="rId47"/>
-    <p:sldId id="302" r:id="rId48"/>
-    <p:sldId id="303" r:id="rId49"/>
-    <p:sldId id="304" r:id="rId50"/>
-    <p:sldId id="305" r:id="rId51"/>
-    <p:sldId id="306" r:id="rId52"/>
-    <p:sldId id="307" r:id="rId53"/>
-    <p:sldId id="309" r:id="rId54"/>
-    <p:sldId id="308" r:id="rId55"/>
-    <p:sldId id="311" r:id="rId56"/>
-    <p:sldId id="312" r:id="rId57"/>
-    <p:sldId id="282" r:id="rId25"/>
+    <p:sldId id="261" r:id="rId6"/>
+    <p:sldId id="262" r:id="rId7"/>
+    <p:sldId id="265" r:id="rId8"/>
+    <p:sldId id="267" r:id="rId9"/>
+    <p:sldId id="268" r:id="rId10"/>
+    <p:sldId id="269" r:id="rId11"/>
+    <p:sldId id="270" r:id="rId12"/>
+    <p:sldId id="271" r:id="rId13"/>
+    <p:sldId id="272" r:id="rId14"/>
+    <p:sldId id="273" r:id="rId15"/>
+    <p:sldId id="264" r:id="rId16"/>
+    <p:sldId id="274" r:id="rId17"/>
+    <p:sldId id="275" r:id="rId18"/>
+    <p:sldId id="276" r:id="rId19"/>
+    <p:sldId id="277" r:id="rId20"/>
+    <p:sldId id="278" r:id="rId21"/>
+    <p:sldId id="279" r:id="rId22"/>
+    <p:sldId id="280" r:id="rId23"/>
+    <p:sldId id="281" r:id="rId24"/>
+    <p:sldId id="313" r:id="rId25"/>
+    <p:sldId id="283" r:id="rId26"/>
+    <p:sldId id="284" r:id="rId27"/>
+    <p:sldId id="285" r:id="rId28"/>
+    <p:sldId id="286" r:id="rId29"/>
+    <p:sldId id="287" r:id="rId30"/>
+    <p:sldId id="288" r:id="rId31"/>
+    <p:sldId id="289" r:id="rId32"/>
+    <p:sldId id="291" r:id="rId33"/>
+    <p:sldId id="292" r:id="rId34"/>
+    <p:sldId id="293" r:id="rId35"/>
+    <p:sldId id="295" r:id="rId36"/>
+    <p:sldId id="296" r:id="rId37"/>
+    <p:sldId id="297" r:id="rId38"/>
+    <p:sldId id="298" r:id="rId39"/>
+    <p:sldId id="301" r:id="rId40"/>
+    <p:sldId id="300" r:id="rId41"/>
+    <p:sldId id="302" r:id="rId42"/>
+    <p:sldId id="303" r:id="rId43"/>
+    <p:sldId id="304" r:id="rId44"/>
+    <p:sldId id="305" r:id="rId45"/>
+    <p:sldId id="306" r:id="rId46"/>
+    <p:sldId id="307" r:id="rId47"/>
+    <p:sldId id="309" r:id="rId48"/>
+    <p:sldId id="308" r:id="rId49"/>
+    <p:sldId id="311" r:id="rId50"/>
+    <p:sldId id="312" r:id="rId51"/>
+    <p:sldId id="282" r:id="rId52"/>
   </p:sldIdLst>
   <p:sldSz cx="12192000" cy="6858000"/>
   <p:notesSz cx="6858000" cy="12192000"/>
@@ -419,7 +419,7 @@
           <a:lstStyle/>
           <a:p>
             <a:r>
-              <a:t>Straight delivery. This is the spoiler slide — the full seven-subsystem scorecard for the whole talk, not just section 2. Two travel clean (Repos, Wiki), four need a decision (Packages/Artifacts, Pipelines, Dashboards, Boards), one stays behind entirely (Test Plans).</a:t>
+              <a:t>Straight delivery. Git is Git, so commit history is easy, and pull requests plus most branch policies migrate without much drama through GitHub Enterprise Importer.</a:t>
             </a:r>
           </a:p>
           <a:p>
@@ -427,7 +427,22 @@
           </a:p>
           <a:p>
             <a:r>
-              <a:t>Don't over-explain each row yet. Pipelines gets all of section 3; Boards and Test Plans get all of section 4. This slide's job is just to set the map before the detailed stops. Repos, Wiki, Packages/Artifacts and Dashboards get their own slides in the rest of this section.</a:t>
+              <a:t>The asterisk is what doesn’t:</a:t>
+            </a:r>
+          </a:p>
+          <a:p>
+            <a:r>
+              <a:t>- Repo permissions get rebuilt as two GitHub teams per team project.</a:t>
+            </a:r>
+          </a:p>
+          <a:p>
+            <a:r>
+              <a:t>- Git LFS objects are not migrated. GEI moves the repository; you push the LFS objects separately.</a:t>
+            </a:r>
+          </a:p>
+          <a:p>
+            <a:r>
+              <a:t>- User-scoped and cross-repo branch policies need rebuilding by hand.</a:t>
             </a:r>
           </a:p>
           <a:p>
@@ -435,7 +450,15 @@
           </a:p>
           <a:p>
             <a:r>
-              <a:t>The Boards row is deliberately the only place Boards appears before section 4. Read it, say “we come back to this properly in section 4,” and move on — if you let the room open a Boards-versus-Projects debate here you will spend section 4's time twice.</a:t>
+              <a:t>Verify target visibility during the trial migration. Migration scripts can preserve or explicitly set visibility, but enterprise policies and managed-user configurations may constrain the available choices.</a:t>
+            </a:r>
+          </a:p>
+          <a:p>
+            <a:endParaRPr/>
+          </a:p>
+          <a:p>
+            <a:r>
+              <a:t>If there’s time, mention the hard limits: during migration, 40 GiB per repository and 400 MiB per file; afterwards, GitHub’s normal 100 MiB per file, 2 GiB per commit and 2 GiB per push. Don’t recite them from the slide.</a:t>
             </a:r>
           </a:p>
         </p:txBody>
@@ -521,41 +544,21 @@
           <a:lstStyle/>
           <a:p>
             <a:r>
-              <a:t>Straight delivery. Git is Git, so commit history is easy, and pull requests plus most branch policies migrate without much drama through GitHub Enterprise Importer.</a:t>
-            </a:r>
-          </a:p>
-          <a:p/>
-          <a:p>
-            <a:r>
-              <a:t>The asterisk is what doesn’t:</a:t>
-            </a:r>
-          </a:p>
-          <a:p>
-            <a:r>
-              <a:t>- Repo permissions get rebuilt as two GitHub teams per team project.</a:t>
-            </a:r>
-          </a:p>
-          <a:p>
-            <a:r>
-              <a:t>- Git LFS objects are not migrated. GEI moves the repository; you push the LFS objects separately.</a:t>
-            </a:r>
-          </a:p>
-          <a:p>
-            <a:r>
-              <a:t>- User-scoped and cross-repo branch policies need rebuilding by hand.</a:t>
-            </a:r>
-          </a:p>
-          <a:p/>
-          <a:p>
-            <a:r>
-              <a:t>Verify target visibility during the trial migration. Migration scripts can preserve or explicitly set visibility, but enterprise policies and managed-user configurations may constrain the available choices.</a:t>
-            </a:r>
-          </a:p>
-          <a:p/>
-          <a:p>
-            <a:r>
-              <a:t>If there’s time, mention the hard limits: during migration, 40 GiB per repository and 400 MiB per file; afterwards, GitHub’s normal 100 MiB per file, 2 GiB per commit and 2 GiB per push. Don’t recite them from the slide.</a:t>
-            </a:r>
+              <a:rPr dirty="0"/>
+              <a:t>Straight delivery, quick. Both wikis are Git repos, so the pages themselves copy with a clone and a push. The work is everything the Azure DevOps wiki layered on top: .order files and nested folders set page order and hierarchy, and GitHub’s wiki doesn’t read .order and shows a flat page list; Azure DevOps-only markdown ([[_TOC_]], ::: mermaid blocks, #123 work-item links, @mentions) renders as plain text or breaks; attachments live in a .attachments folder that page links point into.</a:t>
+            </a:r>
+          </a:p>
+          <a:p>
+            <a:endParaRPr dirty="0"/>
+          </a:p>
+          <a:p>
+            <a:r>
+              <a:rPr dirty="0"/>
+              <a:t>Two things worth knowing if asked. Azure DevOps wiki permissions apply to the whole wiki, not to individual pages (Microsoft’s docs say so explicitly), so permissions are not the big conversation. And a code wiki, a repo folder published as a wiki, is just Markdown in the repository, so it travels with the repo migration. Many teams use the move to put the project wiki into a docs folder too.</a:t>
+            </a:r>
+          </a:p>
+          <a:p>
+            <a:endParaRPr dirty="0"/>
           </a:p>
         </p:txBody>
       </p:sp>
@@ -640,19 +643,15 @@
           <a:lstStyle/>
           <a:p>
             <a:r>
-              <a:t>Straight delivery, quick. Both wikis are Git repos, so the pages themselves copy with a clone and a push. The work is everything the Azure DevOps wiki layered on top: .order files and nested folders set page order and hierarchy, and GitHub’s wiki doesn’t read .order and shows a flat page list; Azure DevOps-only markdown ([[_TOC_]], ::: mermaid blocks, #123 work-item links, @mentions) renders as plain text or breaks; attachments live in a .attachments folder that page links point into.</a:t>
-            </a:r>
-          </a:p>
-          <a:p/>
-          <a:p>
-            <a:r>
-              <a:t>Two things worth knowing if asked. Azure DevOps wiki permissions apply to the whole wiki, not to individual pages (Microsoft’s docs say so explicitly), so permissions are not the big conversation. And a code wiki, a repo folder published as a wiki, is just Markdown in the repository, so it travels with the repo migration. Many teams use the move to put the project wiki into a docs folder too.</a:t>
-            </a:r>
-          </a:p>
-          <a:p/>
-          <a:p>
-            <a:r>
-              <a:t>OPTIONAL LAUGH LINE — “Every field guide has one species that just walks across the river. This is it. Mostly. Enjoy it — the slide is forty seconds long.”</a:t>
+              <a:t>Straight delivery. Unlike Repos or Wiki, this one isn't a clean migration path — it's a genuine three-way decision: keep Azure Artifacts as-is, move fully to GitHub Packages, or dual-publish during a transition window. The realistic PoC target for most enterprises is the first option done well: GitHub Actions publishing to and consuming from an existing Azure Artifacts feed, because repointing every downstream consumer at cutover usually isn't realistic. This is a decision, not a rewrite — say that line plainly, it's the slide's title for a reason.</a:t>
+            </a:r>
+          </a:p>
+          <a:p>
+            <a:endParaRPr/>
+          </a:p>
+          <a:p>
+            <a:r>
+              <a:t>If you’re weighing option two, check the feed types first. GitHub Packages covers npm, NuGet, Maven, Gradle, RubyGems and containers, but not PyPI or Universal Packages, and it has no equivalent of Azure Artifacts upstream sources (proxying nuget.org or npmjs). Any of those keeps Azure Artifacts in the picture.</a:t>
             </a:r>
           </a:p>
         </p:txBody>
@@ -738,13 +737,23 @@
           <a:lstStyle/>
           <a:p>
             <a:r>
-              <a:t>Straight delivery. Unlike Repos or Wiki, this one isn't a clean migration path — it's a genuine three-way decision: keep Azure Artifacts as-is, move fully to GitHub Packages, or dual-publish during a transition window. The realistic PoC target for most enterprises is the first option done well: GitHub Actions publishing to and consuming from an existing Azure Artifacts feed, because repointing every downstream consumer at cutover usually isn't realistic. This is a decision, not a rewrite — say that line plainly, it's the slide's title for a reason.</a:t>
-            </a:r>
-          </a:p>
-          <a:p/>
-          <a:p>
-            <a:r>
-              <a:t>If you’re weighing option two, check the feed types first. GitHub Packages covers npm, NuGet, Maven, Gradle, RubyGems and containers, but not PyPI or Universal Packages, and it has no equivalent of Azure Artifacts upstream sources (proxying nuget.org or npmjs). Any of those keeps Azure Artifacts in the picture.</a:t>
+              <a:t>Straight delivery, and lead with the correction rather than burying it: GitHub does not ship a DORA dashboard.</a:t>
+            </a:r>
+          </a:p>
+          <a:p>
+            <a:endParaRPr/>
+          </a:p>
+          <a:p>
+            <a:r>
+              <a:t>Verified September 2026 — there is no GitHub product reporting deployment frequency, lead time for changes, change failure rate or time to restore. What exists is narrower and differently named: Copilot metrics and the Copilot impact dashboard (PRs merged, median merge velocity — explicitly not DORA), Actions performance metrics, a Code Quality org dashboard in public preview, and Security overview. None of it approaches Boards Analytics plus the Power BI report most enterprises have built up over years.</a:t>
+            </a:r>
+          </a:p>
+          <a:p>
+            <a:endParaRPr/>
+          </a:p>
+          <a:p>
+            <a:r>
+              <a:t>The reframe is what saves the slide, and it is stronger for the correction: neither platform hands you DORA, so stop comparing widgets, agree on the four metrics as the shared language, and instrument them yourselves — third-party tool or your own pipeline. That work outlives the migration whichever platform you land on.</a:t>
             </a:r>
           </a:p>
         </p:txBody>
@@ -830,23 +839,8 @@
           <a:lstStyle/>
           <a:p>
             <a:r>
-              <a:t>Straight delivery, and lead with the correction rather than burying it: GitHub does not ship a DORA dashboard.</a:t>
-            </a:r>
-          </a:p>
-          <a:p>
-            <a:endParaRPr/>
-          </a:p>
-          <a:p>
-            <a:r>
-              <a:t>Verified September 2026 — there is no GitHub product reporting deployment frequency, lead time for changes, change failure rate or time to restore. What exists is narrower and differently named: Copilot metrics and the Copilot impact dashboard (PRs merged, median merge velocity — explicitly not DORA), Actions performance metrics, a Code Quality org dashboard in public preview, and Security overview. None of it approaches Boards Analytics plus the Power BI report most enterprises have built up over years.</a:t>
-            </a:r>
-          </a:p>
-          <a:p>
-            <a:endParaRPr/>
-          </a:p>
-          <a:p>
-            <a:r>
-              <a:t>The reframe is what saves the slide, and it is stronger for the correction: neither platform hands you DORA, so stop comparing widgets, agree on the four metrics as the shared language, and instrument them yourselves — third-party tool or your own pipeline. That work outlives the migration whichever platform you land on.</a:t>
+              <a:rPr lang="en-US" dirty="0"/>
+              <a:t>Straight delivery, deliberately slow — this line is the whole talk in one sentence, worth letting it land before moving on. Everything that's file-based and version-controlled — repos, wiki — travels cleanly because Git is Git on both sides. Everything backed by a proprietary database with its own data model — dashboards here, and Boards plus Test Plans in the next section — needs either a rewrite, a decision, or in Test Plans' case, doesn't come at all. This sets up sections 3 and 4 directly.</a:t>
             </a:r>
           </a:p>
         </p:txBody>
@@ -932,8 +926,31 @@
           <a:lstStyle/>
           <a:p>
             <a:r>
-              <a:rPr lang="en-US" dirty="0"/>
-              <a:t>Straight delivery, deliberately slow — this line is the whole talk in one sentence, worth letting it land before moving on. Everything that's file-based and version-controlled — repos, wiki — travels cleanly because Git is Git on both sides. Everything backed by a proprietary database with its own data model — dashboards here, and Boards plus Test Plans in the next section — needs either a rewrite, a decision, or in Test Plans' case, doesn't come at all. This sets up sections 3 and 4 directly.</a:t>
+              <a:t>Straight delivery, land this one deliberately — it’s the thesis the whole talk hangs on. Three audiences, one pattern: developers move to GitHub and get Copilot and Actions; managers keep Azure Boards, capacity charts and Power BI exactly as they are; and the budget conversation starts easier because GitHub Enterprise Cloud includes Azure DevOps Basic access for users who sign in with Entra ID.</a:t>
+            </a:r>
+          </a:p>
+          <a:p>
+            <a:endParaRPr/>
+          </a:p>
+          <a:p>
+            <a:r>
+              <a:t>Be precise about that grant: it covers Basic only. Test Plans (which section 4 tells you to keep) is a separate Azure DevOps licence, and Copilot, Secret Protection and Code Security, Actions overages, larger runners and the migration work itself are all separate costs.</a:t>
+            </a:r>
+          </a:p>
+          <a:p>
+            <a:endParaRPr/>
+          </a:p>
+          <a:p>
+            <a:r>
+              <a:t>What holds the two halves together is the integration layer: work-item traceability, commit and pull-request links, pipeline integration, identity mapping, and cross-platform reporting.</a:t>
+            </a:r>
+          </a:p>
+          <a:p>
+            <a:endParaRPr/>
+          </a:p>
+          <a:p>
+            <a:r>
+              <a:t>Explicitly reframe: this is the shape the rest of the talk builds toward, not a fallback. Section 4 comes back to this exact point for Boards and Projects.</a:t>
             </a:r>
           </a:p>
         </p:txBody>
@@ -1019,25 +1036,7 @@
           <a:lstStyle/>
           <a:p>
             <a:r>
-              <a:t>Straight delivery, land this one deliberately — it’s the thesis the whole talk hangs on. Three audiences, one pattern: developers move to GitHub and get Copilot and Actions; managers keep Azure Boards, capacity charts and Power BI exactly as they are; and the budget conversation starts easier because GitHub Enterprise Cloud includes Azure DevOps Basic access for users who sign in with Entra ID.</a:t>
-            </a:r>
-          </a:p>
-          <a:p/>
-          <a:p>
-            <a:r>
-              <a:t>Be precise about that grant: it covers Basic only. Test Plans (which section 4 tells you to keep) is a separate Azure DevOps licence, and Copilot, Secret Protection and Code Security, Actions overages, larger runners and the migration work itself are all separate costs.</a:t>
-            </a:r>
-          </a:p>
-          <a:p/>
-          <a:p>
-            <a:r>
-              <a:t>What holds the two halves together is the integration layer: work-item traceability, commit and pull-request links, pipeline integration, identity mapping, and cross-platform reporting.</a:t>
-            </a:r>
-          </a:p>
-          <a:p/>
-          <a:p>
-            <a:r>
-              <a:t>Explicitly reframe: this is the shape the rest of the talk builds toward, not a fallback. Section 4 comes back to this exact point for Boards and Projects.</a:t>
+              <a:t>Brief check-in, not a discussion window — about a minute. Take one quick question if a hand is up, otherwise move straight into section 3. The real Q&amp;A time is banked for the open Q&amp;A at the end.</a:t>
             </a:r>
           </a:p>
         </p:txBody>
@@ -1123,7 +1122,8 @@
           <a:lstStyle/>
           <a:p>
             <a:r>
-              <a:t>Brief check-in, not a discussion window — about a minute. Take one quick question if a hand is up, otherwise move straight into section 3. The real Q&amp;A time is banked for the open Q&amp;A at the end.</a:t>
+              <a:rPr lang="en-US"/>
+              <a:t>DOCUMENTARY VOICE — deliver slowly and deadpan. The new metaphor introduces three migration planes: repository data, automation, and validation. Pause, then return to straight technical delivery. This is the heaviest section, so keep the framing concise.</a:t>
             </a:r>
           </a:p>
         </p:txBody>
@@ -1209,8 +1209,23 @@
           <a:lstStyle/>
           <a:p>
             <a:r>
-              <a:rPr lang="en-US"/>
-              <a:t>DOCUMENTARY VOICE — deliver slowly and deadpan. The new metaphor introduces three migration planes: repository data, automation, and validation. Pause, then return to straight technical delivery. This is the heaviest section, so keep the framing concise.</a:t>
+              <a:t>Straight delivery, and take this one slowly — the rest of the section depends on the distinction.</a:t>
+            </a:r>
+          </a:p>
+          <a:p>
+            <a:endParaRPr/>
+          </a:p>
+          <a:p>
+            <a:r>
+              <a:t>Repository data, automation, and validation are the architectural planes: the three places migration risk actually lives. Manual judgment, official tooling, and AI assistance are methods, and any of them can operate inside any plane. They are not a fourth plane, and they are not three competing migration strategies — which is how most migration talks get this wrong.</a:t>
+            </a:r>
+          </a:p>
+          <a:p>
+            <a:endParaRPr/>
+          </a:p>
+          <a:p>
+            <a:r>
+              <a:t>Everything from here follows the planes.</a:t>
             </a:r>
           </a:p>
         </p:txBody>
@@ -1296,23 +1311,8 @@
           <a:lstStyle/>
           <a:p>
             <a:r>
-              <a:t>Straight delivery, and take this one slowly — the rest of the section depends on the distinction.</a:t>
-            </a:r>
-          </a:p>
-          <a:p>
-            <a:endParaRPr/>
-          </a:p>
-          <a:p>
-            <a:r>
-              <a:t>Repository data, automation, and validation are the architectural planes: the three places migration risk actually lives. Manual judgment, official tooling, and AI assistance are methods, and any of them can operate inside any plane. They are not a fourth plane, and they are not three competing migration strategies — which is how most migration talks get this wrong.</a:t>
-            </a:r>
-          </a:p>
-          <a:p>
-            <a:endParaRPr/>
-          </a:p>
-          <a:p>
-            <a:r>
-              <a:t>Everything from here follows the planes.</a:t>
+              <a:rPr lang="en-US" dirty="0"/>
+              <a:t>Straight delivery. Read by row, not by column. Repository data uses GEI or ELM but still needs human decisions and troubleshooting. Automation uses Actions Importer plus engineering and AI reasoning. Validation uses deterministic evidence and accountable human decisions; AI can assist but cannot declare the migration complete.</a:t>
             </a:r>
           </a:p>
         </p:txBody>
@@ -1485,8 +1485,34 @@
           <a:lstStyle/>
           <a:p>
             <a:r>
+              <a:rPr dirty="0"/>
+              <a:t>Open the slide with the line: “Both platforms use YAML, in the same way that Java and JavaScript both contain the word ‘Java.’” It is also in the session abstract, so deliver it as a callback. It gets the laugh and it is the slide’s entire thesis: same syntax, different language. Say it once and move on.</a:t>
+            </a:r>
+          </a:p>
+          <a:p>
+            <a:endParaRPr dirty="0"/>
+          </a:p>
+          <a:p>
+            <a:r>
+              <a:rPr dirty="0"/>
+              <a:t>Straight delivery after that. Use the table as a vocabulary guide, not a transliteration recipe. Ask what security or lifecycle boundary each stage represented. Manual judgment is needed where service connections, templates, approvals, runners, conditions and failure behavior do not map one to one. Worth saying out loud: Actions has no stages, so a multi-stage pipeline becomes jobs linked by needs, usually with environments carrying the approvals.</a:t>
+            </a:r>
+          </a:p>
+          <a:p>
+            <a:endParaRPr dirty="0"/>
+          </a:p>
+          <a:p>
+            <a:r>
+              <a:rPr dirty="0"/>
+              <a:t>OPTIONAL LAUGH LINE — stop on the Service Connection row: “Two words on the left, </a:t>
+            </a:r>
+            <a:r>
               <a:rPr lang="en-US" dirty="0"/>
-              <a:t>Straight delivery. Read by row, not by column. Repository data uses GEI or ELM but still needs human decisions and troubleshooting. Automation uses Actions Importer plus engineering and AI reasoning. Validation uses deterministic evidence and accountable human decisions; AI can assist but cannot declare the migration complete.</a:t>
+              <a:t>two</a:t>
+            </a:r>
+            <a:r>
+              <a:rPr dirty="0"/>
+              <a:t> on the right, and about three weeks in between.” This is the row the whole room has personally lost a sprint to.</a:t>
             </a:r>
           </a:p>
         </p:txBody>
@@ -1572,19 +1598,39 @@
           <a:lstStyle/>
           <a:p>
             <a:r>
-              <a:t>Open the slide with the line: “Both platforms use YAML, in the same way that Java and JavaScript both contain the word ‘Java.’” It is also in the session abstract, so deliver it as a callback. It gets the laugh and it is the slide’s entire thesis: same syntax, different language. Say it once and move on.</a:t>
-            </a:r>
-          </a:p>
-          <a:p/>
-          <a:p>
-            <a:r>
-              <a:t>Straight delivery after that. Use the table as a vocabulary guide, not a transliteration recipe. Ask what security or lifecycle boundary each stage represented. Manual judgment is needed where service connections, templates, approvals, runners, conditions and failure behavior do not map one to one. Worth saying out loud: Actions has no stages, so a multi-stage pipeline becomes jobs linked by needs, usually with environments carrying the approvals.</a:t>
-            </a:r>
-          </a:p>
-          <a:p/>
-          <a:p>
-            <a:r>
-              <a:t>OPTIONAL LAUGH LINE — stop on the Service Connection row: “Two words on the left, three on the right, and about three weeks in between.” This is the row the whole room has personally lost a sprint to.</a:t>
+              <a:t>Straight delivery. Spend twenty seconds getting the naming right, because the docs don't and everyone who goes looking afterwards hits the same confusion.</a:t>
+            </a:r>
+          </a:p>
+          <a:p>
+            <a:endParaRPr/>
+          </a:p>
+          <a:p>
+            <a:r>
+              <a:t>GitHub's own wording: “GitHub Enterprise Importer is a collection of extensions for GitHub CLI.” So GEI is not a service sitting underneath gh-ado2gh — gh-ado2gh IS GEI, the Azure DevOps one. Its siblings are gh-gei (GitHub to GitHub) and gh-bbs2gh (Bitbucket Server). Install is `gh extension install github/gh-ado2gh`. The repository copy itself runs server-side through GitHub's migration API; the extension inventories the estate, generates the script and drives those calls.</a:t>
+            </a:r>
+          </a:p>
+          <a:p>
+            <a:endParaRPr/>
+          </a:p>
+          <a:p>
+            <a:r>
+              <a:t>Do not describe GEI and gh-ado2gh as two layers with a boundary between them — an earlier draft of this slide did, and somebody who has read the docs will pick it up. The real boundaries are the other three bullets: pipeline logic belongs to Actions Importer, and LFS and identity are separate work.</a:t>
+            </a:r>
+          </a:p>
+          <a:p>
+            <a:endParaRPr/>
+          </a:p>
+          <a:p>
+            <a:r>
+              <a:t>The --all flag adds team creation, Boards integration and pipeline reference rewiring, but it does not convert pipeline logic. Worth knowing before you demo: there is an open gh-gei issue where --all omits the rewire step unless the tooling can resolve pipelines and a service connection.</a:t>
+            </a:r>
+          </a:p>
+          <a:p>
+            <a:endParaRPr/>
+          </a:p>
+          <a:p>
+            <a:r>
+              <a:t>Review the generated PowerShell as migration code, not disposable output — that is the bottom line on the slide.</a:t>
             </a:r>
           </a:p>
         </p:txBody>
@@ -1670,7 +1716,7 @@
           <a:lstStyle/>
           <a:p>
             <a:r>
-              <a:t>Straight delivery. Spend twenty seconds getting the naming right, because the docs don't and everyone who goes looking afterwards hits the same confusion.</a:t>
+              <a:t>Straight delivery. Keep the non-negotiable order: install the Azure Pipelines GitHub App first and plan identity mapping before mannequins are created. Also decide account model, team structure, repository naming and visibility, system-of-record during transition, change freeze or reconciliation, and failure ownership before the first production run.</a:t>
             </a:r>
           </a:p>
           <a:p>
@@ -1678,31 +1724,7 @@
           </a:p>
           <a:p>
             <a:r>
-              <a:t>GitHub's own wording: “GitHub Enterprise Importer is a collection of extensions for GitHub CLI.” So GEI is not a service sitting underneath gh-ado2gh — gh-ado2gh IS GEI, the Azure DevOps one. Its siblings are gh-gei (GitHub to GitHub) and gh-bbs2gh (Bitbucket Server). Install is `gh extension install github/gh-ado2gh`. The repository copy itself runs server-side through GitHub's migration API; the extension inventories the estate, generates the script and drives those calls.</a:t>
-            </a:r>
-          </a:p>
-          <a:p>
-            <a:endParaRPr/>
-          </a:p>
-          <a:p>
-            <a:r>
-              <a:t>Do not describe GEI and gh-ado2gh as two layers with a boundary between them — an earlier draft of this slide did, and somebody who has read the docs will pick it up. The real boundaries are the other three bullets: pipeline logic belongs to Actions Importer, and LFS and identity are separate work.</a:t>
-            </a:r>
-          </a:p>
-          <a:p>
-            <a:endParaRPr/>
-          </a:p>
-          <a:p>
-            <a:r>
-              <a:t>The --all flag adds team creation, Boards integration and pipeline reference rewiring, but it does not convert pipeline logic. Worth knowing before you demo: there is an open gh-gei issue where --all omits the rewire step unless the tooling can resolve pipelines and a service connection.</a:t>
-            </a:r>
-          </a:p>
-          <a:p>
-            <a:endParaRPr/>
-          </a:p>
-          <a:p>
-            <a:r>
-              <a:t>Review the generated PowerShell as migration code, not disposable output — that is the bottom line on the slide.</a:t>
+              <a:t>OPTIONAL LAUGH LINE — after reading the six decisions: “You are going to make all six of these decisions either way. The only question is whether you make them now, or at two in the morning, under pressure, by accident.”</a:t>
             </a:r>
           </a:p>
         </p:txBody>
@@ -1788,7 +1810,7 @@
           <a:lstStyle/>
           <a:p>
             <a:r>
-              <a:t>Straight delivery. Keep the non-negotiable order: install the Azure Pipelines GitHub App first and plan identity mapping before mannequins are created. Also decide account model, team structure, repository naming and visibility, system-of-record during transition, change freeze or reconciliation, and failure ownership before the first production run.</a:t>
+              <a:t>Straight delivery. This is the automation-plane tool. The audit breakdown is the planning artifact: it turns “this looks hard” into a backlog with counts.</a:t>
             </a:r>
           </a:p>
           <a:p>
@@ -1796,7 +1818,15 @@
           </a:p>
           <a:p>
             <a:r>
-              <a:t>OPTIONAL LAUGH LINE — after reading the six decisions: “You are going to make all six of these decisions either way. The only question is whether you make them now, or at two in the morning, under pressure, by accident.”</a:t>
+              <a:t>Use the tool's own four buckets — successful, partially successful, unsupported, failed — and make the point that unsupported and failed are different problems. Unsupported means the construct has no Actions equivalent and somebody has to make a design decision. Failed means the importer choked and somebody has to go look. Those land in different columns of the backlog.</a:t>
+            </a:r>
+          </a:p>
+          <a:p>
+            <a:endParaRPr/>
+          </a:p>
+          <a:p>
+            <a:r>
+              <a:t>Conversion still leaves secrets, service connections, runner and network strategy, environments, approvals, custom tasks, and unsupported triggers for engineering judgment and validation.</a:t>
             </a:r>
           </a:p>
         </p:txBody>
@@ -1865,6 +1895,13 @@
           </p:nvPr>
         </p:nvSpPr>
         <p:spPr/>
+        <p:txBody>
+          <a:bodyPr/>
+          <a:lstStyle/>
+          <a:p>
+            <a:endParaRPr/>
+          </a:p>
+        </p:txBody>
       </p:sp>
       <p:sp>
         <p:nvSpPr>
@@ -1882,61 +1919,55 @@
           <a:lstStyle/>
           <a:p>
             <a:r>
-              <a:t>APPENDIX SLIDE. Moved out of the main flow for time; show it only if someone asks about ELM or near-zero-downtime cutover. Straight delivery. Enterprise Live Migrations was named on the methods table in section 3.</a:t>
-            </a:r>
-          </a:p>
-          <a:p/>
-          <a:p>
-            <a:r>
-              <a:t>STATUS, stated precisely, because the two paths differ: GitHub Enterprise Server to GHEC-with-data-residency went GA on 1 September 2026, but the AZURE DEVOPS path — the only one that matters here — is still public preview. Say “public preview for the Azure DevOps path,” not just “preview,” or somebody who read the GA changelog will correct you.</a:t>
-            </a:r>
-          </a:p>
-          <a:p/>
-          <a:p>
-            <a:r>
-              <a:t>It is also research-only for us: Hunter's current tenant does not meet the data-residency prerequisite, so we have not run it.</a:t>
-            </a:r>
-          </a:p>
-          <a:p/>
-          <a:p>
-            <a:r>
-              <a:t>THE CAPS ARE THE POINT. Thirty repositories total — twenty initial, ten incremental — and the cutover has to complete within twenty-one days of starting. Repositories only: no work items, pipelines, wikis, test plans or artifacts. That reframes ELM from “the better option” to “a pilot mechanism,” which is the more useful thing for this room to hear. If anyone is picturing it as the way to move a thousand repositories, the 30-repo cap answers that before they build a plan around it.</a:t>
-            </a:r>
-          </a:p>
-          <a:p/>
-          <a:p>
-            <a:r>
-              <a:t>Keep the GEI comparison honest: gh-ado2gh --all already does the configuration work. What ELM genuinely adds is continuous delta synchronization and a scheduled cutover with a read-only window under thirty minutes. Pipeline logic and non-repository systems still need separate migration and validation — that is the takeaway line.</a:t>
-            </a:r>
-          </a:p>
-          <a:p/>
-          <a:p>
-            <a:r>
-              <a:t>GitHub Enterprise Cloud (GHEC) with Data Residency is a distinct deployment model where:</a:t>
-            </a:r>
-          </a:p>
-          <a:p>
-            <a:r>
-              <a:t> - Your enterprise is hosted on a dedicated ghe.com subdomain (instead of github.com&lt;org&gt;).</a:t>
-            </a:r>
-          </a:p>
-          <a:p>
-            <a:r>
-              <a:t> - You choose the geographic region where your code and repository data are stored (currently including U.S., EU, Australia, and Japan).</a:t>
-            </a:r>
-          </a:p>
-          <a:p>
-            <a:r>
-              <a:t> - The environment is isolated from the broader github.com ecosystem.</a:t>
-            </a:r>
-          </a:p>
-          <a:p>
-            <a:r>
-              <a:t> - It requires Enterprise Managed Users (EMU). </a:t>
-            </a:r>
-          </a:p>
-          <a:p/>
-          <a:p/>
+              <a:rPr dirty="0"/>
+              <a:t>Straight delivery, and slow down here — for an enterprise room this is the slide that separates a migration talk from a migration.</a:t>
+            </a:r>
+          </a:p>
+          <a:p>
+            <a:endParaRPr dirty="0"/>
+          </a:p>
+          <a:p>
+            <a:r>
+              <a:rPr dirty="0"/>
+              <a:t>The setup: Actions Importer just told you the YAML converts. That is the easy half. The execution environment is the half that does not travel, and it is where regulated and on-prem estates actually stall.</a:t>
+            </a:r>
+          </a:p>
+          <a:p>
+            <a:endParaRPr dirty="0"/>
+          </a:p>
+          <a:p>
+            <a:r>
+              <a:rPr dirty="0"/>
+              <a:t>Walk the left column as decisions, not tasks — each one has an owner and a cost attached. The two that bite hardest are the network path to private endpoints, and who operates self-hosted runners once the migration team goes away.</a:t>
+            </a:r>
+          </a:p>
+          <a:p>
+            <a:endParaRPr dirty="0"/>
+          </a:p>
+          <a:p>
+            <a:r>
+              <a:rPr dirty="0"/>
+              <a:t>Walk the right column as evidence. Nobody gets to call the automation plane done on a green build; they get to call it done when an internal feed resolved, OIDC issued a real token, and something actually deployed.</a:t>
+            </a:r>
+          </a:p>
+          <a:p>
+            <a:endParaRPr dirty="0"/>
+          </a:p>
+          <a:p>
+            <a:r>
+              <a:rPr dirty="0"/>
+              <a:t>LAND THE BOTTOM LINE AS THE JOKE IT IS — “the workflow converted successfully, it merely has no credentials, no network route, and nowhere to deploy.” Deliver it flat. Everyone who has done this will laugh, because everyone who has done this has shipped exactly that workflow. It is also the only real laugh in this stretch of the deck, so do not rush past it.</a:t>
+            </a:r>
+          </a:p>
+          <a:p>
+            <a:endParaRPr dirty="0"/>
+          </a:p>
+          <a:p>
+            <a:r>
+              <a:rPr dirty="0"/>
+              <a:t>If asked about act: it runs workflows in containers rather than GitHub's VMs, Linux runners only, and it does not support OIDC — so it will never prove any of the right-hand column.</a:t>
+            </a:r>
+          </a:p>
         </p:txBody>
       </p:sp>
       <p:sp>
@@ -1954,20 +1985,11 @@
           <a:bodyPr/>
           <a:lstStyle/>
           <a:p>
-            <a:fld id="{F7021451-1387-4CA6-816F-3879F97B5CBC}" type="slidenum">
-              <a:rPr lang="en-US"/>
-              <a:t>24</a:t>
-            </a:fld>
             <a:endParaRPr lang="en-US"/>
           </a:p>
         </p:txBody>
       </p:sp>
     </p:spTree>
-    <p:extLst>
-      <p:ext uri="{BB962C8B-B14F-4D97-AF65-F5344CB8AC3E}">
-        <p14:creationId xmlns:p14="http://schemas.microsoft.com/office/powerpoint/2010/main" val="1024086991"/>
-      </p:ext>
-    </p:extLst>
   </p:cSld>
   <p:clrMapOvr>
     <a:masterClrMapping/>
@@ -2020,23 +2042,8 @@
           <a:lstStyle/>
           <a:p>
             <a:r>
-              <a:t>Straight delivery. This is the automation-plane tool. The audit breakdown is the planning artifact: it turns “this looks hard” into a backlog with counts.</a:t>
-            </a:r>
-          </a:p>
-          <a:p>
-            <a:endParaRPr/>
-          </a:p>
-          <a:p>
-            <a:r>
-              <a:t>Use the tool's own four buckets — successful, partially successful, unsupported, failed — and make the point that unsupported and failed are different problems. Unsupported means the construct has no Actions equivalent and somebody has to make a design decision. Failed means the importer choked and somebody has to go look. Those land in different columns of the backlog.</a:t>
-            </a:r>
-          </a:p>
-          <a:p>
-            <a:endParaRPr/>
-          </a:p>
-          <a:p>
-            <a:r>
-              <a:t>Conversion still leaves secrets, service connections, runner and network strategy, environments, approvals, custom tasks, and unsupported triggers for engineering judgment and validation.</a:t>
+              <a:rPr lang="en-US"/>
+              <a:t>Straight delivery. AI is assistance inside the automation and validation planes, not a third migration path. Analyze first, convert second, then validate in fresh context with an explicit checklist and—where possible—a different reviewer or model. Deterministic tests and accountable engineering acceptance remain the authority. Preserve the honest status: the prompts have not yet been validated against a production pipeline.</a:t>
             </a:r>
           </a:p>
         </p:txBody>
@@ -2105,13 +2112,6 @@
           </p:nvPr>
         </p:nvSpPr>
         <p:spPr/>
-        <p:txBody>
-          <a:bodyPr/>
-          <a:lstStyle/>
-          <a:p>
-            <a:endParaRPr/>
-          </a:p>
-        </p:txBody>
       </p:sp>
       <p:sp>
         <p:nvSpPr>
@@ -2129,53 +2129,15 @@
           <a:lstStyle/>
           <a:p>
             <a:r>
-              <a:rPr dirty="0"/>
-              <a:t>Straight delivery, and slow down here — for an enterprise room this is the slide that separates a migration talk from a migration.</a:t>
-            </a:r>
-          </a:p>
-          <a:p>
-            <a:endParaRPr dirty="0"/>
-          </a:p>
-          <a:p>
-            <a:r>
-              <a:rPr dirty="0"/>
-              <a:t>The setup: Actions Importer just told you the YAML converts. That is the easy half. The execution environment is the half that does not travel, and it is where regulated and on-prem estates actually stall.</a:t>
-            </a:r>
-          </a:p>
-          <a:p>
-            <a:endParaRPr dirty="0"/>
-          </a:p>
-          <a:p>
-            <a:r>
-              <a:rPr dirty="0"/>
-              <a:t>Walk the left column as decisions, not tasks — each one has an owner and a cost attached. The two that bite hardest are the network path to private endpoints, and who operates self-hosted runners once the migration team goes away.</a:t>
-            </a:r>
-          </a:p>
-          <a:p>
-            <a:endParaRPr dirty="0"/>
-          </a:p>
-          <a:p>
-            <a:r>
-              <a:rPr dirty="0"/>
-              <a:t>Walk the right column as evidence. Nobody gets to call the automation plane done on a green build; they get to call it done when an internal feed resolved, OIDC issued a real token, and something actually deployed.</a:t>
-            </a:r>
-          </a:p>
-          <a:p>
-            <a:endParaRPr dirty="0"/>
-          </a:p>
-          <a:p>
-            <a:r>
-              <a:rPr dirty="0"/>
-              <a:t>LAND THE BOTTOM LINE AS THE JOKE IT IS — “the workflow converted successfully, it merely has no credentials, no network route, and nowhere to deploy.” Deliver it flat. Everyone who has done this will laugh, because everyone who has done this has shipped exactly that workflow. It is also the only real laugh in this stretch of the deck, so do not rush past it.</a:t>
-            </a:r>
-          </a:p>
-          <a:p>
-            <a:endParaRPr dirty="0"/>
-          </a:p>
-          <a:p>
-            <a:r>
-              <a:rPr dirty="0"/>
-              <a:t>If asked about act: it runs workflows in containers rather than GitHub's VMs, Linux runners only, and it does not support OIDC — so it will never prove any of the right-hand column.</a:t>
+              <a:t>Straight delivery. Walk the five steps across all three planes. Inventory before moving; trial-migrate repository data; rebuild automation semantics and the execution environment; prove equivalence and deployability; then cut over with monitoring and rollback ready.</a:t>
+            </a:r>
+          </a:p>
+          <a:p>
+            <a:endParaRPr/>
+          </a:p>
+          <a:p>
+            <a:r>
+              <a:t>Say the finish-line distinction out loud: first verified delivery, not first green build. A green build proves the workflow ran. It proves nothing about the artifact, the deployment, traceability, or your ability to go back.</a:t>
             </a:r>
           </a:p>
         </p:txBody>
@@ -2195,11 +2157,20 @@
           <a:bodyPr/>
           <a:lstStyle/>
           <a:p>
+            <a:fld id="{F7021451-1387-4CA6-816F-3879F97B5CBC}" type="slidenum">
+              <a:rPr lang="en-US"/>
+              <a:t>26</a:t>
+            </a:fld>
             <a:endParaRPr lang="en-US"/>
           </a:p>
         </p:txBody>
       </p:sp>
     </p:spTree>
+    <p:extLst>
+      <p:ext uri="{BB962C8B-B14F-4D97-AF65-F5344CB8AC3E}">
+        <p14:creationId xmlns:p14="http://schemas.microsoft.com/office/powerpoint/2010/main" val="1024086991"/>
+      </p:ext>
+    </p:extLst>
   </p:cSld>
   <p:clrMapOvr>
     <a:masterClrMapping/>
@@ -2252,8 +2223,15 @@
           <a:lstStyle/>
           <a:p>
             <a:r>
-              <a:rPr lang="en-US"/>
-              <a:t>Straight delivery. AI is assistance inside the automation and validation planes, not a third migration path. Analyze first, convert second, then validate in fresh context with an explicit checklist and—where possible—a different reviewer or model. Deterministic tests and accountable engineering acceptance remain the authority. Preserve the honest status: the prompts have not yet been validated against a production pipeline.</a:t>
+              <a:t>Straight delivery. This is a reusable acceptance checklist — tell the room to photograph it, it is the most portable thing in the talk.</a:t>
+            </a:r>
+          </a:p>
+          <a:p>
+            <a:endParaRPr/>
+          </a:p>
+          <a:p>
+            <a:r>
+              <a:t>Emphasize that acceptance spans all three planes: repository data, automation, and validation/cutover. A repository URL and a green build do not prove identity, policy, artifact, deployment, observability, traceability, or rollback readiness.</a:t>
             </a:r>
           </a:p>
         </p:txBody>
@@ -2339,15 +2317,7 @@
           <a:lstStyle/>
           <a:p>
             <a:r>
-              <a:t>Straight delivery. Walk the five steps across all three planes. Inventory before moving; trial-migrate repository data; rebuild automation semantics and the execution environment; prove equivalence and deployability; then cut over with monitoring and rollback ready.</a:t>
-            </a:r>
-          </a:p>
-          <a:p>
-            <a:endParaRPr/>
-          </a:p>
-          <a:p>
-            <a:r>
-              <a:t>Say the finish-line distinction out loud: first verified delivery, not first green build. A green build proves the workflow ran. It proves nothing about the artifact, the deployment, traceability, or your ability to go back.</a:t>
+              <a:t>Brief check-in, not a discussion window — about 30 seconds given how much ground this section covers. Take one quick question if a hand is up, otherwise move straight into section 4. The real Q&amp;A time is banked for the open Q&amp;A at the end.</a:t>
             </a:r>
           </a:p>
         </p:txBody>
@@ -2433,15 +2403,7 @@
           <a:lstStyle/>
           <a:p>
             <a:r>
-              <a:t>Straight delivery. This is a reusable acceptance checklist — tell the room to photograph it, it is the most portable thing in the talk.</a:t>
-            </a:r>
-          </a:p>
-          <a:p>
-            <a:endParaRPr/>
-          </a:p>
-          <a:p>
-            <a:r>
-              <a:t>Emphasize that acceptance spans all three planes: repository data, automation, and validation/cutover. A repository URL and a green build do not prove identity, policy, artifact, deployment, observability, traceability, or rollback readiness.</a:t>
+              <a:t>DOCUMENTARY VOICE — the only register for this slide. Deliver slowly, deadpan, faintly awed, same conceit as the earlier section openers. Pause after the line, then go straight back to normal delivery for the Boards-vs-Projects framing slide. Keep this section brisk: five slides, and the payoff is the Test Plans slide and the recommendation, not length.</a:t>
             </a:r>
           </a:p>
         </p:txBody>
@@ -2530,7 +2492,9 @@
               <a:t>Straight delivery. Walk the six legs quickly. Budget for the 90-minute slot: section 1 about 8 minutes (including the opening), section 2 about 13, section 3 about 21, section 4 about 10, section 5 about 12, section 6 about 8. That is roughly 72 minutes of content plus four one-minute Q&amp;A pockets, which leaves about 14 minutes of open Q&amp;A on the thank-you slide. The ELM slide now sits in the appendix after the thank-you slide; pull it up only if someone asks.</a:t>
             </a:r>
           </a:p>
-          <a:p/>
+          <a:p>
+            <a:endParaRPr/>
+          </a:p>
           <a:p>
             <a:r>
               <a:t>This is not a GitHub sales pitch. It is a field guide to what transfers cleanly, what must be redesigned, and what should deliberately remain in Azure DevOps.</a:t>
@@ -2619,7 +2583,31 @@
           <a:lstStyle/>
           <a:p>
             <a:r>
-              <a:t>Brief check-in, not a discussion window — about 30 seconds given how much ground this section covers. Take one quick question if a hand is up, otherwise move straight into section 4. The real Q&amp;A time is banked for the open Q&amp;A at the end.</a:t>
+              <a:t>Straight delivery. Frame this before comparing feature by feature — Azure Boards and GitHub Projects are not two competitors in one category, they are two different models.</a:t>
+            </a:r>
+          </a:p>
+          <a:p>
+            <a:endParaRPr/>
+          </a:p>
+          <a:p>
+            <a:r>
+              <a:t>Azure Boards is a full enterprise work-tracking system organized around a process template: hierarchy, states, rules, capacity, cross-team reporting. GitHub Projects is a real planning layer organized around custom fields and views — org-level, spanning repositories, with sub-issues, issue types and dependencies all GA.</a:t>
+            </a:r>
+          </a:p>
+          <a:p>
+            <a:endParaRPr/>
+          </a:p>
+          <a:p>
+            <a:r>
+              <a:t>Do NOT call Projects a lightweight kanban board. That was fair a few years ago and this room will know it isn't now; understating it makes the Boards recommendation later sound motivated rather than reasoned. Naming the difference as two models rather than a feature gap is what stops the next slide reading as a scored competition.</a:t>
+            </a:r>
+          </a:p>
+          <a:p>
+            <a:endParaRPr/>
+          </a:p>
+          <a:p>
+            <a:r>
+              <a:t>The next slide takes each tool on its own terms before comparing what's lost in a migration — say that as a transition, don't put it on the slide.</a:t>
             </a:r>
           </a:p>
         </p:txBody>
@@ -2705,7 +2693,31 @@
           <a:lstStyle/>
           <a:p>
             <a:r>
-              <a:t>DOCUMENTARY VOICE — the only register for this slide. Deliver slowly, deadpan, faintly awed, same conceit as the earlier section openers. Pause after the line, then go straight back to normal delivery for the Boards-vs-Projects framing slide. Keep this section brisk: five slides, and the payoff is the Test Plans slide and the recommendation, not length.</a:t>
+              <a:t>Straight delivery. Take each tool on its own terms before comparing what a migration loses.</a:t>
+            </a:r>
+          </a:p>
+          <a:p>
+            <a:endParaRPr/>
+          </a:p>
+          <a:p>
+            <a:r>
+              <a:t>Left card, the enterprise case, stated plainly: hierarchical work items from Epics down to Tasks, built-in sprint planning and capacity management, Delivery Plans for dependencies across teams, and Boards Analytics feeding Power BI. It organizes around Project, Team and Area Path — a structure built for portfolios, not one team’s board.</a:t>
+            </a:r>
+          </a:p>
+          <a:p>
+            <a:endParaRPr/>
+          </a:p>
+          <a:p>
+            <a:r>
+              <a:t>Right card, and give Projects real credit, because the recommendation at the end of this section only carries weight if this half was honest. Projects is organized around custom fields (iteration, single-select, date, number) rather than a fixed process template. Sub-issues, issue types and dependencies are all GA, there are board, table and roadmap layouts, and automation comes built in or through Actions. It is org-level, not repo-scoped, and it lives next to the issues and PRs it tracks.</a:t>
+            </a:r>
+          </a:p>
+          <a:p>
+            <a:endParaRPr/>
+          </a:p>
+          <a:p>
+            <a:r>
+              <a:t>The contrast is process template versus fields and views, not enterprise versus toy. If asked about limits: a project holds up to 50 fields, counting the built-in ones.</a:t>
             </a:r>
           </a:p>
         </p:txBody>
@@ -2791,25 +2803,23 @@
           <a:lstStyle/>
           <a:p>
             <a:r>
-              <a:t>Straight delivery. Frame this before comparing feature by feature — Azure Boards and GitHub Projects are not two competitors in one category, they are two different models.</a:t>
-            </a:r>
-          </a:p>
-          <a:p/>
-          <a:p>
-            <a:r>
-              <a:t>Azure Boards is a full enterprise work-tracking system organized around a process template: hierarchy, states, rules, capacity, cross-team reporting. GitHub Projects is a real planning layer organized around custom fields and views — org-level, spanning repositories, with sub-issues, issue types and dependencies all GA.</a:t>
-            </a:r>
-          </a:p>
-          <a:p/>
-          <a:p>
-            <a:r>
-              <a:t>Do NOT call Projects a lightweight kanban board. That was fair a few years ago and this room will know it isn't now; understating it makes the Boards recommendation later sound motivated rather than reasoned. Naming the difference as two models rather than a feature gap is what stops the next slide reading as a scored competition.</a:t>
-            </a:r>
-          </a:p>
-          <a:p/>
-          <a:p>
-            <a:r>
-              <a:t>The next slide takes each tool on its own terms before comparing what's lost in a migration — say that as a transition, don't put it on the slide.</a:t>
+              <a:t>Straight delivery. Be concrete about the loss: sprint history and capacity data, custom process fields and rules, the process template itself, and the Project / Team / Area Path structure have no clean landing spot in GitHub Projects. Parent-child links are the exception; they can map to sub-issues, which go up to eight levels deep.</a:t>
+            </a:r>
+          </a:p>
+          <a:p>
+            <a:endParaRPr/>
+          </a:p>
+          <a:p>
+            <a:r>
+              <a:t>Set expectations on tooling honestly. There is no first-party tool that moves Azure Boards work items into GitHub Issues. The well-known azure-devops-migration-tools project moves work items between Azure DevOps projects and organizations, not to GitHub. What exists for GitHub is community scripts against the two APIs, and the data models still don’t line up, so this is a mapping project, not a one-command migration. This sets up the Test Plans slide and the recommendation that follows.</a:t>
+            </a:r>
+          </a:p>
+          <a:p>
+            <a:endParaRPr/>
+          </a:p>
+          <a:p>
+            <a:r>
+              <a:t>OPTIONAL LAUGH LINE — on losing sprint history and capacity data: “Nobody has ever asked to see sprint history from three years ago. They will ask exactly once, about six weeks after you delete it.”</a:t>
             </a:r>
           </a:p>
         </p:txBody>
@@ -2895,25 +2905,8 @@
           <a:lstStyle/>
           <a:p>
             <a:r>
-              <a:t>Straight delivery. Take each tool on its own terms before comparing what a migration loses.</a:t>
-            </a:r>
-          </a:p>
-          <a:p/>
-          <a:p>
-            <a:r>
-              <a:t>Left card, the enterprise case, stated plainly: hierarchical work items from Epics down to Tasks, built-in sprint planning and capacity management, Delivery Plans for dependencies across teams, and Boards Analytics feeding Power BI. It organizes around Project, Team and Area Path — a structure built for portfolios, not one team’s board.</a:t>
-            </a:r>
-          </a:p>
-          <a:p/>
-          <a:p>
-            <a:r>
-              <a:t>Right card, and give Projects real credit, because the recommendation at the end of this section only carries weight if this half was honest. Projects is organized around custom fields (iteration, single-select, date, number) rather than a fixed process template. Sub-issues, issue types and dependencies are all GA, there are board, table and roadmap layouts, and automation comes built in or through Actions. It is org-level, not repo-scoped, and it lives next to the issues and PRs it tracks.</a:t>
-            </a:r>
-          </a:p>
-          <a:p/>
-          <a:p>
-            <a:r>
-              <a:t>The contrast is process template versus fields and views, not enterprise versus toy. If asked about limits: a project holds up to 50 fields, counting the built-in ones.</a:t>
+              <a:rPr lang="en-US" dirty="0"/>
+              <a:t>Straight delivery, and let this one land plainly — it's probably the best-received slide in the whole deck precisely because it doesn't try to spin anything. There is no native GitHub Projects or Issues equivalent for structured manual and exploratory testing, full stop. In a regulated environment, that alone can be sufficient reason to keep Azure DevOps around. This is the shortest slide in the section on purpose — sometimes the honest answer is just 'it doesn't move, and that's fine,' and saying it plainly builds more credibility than manufacturing a workaround.</a:t>
             </a:r>
           </a:p>
         </p:txBody>
@@ -2936,6 +2929,194 @@
             <a:fld id="{F7021451-1387-4CA6-816F-3879F97B5CBC}" type="slidenum">
               <a:rPr lang="en-US"/>
               <a:t>33</a:t>
+            </a:fld>
+            <a:endParaRPr lang="en-US"/>
+          </a:p>
+        </p:txBody>
+      </p:sp>
+    </p:spTree>
+    <p:extLst>
+      <p:ext uri="{BB962C8B-B14F-4D97-AF65-F5344CB8AC3E}">
+        <p14:creationId xmlns:p14="http://schemas.microsoft.com/office/powerpoint/2010/main" val="1024086991"/>
+      </p:ext>
+    </p:extLst>
+  </p:cSld>
+  <p:clrMapOvr>
+    <a:masterClrMapping/>
+  </p:clrMapOvr>
+</p:notes>
+</file>
+
+<file path=ppt/notesSlides/notesSlide34.xml><?xml version="1.0" encoding="utf-8"?>
+<p:notes xmlns:a="http://schemas.openxmlformats.org/drawingml/2006/main" xmlns:r="http://schemas.openxmlformats.org/officeDocument/2006/relationships" xmlns:p="http://schemas.openxmlformats.org/presentationml/2006/main">
+  <p:cSld>
+    <p:spTree>
+      <p:nvGrpSpPr>
+        <p:cNvPr id="1" name=""/>
+        <p:cNvGrpSpPr/>
+        <p:nvPr/>
+      </p:nvGrpSpPr>
+      <p:grpSpPr>
+        <a:xfrm>
+          <a:off x="0" y="0"/>
+          <a:ext cx="0" cy="0"/>
+          <a:chOff x="0" y="0"/>
+          <a:chExt cx="0" cy="0"/>
+        </a:xfrm>
+      </p:grpSpPr>
+      <p:sp>
+        <p:nvSpPr>
+          <p:cNvPr id="2" name="Slide Image Placeholder 1"/>
+          <p:cNvSpPr>
+            <a:spLocks noGrp="1" noRot="1" noChangeAspect="1"/>
+          </p:cNvSpPr>
+          <p:nvPr>
+            <p:ph type="sldImg"/>
+          </p:nvPr>
+        </p:nvSpPr>
+        <p:spPr/>
+      </p:sp>
+      <p:sp>
+        <p:nvSpPr>
+          <p:cNvPr id="3" name="Notes Placeholder 2"/>
+          <p:cNvSpPr>
+            <a:spLocks noGrp="1"/>
+          </p:cNvSpPr>
+          <p:nvPr>
+            <p:ph type="body" idx="1"/>
+          </p:nvPr>
+        </p:nvSpPr>
+        <p:spPr/>
+        <p:txBody>
+          <a:bodyPr/>
+          <a:lstStyle/>
+          <a:p>
+            <a:r>
+              <a:t>Straight delivery. This is the explicit takeaway for the section, and it is section 2’s hybrid pattern applied to planning: connect Azure Boards to your GitHub repos before touching anything else. Developers work in GitHub, next to Copilot and their pull requests; managers keep the sprint hub, capacity charts and Power BI reporting exactly where they are. The Azure Boards app for GitHub links commits and PRs back to work items with AB# mentions, and the Copilot cloud agent can be started from a Boards item.</a:t>
+            </a:r>
+          </a:p>
+          <a:p>
+            <a:endParaRPr/>
+          </a:p>
+          <a:p>
+            <a:r>
+              <a:t>Say the recommendation plainly: don’t migrate to GitHub Issues unless your planning needs are genuinely simple. For most teams past a handful of people, the hierarchy, capacity planning and reporting Azure Boards already gives you are worth keeping.</a:t>
+            </a:r>
+          </a:p>
+          <a:p>
+            <a:endParaRPr/>
+          </a:p>
+          <a:p>
+            <a:r>
+              <a:t>Then the nuance, which is the bottom bar: this isn’t an argument for Azure Boards forever. It’s an argument against defaulting to GitHub Issues just because the code moved. Where you plan work is a separate decision from where the code lives, so leave that door open.</a:t>
+            </a:r>
+          </a:p>
+        </p:txBody>
+      </p:sp>
+      <p:sp>
+        <p:nvSpPr>
+          <p:cNvPr id="4" name="Slide Number Placeholder 3"/>
+          <p:cNvSpPr>
+            <a:spLocks noGrp="1"/>
+          </p:cNvSpPr>
+          <p:nvPr>
+            <p:ph type="sldNum" sz="quarter" idx="10"/>
+          </p:nvPr>
+        </p:nvSpPr>
+        <p:spPr/>
+        <p:txBody>
+          <a:bodyPr/>
+          <a:lstStyle/>
+          <a:p>
+            <a:fld id="{F7021451-1387-4CA6-816F-3879F97B5CBC}" type="slidenum">
+              <a:rPr lang="en-US"/>
+              <a:t>34</a:t>
+            </a:fld>
+            <a:endParaRPr lang="en-US"/>
+          </a:p>
+        </p:txBody>
+      </p:sp>
+    </p:spTree>
+    <p:extLst>
+      <p:ext uri="{BB962C8B-B14F-4D97-AF65-F5344CB8AC3E}">
+        <p14:creationId xmlns:p14="http://schemas.microsoft.com/office/powerpoint/2010/main" val="1024086991"/>
+      </p:ext>
+    </p:extLst>
+  </p:cSld>
+  <p:clrMapOvr>
+    <a:masterClrMapping/>
+  </p:clrMapOvr>
+</p:notes>
+</file>
+
+<file path=ppt/notesSlides/notesSlide35.xml><?xml version="1.0" encoding="utf-8"?>
+<p:notes xmlns:a="http://schemas.openxmlformats.org/drawingml/2006/main" xmlns:r="http://schemas.openxmlformats.org/officeDocument/2006/relationships" xmlns:p="http://schemas.openxmlformats.org/presentationml/2006/main">
+  <p:cSld>
+    <p:spTree>
+      <p:nvGrpSpPr>
+        <p:cNvPr id="1" name=""/>
+        <p:cNvGrpSpPr/>
+        <p:nvPr/>
+      </p:nvGrpSpPr>
+      <p:grpSpPr>
+        <a:xfrm>
+          <a:off x="0" y="0"/>
+          <a:ext cx="0" cy="0"/>
+          <a:chOff x="0" y="0"/>
+          <a:chExt cx="0" cy="0"/>
+        </a:xfrm>
+      </p:grpSpPr>
+      <p:sp>
+        <p:nvSpPr>
+          <p:cNvPr id="2" name="Slide Image Placeholder 1"/>
+          <p:cNvSpPr>
+            <a:spLocks noGrp="1" noRot="1" noChangeAspect="1"/>
+          </p:cNvSpPr>
+          <p:nvPr>
+            <p:ph type="sldImg"/>
+          </p:nvPr>
+        </p:nvSpPr>
+        <p:spPr/>
+      </p:sp>
+      <p:sp>
+        <p:nvSpPr>
+          <p:cNvPr id="3" name="Notes Placeholder 2"/>
+          <p:cNvSpPr>
+            <a:spLocks noGrp="1"/>
+          </p:cNvSpPr>
+          <p:nvPr>
+            <p:ph type="body" idx="1"/>
+          </p:nvPr>
+        </p:nvSpPr>
+        <p:spPr/>
+        <p:txBody>
+          <a:bodyPr/>
+          <a:lstStyle/>
+          <a:p>
+            <a:r>
+              <a:t>Brief check-in, not a discussion window — about a minute. Take one quick question if a hand is up, otherwise move straight into section 5. The real Q&amp;A time is banked for the open Q&amp;A at the end.</a:t>
+            </a:r>
+          </a:p>
+        </p:txBody>
+      </p:sp>
+      <p:sp>
+        <p:nvSpPr>
+          <p:cNvPr id="4" name="Slide Number Placeholder 3"/>
+          <p:cNvSpPr>
+            <a:spLocks noGrp="1"/>
+          </p:cNvSpPr>
+          <p:nvPr>
+            <p:ph type="sldNum" sz="quarter" idx="10"/>
+          </p:nvPr>
+        </p:nvSpPr>
+        <p:spPr/>
+        <p:txBody>
+          <a:bodyPr/>
+          <a:lstStyle/>
+          <a:p>
+            <a:fld id="{F7021451-1387-4CA6-816F-3879F97B5CBC}" type="slidenum">
+              <a:rPr lang="en-US"/>
+              <a:t>35</a:t>
             </a:fld>
             <a:endParaRPr lang="en-US"/>
           </a:p>
@@ -2999,19 +3180,8 @@
           <a:lstStyle/>
           <a:p>
             <a:r>
-              <a:t>Straight delivery. Be concrete about the loss: sprint history and capacity data, custom process fields and rules, the process template itself, and the Project / Team / Area Path structure have no clean landing spot in GitHub Projects. Parent-child links are the exception; they can map to sub-issues, which go up to eight levels deep.</a:t>
-            </a:r>
-          </a:p>
-          <a:p/>
-          <a:p>
-            <a:r>
-              <a:t>Set expectations on tooling honestly. There is no first-party tool that moves Azure Boards work items into GitHub Issues. The well-known azure-devops-migration-tools project moves work items between Azure DevOps projects and organizations, not to GitHub. What exists for GitHub is community scripts against the two APIs, and the data models still don’t line up, so this is a mapping project, not a one-command migration. This sets up the Test Plans slide and the recommendation that follows.</a:t>
-            </a:r>
-          </a:p>
-          <a:p/>
-          <a:p>
-            <a:r>
-              <a:t>OPTIONAL LAUGH LINE — on losing sprint history and capacity data: “Nobody has ever asked to see sprint history from three years ago. They will ask exactly once, about six weeks after you delete it.”</a:t>
+              <a:rPr lang="en-US" dirty="0"/>
+              <a:t>DOCUMENTARY VOICE — the only register for this slide. Deliver slowly, deadpan, faintly awed, same conceit as the earlier section openers. Pause after the line, then go straight back to normal delivery for the thesis slide. This section's closing slide comes back to this exact character — plant it here without over-explaining, the payoff lands later.</a:t>
             </a:r>
           </a:p>
         </p:txBody>
@@ -3097,8 +3267,7 @@
           <a:lstStyle/>
           <a:p>
             <a:r>
-              <a:rPr lang="en-US" dirty="0"/>
-              <a:t>Straight delivery, and let this one land plainly — it's probably the best-received slide in the whole deck precisely because it doesn't try to spin anything. There is no native GitHub Projects or Issues equivalent for structured manual and exploratory testing, full stop. In a regulated environment, that alone can be sufficient reason to keep Azure DevOps around. This is the shortest slide in the section on purpose — sometimes the honest answer is just 'it doesn't move, and that's fine,' and saying it plainly builds more credibility than manufacturing a workaround.</a:t>
+              <a:t>Straight delivery. This is the section’s thesis — land it early and come back to it. Most migrations that fail don’t fail in the converter; gh-ado2gh and Actions Importer do what they say. The execution-environment work from section 3 is real, but it is engineering you can plan. What sinks migrations is three predictable human failures: no real selection process (a choice made by momentum rather than evaluated on merit), customization starting before anyone understood the new tool, and a rollout that felt done TO people rather than WITH them. The rest of this section is about avoiding those three.</a:t>
             </a:r>
           </a:p>
         </p:txBody>
@@ -3184,19 +3353,23 @@
           <a:lstStyle/>
           <a:p>
             <a:r>
-              <a:t>Straight delivery. This is the explicit takeaway for the section, and it is section 2’s hybrid pattern applied to planning: connect Azure Boards to your GitHub repos before touching anything else. Developers work in GitHub, next to Copilot and their pull requests; managers keep the sprint hub, capacity charts and Power BI reporting exactly where they are. The Azure Boards app for GitHub links commits and PRs back to work items with AB# mentions, and the Copilot cloud agent can be started from a Boards item.</a:t>
-            </a:r>
-          </a:p>
-          <a:p/>
-          <a:p>
-            <a:r>
-              <a:t>Say the recommendation plainly: don’t migrate to GitHub Issues unless your planning needs are genuinely simple. For most teams past a handful of people, the hierarchy, capacity planning and reporting Azure Boards already gives you are worth keeping.</a:t>
-            </a:r>
-          </a:p>
-          <a:p/>
-          <a:p>
-            <a:r>
-              <a:t>Then the nuance, which is the bottom bar: this isn’t an argument for Azure Boards forever. It’s an argument against defaulting to GitHub Issues just because the code moved. Where you plan work is a separate decision from where the code lives, so leave that door open.</a:t>
+              <a:t>Before walking the steps: “In most organizations the real selection process is that somebody senior used it at their last job.” OPTIONAL LAUGH LINE, and it is precisely failure mode one from the previous slide.</a:t>
+            </a:r>
+          </a:p>
+          <a:p>
+            <a:endParaRPr/>
+          </a:p>
+          <a:p>
+            <a:r>
+              <a:t>Straight delivery, walk this quickly. Frame it for this room: you have already chosen GitHub, so this is for the choices inside the migration — Boards or Projects, hosted or self-hosted runners, Azure Artifacts or GitHub Packages. Define must-haves, assess real constraints like data residency and compliance, model one real increment of actual work in each option rather than watching a demo, score it with a weighted rubric so the decision is defensible later, then pilot.</a:t>
+            </a:r>
+          </a:p>
+          <a:p>
+            <a:endParaRPr/>
+          </a:p>
+          <a:p>
+            <a:r>
+              <a:t>Step five carries the second failure mode: customizing on day one locks in decisions made by people who didn’t understand the tool yet. Every custom field, automation rule or process tweak added before the pilot is a bet placed with the least information you’ll ever have — that’s the bottom bar. Run the pilot on defaults, then customize with real usage data instead of guesses.</a:t>
             </a:r>
           </a:p>
         </p:txBody>
@@ -3219,6 +3392,93 @@
             <a:fld id="{F7021451-1387-4CA6-816F-3879F97B5CBC}" type="slidenum">
               <a:rPr lang="en-US"/>
               <a:t>38</a:t>
+            </a:fld>
+            <a:endParaRPr lang="en-US"/>
+          </a:p>
+        </p:txBody>
+      </p:sp>
+    </p:spTree>
+    <p:extLst>
+      <p:ext uri="{BB962C8B-B14F-4D97-AF65-F5344CB8AC3E}">
+        <p14:creationId xmlns:p14="http://schemas.microsoft.com/office/powerpoint/2010/main" val="1024086991"/>
+      </p:ext>
+    </p:extLst>
+  </p:cSld>
+  <p:clrMapOvr>
+    <a:masterClrMapping/>
+  </p:clrMapOvr>
+</p:notes>
+</file>
+
+<file path=ppt/notesSlides/notesSlide39.xml><?xml version="1.0" encoding="utf-8"?>
+<p:notes xmlns:a="http://schemas.openxmlformats.org/drawingml/2006/main" xmlns:r="http://schemas.openxmlformats.org/officeDocument/2006/relationships" xmlns:p="http://schemas.openxmlformats.org/presentationml/2006/main">
+  <p:cSld>
+    <p:spTree>
+      <p:nvGrpSpPr>
+        <p:cNvPr id="1" name=""/>
+        <p:cNvGrpSpPr/>
+        <p:nvPr/>
+      </p:nvGrpSpPr>
+      <p:grpSpPr>
+        <a:xfrm>
+          <a:off x="0" y="0"/>
+          <a:ext cx="0" cy="0"/>
+          <a:chOff x="0" y="0"/>
+          <a:chExt cx="0" cy="0"/>
+        </a:xfrm>
+      </p:grpSpPr>
+      <p:sp>
+        <p:nvSpPr>
+          <p:cNvPr id="2" name="Slide Image Placeholder 1"/>
+          <p:cNvSpPr>
+            <a:spLocks noGrp="1" noRot="1" noChangeAspect="1"/>
+          </p:cNvSpPr>
+          <p:nvPr>
+            <p:ph type="sldImg"/>
+          </p:nvPr>
+        </p:nvSpPr>
+        <p:spPr/>
+      </p:sp>
+      <p:sp>
+        <p:nvSpPr>
+          <p:cNvPr id="3" name="Notes Placeholder 2"/>
+          <p:cNvSpPr>
+            <a:spLocks noGrp="1"/>
+          </p:cNvSpPr>
+          <p:nvPr>
+            <p:ph type="body" idx="1"/>
+          </p:nvPr>
+        </p:nvSpPr>
+        <p:spPr/>
+        <p:txBody>
+          <a:bodyPr/>
+          <a:lstStyle/>
+          <a:p>
+            <a:r>
+              <a:rPr lang="en-US"/>
+              <a:t>Straight delivery. Align the rollout with the three-plane model. Define authority and traceability first, prove one repository end-to-end, then scale in waves with explicit entry criteria. Cut over only with validation and rollback ready; decommission after long-tail checks, not immediately after migration.</a:t>
+            </a:r>
+          </a:p>
+        </p:txBody>
+      </p:sp>
+      <p:sp>
+        <p:nvSpPr>
+          <p:cNvPr id="4" name="Slide Number Placeholder 3"/>
+          <p:cNvSpPr>
+            <a:spLocks noGrp="1"/>
+          </p:cNvSpPr>
+          <p:nvPr>
+            <p:ph type="sldNum" sz="quarter" idx="10"/>
+          </p:nvPr>
+        </p:nvSpPr>
+        <p:spPr/>
+        <p:txBody>
+          <a:bodyPr/>
+          <a:lstStyle/>
+          <a:p>
+            <a:fld id="{F7021451-1387-4CA6-816F-3879F97B5CBC}" type="slidenum">
+              <a:rPr lang="en-US"/>
+              <a:t>39</a:t>
             </a:fld>
             <a:endParaRPr lang="en-US"/>
           </a:p>
@@ -3368,7 +3628,23 @@
           <a:lstStyle/>
           <a:p>
             <a:r>
-              <a:t>Brief check-in, not a discussion window — about a minute. Take one quick question if a hand is up, otherwise move straight into section 5. The real Q&amp;A time is banked for the open Q&amp;A at the end.</a:t>
+              <a:t>Straight delivery. Sticker-price comparisons are the easiest way to make a bad decision look rigorous. Compare the whole bill: licensing tiers; GitHub Secret Protection and GitHub Code Security, which since April 2025 are sold as two separate add-ons rather than one Advanced Security bundle (Azure DevOps sells the same two products, so security alone doesn’t tip the decision); runner and compute minutes; and the real admin and migration effort, which is easy to leave off a spreadsheet entirely.</a:t>
+            </a:r>
+          </a:p>
+          <a:p>
+            <a:endParaRPr/>
+          </a:p>
+          <a:p>
+            <a:r>
+              <a:t>The bottom bar is the part most business cases skip: price the migration and the steady state as two separate numbers, and count the months when both platforms are billing at once. Dual-running is where the estimate usually goes wrong.</a:t>
+            </a:r>
+          </a:p>
+          <a:p>
+            <a:endParaRPr/>
+          </a:p>
+          <a:p>
+            <a:r>
+              <a:t>OPTIONAL LAUGH LINE — on the last item of the cost model: “Every migration business case has a line called *migration effort*, and it is always the number nobody wanted to be the person to estimate.”</a:t>
             </a:r>
           </a:p>
         </p:txBody>
@@ -3454,8 +3730,55 @@
           <a:lstStyle/>
           <a:p>
             <a:r>
-              <a:rPr lang="en-US" dirty="0"/>
-              <a:t>DOCUMENTARY VOICE — the only register for this slide. Deliver slowly, deadpan, faintly awed, same conceit as the earlier section openers. Pause after the line, then go straight back to normal delivery for the thesis slide. This section's closing slide comes back to this exact character — plant it here without over-explaining, the payoff lands later.</a:t>
+              <a:t>Straight delivery. This is the counterweight to section 1. AI is the honest reason most teams are migrating — this slide is where you pay that argument down so it reads as analysis rather than a pitch. Frame the four as a to-do list, not as reasons to doubt the move.</a:t>
+            </a:r>
+          </a:p>
+          <a:p>
+            <a:endParaRPr/>
+          </a:p>
+          <a:p>
+            <a:r>
+              <a:t>1. WORK ITEMS. Verified behavior, and it closes the loop with the Boards recommendation in section 4: when the Copilot cloud agent is triggered from an Azure Boards work item it captures the text fields — description, repro steps — plus the last 50 comments. So keeping Boards does not cost you the AI payoff; it just means the Boards item literally is the prompt.</a:t>
+            </a:r>
+          </a:p>
+          <a:p>
+            <a:endParaRPr/>
+          </a:p>
+          <a:p>
+            <a:r>
+              <a:t>   WORTH SAYING FOR A REGULATED ROOM: that captured context is stored in the pull request and is visible to anyone with access to the repository. A work item that was private in Azure DevOps becomes readable in GitHub the moment an agent picks it up. Most people have not thought about that, and for anyone with compliance obligations it is the most useful thirty seconds on the slide.</a:t>
+            </a:r>
+          </a:p>
+          <a:p>
+            <a:endParaRPr/>
+          </a:p>
+          <a:p>
+            <a:r>
+              <a:t>2. CONVENTIONS. Three supported files: .github/copilot-instructions.md repository-wide, path-specific NAME.instructions.md under .github/instructions (cloud agent and code review only), and AGENTS.md anywhere in the tree, nearest one winning. Without them the agent infers house style from whatever it can see, which on a large legacy repo is whatever is oldest.</a:t>
+            </a:r>
+          </a:p>
+          <a:p>
+            <a:endParaRPr/>
+          </a:p>
+          <a:p>
+            <a:r>
+              <a:t>3. TESTS. Tie this back to the crossing section — a green build is evidence, not acceptance. Agent throughput is capped by human review capacity until CI carries real weight, so teams with thin or flaky suites do not get faster, they just move the bottleneck onto reviewers.</a:t>
+            </a:r>
+          </a:p>
+          <a:p>
+            <a:endParaRPr/>
+          </a:p>
+          <a:p>
+            <a:r>
+              <a:t>4. LICENSING. Moving the repository turns nothing on. The cloud agent needs a paid Copilot plan, it must be enabled on each connected repository, and an organization owner has to install the Azure Boards GitHub app before anyone can use the integration.</a:t>
+            </a:r>
+          </a:p>
+          <a:p>
+            <a:endParaRPr/>
+          </a:p>
+          <a:p>
+            <a:r>
+              <a:t>OPTIONAL LAUGH LINE — after “The work item is the prompt”: “Garbage in, garbage out — except now the garbage arrives with unit tests and a confident summary.”</a:t>
             </a:r>
           </a:p>
         </p:txBody>
@@ -3541,7 +3864,7 @@
           <a:lstStyle/>
           <a:p>
             <a:r>
-              <a:t>Straight delivery. This is the section’s thesis — land it early and come back to it. Most migrations that fail don’t fail in the converter; gh-ado2gh and Actions Importer do what they say. The execution-environment work from section 3 is real, but it is engineering you can plan. What sinks migrations is three predictable human failures: no real selection process (a choice made by momentum rather than evaluated on merit), customization starting before anyone understood the new tool, and a rollout that felt done TO people rather than WITH them. The rest of this section is about avoiding those three.</a:t>
+              <a:t>Documentary aside — same voice as the opener cards, played for a beat, then straight delivery resumes. This is the section's closing synthesis: startups and one-to-three-squad teams should just take GitHub Projects' lightweight fit, no enterprise overhead needed. Scaled agile, regulated industries, and multi-team portfolios are exactly where Azure Boards' hierarchy and reporting earn their keep. Mixed estates get the hybrid pattern, deliberately — a fit, not a compromise. Then the documentary callback: the Senior Engineer from the opener card isn't wrong to be cautious about change, they're just defending the old pipeline with the wrong argument ('it's always worked') instead of the right one ('here's what the audit says'). Land this warmly, not as a dunk — the point is to hear the objection out and then hand them the Actions Importer audit from section 3. The bucket their pipeline landed in is the conversation.</a:t>
             </a:r>
           </a:p>
         </p:txBody>
@@ -3627,19 +3950,7 @@
           <a:lstStyle/>
           <a:p>
             <a:r>
-              <a:t>Before walking the steps: “In most organizations the real selection process is that somebody senior used it at their last job.” OPTIONAL LAUGH LINE, and it is precisely failure mode one from the previous slide.</a:t>
-            </a:r>
-          </a:p>
-          <a:p/>
-          <a:p>
-            <a:r>
-              <a:t>Straight delivery, walk this quickly. Frame it for this room: you have already chosen GitHub, so this is for the choices inside the migration — Boards or Projects, hosted or self-hosted runners, Azure Artifacts or GitHub Packages. Define must-haves, assess real constraints like data residency and compliance, model one real increment of actual work in each option rather than watching a demo, score it with a weighted rubric so the decision is defensible later, then pilot.</a:t>
-            </a:r>
-          </a:p>
-          <a:p/>
-          <a:p>
-            <a:r>
-              <a:t>Step five carries the second failure mode: customizing on day one locks in decisions made by people who didn’t understand the tool yet. Every custom field, automation rule or process tweak added before the pilot is a bet placed with the least information you’ll ever have — that’s the bottom bar. Run the pilot on defaults, then customize with real usage data instead of guesses.</a:t>
+              <a:t>Brief check-in, not a discussion window — about a minute. Take one quick question if a hand is up, otherwise move straight into section 6, the final section. The real Q&amp;A time is banked for the open Q&amp;A at the end.</a:t>
             </a:r>
           </a:p>
         </p:txBody>
@@ -3662,6 +3973,93 @@
             <a:fld id="{F7021451-1387-4CA6-816F-3879F97B5CBC}" type="slidenum">
               <a:rPr lang="en-US"/>
               <a:t>43</a:t>
+            </a:fld>
+            <a:endParaRPr lang="en-US"/>
+          </a:p>
+        </p:txBody>
+      </p:sp>
+    </p:spTree>
+    <p:extLst>
+      <p:ext uri="{BB962C8B-B14F-4D97-AF65-F5344CB8AC3E}">
+        <p14:creationId xmlns:p14="http://schemas.microsoft.com/office/powerpoint/2010/main" val="1024086991"/>
+      </p:ext>
+    </p:extLst>
+  </p:cSld>
+  <p:clrMapOvr>
+    <a:masterClrMapping/>
+  </p:clrMapOvr>
+</p:notes>
+</file>
+
+<file path=ppt/notesSlides/notesSlide44.xml><?xml version="1.0" encoding="utf-8"?>
+<p:notes xmlns:a="http://schemas.openxmlformats.org/drawingml/2006/main" xmlns:r="http://schemas.openxmlformats.org/officeDocument/2006/relationships" xmlns:p="http://schemas.openxmlformats.org/presentationml/2006/main">
+  <p:cSld>
+    <p:spTree>
+      <p:nvGrpSpPr>
+        <p:cNvPr id="1" name=""/>
+        <p:cNvGrpSpPr/>
+        <p:nvPr/>
+      </p:nvGrpSpPr>
+      <p:grpSpPr>
+        <a:xfrm>
+          <a:off x="0" y="0"/>
+          <a:ext cx="0" cy="0"/>
+          <a:chOff x="0" y="0"/>
+          <a:chExt cx="0" cy="0"/>
+        </a:xfrm>
+      </p:grpSpPr>
+      <p:sp>
+        <p:nvSpPr>
+          <p:cNvPr id="2" name="Slide Image Placeholder 1"/>
+          <p:cNvSpPr>
+            <a:spLocks noGrp="1" noRot="1" noChangeAspect="1"/>
+          </p:cNvSpPr>
+          <p:nvPr>
+            <p:ph type="sldImg"/>
+          </p:nvPr>
+        </p:nvSpPr>
+        <p:spPr/>
+      </p:sp>
+      <p:sp>
+        <p:nvSpPr>
+          <p:cNvPr id="3" name="Notes Placeholder 2"/>
+          <p:cNvSpPr>
+            <a:spLocks noGrp="1"/>
+          </p:cNvSpPr>
+          <p:nvPr>
+            <p:ph type="body" idx="1"/>
+          </p:nvPr>
+        </p:nvSpPr>
+        <p:spPr/>
+        <p:txBody>
+          <a:bodyPr/>
+          <a:lstStyle/>
+          <a:p>
+            <a:r>
+              <a:rPr lang="en-US" dirty="0"/>
+              <a:t>DOCUMENTARY VOICE — spoken live, not read. This is the section opener: slow down, let the metaphor land. We are closing the loop on the "field guide to a new habitat" framing from the whole talk — this section is about what still limps back to the old watering hole after everyone else has moved on.</a:t>
+            </a:r>
+          </a:p>
+        </p:txBody>
+      </p:sp>
+      <p:sp>
+        <p:nvSpPr>
+          <p:cNvPr id="4" name="Slide Number Placeholder 3"/>
+          <p:cNvSpPr>
+            <a:spLocks noGrp="1"/>
+          </p:cNvSpPr>
+          <p:nvPr>
+            <p:ph type="sldNum" sz="quarter" idx="10"/>
+          </p:nvPr>
+        </p:nvSpPr>
+        <p:spPr/>
+        <p:txBody>
+          <a:bodyPr/>
+          <a:lstStyle/>
+          <a:p>
+            <a:fld id="{F7021451-1387-4CA6-816F-3879F97B5CBC}" type="slidenum">
+              <a:rPr lang="en-US"/>
+              <a:t>44</a:t>
             </a:fld>
             <a:endParaRPr lang="en-US"/>
           </a:p>
@@ -3725,8 +4123,7 @@
           <a:lstStyle/>
           <a:p>
             <a:r>
-              <a:rPr lang="en-US"/>
-              <a:t>Straight delivery. Align the rollout with the three-plane model. Define authority and traceability first, prove one repository end-to-end, then scale in waves with explicit entry criteria. Cut over only with validation and rollback ready; decommission after long-tail checks, not immediately after migration.</a:t>
+              <a:t>STRAIGHT delivery. This is the practical, checklist-voiced part of the section. The five rows are meant to be read as "here is where these hide" — invite the room to mentally add their own sixth row, because every org has one nobody else would guess.</a:t>
             </a:r>
           </a:p>
         </p:txBody>
@@ -3812,19 +4209,31 @@
           <a:lstStyle/>
           <a:p>
             <a:r>
-              <a:t>Straight delivery. Sticker-price comparisons are the easiest way to make a bad decision look rigorous. Compare the whole bill: licensing tiers; GitHub Secret Protection and GitHub Code Security, which since April 2025 are sold as two separate add-ons rather than one Advanced Security bundle (Azure DevOps sells the same two products, so security alone doesn’t tip the decision); runner and compute minutes; and the real admin and migration effort, which is easy to leave off a spreadsheet entirely.</a:t>
-            </a:r>
-          </a:p>
-          <a:p/>
-          <a:p>
-            <a:r>
-              <a:t>The bottom bar is the part most business cases skip: price the migration and the steady state as two separate numbers, and count the months when both platforms are billing at once. Dual-running is where the estimate usually goes wrong.</a:t>
-            </a:r>
-          </a:p>
-          <a:p/>
-          <a:p>
-            <a:r>
-              <a:t>OPTIONAL LAUGH LINE — on the last item of the cost model: “Every migration business case has a line called *migration effort*, and it is always the number nobody wanted to be the person to estimate.”</a:t>
+              <a:t>Two registers on this one slide. STRAIGHT for the top two cards — this is real mechanical risk, say it plainly.</a:t>
+            </a:r>
+          </a:p>
+          <a:p>
+            <a:endParaRPr/>
+          </a:p>
+          <a:p>
+            <a:r>
+              <a:t>The precision that matters: an org owner sends the attribution invitation, but nothing is reattributed until the person accepts it. Which means your reclaim rate depends on people reading email — that is its own migration risk, and it usually gets a laugh because everyone knows it is true. Enterprise Managed Users are the exception, where the reclaim completes immediately without an invitation. Git commits are attributed by email and are unaffected either way. The EMU exception is no longer on the slide, so say it here.</a:t>
+            </a:r>
+          </a:p>
+          <a:p>
+            <a:endParaRPr/>
+          </a:p>
+          <a:p>
+            <a:r>
+              <a:t>Be precise about what sits on a mannequin: pull-request data only — authorship, comments and reviews. Work items don’t migrate at all, so there is no work-item history to reclaim.</a:t>
+            </a:r>
+          </a:p>
+          <a:p>
+            <a:endParaRPr/>
+          </a:p>
+          <a:p>
+            <a:r>
+              <a:t>Then shift into DOCUMENTARY VOICE for the on-slide aside at the bottom, read as written, then straight back to conference delivery. The mannequin framing is the callback that ties this section's watering-hole metaphor to identity specifically.</a:t>
             </a:r>
           </a:p>
         </p:txBody>
@@ -3910,43 +4319,15 @@
           <a:lstStyle/>
           <a:p>
             <a:r>
-              <a:t>Straight delivery. This is the counterweight to section 1. AI is the honest reason most teams are migrating — this slide is where you pay that argument down so it reads as analysis rather than a pitch. Frame the four as a to-do list, not as reasons to doubt the move.</a:t>
-            </a:r>
-          </a:p>
-          <a:p/>
-          <a:p>
-            <a:r>
-              <a:t>1. WORK ITEMS. Verified behavior, and it closes the loop with the Boards recommendation in section 4: when the Copilot cloud agent is triggered from an Azure Boards work item it captures the text fields — description, repro steps — plus the last 50 comments. So keeping Boards does not cost you the AI payoff; it just means the Boards item literally is the prompt.</a:t>
-            </a:r>
-          </a:p>
-          <a:p/>
-          <a:p>
-            <a:r>
-              <a:t>   WORTH SAYING FOR A REGULATED ROOM: that captured context is stored in the pull request and is visible to anyone with access to the repository. A work item that was private in Azure DevOps becomes readable in GitHub the moment an agent picks it up. Most people have not thought about that, and for anyone with compliance obligations it is the most useful thirty seconds on the slide.</a:t>
-            </a:r>
-          </a:p>
-          <a:p/>
-          <a:p>
-            <a:r>
-              <a:t>2. CONVENTIONS. Three supported files: .github/copilot-instructions.md repository-wide, path-specific NAME.instructions.md under .github/instructions (cloud agent and code review only), and AGENTS.md anywhere in the tree, nearest one winning. Without them the agent infers house style from whatever it can see, which on a large legacy repo is whatever is oldest.</a:t>
-            </a:r>
-          </a:p>
-          <a:p/>
-          <a:p>
-            <a:r>
-              <a:t>3. TESTS. Tie this back to the crossing section — a green build is evidence, not acceptance. Agent throughput is capped by human review capacity until CI carries real weight, so teams with thin or flaky suites do not get faster, they just move the bottleneck onto reviewers.</a:t>
-            </a:r>
-          </a:p>
-          <a:p/>
-          <a:p>
-            <a:r>
-              <a:t>4. LICENSING. Moving the repository turns nothing on. The cloud agent needs a paid Copilot plan, it must be enabled on each connected repository, and an organization owner has to install the Azure Boards GitHub app before anyone can use the integration.</a:t>
-            </a:r>
-          </a:p>
-          <a:p/>
-          <a:p>
-            <a:r>
-              <a:t>OPTIONAL LAUGH LINE — after “The work item is the prompt”: “Garbage in, garbage out — except now the garbage arrives with unit tests and a confident summary.”</a:t>
+              <a:t>STRAIGHT delivery, briskly. For item three, recap the three planes and the cross-plane methods. For item five, reinforce that migration is an operating model: ownership, entry criteria, evidence, rollback, and decommissioning—not merely a tooling sequence.</a:t>
+            </a:r>
+          </a:p>
+          <a:p>
+            <a:endParaRPr/>
+          </a:p>
+          <a:p>
+            <a:r>
+              <a:t>Then hand straight off to the Unglamorous Truth slide. The recap is the list; that slide is the point. Do not editorialise between the two — just turn the page.</a:t>
             </a:r>
           </a:p>
         </p:txBody>
@@ -4032,7 +4413,23 @@
           <a:lstStyle/>
           <a:p>
             <a:r>
-              <a:t>Documentary aside — same voice as the opener cards, played for a beat, then straight delivery resumes. This is the section's closing synthesis: startups and one-to-three-squad teams should just take GitHub Projects' lightweight fit, no enterprise overhead needed. Scaled agile, regulated industries, and multi-team portfolios are exactly where Azure Boards' hierarchy and reporting earn their keep. Mixed estates get the hybrid pattern, deliberately — a fit, not a compromise. Then the documentary callback: the Senior Engineer from the opener card isn't wrong to be cautious about change, they're just defending the old pipeline with the wrong argument ('it's always worked') instead of the right one ('here's what the audit says'). Land this warmly, not as a dunk — the point is to hear the objection out and then hand them the Actions Importer audit from section 3. The bucket their pipeline landed in is the conversation.</a:t>
+              <a:t>STRAIGHT delivery, and let it land quieter than anything around it. This is the deck's thesis in one sentence, and it now sits where it earns the most: the recap just handed them six things to remember, and this is the one thing to feel.</a:t>
+            </a:r>
+          </a:p>
+          <a:p>
+            <a:endParaRPr/>
+          </a:p>
+          <a:p>
+            <a:r>
+              <a:t>The slide is built as a statement, not a section card — light ground, no motif, sentence centred, nothing on it competing with the line. Deliver the first sentence flat, then pause before the last clause. “And got fixed by people in the room” is the payoff and it is set in the accent colour for exactly that reason: land it on the people, not the checklist.</a:t>
+            </a:r>
+          </a:p>
+          <a:p>
+            <a:endParaRPr/>
+          </a:p>
+          <a:p>
+            <a:r>
+              <a:t>Then go straight into the documentary closer. These two are twins — the same thought in two registers, plain-spoken in light, documentary in dark — so do not take a long pause here and another one there. This slide sets the closer up; the closer gets the silence.</a:t>
             </a:r>
           </a:p>
         </p:txBody>
@@ -4118,7 +4515,47 @@
           <a:lstStyle/>
           <a:p>
             <a:r>
-              <a:t>Brief check-in, not a discussion window — about a minute. Take one quick question if a hand is up, otherwise move straight into section 6, the final section. The real Q&amp;A time is banked for the open Q&amp;A at the end.</a:t>
+              <a:t>DOCUMENTARY VOICE — spoken live, slower than anything else in the deck.</a:t>
+            </a:r>
+          </a:p>
+          <a:p>
+            <a:endParaRPr/>
+          </a:p>
+          <a:p>
+            <a:r>
+              <a:t>Three beats, and they are paced differently. The first line is calm and satisfied: everything worked. The second is where the joke builds — take your time on “every Tuesday at 3 a.m., triggered by nothing, owned by no one,” because the specificity is what makes it funny. Then a real pause, and the last line flat: “Nobody told it the herd had moved.”</a:t>
+            </a:r>
+          </a:p>
+          <a:p>
+            <a:endParaRPr/>
+          </a:p>
+          <a:p>
+            <a:r>
+              <a:t>That last line is the callback to section 6's title, so it should land as a click rather than a punchline. Let the silence sit for two full seconds before advancing — do not rush into the thank-you slide, and do not add another joke on top of it.</a:t>
+            </a:r>
+          </a:p>
+          <a:p>
+            <a:endParaRPr/>
+          </a:p>
+          <a:p>
+            <a:r>
+              <a:t>Note the division of labour with the Unglamorous Truth slide two back: that one is the sincere version in your own voice, this one is the funny version in the documentary voice. Sincerity first, laugh last.</a:t>
+            </a:r>
+          </a:p>
+          <a:p>
+            <a:endParaRPr/>
+          </a:p>
+          <a:p>
+            <a:r>
+              <a:t>---- ALTERNATE CLOSER, if this one doesn't fit on the night ----</a:t>
+            </a:r>
+          </a:p>
+          <a:p>
+            <a:endParaRPr/>
+          </a:p>
+          <a:p>
+            <a:r>
+              <a:t>WARMER: “The herd has crossed. They pause on the far bank, survey the new territory — and immediately begin recreating the folder structure they left behind. They will learn. They always do.”  (Use if you want to end on warmth rather than a laugh. Overlaps slightly with the Unglamorous Truth slide.)</a:t>
             </a:r>
           </a:p>
         </p:txBody>
@@ -4141,6 +4578,155 @@
             <a:fld id="{F7021451-1387-4CA6-816F-3879F97B5CBC}" type="slidenum">
               <a:rPr lang="en-US"/>
               <a:t>49</a:t>
+            </a:fld>
+            <a:endParaRPr lang="en-US"/>
+          </a:p>
+        </p:txBody>
+      </p:sp>
+    </p:spTree>
+    <p:extLst>
+      <p:ext uri="{BB962C8B-B14F-4D97-AF65-F5344CB8AC3E}">
+        <p14:creationId xmlns:p14="http://schemas.microsoft.com/office/powerpoint/2010/main" val="1024086991"/>
+      </p:ext>
+    </p:extLst>
+  </p:cSld>
+  <p:clrMapOvr>
+    <a:masterClrMapping/>
+  </p:clrMapOvr>
+</p:notes>
+</file>
+
+<file path=ppt/notesSlides/notesSlide5.xml><?xml version="1.0" encoding="utf-8"?>
+<p:notes xmlns:a="http://schemas.openxmlformats.org/drawingml/2006/main" xmlns:r="http://schemas.openxmlformats.org/officeDocument/2006/relationships" xmlns:p="http://schemas.openxmlformats.org/presentationml/2006/main">
+  <p:cSld>
+    <p:spTree>
+      <p:nvGrpSpPr>
+        <p:cNvPr id="1" name=""/>
+        <p:cNvGrpSpPr/>
+        <p:nvPr/>
+      </p:nvGrpSpPr>
+      <p:grpSpPr>
+        <a:xfrm>
+          <a:off x="0" y="0"/>
+          <a:ext cx="0" cy="0"/>
+          <a:chOff x="0" y="0"/>
+          <a:chExt cx="0" cy="0"/>
+        </a:xfrm>
+      </p:grpSpPr>
+      <p:sp>
+        <p:nvSpPr>
+          <p:cNvPr id="2" name="Slide Image Placeholder 1"/>
+          <p:cNvSpPr>
+            <a:spLocks noGrp="1" noRot="1" noChangeAspect="1"/>
+          </p:cNvSpPr>
+          <p:nvPr>
+            <p:ph type="sldImg"/>
+          </p:nvPr>
+        </p:nvSpPr>
+        <p:spPr/>
+      </p:sp>
+      <p:sp>
+        <p:nvSpPr>
+          <p:cNvPr id="3" name="Notes Placeholder 2"/>
+          <p:cNvSpPr>
+            <a:spLocks noGrp="1"/>
+          </p:cNvSpPr>
+          <p:nvPr>
+            <p:ph type="body" idx="1"/>
+          </p:nvPr>
+        </p:nvSpPr>
+        <p:spPr/>
+        <p:txBody>
+          <a:bodyPr/>
+          <a:lstStyle/>
+          <a:p>
+            <a:r>
+              <a:t>Straight delivery. Name the real reason teams migrate before the polite reasons: most of the agentic Copilot work (cloud agent, agentic code review, agentic Autofix, Agent HQ) ships on GitHub first. Be fair to Microsoft: Azure DevOps is gaining AI features too, and Copilot in the IDE works wherever the repository is hosted. The point is not that Azure DevOps has nothing; it is that the frontier depends on where the repository lives.</a:t>
+            </a:r>
+          </a:p>
+          <a:p>
+            <a:endParaRPr/>
+          </a:p>
+          <a:p>
+            <a:r>
+              <a:t>Open the table by getting ahead of the heckle: “Field guides go out of date, and so do capability tables. Everything here has a shelf life measured in sprints.” Then walk the four rows. The last one is the one that matters: the cloud agent needs a GitHub-hosted repository even when it is started from Azure Boards.</a:t>
+            </a:r>
+          </a:p>
+          <a:p>
+            <a:endParaRPr/>
+          </a:p>
+          <a:p>
+            <a:r>
+              <a:t>Do not frame this as “GitHub has AI and Azure DevOps does not.” Frame it as a difference in native depth, integration, and repository dependency.</a:t>
+            </a:r>
+          </a:p>
+          <a:p>
+            <a:endParaRPr/>
+          </a:p>
+          <a:p>
+            <a:r>
+              <a:t>CUT FROM THE SLIDE, for Q&amp;A:</a:t>
+            </a:r>
+          </a:p>
+          <a:p>
+            <a:r>
+              <a:t>- Repository-aware chat. GitHub: native workspace and repository context. Azure DevOps: local repo context, plus Azure DevOps service context through MCP.</a:t>
+            </a:r>
+          </a:p>
+          <a:p>
+            <a:r>
+              <a:t>- Multi-agent orchestration. GitHub: a central hub running Copilot, Claude and Codex sessions in parallel. Azure DevOps: no native equivalent; external agents connect through MCP.</a:t>
+            </a:r>
+          </a:p>
+          <a:p>
+            <a:r>
+              <a:t>- Azure DevOps MCP. The Remote MCP Server is GA and the server itself is free; normal Azure DevOps pricing and AI-platform usage charges may still apply. The next slide covers MCP.</a:t>
+            </a:r>
+          </a:p>
+          <a:p>
+            <a:r>
+              <a:t>- Licensing. Paid Copilot for agents and review; GitHub Code Security where Autofix is needed.</a:t>
+            </a:r>
+          </a:p>
+          <a:p>
+            <a:endParaRPr/>
+          </a:p>
+          <a:p>
+            <a:r>
+              <a:t>The capability gap is real, but it is neither absolute nor static. As of September 21, 2026: Azure DevOps Remote MCP Server is generally available; Copilot Code Review for Azure Repos is in public preview; Copilot Autofix for Azure DevOps remains in limited public preview; and GitHub Copilot cloud agent still requires a GitHub-hosted repository even when initiated from Azure Boards.</a:t>
+            </a:r>
+          </a:p>
+          <a:p>
+            <a:endParaRPr/>
+          </a:p>
+          <a:p>
+            <a:r>
+              <a:t>Sources (accessed September 21, 2026): GitHub Docs — About GitHub Copilot cloud agent; Integrating Copilot cloud agent with Azure Boards; About agent management; About autofix for code scanning. Microsoft Learn — Azure DevOps Sprint 278 and Sprint 279 release notes; Azure DevOps MCP Server overview; Copilot code review for Azure Repos; Copilot Autofix for GitHub Advanced Security for Azure DevOps. GitHub Changelog — Copilot code review now runs on an agentic architecture (March 5, 2026).</a:t>
+            </a:r>
+          </a:p>
+          <a:p>
+            <a:endParaRPr/>
+          </a:p>
+        </p:txBody>
+      </p:sp>
+      <p:sp>
+        <p:nvSpPr>
+          <p:cNvPr id="4" name="Slide Number Placeholder 3"/>
+          <p:cNvSpPr>
+            <a:spLocks noGrp="1"/>
+          </p:cNvSpPr>
+          <p:nvPr>
+            <p:ph type="sldNum" sz="quarter" idx="10"/>
+          </p:nvPr>
+        </p:nvSpPr>
+        <p:spPr/>
+        <p:txBody>
+          <a:bodyPr/>
+          <a:lstStyle/>
+          <a:p>
+            <a:fld id="{F7021451-1387-4CA6-816F-3879F97B5CBC}" type="slidenum">
+              <a:rPr lang="en-US"/>
+              <a:t>5</a:t>
             </a:fld>
             <a:endParaRPr lang="en-US"/>
           </a:p>
@@ -4204,8 +4790,31 @@
           <a:lstStyle/>
           <a:p>
             <a:r>
-              <a:rPr lang="en-US" dirty="0"/>
-              <a:t>DOCUMENTARY VOICE — spoken live, not read. This is the section opener: slow down, let the metaphor land. We are closing the loop on the "field guide to a new habitat" framing from the whole talk — this section is about what still limps back to the old watering hole after everyone else has moved on.</a:t>
+              <a:t>STRAIGHT delivery, warm. This is the handoff into the open Q&amp;A, roughly 14 minutes — there has been no interim pocket since section 5, so the room has been banking questions. Invite them explicitly rather than just stopping talking.</a:t>
+            </a:r>
+          </a:p>
+          <a:p>
+            <a:endParaRPr/>
+          </a:p>
+          <a:p>
+            <a:r>
+              <a:t>The QR now lives here instead of on its own slide, which means it stays on screen for the whole Q&amp;A instead of flashing past. Say once what is behind it — GitHub's official Azure Pipelines to Actions guide, gh-ado2gh, gh-actions-importer, the AI analyze / convert / validate prompts, and every note behind this talk, all public — then stop talking about it and take questions. People will scan while somebody else is asking.</a:t>
+            </a:r>
+          </a:p>
+          <a:p>
+            <a:endParaRPr/>
+          </a:p>
+          <a:p>
+            <a:r>
+              <a:t>If a question needs more than the time you have, point at the code: the long answer is almost certainly already in the repo.</a:t>
+            </a:r>
+          </a:p>
+          <a:p>
+            <a:endParaRPr/>
+          </a:p>
+          <a:p>
+            <a:r>
+              <a:t>The ELM slide is in the appendix, right after this one, if someone asks about live migration or near-zero-downtime cutover.</a:t>
             </a:r>
           </a:p>
         </p:txBody>
@@ -4291,8 +4900,84 @@
           <a:lstStyle/>
           <a:p>
             <a:r>
-              <a:t>STRAIGHT delivery. This is the practical, checklist-voiced part of the section. The five rows are meant to be read as "here is where these hide" — invite the room to mentally add their own sixth row, because every org has one nobody else would guess.</a:t>
-            </a:r>
+              <a:rPr dirty="0"/>
+              <a:t>APPENDIX SLIDE. Moved out of the main flow for time; show it only if someone asks about ELM or near-zero-downtime cutover. Straight delivery. Enterprise Live Migrations was named on the methods table in section 3.</a:t>
+            </a:r>
+          </a:p>
+          <a:p>
+            <a:endParaRPr dirty="0"/>
+          </a:p>
+          <a:p>
+            <a:r>
+              <a:rPr dirty="0"/>
+              <a:t>STATUS, stated precisely, because the two paths differ: GitHub Enterprise Server to GHEC-with-data-residency went GA on 1 September 2026, but the AZURE DEVOPS path — the only one that matters here — is still public preview. Say “public preview for the Azure DevOps path,” not just “preview,” or somebody who read the GA changelog will correct you.</a:t>
+            </a:r>
+          </a:p>
+          <a:p>
+            <a:endParaRPr dirty="0"/>
+          </a:p>
+          <a:p>
+            <a:r>
+              <a:rPr dirty="0"/>
+              <a:t>It is also research-only for us: Hunter's current tenant does not meet the data-residency prerequisite, so we have not run it.</a:t>
+            </a:r>
+          </a:p>
+          <a:p>
+            <a:endParaRPr dirty="0"/>
+          </a:p>
+          <a:p>
+            <a:r>
+              <a:rPr dirty="0"/>
+              <a:t>THE CAPS ARE THE POINT. Thirty repositories total — twenty initial, ten incremental — and the cutover has to complete within twenty-one days of starting. Repositories only: no work items, pipelines, wikis, test plans or artifacts. That reframes ELM from “the better option” to “a pilot mechanism,” which is the more useful thing for this room to hear. If anyone is picturing it as the way to move a thousand repositories, the 30-repo cap answers that before they build a plan around it.</a:t>
+            </a:r>
+          </a:p>
+          <a:p>
+            <a:endParaRPr dirty="0"/>
+          </a:p>
+          <a:p>
+            <a:r>
+              <a:rPr dirty="0"/>
+              <a:t>Keep the GEI comparison honest: gh-ado2gh --all already does the configuration work. What ELM genuinely adds is continuous delta synchronization and a scheduled cutover with a read-only window under thirty minutes. Pipeline logic and non-repository systems still need separate migration and validation — that is the takeaway line.</a:t>
+            </a:r>
+          </a:p>
+          <a:p>
+            <a:endParaRPr dirty="0"/>
+          </a:p>
+          <a:p>
+            <a:r>
+              <a:rPr dirty="0"/>
+              <a:t>GitHub Enterprise Cloud (GHEC) with Data Residency is a distinct deployment model where:</a:t>
+            </a:r>
+          </a:p>
+          <a:p>
+            <a:r>
+              <a:rPr dirty="0"/>
+              <a:t> - Your enterprise is hosted on a dedicated ghe.com subdomain (instead of github.com&lt;org&gt;).</a:t>
+            </a:r>
+          </a:p>
+          <a:p>
+            <a:r>
+              <a:rPr dirty="0"/>
+              <a:t> - You choose the geographic region where your code and repository data are stored (currently including U.S., EU, Australia, and Japan).</a:t>
+            </a:r>
+          </a:p>
+          <a:p>
+            <a:r>
+              <a:rPr dirty="0"/>
+              <a:t> - The environment is isolated from the broader github.com ecosystem.</a:t>
+            </a:r>
+          </a:p>
+          <a:p>
+            <a:r>
+              <a:rPr dirty="0"/>
+              <a:t> - It requires Enterprise Managed Users (EMU). </a:t>
+            </a:r>
+          </a:p>
+          <a:p>
+            <a:endParaRPr dirty="0"/>
+          </a:p>
+          <a:p>
+            <a:endParaRPr dirty="0"/>
           </a:p>
         </p:txBody>
       </p:sp>
@@ -4314,536 +4999,6 @@
             <a:fld id="{F7021451-1387-4CA6-816F-3879F97B5CBC}" type="slidenum">
               <a:rPr lang="en-US"/>
               <a:t>51</a:t>
-            </a:fld>
-            <a:endParaRPr lang="en-US"/>
-          </a:p>
-        </p:txBody>
-      </p:sp>
-    </p:spTree>
-    <p:extLst>
-      <p:ext uri="{BB962C8B-B14F-4D97-AF65-F5344CB8AC3E}">
-        <p14:creationId xmlns:p14="http://schemas.microsoft.com/office/powerpoint/2010/main" val="1024086991"/>
-      </p:ext>
-    </p:extLst>
-  </p:cSld>
-  <p:clrMapOvr>
-    <a:masterClrMapping/>
-  </p:clrMapOvr>
-</p:notes>
-</file>
-
-<file path=ppt/notesSlides/notesSlide52.xml><?xml version="1.0" encoding="utf-8"?>
-<p:notes xmlns:a="http://schemas.openxmlformats.org/drawingml/2006/main" xmlns:r="http://schemas.openxmlformats.org/officeDocument/2006/relationships" xmlns:p="http://schemas.openxmlformats.org/presentationml/2006/main">
-  <p:cSld>
-    <p:spTree>
-      <p:nvGrpSpPr>
-        <p:cNvPr id="1" name=""/>
-        <p:cNvGrpSpPr/>
-        <p:nvPr/>
-      </p:nvGrpSpPr>
-      <p:grpSpPr>
-        <a:xfrm>
-          <a:off x="0" y="0"/>
-          <a:ext cx="0" cy="0"/>
-          <a:chOff x="0" y="0"/>
-          <a:chExt cx="0" cy="0"/>
-        </a:xfrm>
-      </p:grpSpPr>
-      <p:sp>
-        <p:nvSpPr>
-          <p:cNvPr id="2" name="Slide Image Placeholder 1"/>
-          <p:cNvSpPr>
-            <a:spLocks noGrp="1" noRot="1" noChangeAspect="1"/>
-          </p:cNvSpPr>
-          <p:nvPr>
-            <p:ph type="sldImg"/>
-          </p:nvPr>
-        </p:nvSpPr>
-        <p:spPr/>
-      </p:sp>
-      <p:sp>
-        <p:nvSpPr>
-          <p:cNvPr id="3" name="Notes Placeholder 2"/>
-          <p:cNvSpPr>
-            <a:spLocks noGrp="1"/>
-          </p:cNvSpPr>
-          <p:nvPr>
-            <p:ph type="body" idx="1"/>
-          </p:nvPr>
-        </p:nvSpPr>
-        <p:spPr/>
-        <p:txBody>
-          <a:bodyPr/>
-          <a:lstStyle/>
-          <a:p>
-            <a:r>
-              <a:t>Two registers on this one slide. STRAIGHT for the top two cards — this is real mechanical risk, say it plainly.</a:t>
-            </a:r>
-          </a:p>
-          <a:p/>
-          <a:p>
-            <a:r>
-              <a:t>The precision that matters: an org owner sends the attribution invitation, but nothing is reattributed until the person accepts it. Which means your reclaim rate depends on people reading email — that is its own migration risk, and it usually gets a laugh because everyone knows it is true. Enterprise Managed Users are the exception, where the reclaim completes immediately without an invitation. Git commits are attributed by email and are unaffected either way. The EMU exception is no longer on the slide, so say it here.</a:t>
-            </a:r>
-          </a:p>
-          <a:p/>
-          <a:p>
-            <a:r>
-              <a:t>Be precise about what sits on a mannequin: pull-request data only — authorship, comments and reviews. Work items don’t migrate at all, so there is no work-item history to reclaim.</a:t>
-            </a:r>
-          </a:p>
-          <a:p/>
-          <a:p>
-            <a:r>
-              <a:t>Then shift into DOCUMENTARY VOICE for the on-slide aside at the bottom, read as written, then straight back to conference delivery. The mannequin framing is the callback that ties this section's watering-hole metaphor to identity specifically.</a:t>
-            </a:r>
-          </a:p>
-        </p:txBody>
-      </p:sp>
-      <p:sp>
-        <p:nvSpPr>
-          <p:cNvPr id="4" name="Slide Number Placeholder 3"/>
-          <p:cNvSpPr>
-            <a:spLocks noGrp="1"/>
-          </p:cNvSpPr>
-          <p:nvPr>
-            <p:ph type="sldNum" sz="quarter" idx="10"/>
-          </p:nvPr>
-        </p:nvSpPr>
-        <p:spPr/>
-        <p:txBody>
-          <a:bodyPr/>
-          <a:lstStyle/>
-          <a:p>
-            <a:fld id="{F7021451-1387-4CA6-816F-3879F97B5CBC}" type="slidenum">
-              <a:rPr lang="en-US"/>
-              <a:t>52</a:t>
-            </a:fld>
-            <a:endParaRPr lang="en-US"/>
-          </a:p>
-        </p:txBody>
-      </p:sp>
-    </p:spTree>
-    <p:extLst>
-      <p:ext uri="{BB962C8B-B14F-4D97-AF65-F5344CB8AC3E}">
-        <p14:creationId xmlns:p14="http://schemas.microsoft.com/office/powerpoint/2010/main" val="1024086991"/>
-      </p:ext>
-    </p:extLst>
-  </p:cSld>
-  <p:clrMapOvr>
-    <a:masterClrMapping/>
-  </p:clrMapOvr>
-</p:notes>
-</file>
-
-<file path=ppt/notesSlides/notesSlide53.xml><?xml version="1.0" encoding="utf-8"?>
-<p:notes xmlns:a="http://schemas.openxmlformats.org/drawingml/2006/main" xmlns:r="http://schemas.openxmlformats.org/officeDocument/2006/relationships" xmlns:p="http://schemas.openxmlformats.org/presentationml/2006/main">
-  <p:cSld>
-    <p:spTree>
-      <p:nvGrpSpPr>
-        <p:cNvPr id="1" name=""/>
-        <p:cNvGrpSpPr/>
-        <p:nvPr/>
-      </p:nvGrpSpPr>
-      <p:grpSpPr>
-        <a:xfrm>
-          <a:off x="0" y="0"/>
-          <a:ext cx="0" cy="0"/>
-          <a:chOff x="0" y="0"/>
-          <a:chExt cx="0" cy="0"/>
-        </a:xfrm>
-      </p:grpSpPr>
-      <p:sp>
-        <p:nvSpPr>
-          <p:cNvPr id="2" name="Slide Image Placeholder 1"/>
-          <p:cNvSpPr>
-            <a:spLocks noGrp="1" noRot="1" noChangeAspect="1"/>
-          </p:cNvSpPr>
-          <p:nvPr>
-            <p:ph type="sldImg"/>
-          </p:nvPr>
-        </p:nvSpPr>
-        <p:spPr/>
-      </p:sp>
-      <p:sp>
-        <p:nvSpPr>
-          <p:cNvPr id="3" name="Notes Placeholder 2"/>
-          <p:cNvSpPr>
-            <a:spLocks noGrp="1"/>
-          </p:cNvSpPr>
-          <p:nvPr>
-            <p:ph type="body" idx="1"/>
-          </p:nvPr>
-        </p:nvSpPr>
-        <p:spPr/>
-        <p:txBody>
-          <a:bodyPr/>
-          <a:lstStyle/>
-          <a:p>
-            <a:r>
-              <a:t>STRAIGHT delivery, briskly. For item three, recap the three planes and the cross-plane methods. For item five, reinforce that migration is an operating model: ownership, entry criteria, evidence, rollback, and decommissioning—not merely a tooling sequence.</a:t>
-            </a:r>
-          </a:p>
-          <a:p>
-            <a:endParaRPr/>
-          </a:p>
-          <a:p>
-            <a:r>
-              <a:t>Then hand straight off to the Unglamorous Truth slide. The recap is the list; that slide is the point. Do not editorialise between the two — just turn the page.</a:t>
-            </a:r>
-          </a:p>
-        </p:txBody>
-      </p:sp>
-      <p:sp>
-        <p:nvSpPr>
-          <p:cNvPr id="4" name="Slide Number Placeholder 3"/>
-          <p:cNvSpPr>
-            <a:spLocks noGrp="1"/>
-          </p:cNvSpPr>
-          <p:nvPr>
-            <p:ph type="sldNum" sz="quarter" idx="10"/>
-          </p:nvPr>
-        </p:nvSpPr>
-        <p:spPr/>
-        <p:txBody>
-          <a:bodyPr/>
-          <a:lstStyle/>
-          <a:p>
-            <a:fld id="{F7021451-1387-4CA6-816F-3879F97B5CBC}" type="slidenum">
-              <a:rPr lang="en-US"/>
-              <a:t>53</a:t>
-            </a:fld>
-            <a:endParaRPr lang="en-US"/>
-          </a:p>
-        </p:txBody>
-      </p:sp>
-    </p:spTree>
-    <p:extLst>
-      <p:ext uri="{BB962C8B-B14F-4D97-AF65-F5344CB8AC3E}">
-        <p14:creationId xmlns:p14="http://schemas.microsoft.com/office/powerpoint/2010/main" val="1024086991"/>
-      </p:ext>
-    </p:extLst>
-  </p:cSld>
-  <p:clrMapOvr>
-    <a:masterClrMapping/>
-  </p:clrMapOvr>
-</p:notes>
-</file>
-
-<file path=ppt/notesSlides/notesSlide54.xml><?xml version="1.0" encoding="utf-8"?>
-<p:notes xmlns:a="http://schemas.openxmlformats.org/drawingml/2006/main" xmlns:r="http://schemas.openxmlformats.org/officeDocument/2006/relationships" xmlns:p="http://schemas.openxmlformats.org/presentationml/2006/main">
-  <p:cSld>
-    <p:spTree>
-      <p:nvGrpSpPr>
-        <p:cNvPr id="1" name=""/>
-        <p:cNvGrpSpPr/>
-        <p:nvPr/>
-      </p:nvGrpSpPr>
-      <p:grpSpPr>
-        <a:xfrm>
-          <a:off x="0" y="0"/>
-          <a:ext cx="0" cy="0"/>
-          <a:chOff x="0" y="0"/>
-          <a:chExt cx="0" cy="0"/>
-        </a:xfrm>
-      </p:grpSpPr>
-      <p:sp>
-        <p:nvSpPr>
-          <p:cNvPr id="2" name="Slide Image Placeholder 1"/>
-          <p:cNvSpPr>
-            <a:spLocks noGrp="1" noRot="1" noChangeAspect="1"/>
-          </p:cNvSpPr>
-          <p:nvPr>
-            <p:ph type="sldImg"/>
-          </p:nvPr>
-        </p:nvSpPr>
-        <p:spPr/>
-      </p:sp>
-      <p:sp>
-        <p:nvSpPr>
-          <p:cNvPr id="3" name="Notes Placeholder 2"/>
-          <p:cNvSpPr>
-            <a:spLocks noGrp="1"/>
-          </p:cNvSpPr>
-          <p:nvPr>
-            <p:ph type="body" idx="1"/>
-          </p:nvPr>
-        </p:nvSpPr>
-        <p:spPr/>
-        <p:txBody>
-          <a:bodyPr/>
-          <a:lstStyle/>
-          <a:p>
-            <a:r>
-              <a:t>STRAIGHT delivery, and let it land quieter than anything around it. This is the deck's thesis in one sentence, and it now sits where it earns the most: the recap just handed them six things to remember, and this is the one thing to feel.</a:t>
-            </a:r>
-          </a:p>
-          <a:p>
-            <a:endParaRPr/>
-          </a:p>
-          <a:p>
-            <a:r>
-              <a:t>The slide is built as a statement, not a section card — light ground, no motif, sentence centred, nothing on it competing with the line. Deliver the first sentence flat, then pause before the last clause. “And got fixed by people in the room” is the payoff and it is set in the accent colour for exactly that reason: land it on the people, not the checklist.</a:t>
-            </a:r>
-          </a:p>
-          <a:p>
-            <a:endParaRPr/>
-          </a:p>
-          <a:p>
-            <a:r>
-              <a:t>Then go straight into the documentary closer. These two are twins — the same thought in two registers, plain-spoken in light, documentary in dark — so do not take a long pause here and another one there. This slide sets the closer up; the closer gets the silence.</a:t>
-            </a:r>
-          </a:p>
-        </p:txBody>
-      </p:sp>
-      <p:sp>
-        <p:nvSpPr>
-          <p:cNvPr id="4" name="Slide Number Placeholder 3"/>
-          <p:cNvSpPr>
-            <a:spLocks noGrp="1"/>
-          </p:cNvSpPr>
-          <p:nvPr>
-            <p:ph type="sldNum" sz="quarter" idx="10"/>
-          </p:nvPr>
-        </p:nvSpPr>
-        <p:spPr/>
-        <p:txBody>
-          <a:bodyPr/>
-          <a:lstStyle/>
-          <a:p>
-            <a:fld id="{F7021451-1387-4CA6-816F-3879F97B5CBC}" type="slidenum">
-              <a:rPr lang="en-US"/>
-              <a:t>54</a:t>
-            </a:fld>
-            <a:endParaRPr lang="en-US"/>
-          </a:p>
-        </p:txBody>
-      </p:sp>
-    </p:spTree>
-    <p:extLst>
-      <p:ext uri="{BB962C8B-B14F-4D97-AF65-F5344CB8AC3E}">
-        <p14:creationId xmlns:p14="http://schemas.microsoft.com/office/powerpoint/2010/main" val="1024086991"/>
-      </p:ext>
-    </p:extLst>
-  </p:cSld>
-  <p:clrMapOvr>
-    <a:masterClrMapping/>
-  </p:clrMapOvr>
-</p:notes>
-</file>
-
-<file path=ppt/notesSlides/notesSlide55.xml><?xml version="1.0" encoding="utf-8"?>
-<p:notes xmlns:a="http://schemas.openxmlformats.org/drawingml/2006/main" xmlns:r="http://schemas.openxmlformats.org/officeDocument/2006/relationships" xmlns:p="http://schemas.openxmlformats.org/presentationml/2006/main">
-  <p:cSld>
-    <p:spTree>
-      <p:nvGrpSpPr>
-        <p:cNvPr id="1" name=""/>
-        <p:cNvGrpSpPr/>
-        <p:nvPr/>
-      </p:nvGrpSpPr>
-      <p:grpSpPr>
-        <a:xfrm>
-          <a:off x="0" y="0"/>
-          <a:ext cx="0" cy="0"/>
-          <a:chOff x="0" y="0"/>
-          <a:chExt cx="0" cy="0"/>
-        </a:xfrm>
-      </p:grpSpPr>
-      <p:sp>
-        <p:nvSpPr>
-          <p:cNvPr id="2" name="Slide Image Placeholder 1"/>
-          <p:cNvSpPr>
-            <a:spLocks noGrp="1" noRot="1" noChangeAspect="1"/>
-          </p:cNvSpPr>
-          <p:nvPr>
-            <p:ph type="sldImg"/>
-          </p:nvPr>
-        </p:nvSpPr>
-        <p:spPr/>
-      </p:sp>
-      <p:sp>
-        <p:nvSpPr>
-          <p:cNvPr id="3" name="Notes Placeholder 2"/>
-          <p:cNvSpPr>
-            <a:spLocks noGrp="1"/>
-          </p:cNvSpPr>
-          <p:nvPr>
-            <p:ph type="body" idx="1"/>
-          </p:nvPr>
-        </p:nvSpPr>
-        <p:spPr/>
-        <p:txBody>
-          <a:bodyPr/>
-          <a:lstStyle/>
-          <a:p>
-            <a:r>
-              <a:t>DOCUMENTARY VOICE — spoken live, slower than anything else in the deck.</a:t>
-            </a:r>
-          </a:p>
-          <a:p>
-            <a:endParaRPr/>
-          </a:p>
-          <a:p>
-            <a:r>
-              <a:t>Three beats, and they are paced differently. The first line is calm and satisfied: everything worked. The second is where the joke builds — take your time on “every Tuesday at 3 a.m., triggered by nothing, owned by no one,” because the specificity is what makes it funny. Then a real pause, and the last line flat: “Nobody told it the herd had moved.”</a:t>
-            </a:r>
-          </a:p>
-          <a:p>
-            <a:endParaRPr/>
-          </a:p>
-          <a:p>
-            <a:r>
-              <a:t>That last line is the callback to section 6's title, so it should land as a click rather than a punchline. Let the silence sit for two full seconds before advancing — do not rush into the thank-you slide, and do not add another joke on top of it.</a:t>
-            </a:r>
-          </a:p>
-          <a:p>
-            <a:endParaRPr/>
-          </a:p>
-          <a:p>
-            <a:r>
-              <a:t>Note the division of labour with the Unglamorous Truth slide two back: that one is the sincere version in your own voice, this one is the funny version in the documentary voice. Sincerity first, laugh last.</a:t>
-            </a:r>
-          </a:p>
-          <a:p>
-            <a:endParaRPr/>
-          </a:p>
-          <a:p>
-            <a:r>
-              <a:t>---- ALTERNATE CLOSER, if this one doesn't fit on the night ----</a:t>
-            </a:r>
-          </a:p>
-          <a:p>
-            <a:endParaRPr/>
-          </a:p>
-          <a:p>
-            <a:r>
-              <a:t>WARMER: “The herd has crossed. They pause on the far bank, survey the new territory — and immediately begin recreating the folder structure they left behind. They will learn. They always do.”  (Use if you want to end on warmth rather than a laugh. Overlaps slightly with the Unglamorous Truth slide.)</a:t>
-            </a:r>
-          </a:p>
-        </p:txBody>
-      </p:sp>
-      <p:sp>
-        <p:nvSpPr>
-          <p:cNvPr id="4" name="Slide Number Placeholder 3"/>
-          <p:cNvSpPr>
-            <a:spLocks noGrp="1"/>
-          </p:cNvSpPr>
-          <p:nvPr>
-            <p:ph type="sldNum" sz="quarter" idx="10"/>
-          </p:nvPr>
-        </p:nvSpPr>
-        <p:spPr/>
-        <p:txBody>
-          <a:bodyPr/>
-          <a:lstStyle/>
-          <a:p>
-            <a:fld id="{F7021451-1387-4CA6-816F-3879F97B5CBC}" type="slidenum">
-              <a:rPr lang="en-US"/>
-              <a:t>55</a:t>
-            </a:fld>
-            <a:endParaRPr lang="en-US"/>
-          </a:p>
-        </p:txBody>
-      </p:sp>
-    </p:spTree>
-    <p:extLst>
-      <p:ext uri="{BB962C8B-B14F-4D97-AF65-F5344CB8AC3E}">
-        <p14:creationId xmlns:p14="http://schemas.microsoft.com/office/powerpoint/2010/main" val="1024086991"/>
-      </p:ext>
-    </p:extLst>
-  </p:cSld>
-  <p:clrMapOvr>
-    <a:masterClrMapping/>
-  </p:clrMapOvr>
-</p:notes>
-</file>
-
-<file path=ppt/notesSlides/notesSlide56.xml><?xml version="1.0" encoding="utf-8"?>
-<p:notes xmlns:a="http://schemas.openxmlformats.org/drawingml/2006/main" xmlns:r="http://schemas.openxmlformats.org/officeDocument/2006/relationships" xmlns:p="http://schemas.openxmlformats.org/presentationml/2006/main">
-  <p:cSld>
-    <p:spTree>
-      <p:nvGrpSpPr>
-        <p:cNvPr id="1" name=""/>
-        <p:cNvGrpSpPr/>
-        <p:nvPr/>
-      </p:nvGrpSpPr>
-      <p:grpSpPr>
-        <a:xfrm>
-          <a:off x="0" y="0"/>
-          <a:ext cx="0" cy="0"/>
-          <a:chOff x="0" y="0"/>
-          <a:chExt cx="0" cy="0"/>
-        </a:xfrm>
-      </p:grpSpPr>
-      <p:sp>
-        <p:nvSpPr>
-          <p:cNvPr id="2" name="Slide Image Placeholder 1"/>
-          <p:cNvSpPr>
-            <a:spLocks noGrp="1" noRot="1" noChangeAspect="1"/>
-          </p:cNvSpPr>
-          <p:nvPr>
-            <p:ph type="sldImg"/>
-          </p:nvPr>
-        </p:nvSpPr>
-        <p:spPr/>
-      </p:sp>
-      <p:sp>
-        <p:nvSpPr>
-          <p:cNvPr id="3" name="Notes Placeholder 2"/>
-          <p:cNvSpPr>
-            <a:spLocks noGrp="1"/>
-          </p:cNvSpPr>
-          <p:nvPr>
-            <p:ph type="body" idx="1"/>
-          </p:nvPr>
-        </p:nvSpPr>
-        <p:spPr/>
-        <p:txBody>
-          <a:bodyPr/>
-          <a:lstStyle/>
-          <a:p>
-            <a:r>
-              <a:t>STRAIGHT delivery, warm. This is the handoff into the open Q&amp;A, roughly 14 minutes — there has been no interim pocket since section 5, so the room has been banking questions. Invite them explicitly rather than just stopping talking.</a:t>
-            </a:r>
-          </a:p>
-          <a:p/>
-          <a:p>
-            <a:r>
-              <a:t>The QR now lives here instead of on its own slide, which means it stays on screen for the whole Q&amp;A instead of flashing past. Say once what is behind it — GitHub's official Azure Pipelines to Actions guide, gh-ado2gh, gh-actions-importer, the AI analyze / convert / validate prompts, and every note behind this talk, all public — then stop talking about it and take questions. People will scan while somebody else is asking.</a:t>
-            </a:r>
-          </a:p>
-          <a:p/>
-          <a:p>
-            <a:r>
-              <a:t>If a question needs more than the time you have, point at the code: the long answer is almost certainly already in the repo.</a:t>
-            </a:r>
-          </a:p>
-          <a:p/>
-          <a:p>
-            <a:r>
-              <a:t>The ELM slide is in the appendix, right after this one, if someone asks about live migration or near-zero-downtime cutover.</a:t>
-            </a:r>
-          </a:p>
-        </p:txBody>
-      </p:sp>
-      <p:sp>
-        <p:nvSpPr>
-          <p:cNvPr id="4" name="Slide Number Placeholder 3"/>
-          <p:cNvSpPr>
-            <a:spLocks noGrp="1"/>
-          </p:cNvSpPr>
-          <p:nvPr>
-            <p:ph type="sldNum" sz="quarter" idx="10"/>
-          </p:nvPr>
-        </p:nvSpPr>
-        <p:spPr/>
-        <p:txBody>
-          <a:bodyPr/>
-          <a:lstStyle/>
-          <a:p>
-            <a:fld id="{F7021451-1387-4CA6-816F-3879F97B5CBC}" type="slidenum">
-              <a:rPr lang="en-US"/>
-              <a:t>56</a:t>
             </a:fld>
             <a:endParaRPr lang="en-US"/>
           </a:p>
@@ -4907,60 +5062,33 @@
           <a:lstStyle/>
           <a:p>
             <a:r>
-              <a:t>Straight delivery. Name the real reason teams migrate before the polite reasons: most of the agentic Copilot work (cloud agent, agentic code review, agentic Autofix, Agent HQ) ships on GitHub first. Be fair to Microsoft: Azure DevOps is gaining AI features too, and Copilot in the IDE works wherever the repository is hosted. The point is not that Azure DevOps has nothing; it is that the frontier depends on where the repository lives.</a:t>
-            </a:r>
-          </a:p>
-          <a:p/>
-          <a:p>
-            <a:r>
-              <a:t>Open the table by getting ahead of the heckle: “Field guides go out of date, and so do capability tables. Everything here has a shelf life measured in sprints.” Then walk the four rows. The last one is the one that matters: the cloud agent needs a GitHub-hosted repository even when it is started from Azure Boards.</a:t>
-            </a:r>
-          </a:p>
-          <a:p/>
-          <a:p>
-            <a:r>
-              <a:t>Do not frame this as “GitHub has AI and Azure DevOps does not.” Frame it as a difference in native depth, integration, and repository dependency.</a:t>
-            </a:r>
-          </a:p>
-          <a:p/>
-          <a:p>
-            <a:r>
-              <a:t>CUT FROM THE SLIDE, for Q&amp;A:</a:t>
-            </a:r>
-          </a:p>
-          <a:p>
-            <a:r>
-              <a:t>- Repository-aware chat. GitHub: native workspace and repository context. Azure DevOps: local repo context, plus Azure DevOps service context through MCP.</a:t>
-            </a:r>
-          </a:p>
-          <a:p>
-            <a:r>
-              <a:t>- Multi-agent orchestration. GitHub: a central hub running Copilot, Claude and Codex sessions in parallel. Azure DevOps: no native equivalent; external agents connect through MCP.</a:t>
-            </a:r>
-          </a:p>
-          <a:p>
-            <a:r>
-              <a:t>- Azure DevOps MCP. The Remote MCP Server is GA and the server itself is free; normal Azure DevOps pricing and AI-platform usage charges may still apply. The next slide covers MCP.</a:t>
-            </a:r>
-          </a:p>
-          <a:p>
-            <a:r>
-              <a:t>- Licensing. Paid Copilot for agents and review; GitHub Code Security where Autofix is needed.</a:t>
-            </a:r>
-          </a:p>
-          <a:p/>
-          <a:p>
-            <a:r>
-              <a:t>The capability gap is real, but it is neither absolute nor static. As of September 21, 2026: Azure DevOps Remote MCP Server is generally available; Copilot Code Review for Azure Repos is in public preview; Copilot Autofix for Azure DevOps remains in limited public preview; and GitHub Copilot cloud agent still requires a GitHub-hosted repository even when initiated from Azure Boards.</a:t>
-            </a:r>
-          </a:p>
-          <a:p/>
-          <a:p>
-            <a:r>
-              <a:t>Sources (accessed September 21, 2026): GitHub Docs — About GitHub Copilot cloud agent; Integrating Copilot cloud agent with Azure Boards; About agent management; About autofix for code scanning. Microsoft Learn — Azure DevOps Sprint 278 and Sprint 279 release notes; Azure DevOps MCP Server overview; Copilot code review for Azure Repos; Copilot Autofix for GitHub Advanced Security for Azure DevOps. GitHub Changelog — Copilot code review now runs on an agentic architecture (March 5, 2026).</a:t>
-            </a:r>
-          </a:p>
-          <a:p/>
+              <a:t>Straight delivery, and keep it brisk — this is a framing slide, not a deep dive.</a:t>
+            </a:r>
+          </a:p>
+          <a:p>
+            <a:endParaRPr/>
+          </a:p>
+          <a:p>
+            <a:r>
+              <a:t>Somebody in the room is thinking “we added MCP, so the platform question went away.” It didn't. What MCP genuinely changes: agents reach more enterprise systems, cross-tool workflows need less bespoke integration, and platform boundaries are more permeable. Say that plainly and generously — it is real.</a:t>
+            </a:r>
+          </a:p>
+          <a:p>
+            <a:endParaRPr/>
+          </a:p>
+          <a:p>
+            <a:r>
+              <a:t>What it does not change: where pull-request automation runs, where repository security analysis runs, which policies can be enforced natively, which platform owns repository governance, and where code-centric agent workflows execute. All of those still follow the code.</a:t>
+            </a:r>
+          </a:p>
+          <a:p>
+            <a:endParaRPr/>
+          </a:p>
+          <a:p>
+            <a:r>
+              <a:t>Land the closing line as written — the platform decision did not disappear, it merely acquired more adapters. If asked: the Azure DevOps Remote MCP Server is GA and the server itself is free, though normal Azure DevOps and AI-platform usage charges still apply.</a:t>
+            </a:r>
+          </a:p>
         </p:txBody>
       </p:sp>
       <p:sp>
@@ -5044,7 +5172,7 @@
           <a:lstStyle/>
           <a:p>
             <a:r>
-              <a:t>Straight delivery, and keep it brisk — this is a framing slide, not a deep dive.</a:t>
+              <a:t>Straight delivery, move quickly — five rows, roughly fifteen seconds each, do not read them verbatim. Frame it up front as “even if you delete the entire AI argument, here is why teams still move.”</a:t>
             </a:r>
           </a:p>
           <a:p>
@@ -5052,7 +5180,7 @@
           </a:p>
           <a:p>
             <a:r>
-              <a:t>Somebody in the room is thinking “we added MCP, so the platform question went away.” It didn't. What MCP genuinely changes: agents reach more enterprise systems, cross-tool workflows need less bespoke integration, and platform boundaries are more permeable. Say that plainly and generously — it is real.</a:t>
+              <a:t>The 180M+ figure is GitHub's own Octoverse number and is current. On the marketplace row, the honest comparison is breadth of third-party actions versus the Azure Pipelines task catalogue — claim volume, not quality.</a:t>
             </a:r>
           </a:p>
           <a:p>
@@ -5060,15 +5188,7 @@
           </a:p>
           <a:p>
             <a:r>
-              <a:t>What it does not change: where pull-request automation runs, where repository security analysis runs, which policies can be enforced natively, which platform owns repository governance, and where code-centric agent workflows execute. All of those still follow the code.</a:t>
-            </a:r>
-          </a:p>
-          <a:p>
-            <a:endParaRPr/>
-          </a:p>
-          <a:p>
-            <a:r>
-              <a:t>Land the closing line as written — the platform decision did not disappear, it merely acquired more adapters. If asked: the Azure DevOps Remote MCP Server is GA and the server itself is free, though normal Azure DevOps and AI-platform usage charges still apply.</a:t>
+              <a:t>CAVEAT THE LAST ROW before someone in the room does it for you. act runs workflows in containers, not the VMs GitHub uses; Linux runners only; faithful images are 18 GB+; and it ignores or does not support concurrency, GITHUB_STEP_SUMMARY, job-level permissions, timeout-minutes, continue-on-error, environment — and OIDC, which means no cloud-auth workflow actually runs locally. Frame it as fast feedback on syntax and the job graph, never as “if it passes in act it passes in CI.”</a:t>
             </a:r>
           </a:p>
         </p:txBody>
@@ -5154,23 +5274,8 @@
           <a:lstStyle/>
           <a:p>
             <a:r>
-              <a:t>Straight delivery, move quickly — five rows, roughly fifteen seconds each, do not read them verbatim. Frame it up front as “even if you delete the entire AI argument, here is why teams still move.”</a:t>
-            </a:r>
-          </a:p>
-          <a:p>
-            <a:endParaRPr/>
-          </a:p>
-          <a:p>
-            <a:r>
-              <a:t>The 180M+ figure is GitHub's own Octoverse number and is current. On the marketplace row, the honest comparison is breadth of third-party actions versus the Azure Pipelines task catalogue — claim volume, not quality.</a:t>
-            </a:r>
-          </a:p>
-          <a:p>
-            <a:endParaRPr/>
-          </a:p>
-          <a:p>
-            <a:r>
-              <a:t>CAVEAT THE LAST ROW before someone in the room does it for you. act runs workflows in containers, not the VMs GitHub uses; Linux runners only; faithful images are 18 GB+; and it ignores or does not support concurrency, GITHUB_STEP_SUMMARY, job-level permissions, timeout-minutes, continue-on-error, environment — and OIDC, which means no cloud-auth workflow actually runs locally. Frame it as fast feedback on syntax and the job graph, never as “if it passes in act it passes in CI.”</a:t>
+              <a:rPr lang="en-US" dirty="0"/>
+              <a:t>DOCUMENTARY VOICE — the only register for this slide. Deliver slowly, deadpan, faintly awed, same conceit as section 1's opener. Pause after the line, then go straight back to normal delivery for the scorecard slide.</a:t>
             </a:r>
           </a:p>
         </p:txBody>
@@ -5256,8 +5361,26 @@
           <a:lstStyle/>
           <a:p>
             <a:r>
-              <a:rPr lang="en-US" dirty="0"/>
-              <a:t>DOCUMENTARY VOICE — the only register for this slide. Deliver slowly, deadpan, faintly awed, same conceit as section 1's opener. Pause after the line, then go straight back to normal delivery for the scorecard slide.</a:t>
+              <a:rPr dirty="0"/>
+              <a:t>Straight delivery. This is the spoiler slide — the full seven-subsystem scorecard for the whole talk, not just section 2. Two travel clean (Repos, Wiki), four need a decision (Packages/Artifacts, Pipelines, Dashboards, Boards), one stays behind entirely (Test Plans).</a:t>
+            </a:r>
+          </a:p>
+          <a:p>
+            <a:endParaRPr dirty="0"/>
+          </a:p>
+          <a:p>
+            <a:r>
+              <a:rPr dirty="0"/>
+              <a:t>Don't over-explain each row yet. Pipelines gets all of section 3; Boards and Test Plans get all of section 4. This slide's job is just to set the map before the detailed stops. Repos, Wiki, Packages/Artifacts and Dashboards get their own slides in the rest of this section.</a:t>
+            </a:r>
+          </a:p>
+          <a:p>
+            <a:endParaRPr dirty="0"/>
+          </a:p>
+          <a:p>
+            <a:r>
+              <a:rPr dirty="0"/>
+              <a:t>The Boards row is deliberately the only place Boards appears before section 4. Read it, say “we come back to this properly in section 4,” and move on — if you let the room open a Boards-versus-Projects debate here you will spend section 4's time twice.</a:t>
             </a:r>
           </a:p>
         </p:txBody>
@@ -6666,6 +6789,30 @@
               </a:rPr>
               <a:t>Both wikis are Git repos under the hood, so the pages copy with a clone and a push. </a:t>
             </a:r>
+          </a:p>
+          <a:p>
+            <a:pPr marL="0" indent="0">
+              <a:lnSpc>
+                <a:spcPct val="130000"/>
+              </a:lnSpc>
+              <a:buNone/>
+            </a:pPr>
+            <a:endParaRPr lang="en-US" sz="2000" b="1" dirty="0">
+              <a:solidFill>
+                <a:srgbClr val="2B2B2B"/>
+              </a:solidFill>
+              <a:latin typeface="Calibri" pitchFamily="34" charset="0"/>
+              <a:ea typeface="Calibri" pitchFamily="34" charset="-122"/>
+              <a:cs typeface="Calibri" pitchFamily="34" charset="-120"/>
+            </a:endParaRPr>
+          </a:p>
+          <a:p>
+            <a:pPr marL="0" indent="0">
+              <a:lnSpc>
+                <a:spcPct val="130000"/>
+              </a:lnSpc>
+              <a:buNone/>
+            </a:pPr>
             <a:r>
               <a:rPr lang="en-US" sz="2000" b="1" dirty="0">
                 <a:solidFill>
@@ -12602,7 +12749,7 @@
               <a:buChar char="•"/>
             </a:pPr>
             <a:r>
-              <a:rPr sz="1450">
+              <a:rPr sz="1450" dirty="0">
                 <a:solidFill>
                   <a:srgbClr val="F5F5F0"/>
                 </a:solidFill>
@@ -12613,13 +12760,15 @@
             <a:endParaRPr lang="en-US" sz="1450" dirty="0"/>
           </a:p>
           <a:p>
-            <a:pPr>
+            <a:pPr marL="285750" indent="-285750">
               <a:spcBef>
                 <a:spcPts val="800"/>
               </a:spcBef>
-            </a:pPr>
-            <a:r>
-              <a:rPr sz="1450">
+              <a:buFont typeface="Arial" panose="020B0604020202020204" pitchFamily="34" charset="0"/>
+              <a:buChar char="•"/>
+            </a:pPr>
+            <a:r>
+              <a:rPr sz="1450" dirty="0">
                 <a:solidFill>
                   <a:srgbClr val="F5F5F0"/>
                 </a:solidFill>
@@ -12629,13 +12778,15 @@
             </a:r>
           </a:p>
           <a:p>
-            <a:pPr>
+            <a:pPr marL="285750" indent="-285750">
               <a:spcBef>
                 <a:spcPts val="800"/>
               </a:spcBef>
-            </a:pPr>
-            <a:r>
-              <a:rPr sz="1450">
+              <a:buFont typeface="Arial" panose="020B0604020202020204" pitchFamily="34" charset="0"/>
+              <a:buChar char="•"/>
+            </a:pPr>
+            <a:r>
+              <a:rPr sz="1450" dirty="0">
                 <a:solidFill>
                   <a:srgbClr val="F5F5F0"/>
                 </a:solidFill>
@@ -12645,13 +12796,15 @@
             </a:r>
           </a:p>
           <a:p>
-            <a:pPr>
+            <a:pPr marL="285750" indent="-285750">
               <a:spcBef>
                 <a:spcPts val="800"/>
               </a:spcBef>
-            </a:pPr>
-            <a:r>
-              <a:rPr sz="1450">
+              <a:buFont typeface="Arial" panose="020B0604020202020204" pitchFamily="34" charset="0"/>
+              <a:buChar char="•"/>
+            </a:pPr>
+            <a:r>
+              <a:rPr sz="1450" dirty="0">
                 <a:solidFill>
                   <a:srgbClr val="F5F5F0"/>
                 </a:solidFill>
@@ -29549,7 +29702,7 @@
           <a:noFill/>
         </p:spPr>
         <p:txBody>
-          <a:bodyPr wrap="square" lIns="0" rIns="0" tIns="0" bIns="0">
+          <a:bodyPr wrap="square" lIns="0" tIns="0" rIns="0" bIns="0">
             <a:spAutoFit/>
           </a:bodyPr>
           <a:lstStyle/>

--- a/presentation/azure-devops-to-github-the-great-migration-FULL-DECK.pptx
+++ b/presentation/azure-devops-to-github-the-great-migration-FULL-DECK.pptx
@@ -1,6 +1,6 @@
 
 <file path=ppt/presentation.xml><?xml version="1.0" encoding="utf-8"?>
-<p:presentation xmlns:a="http://schemas.openxmlformats.org/drawingml/2006/main" xmlns:r="http://schemas.openxmlformats.org/officeDocument/2006/relationships" xmlns:p="http://schemas.openxmlformats.org/presentationml/2006/main" saveSubsetFonts="1" autoCompressPictures="0">
+<p:presentation xmlns:a="http://schemas.openxmlformats.org/drawingml/2006/main" xmlns:r="http://schemas.openxmlformats.org/officeDocument/2006/relationships" xmlns:p="http://schemas.openxmlformats.org/presentationml/2006/main" showSpecialPlsOnTitleSld="0" saveSubsetFonts="1" autoCompressPictures="0">
   <p:sldMasterIdLst>
     <p:sldMasterId id="2147483648" r:id="rId1"/>
   </p:sldMasterIdLst>
@@ -29,36 +29,36 @@
     <p:sldId id="277" r:id="rId20"/>
     <p:sldId id="278" r:id="rId21"/>
     <p:sldId id="279" r:id="rId22"/>
-    <p:sldId id="280" r:id="rId23"/>
-    <p:sldId id="281" r:id="rId24"/>
-    <p:sldId id="313" r:id="rId25"/>
-    <p:sldId id="283" r:id="rId26"/>
-    <p:sldId id="284" r:id="rId27"/>
-    <p:sldId id="285" r:id="rId28"/>
-    <p:sldId id="286" r:id="rId29"/>
-    <p:sldId id="287" r:id="rId30"/>
-    <p:sldId id="288" r:id="rId31"/>
-    <p:sldId id="289" r:id="rId32"/>
-    <p:sldId id="291" r:id="rId33"/>
-    <p:sldId id="292" r:id="rId34"/>
-    <p:sldId id="293" r:id="rId35"/>
-    <p:sldId id="295" r:id="rId36"/>
-    <p:sldId id="296" r:id="rId37"/>
-    <p:sldId id="297" r:id="rId38"/>
-    <p:sldId id="298" r:id="rId39"/>
-    <p:sldId id="301" r:id="rId40"/>
-    <p:sldId id="300" r:id="rId41"/>
-    <p:sldId id="302" r:id="rId42"/>
-    <p:sldId id="303" r:id="rId43"/>
-    <p:sldId id="304" r:id="rId44"/>
-    <p:sldId id="305" r:id="rId45"/>
-    <p:sldId id="306" r:id="rId46"/>
-    <p:sldId id="307" r:id="rId47"/>
-    <p:sldId id="309" r:id="rId48"/>
-    <p:sldId id="308" r:id="rId49"/>
-    <p:sldId id="311" r:id="rId50"/>
-    <p:sldId id="312" r:id="rId51"/>
-    <p:sldId id="282" r:id="rId52"/>
+    <p:sldId id="282" r:id="rId23"/>
+    <p:sldId id="280" r:id="rId24"/>
+    <p:sldId id="281" r:id="rId25"/>
+    <p:sldId id="313" r:id="rId26"/>
+    <p:sldId id="283" r:id="rId27"/>
+    <p:sldId id="284" r:id="rId28"/>
+    <p:sldId id="285" r:id="rId29"/>
+    <p:sldId id="286" r:id="rId30"/>
+    <p:sldId id="287" r:id="rId31"/>
+    <p:sldId id="288" r:id="rId32"/>
+    <p:sldId id="289" r:id="rId33"/>
+    <p:sldId id="291" r:id="rId34"/>
+    <p:sldId id="292" r:id="rId35"/>
+    <p:sldId id="293" r:id="rId36"/>
+    <p:sldId id="295" r:id="rId37"/>
+    <p:sldId id="296" r:id="rId38"/>
+    <p:sldId id="297" r:id="rId39"/>
+    <p:sldId id="298" r:id="rId40"/>
+    <p:sldId id="301" r:id="rId41"/>
+    <p:sldId id="300" r:id="rId42"/>
+    <p:sldId id="302" r:id="rId43"/>
+    <p:sldId id="303" r:id="rId44"/>
+    <p:sldId id="304" r:id="rId45"/>
+    <p:sldId id="305" r:id="rId46"/>
+    <p:sldId id="306" r:id="rId47"/>
+    <p:sldId id="307" r:id="rId48"/>
+    <p:sldId id="309" r:id="rId49"/>
+    <p:sldId id="308" r:id="rId50"/>
+    <p:sldId id="311" r:id="rId51"/>
+    <p:sldId id="312" r:id="rId52"/>
   </p:sldIdLst>
   <p:sldSz cx="12192000" cy="6858000"/>
   <p:notesSz cx="6858000" cy="12192000"/>
@@ -1598,38 +1598,16 @@
           <a:lstStyle/>
           <a:p>
             <a:r>
+              <a:rPr dirty="0"/>
               <a:t>Straight delivery. Spend twenty seconds getting the naming right, because the docs don't and everyone who goes looking afterwards hits the same confusion.</a:t>
             </a:r>
           </a:p>
           <a:p>
-            <a:endParaRPr/>
-          </a:p>
-          <a:p>
-            <a:r>
-              <a:t>GitHub's own wording: “GitHub Enterprise Importer is a collection of extensions for GitHub CLI.” So GEI is not a service sitting underneath gh-ado2gh — gh-ado2gh IS GEI, the Azure DevOps one. Its siblings are gh-gei (GitHub to GitHub) and gh-bbs2gh (Bitbucket Server). Install is `gh extension install github/gh-ado2gh`. The repository copy itself runs server-side through GitHub's migration API; the extension inventories the estate, generates the script and drives those calls.</a:t>
-            </a:r>
-          </a:p>
-          <a:p>
-            <a:endParaRPr/>
-          </a:p>
-          <a:p>
-            <a:r>
-              <a:t>Do not describe GEI and gh-ado2gh as two layers with a boundary between them — an earlier draft of this slide did, and somebody who has read the docs will pick it up. The real boundaries are the other three bullets: pipeline logic belongs to Actions Importer, and LFS and identity are separate work.</a:t>
-            </a:r>
-          </a:p>
-          <a:p>
-            <a:endParaRPr/>
-          </a:p>
-          <a:p>
-            <a:r>
-              <a:t>The --all flag adds team creation, Boards integration and pipeline reference rewiring, but it does not convert pipeline logic. Worth knowing before you demo: there is an open gh-gei issue where --all omits the rewire step unless the tooling can resolve pipelines and a service connection.</a:t>
-            </a:r>
-          </a:p>
-          <a:p>
-            <a:endParaRPr/>
-          </a:p>
-          <a:p>
-            <a:r>
+            <a:endParaRPr dirty="0"/>
+          </a:p>
+          <a:p>
+            <a:r>
+              <a:rPr dirty="0"/>
               <a:t>Review the generated PowerShell as migration code, not disposable output — that is the bottom line on the slide.</a:t>
             </a:r>
           </a:p>
@@ -1716,16 +1694,84 @@
           <a:lstStyle/>
           <a:p>
             <a:r>
-              <a:t>Straight delivery. Keep the non-negotiable order: install the Azure Pipelines GitHub App first and plan identity mapping before mannequins are created. Also decide account model, team structure, repository naming and visibility, system-of-record during transition, change freeze or reconciliation, and failure ownership before the first production run.</a:t>
-            </a:r>
-          </a:p>
-          <a:p>
-            <a:endParaRPr/>
-          </a:p>
-          <a:p>
-            <a:r>
-              <a:t>OPTIONAL LAUGH LINE — after reading the six decisions: “You are going to make all six of these decisions either way. The only question is whether you make them now, or at two in the morning, under pressure, by accident.”</a:t>
-            </a:r>
+              <a:rPr lang="en-US" dirty="0"/>
+              <a:t>Straight delivery. Briefly mention it, but don’t spend much time on it. </a:t>
+            </a:r>
+          </a:p>
+          <a:p>
+            <a:endParaRPr dirty="0"/>
+          </a:p>
+          <a:p>
+            <a:r>
+              <a:rPr dirty="0"/>
+              <a:t>STATUS, stated precisely, because the two paths differ: GitHub Enterprise Server to GHEC-with-data-residency went GA on 1 September 2026, but the AZURE DEVOPS path — the only one that matters here — is still public preview. Say “public preview for the Azure DevOps path,” not just “preview,” or somebody who read the GA changelog will correct you.</a:t>
+            </a:r>
+          </a:p>
+          <a:p>
+            <a:endParaRPr dirty="0"/>
+          </a:p>
+          <a:p>
+            <a:r>
+              <a:rPr dirty="0"/>
+              <a:t>It is also research-only for us: Hunter's current tenant does not meet the data-residency prerequisite, so we have not run it.</a:t>
+            </a:r>
+          </a:p>
+          <a:p>
+            <a:endParaRPr dirty="0"/>
+          </a:p>
+          <a:p>
+            <a:r>
+              <a:rPr dirty="0"/>
+              <a:t>THE CAPS ARE THE POINT. Thirty repositories total — twenty initial, ten incremental — and the cutover has to complete within twenty-one days of starting. Repositories only: no work items, pipelines, wikis, test plans or artifacts. That reframes ELM from “the better option” to “a pilot mechanism,” which is the more useful thing for this room to hear. If anyone is picturing it as the way to move a thousand repositories, the 30-repo cap answers that before they build a plan around it.</a:t>
+            </a:r>
+          </a:p>
+          <a:p>
+            <a:endParaRPr dirty="0"/>
+          </a:p>
+          <a:p>
+            <a:r>
+              <a:rPr dirty="0"/>
+              <a:t>Keep the GEI comparison honest: gh-ado2gh --all already does the configuration work. What ELM genuinely adds is continuous delta synchronization and a scheduled cutover with a read-only window under thirty minutes. Pipeline logic and non-repository systems still need separate migration and validation — that is the takeaway line.</a:t>
+            </a:r>
+          </a:p>
+          <a:p>
+            <a:endParaRPr dirty="0"/>
+          </a:p>
+          <a:p>
+            <a:r>
+              <a:rPr dirty="0"/>
+              <a:t>GitHub Enterprise Cloud (GHEC) with Data Residency is a distinct deployment model where:</a:t>
+            </a:r>
+          </a:p>
+          <a:p>
+            <a:r>
+              <a:rPr dirty="0"/>
+              <a:t> - Your enterprise is hosted on a dedicated ghe.com subdomain (instead of github.com&lt;org&gt;).</a:t>
+            </a:r>
+          </a:p>
+          <a:p>
+            <a:r>
+              <a:rPr dirty="0"/>
+              <a:t> - You choose the geographic region where your code and repository data are stored (currently including U.S., EU, Australia, and Japan).</a:t>
+            </a:r>
+          </a:p>
+          <a:p>
+            <a:r>
+              <a:rPr dirty="0"/>
+              <a:t> - The environment is isolated from the broader github.com ecosystem.</a:t>
+            </a:r>
+          </a:p>
+          <a:p>
+            <a:r>
+              <a:rPr dirty="0"/>
+              <a:t> - It requires Enterprise Managed Users (EMU). </a:t>
+            </a:r>
+          </a:p>
+          <a:p>
+            <a:endParaRPr dirty="0"/>
+          </a:p>
+          <a:p>
+            <a:endParaRPr dirty="0"/>
           </a:p>
         </p:txBody>
       </p:sp>
@@ -1810,7 +1856,7 @@
           <a:lstStyle/>
           <a:p>
             <a:r>
-              <a:t>Straight delivery. This is the automation-plane tool. The audit breakdown is the planning artifact: it turns “this looks hard” into a backlog with counts.</a:t>
+              <a:t>Straight delivery. Keep the non-negotiable order: install the Azure Pipelines GitHub App first and plan identity mapping before mannequins are created. Also decide account model, team structure, repository naming and visibility, system-of-record during transition, change freeze or reconciliation, and failure ownership before the first production run.</a:t>
             </a:r>
           </a:p>
           <a:p>
@@ -1818,15 +1864,7 @@
           </a:p>
           <a:p>
             <a:r>
-              <a:t>Use the tool's own four buckets — successful, partially successful, unsupported, failed — and make the point that unsupported and failed are different problems. Unsupported means the construct has no Actions equivalent and somebody has to make a design decision. Failed means the importer choked and somebody has to go look. Those land in different columns of the backlog.</a:t>
-            </a:r>
-          </a:p>
-          <a:p>
-            <a:endParaRPr/>
-          </a:p>
-          <a:p>
-            <a:r>
-              <a:t>Conversion still leaves secrets, service connections, runner and network strategy, environments, approvals, custom tasks, and unsupported triggers for engineering judgment and validation.</a:t>
+              <a:t>OPTIONAL LAUGH LINE — after reading the six decisions: “You are going to make all six of these decisions either way. The only question is whether you make them now, or at two in the morning, under pressure, by accident.”</a:t>
             </a:r>
           </a:p>
         </p:txBody>
@@ -1895,13 +1933,6 @@
           </p:nvPr>
         </p:nvSpPr>
         <p:spPr/>
-        <p:txBody>
-          <a:bodyPr/>
-          <a:lstStyle/>
-          <a:p>
-            <a:endParaRPr/>
-          </a:p>
-        </p:txBody>
       </p:sp>
       <p:sp>
         <p:nvSpPr>
@@ -1920,7 +1951,7 @@
           <a:p>
             <a:r>
               <a:rPr dirty="0"/>
-              <a:t>Straight delivery, and slow down here — for an enterprise room this is the slide that separates a migration talk from a migration.</a:t>
+              <a:t>Straight delivery. This is the automation-plane tool. The audit breakdown is the planning artifact: it turns “this looks hard” into a backlog with counts.</a:t>
             </a:r>
           </a:p>
           <a:p>
@@ -1929,7 +1960,7 @@
           <a:p>
             <a:r>
               <a:rPr dirty="0"/>
-              <a:t>The setup: Actions Importer just told you the YAML converts. That is the easy half. The execution environment is the half that does not travel, and it is where regulated and on-prem estates actually stall.</a:t>
+              <a:t>Use the tool's own four buckets — successful, partially successful, unsupported, failed — and make the point that unsupported and failed are different problems. Unsupported means the construct has no Actions equivalent and somebody has to make a design decision. Failed means the importer choked and somebody has to go look. Those land in different columns of the backlog.</a:t>
             </a:r>
           </a:p>
           <a:p>
@@ -1938,35 +1969,136 @@
           <a:p>
             <a:r>
               <a:rPr dirty="0"/>
-              <a:t>Walk the left column as decisions, not tasks — each one has an owner and a cost attached. The two that bite hardest are the network path to private endpoints, and who operates self-hosted runners once the migration team goes away.</a:t>
+              <a:t>Conversion still leaves secrets, service connections, runner and network strategy, environments, approvals, custom tasks, and unsupported triggers for engineering judgment and validation.</a:t>
+            </a:r>
+            <a:endParaRPr lang="en-US" dirty="0"/>
+          </a:p>
+          <a:p>
+            <a:endParaRPr lang="en-US" dirty="0"/>
+          </a:p>
+          <a:p>
+            <a:pPr lvl="0"/>
+            <a:r>
+              <a:rPr lang="en-US" dirty="0"/>
+              <a:t>Supported platforms:</a:t>
+            </a:r>
+            <a:br>
+              <a:rPr lang="en-US" dirty="0"/>
+            </a:br>
+            <a:r>
+              <a:rPr lang="en-US" sz="1200" b="0" i="0" kern="1200" dirty="0">
+                <a:solidFill>
+                  <a:schemeClr val="tx1"/>
+                </a:solidFill>
+                <a:effectLst/>
+                <a:latin typeface="+mn-lt"/>
+                <a:ea typeface="+mn-ea"/>
+                <a:cs typeface="+mn-cs"/>
+              </a:rPr>
+              <a:t>Azure DevOps</a:t>
+            </a:r>
+          </a:p>
+          <a:p>
+            <a:pPr lvl="0"/>
+            <a:r>
+              <a:rPr lang="en-US" sz="1200" b="0" i="0" kern="1200" dirty="0">
+                <a:solidFill>
+                  <a:schemeClr val="tx1"/>
+                </a:solidFill>
+                <a:effectLst/>
+                <a:latin typeface="+mn-lt"/>
+                <a:ea typeface="+mn-ea"/>
+                <a:cs typeface="+mn-cs"/>
+              </a:rPr>
+              <a:t>Bamboo</a:t>
+            </a:r>
+          </a:p>
+          <a:p>
+            <a:pPr lvl="0"/>
+            <a:r>
+              <a:rPr lang="en-US" sz="1200" b="0" i="0" kern="1200" dirty="0">
+                <a:solidFill>
+                  <a:schemeClr val="tx1"/>
+                </a:solidFill>
+                <a:effectLst/>
+                <a:latin typeface="+mn-lt"/>
+                <a:ea typeface="+mn-ea"/>
+                <a:cs typeface="+mn-cs"/>
+              </a:rPr>
+              <a:t>Bitbucket Pipelines</a:t>
+            </a:r>
+          </a:p>
+          <a:p>
+            <a:pPr lvl="0"/>
+            <a:r>
+              <a:rPr lang="en-US" sz="1200" b="0" i="0" kern="1200" dirty="0" err="1">
+                <a:solidFill>
+                  <a:schemeClr val="tx1"/>
+                </a:solidFill>
+                <a:effectLst/>
+                <a:latin typeface="+mn-lt"/>
+                <a:ea typeface="+mn-ea"/>
+                <a:cs typeface="+mn-cs"/>
+              </a:rPr>
+              <a:t>CircleCI</a:t>
+            </a:r>
+            <a:endParaRPr lang="en-US" sz="1200" b="0" i="0" kern="1200" dirty="0">
+              <a:solidFill>
+                <a:schemeClr val="tx1"/>
+              </a:solidFill>
+              <a:effectLst/>
+              <a:latin typeface="+mn-lt"/>
+              <a:ea typeface="+mn-ea"/>
+              <a:cs typeface="+mn-cs"/>
+            </a:endParaRPr>
+          </a:p>
+          <a:p>
+            <a:pPr lvl="0"/>
+            <a:r>
+              <a:rPr lang="en-US" sz="1200" b="0" i="0" kern="1200" dirty="0">
+                <a:solidFill>
+                  <a:schemeClr val="tx1"/>
+                </a:solidFill>
+                <a:effectLst/>
+                <a:latin typeface="+mn-lt"/>
+                <a:ea typeface="+mn-ea"/>
+                <a:cs typeface="+mn-cs"/>
+              </a:rPr>
+              <a:t>GitLab (both cloud and self-hosted)</a:t>
+            </a:r>
+          </a:p>
+          <a:p>
+            <a:pPr lvl="0"/>
+            <a:r>
+              <a:rPr lang="en-US" sz="1200" b="0" i="0" kern="1200" dirty="0">
+                <a:solidFill>
+                  <a:schemeClr val="tx1"/>
+                </a:solidFill>
+                <a:effectLst/>
+                <a:latin typeface="+mn-lt"/>
+                <a:ea typeface="+mn-ea"/>
+                <a:cs typeface="+mn-cs"/>
+              </a:rPr>
+              <a:t>Jenkins</a:t>
+            </a:r>
+          </a:p>
+          <a:p>
+            <a:pPr lvl="0"/>
+            <a:r>
+              <a:rPr lang="en-US" sz="1200" b="0" i="0" kern="1200" dirty="0">
+                <a:solidFill>
+                  <a:schemeClr val="tx1"/>
+                </a:solidFill>
+                <a:effectLst/>
+                <a:latin typeface="+mn-lt"/>
+                <a:ea typeface="+mn-ea"/>
+                <a:cs typeface="+mn-cs"/>
+              </a:rPr>
+              <a:t>Travis CI</a:t>
             </a:r>
           </a:p>
           <a:p>
             <a:endParaRPr dirty="0"/>
-          </a:p>
-          <a:p>
-            <a:r>
-              <a:rPr dirty="0"/>
-              <a:t>Walk the right column as evidence. Nobody gets to call the automation plane done on a green build; they get to call it done when an internal feed resolved, OIDC issued a real token, and something actually deployed.</a:t>
-            </a:r>
-          </a:p>
-          <a:p>
-            <a:endParaRPr dirty="0"/>
-          </a:p>
-          <a:p>
-            <a:r>
-              <a:rPr dirty="0"/>
-              <a:t>LAND THE BOTTOM LINE AS THE JOKE IT IS — “the workflow converted successfully, it merely has no credentials, no network route, and nowhere to deploy.” Deliver it flat. Everyone who has done this will laugh, because everyone who has done this has shipped exactly that workflow. It is also the only real laugh in this stretch of the deck, so do not rush past it.</a:t>
-            </a:r>
-          </a:p>
-          <a:p>
-            <a:endParaRPr dirty="0"/>
-          </a:p>
-          <a:p>
-            <a:r>
-              <a:rPr dirty="0"/>
-              <a:t>If asked about act: it runs workflows in containers rather than GitHub's VMs, Linux runners only, and it does not support OIDC — so it will never prove any of the right-hand column.</a:t>
-            </a:r>
           </a:p>
         </p:txBody>
       </p:sp>
@@ -1985,11 +2117,20 @@
           <a:bodyPr/>
           <a:lstStyle/>
           <a:p>
+            <a:fld id="{F7021451-1387-4CA6-816F-3879F97B5CBC}" type="slidenum">
+              <a:rPr lang="en-US"/>
+              <a:t>24</a:t>
+            </a:fld>
             <a:endParaRPr lang="en-US"/>
           </a:p>
         </p:txBody>
       </p:sp>
     </p:spTree>
+    <p:extLst>
+      <p:ext uri="{BB962C8B-B14F-4D97-AF65-F5344CB8AC3E}">
+        <p14:creationId xmlns:p14="http://schemas.microsoft.com/office/powerpoint/2010/main" val="1024086991"/>
+      </p:ext>
+    </p:extLst>
   </p:cSld>
   <p:clrMapOvr>
     <a:masterClrMapping/>
@@ -2025,6 +2166,13 @@
           </p:nvPr>
         </p:nvSpPr>
         <p:spPr/>
+        <p:txBody>
+          <a:bodyPr/>
+          <a:lstStyle/>
+          <a:p>
+            <a:endParaRPr/>
+          </a:p>
+        </p:txBody>
       </p:sp>
       <p:sp>
         <p:nvSpPr>
@@ -2042,8 +2190,53 @@
           <a:lstStyle/>
           <a:p>
             <a:r>
-              <a:rPr lang="en-US"/>
-              <a:t>Straight delivery. AI is assistance inside the automation and validation planes, not a third migration path. Analyze first, convert second, then validate in fresh context with an explicit checklist and—where possible—a different reviewer or model. Deterministic tests and accountable engineering acceptance remain the authority. Preserve the honest status: the prompts have not yet been validated against a production pipeline.</a:t>
+              <a:rPr dirty="0"/>
+              <a:t>Straight delivery, and slow down here — for an enterprise room this is the slide that separates a migration talk from a migration.</a:t>
+            </a:r>
+          </a:p>
+          <a:p>
+            <a:endParaRPr dirty="0"/>
+          </a:p>
+          <a:p>
+            <a:r>
+              <a:rPr dirty="0"/>
+              <a:t>The setup: Actions Importer just told you the YAML converts. That is the easy half. The execution environment is the half that does not travel, and it is where regulated and on-prem estates actually stall.</a:t>
+            </a:r>
+          </a:p>
+          <a:p>
+            <a:endParaRPr dirty="0"/>
+          </a:p>
+          <a:p>
+            <a:r>
+              <a:rPr dirty="0"/>
+              <a:t>Walk the left column as decisions, not tasks — each one has an owner and a cost attached. The two that bite hardest are the network path to private endpoints, and who operates self-hosted runners once the migration team goes away.</a:t>
+            </a:r>
+          </a:p>
+          <a:p>
+            <a:endParaRPr dirty="0"/>
+          </a:p>
+          <a:p>
+            <a:r>
+              <a:rPr dirty="0"/>
+              <a:t>Walk the right column as evidence. Nobody gets to call the automation plane done on a green build; they get to call it done when an internal feed resolved, OIDC issued a real token, and something actually deployed.</a:t>
+            </a:r>
+          </a:p>
+          <a:p>
+            <a:endParaRPr dirty="0"/>
+          </a:p>
+          <a:p>
+            <a:r>
+              <a:rPr dirty="0"/>
+              <a:t>LAND THE BOTTOM LINE AS THE JOKE IT IS — “the workflow converted successfully, it merely has no credentials, no network route, and nowhere to deploy.” Deliver it flat. Everyone who has done this will laugh, because everyone who has done this has shipped exactly that workflow. It is also the only real laugh in this stretch of the deck, so do not rush past it.</a:t>
+            </a:r>
+          </a:p>
+          <a:p>
+            <a:endParaRPr dirty="0"/>
+          </a:p>
+          <a:p>
+            <a:r>
+              <a:rPr dirty="0"/>
+              <a:t>If asked about act: it runs workflows in containers rather than GitHub's VMs, Linux runners only, and it does not support OIDC — so it will never prove any of the right-hand column.</a:t>
             </a:r>
           </a:p>
         </p:txBody>
@@ -2063,20 +2256,11 @@
           <a:bodyPr/>
           <a:lstStyle/>
           <a:p>
-            <a:fld id="{F7021451-1387-4CA6-816F-3879F97B5CBC}" type="slidenum">
-              <a:rPr lang="en-US"/>
-              <a:t>25</a:t>
-            </a:fld>
             <a:endParaRPr lang="en-US"/>
           </a:p>
         </p:txBody>
       </p:sp>
     </p:spTree>
-    <p:extLst>
-      <p:ext uri="{BB962C8B-B14F-4D97-AF65-F5344CB8AC3E}">
-        <p14:creationId xmlns:p14="http://schemas.microsoft.com/office/powerpoint/2010/main" val="1024086991"/>
-      </p:ext>
-    </p:extLst>
   </p:cSld>
   <p:clrMapOvr>
     <a:masterClrMapping/>
@@ -2129,15 +2313,8 @@
           <a:lstStyle/>
           <a:p>
             <a:r>
-              <a:t>Straight delivery. Walk the five steps across all three planes. Inventory before moving; trial-migrate repository data; rebuild automation semantics and the execution environment; prove equivalence and deployability; then cut over with monitoring and rollback ready.</a:t>
-            </a:r>
-          </a:p>
-          <a:p>
-            <a:endParaRPr/>
-          </a:p>
-          <a:p>
-            <a:r>
-              <a:t>Say the finish-line distinction out loud: first verified delivery, not first green build. A green build proves the workflow ran. It proves nothing about the artifact, the deployment, traceability, or your ability to go back.</a:t>
+              <a:rPr lang="en-US"/>
+              <a:t>Straight delivery. AI is assistance inside the automation and validation planes, not a third migration path. Analyze first, convert second, then validate in fresh context with an explicit checklist and—where possible—a different reviewer or model. Deterministic tests and accountable engineering acceptance remain the authority. Preserve the honest status: the prompts have not yet been validated against a production pipeline.</a:t>
             </a:r>
           </a:p>
         </p:txBody>
@@ -2223,7 +2400,7 @@
           <a:lstStyle/>
           <a:p>
             <a:r>
-              <a:t>Straight delivery. This is a reusable acceptance checklist — tell the room to photograph it, it is the most portable thing in the talk.</a:t>
+              <a:t>Straight delivery. Walk the five steps across all three planes. Inventory before moving; trial-migrate repository data; rebuild automation semantics and the execution environment; prove equivalence and deployability; then cut over with monitoring and rollback ready.</a:t>
             </a:r>
           </a:p>
           <a:p>
@@ -2231,7 +2408,7 @@
           </a:p>
           <a:p>
             <a:r>
-              <a:t>Emphasize that acceptance spans all three planes: repository data, automation, and validation/cutover. A repository URL and a green build do not prove identity, policy, artifact, deployment, observability, traceability, or rollback readiness.</a:t>
+              <a:t>Say the finish-line distinction out loud: first verified delivery, not first green build. A green build proves the workflow ran. It proves nothing about the artifact, the deployment, traceability, or your ability to go back.</a:t>
             </a:r>
           </a:p>
         </p:txBody>
@@ -2317,7 +2494,15 @@
           <a:lstStyle/>
           <a:p>
             <a:r>
-              <a:t>Brief check-in, not a discussion window — about 30 seconds given how much ground this section covers. Take one quick question if a hand is up, otherwise move straight into section 4. The real Q&amp;A time is banked for the open Q&amp;A at the end.</a:t>
+              <a:t>Straight delivery. This is a reusable acceptance checklist — tell the room to photograph it, it is the most portable thing in the talk.</a:t>
+            </a:r>
+          </a:p>
+          <a:p>
+            <a:endParaRPr/>
+          </a:p>
+          <a:p>
+            <a:r>
+              <a:t>Emphasize that acceptance spans all three planes: repository data, automation, and validation/cutover. A repository URL and a green build do not prove identity, policy, artifact, deployment, observability, traceability, or rollback readiness.</a:t>
             </a:r>
           </a:p>
         </p:txBody>
@@ -2403,7 +2588,7 @@
           <a:lstStyle/>
           <a:p>
             <a:r>
-              <a:t>DOCUMENTARY VOICE — the only register for this slide. Deliver slowly, deadpan, faintly awed, same conceit as the earlier section openers. Pause after the line, then go straight back to normal delivery for the Boards-vs-Projects framing slide. Keep this section brisk: five slides, and the payoff is the Test Plans slide and the recommendation, not length.</a:t>
+              <a:t>Brief check-in, not a discussion window — about 30 seconds given how much ground this section covers. Take one quick question if a hand is up, otherwise move straight into section 4. The real Q&amp;A time is banked for the open Q&amp;A at the end.</a:t>
             </a:r>
           </a:p>
         </p:txBody>
@@ -2489,7 +2674,7 @@
           <a:lstStyle/>
           <a:p>
             <a:r>
-              <a:t>Straight delivery. Walk the six legs quickly. Budget for the 90-minute slot: section 1 about 8 minutes (including the opening), section 2 about 13, section 3 about 21, section 4 about 10, section 5 about 12, section 6 about 8. That is roughly 72 minutes of content plus four one-minute Q&amp;A pockets, which leaves about 14 minutes of open Q&amp;A on the thank-you slide. The ELM slide now sits in the appendix after the thank-you slide; pull it up only if someone asks.</a:t>
+              <a:t>Straight delivery. Walk the six legs quickly. Budget for the 90-minute slot: section 1 about 8 minutes (including the opening), section 2 about 13, section 3 about 21, section 4 about 10, section 5 about 12, section 6 about 8. That is roughly 72 minutes of content plus four one-minute Q&amp;A pockets, which leaves about 14 minutes of open Q&amp;A on the thank-you slide. Section 3 includes the ELM slide; give it a few seconds and move on.</a:t>
             </a:r>
           </a:p>
           <a:p>
@@ -2583,31 +2768,7 @@
           <a:lstStyle/>
           <a:p>
             <a:r>
-              <a:t>Straight delivery. Frame this before comparing feature by feature — Azure Boards and GitHub Projects are not two competitors in one category, they are two different models.</a:t>
-            </a:r>
-          </a:p>
-          <a:p>
-            <a:endParaRPr/>
-          </a:p>
-          <a:p>
-            <a:r>
-              <a:t>Azure Boards is a full enterprise work-tracking system organized around a process template: hierarchy, states, rules, capacity, cross-team reporting. GitHub Projects is a real planning layer organized around custom fields and views — org-level, spanning repositories, with sub-issues, issue types and dependencies all GA.</a:t>
-            </a:r>
-          </a:p>
-          <a:p>
-            <a:endParaRPr/>
-          </a:p>
-          <a:p>
-            <a:r>
-              <a:t>Do NOT call Projects a lightweight kanban board. That was fair a few years ago and this room will know it isn't now; understating it makes the Boards recommendation later sound motivated rather than reasoned. Naming the difference as two models rather than a feature gap is what stops the next slide reading as a scored competition.</a:t>
-            </a:r>
-          </a:p>
-          <a:p>
-            <a:endParaRPr/>
-          </a:p>
-          <a:p>
-            <a:r>
-              <a:t>The next slide takes each tool on its own terms before comparing what's lost in a migration — say that as a transition, don't put it on the slide.</a:t>
+              <a:t>DOCUMENTARY VOICE — the only register for this slide. Deliver slowly, deadpan, faintly awed, same conceit as the earlier section openers. Pause after the line, then go straight back to normal delivery for the Boards-vs-Projects framing slide. Keep this section brisk: five slides, and the payoff is the Test Plans slide and the recommendation, not length.</a:t>
             </a:r>
           </a:p>
         </p:txBody>
@@ -2693,31 +2854,35 @@
           <a:lstStyle/>
           <a:p>
             <a:r>
-              <a:t>Straight delivery. Take each tool on its own terms before comparing what a migration loses.</a:t>
-            </a:r>
-          </a:p>
-          <a:p>
-            <a:endParaRPr/>
-          </a:p>
-          <a:p>
-            <a:r>
-              <a:t>Left card, the enterprise case, stated plainly: hierarchical work items from Epics down to Tasks, built-in sprint planning and capacity management, Delivery Plans for dependencies across teams, and Boards Analytics feeding Power BI. It organizes around Project, Team and Area Path — a structure built for portfolios, not one team’s board.</a:t>
-            </a:r>
-          </a:p>
-          <a:p>
-            <a:endParaRPr/>
-          </a:p>
-          <a:p>
-            <a:r>
-              <a:t>Right card, and give Projects real credit, because the recommendation at the end of this section only carries weight if this half was honest. Projects is organized around custom fields (iteration, single-select, date, number) rather than a fixed process template. Sub-issues, issue types and dependencies are all GA, there are board, table and roadmap layouts, and automation comes built in or through Actions. It is org-level, not repo-scoped, and it lives next to the issues and PRs it tracks.</a:t>
-            </a:r>
-          </a:p>
-          <a:p>
-            <a:endParaRPr/>
-          </a:p>
-          <a:p>
-            <a:r>
-              <a:t>The contrast is process template versus fields and views, not enterprise versus toy. If asked about limits: a project holds up to 50 fields, counting the built-in ones.</a:t>
+              <a:rPr dirty="0"/>
+              <a:t>Straight delivery. Frame this before comparing feature by feature — Azure Boards and GitHub Projects are not two competitors in one category, they are two different models.</a:t>
+            </a:r>
+          </a:p>
+          <a:p>
+            <a:endParaRPr dirty="0"/>
+          </a:p>
+          <a:p>
+            <a:r>
+              <a:rPr dirty="0"/>
+              <a:t>Azure Boards is a full enterprise work-tracking system organized around a process template: hierarchy, states, rules, capacity, cross-team reporting. GitHub Projects is a real planning layer organized around custom fields and views — org-level, spanning repositories, with sub-issues, issue types and dependencies all GA.</a:t>
+            </a:r>
+          </a:p>
+          <a:p>
+            <a:endParaRPr dirty="0"/>
+          </a:p>
+          <a:p>
+            <a:r>
+              <a:rPr dirty="0"/>
+              <a:t>Do NOT call Projects a lightweight kanban board. That was fair a few years ago and this room will know it isn't now; understating it makes the Boards recommendation later sound motivated rather than reasoned. Naming the difference as two models rather than a feature gap is what stops the next slide reading as a scored competition.</a:t>
+            </a:r>
+          </a:p>
+          <a:p>
+            <a:endParaRPr dirty="0"/>
+          </a:p>
+          <a:p>
+            <a:r>
+              <a:rPr dirty="0"/>
+              <a:t>The next slide takes each tool on its own terms before comparing what's lost in a migration — say that as a transition, don't put it on the slide.</a:t>
             </a:r>
           </a:p>
         </p:txBody>
@@ -2803,7 +2968,7 @@
           <a:lstStyle/>
           <a:p>
             <a:r>
-              <a:t>Straight delivery. Be concrete about the loss: sprint history and capacity data, custom process fields and rules, the process template itself, and the Project / Team / Area Path structure have no clean landing spot in GitHub Projects. Parent-child links are the exception; they can map to sub-issues, which go up to eight levels deep.</a:t>
+              <a:t>Straight delivery. Take each tool on its own terms before comparing what a migration loses.</a:t>
             </a:r>
           </a:p>
           <a:p>
@@ -2811,7 +2976,7 @@
           </a:p>
           <a:p>
             <a:r>
-              <a:t>Set expectations on tooling honestly. There is no first-party tool that moves Azure Boards work items into GitHub Issues. The well-known azure-devops-migration-tools project moves work items between Azure DevOps projects and organizations, not to GitHub. What exists for GitHub is community scripts against the two APIs, and the data models still don’t line up, so this is a mapping project, not a one-command migration. This sets up the Test Plans slide and the recommendation that follows.</a:t>
+              <a:t>Left card, the enterprise case, stated plainly: hierarchical work items from Epics down to Tasks, built-in sprint planning and capacity management, Delivery Plans for dependencies across teams, and Boards Analytics feeding Power BI. It organizes around Project, Team and Area Path — a structure built for portfolios, not one team’s board.</a:t>
             </a:r>
           </a:p>
           <a:p>
@@ -2819,7 +2984,15 @@
           </a:p>
           <a:p>
             <a:r>
-              <a:t>OPTIONAL LAUGH LINE — on losing sprint history and capacity data: “Nobody has ever asked to see sprint history from three years ago. They will ask exactly once, about six weeks after you delete it.”</a:t>
+              <a:t>Right card, and give Projects real credit, because the recommendation at the end of this section only carries weight if this half was honest. Projects is organized around custom fields (iteration, single-select, date, number) rather than a fixed process template. Sub-issues, issue types and dependencies are all GA, there are board, table and roadmap layouts, and automation comes built in or through Actions. It is org-level, not repo-scoped, and it lives next to the issues and PRs it tracks.</a:t>
+            </a:r>
+          </a:p>
+          <a:p>
+            <a:endParaRPr/>
+          </a:p>
+          <a:p>
+            <a:r>
+              <a:t>The contrast is process template versus fields and views, not enterprise versus toy. If asked about limits: a project holds up to 50 fields, counting the built-in ones.</a:t>
             </a:r>
           </a:p>
         </p:txBody>
@@ -2905,8 +3078,23 @@
           <a:lstStyle/>
           <a:p>
             <a:r>
-              <a:rPr lang="en-US" dirty="0"/>
-              <a:t>Straight delivery, and let this one land plainly — it's probably the best-received slide in the whole deck precisely because it doesn't try to spin anything. There is no native GitHub Projects or Issues equivalent for structured manual and exploratory testing, full stop. In a regulated environment, that alone can be sufficient reason to keep Azure DevOps around. This is the shortest slide in the section on purpose — sometimes the honest answer is just 'it doesn't move, and that's fine,' and saying it plainly builds more credibility than manufacturing a workaround.</a:t>
+              <a:t>Straight delivery. Be concrete about the loss: sprint history and capacity data, custom process fields and rules, the process template itself, and the Project / Team / Area Path structure have no clean landing spot in GitHub Projects. Parent-child links are the exception; they can map to sub-issues, which go up to eight levels deep.</a:t>
+            </a:r>
+          </a:p>
+          <a:p>
+            <a:endParaRPr/>
+          </a:p>
+          <a:p>
+            <a:r>
+              <a:t>Set expectations on tooling honestly. There is no first-party tool that moves Azure Boards work items into GitHub Issues. The well-known azure-devops-migration-tools project moves work items between Azure DevOps projects and organizations, not to GitHub. What exists for GitHub is community scripts against the two APIs, and the data models still don’t line up, so this is a mapping project, not a one-command migration. This sets up the Test Plans slide and the recommendation that follows.</a:t>
+            </a:r>
+          </a:p>
+          <a:p>
+            <a:endParaRPr/>
+          </a:p>
+          <a:p>
+            <a:r>
+              <a:t>OPTIONAL LAUGH LINE — on losing sprint history and capacity data: “Nobody has ever asked to see sprint history from three years ago. They will ask exactly once, about six weeks after you delete it.”</a:t>
             </a:r>
           </a:p>
         </p:txBody>
@@ -2992,23 +3180,17 @@
           <a:lstStyle/>
           <a:p>
             <a:r>
-              <a:t>Straight delivery. This is the explicit takeaway for the section, and it is section 2’s hybrid pattern applied to planning: connect Azure Boards to your GitHub repos before touching anything else. Developers work in GitHub, next to Copilot and their pull requests; managers keep the sprint hub, capacity charts and Power BI reporting exactly where they are. The Azure Boards app for GitHub links commits and PRs back to work items with AB# mentions, and the Copilot cloud agent can be started from a Boards item.</a:t>
-            </a:r>
-          </a:p>
-          <a:p>
-            <a:endParaRPr/>
-          </a:p>
-          <a:p>
-            <a:r>
-              <a:t>Say the recommendation plainly: don’t migrate to GitHub Issues unless your planning needs are genuinely simple. For most teams past a handful of people, the hierarchy, capacity planning and reporting Azure Boards already gives you are worth keeping.</a:t>
-            </a:r>
-          </a:p>
-          <a:p>
-            <a:endParaRPr/>
-          </a:p>
-          <a:p>
-            <a:r>
-              <a:t>Then the nuance, which is the bottom bar: this isn’t an argument for Azure Boards forever. It’s an argument against defaulting to GitHub Issues just because the code moved. Where you plan work is a separate decision from where the code lives, so leave that door open.</a:t>
+              <a:rPr lang="en-US" dirty="0"/>
+              <a:t>Straight delivery, and let this one land plainly — it's probably the best-received slide in the whole deck precisely because it doesn't try to spin anything. </a:t>
+            </a:r>
+          </a:p>
+          <a:p>
+            <a:endParaRPr lang="en-US" dirty="0"/>
+          </a:p>
+          <a:p>
+            <a:r>
+              <a:rPr lang="en-US" dirty="0"/>
+              <a:t>This is the shortest slide in the section on purpose — sometimes the honest answer is just 'it doesn't move, and that's fine,' and saying it plainly builds more credibility than manufacturing a workaround.</a:t>
             </a:r>
           </a:p>
         </p:txBody>
@@ -3094,7 +3276,23 @@
           <a:lstStyle/>
           <a:p>
             <a:r>
-              <a:t>Brief check-in, not a discussion window — about a minute. Take one quick question if a hand is up, otherwise move straight into section 5. The real Q&amp;A time is banked for the open Q&amp;A at the end.</a:t>
+              <a:t>Straight delivery. This is the explicit takeaway for the section, and it is section 2’s hybrid pattern applied to planning: connect Azure Boards to your GitHub repos before touching anything else. Developers work in GitHub, next to Copilot and their pull requests; managers keep the sprint hub, capacity charts and Power BI reporting exactly where they are. The Azure Boards app for GitHub links commits and PRs back to work items with AB# mentions, and the Copilot cloud agent can be started from a Boards item.</a:t>
+            </a:r>
+          </a:p>
+          <a:p>
+            <a:endParaRPr/>
+          </a:p>
+          <a:p>
+            <a:r>
+              <a:t>Say the recommendation plainly: don’t migrate to GitHub Issues unless your planning needs are genuinely simple. For most teams past a handful of people, the hierarchy, capacity planning and reporting Azure Boards already gives you are worth keeping.</a:t>
+            </a:r>
+          </a:p>
+          <a:p>
+            <a:endParaRPr/>
+          </a:p>
+          <a:p>
+            <a:r>
+              <a:t>Then the nuance, which is the bottom bar: this isn’t an argument for Azure Boards forever. It’s an argument against defaulting to GitHub Issues just because the code moved. Where you plan work is a separate decision from where the code lives, so leave that door open.</a:t>
             </a:r>
           </a:p>
         </p:txBody>
@@ -3180,8 +3378,7 @@
           <a:lstStyle/>
           <a:p>
             <a:r>
-              <a:rPr lang="en-US" dirty="0"/>
-              <a:t>DOCUMENTARY VOICE — the only register for this slide. Deliver slowly, deadpan, faintly awed, same conceit as the earlier section openers. Pause after the line, then go straight back to normal delivery for the thesis slide. This section's closing slide comes back to this exact character — plant it here without over-explaining, the payoff lands later.</a:t>
+              <a:t>Brief check-in, not a discussion window — about a minute. Take one quick question if a hand is up, otherwise move straight into section 5. The real Q&amp;A time is banked for the open Q&amp;A at the end.</a:t>
             </a:r>
           </a:p>
         </p:txBody>
@@ -3267,7 +3464,8 @@
           <a:lstStyle/>
           <a:p>
             <a:r>
-              <a:t>Straight delivery. This is the section’s thesis — land it early and come back to it. Most migrations that fail don’t fail in the converter; gh-ado2gh and Actions Importer do what they say. The execution-environment work from section 3 is real, but it is engineering you can plan. What sinks migrations is three predictable human failures: no real selection process (a choice made by momentum rather than evaluated on merit), customization starting before anyone understood the new tool, and a rollout that felt done TO people rather than WITH them. The rest of this section is about avoiding those three.</a:t>
+              <a:rPr lang="en-US" dirty="0"/>
+              <a:t>DOCUMENTARY VOICE — the only register for this slide. Deliver slowly, deadpan, faintly awed, same conceit as the earlier section openers. Pause after the line, then go straight back to normal delivery for the thesis slide. This section's closing slide comes back to this exact character — plant it here without over-explaining, the payoff lands later.</a:t>
             </a:r>
           </a:p>
         </p:txBody>
@@ -3353,23 +3551,7 @@
           <a:lstStyle/>
           <a:p>
             <a:r>
-              <a:t>Before walking the steps: “In most organizations the real selection process is that somebody senior used it at their last job.” OPTIONAL LAUGH LINE, and it is precisely failure mode one from the previous slide.</a:t>
-            </a:r>
-          </a:p>
-          <a:p>
-            <a:endParaRPr/>
-          </a:p>
-          <a:p>
-            <a:r>
-              <a:t>Straight delivery, walk this quickly. Frame it for this room: you have already chosen GitHub, so this is for the choices inside the migration — Boards or Projects, hosted or self-hosted runners, Azure Artifacts or GitHub Packages. Define must-haves, assess real constraints like data residency and compliance, model one real increment of actual work in each option rather than watching a demo, score it with a weighted rubric so the decision is defensible later, then pilot.</a:t>
-            </a:r>
-          </a:p>
-          <a:p>
-            <a:endParaRPr/>
-          </a:p>
-          <a:p>
-            <a:r>
-              <a:t>Step five carries the second failure mode: customizing on day one locks in decisions made by people who didn’t understand the tool yet. Every custom field, automation rule or process tweak added before the pilot is a bet placed with the least information you’ll ever have — that’s the bottom bar. Run the pilot on defaults, then customize with real usage data instead of guesses.</a:t>
+              <a:t>Straight delivery. This is the section’s thesis — land it early and come back to it. Most migrations that fail don’t fail in the converter; gh-ado2gh and Actions Importer do what they say. The execution-environment work from section 3 is real, but it is engineering you can plan. What sinks migrations is three predictable human failures: no real selection process (a choice made by momentum rather than evaluated on merit), customization starting before anyone understood the new tool, and a rollout that felt done TO people rather than WITH them. The rest of this section is about avoiding those three.</a:t>
             </a:r>
           </a:p>
         </p:txBody>
@@ -3455,8 +3637,23 @@
           <a:lstStyle/>
           <a:p>
             <a:r>
-              <a:rPr lang="en-US"/>
-              <a:t>Straight delivery. Align the rollout with the three-plane model. Define authority and traceability first, prove one repository end-to-end, then scale in waves with explicit entry criteria. Cut over only with validation and rollback ready; decommission after long-tail checks, not immediately after migration.</a:t>
+              <a:t>Before walking the steps: “In most organizations the real selection process is that somebody senior used it at their last job.” OPTIONAL LAUGH LINE, and it is precisely failure mode one from the previous slide.</a:t>
+            </a:r>
+          </a:p>
+          <a:p>
+            <a:endParaRPr/>
+          </a:p>
+          <a:p>
+            <a:r>
+              <a:t>Straight delivery, walk this quickly. Frame it for this room: you have already chosen GitHub, so this is for the choices inside the migration — Boards or Projects, hosted or self-hosted runners, Azure Artifacts or GitHub Packages. Define must-haves, assess real constraints like data residency and compliance, model one real increment of actual work in each option rather than watching a demo, score it with a weighted rubric so the decision is defensible later, then pilot.</a:t>
+            </a:r>
+          </a:p>
+          <a:p>
+            <a:endParaRPr/>
+          </a:p>
+          <a:p>
+            <a:r>
+              <a:t>Step five carries the second failure mode: customizing on day one locks in decisions made by people who didn’t understand the tool yet. Every custom field, automation rule or process tweak added before the pilot is a bet placed with the least information you’ll ever have — that’s the bottom bar. Run the pilot on defaults, then customize with real usage data instead of guesses.</a:t>
             </a:r>
           </a:p>
         </p:txBody>
@@ -3628,23 +3825,8 @@
           <a:lstStyle/>
           <a:p>
             <a:r>
-              <a:t>Straight delivery. Sticker-price comparisons are the easiest way to make a bad decision look rigorous. Compare the whole bill: licensing tiers; GitHub Secret Protection and GitHub Code Security, which since April 2025 are sold as two separate add-ons rather than one Advanced Security bundle (Azure DevOps sells the same two products, so security alone doesn’t tip the decision); runner and compute minutes; and the real admin and migration effort, which is easy to leave off a spreadsheet entirely.</a:t>
-            </a:r>
-          </a:p>
-          <a:p>
-            <a:endParaRPr/>
-          </a:p>
-          <a:p>
-            <a:r>
-              <a:t>The bottom bar is the part most business cases skip: price the migration and the steady state as two separate numbers, and count the months when both platforms are billing at once. Dual-running is where the estimate usually goes wrong.</a:t>
-            </a:r>
-          </a:p>
-          <a:p>
-            <a:endParaRPr/>
-          </a:p>
-          <a:p>
-            <a:r>
-              <a:t>OPTIONAL LAUGH LINE — on the last item of the cost model: “Every migration business case has a line called *migration effort*, and it is always the number nobody wanted to be the person to estimate.”</a:t>
+              <a:rPr lang="en-US"/>
+              <a:t>Straight delivery. Align the rollout with the three-plane model. Define authority and traceability first, prove one repository end-to-end, then scale in waves with explicit entry criteria. Cut over only with validation and rollback ready; decommission after long-tail checks, not immediately after migration.</a:t>
             </a:r>
           </a:p>
         </p:txBody>
@@ -3730,7 +3912,7 @@
           <a:lstStyle/>
           <a:p>
             <a:r>
-              <a:t>Straight delivery. This is the counterweight to section 1. AI is the honest reason most teams are migrating — this slide is where you pay that argument down so it reads as analysis rather than a pitch. Frame the four as a to-do list, not as reasons to doubt the move.</a:t>
+              <a:t>Straight delivery. Sticker-price comparisons are the easiest way to make a bad decision look rigorous. Compare the whole bill: licensing tiers; GitHub Secret Protection and GitHub Code Security, which since April 2025 are sold as two separate add-ons rather than one Advanced Security bundle (Azure DevOps sells the same two products, so security alone doesn’t tip the decision); runner and compute minutes; and the real admin and migration effort, which is easy to leave off a spreadsheet entirely.</a:t>
             </a:r>
           </a:p>
           <a:p>
@@ -3738,7 +3920,7 @@
           </a:p>
           <a:p>
             <a:r>
-              <a:t>1. WORK ITEMS. Verified behavior, and it closes the loop with the Boards recommendation in section 4: when the Copilot cloud agent is triggered from an Azure Boards work item it captures the text fields — description, repro steps — plus the last 50 comments. So keeping Boards does not cost you the AI payoff; it just means the Boards item literally is the prompt.</a:t>
+              <a:t>The bottom bar is the part most business cases skip: price the migration and the steady state as two separate numbers, and count the months when both platforms are billing at once. Dual-running is where the estimate usually goes wrong.</a:t>
             </a:r>
           </a:p>
           <a:p>
@@ -3746,39 +3928,7 @@
           </a:p>
           <a:p>
             <a:r>
-              <a:t>   WORTH SAYING FOR A REGULATED ROOM: that captured context is stored in the pull request and is visible to anyone with access to the repository. A work item that was private in Azure DevOps becomes readable in GitHub the moment an agent picks it up. Most people have not thought about that, and for anyone with compliance obligations it is the most useful thirty seconds on the slide.</a:t>
-            </a:r>
-          </a:p>
-          <a:p>
-            <a:endParaRPr/>
-          </a:p>
-          <a:p>
-            <a:r>
-              <a:t>2. CONVENTIONS. Three supported files: .github/copilot-instructions.md repository-wide, path-specific NAME.instructions.md under .github/instructions (cloud agent and code review only), and AGENTS.md anywhere in the tree, nearest one winning. Without them the agent infers house style from whatever it can see, which on a large legacy repo is whatever is oldest.</a:t>
-            </a:r>
-          </a:p>
-          <a:p>
-            <a:endParaRPr/>
-          </a:p>
-          <a:p>
-            <a:r>
-              <a:t>3. TESTS. Tie this back to the crossing section — a green build is evidence, not acceptance. Agent throughput is capped by human review capacity until CI carries real weight, so teams with thin or flaky suites do not get faster, they just move the bottleneck onto reviewers.</a:t>
-            </a:r>
-          </a:p>
-          <a:p>
-            <a:endParaRPr/>
-          </a:p>
-          <a:p>
-            <a:r>
-              <a:t>4. LICENSING. Moving the repository turns nothing on. The cloud agent needs a paid Copilot plan, it must be enabled on each connected repository, and an organization owner has to install the Azure Boards GitHub app before anyone can use the integration.</a:t>
-            </a:r>
-          </a:p>
-          <a:p>
-            <a:endParaRPr/>
-          </a:p>
-          <a:p>
-            <a:r>
-              <a:t>OPTIONAL LAUGH LINE — after “The work item is the prompt”: “Garbage in, garbage out — except now the garbage arrives with unit tests and a confident summary.”</a:t>
+              <a:t>OPTIONAL LAUGH LINE — on the last item of the cost model: “Every migration business case has a line called *migration effort*, and it is always the number nobody wanted to be the person to estimate.”</a:t>
             </a:r>
           </a:p>
         </p:txBody>
@@ -3864,7 +4014,55 @@
           <a:lstStyle/>
           <a:p>
             <a:r>
-              <a:t>Documentary aside — same voice as the opener cards, played for a beat, then straight delivery resumes. This is the section's closing synthesis: startups and one-to-three-squad teams should just take GitHub Projects' lightweight fit, no enterprise overhead needed. Scaled agile, regulated industries, and multi-team portfolios are exactly where Azure Boards' hierarchy and reporting earn their keep. Mixed estates get the hybrid pattern, deliberately — a fit, not a compromise. Then the documentary callback: the Senior Engineer from the opener card isn't wrong to be cautious about change, they're just defending the old pipeline with the wrong argument ('it's always worked') instead of the right one ('here's what the audit says'). Land this warmly, not as a dunk — the point is to hear the objection out and then hand them the Actions Importer audit from section 3. The bucket their pipeline landed in is the conversation.</a:t>
+              <a:t>Straight delivery. This is the counterweight to section 1. AI is the honest reason most teams are migrating — this slide is where you pay that argument down so it reads as analysis rather than a pitch. Frame the four as a to-do list, not as reasons to doubt the move.</a:t>
+            </a:r>
+          </a:p>
+          <a:p>
+            <a:endParaRPr/>
+          </a:p>
+          <a:p>
+            <a:r>
+              <a:t>1. WORK ITEMS. Verified behavior, and it closes the loop with the Boards recommendation in section 4: when the Copilot cloud agent is triggered from an Azure Boards work item it captures the text fields — description, repro steps — plus the last 50 comments. So keeping Boards does not cost you the AI payoff; it just means the Boards item literally is the prompt.</a:t>
+            </a:r>
+          </a:p>
+          <a:p>
+            <a:endParaRPr/>
+          </a:p>
+          <a:p>
+            <a:r>
+              <a:t>   WORTH SAYING FOR A REGULATED ROOM: that captured context is stored in the pull request and is visible to anyone with access to the repository. A work item that was private in Azure DevOps becomes readable in GitHub the moment an agent picks it up. Most people have not thought about that, and for anyone with compliance obligations it is the most useful thirty seconds on the slide.</a:t>
+            </a:r>
+          </a:p>
+          <a:p>
+            <a:endParaRPr/>
+          </a:p>
+          <a:p>
+            <a:r>
+              <a:t>2. CONVENTIONS. Three supported files: .github/copilot-instructions.md repository-wide, path-specific NAME.instructions.md under .github/instructions (cloud agent and code review only), and AGENTS.md anywhere in the tree, nearest one winning. Without them the agent infers house style from whatever it can see, which on a large legacy repo is whatever is oldest.</a:t>
+            </a:r>
+          </a:p>
+          <a:p>
+            <a:endParaRPr/>
+          </a:p>
+          <a:p>
+            <a:r>
+              <a:t>3. TESTS. Tie this back to the crossing section — a green build is evidence, not acceptance. Agent throughput is capped by human review capacity until CI carries real weight, so teams with thin or flaky suites do not get faster, they just move the bottleneck onto reviewers.</a:t>
+            </a:r>
+          </a:p>
+          <a:p>
+            <a:endParaRPr/>
+          </a:p>
+          <a:p>
+            <a:r>
+              <a:t>4. LICENSING. Moving the repository turns nothing on. The cloud agent needs a paid Copilot plan, it must be enabled on each connected repository, and an organization owner has to install the Azure Boards GitHub app before anyone can use the integration.</a:t>
+            </a:r>
+          </a:p>
+          <a:p>
+            <a:endParaRPr/>
+          </a:p>
+          <a:p>
+            <a:r>
+              <a:t>OPTIONAL LAUGH LINE — after “The work item is the prompt”: “Garbage in, garbage out — except now the garbage arrives with unit tests and a confident summary.”</a:t>
             </a:r>
           </a:p>
         </p:txBody>
@@ -3950,7 +4148,7 @@
           <a:lstStyle/>
           <a:p>
             <a:r>
-              <a:t>Brief check-in, not a discussion window — about a minute. Take one quick question if a hand is up, otherwise move straight into section 6, the final section. The real Q&amp;A time is banked for the open Q&amp;A at the end.</a:t>
+              <a:t>Documentary aside — same voice as the opener cards, played for a beat, then straight delivery resumes. This is the section's closing synthesis: startups and one-to-three-squad teams should just take GitHub Projects' lightweight fit, no enterprise overhead needed. Scaled agile, regulated industries, and multi-team portfolios are exactly where Azure Boards' hierarchy and reporting earn their keep. Mixed estates get the hybrid pattern, deliberately — a fit, not a compromise. Then the documentary callback: the Senior Engineer from the opener card isn't wrong to be cautious about change, they're just defending the old pipeline with the wrong argument ('it's always worked') instead of the right one ('here's what the audit says'). Land this warmly, not as a dunk — the point is to hear the objection out and then hand them the Actions Importer audit from section 3. The bucket their pipeline landed in is the conversation.</a:t>
             </a:r>
           </a:p>
         </p:txBody>
@@ -4036,8 +4234,7 @@
           <a:lstStyle/>
           <a:p>
             <a:r>
-              <a:rPr lang="en-US" dirty="0"/>
-              <a:t>DOCUMENTARY VOICE — spoken live, not read. This is the section opener: slow down, let the metaphor land. We are closing the loop on the "field guide to a new habitat" framing from the whole talk — this section is about what still limps back to the old watering hole after everyone else has moved on.</a:t>
+              <a:t>Brief check-in, not a discussion window — about a minute. Take one quick question if a hand is up, otherwise move straight into section 6, the final section. The real Q&amp;A time is banked for the open Q&amp;A at the end.</a:t>
             </a:r>
           </a:p>
         </p:txBody>
@@ -4123,7 +4320,8 @@
           <a:lstStyle/>
           <a:p>
             <a:r>
-              <a:t>STRAIGHT delivery. This is the practical, checklist-voiced part of the section. The five rows are meant to be read as "here is where these hide" — invite the room to mentally add their own sixth row, because every org has one nobody else would guess.</a:t>
+              <a:rPr lang="en-US" dirty="0"/>
+              <a:t>DOCUMENTARY VOICE — spoken live, not read. This is the section opener: slow down, let the metaphor land. We are closing the loop on the "field guide to a new habitat" framing from the whole talk — this section is about what still limps back to the old watering hole after everyone else has moved on.</a:t>
             </a:r>
           </a:p>
         </p:txBody>
@@ -4209,31 +4407,7 @@
           <a:lstStyle/>
           <a:p>
             <a:r>
-              <a:t>Two registers on this one slide. STRAIGHT for the top two cards — this is real mechanical risk, say it plainly.</a:t>
-            </a:r>
-          </a:p>
-          <a:p>
-            <a:endParaRPr/>
-          </a:p>
-          <a:p>
-            <a:r>
-              <a:t>The precision that matters: an org owner sends the attribution invitation, but nothing is reattributed until the person accepts it. Which means your reclaim rate depends on people reading email — that is its own migration risk, and it usually gets a laugh because everyone knows it is true. Enterprise Managed Users are the exception, where the reclaim completes immediately without an invitation. Git commits are attributed by email and are unaffected either way. The EMU exception is no longer on the slide, so say it here.</a:t>
-            </a:r>
-          </a:p>
-          <a:p>
-            <a:endParaRPr/>
-          </a:p>
-          <a:p>
-            <a:r>
-              <a:t>Be precise about what sits on a mannequin: pull-request data only — authorship, comments and reviews. Work items don’t migrate at all, so there is no work-item history to reclaim.</a:t>
-            </a:r>
-          </a:p>
-          <a:p>
-            <a:endParaRPr/>
-          </a:p>
-          <a:p>
-            <a:r>
-              <a:t>Then shift into DOCUMENTARY VOICE for the on-slide aside at the bottom, read as written, then straight back to conference delivery. The mannequin framing is the callback that ties this section's watering-hole metaphor to identity specifically.</a:t>
+              <a:t>STRAIGHT delivery. This is the practical, checklist-voiced part of the section. The five rows are meant to be read as "here is where these hide" — invite the room to mentally add their own sixth row, because every org has one nobody else would guess.</a:t>
             </a:r>
           </a:p>
         </p:txBody>
@@ -4319,7 +4493,7 @@
           <a:lstStyle/>
           <a:p>
             <a:r>
-              <a:t>STRAIGHT delivery, briskly. For item three, recap the three planes and the cross-plane methods. For item five, reinforce that migration is an operating model: ownership, entry criteria, evidence, rollback, and decommissioning—not merely a tooling sequence.</a:t>
+              <a:t>Two registers on this one slide. STRAIGHT for the top two cards — this is real mechanical risk, say it plainly.</a:t>
             </a:r>
           </a:p>
           <a:p>
@@ -4327,7 +4501,23 @@
           </a:p>
           <a:p>
             <a:r>
-              <a:t>Then hand straight off to the Unglamorous Truth slide. The recap is the list; that slide is the point. Do not editorialise between the two — just turn the page.</a:t>
+              <a:t>The precision that matters: an org owner sends the attribution invitation, but nothing is reattributed until the person accepts it. Which means your reclaim rate depends on people reading email — that is its own migration risk, and it usually gets a laugh because everyone knows it is true. Enterprise Managed Users are the exception, where the reclaim completes immediately without an invitation. Git commits are attributed by email and are unaffected either way. The EMU exception is no longer on the slide, so say it here.</a:t>
+            </a:r>
+          </a:p>
+          <a:p>
+            <a:endParaRPr/>
+          </a:p>
+          <a:p>
+            <a:r>
+              <a:t>Be precise about what sits on a mannequin: pull-request data only — authorship, comments and reviews. Work items don’t migrate at all, so there is no work-item history to reclaim.</a:t>
+            </a:r>
+          </a:p>
+          <a:p>
+            <a:endParaRPr/>
+          </a:p>
+          <a:p>
+            <a:r>
+              <a:t>Then shift into DOCUMENTARY VOICE for the on-slide aside at the bottom, read as written, then straight back to conference delivery. The mannequin framing is the callback that ties this section's watering-hole metaphor to identity specifically.</a:t>
             </a:r>
           </a:p>
         </p:txBody>
@@ -4413,7 +4603,7 @@
           <a:lstStyle/>
           <a:p>
             <a:r>
-              <a:t>STRAIGHT delivery, and let it land quieter than anything around it. This is the deck's thesis in one sentence, and it now sits where it earns the most: the recap just handed them six things to remember, and this is the one thing to feel.</a:t>
+              <a:t>STRAIGHT delivery, briskly. For item three, recap the three planes and the cross-plane methods. For item five, reinforce that migration is an operating model: ownership, entry criteria, evidence, rollback, and decommissioning—not merely a tooling sequence.</a:t>
             </a:r>
           </a:p>
           <a:p>
@@ -4421,15 +4611,7 @@
           </a:p>
           <a:p>
             <a:r>
-              <a:t>The slide is built as a statement, not a section card — light ground, no motif, sentence centred, nothing on it competing with the line. Deliver the first sentence flat, then pause before the last clause. “And got fixed by people in the room” is the payoff and it is set in the accent colour for exactly that reason: land it on the people, not the checklist.</a:t>
-            </a:r>
-          </a:p>
-          <a:p>
-            <a:endParaRPr/>
-          </a:p>
-          <a:p>
-            <a:r>
-              <a:t>Then go straight into the documentary closer. These two are twins — the same thought in two registers, plain-spoken in light, documentary in dark — so do not take a long pause here and another one there. This slide sets the closer up; the closer gets the silence.</a:t>
+              <a:t>Then hand straight off to the Unglamorous Truth slide. The recap is the list; that slide is the point. Do not editorialise between the two — just turn the page.</a:t>
             </a:r>
           </a:p>
         </p:txBody>
@@ -4515,7 +4697,7 @@
           <a:lstStyle/>
           <a:p>
             <a:r>
-              <a:t>DOCUMENTARY VOICE — spoken live, slower than anything else in the deck.</a:t>
+              <a:t>STRAIGHT delivery, and let it land quieter than anything around it. This is the deck's thesis in one sentence, and it now sits where it earns the most: the recap just handed them six things to remember, and this is the one thing to feel.</a:t>
             </a:r>
           </a:p>
           <a:p>
@@ -4523,7 +4705,7 @@
           </a:p>
           <a:p>
             <a:r>
-              <a:t>Three beats, and they are paced differently. The first line is calm and satisfied: everything worked. The second is where the joke builds — take your time on “every Tuesday at 3 a.m., triggered by nothing, owned by no one,” because the specificity is what makes it funny. Then a real pause, and the last line flat: “Nobody told it the herd had moved.”</a:t>
+              <a:t>The slide is built as a statement, not a section card — light ground, no motif, sentence centred, nothing on it competing with the line. Deliver the first sentence flat, then pause before the last clause. “And got fixed by people in the room” is the payoff and it is set in the accent colour for exactly that reason: land it on the people, not the checklist.</a:t>
             </a:r>
           </a:p>
           <a:p>
@@ -4531,31 +4713,7 @@
           </a:p>
           <a:p>
             <a:r>
-              <a:t>That last line is the callback to section 6's title, so it should land as a click rather than a punchline. Let the silence sit for two full seconds before advancing — do not rush into the thank-you slide, and do not add another joke on top of it.</a:t>
-            </a:r>
-          </a:p>
-          <a:p>
-            <a:endParaRPr/>
-          </a:p>
-          <a:p>
-            <a:r>
-              <a:t>Note the division of labour with the Unglamorous Truth slide two back: that one is the sincere version in your own voice, this one is the funny version in the documentary voice. Sincerity first, laugh last.</a:t>
-            </a:r>
-          </a:p>
-          <a:p>
-            <a:endParaRPr/>
-          </a:p>
-          <a:p>
-            <a:r>
-              <a:t>---- ALTERNATE CLOSER, if this one doesn't fit on the night ----</a:t>
-            </a:r>
-          </a:p>
-          <a:p>
-            <a:endParaRPr/>
-          </a:p>
-          <a:p>
-            <a:r>
-              <a:t>WARMER: “The herd has crossed. They pause on the far bank, survey the new territory — and immediately begin recreating the folder structure they left behind. They will learn. They always do.”  (Use if you want to end on warmth rather than a laugh. Overlaps slightly with the Unglamorous Truth slide.)</a:t>
+              <a:t>Then go straight into the documentary closer. These two are twins — the same thought in two registers, plain-spoken in light, documentary in dark — so do not take a long pause here and another one there. This slide sets the closer up; the closer gets the silence.</a:t>
             </a:r>
           </a:p>
         </p:txBody>
@@ -4641,71 +4799,121 @@
           <a:lstStyle/>
           <a:p>
             <a:r>
-              <a:t>Straight delivery. Name the real reason teams migrate before the polite reasons: most of the agentic Copilot work (cloud agent, agentic code review, agentic Autofix, Agent HQ) ships on GitHub first. Be fair to Microsoft: Azure DevOps is gaining AI features too, and Copilot in the IDE works wherever the repository is hosted. The point is not that Azure DevOps has nothing; it is that the frontier depends on where the repository lives.</a:t>
-            </a:r>
-          </a:p>
-          <a:p>
-            <a:endParaRPr/>
-          </a:p>
-          <a:p>
-            <a:r>
+              <a:rPr dirty="0"/>
+              <a:t>Straight delivery. Name the real reason teams migrate before the polite reasons: most of the agentic Copilot work (cloud agent, agentic code review, agentic </a:t>
+            </a:r>
+            <a:r>
+              <a:rPr dirty="0" err="1"/>
+              <a:t>Autofix</a:t>
+            </a:r>
+            <a:r>
+              <a:rPr dirty="0"/>
+              <a:t>, Agent HQ) ships on GitHub first. Be fair to Microsoft: Azure DevOps is gaining AI features too, and Copilot in the IDE works wherever the repository is hosted. The point is not that Azure DevOps has nothing; it is that the frontier depends on where the repository lives.</a:t>
+            </a:r>
+          </a:p>
+          <a:p>
+            <a:endParaRPr dirty="0"/>
+          </a:p>
+          <a:p>
+            <a:r>
+              <a:rPr dirty="0"/>
               <a:t>Open the table by getting ahead of the heckle: “Field guides go out of date, and so do capability tables. Everything here has a shelf life measured in sprints.” Then walk the four rows. The last one is the one that matters: the cloud agent needs a GitHub-hosted repository even when it is started from Azure Boards.</a:t>
             </a:r>
           </a:p>
           <a:p>
-            <a:endParaRPr/>
-          </a:p>
-          <a:p>
-            <a:r>
+            <a:endParaRPr dirty="0"/>
+          </a:p>
+          <a:p>
+            <a:r>
+              <a:rPr dirty="0"/>
               <a:t>Do not frame this as “GitHub has AI and Azure DevOps does not.” Frame it as a difference in native depth, integration, and repository dependency.</a:t>
             </a:r>
           </a:p>
           <a:p>
-            <a:endParaRPr/>
-          </a:p>
-          <a:p>
-            <a:r>
+            <a:endParaRPr dirty="0"/>
+          </a:p>
+          <a:p>
+            <a:r>
+              <a:rPr dirty="0"/>
               <a:t>CUT FROM THE SLIDE, for Q&amp;A:</a:t>
             </a:r>
           </a:p>
           <a:p>
             <a:r>
+              <a:rPr dirty="0"/>
               <a:t>- Repository-aware chat. GitHub: native workspace and repository context. Azure DevOps: local repo context, plus Azure DevOps service context through MCP.</a:t>
             </a:r>
           </a:p>
           <a:p>
             <a:r>
+              <a:rPr dirty="0"/>
               <a:t>- Multi-agent orchestration. GitHub: a central hub running Copilot, Claude and Codex sessions in parallel. Azure DevOps: no native equivalent; external agents connect through MCP.</a:t>
             </a:r>
           </a:p>
           <a:p>
             <a:r>
+              <a:rPr dirty="0"/>
               <a:t>- Azure DevOps MCP. The Remote MCP Server is GA and the server itself is free; normal Azure DevOps pricing and AI-platform usage charges may still apply. The next slide covers MCP.</a:t>
             </a:r>
           </a:p>
           <a:p>
             <a:r>
-              <a:t>- Licensing. Paid Copilot for agents and review; GitHub Code Security where Autofix is needed.</a:t>
-            </a:r>
-          </a:p>
-          <a:p>
-            <a:endParaRPr/>
-          </a:p>
-          <a:p>
-            <a:r>
-              <a:t>The capability gap is real, but it is neither absolute nor static. As of September 21, 2026: Azure DevOps Remote MCP Server is generally available; Copilot Code Review for Azure Repos is in public preview; Copilot Autofix for Azure DevOps remains in limited public preview; and GitHub Copilot cloud agent still requires a GitHub-hosted repository even when initiated from Azure Boards.</a:t>
-            </a:r>
-          </a:p>
-          <a:p>
-            <a:endParaRPr/>
-          </a:p>
-          <a:p>
-            <a:r>
-              <a:t>Sources (accessed September 21, 2026): GitHub Docs — About GitHub Copilot cloud agent; Integrating Copilot cloud agent with Azure Boards; About agent management; About autofix for code scanning. Microsoft Learn — Azure DevOps Sprint 278 and Sprint 279 release notes; Azure DevOps MCP Server overview; Copilot code review for Azure Repos; Copilot Autofix for GitHub Advanced Security for Azure DevOps. GitHub Changelog — Copilot code review now runs on an agentic architecture (March 5, 2026).</a:t>
-            </a:r>
-          </a:p>
-          <a:p>
-            <a:endParaRPr/>
+              <a:rPr dirty="0"/>
+              <a:t>- Licensing. Paid Copilot for agents and review; GitHub Code Security where </a:t>
+            </a:r>
+            <a:r>
+              <a:rPr dirty="0" err="1"/>
+              <a:t>Autofix</a:t>
+            </a:r>
+            <a:r>
+              <a:rPr dirty="0"/>
+              <a:t> is needed.</a:t>
+            </a:r>
+          </a:p>
+          <a:p>
+            <a:endParaRPr dirty="0"/>
+          </a:p>
+          <a:p>
+            <a:r>
+              <a:rPr dirty="0"/>
+              <a:t>The capability gap is real, but it is neither absolute nor static. As of September 21, 2026: Azure DevOps Remote MCP Server is generally available; Copilot Code Review for Azure Repos is in public preview; Copilot </a:t>
+            </a:r>
+            <a:r>
+              <a:rPr dirty="0" err="1"/>
+              <a:t>Autofix</a:t>
+            </a:r>
+            <a:r>
+              <a:rPr dirty="0"/>
+              <a:t> for Azure DevOps remains in limited public preview; and GitHub Copilot cloud agent still requires a GitHub-hosted repository even when initiated from Azure Boards.</a:t>
+            </a:r>
+          </a:p>
+          <a:p>
+            <a:endParaRPr dirty="0"/>
+          </a:p>
+          <a:p>
+            <a:r>
+              <a:rPr dirty="0"/>
+              <a:t>Sources (accessed September 21, 2026): GitHub Docs — About GitHub Copilot cloud agent; Integrating Copilot cloud agent with Azure Boards; About agent management; About </a:t>
+            </a:r>
+            <a:r>
+              <a:rPr dirty="0" err="1"/>
+              <a:t>autofix</a:t>
+            </a:r>
+            <a:r>
+              <a:rPr dirty="0"/>
+              <a:t> for code scanning. Microsoft Learn — Azure DevOps Sprint 278 and Sprint 279 release notes; Azure DevOps MCP Server overview; Copilot code review for Azure Repos; Copilot </a:t>
+            </a:r>
+            <a:r>
+              <a:rPr dirty="0" err="1"/>
+              <a:t>Autofix</a:t>
+            </a:r>
+            <a:r>
+              <a:rPr dirty="0"/>
+              <a:t> for GitHub Advanced Security for Azure DevOps. GitHub Changelog — Copilot code review now runs on an agentic architecture (March 5, 2026).</a:t>
+            </a:r>
+          </a:p>
+          <a:p>
+            <a:endParaRPr dirty="0"/>
           </a:p>
         </p:txBody>
       </p:sp>
@@ -4790,7 +4998,7 @@
           <a:lstStyle/>
           <a:p>
             <a:r>
-              <a:t>STRAIGHT delivery, warm. This is the handoff into the open Q&amp;A, roughly 14 minutes — there has been no interim pocket since section 5, so the room has been banking questions. Invite them explicitly rather than just stopping talking.</a:t>
+              <a:t>DOCUMENTARY VOICE — spoken live, slower than anything else in the deck.</a:t>
             </a:r>
           </a:p>
           <a:p>
@@ -4798,7 +5006,7 @@
           </a:p>
           <a:p>
             <a:r>
-              <a:t>The QR now lives here instead of on its own slide, which means it stays on screen for the whole Q&amp;A instead of flashing past. Say once what is behind it — GitHub's official Azure Pipelines to Actions guide, gh-ado2gh, gh-actions-importer, the AI analyze / convert / validate prompts, and every note behind this talk, all public — then stop talking about it and take questions. People will scan while somebody else is asking.</a:t>
+              <a:t>Three beats, and they are paced differently. The first line is calm and satisfied: everything worked. The second is where the joke builds — take your time on “every Tuesday at 3 a.m., triggered by nothing, owned by no one,” because the specificity is what makes it funny. Then a real pause, and the last line flat: “Nobody told it the herd had moved.”</a:t>
             </a:r>
           </a:p>
           <a:p>
@@ -4806,7 +5014,7 @@
           </a:p>
           <a:p>
             <a:r>
-              <a:t>If a question needs more than the time you have, point at the code: the long answer is almost certainly already in the repo.</a:t>
+              <a:t>That last line is the callback to section 6's title, so it should land as a click rather than a punchline. Let the silence sit for two full seconds before advancing — do not rush into the thank-you slide, and do not add another joke on top of it.</a:t>
             </a:r>
           </a:p>
           <a:p>
@@ -4814,7 +5022,23 @@
           </a:p>
           <a:p>
             <a:r>
-              <a:t>The ELM slide is in the appendix, right after this one, if someone asks about live migration or near-zero-downtime cutover.</a:t>
+              <a:t>Note the division of labour with the Unglamorous Truth slide two back: that one is the sincere version in your own voice, this one is the funny version in the documentary voice. Sincerity first, laugh last.</a:t>
+            </a:r>
+          </a:p>
+          <a:p>
+            <a:endParaRPr/>
+          </a:p>
+          <a:p>
+            <a:r>
+              <a:t>---- ALTERNATE CLOSER, if this one doesn't fit on the night ----</a:t>
+            </a:r>
+          </a:p>
+          <a:p>
+            <a:endParaRPr/>
+          </a:p>
+          <a:p>
+            <a:r>
+              <a:t>WARMER: “The herd has crossed. They pause on the far bank, survey the new territory — and immediately begin recreating the folder structure they left behind. They will learn. They always do.”  (Use if you want to end on warmth rather than a laugh. Overlaps slightly with the Unglamorous Truth slide.)</a:t>
             </a:r>
           </a:p>
         </p:txBody>
@@ -4900,84 +5124,24 @@
           <a:lstStyle/>
           <a:p>
             <a:r>
-              <a:rPr dirty="0"/>
-              <a:t>APPENDIX SLIDE. Moved out of the main flow for time; show it only if someone asks about ELM or near-zero-downtime cutover. Straight delivery. Enterprise Live Migrations was named on the methods table in section 3.</a:t>
-            </a:r>
-          </a:p>
-          <a:p>
-            <a:endParaRPr dirty="0"/>
-          </a:p>
-          <a:p>
-            <a:r>
-              <a:rPr dirty="0"/>
-              <a:t>STATUS, stated precisely, because the two paths differ: GitHub Enterprise Server to GHEC-with-data-residency went GA on 1 September 2026, but the AZURE DEVOPS path — the only one that matters here — is still public preview. Say “public preview for the Azure DevOps path,” not just “preview,” or somebody who read the GA changelog will correct you.</a:t>
-            </a:r>
-          </a:p>
-          <a:p>
-            <a:endParaRPr dirty="0"/>
-          </a:p>
-          <a:p>
-            <a:r>
-              <a:rPr dirty="0"/>
-              <a:t>It is also research-only for us: Hunter's current tenant does not meet the data-residency prerequisite, so we have not run it.</a:t>
-            </a:r>
-          </a:p>
-          <a:p>
-            <a:endParaRPr dirty="0"/>
-          </a:p>
-          <a:p>
-            <a:r>
-              <a:rPr dirty="0"/>
-              <a:t>THE CAPS ARE THE POINT. Thirty repositories total — twenty initial, ten incremental — and the cutover has to complete within twenty-one days of starting. Repositories only: no work items, pipelines, wikis, test plans or artifacts. That reframes ELM from “the better option” to “a pilot mechanism,” which is the more useful thing for this room to hear. If anyone is picturing it as the way to move a thousand repositories, the 30-repo cap answers that before they build a plan around it.</a:t>
-            </a:r>
-          </a:p>
-          <a:p>
-            <a:endParaRPr dirty="0"/>
-          </a:p>
-          <a:p>
-            <a:r>
-              <a:rPr dirty="0"/>
-              <a:t>Keep the GEI comparison honest: gh-ado2gh --all already does the configuration work. What ELM genuinely adds is continuous delta synchronization and a scheduled cutover with a read-only window under thirty minutes. Pipeline logic and non-repository systems still need separate migration and validation — that is the takeaway line.</a:t>
-            </a:r>
-          </a:p>
-          <a:p>
-            <a:endParaRPr dirty="0"/>
-          </a:p>
-          <a:p>
-            <a:r>
-              <a:rPr dirty="0"/>
-              <a:t>GitHub Enterprise Cloud (GHEC) with Data Residency is a distinct deployment model where:</a:t>
-            </a:r>
-          </a:p>
-          <a:p>
-            <a:r>
-              <a:rPr dirty="0"/>
-              <a:t> - Your enterprise is hosted on a dedicated ghe.com subdomain (instead of github.com&lt;org&gt;).</a:t>
-            </a:r>
-          </a:p>
-          <a:p>
-            <a:r>
-              <a:rPr dirty="0"/>
-              <a:t> - You choose the geographic region where your code and repository data are stored (currently including U.S., EU, Australia, and Japan).</a:t>
-            </a:r>
-          </a:p>
-          <a:p>
-            <a:r>
-              <a:rPr dirty="0"/>
-              <a:t> - The environment is isolated from the broader github.com ecosystem.</a:t>
-            </a:r>
-          </a:p>
-          <a:p>
-            <a:r>
-              <a:rPr dirty="0"/>
-              <a:t> - It requires Enterprise Managed Users (EMU). </a:t>
-            </a:r>
-          </a:p>
-          <a:p>
-            <a:endParaRPr dirty="0"/>
-          </a:p>
-          <a:p>
-            <a:endParaRPr dirty="0"/>
+              <a:t>STRAIGHT delivery, warm. This is the handoff into the open Q&amp;A, roughly 14 minutes — there has been no interim pocket since section 5, so the room has been banking questions. Invite them explicitly rather than just stopping talking.</a:t>
+            </a:r>
+          </a:p>
+          <a:p>
+            <a:endParaRPr/>
+          </a:p>
+          <a:p>
+            <a:r>
+              <a:t>The QR now lives here instead of on its own slide, which means it stays on screen for the whole Q&amp;A instead of flashing past. Say once what is behind it — GitHub's official Azure Pipelines to Actions guide, gh-ado2gh, gh-actions-importer, the AI analyze / convert / validate prompts, and every note behind this talk, all public — then stop talking about it and take questions. People will scan while somebody else is asking.</a:t>
+            </a:r>
+          </a:p>
+          <a:p>
+            <a:endParaRPr/>
+          </a:p>
+          <a:p>
+            <a:r>
+              <a:t>If a question needs more than the time you have, point at the code: the long answer is almost certainly already in the repo.</a:t>
+            </a:r>
           </a:p>
         </p:txBody>
       </p:sp>
@@ -5443,11 +5607,41 @@
           <a:chExt cx="0" cy="0"/>
         </a:xfrm>
       </p:grpSpPr>
+      <p:sp>
+        <p:nvSpPr>
+          <p:cNvPr id="2" name="Slide Number Placeholder 1">
+            <a:extLst>
+              <a:ext uri="{FF2B5EF4-FFF2-40B4-BE49-F238E27FC236}">
+                <a16:creationId xmlns:a16="http://schemas.microsoft.com/office/drawing/2014/main" id="{7FCB2E6C-B1C0-81B8-1A95-7A3B7452C911}"/>
+              </a:ext>
+            </a:extLst>
+          </p:cNvPr>
+          <p:cNvSpPr>
+            <a:spLocks noGrp="1"/>
+          </p:cNvSpPr>
+          <p:nvPr>
+            <p:ph type="sldNum" sz="quarter" idx="10"/>
+          </p:nvPr>
+        </p:nvSpPr>
+        <p:spPr/>
+        <p:txBody>
+          <a:bodyPr/>
+          <a:lstStyle/>
+          <a:p>
+            <a:fld id="{BCB632DE-6AD4-40F1-944C-28C0E9BF62DC}" type="slidenum">
+              <a:rPr lang="en-US" smtClean="0"/>
+              <a:t>‹#›</a:t>
+            </a:fld>
+            <a:endParaRPr lang="en-US"/>
+          </a:p>
+        </p:txBody>
+      </p:sp>
     </p:spTree>
   </p:cSld>
   <p:clrMapOvr>
     <a:masterClrMapping/>
   </p:clrMapOvr>
+  <p:hf hdr="0" ftr="0" dt="0"/>
 </p:sldLayout>
 </file>
 
@@ -5473,13 +5667,59 @@
           <a:chExt cx="0" cy="0"/>
         </a:xfrm>
       </p:grpSpPr>
+      <p:sp>
+        <p:nvSpPr>
+          <p:cNvPr id="2" name="Slide Number Placeholder 1">
+            <a:extLst>
+              <a:ext uri="{FF2B5EF4-FFF2-40B4-BE49-F238E27FC236}">
+                <a16:creationId xmlns:a16="http://schemas.microsoft.com/office/drawing/2014/main" id="{00B22153-3E74-9A77-9771-8EE0002F3ED0}"/>
+              </a:ext>
+            </a:extLst>
+          </p:cNvPr>
+          <p:cNvSpPr>
+            <a:spLocks noGrp="1"/>
+          </p:cNvSpPr>
+          <p:nvPr>
+            <p:ph type="sldNum" sz="quarter" idx="4"/>
+          </p:nvPr>
+        </p:nvSpPr>
+        <p:spPr>
+          <a:xfrm>
+            <a:off x="11612880" y="6492240"/>
+            <a:ext cx="411480" cy="256032"/>
+          </a:xfrm>
+          <a:prstGeom prst="rect">
+            <a:avLst/>
+          </a:prstGeom>
+        </p:spPr>
+        <p:txBody>
+          <a:bodyPr vert="horz" wrap="none" lIns="0" tIns="0" rIns="0" bIns="0" anchor="ctr"/>
+          <a:lstStyle>
+            <a:lvl1pPr algn="r">
+              <a:defRPr sz="1000" b="0">
+                <a:solidFill>
+                  <a:srgbClr val="6B6B63"/>
+                </a:solidFill>
+                <a:latin typeface="Calibri"/>
+              </a:defRPr>
+            </a:lvl1pPr>
+          </a:lstStyle>
+          <a:p>
+            <a:fld id="{BCB632DE-6AD4-40F1-944C-28C0E9BF62DC}" type="slidenum">
+              <a:rPr lang="en-US"/>
+              <a:t>‹#›</a:t>
+            </a:fld>
+            <a:endParaRPr lang="en-US"/>
+          </a:p>
+        </p:txBody>
+      </p:sp>
     </p:spTree>
   </p:cSld>
   <p:clrMap bg1="lt1" tx1="dk1" bg2="lt2" tx2="dk2" accent1="accent1" accent2="accent2" accent3="accent3" accent4="accent4" accent5="accent5" accent6="accent6" hlink="hlink" folHlink="folHlink"/>
   <p:sldLayoutIdLst>
     <p:sldLayoutId id="2147483649" r:id="rId1"/>
   </p:sldLayoutIdLst>
-  <p:hf sldNum="0" hdr="0" ftr="0" dt="0"/>
+  <p:hf hdr="0" ftr="0" dt="0"/>
   <p:txStyles>
     <p:titleStyle>
       <a:lvl1pPr algn="ctr" defTabSz="914400" rtl="0" eaLnBrk="1" latinLnBrk="0" hangingPunct="1">
@@ -5766,7 +6006,7 @@
         </p:nvSpPr>
         <p:spPr>
           <a:xfrm>
-            <a:off x="0" y="0"/>
+            <a:off x="305" y="0"/>
             <a:ext cx="12191695" cy="6858000"/>
           </a:xfrm>
           <a:prstGeom prst="rect">
@@ -5865,7 +6105,7 @@
             <a:r>
               <a:rPr lang="en-US" sz="1800" b="1" kern="0" spc="300" dirty="0">
                 <a:solidFill>
-                  <a:srgbClr val="8C6A3F"/>
+                  <a:srgbClr val="E0B85C"/>
                 </a:solidFill>
                 <a:latin typeface="Calibri" pitchFamily="34" charset="0"/>
                 <a:ea typeface="Calibri" pitchFamily="34" charset="-122"/>
@@ -5943,7 +6183,7 @@
             <a:r>
               <a:rPr lang="en-US" sz="2400" i="1" dirty="0">
                 <a:solidFill>
-                  <a:srgbClr val="8C6A3F"/>
+                  <a:srgbClr val="E0B85C"/>
                 </a:solidFill>
                 <a:latin typeface="Cambria" pitchFamily="34" charset="0"/>
                 <a:ea typeface="Cambria" pitchFamily="34" charset="-122"/>
@@ -5991,6 +6231,37 @@
               <a:t>Kevin Neumann  •  Cloud &amp; AI Summit  •  September 30, 2026</a:t>
             </a:r>
             <a:endParaRPr lang="en-US" sz="1500" dirty="0"/>
+          </a:p>
+        </p:txBody>
+      </p:sp>
+      <p:sp>
+        <p:nvSpPr>
+          <p:cNvPr id="9" name="Slide Number Placeholder"/>
+          <p:cNvSpPr>
+            <a:spLocks noGrp="1"/>
+          </p:cNvSpPr>
+          <p:nvPr>
+            <p:ph type="sldNum" sz="quarter" idx="10"/>
+          </p:nvPr>
+        </p:nvSpPr>
+        <p:spPr/>
+        <p:txBody>
+          <a:bodyPr/>
+          <a:lstStyle/>
+          <a:p>
+            <a:fld id="{BCB632DE-6AD4-40F1-944C-28C0E9BF62DC}" type="slidenum">
+              <a:rPr lang="en-US">
+                <a:solidFill>
+                  <a:srgbClr val="E0B85C"/>
+                </a:solidFill>
+              </a:rPr>
+              <a:t>1</a:t>
+            </a:fld>
+            <a:endParaRPr lang="en-US">
+              <a:solidFill>
+                <a:srgbClr val="E0B85C"/>
+              </a:solidFill>
+            </a:endParaRPr>
           </a:p>
         </p:txBody>
       </p:sp>
@@ -6548,6 +6819,29 @@
           </a:p>
         </p:txBody>
       </p:sp>
+      <p:sp>
+        <p:nvSpPr>
+          <p:cNvPr id="12" name="Slide Number Placeholder"/>
+          <p:cNvSpPr>
+            <a:spLocks noGrp="1"/>
+          </p:cNvSpPr>
+          <p:nvPr>
+            <p:ph type="sldNum" sz="quarter" idx="10"/>
+          </p:nvPr>
+        </p:nvSpPr>
+        <p:spPr/>
+        <p:txBody>
+          <a:bodyPr/>
+          <a:lstStyle/>
+          <a:p>
+            <a:fld id="{BCB632DE-6AD4-40F1-944C-28C0E9BF62DC}" type="slidenum">
+              <a:rPr lang="en-US"/>
+              <a:t>10</a:t>
+            </a:fld>
+            <a:endParaRPr lang="en-US"/>
+          </a:p>
+        </p:txBody>
+      </p:sp>
     </p:spTree>
   </p:cSld>
   <p:clrMapOvr>
@@ -6882,9 +7176,9 @@
               </a:spcAft>
             </a:pPr>
             <a:r>
-              <a:rPr sz="1050" b="1" spc="120">
-                <a:solidFill>
-                  <a:srgbClr val="8C6A3F"/>
+              <a:rPr sz="1250" b="1" spc="120">
+                <a:solidFill>
+                  <a:srgbClr val="E0B85C"/>
                 </a:solidFill>
                 <a:latin typeface="Calibri"/>
               </a:rPr>
@@ -6899,6 +7193,29 @@
               </a:rPr>
               <a:t>The pages copy in minutes. The structure and the Azure DevOps-only markdown are the real work.</a:t>
             </a:r>
+          </a:p>
+        </p:txBody>
+      </p:sp>
+      <p:sp>
+        <p:nvSpPr>
+          <p:cNvPr id="11" name="Slide Number Placeholder"/>
+          <p:cNvSpPr>
+            <a:spLocks noGrp="1"/>
+          </p:cNvSpPr>
+          <p:nvPr>
+            <p:ph type="sldNum" sz="quarter" idx="10"/>
+          </p:nvPr>
+        </p:nvSpPr>
+        <p:spPr/>
+        <p:txBody>
+          <a:bodyPr/>
+          <a:lstStyle/>
+          <a:p>
+            <a:fld id="{BCB632DE-6AD4-40F1-944C-28C0E9BF62DC}" type="slidenum">
+              <a:rPr lang="en-US"/>
+              <a:t>11</a:t>
+            </a:fld>
+            <a:endParaRPr lang="en-US"/>
           </a:p>
         </p:txBody>
       </p:sp>
@@ -7638,9 +7955,9 @@
               <a:buNone/>
             </a:pPr>
             <a:r>
-              <a:rPr sz="1050" b="1" spc="120">
-                <a:solidFill>
-                  <a:srgbClr val="8C6A3F"/>
+              <a:rPr sz="1250" b="1" spc="120">
+                <a:solidFill>
+                  <a:srgbClr val="E0B85C"/>
                 </a:solidFill>
                 <a:latin typeface="Calibri"/>
               </a:rPr>
@@ -7656,6 +7973,29 @@
               <a:t>The realistic target: GitHub Actions publishing to an existing Azure Artifacts feed — the answer for teams that can’t repoint every consumer at cutover.</a:t>
             </a:r>
             <a:endParaRPr lang="en-US" sz="1450" dirty="0"/>
+          </a:p>
+        </p:txBody>
+      </p:sp>
+      <p:sp>
+        <p:nvSpPr>
+          <p:cNvPr id="23" name="Slide Number Placeholder"/>
+          <p:cNvSpPr>
+            <a:spLocks noGrp="1"/>
+          </p:cNvSpPr>
+          <p:nvPr>
+            <p:ph type="sldNum" sz="quarter" idx="10"/>
+          </p:nvPr>
+        </p:nvSpPr>
+        <p:spPr/>
+        <p:txBody>
+          <a:bodyPr/>
+          <a:lstStyle/>
+          <a:p>
+            <a:fld id="{BCB632DE-6AD4-40F1-944C-28C0E9BF62DC}" type="slidenum">
+              <a:rPr lang="en-US"/>
+              <a:t>12</a:t>
+            </a:fld>
+            <a:endParaRPr lang="en-US"/>
           </a:p>
         </p:txBody>
       </p:sp>
@@ -7971,9 +8311,9 @@
               <a:buNone/>
             </a:pPr>
             <a:r>
-              <a:rPr sz="1050" b="1" spc="120">
-                <a:solidFill>
-                  <a:srgbClr val="8C6A3F"/>
+              <a:rPr sz="1250" b="1" spc="120">
+                <a:solidFill>
+                  <a:srgbClr val="E0B85C"/>
                 </a:solidFill>
                 <a:latin typeface="Calibri"/>
               </a:rPr>
@@ -7989,6 +8329,29 @@
               <a:t>Neither platform hands you DORA. Agree on the four metrics first, then instrument them yourselves. That baseline outlives the migration.</a:t>
             </a:r>
             <a:endParaRPr lang="en-US" sz="1600" dirty="0"/>
+          </a:p>
+        </p:txBody>
+      </p:sp>
+      <p:sp>
+        <p:nvSpPr>
+          <p:cNvPr id="10" name="Slide Number Placeholder"/>
+          <p:cNvSpPr>
+            <a:spLocks noGrp="1"/>
+          </p:cNvSpPr>
+          <p:nvPr>
+            <p:ph type="sldNum" sz="quarter" idx="10"/>
+          </p:nvPr>
+        </p:nvSpPr>
+        <p:spPr/>
+        <p:txBody>
+          <a:bodyPr/>
+          <a:lstStyle/>
+          <a:p>
+            <a:fld id="{BCB632DE-6AD4-40F1-944C-28C0E9BF62DC}" type="slidenum">
+              <a:rPr lang="en-US"/>
+              <a:t>13</a:t>
+            </a:fld>
+            <a:endParaRPr lang="en-US"/>
           </a:p>
         </p:txBody>
       </p:sp>
@@ -8179,7 +8542,7 @@
               <a:buNone/>
             </a:pPr>
             <a:r>
-              <a:rPr lang="en-US" sz="2000" b="1" i="1" dirty="0">
+              <a:rPr lang="en-US" sz="2000" dirty="0">
                 <a:solidFill>
                   <a:srgbClr val="1F3D2C"/>
                 </a:solidFill>
@@ -8470,6 +8833,29 @@
               <a:t>Boards &amp; Test Plans — the whole next section</a:t>
             </a:r>
             <a:endParaRPr lang="en-US" sz="1650" dirty="0"/>
+          </a:p>
+        </p:txBody>
+      </p:sp>
+      <p:sp>
+        <p:nvSpPr>
+          <p:cNvPr id="13" name="Slide Number Placeholder"/>
+          <p:cNvSpPr>
+            <a:spLocks noGrp="1"/>
+          </p:cNvSpPr>
+          <p:nvPr>
+            <p:ph type="sldNum" sz="quarter" idx="10"/>
+          </p:nvPr>
+        </p:nvSpPr>
+        <p:spPr/>
+        <p:txBody>
+          <a:bodyPr/>
+          <a:lstStyle/>
+          <a:p>
+            <a:fld id="{BCB632DE-6AD4-40F1-944C-28C0E9BF62DC}" type="slidenum">
+              <a:rPr lang="en-US"/>
+              <a:t>14</a:t>
+            </a:fld>
+            <a:endParaRPr lang="en-US"/>
           </a:p>
         </p:txBody>
       </p:sp>
@@ -9119,9 +9505,9 @@
               </a:spcAft>
             </a:pPr>
             <a:r>
-              <a:rPr sz="1050" b="1" spc="120">
-                <a:solidFill>
-                  <a:srgbClr val="8C6A3F"/>
+              <a:rPr sz="1250" b="1" spc="120">
+                <a:solidFill>
+                  <a:srgbClr val="E0B85C"/>
                 </a:solidFill>
                 <a:latin typeface="Calibri"/>
               </a:rPr>
@@ -9136,6 +9522,29 @@
               </a:rPr>
               <a:t>Hybrid is not a temporary failure to finish the migration. It can be the intended architecture.</a:t>
             </a:r>
+          </a:p>
+        </p:txBody>
+      </p:sp>
+      <p:sp>
+        <p:nvSpPr>
+          <p:cNvPr id="35" name="Slide Number Placeholder"/>
+          <p:cNvSpPr>
+            <a:spLocks noGrp="1"/>
+          </p:cNvSpPr>
+          <p:nvPr>
+            <p:ph type="sldNum" sz="quarter" idx="10"/>
+          </p:nvPr>
+        </p:nvSpPr>
+        <p:spPr/>
+        <p:txBody>
+          <a:bodyPr/>
+          <a:lstStyle/>
+          <a:p>
+            <a:fld id="{BCB632DE-6AD4-40F1-944C-28C0E9BF62DC}" type="slidenum">
+              <a:rPr lang="en-US"/>
+              <a:t>15</a:t>
+            </a:fld>
+            <a:endParaRPr lang="en-US"/>
           </a:p>
         </p:txBody>
       </p:sp>
@@ -9238,7 +9647,7 @@
             <a:r>
               <a:rPr lang="en-US" sz="1900" i="1" dirty="0">
                 <a:solidFill>
-                  <a:srgbClr val="8C6A3F"/>
+                  <a:srgbClr val="E0B85C"/>
                 </a:solidFill>
                 <a:latin typeface="Calibri" pitchFamily="34" charset="0"/>
                 <a:ea typeface="Calibri" pitchFamily="34" charset="-122"/>
@@ -9247,6 +9656,37 @@
               <a:t>One quick question before we leave Section 2 — A Field Guide to the Local Species</a:t>
             </a:r>
             <a:endParaRPr lang="en-US" sz="1900" dirty="0"/>
+          </a:p>
+        </p:txBody>
+      </p:sp>
+      <p:sp>
+        <p:nvSpPr>
+          <p:cNvPr id="4" name="Slide Number Placeholder"/>
+          <p:cNvSpPr>
+            <a:spLocks noGrp="1"/>
+          </p:cNvSpPr>
+          <p:nvPr>
+            <p:ph type="sldNum" sz="quarter" idx="10"/>
+          </p:nvPr>
+        </p:nvSpPr>
+        <p:spPr/>
+        <p:txBody>
+          <a:bodyPr/>
+          <a:lstStyle/>
+          <a:p>
+            <a:fld id="{BCB632DE-6AD4-40F1-944C-28C0E9BF62DC}" type="slidenum">
+              <a:rPr lang="en-US">
+                <a:solidFill>
+                  <a:srgbClr val="E0B85C"/>
+                </a:solidFill>
+              </a:rPr>
+              <a:t>16</a:t>
+            </a:fld>
+            <a:endParaRPr lang="en-US">
+              <a:solidFill>
+                <a:srgbClr val="E0B85C"/>
+              </a:solidFill>
+            </a:endParaRPr>
           </a:p>
         </p:txBody>
       </p:sp>
@@ -9337,7 +9777,7 @@
             <a:r>
               <a:rPr lang="en-US" sz="1700" b="1" kern="0" spc="300" dirty="0">
                 <a:solidFill>
-                  <a:srgbClr val="8C6A3F"/>
+                  <a:srgbClr val="E0B85C"/>
                 </a:solidFill>
                 <a:latin typeface="Calibri" pitchFamily="34" charset="0"/>
                 <a:ea typeface="Calibri" pitchFamily="34" charset="-122"/>
@@ -9441,7 +9881,7 @@
             <a:r>
               <a:rPr lang="en-US" sz="2000" i="1">
                 <a:solidFill>
-                  <a:srgbClr val="8C6A3F"/>
+                  <a:srgbClr val="E0B85C"/>
                 </a:solidFill>
                 <a:latin typeface="Calibri"/>
               </a:rPr>
@@ -9478,6 +9918,37 @@
           <a:lstStyle/>
           <a:p>
             <a:endParaRPr lang="en-US"/>
+          </a:p>
+        </p:txBody>
+      </p:sp>
+      <p:sp>
+        <p:nvSpPr>
+          <p:cNvPr id="8" name="Slide Number Placeholder"/>
+          <p:cNvSpPr>
+            <a:spLocks noGrp="1"/>
+          </p:cNvSpPr>
+          <p:nvPr>
+            <p:ph type="sldNum" sz="quarter" idx="10"/>
+          </p:nvPr>
+        </p:nvSpPr>
+        <p:spPr/>
+        <p:txBody>
+          <a:bodyPr/>
+          <a:lstStyle/>
+          <a:p>
+            <a:fld id="{BCB632DE-6AD4-40F1-944C-28C0E9BF62DC}" type="slidenum">
+              <a:rPr lang="en-US">
+                <a:solidFill>
+                  <a:srgbClr val="E0B85C"/>
+                </a:solidFill>
+              </a:rPr>
+              <a:t>17</a:t>
+            </a:fld>
+            <a:endParaRPr lang="en-US">
+              <a:solidFill>
+                <a:srgbClr val="E0B85C"/>
+              </a:solidFill>
+            </a:endParaRPr>
           </a:p>
         </p:txBody>
       </p:sp>
@@ -9649,11 +10120,13 @@
         </p:nvSpPr>
         <p:spPr>
           <a:xfrm>
-            <a:off x="548640" y="1508760"/>
+            <a:off x="548640" y="1994837"/>
             <a:ext cx="11091672" cy="1143000"/>
           </a:xfrm>
-          <a:prstGeom prst="rect">
-            <a:avLst/>
+          <a:prstGeom prst="roundRect">
+            <a:avLst>
+              <a:gd name="adj" fmla="val 9600"/>
+            </a:avLst>
           </a:prstGeom>
           <a:solidFill>
             <a:srgbClr val="F7F6F2"/>
@@ -9681,7 +10154,7 @@
         </p:nvSpPr>
         <p:spPr>
           <a:xfrm>
-            <a:off x="777240" y="1664207"/>
+            <a:off x="777240" y="2150284"/>
             <a:ext cx="2743200" cy="329184"/>
           </a:xfrm>
           <a:prstGeom prst="rect">
@@ -9718,7 +10191,7 @@
         </p:nvSpPr>
         <p:spPr>
           <a:xfrm>
-            <a:off x="3337560" y="1691639"/>
+            <a:off x="3337560" y="2177716"/>
             <a:ext cx="7955279" cy="658368"/>
           </a:xfrm>
           <a:prstGeom prst="rect">
@@ -9755,11 +10228,13 @@
         </p:nvSpPr>
         <p:spPr>
           <a:xfrm>
-            <a:off x="548640" y="2862072"/>
+            <a:off x="548640" y="3348149"/>
             <a:ext cx="11091672" cy="1143000"/>
           </a:xfrm>
-          <a:prstGeom prst="rect">
-            <a:avLst/>
+          <a:prstGeom prst="roundRect">
+            <a:avLst>
+              <a:gd name="adj" fmla="val 9600"/>
+            </a:avLst>
           </a:prstGeom>
           <a:solidFill>
             <a:srgbClr val="F7F6F2"/>
@@ -9787,7 +10262,7 @@
         </p:nvSpPr>
         <p:spPr>
           <a:xfrm>
-            <a:off x="777240" y="3017520"/>
+            <a:off x="777240" y="3503597"/>
             <a:ext cx="2743200" cy="329184"/>
           </a:xfrm>
           <a:prstGeom prst="rect">
@@ -9824,7 +10299,7 @@
         </p:nvSpPr>
         <p:spPr>
           <a:xfrm>
-            <a:off x="3337560" y="3007882"/>
+            <a:off x="3337560" y="3493959"/>
             <a:ext cx="7955279" cy="732508"/>
           </a:xfrm>
           <a:prstGeom prst="rect">
@@ -9860,11 +10335,13 @@
         </p:nvSpPr>
         <p:spPr>
           <a:xfrm>
-            <a:off x="548640" y="4215384"/>
+            <a:off x="548640" y="4701461"/>
             <a:ext cx="11091672" cy="1143000"/>
           </a:xfrm>
-          <a:prstGeom prst="rect">
-            <a:avLst/>
+          <a:prstGeom prst="roundRect">
+            <a:avLst>
+              <a:gd name="adj" fmla="val 9600"/>
+            </a:avLst>
           </a:prstGeom>
           <a:solidFill>
             <a:srgbClr val="F7F6F2"/>
@@ -9892,7 +10369,7 @@
         </p:nvSpPr>
         <p:spPr>
           <a:xfrm>
-            <a:off x="777240" y="4370832"/>
+            <a:off x="777240" y="4856909"/>
             <a:ext cx="2743200" cy="329184"/>
           </a:xfrm>
           <a:prstGeom prst="rect">
@@ -9927,7 +10404,7 @@
         </p:nvSpPr>
         <p:spPr>
           <a:xfrm>
-            <a:off x="3337560" y="4398264"/>
+            <a:off x="3337560" y="4884341"/>
             <a:ext cx="7955279" cy="658368"/>
           </a:xfrm>
           <a:prstGeom prst="rect">
@@ -9956,36 +10433,24 @@
       </p:sp>
       <p:sp>
         <p:nvSpPr>
-          <p:cNvPr id="15" name="TextBox 14"/>
-          <p:cNvSpPr txBox="1"/>
-          <p:nvPr/>
-        </p:nvSpPr>
-        <p:spPr>
-          <a:xfrm>
-            <a:off x="566928" y="5623560"/>
-            <a:ext cx="11064240" cy="411480"/>
-          </a:xfrm>
-          <a:prstGeom prst="rect">
-            <a:avLst/>
-          </a:prstGeom>
-          <a:noFill/>
-        </p:spPr>
-        <p:txBody>
-          <a:bodyPr wrap="square" lIns="73152" tIns="73152" rIns="73152" bIns="73152" anchor="t">
-            <a:spAutoFit/>
-          </a:bodyPr>
-          <a:lstStyle/>
-          <a:p>
-            <a:pPr algn="ctr"/>
-            <a:r>
-              <a:rPr sz="1500" b="0" i="1" dirty="0">
-                <a:solidFill>
-                  <a:srgbClr val="8C6A3F"/>
-                </a:solidFill>
-                <a:latin typeface="Calibri"/>
-              </a:rPr>
-              <a:t>Manual judgment, official tooling, and AI assistance can contribute within every plane.</a:t>
-            </a:r>
+          <p:cNvPr id="16" name="Slide Number Placeholder"/>
+          <p:cNvSpPr>
+            <a:spLocks noGrp="1"/>
+          </p:cNvSpPr>
+          <p:nvPr>
+            <p:ph type="sldNum" sz="quarter" idx="10"/>
+          </p:nvPr>
+        </p:nvSpPr>
+        <p:spPr/>
+        <p:txBody>
+          <a:bodyPr/>
+          <a:lstStyle/>
+          <a:p>
+            <a:fld id="{BCB632DE-6AD4-40F1-944C-28C0E9BF62DC}" type="slidenum">
+              <a:rPr lang="en-US"/>
+              <a:t>18</a:t>
+            </a:fld>
+            <a:endParaRPr lang="en-US"/>
           </a:p>
         </p:txBody>
       </p:sp>
@@ -10662,9 +11127,9 @@
           <a:p>
             <a:pPr algn="l"/>
             <a:r>
-              <a:rPr sz="1050" b="1" spc="120">
-                <a:solidFill>
-                  <a:srgbClr val="8C6A3F"/>
+              <a:rPr sz="1250" b="1" spc="120">
+                <a:solidFill>
+                  <a:srgbClr val="E0B85C"/>
                 </a:solidFill>
                 <a:latin typeface="Calibri"/>
               </a:rPr>
@@ -10679,6 +11144,29 @@
               </a:rPr>
               <a:t>The methods are complementary. None is a substitute for evidence in the validation plane.</a:t>
             </a:r>
+          </a:p>
+        </p:txBody>
+      </p:sp>
+      <p:sp>
+        <p:nvSpPr>
+          <p:cNvPr id="9" name="Slide Number Placeholder"/>
+          <p:cNvSpPr>
+            <a:spLocks noGrp="1"/>
+          </p:cNvSpPr>
+          <p:nvPr>
+            <p:ph type="sldNum" sz="quarter" idx="10"/>
+          </p:nvPr>
+        </p:nvSpPr>
+        <p:spPr/>
+        <p:txBody>
+          <a:bodyPr/>
+          <a:lstStyle/>
+          <a:p>
+            <a:fld id="{BCB632DE-6AD4-40F1-944C-28C0E9BF62DC}" type="slidenum">
+              <a:rPr lang="en-US"/>
+              <a:t>19</a:t>
+            </a:fld>
+            <a:endParaRPr lang="en-US"/>
           </a:p>
         </p:txBody>
       </p:sp>
@@ -10834,6 +11322,29 @@
           </a:p>
         </p:txBody>
       </p:sp>
+      <p:sp>
+        <p:nvSpPr>
+          <p:cNvPr id="5" name="Slide Number Placeholder"/>
+          <p:cNvSpPr>
+            <a:spLocks noGrp="1"/>
+          </p:cNvSpPr>
+          <p:nvPr>
+            <p:ph type="sldNum" sz="quarter" idx="10"/>
+          </p:nvPr>
+        </p:nvSpPr>
+        <p:spPr/>
+        <p:txBody>
+          <a:bodyPr/>
+          <a:lstStyle/>
+          <a:p>
+            <a:fld id="{BCB632DE-6AD4-40F1-944C-28C0E9BF62DC}" type="slidenum">
+              <a:rPr lang="en-US"/>
+              <a:t>2</a:t>
+            </a:fld>
+            <a:endParaRPr lang="en-US"/>
+          </a:p>
+        </p:txBody>
+      </p:sp>
     </p:spTree>
   </p:cSld>
   <p:clrMapOvr>
@@ -11003,7 +11514,7 @@
           <p:nvPr>
             <p:extLst>
               <p:ext uri="{D42A27DB-BD31-4B8C-83A1-F6EECF244321}">
-                <p14:modId xmlns:p14="http://schemas.microsoft.com/office/powerpoint/2010/main" val="2748089721"/>
+                <p14:modId xmlns:p14="http://schemas.microsoft.com/office/powerpoint/2010/main" val="2559492123"/>
               </p:ext>
             </p:extLst>
           </p:nvPr>
@@ -11339,7 +11850,7 @@
                           <a:ea typeface="Cambria" pitchFamily="34" charset="-122"/>
                           <a:cs typeface="Cambria" pitchFamily="34" charset="-120"/>
                         </a:rPr>
-                        <a:t>Agent Pool</a:t>
+                        <a:t>Agents / Agent Pools</a:t>
                       </a:r>
                       <a:endParaRPr lang="en-US" sz="1500" dirty="0">
                         <a:latin typeface="+mn-lt"/>
@@ -11407,7 +11918,7 @@
                           <a:ea typeface="Cambria" pitchFamily="34" charset="-122"/>
                           <a:cs typeface="Calibri" pitchFamily="34" charset="-120"/>
                         </a:rPr>
-                        <a:t>Runner</a:t>
+                        <a:t>Runners / Runner Groups</a:t>
                       </a:r>
                       <a:endParaRPr lang="en-US" sz="1500" b="1" kern="1200" dirty="0">
                         <a:solidFill>
@@ -12265,9 +12776,9 @@
               <a:buNone/>
             </a:pPr>
             <a:r>
-              <a:rPr sz="1050" b="1" spc="120">
-                <a:solidFill>
-                  <a:srgbClr val="8C6A3F"/>
+              <a:rPr sz="1250" b="1" spc="120">
+                <a:solidFill>
+                  <a:srgbClr val="E0B85C"/>
                 </a:solidFill>
                 <a:latin typeface="Calibri"/>
               </a:rPr>
@@ -12283,6 +12794,29 @@
               <a:t>Translation is a design exercise: preserve the original security and lifecycle intent, then validate conditions, needs, shell and error handling, approvals, runners and environment behavior.</a:t>
             </a:r>
             <a:endParaRPr lang="en-US" sz="1350" dirty="0"/>
+          </a:p>
+        </p:txBody>
+      </p:sp>
+      <p:sp>
+        <p:nvSpPr>
+          <p:cNvPr id="25" name="Slide Number Placeholder"/>
+          <p:cNvSpPr>
+            <a:spLocks noGrp="1"/>
+          </p:cNvSpPr>
+          <p:nvPr>
+            <p:ph type="sldNum" sz="quarter" idx="10"/>
+          </p:nvPr>
+        </p:nvSpPr>
+        <p:spPr/>
+        <p:txBody>
+          <a:bodyPr/>
+          <a:lstStyle/>
+          <a:p>
+            <a:fld id="{BCB632DE-6AD4-40F1-944C-28C0E9BF62DC}" type="slidenum">
+              <a:rPr lang="en-US"/>
+              <a:t>20</a:t>
+            </a:fld>
+            <a:endParaRPr lang="en-US"/>
           </a:p>
         </p:txBody>
       </p:sp>
@@ -12557,13 +13091,46 @@
               <a:buChar char="•"/>
             </a:pPr>
             <a:r>
+              <a:rPr lang="en-US" sz="1450" dirty="0"/>
+              <a:t>GitHub Enterprise Importer (GEI) is a set of GitHub CLI extensions, with </a:t>
+            </a:r>
+            <a:r>
               <a:rPr lang="en-US" sz="1450" dirty="0">
+                <a:latin typeface="Cascadia Code" panose="020B0609020000020004" pitchFamily="49" charset="0"/>
+                <a:cs typeface="Cascadia Code" panose="020B0609020000020004" pitchFamily="49" charset="0"/>
+              </a:rPr>
+              <a:t>gh-ado2gh</a:t>
+            </a:r>
+            <a:r>
+              <a:rPr lang="en-US" sz="1450" dirty="0"/>
+              <a:t> specifically for ADO</a:t>
+            </a:r>
+            <a:endParaRPr lang="en-US" sz="1450" dirty="0">
+              <a:latin typeface="Cascadia Mono" panose="020B0609020000020004" pitchFamily="49" charset="0"/>
+              <a:ea typeface="Cascadia Mono" panose="020B0609020000020004" pitchFamily="49" charset="0"/>
+              <a:cs typeface="Cascadia Mono" panose="020B0609020000020004" pitchFamily="49" charset="0"/>
+            </a:endParaRPr>
+          </a:p>
+          <a:p>
+            <a:pPr marL="285750" indent="-285750">
+              <a:lnSpc>
+                <a:spcPct val="110000"/>
+              </a:lnSpc>
+              <a:spcAft>
+                <a:spcPts val="800"/>
+              </a:spcAft>
+              <a:buSzPct val="100000"/>
+              <a:buFont typeface="Arial" panose="020B0604020202020204" pitchFamily="34" charset="0"/>
+              <a:buChar char="•"/>
+            </a:pPr>
+            <a:r>
+              <a:rPr lang="en-US" sz="1450" dirty="0">
                 <a:solidFill>
                   <a:srgbClr val="2B2B2B"/>
                 </a:solidFill>
-                <a:latin typeface="Cascadia Mono" panose="020B0609020000020004" pitchFamily="49" charset="0"/>
+                <a:latin typeface="Cascadia Code" panose="020B0609020000020004" pitchFamily="49" charset="0"/>
                 <a:ea typeface="Cascadia Mono" panose="020B0609020000020004" pitchFamily="49" charset="0"/>
-                <a:cs typeface="Cascadia Mono" panose="020B0609020000020004" pitchFamily="49" charset="0"/>
+                <a:cs typeface="Cascadia Code" panose="020B0609020000020004" pitchFamily="49" charset="0"/>
               </a:rPr>
               <a:t>inventory-report</a:t>
             </a:r>
@@ -12591,9 +13158,9 @@
                 <a:solidFill>
                   <a:srgbClr val="2B2B2B"/>
                 </a:solidFill>
-                <a:latin typeface="Cascadia Mono" panose="020B0609020000020004" pitchFamily="49" charset="0"/>
+                <a:latin typeface="Cascadia Code" panose="020B0609020000020004" pitchFamily="49" charset="0"/>
                 <a:ea typeface="Cascadia Mono" panose="020B0609020000020004" pitchFamily="49" charset="0"/>
-                <a:cs typeface="Cascadia Mono" panose="020B0609020000020004" pitchFamily="49" charset="0"/>
+                <a:cs typeface="Cascadia Code" panose="020B0609020000020004" pitchFamily="49" charset="0"/>
               </a:rPr>
               <a:t>generate-script</a:t>
             </a:r>
@@ -12620,9 +13187,9 @@
                 <a:solidFill>
                   <a:srgbClr val="2B2B2B"/>
                 </a:solidFill>
-                <a:latin typeface="Cascadia Mono" panose="020B0609020000020004" pitchFamily="49" charset="0"/>
+                <a:latin typeface="Cascadia Code" panose="020B0609020000020004" pitchFamily="49" charset="0"/>
                 <a:ea typeface="Cascadia Mono" panose="020B0609020000020004" pitchFamily="49" charset="0"/>
-                <a:cs typeface="Cascadia Mono" panose="020B0609020000020004" pitchFamily="49" charset="0"/>
+                <a:cs typeface="Cascadia Code" panose="020B0609020000020004" pitchFamily="49" charset="0"/>
               </a:rPr>
               <a:t>--all </a:t>
             </a:r>
@@ -12738,29 +13305,6 @@
           <a:lstStyle/>
           <a:p>
             <a:pPr marL="285750" indent="-285750">
-              <a:lnSpc>
-                <a:spcPct val="110000"/>
-              </a:lnSpc>
-              <a:spcAft>
-                <a:spcPts val="800"/>
-              </a:spcAft>
-              <a:buSzPct val="100000"/>
-              <a:buFont typeface="Arial" panose="020B0604020202020204" pitchFamily="34" charset="0"/>
-              <a:buChar char="•"/>
-            </a:pPr>
-            <a:r>
-              <a:rPr sz="1450" dirty="0">
-                <a:solidFill>
-                  <a:srgbClr val="F5F5F0"/>
-                </a:solidFill>
-                <a:latin typeface="Calibri"/>
-              </a:rPr>
-              <a:t>GitHub Enterprise Importer (GEI) is a set of GitHub CLI extensions</a:t>
-            </a:r>
-            <a:endParaRPr lang="en-US" sz="1450" dirty="0"/>
-          </a:p>
-          <a:p>
-            <a:pPr marL="285750" indent="-285750">
               <a:spcBef>
                 <a:spcPts val="800"/>
               </a:spcBef>
@@ -12774,17 +13318,17 @@
                 </a:solidFill>
                 <a:latin typeface="Calibri"/>
               </a:rPr>
-              <a:t>gh-ado2gh is GEI’s Azure DevOps extension — not a separate tool</a:t>
-            </a:r>
-          </a:p>
-          <a:p>
-            <a:pPr marL="285750" indent="-285750">
-              <a:spcBef>
-                <a:spcPts val="800"/>
-              </a:spcBef>
-              <a:buFont typeface="Arial" panose="020B0604020202020204" pitchFamily="34" charset="0"/>
-              <a:buChar char="•"/>
-            </a:pPr>
+              <a:t>Pipeline-logic conversion belongs to </a:t>
+            </a:r>
+            <a:r>
+              <a:rPr lang="en-US" sz="1450" dirty="0">
+                <a:solidFill>
+                  <a:srgbClr val="F5F5F0"/>
+                </a:solidFill>
+                <a:latin typeface="Calibri"/>
+              </a:rPr>
+              <a:t>elsewhere (</a:t>
+            </a:r>
             <a:r>
               <a:rPr sz="1450" dirty="0">
                 <a:solidFill>
@@ -12792,8 +13336,23 @@
                 </a:solidFill>
                 <a:latin typeface="Calibri"/>
               </a:rPr>
-              <a:t>Pipeline-logic conversion belongs to Actions Importer</a:t>
-            </a:r>
+              <a:t>Actions Importer</a:t>
+            </a:r>
+            <a:r>
+              <a:rPr lang="en-US" sz="1450" dirty="0">
+                <a:solidFill>
+                  <a:srgbClr val="F5F5F0"/>
+                </a:solidFill>
+                <a:latin typeface="Calibri"/>
+              </a:rPr>
+              <a:t>)</a:t>
+            </a:r>
+            <a:endParaRPr sz="1450" dirty="0">
+              <a:solidFill>
+                <a:srgbClr val="F5F5F0"/>
+              </a:solidFill>
+              <a:latin typeface="Calibri"/>
+            </a:endParaRPr>
           </a:p>
           <a:p>
             <a:pPr marL="285750" indent="-285750">
@@ -12882,7 +13441,7 @@
               <a:buNone/>
             </a:pPr>
             <a:r>
-              <a:rPr sz="1050" b="1" spc="120">
+              <a:rPr sz="1250" b="1" spc="120">
                 <a:solidFill>
                   <a:srgbClr val="C1440E"/>
                 </a:solidFill>
@@ -12961,6 +13520,29 @@
           </a:prstGeom>
         </p:spPr>
       </p:pic>
+      <p:sp>
+        <p:nvSpPr>
+          <p:cNvPr id="16" name="Slide Number Placeholder"/>
+          <p:cNvSpPr>
+            <a:spLocks noGrp="1"/>
+          </p:cNvSpPr>
+          <p:nvPr>
+            <p:ph type="sldNum" sz="quarter" idx="10"/>
+          </p:nvPr>
+        </p:nvSpPr>
+        <p:spPr/>
+        <p:txBody>
+          <a:bodyPr/>
+          <a:lstStyle/>
+          <a:p>
+            <a:fld id="{BCB632DE-6AD4-40F1-944C-28C0E9BF62DC}" type="slidenum">
+              <a:rPr lang="en-US"/>
+              <a:t>21</a:t>
+            </a:fld>
+            <a:endParaRPr lang="en-US" dirty="0"/>
+          </a:p>
+        </p:txBody>
+      </p:sp>
     </p:spTree>
   </p:cSld>
   <p:clrMapOvr>
@@ -12970,6 +13552,748 @@
 </file>
 
 <file path=ppt/slides/slide22.xml><?xml version="1.0" encoding="utf-8"?>
+<p:sld xmlns:a="http://schemas.openxmlformats.org/drawingml/2006/main" xmlns:r="http://schemas.openxmlformats.org/officeDocument/2006/relationships" xmlns:p="http://schemas.openxmlformats.org/presentationml/2006/main">
+  <p:cSld>
+    <p:spTree>
+      <p:nvGrpSpPr>
+        <p:cNvPr id="1" name=""/>
+        <p:cNvGrpSpPr/>
+        <p:nvPr/>
+      </p:nvGrpSpPr>
+      <p:grpSpPr>
+        <a:xfrm>
+          <a:off x="0" y="0"/>
+          <a:ext cx="0" cy="0"/>
+          <a:chOff x="0" y="0"/>
+          <a:chExt cx="0" cy="0"/>
+        </a:xfrm>
+      </p:grpSpPr>
+      <p:sp>
+        <p:nvSpPr>
+          <p:cNvPr id="2" name="Shape 0"/>
+          <p:cNvSpPr/>
+          <p:nvPr/>
+        </p:nvSpPr>
+        <p:spPr>
+          <a:xfrm>
+            <a:off x="548640" y="457200"/>
+            <a:ext cx="566928" cy="566928"/>
+          </a:xfrm>
+          <a:prstGeom prst="ellipse">
+            <a:avLst/>
+          </a:prstGeom>
+          <a:solidFill>
+            <a:srgbClr val="C1440E"/>
+          </a:solidFill>
+          <a:ln/>
+        </p:spPr>
+        <p:txBody>
+          <a:bodyPr/>
+          <a:lstStyle/>
+          <a:p>
+            <a:endParaRPr lang="en-US"/>
+          </a:p>
+        </p:txBody>
+      </p:sp>
+      <p:pic>
+        <p:nvPicPr>
+          <p:cNvPr id="3" name="Image 0" descr="/home/claude/pptx-build/assets/icons/FaFlask-FFFFFF-200.png"/>
+          <p:cNvPicPr>
+            <a:picLocks noChangeAspect="1"/>
+          </p:cNvPicPr>
+          <p:nvPr/>
+        </p:nvPicPr>
+        <p:blipFill>
+          <a:blip r:embed="rId3"/>
+          <a:stretch>
+            <a:fillRect/>
+          </a:stretch>
+        </p:blipFill>
+        <p:spPr>
+          <a:xfrm>
+            <a:off x="685800" y="594360"/>
+            <a:ext cx="292608" cy="292608"/>
+          </a:xfrm>
+          <a:prstGeom prst="rect">
+            <a:avLst/>
+          </a:prstGeom>
+        </p:spPr>
+      </p:pic>
+      <p:sp>
+        <p:nvSpPr>
+          <p:cNvPr id="4" name="Text 1"/>
+          <p:cNvSpPr txBox="1"/>
+          <p:nvPr/>
+        </p:nvSpPr>
+        <p:spPr>
+          <a:xfrm>
+            <a:off x="1234440" y="420624"/>
+            <a:ext cx="9875520" cy="320040"/>
+          </a:xfrm>
+          <a:prstGeom prst="rect">
+            <a:avLst/>
+          </a:prstGeom>
+          <a:noFill/>
+          <a:ln/>
+        </p:spPr>
+        <p:txBody>
+          <a:bodyPr wrap="square" lIns="0" tIns="0" rIns="0" bIns="0" rtlCol="0" anchor="ctr"/>
+          <a:lstStyle/>
+          <a:p>
+            <a:pPr marL="0" indent="0">
+              <a:buNone/>
+            </a:pPr>
+            <a:r>
+              <a:rPr lang="en-US" sz="1500" b="1" kern="0" spc="200" dirty="0">
+                <a:solidFill>
+                  <a:srgbClr val="C1440E"/>
+                </a:solidFill>
+                <a:latin typeface="Calibri" pitchFamily="34" charset="0"/>
+                <a:ea typeface="Calibri" pitchFamily="34" charset="-122"/>
+                <a:cs typeface="Calibri" pitchFamily="34" charset="-120"/>
+              </a:rPr>
+              <a:t>CROSSING THE RIVER</a:t>
+            </a:r>
+            <a:endParaRPr lang="en-US" sz="1500" dirty="0"/>
+          </a:p>
+        </p:txBody>
+      </p:sp>
+      <p:sp>
+        <p:nvSpPr>
+          <p:cNvPr id="5" name="Text 2"/>
+          <p:cNvSpPr txBox="1"/>
+          <p:nvPr/>
+        </p:nvSpPr>
+        <p:spPr>
+          <a:xfrm>
+            <a:off x="1234440" y="749808"/>
+            <a:ext cx="10515600" cy="868680"/>
+          </a:xfrm>
+          <a:prstGeom prst="rect">
+            <a:avLst/>
+          </a:prstGeom>
+          <a:noFill/>
+          <a:ln/>
+        </p:spPr>
+        <p:txBody>
+          <a:bodyPr wrap="square" lIns="0" tIns="0" rIns="0" bIns="0" rtlCol="0" anchor="t"/>
+          <a:lstStyle/>
+          <a:p>
+            <a:pPr marL="0" indent="0">
+              <a:buNone/>
+            </a:pPr>
+            <a:r>
+              <a:rPr lang="en-US" sz="3200" b="1">
+                <a:solidFill>
+                  <a:srgbClr val="1F3D2C"/>
+                </a:solidFill>
+                <a:latin typeface="Cambria"/>
+              </a:rPr>
+              <a:t>Repository Plane — ELM Reduces Cutover Disruption</a:t>
+            </a:r>
+            <a:endParaRPr lang="en-US" sz="3200" dirty="0"/>
+          </a:p>
+        </p:txBody>
+      </p:sp>
+      <p:sp>
+        <p:nvSpPr>
+          <p:cNvPr id="6" name="Shape 3"/>
+          <p:cNvSpPr/>
+          <p:nvPr/>
+        </p:nvSpPr>
+        <p:spPr>
+          <a:xfrm>
+            <a:off x="548640" y="1531034"/>
+            <a:ext cx="11064240" cy="813816"/>
+          </a:xfrm>
+          <a:prstGeom prst="roundRect">
+            <a:avLst>
+              <a:gd name="adj" fmla="val 8000"/>
+            </a:avLst>
+          </a:prstGeom>
+          <a:solidFill>
+            <a:srgbClr val="F7F6F2"/>
+          </a:solidFill>
+          <a:ln w="12700">
+            <a:solidFill>
+              <a:srgbClr val="DDD8CC"/>
+            </a:solidFill>
+            <a:prstDash val="solid"/>
+          </a:ln>
+          <a:effectLst>
+            <a:outerShdw blurRad="76200" dist="25400" dir="5400000" algn="bl" rotWithShape="0">
+              <a:srgbClr val="000000">
+                <a:alpha val="12000"/>
+              </a:srgbClr>
+            </a:outerShdw>
+          </a:effectLst>
+        </p:spPr>
+        <p:txBody>
+          <a:bodyPr/>
+          <a:lstStyle/>
+          <a:p>
+            <a:endParaRPr lang="en-US"/>
+          </a:p>
+        </p:txBody>
+      </p:sp>
+      <p:sp>
+        <p:nvSpPr>
+          <p:cNvPr id="7" name="Text 4"/>
+          <p:cNvSpPr txBox="1"/>
+          <p:nvPr/>
+        </p:nvSpPr>
+        <p:spPr>
+          <a:xfrm>
+            <a:off x="822960" y="1430450"/>
+            <a:ext cx="10515600" cy="1097280"/>
+          </a:xfrm>
+          <a:prstGeom prst="rect">
+            <a:avLst/>
+          </a:prstGeom>
+          <a:noFill/>
+          <a:ln/>
+        </p:spPr>
+        <p:txBody>
+          <a:bodyPr wrap="square" lIns="0" tIns="0" rIns="0" bIns="0" rtlCol="0" anchor="ctr"/>
+          <a:lstStyle/>
+          <a:p>
+            <a:pPr marL="0" indent="0">
+              <a:lnSpc>
+                <a:spcPct val="115000"/>
+              </a:lnSpc>
+              <a:buNone/>
+            </a:pPr>
+            <a:r>
+              <a:rPr lang="en-US" sz="1650" b="0" dirty="0">
+                <a:solidFill>
+                  <a:srgbClr val="2B2B2B"/>
+                </a:solidFill>
+                <a:latin typeface="Calibri"/>
+              </a:rPr>
+              <a:t>Enterprise Live Migrations (ELM) is in public preview for the Azure DevOps path, targeting GitHub Enterprise Cloud with data residency. Its differentiator is continuous sync plus a customer-scheduled cutover.</a:t>
+            </a:r>
+            <a:endParaRPr lang="en-US" sz="1700" dirty="0"/>
+          </a:p>
+        </p:txBody>
+      </p:sp>
+      <p:sp>
+        <p:nvSpPr>
+          <p:cNvPr id="8" name="Shape 5"/>
+          <p:cNvSpPr/>
+          <p:nvPr/>
+        </p:nvSpPr>
+        <p:spPr>
+          <a:xfrm>
+            <a:off x="548640" y="2527730"/>
+            <a:ext cx="5349240" cy="2912950"/>
+          </a:xfrm>
+          <a:prstGeom prst="roundRect">
+            <a:avLst>
+              <a:gd name="adj" fmla="val 4800"/>
+            </a:avLst>
+          </a:prstGeom>
+          <a:solidFill>
+            <a:srgbClr val="F7F6F2"/>
+          </a:solidFill>
+          <a:ln w="12700">
+            <a:solidFill>
+              <a:srgbClr val="DDD8CC"/>
+            </a:solidFill>
+            <a:prstDash val="solid"/>
+          </a:ln>
+          <a:effectLst>
+            <a:outerShdw blurRad="76200" dist="25400" dir="5400000" algn="bl" rotWithShape="0">
+              <a:srgbClr val="000000">
+                <a:alpha val="12000"/>
+              </a:srgbClr>
+            </a:outerShdw>
+          </a:effectLst>
+        </p:spPr>
+        <p:txBody>
+          <a:bodyPr/>
+          <a:lstStyle/>
+          <a:p>
+            <a:endParaRPr lang="en-US"/>
+          </a:p>
+        </p:txBody>
+      </p:sp>
+      <p:sp>
+        <p:nvSpPr>
+          <p:cNvPr id="9" name="Text 6"/>
+          <p:cNvSpPr txBox="1"/>
+          <p:nvPr/>
+        </p:nvSpPr>
+        <p:spPr>
+          <a:xfrm>
+            <a:off x="899160" y="2749765"/>
+            <a:ext cx="4800600" cy="411480"/>
+          </a:xfrm>
+          <a:prstGeom prst="rect">
+            <a:avLst/>
+          </a:prstGeom>
+          <a:noFill/>
+          <a:ln/>
+        </p:spPr>
+        <p:txBody>
+          <a:bodyPr wrap="square" lIns="0" tIns="0" rIns="0" bIns="0" rtlCol="0" anchor="ctr"/>
+          <a:lstStyle/>
+          <a:p>
+            <a:pPr marL="0" indent="0">
+              <a:buNone/>
+            </a:pPr>
+            <a:r>
+              <a:rPr lang="en-US" sz="1700" b="1" dirty="0">
+                <a:solidFill>
+                  <a:srgbClr val="1F3D2C"/>
+                </a:solidFill>
+                <a:latin typeface="Cambria"/>
+              </a:rPr>
+              <a:t>What It Adds</a:t>
+            </a:r>
+            <a:endParaRPr lang="en-US" sz="1700" dirty="0"/>
+          </a:p>
+        </p:txBody>
+      </p:sp>
+      <p:sp>
+        <p:nvSpPr>
+          <p:cNvPr id="10" name="Text 7"/>
+          <p:cNvSpPr txBox="1"/>
+          <p:nvPr/>
+        </p:nvSpPr>
+        <p:spPr>
+          <a:xfrm>
+            <a:off x="822960" y="3161245"/>
+            <a:ext cx="4800600" cy="2233715"/>
+          </a:xfrm>
+          <a:prstGeom prst="rect">
+            <a:avLst/>
+          </a:prstGeom>
+          <a:noFill/>
+          <a:ln/>
+        </p:spPr>
+        <p:txBody>
+          <a:bodyPr wrap="square" lIns="0" tIns="0" rIns="0" bIns="0" rtlCol="0" anchor="t"/>
+          <a:lstStyle/>
+          <a:p>
+            <a:pPr marL="285750" indent="-285750">
+              <a:lnSpc>
+                <a:spcPct val="105000"/>
+              </a:lnSpc>
+              <a:spcAft>
+                <a:spcPts val="800"/>
+              </a:spcAft>
+              <a:buSzPct val="100000"/>
+              <a:buFont typeface="Arial" panose="020B0604020202020204" pitchFamily="34" charset="0"/>
+              <a:buChar char="•"/>
+            </a:pPr>
+            <a:r>
+              <a:rPr lang="en-US" sz="1400" dirty="0">
+                <a:solidFill>
+                  <a:srgbClr val="2B2B2B"/>
+                </a:solidFill>
+                <a:latin typeface="Calibri"/>
+              </a:rPr>
+              <a:t>Pre-migration checks and target creation</a:t>
+            </a:r>
+            <a:endParaRPr lang="en-US" sz="1350" dirty="0"/>
+          </a:p>
+          <a:p>
+            <a:pPr marL="285750" indent="-285750">
+              <a:spcAft>
+                <a:spcPts val="800"/>
+              </a:spcAft>
+              <a:buFont typeface="Arial" panose="020B0604020202020204" pitchFamily="34" charset="0"/>
+              <a:buChar char="•"/>
+            </a:pPr>
+            <a:r>
+              <a:rPr lang="en-US" sz="1400" dirty="0">
+                <a:solidFill>
+                  <a:srgbClr val="2B2B2B"/>
+                </a:solidFill>
+                <a:latin typeface="Calibri"/>
+              </a:rPr>
+              <a:t>Git, PR, and policy delta synchronization</a:t>
+            </a:r>
+          </a:p>
+          <a:p>
+            <a:pPr marL="285750" indent="-285750">
+              <a:spcAft>
+                <a:spcPts val="800"/>
+              </a:spcAft>
+              <a:buFont typeface="Arial" panose="020B0604020202020204" pitchFamily="34" charset="0"/>
+              <a:buChar char="•"/>
+            </a:pPr>
+            <a:r>
+              <a:rPr lang="en-US" sz="1400" dirty="0">
+                <a:solidFill>
+                  <a:srgbClr val="2B2B2B"/>
+                </a:solidFill>
+                <a:latin typeface="Calibri"/>
+              </a:rPr>
+              <a:t>Boards connection and pipeline rewiring</a:t>
+            </a:r>
+          </a:p>
+          <a:p>
+            <a:pPr marL="285750" indent="-285750">
+              <a:spcAft>
+                <a:spcPts val="800"/>
+              </a:spcAft>
+              <a:buFont typeface="Arial" panose="020B0604020202020204" pitchFamily="34" charset="0"/>
+              <a:buChar char="•"/>
+            </a:pPr>
+            <a:r>
+              <a:rPr lang="en-US" sz="1400" dirty="0">
+                <a:solidFill>
+                  <a:srgbClr val="2B2B2B"/>
+                </a:solidFill>
+                <a:latin typeface="Calibri"/>
+              </a:rPr>
+              <a:t>A scheduled read-only cutover window under 30 minutes</a:t>
+            </a:r>
+          </a:p>
+        </p:txBody>
+      </p:sp>
+      <p:sp>
+        <p:nvSpPr>
+          <p:cNvPr id="11" name="Shape 8"/>
+          <p:cNvSpPr/>
+          <p:nvPr/>
+        </p:nvSpPr>
+        <p:spPr>
+          <a:xfrm>
+            <a:off x="6263640" y="2527730"/>
+            <a:ext cx="5349240" cy="2912950"/>
+          </a:xfrm>
+          <a:prstGeom prst="roundRect">
+            <a:avLst>
+              <a:gd name="adj" fmla="val 4800"/>
+            </a:avLst>
+          </a:prstGeom>
+          <a:solidFill>
+            <a:srgbClr val="1F3D2C"/>
+          </a:solidFill>
+          <a:ln w="12700">
+            <a:solidFill>
+              <a:srgbClr val="DDD8CC"/>
+            </a:solidFill>
+            <a:prstDash val="solid"/>
+          </a:ln>
+          <a:effectLst>
+            <a:outerShdw blurRad="76200" dist="25400" dir="5400000" algn="bl" rotWithShape="0">
+              <a:srgbClr val="000000">
+                <a:alpha val="12000"/>
+              </a:srgbClr>
+            </a:outerShdw>
+          </a:effectLst>
+        </p:spPr>
+        <p:txBody>
+          <a:bodyPr/>
+          <a:lstStyle/>
+          <a:p>
+            <a:endParaRPr lang="en-US"/>
+          </a:p>
+        </p:txBody>
+      </p:sp>
+      <p:sp>
+        <p:nvSpPr>
+          <p:cNvPr id="12" name="Text 9"/>
+          <p:cNvSpPr txBox="1"/>
+          <p:nvPr/>
+        </p:nvSpPr>
+        <p:spPr>
+          <a:xfrm>
+            <a:off x="6492240" y="2749765"/>
+            <a:ext cx="4800600" cy="411480"/>
+          </a:xfrm>
+          <a:prstGeom prst="rect">
+            <a:avLst/>
+          </a:prstGeom>
+          <a:noFill/>
+          <a:ln/>
+        </p:spPr>
+        <p:txBody>
+          <a:bodyPr wrap="square" lIns="0" tIns="0" rIns="0" bIns="0" rtlCol="0" anchor="ctr"/>
+          <a:lstStyle/>
+          <a:p>
+            <a:pPr marL="0" indent="0">
+              <a:buNone/>
+            </a:pPr>
+            <a:r>
+              <a:rPr lang="en-US" sz="1700" b="1" dirty="0">
+                <a:solidFill>
+                  <a:srgbClr val="F5F5F0"/>
+                </a:solidFill>
+                <a:latin typeface="Cambria"/>
+              </a:rPr>
+              <a:t>Limits and What Remains</a:t>
+            </a:r>
+            <a:endParaRPr lang="en-US" sz="1700" dirty="0"/>
+          </a:p>
+        </p:txBody>
+      </p:sp>
+      <p:sp>
+        <p:nvSpPr>
+          <p:cNvPr id="13" name="Text 10"/>
+          <p:cNvSpPr txBox="1"/>
+          <p:nvPr/>
+        </p:nvSpPr>
+        <p:spPr>
+          <a:xfrm>
+            <a:off x="6537960" y="3161245"/>
+            <a:ext cx="4800600" cy="2233715"/>
+          </a:xfrm>
+          <a:prstGeom prst="rect">
+            <a:avLst/>
+          </a:prstGeom>
+          <a:noFill/>
+          <a:ln/>
+        </p:spPr>
+        <p:txBody>
+          <a:bodyPr wrap="square" lIns="0" tIns="0" rIns="0" bIns="0" rtlCol="0" anchor="t"/>
+          <a:lstStyle/>
+          <a:p>
+            <a:pPr marL="285750" indent="-285750">
+              <a:lnSpc>
+                <a:spcPct val="105000"/>
+              </a:lnSpc>
+              <a:spcAft>
+                <a:spcPts val="800"/>
+              </a:spcAft>
+              <a:buSzPct val="100000"/>
+              <a:buFont typeface="Arial" panose="020B0604020202020204" pitchFamily="34" charset="0"/>
+              <a:buChar char="•"/>
+            </a:pPr>
+            <a:r>
+              <a:rPr lang="en-US" sz="1400" dirty="0">
+                <a:solidFill>
+                  <a:srgbClr val="F5F5F0"/>
+                </a:solidFill>
+                <a:latin typeface="Calibri"/>
+              </a:rPr>
+              <a:t>Repositories only — 30 max (20 initial + 10 more)</a:t>
+            </a:r>
+            <a:endParaRPr lang="en-US" sz="1350" dirty="0"/>
+          </a:p>
+          <a:p>
+            <a:pPr marL="285750" indent="-285750">
+              <a:spcAft>
+                <a:spcPts val="800"/>
+              </a:spcAft>
+              <a:buFont typeface="Arial" panose="020B0604020202020204" pitchFamily="34" charset="0"/>
+              <a:buChar char="•"/>
+            </a:pPr>
+            <a:r>
+              <a:rPr lang="en-US" sz="1400" dirty="0">
+                <a:solidFill>
+                  <a:srgbClr val="F5F5F0"/>
+                </a:solidFill>
+                <a:latin typeface="Calibri"/>
+              </a:rPr>
+              <a:t>Cutover must finish within 21 days of starting</a:t>
+            </a:r>
+          </a:p>
+          <a:p>
+            <a:pPr marL="285750" indent="-285750">
+              <a:spcAft>
+                <a:spcPts val="800"/>
+              </a:spcAft>
+              <a:buFont typeface="Arial" panose="020B0604020202020204" pitchFamily="34" charset="0"/>
+              <a:buChar char="•"/>
+            </a:pPr>
+            <a:r>
+              <a:rPr lang="en-US" sz="1400" dirty="0">
+                <a:solidFill>
+                  <a:srgbClr val="F5F5F0"/>
+                </a:solidFill>
+                <a:latin typeface="Calibri"/>
+              </a:rPr>
+              <a:t>Access, permissions, and ruleset verification</a:t>
+            </a:r>
+          </a:p>
+          <a:p>
+            <a:pPr marL="285750" indent="-285750">
+              <a:spcAft>
+                <a:spcPts val="800"/>
+              </a:spcAft>
+              <a:buFont typeface="Arial" panose="020B0604020202020204" pitchFamily="34" charset="0"/>
+              <a:buChar char="•"/>
+            </a:pPr>
+            <a:r>
+              <a:rPr lang="en-US" sz="1400" dirty="0">
+                <a:solidFill>
+                  <a:srgbClr val="F5F5F0"/>
+                </a:solidFill>
+                <a:latin typeface="Calibri"/>
+              </a:rPr>
+              <a:t>Hardcoded URLs and other long-tail cleanup</a:t>
+            </a:r>
+          </a:p>
+          <a:p>
+            <a:pPr marL="285750" indent="-285750">
+              <a:spcAft>
+                <a:spcPts val="800"/>
+              </a:spcAft>
+              <a:buFont typeface="Arial" panose="020B0604020202020204" pitchFamily="34" charset="0"/>
+              <a:buChar char="•"/>
+            </a:pPr>
+            <a:r>
+              <a:rPr lang="en-US" sz="1400" dirty="0">
+                <a:solidFill>
+                  <a:srgbClr val="F5F5F0"/>
+                </a:solidFill>
+                <a:latin typeface="Calibri"/>
+              </a:rPr>
+              <a:t>Pipeline logic, work items, wikis, and other non-repository data</a:t>
+            </a:r>
+          </a:p>
+          <a:p>
+            <a:pPr marL="285750" indent="-285750">
+              <a:spcAft>
+                <a:spcPts val="800"/>
+              </a:spcAft>
+              <a:buFont typeface="Arial" panose="020B0604020202020204" pitchFamily="34" charset="0"/>
+              <a:buChar char="•"/>
+            </a:pPr>
+            <a:r>
+              <a:rPr lang="en-US" sz="1400" dirty="0">
+                <a:solidFill>
+                  <a:srgbClr val="F5F5F0"/>
+                </a:solidFill>
+                <a:latin typeface="Calibri"/>
+              </a:rPr>
+              <a:t>Post-cutover validation and decommissioning</a:t>
+            </a:r>
+          </a:p>
+        </p:txBody>
+      </p:sp>
+      <p:sp>
+        <p:nvSpPr>
+          <p:cNvPr id="16" name="Shape 3">
+            <a:extLst>
+              <a:ext uri="{FF2B5EF4-FFF2-40B4-BE49-F238E27FC236}">
+                <a16:creationId xmlns:a16="http://schemas.microsoft.com/office/drawing/2014/main" id="{2FACEC23-AB46-4DCB-0463-00C487B44704}"/>
+              </a:ext>
+            </a:extLst>
+          </p:cNvPr>
+          <p:cNvSpPr/>
+          <p:nvPr/>
+        </p:nvSpPr>
+        <p:spPr>
+          <a:xfrm>
+            <a:off x="548640" y="5628132"/>
+            <a:ext cx="11064240" cy="960120"/>
+          </a:xfrm>
+          <a:prstGeom prst="roundRect">
+            <a:avLst>
+              <a:gd name="adj" fmla="val 12632"/>
+            </a:avLst>
+          </a:prstGeom>
+          <a:solidFill>
+            <a:srgbClr val="1F3D2C"/>
+          </a:solidFill>
+          <a:ln w="12700">
+            <a:noFill/>
+            <a:prstDash val="solid"/>
+          </a:ln>
+          <a:effectLst>
+            <a:outerShdw blurRad="76200" dist="25400" dir="5400000" algn="bl" rotWithShape="0">
+              <a:srgbClr val="000000">
+                <a:alpha val="12000"/>
+              </a:srgbClr>
+            </a:outerShdw>
+          </a:effectLst>
+        </p:spPr>
+        <p:txBody>
+          <a:bodyPr/>
+          <a:lstStyle/>
+          <a:p>
+            <a:endParaRPr lang="en-US"/>
+          </a:p>
+        </p:txBody>
+      </p:sp>
+      <p:sp>
+        <p:nvSpPr>
+          <p:cNvPr id="18" name="Text 4">
+            <a:extLst>
+              <a:ext uri="{FF2B5EF4-FFF2-40B4-BE49-F238E27FC236}">
+                <a16:creationId xmlns:a16="http://schemas.microsoft.com/office/drawing/2014/main" id="{DA49AD78-DE17-95B0-86BA-23572C08058F}"/>
+              </a:ext>
+            </a:extLst>
+          </p:cNvPr>
+          <p:cNvSpPr txBox="1"/>
+          <p:nvPr/>
+        </p:nvSpPr>
+        <p:spPr>
+          <a:xfrm>
+            <a:off x="563880" y="5628132"/>
+            <a:ext cx="11064240" cy="960120"/>
+          </a:xfrm>
+          <a:prstGeom prst="rect">
+            <a:avLst/>
+          </a:prstGeom>
+          <a:noFill/>
+          <a:ln/>
+        </p:spPr>
+        <p:txBody>
+          <a:bodyPr wrap="square" lIns="256032" tIns="54864" rIns="256032" bIns="54864" rtlCol="0" anchor="ctr"/>
+          <a:lstStyle/>
+          <a:p>
+            <a:pPr marL="0" indent="0" algn="l">
+              <a:buNone/>
+            </a:pPr>
+            <a:r>
+              <a:rPr sz="1250" b="1" spc="120">
+                <a:solidFill>
+                  <a:srgbClr val="E0B85C"/>
+                </a:solidFill>
+                <a:latin typeface="Calibri"/>
+              </a:rPr>
+              <a:t>TAKEAWAY </a:t>
+            </a:r>
+            <a:r>
+              <a:rPr sz="1500">
+                <a:solidFill>
+                  <a:srgbClr val="F5F5F0"/>
+                </a:solidFill>
+                <a:latin typeface="Calibri"/>
+              </a:rPr>
+              <a:t>ELM changes the synchronization and cutover experience — not the boundaries of what must be migrated and validated.</a:t>
+            </a:r>
+          </a:p>
+        </p:txBody>
+      </p:sp>
+      <p:sp>
+        <p:nvSpPr>
+          <p:cNvPr id="19" name="Slide Number Placeholder"/>
+          <p:cNvSpPr>
+            <a:spLocks noGrp="1"/>
+          </p:cNvSpPr>
+          <p:nvPr>
+            <p:ph type="sldNum" sz="quarter" idx="10"/>
+          </p:nvPr>
+        </p:nvSpPr>
+        <p:spPr/>
+        <p:txBody>
+          <a:bodyPr/>
+          <a:lstStyle/>
+          <a:p>
+            <a:fld id="{BCB632DE-6AD4-40F1-944C-28C0E9BF62DC}" type="slidenum">
+              <a:rPr lang="en-US"/>
+              <a:t>22</a:t>
+            </a:fld>
+            <a:endParaRPr lang="en-US"/>
+          </a:p>
+        </p:txBody>
+      </p:sp>
+    </p:spTree>
+  </p:cSld>
+  <p:clrMapOvr>
+    <a:masterClrMapping/>
+  </p:clrMapOvr>
+</p:sld>
+</file>
+
+<file path=ppt/slides/slide23.xml><?xml version="1.0" encoding="utf-8"?>
 <p:sld xmlns:a="http://schemas.openxmlformats.org/drawingml/2006/main" xmlns:r="http://schemas.openxmlformats.org/officeDocument/2006/relationships" xmlns:p="http://schemas.openxmlformats.org/presentationml/2006/main">
   <p:cSld name="Slide 25">
     <p:bg>
@@ -13129,8 +14453,8 @@
         </p:nvSpPr>
         <p:spPr>
           <a:xfrm>
-            <a:off x="548640" y="1691640"/>
-            <a:ext cx="11064240" cy="2651760"/>
+            <a:off x="548640" y="4556259"/>
+            <a:ext cx="11064240" cy="1358289"/>
           </a:xfrm>
           <a:prstGeom prst="roundRect">
             <a:avLst>
@@ -13170,8 +14494,8 @@
         </p:nvSpPr>
         <p:spPr>
           <a:xfrm>
-            <a:off x="822960" y="1920240"/>
-            <a:ext cx="10332720" cy="2194560"/>
+            <a:off x="822960" y="4674899"/>
+            <a:ext cx="10332720" cy="1124101"/>
           </a:xfrm>
           <a:prstGeom prst="rect">
             <a:avLst/>
@@ -13190,13 +14514,13 @@
               <a:buNone/>
             </a:pPr>
             <a:r>
-              <a:rPr lang="en-US" sz="1850" b="0">
+              <a:rPr lang="en-US" sz="1850" b="0" dirty="0">
                 <a:solidFill>
                   <a:srgbClr val="2B2B2B"/>
                 </a:solidFill>
                 <a:latin typeface="Calibri"/>
               </a:rPr>
-              <a:t>Install the Azure Pipelines GitHub App before migrating repositories. That enables migration orchestration to reconnect pipeline references; it does not convert the pipeline logic itself.</a:t>
+              <a:t>Install the Azure Pipelines App in your GitHub Org before migrating repositories. That enables migration orchestration to reconnect pipeline references; it does not convert the pipeline logic itself.</a:t>
             </a:r>
             <a:endParaRPr lang="en-US" sz="1900" dirty="0"/>
           </a:p>
@@ -13210,8 +14534,8 @@
         </p:nvSpPr>
         <p:spPr>
           <a:xfrm>
-            <a:off x="548640" y="4572000"/>
-            <a:ext cx="11064240" cy="1417320"/>
+            <a:off x="548640" y="1549966"/>
+            <a:ext cx="11064240" cy="2638449"/>
           </a:xfrm>
           <a:prstGeom prst="roundRect">
             <a:avLst>
@@ -13251,8 +14575,8 @@
         </p:nvSpPr>
         <p:spPr>
           <a:xfrm>
-            <a:off x="822960" y="4736592"/>
-            <a:ext cx="10515600" cy="1097280"/>
+            <a:off x="822960" y="1775672"/>
+            <a:ext cx="10515600" cy="2257295"/>
           </a:xfrm>
           <a:prstGeom prst="rect">
             <a:avLst/>
@@ -13277,9 +14601,140 @@
                 </a:solidFill>
                 <a:latin typeface="Calibri"/>
               </a:rPr>
-              <a:t>Before the first run: target enterprise and organization model  •  authentication and identity mapping  •  team and visibility policy  •  Boards/Pipelines integration  •  freeze or change-reconciliation approach  •  owner for migration failures</a:t>
+              <a:t>Before the first run: </a:t>
+            </a:r>
+          </a:p>
+          <a:p>
+            <a:pPr marL="285750" indent="-285750">
+              <a:lnSpc>
+                <a:spcPct val="115000"/>
+              </a:lnSpc>
+              <a:buFont typeface="Arial" panose="020B0604020202020204" pitchFamily="34" charset="0"/>
+              <a:buChar char="•"/>
+            </a:pPr>
+            <a:r>
+              <a:rPr lang="en-US" sz="1450" b="0" dirty="0">
+                <a:solidFill>
+                  <a:srgbClr val="F5F5F0"/>
+                </a:solidFill>
+                <a:latin typeface="Calibri"/>
+              </a:rPr>
+              <a:t>target enterprise and organization model  </a:t>
+            </a:r>
+          </a:p>
+          <a:p>
+            <a:pPr marL="285750" indent="-285750">
+              <a:lnSpc>
+                <a:spcPct val="115000"/>
+              </a:lnSpc>
+              <a:buFont typeface="Arial" panose="020B0604020202020204" pitchFamily="34" charset="0"/>
+              <a:buChar char="•"/>
+            </a:pPr>
+            <a:r>
+              <a:rPr lang="en-US" sz="1450" b="0" dirty="0">
+                <a:solidFill>
+                  <a:srgbClr val="F5F5F0"/>
+                </a:solidFill>
+                <a:latin typeface="Calibri"/>
+              </a:rPr>
+              <a:t>authentication and identity mapping  </a:t>
+            </a:r>
+          </a:p>
+          <a:p>
+            <a:pPr marL="285750" indent="-285750">
+              <a:lnSpc>
+                <a:spcPct val="115000"/>
+              </a:lnSpc>
+              <a:buFont typeface="Arial" panose="020B0604020202020204" pitchFamily="34" charset="0"/>
+              <a:buChar char="•"/>
+            </a:pPr>
+            <a:r>
+              <a:rPr lang="en-US" sz="1450" b="0" dirty="0">
+                <a:solidFill>
+                  <a:srgbClr val="F5F5F0"/>
+                </a:solidFill>
+                <a:latin typeface="Calibri"/>
+              </a:rPr>
+              <a:t>team and visibility policy  </a:t>
+            </a:r>
+          </a:p>
+          <a:p>
+            <a:pPr marL="285750" indent="-285750">
+              <a:lnSpc>
+                <a:spcPct val="115000"/>
+              </a:lnSpc>
+              <a:buFont typeface="Arial" panose="020B0604020202020204" pitchFamily="34" charset="0"/>
+              <a:buChar char="•"/>
+            </a:pPr>
+            <a:r>
+              <a:rPr lang="en-US" sz="1450" b="0" dirty="0">
+                <a:solidFill>
+                  <a:srgbClr val="F5F5F0"/>
+                </a:solidFill>
+                <a:latin typeface="Calibri"/>
+              </a:rPr>
+              <a:t>Boards/Pipelines integration  </a:t>
+            </a:r>
+          </a:p>
+          <a:p>
+            <a:pPr marL="285750" indent="-285750">
+              <a:lnSpc>
+                <a:spcPct val="115000"/>
+              </a:lnSpc>
+              <a:buFont typeface="Arial" panose="020B0604020202020204" pitchFamily="34" charset="0"/>
+              <a:buChar char="•"/>
+            </a:pPr>
+            <a:r>
+              <a:rPr lang="en-US" sz="1450" b="0" dirty="0">
+                <a:solidFill>
+                  <a:srgbClr val="F5F5F0"/>
+                </a:solidFill>
+                <a:latin typeface="Calibri"/>
+              </a:rPr>
+              <a:t>freeze or change-reconciliation approach  </a:t>
+            </a:r>
+          </a:p>
+          <a:p>
+            <a:pPr marL="285750" indent="-285750">
+              <a:lnSpc>
+                <a:spcPct val="115000"/>
+              </a:lnSpc>
+              <a:buFont typeface="Arial" panose="020B0604020202020204" pitchFamily="34" charset="0"/>
+              <a:buChar char="•"/>
+            </a:pPr>
+            <a:r>
+              <a:rPr lang="en-US" sz="1450" b="0" dirty="0">
+                <a:solidFill>
+                  <a:srgbClr val="F5F5F0"/>
+                </a:solidFill>
+                <a:latin typeface="Calibri"/>
+              </a:rPr>
+              <a:t>owner for migration failures</a:t>
             </a:r>
             <a:endParaRPr lang="en-US" sz="1500" dirty="0"/>
+          </a:p>
+        </p:txBody>
+      </p:sp>
+      <p:sp>
+        <p:nvSpPr>
+          <p:cNvPr id="10" name="Slide Number Placeholder"/>
+          <p:cNvSpPr>
+            <a:spLocks noGrp="1"/>
+          </p:cNvSpPr>
+          <p:nvPr>
+            <p:ph type="sldNum" sz="quarter" idx="10"/>
+          </p:nvPr>
+        </p:nvSpPr>
+        <p:spPr/>
+        <p:txBody>
+          <a:bodyPr/>
+          <a:lstStyle/>
+          <a:p>
+            <a:fld id="{BCB632DE-6AD4-40F1-944C-28C0E9BF62DC}" type="slidenum">
+              <a:rPr lang="en-US"/>
+              <a:t>23</a:t>
+            </a:fld>
+            <a:endParaRPr lang="en-US"/>
           </a:p>
         </p:txBody>
       </p:sp>
@@ -13291,7 +14746,7 @@
 </p:sld>
 </file>
 
-<file path=ppt/slides/slide23.xml><?xml version="1.0" encoding="utf-8"?>
+<file path=ppt/slides/slide24.xml><?xml version="1.0" encoding="utf-8"?>
 <p:sld xmlns:a="http://schemas.openxmlformats.org/drawingml/2006/main" xmlns:r="http://schemas.openxmlformats.org/officeDocument/2006/relationships" xmlns:p="http://schemas.openxmlformats.org/presentationml/2006/main">
   <p:cSld name="Slide 26">
     <p:bg>
@@ -13437,7 +14892,7 @@
                 </a:solidFill>
                 <a:latin typeface="Cambria"/>
               </a:rPr>
-              <a:t>Automation Plane — Actions Importer</a:t>
+              <a:t>Automation Plane — GitHub Actions Importer</a:t>
             </a:r>
             <a:endParaRPr lang="en-US" sz="3200" dirty="0"/>
           </a:p>
@@ -13544,6 +14999,28 @@
           <a:p>
             <a:pPr marL="285750" indent="-285750">
               <a:lnSpc>
+                <a:spcPct val="100000"/>
+              </a:lnSpc>
+              <a:spcAft>
+                <a:spcPts val="800"/>
+              </a:spcAft>
+              <a:buSzPct val="100000"/>
+              <a:buFont typeface="Arial" panose="020B0604020202020204" pitchFamily="34" charset="0"/>
+              <a:buChar char="•"/>
+            </a:pPr>
+            <a:r>
+              <a:rPr lang="en-US" sz="1450" dirty="0">
+                <a:solidFill>
+                  <a:srgbClr val="2B2B2B"/>
+                </a:solidFill>
+                <a:cs typeface="Cascadia Code" panose="020B0609020000020004" pitchFamily="49" charset="0"/>
+              </a:rPr>
+              <a:t>GitHub CLI extension to migrate CI/CD pipelines</a:t>
+            </a:r>
+          </a:p>
+          <a:p>
+            <a:pPr marL="285750" indent="-285750">
+              <a:lnSpc>
                 <a:spcPct val="110000"/>
               </a:lnSpc>
               <a:spcAft>
@@ -13558,9 +15035,19 @@
                 <a:solidFill>
                   <a:srgbClr val="2B2B2B"/>
                 </a:solidFill>
+                <a:latin typeface="Cascadia Code" panose="020B0609020000020004" pitchFamily="49" charset="0"/>
+                <a:cs typeface="Cascadia Code" panose="020B0609020000020004" pitchFamily="49" charset="0"/>
+              </a:rPr>
+              <a:t>audit</a:t>
+            </a:r>
+            <a:r>
+              <a:rPr lang="en-US" sz="1450" dirty="0">
+                <a:solidFill>
+                  <a:srgbClr val="2B2B2B"/>
+                </a:solidFill>
                 <a:latin typeface="Calibri"/>
               </a:rPr>
-              <a:t>audit buckets pipelines: successful, partially successful, unsupported, failed</a:t>
+              <a:t> buckets pipelines: successful, partially successful, unsupported, failed</a:t>
             </a:r>
             <a:endParaRPr lang="en-US" sz="1450" dirty="0"/>
           </a:p>
@@ -13577,9 +15064,19 @@
                 <a:solidFill>
                   <a:srgbClr val="2B2B2B"/>
                 </a:solidFill>
+                <a:latin typeface="Cascadia Code" panose="020B0609020000020004" pitchFamily="49" charset="0"/>
+                <a:cs typeface="Cascadia Code" panose="020B0609020000020004" pitchFamily="49" charset="0"/>
+              </a:rPr>
+              <a:t>dry-run</a:t>
+            </a:r>
+            <a:r>
+              <a:rPr lang="en-US" sz="1450" dirty="0">
+                <a:solidFill>
+                  <a:srgbClr val="2B2B2B"/>
+                </a:solidFill>
                 <a:latin typeface="Calibri"/>
               </a:rPr>
-              <a:t>dry-run shows the candidate workflow before commit</a:t>
+              <a:t> shows the candidate workflow before commit</a:t>
             </a:r>
           </a:p>
           <a:p>
@@ -13597,7 +15094,7 @@
                 </a:solidFill>
                 <a:latin typeface="Calibri"/>
               </a:rPr>
-              <a:t>conversion handles supported constructs</a:t>
+              <a:t>The conversion handles supported constructs</a:t>
             </a:r>
           </a:p>
         </p:txBody>
@@ -13828,7 +15325,7 @@
               <a:buNone/>
             </a:pPr>
             <a:r>
-              <a:rPr sz="1050" b="1" spc="120">
+              <a:rPr sz="1250" b="1" spc="120">
                 <a:solidFill>
                   <a:srgbClr val="C1440E"/>
                 </a:solidFill>
@@ -13907,6 +15404,29 @@
           </a:prstGeom>
         </p:spPr>
       </p:pic>
+      <p:sp>
+        <p:nvSpPr>
+          <p:cNvPr id="16" name="Slide Number Placeholder"/>
+          <p:cNvSpPr>
+            <a:spLocks noGrp="1"/>
+          </p:cNvSpPr>
+          <p:nvPr>
+            <p:ph type="sldNum" sz="quarter" idx="10"/>
+          </p:nvPr>
+        </p:nvSpPr>
+        <p:spPr/>
+        <p:txBody>
+          <a:bodyPr/>
+          <a:lstStyle/>
+          <a:p>
+            <a:fld id="{BCB632DE-6AD4-40F1-944C-28C0E9BF62DC}" type="slidenum">
+              <a:rPr lang="en-US"/>
+              <a:t>24</a:t>
+            </a:fld>
+            <a:endParaRPr lang="en-US"/>
+          </a:p>
+        </p:txBody>
+      </p:sp>
     </p:spTree>
   </p:cSld>
   <p:clrMapOvr>
@@ -13915,7 +15435,7 @@
 </p:sld>
 </file>
 
-<file path=ppt/slides/slide24.xml><?xml version="1.0" encoding="utf-8"?>
+<file path=ppt/slides/slide25.xml><?xml version="1.0" encoding="utf-8"?>
 <p:sld xmlns:a="http://schemas.openxmlformats.org/drawingml/2006/main" xmlns:r="http://schemas.openxmlformats.org/officeDocument/2006/relationships" xmlns:p="http://schemas.openxmlformats.org/presentationml/2006/main">
   <p:cSld>
     <p:bg>
@@ -14480,9 +16000,9 @@
           <a:p>
             <a:pPr algn="l"/>
             <a:r>
-              <a:rPr sz="1050" b="1" spc="120">
-                <a:solidFill>
-                  <a:srgbClr val="8C6A3F"/>
+              <a:rPr sz="1250" b="1" spc="120">
+                <a:solidFill>
+                  <a:srgbClr val="E0B85C"/>
                 </a:solidFill>
                 <a:latin typeface="Calibri"/>
               </a:rPr>
@@ -14497,6 +16017,29 @@
               </a:rPr>
               <a:t>The workflow converted successfully. It merely has no credentials, no network route, and nowhere to deploy.</a:t>
             </a:r>
+          </a:p>
+        </p:txBody>
+      </p:sp>
+      <p:sp>
+        <p:nvSpPr>
+          <p:cNvPr id="14" name="Slide Number Placeholder"/>
+          <p:cNvSpPr>
+            <a:spLocks noGrp="1"/>
+          </p:cNvSpPr>
+          <p:nvPr>
+            <p:ph type="sldNum" sz="quarter" idx="10"/>
+          </p:nvPr>
+        </p:nvSpPr>
+        <p:spPr/>
+        <p:txBody>
+          <a:bodyPr/>
+          <a:lstStyle/>
+          <a:p>
+            <a:fld id="{BCB632DE-6AD4-40F1-944C-28C0E9BF62DC}" type="slidenum">
+              <a:rPr lang="en-US"/>
+              <a:t>25</a:t>
+            </a:fld>
+            <a:endParaRPr lang="en-US"/>
           </a:p>
         </p:txBody>
       </p:sp>
@@ -14508,7 +16051,7 @@
 </p:sld>
 </file>
 
-<file path=ppt/slides/slide25.xml><?xml version="1.0" encoding="utf-8"?>
+<file path=ppt/slides/slide26.xml><?xml version="1.0" encoding="utf-8"?>
 <p:sld xmlns:a="http://schemas.openxmlformats.org/drawingml/2006/main" xmlns:r="http://schemas.openxmlformats.org/officeDocument/2006/relationships" xmlns:p="http://schemas.openxmlformats.org/presentationml/2006/main">
   <p:cSld name="Slide 28">
     <p:bg>
@@ -15212,7 +16755,7 @@
         <p:spPr>
           <a:xfrm>
             <a:off x="548640" y="5120640"/>
-            <a:ext cx="9418320" cy="1417320"/>
+            <a:ext cx="11094720" cy="1417320"/>
           </a:xfrm>
           <a:prstGeom prst="rect">
             <a:avLst/>
@@ -15231,7 +16774,7 @@
               <a:buNone/>
             </a:pPr>
             <a:r>
-              <a:rPr sz="1050" b="1" spc="120">
+              <a:rPr sz="1250" b="1" spc="120" dirty="0">
                 <a:solidFill>
                   <a:srgbClr val="C1440E"/>
                 </a:solidFill>
@@ -15240,7 +16783,7 @@
               <a:t>DO THIS </a:t>
             </a:r>
             <a:r>
-              <a:rPr sz="1500" b="0">
+              <a:rPr sz="1500" b="0" dirty="0">
                 <a:solidFill>
                   <a:srgbClr val="2B2B2B"/>
                 </a:solidFill>
@@ -15254,105 +16797,24 @@
       </p:sp>
       <p:sp>
         <p:nvSpPr>
-          <p:cNvPr id="23" name="Shape 17"/>
-          <p:cNvSpPr/>
-          <p:nvPr/>
-        </p:nvSpPr>
-        <p:spPr>
-          <a:xfrm>
-            <a:off x="10122408" y="5184648"/>
-            <a:ext cx="923544" cy="923544"/>
-          </a:xfrm>
-          <a:prstGeom prst="roundRect">
-            <a:avLst>
-              <a:gd name="adj" fmla="val 5941"/>
-            </a:avLst>
-          </a:prstGeom>
-          <a:solidFill>
-            <a:srgbClr val="FFFFFF"/>
-          </a:solidFill>
-          <a:ln w="15875">
-            <a:solidFill>
-              <a:srgbClr val="1F3D2C"/>
-            </a:solidFill>
-            <a:prstDash val="solid"/>
-          </a:ln>
-        </p:spPr>
+          <p:cNvPr id="23" name="Slide Number Placeholder"/>
+          <p:cNvSpPr>
+            <a:spLocks noGrp="1"/>
+          </p:cNvSpPr>
+          <p:nvPr>
+            <p:ph type="sldNum" sz="quarter" idx="10"/>
+          </p:nvPr>
+        </p:nvSpPr>
+        <p:spPr/>
         <p:txBody>
           <a:bodyPr/>
           <a:lstStyle/>
           <a:p>
+            <a:fld id="{BCB632DE-6AD4-40F1-944C-28C0E9BF62DC}" type="slidenum">
+              <a:rPr lang="en-US"/>
+              <a:t>26</a:t>
+            </a:fld>
             <a:endParaRPr lang="en-US"/>
-          </a:p>
-        </p:txBody>
-      </p:sp>
-      <p:pic>
-        <p:nvPicPr>
-          <p:cNvPr id="24" name="Image 4" descr="/home/claude/pptx-build/assets/qr-sec3-ai-prompts.png"/>
-          <p:cNvPicPr>
-            <a:picLocks noChangeAspect="1"/>
-          </p:cNvPicPr>
-          <p:nvPr/>
-        </p:nvPicPr>
-        <p:blipFill>
-          <a:blip r:embed="rId7"/>
-          <a:stretch>
-            <a:fillRect/>
-          </a:stretch>
-        </p:blipFill>
-        <p:spPr>
-          <a:xfrm>
-            <a:off x="10195560" y="5257800"/>
-            <a:ext cx="777240" cy="777240"/>
-          </a:xfrm>
-          <a:prstGeom prst="rect">
-            <a:avLst/>
-          </a:prstGeom>
-        </p:spPr>
-      </p:pic>
-      <p:sp>
-        <p:nvSpPr>
-          <p:cNvPr id="25" name="Text 18"/>
-          <p:cNvSpPr txBox="1"/>
-          <p:nvPr/>
-        </p:nvSpPr>
-        <p:spPr>
-          <a:xfrm>
-            <a:off x="548640" y="6537960"/>
-            <a:ext cx="11064240" cy="274320"/>
-          </a:xfrm>
-          <a:prstGeom prst="rect">
-            <a:avLst/>
-          </a:prstGeom>
-          <a:noFill/>
-          <a:ln/>
-        </p:spPr>
-        <p:txBody>
-          <a:bodyPr wrap="square" lIns="0" tIns="0" rIns="0" bIns="0" rtlCol="0" anchor="ctr"/>
-          <a:lstStyle/>
-          <a:p>
-            <a:pPr marL="0" indent="0">
-              <a:buNone/>
-            </a:pPr>
-            <a:r>
-              <a:rPr sz="1000" b="1" spc="120">
-                <a:solidFill>
-                  <a:srgbClr val="C1440E"/>
-                </a:solidFill>
-                <a:latin typeface="Calibri"/>
-              </a:rPr>
-              <a:t>STATUS </a:t>
-            </a:r>
-            <a:r>
-              <a:rPr sz="1300">
-                <a:solidFill>
-                  <a:srgbClr val="2B2B2B"/>
-                </a:solidFill>
-                <a:latin typeface="Calibri"/>
-              </a:rPr>
-              <a:t>Prompts drafted and reviewed; not yet validated against a production pipeline.</a:t>
-            </a:r>
-            <a:endParaRPr lang="en-US" sz="1100" dirty="0"/>
           </a:p>
         </p:txBody>
       </p:sp>
@@ -15364,7 +16826,7 @@
 </p:sld>
 </file>
 
-<file path=ppt/slides/slide26.xml><?xml version="1.0" encoding="utf-8"?>
+<file path=ppt/slides/slide27.xml><?xml version="1.0" encoding="utf-8"?>
 <p:sld xmlns:a="http://schemas.openxmlformats.org/drawingml/2006/main" xmlns:r="http://schemas.openxmlformats.org/officeDocument/2006/relationships" xmlns:p="http://schemas.openxmlformats.org/presentationml/2006/main">
   <p:cSld name="Slide 29">
     <p:bg>
@@ -16327,9 +17789,9 @@
           <a:p>
             <a:pPr algn="l"/>
             <a:r>
-              <a:rPr sz="1050" b="1" spc="120">
-                <a:solidFill>
-                  <a:srgbClr val="8C6A3F"/>
+              <a:rPr sz="1250" b="1" spc="120">
+                <a:solidFill>
+                  <a:srgbClr val="E0B85C"/>
                 </a:solidFill>
                 <a:latin typeface="Calibri"/>
               </a:rPr>
@@ -16344,6 +17806,29 @@
               </a:rPr>
               <a:t>Finish line: first verified delivery — equivalent artifact + controlled deployment + traceability + rollback.</a:t>
             </a:r>
+          </a:p>
+        </p:txBody>
+      </p:sp>
+      <p:sp>
+        <p:nvSpPr>
+          <p:cNvPr id="30" name="Slide Number Placeholder"/>
+          <p:cNvSpPr>
+            <a:spLocks noGrp="1"/>
+          </p:cNvSpPr>
+          <p:nvPr>
+            <p:ph type="sldNum" sz="quarter" idx="10"/>
+          </p:nvPr>
+        </p:nvSpPr>
+        <p:spPr/>
+        <p:txBody>
+          <a:bodyPr/>
+          <a:lstStyle/>
+          <a:p>
+            <a:fld id="{BCB632DE-6AD4-40F1-944C-28C0E9BF62DC}" type="slidenum">
+              <a:rPr lang="en-US"/>
+              <a:t>27</a:t>
+            </a:fld>
+            <a:endParaRPr lang="en-US"/>
           </a:p>
         </p:txBody>
       </p:sp>
@@ -16355,7 +17840,7 @@
 </p:sld>
 </file>
 
-<file path=ppt/slides/slide27.xml><?xml version="1.0" encoding="utf-8"?>
+<file path=ppt/slides/slide28.xml><?xml version="1.0" encoding="utf-8"?>
 <p:sld xmlns:a="http://schemas.openxmlformats.org/drawingml/2006/main" xmlns:r="http://schemas.openxmlformats.org/officeDocument/2006/relationships" xmlns:p="http://schemas.openxmlformats.org/presentationml/2006/main">
   <p:cSld name="Slide 30">
     <p:bg>
@@ -16518,8 +18003,177 @@
             <a:off x="548640" y="1508760"/>
             <a:ext cx="3493008" cy="3886200"/>
           </a:xfrm>
-          <a:prstGeom prst="rect">
-            <a:avLst/>
+          <a:prstGeom prst="roundRect">
+            <a:avLst>
+              <a:gd name="adj" fmla="val 3141"/>
+            </a:avLst>
+          </a:prstGeom>
+          <a:solidFill>
+            <a:srgbClr val="F7F6F2"/>
+          </a:solidFill>
+          <a:ln w="12700">
+            <a:solidFill>
+              <a:srgbClr val="DDD8CC"/>
+            </a:solidFill>
+            <a:prstDash val="solid"/>
+          </a:ln>
+          <a:effectLst>
+            <a:outerShdw blurRad="76200" dist="25400" dir="5400000" algn="bl" rotWithShape="0">
+              <a:srgbClr val="000000">
+                <a:alpha val="12000"/>
+              </a:srgbClr>
+            </a:outerShdw>
+          </a:effectLst>
+        </p:spPr>
+        <p:txBody>
+          <a:bodyPr/>
+          <a:lstStyle/>
+          <a:p>
+            <a:endParaRPr lang="en-US"/>
+          </a:p>
+        </p:txBody>
+      </p:sp>
+      <p:sp>
+        <p:nvSpPr>
+          <p:cNvPr id="7" name="TextBox 6"/>
+          <p:cNvSpPr txBox="1"/>
+          <p:nvPr/>
+        </p:nvSpPr>
+        <p:spPr>
+          <a:xfrm>
+            <a:off x="749808" y="1737360"/>
+            <a:ext cx="3090672" cy="347472"/>
+          </a:xfrm>
+          <a:prstGeom prst="rect">
+            <a:avLst/>
+          </a:prstGeom>
+          <a:noFill/>
+        </p:spPr>
+        <p:txBody>
+          <a:bodyPr wrap="square" lIns="73152" tIns="73152" rIns="73152" bIns="73152" anchor="t">
+            <a:spAutoFit/>
+          </a:bodyPr>
+          <a:lstStyle/>
+          <a:p>
+            <a:pPr algn="ctr"/>
+            <a:r>
+              <a:rPr lang="en-US" sz="1450" b="1" i="0">
+                <a:solidFill>
+                  <a:srgbClr val="C1440E"/>
+                </a:solidFill>
+                <a:latin typeface="Calibri"/>
+              </a:rPr>
+              <a:t>REPOSITORY DATA</a:t>
+            </a:r>
+          </a:p>
+        </p:txBody>
+      </p:sp>
+      <p:sp>
+        <p:nvSpPr>
+          <p:cNvPr id="8" name="TextBox 7"/>
+          <p:cNvSpPr txBox="1">
+            <a:spLocks/>
+          </p:cNvSpPr>
+          <p:nvPr/>
+        </p:nvSpPr>
+        <p:spPr>
+          <a:xfrm>
+            <a:off x="768096" y="2304288"/>
+            <a:ext cx="3054096" cy="2697480"/>
+          </a:xfrm>
+          <a:prstGeom prst="rect">
+            <a:avLst/>
+          </a:prstGeom>
+          <a:noFill/>
+        </p:spPr>
+        <p:txBody>
+          <a:bodyPr wrap="square" lIns="36576" tIns="27432" rIns="36576" bIns="27432">
+            <a:spAutoFit/>
+          </a:bodyPr>
+          <a:lstStyle/>
+          <a:p>
+            <a:pPr>
+              <a:spcAft>
+                <a:spcPts val="500"/>
+              </a:spcAft>
+            </a:pPr>
+            <a:r>
+              <a:rPr lang="en-US" sz="1400" dirty="0">
+                <a:solidFill>
+                  <a:srgbClr val="2B2B2B"/>
+                </a:solidFill>
+                <a:latin typeface="Calibri"/>
+              </a:rPr>
+              <a:t>•  Branches, tags, and sampled commits reconciled</a:t>
+            </a:r>
+          </a:p>
+          <a:p>
+            <a:pPr>
+              <a:spcAft>
+                <a:spcPts val="500"/>
+              </a:spcAft>
+            </a:pPr>
+            <a:r>
+              <a:rPr lang="en-US" sz="1400" dirty="0">
+                <a:solidFill>
+                  <a:srgbClr val="2B2B2B"/>
+                </a:solidFill>
+                <a:latin typeface="Calibri"/>
+              </a:rPr>
+              <a:t>•  PR history and attachments sampled</a:t>
+            </a:r>
+          </a:p>
+          <a:p>
+            <a:pPr>
+              <a:spcAft>
+                <a:spcPts val="500"/>
+              </a:spcAft>
+            </a:pPr>
+            <a:r>
+              <a:rPr lang="en-US" sz="1400" dirty="0">
+                <a:solidFill>
+                  <a:srgbClr val="2B2B2B"/>
+                </a:solidFill>
+                <a:latin typeface="Calibri"/>
+              </a:rPr>
+              <a:t>•  Identity, teams, permissions, and visibility verified</a:t>
+            </a:r>
+          </a:p>
+          <a:p>
+            <a:pPr>
+              <a:spcAft>
+                <a:spcPts val="500"/>
+              </a:spcAft>
+            </a:pPr>
+            <a:r>
+              <a:rPr lang="en-US" sz="1400" dirty="0">
+                <a:solidFill>
+                  <a:srgbClr val="2B2B2B"/>
+                </a:solidFill>
+                <a:latin typeface="Calibri"/>
+              </a:rPr>
+              <a:t>•  Policies, LFS, and large-file behavior checked</a:t>
+            </a:r>
+          </a:p>
+        </p:txBody>
+      </p:sp>
+      <p:sp>
+        <p:nvSpPr>
+          <p:cNvPr id="9" name="Rectangle 8"/>
+          <p:cNvSpPr>
+            <a:spLocks/>
+          </p:cNvSpPr>
+          <p:nvPr/>
+        </p:nvSpPr>
+        <p:spPr>
+          <a:xfrm>
+            <a:off x="4279392" y="1508760"/>
+            <a:ext cx="3493008" cy="3886200"/>
+          </a:xfrm>
+          <a:prstGeom prst="roundRect">
+            <a:avLst>
+              <a:gd name="adj" fmla="val 3141"/>
+            </a:avLst>
           </a:prstGeom>
           <a:solidFill>
             <a:srgbClr val="F7F6F2"/>
@@ -16541,13 +18195,13 @@
       </p:sp>
       <p:sp>
         <p:nvSpPr>
-          <p:cNvPr id="7" name="TextBox 6"/>
+          <p:cNvPr id="10" name="TextBox 9"/>
           <p:cNvSpPr txBox="1"/>
           <p:nvPr/>
         </p:nvSpPr>
         <p:spPr>
           <a:xfrm>
-            <a:off x="749808" y="1737360"/>
+            <a:off x="4480559" y="1737360"/>
             <a:ext cx="3090672" cy="347472"/>
           </a:xfrm>
           <a:prstGeom prst="rect">
@@ -16569,23 +18223,21 @@
                 </a:solidFill>
                 <a:latin typeface="Calibri"/>
               </a:rPr>
-              <a:t>REPOSITORY DATA</a:t>
-            </a:r>
-          </a:p>
-        </p:txBody>
-      </p:sp>
-      <p:sp>
-        <p:nvSpPr>
-          <p:cNvPr id="8" name="TextBox 7"/>
-          <p:cNvSpPr txBox="1">
-            <a:spLocks/>
-          </p:cNvSpPr>
-          <p:nvPr/>
-        </p:nvSpPr>
-        <p:spPr>
-          <a:xfrm>
-            <a:off x="768096" y="2304288"/>
-            <a:ext cx="3054096" cy="2697480"/>
+              <a:t>AUTOMATION</a:t>
+            </a:r>
+          </a:p>
+        </p:txBody>
+      </p:sp>
+      <p:sp>
+        <p:nvSpPr>
+          <p:cNvPr id="11" name="TextBox 10"/>
+          <p:cNvSpPr txBox="1"/>
+          <p:nvPr/>
+        </p:nvSpPr>
+        <p:spPr>
+          <a:xfrm>
+            <a:off x="4498848" y="2304288"/>
+            <a:ext cx="3054096" cy="1540422"/>
           </a:xfrm>
           <a:prstGeom prst="rect">
             <a:avLst/>
@@ -16604,13 +18256,10 @@
               </a:spcAft>
             </a:pPr>
             <a:r>
-              <a:rPr lang="en-US" sz="1400">
-                <a:solidFill>
-                  <a:srgbClr val="2B2B2B"/>
-                </a:solidFill>
+              <a:rPr sz="1400">
                 <a:latin typeface="Calibri"/>
               </a:rPr>
-              <a:t>•  Branches, tags, and sampled commits reconciled</a:t>
+              <a:t>•  Equivalent build artifact produced</a:t>
             </a:r>
           </a:p>
           <a:p>
@@ -16620,13 +18269,10 @@
               </a:spcAft>
             </a:pPr>
             <a:r>
-              <a:rPr lang="en-US" sz="1400">
-                <a:solidFill>
-                  <a:srgbClr val="2B2B2B"/>
-                </a:solidFill>
+              <a:rPr sz="1400">
                 <a:latin typeface="Calibri"/>
               </a:rPr>
-              <a:t>•  PR history and attachments sampled</a:t>
+              <a:t>•  Secrets, OIDC, and permissions reviewed</a:t>
             </a:r>
           </a:p>
           <a:p>
@@ -16636,13 +18282,10 @@
               </a:spcAft>
             </a:pPr>
             <a:r>
-              <a:rPr lang="en-US" sz="1400">
-                <a:solidFill>
-                  <a:srgbClr val="2B2B2B"/>
-                </a:solidFill>
+              <a:rPr sz="1400">
                 <a:latin typeface="Calibri"/>
               </a:rPr>
-              <a:t>•  Identity, teams, permissions, and visibility verified</a:t>
+              <a:t>•  Runner and network path proven</a:t>
             </a:r>
           </a:p>
           <a:p>
@@ -16652,166 +18295,7 @@
               </a:spcAft>
             </a:pPr>
             <a:r>
-              <a:rPr lang="en-US" sz="1400">
-                <a:solidFill>
-                  <a:srgbClr val="2B2B2B"/>
-                </a:solidFill>
-                <a:latin typeface="Calibri"/>
-              </a:rPr>
-              <a:t>•  Policies, LFS, and large-file behavior checked</a:t>
-            </a:r>
-          </a:p>
-        </p:txBody>
-      </p:sp>
-      <p:sp>
-        <p:nvSpPr>
-          <p:cNvPr id="9" name="Rectangle 8"/>
-          <p:cNvSpPr>
-            <a:spLocks/>
-          </p:cNvSpPr>
-          <p:nvPr/>
-        </p:nvSpPr>
-        <p:spPr>
-          <a:xfrm>
-            <a:off x="4279392" y="1508760"/>
-            <a:ext cx="3493008" cy="3886200"/>
-          </a:xfrm>
-          <a:prstGeom prst="rect">
-            <a:avLst/>
-          </a:prstGeom>
-          <a:solidFill>
-            <a:srgbClr val="1F3D2C"/>
-          </a:solidFill>
-          <a:ln w="12700">
-            <a:solidFill>
-              <a:srgbClr val="DDD8CC"/>
-            </a:solidFill>
-          </a:ln>
-        </p:spPr>
-        <p:txBody>
-          <a:bodyPr rtlCol="0" anchor="ctr"/>
-          <a:lstStyle/>
-          <a:p>
-            <a:pPr algn="ctr"/>
-            <a:endParaRPr lang="en-US"/>
-          </a:p>
-        </p:txBody>
-      </p:sp>
-      <p:sp>
-        <p:nvSpPr>
-          <p:cNvPr id="10" name="TextBox 9"/>
-          <p:cNvSpPr txBox="1"/>
-          <p:nvPr/>
-        </p:nvSpPr>
-        <p:spPr>
-          <a:xfrm>
-            <a:off x="4480559" y="1737360"/>
-            <a:ext cx="3090672" cy="347472"/>
-          </a:xfrm>
-          <a:prstGeom prst="rect">
-            <a:avLst/>
-          </a:prstGeom>
-          <a:noFill/>
-        </p:spPr>
-        <p:txBody>
-          <a:bodyPr wrap="square" lIns="73152" tIns="73152" rIns="73152" bIns="73152" anchor="t">
-            <a:spAutoFit/>
-          </a:bodyPr>
-          <a:lstStyle/>
-          <a:p>
-            <a:pPr algn="ctr"/>
-            <a:r>
-              <a:rPr lang="en-US" sz="1450" b="1" i="0">
-                <a:solidFill>
-                  <a:srgbClr val="C1440E"/>
-                </a:solidFill>
-                <a:latin typeface="Calibri"/>
-              </a:rPr>
-              <a:t>AUTOMATION</a:t>
-            </a:r>
-          </a:p>
-        </p:txBody>
-      </p:sp>
-      <p:sp>
-        <p:nvSpPr>
-          <p:cNvPr id="11" name="TextBox 10"/>
-          <p:cNvSpPr txBox="1"/>
-          <p:nvPr/>
-        </p:nvSpPr>
-        <p:spPr>
-          <a:xfrm>
-            <a:off x="4498848" y="2304288"/>
-            <a:ext cx="3054096" cy="2697480"/>
-          </a:xfrm>
-          <a:prstGeom prst="rect">
-            <a:avLst/>
-          </a:prstGeom>
-          <a:noFill/>
-        </p:spPr>
-        <p:txBody>
-          <a:bodyPr wrap="square" lIns="36576" tIns="27432" rIns="36576" bIns="27432">
-            <a:spAutoFit/>
-          </a:bodyPr>
-          <a:lstStyle/>
-          <a:p>
-            <a:pPr>
-              <a:spcAft>
-                <a:spcPts val="500"/>
-              </a:spcAft>
-            </a:pPr>
-            <a:r>
               <a:rPr sz="1400">
-                <a:solidFill>
-                  <a:srgbClr val="F5F5F0"/>
-                </a:solidFill>
-                <a:latin typeface="Calibri"/>
-              </a:rPr>
-              <a:t>•  Equivalent build artifact produced</a:t>
-            </a:r>
-          </a:p>
-          <a:p>
-            <a:pPr>
-              <a:spcAft>
-                <a:spcPts val="500"/>
-              </a:spcAft>
-            </a:pPr>
-            <a:r>
-              <a:rPr sz="1400">
-                <a:solidFill>
-                  <a:srgbClr val="F5F5F0"/>
-                </a:solidFill>
-                <a:latin typeface="Calibri"/>
-              </a:rPr>
-              <a:t>•  Secrets, OIDC, and permissions reviewed</a:t>
-            </a:r>
-          </a:p>
-          <a:p>
-            <a:pPr>
-              <a:spcAft>
-                <a:spcPts val="500"/>
-              </a:spcAft>
-            </a:pPr>
-            <a:r>
-              <a:rPr sz="1400">
-                <a:solidFill>
-                  <a:srgbClr val="F5F5F0"/>
-                </a:solidFill>
-                <a:latin typeface="Calibri"/>
-              </a:rPr>
-              <a:t>•  Runner and network path proven</a:t>
-            </a:r>
-          </a:p>
-          <a:p>
-            <a:pPr>
-              <a:spcAft>
-                <a:spcPts val="500"/>
-              </a:spcAft>
-            </a:pPr>
-            <a:r>
-              <a:rPr sz="1400">
-                <a:solidFill>
-                  <a:srgbClr val="F5F5F0"/>
-                </a:solidFill>
                 <a:latin typeface="Calibri"/>
               </a:rPr>
               <a:t>•  Environments, approvals, and deployment exercised</a:t>
@@ -16830,8 +18314,10 @@
             <a:off x="8010144" y="1508760"/>
             <a:ext cx="3493008" cy="3886200"/>
           </a:xfrm>
-          <a:prstGeom prst="rect">
-            <a:avLst/>
+          <a:prstGeom prst="roundRect">
+            <a:avLst>
+              <a:gd name="adj" fmla="val 3141"/>
+            </a:avLst>
           </a:prstGeom>
           <a:solidFill>
             <a:srgbClr val="F7F6F2"/>
@@ -17030,9 +18516,9 @@
           <a:p>
             <a:pPr algn="l"/>
             <a:r>
-              <a:rPr sz="1050" b="1" spc="120">
-                <a:solidFill>
-                  <a:srgbClr val="8C6A3F"/>
+              <a:rPr sz="1250" b="1" spc="120">
+                <a:solidFill>
+                  <a:srgbClr val="E0B85C"/>
                 </a:solidFill>
                 <a:latin typeface="Calibri"/>
               </a:rPr>
@@ -17047,6 +18533,29 @@
               </a:rPr>
               <a:t>Definition of done: verified delivery, traceability, operational ownership, and reversibility.</a:t>
             </a:r>
+          </a:p>
+        </p:txBody>
+      </p:sp>
+      <p:sp>
+        <p:nvSpPr>
+          <p:cNvPr id="17" name="Slide Number Placeholder"/>
+          <p:cNvSpPr>
+            <a:spLocks noGrp="1"/>
+          </p:cNvSpPr>
+          <p:nvPr>
+            <p:ph type="sldNum" sz="quarter" idx="10"/>
+          </p:nvPr>
+        </p:nvSpPr>
+        <p:spPr/>
+        <p:txBody>
+          <a:bodyPr/>
+          <a:lstStyle/>
+          <a:p>
+            <a:fld id="{BCB632DE-6AD4-40F1-944C-28C0E9BF62DC}" type="slidenum">
+              <a:rPr lang="en-US"/>
+              <a:t>28</a:t>
+            </a:fld>
+            <a:endParaRPr lang="en-US"/>
           </a:p>
         </p:txBody>
       </p:sp>
@@ -17058,7 +18567,7 @@
 </p:sld>
 </file>
 
-<file path=ppt/slides/slide28.xml><?xml version="1.0" encoding="utf-8"?>
+<file path=ppt/slides/slide29.xml><?xml version="1.0" encoding="utf-8"?>
 <p:sld xmlns:a="http://schemas.openxmlformats.org/drawingml/2006/main" xmlns:r="http://schemas.openxmlformats.org/officeDocument/2006/relationships" xmlns:p="http://schemas.openxmlformats.org/presentationml/2006/main">
   <p:cSld name="Slide 31">
     <p:bg>
@@ -17149,7 +18658,7 @@
             <a:r>
               <a:rPr lang="en-US" sz="1900" i="1" dirty="0">
                 <a:solidFill>
-                  <a:srgbClr val="8C6A3F"/>
+                  <a:srgbClr val="E0B85C"/>
                 </a:solidFill>
                 <a:latin typeface="Calibri" pitchFamily="34" charset="0"/>
                 <a:ea typeface="Calibri" pitchFamily="34" charset="-122"/>
@@ -17161,236 +18670,34 @@
           </a:p>
         </p:txBody>
       </p:sp>
-    </p:spTree>
-  </p:cSld>
-  <p:clrMapOvr>
-    <a:masterClrMapping/>
-  </p:clrMapOvr>
-</p:sld>
-</file>
-
-<file path=ppt/slides/slide29.xml><?xml version="1.0" encoding="utf-8"?>
-<p:sld xmlns:a="http://schemas.openxmlformats.org/drawingml/2006/main" xmlns:r="http://schemas.openxmlformats.org/officeDocument/2006/relationships" xmlns:p="http://schemas.openxmlformats.org/presentationml/2006/main">
-  <p:cSld name="Slide 32">
-    <p:bg>
-      <p:bgPr>
-        <a:solidFill>
-          <a:srgbClr val="1F3D2C"/>
-        </a:solidFill>
-        <a:effectLst/>
-      </p:bgPr>
-    </p:bg>
-    <p:spTree>
-      <p:nvGrpSpPr>
-        <p:cNvPr id="1" name=""/>
-        <p:cNvGrpSpPr/>
-        <p:nvPr/>
-      </p:nvGrpSpPr>
-      <p:grpSpPr>
-        <a:xfrm>
-          <a:off x="0" y="0"/>
-          <a:ext cx="0" cy="0"/>
-          <a:chOff x="0" y="0"/>
-          <a:chExt cx="0" cy="0"/>
-        </a:xfrm>
-      </p:grpSpPr>
-      <p:sp>
-        <p:nvSpPr>
-          <p:cNvPr id="2" name="Shape 0"/>
-          <p:cNvSpPr/>
-          <p:nvPr/>
-        </p:nvSpPr>
-        <p:spPr>
-          <a:xfrm>
-            <a:off x="0" y="0"/>
-            <a:ext cx="12191695" cy="1234440"/>
-          </a:xfrm>
-          <a:prstGeom prst="rect">
-            <a:avLst/>
-          </a:prstGeom>
-          <a:solidFill>
-            <a:srgbClr val="142A1D"/>
-          </a:solidFill>
-          <a:ln/>
-        </p:spPr>
+      <p:sp>
+        <p:nvSpPr>
+          <p:cNvPr id="4" name="Slide Number Placeholder"/>
+          <p:cNvSpPr>
+            <a:spLocks noGrp="1"/>
+          </p:cNvSpPr>
+          <p:nvPr>
+            <p:ph type="sldNum" sz="quarter" idx="10"/>
+          </p:nvPr>
+        </p:nvSpPr>
+        <p:spPr/>
         <p:txBody>
           <a:bodyPr/>
           <a:lstStyle/>
           <a:p>
-            <a:endParaRPr lang="en-US"/>
-          </a:p>
-        </p:txBody>
-      </p:sp>
-      <p:sp>
-        <p:nvSpPr>
-          <p:cNvPr id="3" name="Text 1"/>
-          <p:cNvSpPr txBox="1"/>
-          <p:nvPr/>
-        </p:nvSpPr>
-        <p:spPr>
-          <a:xfrm>
-            <a:off x="548640" y="365760"/>
-            <a:ext cx="9144000" cy="502920"/>
-          </a:xfrm>
-          <a:prstGeom prst="rect">
-            <a:avLst/>
-          </a:prstGeom>
-          <a:noFill/>
-          <a:ln/>
-        </p:spPr>
-        <p:txBody>
-          <a:bodyPr wrap="square" lIns="0" tIns="0" rIns="0" bIns="0" rtlCol="0" anchor="ctr"/>
-          <a:lstStyle/>
-          <a:p>
-            <a:pPr marL="0" indent="0">
-              <a:buNone/>
-            </a:pPr>
-            <a:r>
-              <a:rPr lang="en-US" sz="1700" b="1" kern="0" spc="300" dirty="0">
-                <a:solidFill>
-                  <a:srgbClr val="8C6A3F"/>
-                </a:solidFill>
-                <a:latin typeface="Calibri" pitchFamily="34" charset="0"/>
-                <a:ea typeface="Calibri" pitchFamily="34" charset="-122"/>
-                <a:cs typeface="Calibri" pitchFamily="34" charset="-120"/>
-              </a:rPr>
-              <a:t>SECTION 4</a:t>
-            </a:r>
-            <a:endParaRPr lang="en-US" sz="1700" dirty="0"/>
-          </a:p>
-        </p:txBody>
-      </p:sp>
-      <p:pic>
-        <p:nvPicPr>
-          <p:cNvPr id="4" name="Image 0" descr="/home/claude/pptx-build/assets/icons/FaPaw-8C6A3F-300.png"/>
-          <p:cNvPicPr>
-            <a:picLocks noChangeAspect="1"/>
-          </p:cNvPicPr>
-          <p:nvPr/>
-        </p:nvPicPr>
-        <p:blipFill>
-          <a:blip r:embed="rId3">
-            <a:alphaModFix amt="85000"/>
-          </a:blip>
-          <a:stretch>
-            <a:fillRect/>
-          </a:stretch>
-        </p:blipFill>
-        <p:spPr>
-          <a:xfrm>
-            <a:off x="9692640" y="2194560"/>
-            <a:ext cx="1463040" cy="1463040"/>
-          </a:xfrm>
-          <a:prstGeom prst="rect">
-            <a:avLst/>
-          </a:prstGeom>
-        </p:spPr>
-      </p:pic>
-      <p:sp>
-        <p:nvSpPr>
-          <p:cNvPr id="5" name="Text 2"/>
-          <p:cNvSpPr txBox="1"/>
-          <p:nvPr/>
-        </p:nvSpPr>
-        <p:spPr>
-          <a:xfrm>
-            <a:off x="548640" y="2331720"/>
-            <a:ext cx="8778240" cy="1737360"/>
-          </a:xfrm>
-          <a:prstGeom prst="rect">
-            <a:avLst/>
-          </a:prstGeom>
-          <a:noFill/>
-          <a:ln/>
-        </p:spPr>
-        <p:txBody>
-          <a:bodyPr wrap="square" lIns="0" tIns="0" rIns="0" bIns="0" rtlCol="0" anchor="t"/>
-          <a:lstStyle/>
-          <a:p>
-            <a:pPr marL="0" indent="0">
-              <a:buNone/>
-            </a:pPr>
-            <a:r>
-              <a:rPr lang="en-US" sz="4400" b="1" dirty="0">
-                <a:solidFill>
-                  <a:srgbClr val="F5F5F0"/>
-                </a:solidFill>
-                <a:latin typeface="Cambria" pitchFamily="34" charset="0"/>
-                <a:ea typeface="Cambria" pitchFamily="34" charset="-122"/>
-                <a:cs typeface="Cambria" pitchFamily="34" charset="-120"/>
-              </a:rPr>
-              <a:t>Watch as the Scrum Master Approaches Carefully</a:t>
-            </a:r>
-            <a:endParaRPr lang="en-US" sz="4400" dirty="0"/>
-          </a:p>
-        </p:txBody>
-      </p:sp>
-      <p:sp>
-        <p:nvSpPr>
-          <p:cNvPr id="6" name="Text 3"/>
-          <p:cNvSpPr txBox="1"/>
-          <p:nvPr/>
-        </p:nvSpPr>
-        <p:spPr>
-          <a:xfrm>
-            <a:off x="548640" y="4160520"/>
-            <a:ext cx="8778240" cy="1234440"/>
-          </a:xfrm>
-          <a:prstGeom prst="rect">
-            <a:avLst/>
-          </a:prstGeom>
-          <a:noFill/>
-          <a:ln/>
-        </p:spPr>
-        <p:txBody>
-          <a:bodyPr wrap="square" lIns="0" tIns="0" rIns="0" bIns="0" rtlCol="0" anchor="t"/>
-          <a:lstStyle/>
-          <a:p>
-            <a:pPr marL="0" indent="0">
-              <a:buNone/>
-            </a:pPr>
-            <a:r>
-              <a:rPr lang="en-US" sz="2000" i="1" dirty="0">
-                <a:solidFill>
-                  <a:srgbClr val="8C6A3F"/>
-                </a:solidFill>
-                <a:latin typeface="Calibri" pitchFamily="34" charset="0"/>
-                <a:ea typeface="Calibri" pitchFamily="34" charset="-122"/>
-                <a:cs typeface="Calibri" pitchFamily="34" charset="-120"/>
-              </a:rPr>
-              <a:t>Sprint planning is a creature of habit, most comfortable in the enclosure it was raised in. Moving it means understanding exactly what it needs to survive the move.</a:t>
-            </a:r>
-            <a:endParaRPr lang="en-US" sz="2000" dirty="0"/>
-          </a:p>
-        </p:txBody>
-      </p:sp>
-      <p:sp>
-        <p:nvSpPr>
-          <p:cNvPr id="7" name="Shape 4"/>
-          <p:cNvSpPr/>
-          <p:nvPr/>
-        </p:nvSpPr>
-        <p:spPr>
-          <a:xfrm>
-            <a:off x="548640" y="6217920"/>
-            <a:ext cx="11064240" cy="0"/>
-          </a:xfrm>
-          <a:prstGeom prst="line">
-            <a:avLst/>
-          </a:prstGeom>
-          <a:noFill/>
-          <a:ln w="9525">
-            <a:solidFill>
-              <a:srgbClr val="8C6A3F"/>
-            </a:solidFill>
-            <a:prstDash val="dash"/>
-          </a:ln>
-        </p:spPr>
-        <p:txBody>
-          <a:bodyPr/>
-          <a:lstStyle/>
-          <a:p>
-            <a:endParaRPr lang="en-US"/>
+            <a:fld id="{BCB632DE-6AD4-40F1-944C-28C0E9BF62DC}" type="slidenum">
+              <a:rPr lang="en-US">
+                <a:solidFill>
+                  <a:srgbClr val="E0B85C"/>
+                </a:solidFill>
+              </a:rPr>
+              <a:t>29</a:t>
+            </a:fld>
+            <a:endParaRPr lang="en-US">
+              <a:solidFill>
+                <a:srgbClr val="E0B85C"/>
+              </a:solidFill>
+            </a:endParaRPr>
           </a:p>
         </p:txBody>
       </p:sp>
@@ -18249,6 +19556,29 @@
           </a:p>
         </p:txBody>
       </p:sp>
+      <p:sp>
+        <p:nvSpPr>
+          <p:cNvPr id="22" name="Slide Number Placeholder"/>
+          <p:cNvSpPr>
+            <a:spLocks noGrp="1"/>
+          </p:cNvSpPr>
+          <p:nvPr>
+            <p:ph type="sldNum" sz="quarter" idx="10"/>
+          </p:nvPr>
+        </p:nvSpPr>
+        <p:spPr/>
+        <p:txBody>
+          <a:bodyPr/>
+          <a:lstStyle/>
+          <a:p>
+            <a:fld id="{BCB632DE-6AD4-40F1-944C-28C0E9BF62DC}" type="slidenum">
+              <a:rPr lang="en-US"/>
+              <a:t>3</a:t>
+            </a:fld>
+            <a:endParaRPr lang="en-US"/>
+          </a:p>
+        </p:txBody>
+      </p:sp>
     </p:spTree>
   </p:cSld>
   <p:clrMapOvr>
@@ -18258,6 +19588,270 @@
 </file>
 
 <file path=ppt/slides/slide30.xml><?xml version="1.0" encoding="utf-8"?>
+<p:sld xmlns:a="http://schemas.openxmlformats.org/drawingml/2006/main" xmlns:r="http://schemas.openxmlformats.org/officeDocument/2006/relationships" xmlns:p="http://schemas.openxmlformats.org/presentationml/2006/main">
+  <p:cSld name="Slide 32">
+    <p:bg>
+      <p:bgPr>
+        <a:solidFill>
+          <a:srgbClr val="1F3D2C"/>
+        </a:solidFill>
+        <a:effectLst/>
+      </p:bgPr>
+    </p:bg>
+    <p:spTree>
+      <p:nvGrpSpPr>
+        <p:cNvPr id="1" name=""/>
+        <p:cNvGrpSpPr/>
+        <p:nvPr/>
+      </p:nvGrpSpPr>
+      <p:grpSpPr>
+        <a:xfrm>
+          <a:off x="0" y="0"/>
+          <a:ext cx="0" cy="0"/>
+          <a:chOff x="0" y="0"/>
+          <a:chExt cx="0" cy="0"/>
+        </a:xfrm>
+      </p:grpSpPr>
+      <p:sp>
+        <p:nvSpPr>
+          <p:cNvPr id="2" name="Shape 0"/>
+          <p:cNvSpPr/>
+          <p:nvPr/>
+        </p:nvSpPr>
+        <p:spPr>
+          <a:xfrm>
+            <a:off x="0" y="0"/>
+            <a:ext cx="12191695" cy="1234440"/>
+          </a:xfrm>
+          <a:prstGeom prst="rect">
+            <a:avLst/>
+          </a:prstGeom>
+          <a:solidFill>
+            <a:srgbClr val="142A1D"/>
+          </a:solidFill>
+          <a:ln/>
+        </p:spPr>
+        <p:txBody>
+          <a:bodyPr/>
+          <a:lstStyle/>
+          <a:p>
+            <a:endParaRPr lang="en-US"/>
+          </a:p>
+        </p:txBody>
+      </p:sp>
+      <p:sp>
+        <p:nvSpPr>
+          <p:cNvPr id="3" name="Text 1"/>
+          <p:cNvSpPr txBox="1"/>
+          <p:nvPr/>
+        </p:nvSpPr>
+        <p:spPr>
+          <a:xfrm>
+            <a:off x="548640" y="365760"/>
+            <a:ext cx="9144000" cy="502920"/>
+          </a:xfrm>
+          <a:prstGeom prst="rect">
+            <a:avLst/>
+          </a:prstGeom>
+          <a:noFill/>
+          <a:ln/>
+        </p:spPr>
+        <p:txBody>
+          <a:bodyPr wrap="square" lIns="0" tIns="0" rIns="0" bIns="0" rtlCol="0" anchor="ctr"/>
+          <a:lstStyle/>
+          <a:p>
+            <a:pPr marL="0" indent="0">
+              <a:buNone/>
+            </a:pPr>
+            <a:r>
+              <a:rPr lang="en-US" sz="1700" b="1" kern="0" spc="300" dirty="0">
+                <a:solidFill>
+                  <a:srgbClr val="E0B85C"/>
+                </a:solidFill>
+                <a:latin typeface="Calibri" pitchFamily="34" charset="0"/>
+                <a:ea typeface="Calibri" pitchFamily="34" charset="-122"/>
+                <a:cs typeface="Calibri" pitchFamily="34" charset="-120"/>
+              </a:rPr>
+              <a:t>SECTION 4</a:t>
+            </a:r>
+            <a:endParaRPr lang="en-US" sz="1700" dirty="0"/>
+          </a:p>
+        </p:txBody>
+      </p:sp>
+      <p:pic>
+        <p:nvPicPr>
+          <p:cNvPr id="4" name="Image 0" descr="/home/claude/pptx-build/assets/icons/FaPaw-8C6A3F-300.png"/>
+          <p:cNvPicPr>
+            <a:picLocks noChangeAspect="1"/>
+          </p:cNvPicPr>
+          <p:nvPr/>
+        </p:nvPicPr>
+        <p:blipFill>
+          <a:blip r:embed="rId3">
+            <a:alphaModFix amt="85000"/>
+          </a:blip>
+          <a:stretch>
+            <a:fillRect/>
+          </a:stretch>
+        </p:blipFill>
+        <p:spPr>
+          <a:xfrm>
+            <a:off x="9692640" y="2194560"/>
+            <a:ext cx="1463040" cy="1463040"/>
+          </a:xfrm>
+          <a:prstGeom prst="rect">
+            <a:avLst/>
+          </a:prstGeom>
+        </p:spPr>
+      </p:pic>
+      <p:sp>
+        <p:nvSpPr>
+          <p:cNvPr id="5" name="Text 2"/>
+          <p:cNvSpPr txBox="1"/>
+          <p:nvPr/>
+        </p:nvSpPr>
+        <p:spPr>
+          <a:xfrm>
+            <a:off x="548640" y="2331720"/>
+            <a:ext cx="8778240" cy="1737360"/>
+          </a:xfrm>
+          <a:prstGeom prst="rect">
+            <a:avLst/>
+          </a:prstGeom>
+          <a:noFill/>
+          <a:ln/>
+        </p:spPr>
+        <p:txBody>
+          <a:bodyPr wrap="square" lIns="0" tIns="0" rIns="0" bIns="0" rtlCol="0" anchor="t"/>
+          <a:lstStyle/>
+          <a:p>
+            <a:pPr marL="0" indent="0">
+              <a:buNone/>
+            </a:pPr>
+            <a:r>
+              <a:rPr lang="en-US" sz="4400" b="1" dirty="0">
+                <a:solidFill>
+                  <a:srgbClr val="F5F5F0"/>
+                </a:solidFill>
+                <a:latin typeface="Cambria" pitchFamily="34" charset="0"/>
+                <a:ea typeface="Cambria" pitchFamily="34" charset="-122"/>
+                <a:cs typeface="Cambria" pitchFamily="34" charset="-120"/>
+              </a:rPr>
+              <a:t>Watch as the Scrum Master Approaches Carefully</a:t>
+            </a:r>
+            <a:endParaRPr lang="en-US" sz="4400" dirty="0"/>
+          </a:p>
+        </p:txBody>
+      </p:sp>
+      <p:sp>
+        <p:nvSpPr>
+          <p:cNvPr id="6" name="Text 3"/>
+          <p:cNvSpPr txBox="1"/>
+          <p:nvPr/>
+        </p:nvSpPr>
+        <p:spPr>
+          <a:xfrm>
+            <a:off x="548640" y="4160520"/>
+            <a:ext cx="8778240" cy="1234440"/>
+          </a:xfrm>
+          <a:prstGeom prst="rect">
+            <a:avLst/>
+          </a:prstGeom>
+          <a:noFill/>
+          <a:ln/>
+        </p:spPr>
+        <p:txBody>
+          <a:bodyPr wrap="square" lIns="0" tIns="0" rIns="0" bIns="0" rtlCol="0" anchor="t"/>
+          <a:lstStyle/>
+          <a:p>
+            <a:pPr marL="0" indent="0">
+              <a:buNone/>
+            </a:pPr>
+            <a:r>
+              <a:rPr lang="en-US" sz="2000" i="1" dirty="0">
+                <a:solidFill>
+                  <a:srgbClr val="E0B85C"/>
+                </a:solidFill>
+                <a:latin typeface="Calibri" pitchFamily="34" charset="0"/>
+                <a:ea typeface="Calibri" pitchFamily="34" charset="-122"/>
+                <a:cs typeface="Calibri" pitchFamily="34" charset="-120"/>
+              </a:rPr>
+              <a:t>Sprint planning is a creature of habit, most comfortable in the enclosure it was raised in. Moving it means understanding exactly what it needs to survive the move.</a:t>
+            </a:r>
+            <a:endParaRPr lang="en-US" sz="2000" dirty="0"/>
+          </a:p>
+        </p:txBody>
+      </p:sp>
+      <p:sp>
+        <p:nvSpPr>
+          <p:cNvPr id="7" name="Shape 4"/>
+          <p:cNvSpPr/>
+          <p:nvPr/>
+        </p:nvSpPr>
+        <p:spPr>
+          <a:xfrm>
+            <a:off x="548640" y="6217920"/>
+            <a:ext cx="11064240" cy="0"/>
+          </a:xfrm>
+          <a:prstGeom prst="line">
+            <a:avLst/>
+          </a:prstGeom>
+          <a:noFill/>
+          <a:ln w="9525">
+            <a:solidFill>
+              <a:srgbClr val="8C6A3F"/>
+            </a:solidFill>
+            <a:prstDash val="dash"/>
+          </a:ln>
+        </p:spPr>
+        <p:txBody>
+          <a:bodyPr/>
+          <a:lstStyle/>
+          <a:p>
+            <a:endParaRPr lang="en-US"/>
+          </a:p>
+        </p:txBody>
+      </p:sp>
+      <p:sp>
+        <p:nvSpPr>
+          <p:cNvPr id="8" name="Slide Number Placeholder"/>
+          <p:cNvSpPr>
+            <a:spLocks noGrp="1"/>
+          </p:cNvSpPr>
+          <p:nvPr>
+            <p:ph type="sldNum" sz="quarter" idx="10"/>
+          </p:nvPr>
+        </p:nvSpPr>
+        <p:spPr/>
+        <p:txBody>
+          <a:bodyPr/>
+          <a:lstStyle/>
+          <a:p>
+            <a:fld id="{BCB632DE-6AD4-40F1-944C-28C0E9BF62DC}" type="slidenum">
+              <a:rPr lang="en-US">
+                <a:solidFill>
+                  <a:srgbClr val="E0B85C"/>
+                </a:solidFill>
+              </a:rPr>
+              <a:t>30</a:t>
+            </a:fld>
+            <a:endParaRPr lang="en-US">
+              <a:solidFill>
+                <a:srgbClr val="E0B85C"/>
+              </a:solidFill>
+            </a:endParaRPr>
+          </a:p>
+        </p:txBody>
+      </p:sp>
+    </p:spTree>
+  </p:cSld>
+  <p:clrMapOvr>
+    <a:masterClrMapping/>
+  </p:clrMapOvr>
+</p:sld>
+</file>
+
+<file path=ppt/slides/slide31.xml><?xml version="1.0" encoding="utf-8"?>
 <p:sld xmlns:a="http://schemas.openxmlformats.org/drawingml/2006/main" xmlns:r="http://schemas.openxmlformats.org/officeDocument/2006/relationships" xmlns:p="http://schemas.openxmlformats.org/presentationml/2006/main">
   <p:cSld name="Slide 33">
     <p:bg>
@@ -18732,6 +20326,29 @@
           </a:p>
         </p:txBody>
       </p:sp>
+      <p:sp>
+        <p:nvSpPr>
+          <p:cNvPr id="14" name="Slide Number Placeholder"/>
+          <p:cNvSpPr>
+            <a:spLocks noGrp="1"/>
+          </p:cNvSpPr>
+          <p:nvPr>
+            <p:ph type="sldNum" sz="quarter" idx="10"/>
+          </p:nvPr>
+        </p:nvSpPr>
+        <p:spPr/>
+        <p:txBody>
+          <a:bodyPr/>
+          <a:lstStyle/>
+          <a:p>
+            <a:fld id="{BCB632DE-6AD4-40F1-944C-28C0E9BF62DC}" type="slidenum">
+              <a:rPr lang="en-US"/>
+              <a:t>31</a:t>
+            </a:fld>
+            <a:endParaRPr lang="en-US"/>
+          </a:p>
+        </p:txBody>
+      </p:sp>
     </p:spTree>
   </p:cSld>
   <p:clrMapOvr>
@@ -18740,7 +20357,7 @@
 </p:sld>
 </file>
 
-<file path=ppt/slides/slide31.xml><?xml version="1.0" encoding="utf-8"?>
+<file path=ppt/slides/slide32.xml><?xml version="1.0" encoding="utf-8"?>
 <p:sld xmlns:a="http://schemas.openxmlformats.org/drawingml/2006/main" xmlns:r="http://schemas.openxmlformats.org/officeDocument/2006/relationships" xmlns:p="http://schemas.openxmlformats.org/presentationml/2006/main">
   <p:cSld name="Slide 34">
     <p:bg>
@@ -19155,9 +20772,9 @@
               <a:buNone/>
             </a:pPr>
             <a:r>
-              <a:rPr sz="1050" b="1" spc="120">
-                <a:solidFill>
-                  <a:srgbClr val="8C6A3F"/>
+              <a:rPr sz="1250" b="1" spc="120">
+                <a:solidFill>
+                  <a:srgbClr val="E0B85C"/>
                 </a:solidFill>
                 <a:latin typeface="Calibri"/>
               </a:rPr>
@@ -19372,6 +20989,29 @@
           </a:p>
         </p:txBody>
       </p:sp>
+      <p:sp>
+        <p:nvSpPr>
+          <p:cNvPr id="14" name="Slide Number Placeholder"/>
+          <p:cNvSpPr>
+            <a:spLocks noGrp="1"/>
+          </p:cNvSpPr>
+          <p:nvPr>
+            <p:ph type="sldNum" sz="quarter" idx="10"/>
+          </p:nvPr>
+        </p:nvSpPr>
+        <p:spPr/>
+        <p:txBody>
+          <a:bodyPr/>
+          <a:lstStyle/>
+          <a:p>
+            <a:fld id="{BCB632DE-6AD4-40F1-944C-28C0E9BF62DC}" type="slidenum">
+              <a:rPr lang="en-US"/>
+              <a:t>32</a:t>
+            </a:fld>
+            <a:endParaRPr lang="en-US"/>
+          </a:p>
+        </p:txBody>
+      </p:sp>
     </p:spTree>
   </p:cSld>
   <p:clrMapOvr>
@@ -19380,7 +21020,7 @@
 </p:sld>
 </file>
 
-<file path=ppt/slides/slide32.xml><?xml version="1.0" encoding="utf-8"?>
+<file path=ppt/slides/slide33.xml><?xml version="1.0" encoding="utf-8"?>
 <p:sld xmlns:a="http://schemas.openxmlformats.org/drawingml/2006/main" xmlns:r="http://schemas.openxmlformats.org/officeDocument/2006/relationships" xmlns:p="http://schemas.openxmlformats.org/presentationml/2006/main">
   <p:cSld name="Slide 36">
     <p:bg>
@@ -19760,7 +21400,7 @@
               <a:buNone/>
             </a:pPr>
             <a:r>
-              <a:rPr sz="1050" b="1" spc="120">
+              <a:rPr sz="1250" b="1" spc="120">
                 <a:solidFill>
                   <a:srgbClr val="C1440E"/>
                 </a:solidFill>
@@ -19778,6 +21418,29 @@
               <a:t>There’s no first-party tool that moves Azure Boards work items into GitHub Issues, and the data models don’t line up. Budget real manual mapping: this is a project, not a script you run once.</a:t>
             </a:r>
             <a:endParaRPr lang="en-US" sz="1500" dirty="0"/>
+          </a:p>
+        </p:txBody>
+      </p:sp>
+      <p:sp>
+        <p:nvSpPr>
+          <p:cNvPr id="10" name="Slide Number Placeholder"/>
+          <p:cNvSpPr>
+            <a:spLocks noGrp="1"/>
+          </p:cNvSpPr>
+          <p:nvPr>
+            <p:ph type="sldNum" sz="quarter" idx="10"/>
+          </p:nvPr>
+        </p:nvSpPr>
+        <p:spPr/>
+        <p:txBody>
+          <a:bodyPr/>
+          <a:lstStyle/>
+          <a:p>
+            <a:fld id="{BCB632DE-6AD4-40F1-944C-28C0E9BF62DC}" type="slidenum">
+              <a:rPr lang="en-US"/>
+              <a:t>33</a:t>
+            </a:fld>
+            <a:endParaRPr lang="en-US"/>
           </a:p>
         </p:txBody>
       </p:sp>
@@ -19789,7 +21452,7 @@
 </p:sld>
 </file>
 
-<file path=ppt/slides/slide33.xml><?xml version="1.0" encoding="utf-8"?>
+<file path=ppt/slides/slide34.xml><?xml version="1.0" encoding="utf-8"?>
 <p:sld xmlns:a="http://schemas.openxmlformats.org/drawingml/2006/main" xmlns:r="http://schemas.openxmlformats.org/officeDocument/2006/relationships" xmlns:p="http://schemas.openxmlformats.org/presentationml/2006/main">
   <p:cSld name="Slide 37">
     <p:bg>
@@ -20050,7 +21713,7 @@
             <a:r>
               <a:rPr lang="en-US" sz="1600" dirty="0">
                 <a:solidFill>
-                  <a:srgbClr val="8C6A3F"/>
+                  <a:srgbClr val="E0B85C"/>
                 </a:solidFill>
                 <a:latin typeface="Calibri" pitchFamily="34" charset="0"/>
                 <a:ea typeface="Calibri" pitchFamily="34" charset="-122"/>
@@ -20200,9 +21863,9 @@
               <a:buNone/>
             </a:pPr>
             <a:r>
-              <a:rPr sz="1050" b="1" spc="120">
-                <a:solidFill>
-                  <a:srgbClr val="8C6A3F"/>
+              <a:rPr sz="1250" b="1" spc="120">
+                <a:solidFill>
+                  <a:srgbClr val="E0B85C"/>
                 </a:solidFill>
                 <a:latin typeface="Calibri"/>
               </a:rPr>
@@ -20218,6 +21881,29 @@
               <a:t>Sometimes “it doesn’t move, and that’s fine” is the honest answer.</a:t>
             </a:r>
             <a:endParaRPr lang="en-US" sz="1900" dirty="0"/>
+          </a:p>
+        </p:txBody>
+      </p:sp>
+      <p:sp>
+        <p:nvSpPr>
+          <p:cNvPr id="13" name="Slide Number Placeholder"/>
+          <p:cNvSpPr>
+            <a:spLocks noGrp="1"/>
+          </p:cNvSpPr>
+          <p:nvPr>
+            <p:ph type="sldNum" sz="quarter" idx="10"/>
+          </p:nvPr>
+        </p:nvSpPr>
+        <p:spPr/>
+        <p:txBody>
+          <a:bodyPr/>
+          <a:lstStyle/>
+          <a:p>
+            <a:fld id="{BCB632DE-6AD4-40F1-944C-28C0E9BF62DC}" type="slidenum">
+              <a:rPr lang="en-US"/>
+              <a:t>34</a:t>
+            </a:fld>
+            <a:endParaRPr lang="en-US"/>
           </a:p>
         </p:txBody>
       </p:sp>
@@ -20229,7 +21915,7 @@
 </p:sld>
 </file>
 
-<file path=ppt/slides/slide34.xml><?xml version="1.0" encoding="utf-8"?>
+<file path=ppt/slides/slide35.xml><?xml version="1.0" encoding="utf-8"?>
 <p:sld xmlns:a="http://schemas.openxmlformats.org/drawingml/2006/main" xmlns:r="http://schemas.openxmlformats.org/officeDocument/2006/relationships" xmlns:p="http://schemas.openxmlformats.org/presentationml/2006/main">
   <p:cSld name="Slide 38">
     <p:bg>
@@ -20724,9 +22410,9 @@
               <a:buNone/>
             </a:pPr>
             <a:r>
-              <a:rPr sz="1050" b="1" spc="120">
-                <a:solidFill>
-                  <a:srgbClr val="8C6A3F"/>
+              <a:rPr sz="1250" b="1" spc="120">
+                <a:solidFill>
+                  <a:srgbClr val="E0B85C"/>
                 </a:solidFill>
                 <a:latin typeface="Calibri"/>
               </a:rPr>
@@ -20742,6 +22428,29 @@
               <a:t>Not “Azure Boards forever”: just don’t default to GitHub Issues because the code moved. Where you plan work is a separate decision from where the code lives.</a:t>
             </a:r>
             <a:endParaRPr lang="en-US" sz="1800" dirty="0"/>
+          </a:p>
+        </p:txBody>
+      </p:sp>
+      <p:sp>
+        <p:nvSpPr>
+          <p:cNvPr id="15" name="Slide Number Placeholder"/>
+          <p:cNvSpPr>
+            <a:spLocks noGrp="1"/>
+          </p:cNvSpPr>
+          <p:nvPr>
+            <p:ph type="sldNum" sz="quarter" idx="10"/>
+          </p:nvPr>
+        </p:nvSpPr>
+        <p:spPr/>
+        <p:txBody>
+          <a:bodyPr/>
+          <a:lstStyle/>
+          <a:p>
+            <a:fld id="{BCB632DE-6AD4-40F1-944C-28C0E9BF62DC}" type="slidenum">
+              <a:rPr lang="en-US"/>
+              <a:t>35</a:t>
+            </a:fld>
+            <a:endParaRPr lang="en-US"/>
           </a:p>
         </p:txBody>
       </p:sp>
@@ -20753,7 +22462,7 @@
 </p:sld>
 </file>
 
-<file path=ppt/slides/slide35.xml><?xml version="1.0" encoding="utf-8"?>
+<file path=ppt/slides/slide36.xml><?xml version="1.0" encoding="utf-8"?>
 <p:sld xmlns:a="http://schemas.openxmlformats.org/drawingml/2006/main" xmlns:r="http://schemas.openxmlformats.org/officeDocument/2006/relationships" xmlns:p="http://schemas.openxmlformats.org/presentationml/2006/main">
   <p:cSld name="Slide 40">
     <p:bg>
@@ -20844,7 +22553,7 @@
             <a:r>
               <a:rPr lang="en-US" sz="1900" i="1" dirty="0">
                 <a:solidFill>
-                  <a:srgbClr val="8C6A3F"/>
+                  <a:srgbClr val="E0B85C"/>
                 </a:solidFill>
                 <a:latin typeface="Calibri" pitchFamily="34" charset="0"/>
                 <a:ea typeface="Calibri" pitchFamily="34" charset="-122"/>
@@ -20853,6 +22562,37 @@
               <a:t>One quick question before we leave Section 4 — Watch as the Scrum Master Approaches Carefully</a:t>
             </a:r>
             <a:endParaRPr lang="en-US" sz="1900" dirty="0"/>
+          </a:p>
+        </p:txBody>
+      </p:sp>
+      <p:sp>
+        <p:nvSpPr>
+          <p:cNvPr id="4" name="Slide Number Placeholder"/>
+          <p:cNvSpPr>
+            <a:spLocks noGrp="1"/>
+          </p:cNvSpPr>
+          <p:nvPr>
+            <p:ph type="sldNum" sz="quarter" idx="10"/>
+          </p:nvPr>
+        </p:nvSpPr>
+        <p:spPr/>
+        <p:txBody>
+          <a:bodyPr/>
+          <a:lstStyle/>
+          <a:p>
+            <a:fld id="{BCB632DE-6AD4-40F1-944C-28C0E9BF62DC}" type="slidenum">
+              <a:rPr lang="en-US">
+                <a:solidFill>
+                  <a:srgbClr val="E0B85C"/>
+                </a:solidFill>
+              </a:rPr>
+              <a:t>36</a:t>
+            </a:fld>
+            <a:endParaRPr lang="en-US">
+              <a:solidFill>
+                <a:srgbClr val="E0B85C"/>
+              </a:solidFill>
+            </a:endParaRPr>
           </a:p>
         </p:txBody>
       </p:sp>
@@ -20864,7 +22604,7 @@
 </p:sld>
 </file>
 
-<file path=ppt/slides/slide36.xml><?xml version="1.0" encoding="utf-8"?>
+<file path=ppt/slides/slide37.xml><?xml version="1.0" encoding="utf-8"?>
 <p:sld xmlns:a="http://schemas.openxmlformats.org/drawingml/2006/main" xmlns:r="http://schemas.openxmlformats.org/officeDocument/2006/relationships" xmlns:p="http://schemas.openxmlformats.org/presentationml/2006/main">
   <p:cSld name="Slide 41">
     <p:bg>
@@ -20943,7 +22683,7 @@
             <a:r>
               <a:rPr lang="en-US" sz="1700" b="1" kern="0" spc="300" dirty="0">
                 <a:solidFill>
-                  <a:srgbClr val="8C6A3F"/>
+                  <a:srgbClr val="E0B85C"/>
                 </a:solidFill>
                 <a:latin typeface="Calibri" pitchFamily="34" charset="0"/>
                 <a:ea typeface="Calibri" pitchFamily="34" charset="-122"/>
@@ -21047,7 +22787,7 @@
             <a:r>
               <a:rPr lang="en-US" sz="2000" i="1" dirty="0">
                 <a:solidFill>
-                  <a:srgbClr val="8C6A3F"/>
+                  <a:srgbClr val="E0B85C"/>
                 </a:solidFill>
                 <a:latin typeface="Calibri" pitchFamily="34" charset="0"/>
                 <a:ea typeface="Calibri" pitchFamily="34" charset="-122"/>
@@ -21086,6 +22826,37 @@
           <a:lstStyle/>
           <a:p>
             <a:endParaRPr lang="en-US"/>
+          </a:p>
+        </p:txBody>
+      </p:sp>
+      <p:sp>
+        <p:nvSpPr>
+          <p:cNvPr id="8" name="Slide Number Placeholder"/>
+          <p:cNvSpPr>
+            <a:spLocks noGrp="1"/>
+          </p:cNvSpPr>
+          <p:nvPr>
+            <p:ph type="sldNum" sz="quarter" idx="10"/>
+          </p:nvPr>
+        </p:nvSpPr>
+        <p:spPr/>
+        <p:txBody>
+          <a:bodyPr/>
+          <a:lstStyle/>
+          <a:p>
+            <a:fld id="{BCB632DE-6AD4-40F1-944C-28C0E9BF62DC}" type="slidenum">
+              <a:rPr lang="en-US">
+                <a:solidFill>
+                  <a:srgbClr val="E0B85C"/>
+                </a:solidFill>
+              </a:rPr>
+              <a:t>37</a:t>
+            </a:fld>
+            <a:endParaRPr lang="en-US">
+              <a:solidFill>
+                <a:srgbClr val="E0B85C"/>
+              </a:solidFill>
+            </a:endParaRPr>
           </a:p>
         </p:txBody>
       </p:sp>
@@ -21097,7 +22868,7 @@
 </p:sld>
 </file>
 
-<file path=ppt/slides/slide37.xml><?xml version="1.0" encoding="utf-8"?>
+<file path=ppt/slides/slide38.xml><?xml version="1.0" encoding="utf-8"?>
 <p:sld xmlns:a="http://schemas.openxmlformats.org/drawingml/2006/main" xmlns:r="http://schemas.openxmlformats.org/officeDocument/2006/relationships" xmlns:p="http://schemas.openxmlformats.org/presentationml/2006/main">
   <p:cSld name="Slide 42">
     <p:bg>
@@ -21585,6 +23356,29 @@
           </a:p>
         </p:txBody>
       </p:sp>
+      <p:sp>
+        <p:nvSpPr>
+          <p:cNvPr id="14" name="Slide Number Placeholder"/>
+          <p:cNvSpPr>
+            <a:spLocks noGrp="1"/>
+          </p:cNvSpPr>
+          <p:nvPr>
+            <p:ph type="sldNum" sz="quarter" idx="10"/>
+          </p:nvPr>
+        </p:nvSpPr>
+        <p:spPr/>
+        <p:txBody>
+          <a:bodyPr/>
+          <a:lstStyle/>
+          <a:p>
+            <a:fld id="{BCB632DE-6AD4-40F1-944C-28C0E9BF62DC}" type="slidenum">
+              <a:rPr lang="en-US"/>
+              <a:t>38</a:t>
+            </a:fld>
+            <a:endParaRPr lang="en-US"/>
+          </a:p>
+        </p:txBody>
+      </p:sp>
     </p:spTree>
   </p:cSld>
   <p:clrMapOvr>
@@ -21593,7 +23387,7 @@
 </p:sld>
 </file>
 
-<file path=ppt/slides/slide38.xml><?xml version="1.0" encoding="utf-8"?>
+<file path=ppt/slides/slide39.xml><?xml version="1.0" encoding="utf-8"?>
 <p:sld xmlns:a="http://schemas.openxmlformats.org/drawingml/2006/main" xmlns:r="http://schemas.openxmlformats.org/officeDocument/2006/relationships" xmlns:p="http://schemas.openxmlformats.org/presentationml/2006/main">
   <p:cSld name="Slide 43">
     <p:bg>
@@ -22736,9 +24530,9 @@
               <a:buNone/>
             </a:pPr>
             <a:r>
-              <a:rPr sz="1050" b="1" spc="120">
-                <a:solidFill>
-                  <a:srgbClr val="8C6A3F"/>
+              <a:rPr sz="1250" b="1" spc="120">
+                <a:solidFill>
+                  <a:srgbClr val="E0B85C"/>
                 </a:solidFill>
                 <a:latin typeface="Calibri"/>
               </a:rPr>
@@ -22757,980 +24551,26 @@
           </a:p>
         </p:txBody>
       </p:sp>
-    </p:spTree>
-  </p:cSld>
-  <p:clrMapOvr>
-    <a:masterClrMapping/>
-  </p:clrMapOvr>
-</p:sld>
-</file>
-
-<file path=ppt/slides/slide39.xml><?xml version="1.0" encoding="utf-8"?>
-<p:sld xmlns:a="http://schemas.openxmlformats.org/drawingml/2006/main" xmlns:r="http://schemas.openxmlformats.org/officeDocument/2006/relationships" xmlns:p="http://schemas.openxmlformats.org/presentationml/2006/main">
-  <p:cSld name="Slide 46">
-    <p:bg>
-      <p:bgPr>
-        <a:solidFill>
-          <a:srgbClr val="FFFFFF"/>
-        </a:solidFill>
-        <a:effectLst/>
-      </p:bgPr>
-    </p:bg>
-    <p:spTree>
-      <p:nvGrpSpPr>
-        <p:cNvPr id="1" name=""/>
-        <p:cNvGrpSpPr/>
-        <p:nvPr/>
-      </p:nvGrpSpPr>
-      <p:grpSpPr>
-        <a:xfrm>
-          <a:off x="0" y="0"/>
-          <a:ext cx="0" cy="0"/>
-          <a:chOff x="0" y="0"/>
-          <a:chExt cx="0" cy="0"/>
-        </a:xfrm>
-      </p:grpSpPr>
-      <p:sp>
-        <p:nvSpPr>
-          <p:cNvPr id="2" name="Shape 0"/>
-          <p:cNvSpPr/>
-          <p:nvPr/>
-        </p:nvSpPr>
-        <p:spPr>
-          <a:xfrm>
-            <a:off x="548640" y="457200"/>
-            <a:ext cx="566928" cy="566928"/>
-          </a:xfrm>
-          <a:prstGeom prst="ellipse">
-            <a:avLst/>
-          </a:prstGeom>
-          <a:solidFill>
-            <a:srgbClr val="C1440E"/>
-          </a:solidFill>
-          <a:ln/>
-        </p:spPr>
+      <p:sp>
+        <p:nvSpPr>
+          <p:cNvPr id="33" name="Slide Number Placeholder"/>
+          <p:cNvSpPr>
+            <a:spLocks noGrp="1"/>
+          </p:cNvSpPr>
+          <p:nvPr>
+            <p:ph type="sldNum" sz="quarter" idx="10"/>
+          </p:nvPr>
+        </p:nvSpPr>
+        <p:spPr/>
         <p:txBody>
           <a:bodyPr/>
           <a:lstStyle/>
           <a:p>
+            <a:fld id="{BCB632DE-6AD4-40F1-944C-28C0E9BF62DC}" type="slidenum">
+              <a:rPr lang="en-US"/>
+              <a:t>39</a:t>
+            </a:fld>
             <a:endParaRPr lang="en-US"/>
-          </a:p>
-        </p:txBody>
-      </p:sp>
-      <p:pic>
-        <p:nvPicPr>
-          <p:cNvPr id="3" name="Image 0" descr="/home/claude/pptx-build/assets/icons/FaRoute-FFFFFF-200.png"/>
-          <p:cNvPicPr>
-            <a:picLocks noChangeAspect="1"/>
-          </p:cNvPicPr>
-          <p:nvPr/>
-        </p:nvPicPr>
-        <p:blipFill>
-          <a:blip r:embed="rId3"/>
-          <a:stretch>
-            <a:fillRect/>
-          </a:stretch>
-        </p:blipFill>
-        <p:spPr>
-          <a:xfrm>
-            <a:off x="685800" y="594360"/>
-            <a:ext cx="292608" cy="292608"/>
-          </a:xfrm>
-          <a:prstGeom prst="rect">
-            <a:avLst/>
-          </a:prstGeom>
-        </p:spPr>
-      </p:pic>
-      <p:sp>
-        <p:nvSpPr>
-          <p:cNvPr id="4" name="Text 1"/>
-          <p:cNvSpPr txBox="1"/>
-          <p:nvPr/>
-        </p:nvSpPr>
-        <p:spPr>
-          <a:xfrm>
-            <a:off x="1234440" y="420624"/>
-            <a:ext cx="9875520" cy="320040"/>
-          </a:xfrm>
-          <a:prstGeom prst="rect">
-            <a:avLst/>
-          </a:prstGeom>
-          <a:noFill/>
-          <a:ln/>
-        </p:spPr>
-        <p:txBody>
-          <a:bodyPr wrap="square" lIns="0" tIns="0" rIns="0" bIns="0" rtlCol="0" anchor="ctr"/>
-          <a:lstStyle/>
-          <a:p>
-            <a:pPr marL="0" indent="0">
-              <a:buNone/>
-            </a:pPr>
-            <a:r>
-              <a:rPr lang="en-US" sz="1500" b="1" kern="0" spc="200" dirty="0">
-                <a:solidFill>
-                  <a:srgbClr val="C1440E"/>
-                </a:solidFill>
-                <a:latin typeface="Calibri" pitchFamily="34" charset="0"/>
-                <a:ea typeface="Calibri" pitchFamily="34" charset="-122"/>
-                <a:cs typeface="Calibri" pitchFamily="34" charset="-120"/>
-              </a:rPr>
-              <a:t>THE SENIOR ENGINEER DEFENDS AN ANCIENT PIPELINE</a:t>
-            </a:r>
-            <a:endParaRPr lang="en-US" sz="1500" dirty="0"/>
-          </a:p>
-        </p:txBody>
-      </p:sp>
-      <p:sp>
-        <p:nvSpPr>
-          <p:cNvPr id="5" name="Text 2"/>
-          <p:cNvSpPr txBox="1"/>
-          <p:nvPr/>
-        </p:nvSpPr>
-        <p:spPr>
-          <a:xfrm>
-            <a:off x="1234440" y="804672"/>
-            <a:ext cx="10515600" cy="658368"/>
-          </a:xfrm>
-          <a:prstGeom prst="rect">
-            <a:avLst/>
-          </a:prstGeom>
-          <a:noFill/>
-          <a:ln/>
-        </p:spPr>
-        <p:txBody>
-          <a:bodyPr wrap="square" lIns="0" tIns="0" rIns="0" bIns="0" rtlCol="0" anchor="t"/>
-          <a:lstStyle/>
-          <a:p>
-            <a:pPr marL="0" indent="0">
-              <a:buNone/>
-            </a:pPr>
-            <a:r>
-              <a:rPr lang="en-US" sz="2800" b="1" dirty="0">
-                <a:solidFill>
-                  <a:srgbClr val="1F3D2C"/>
-                </a:solidFill>
-                <a:latin typeface="Cambria" pitchFamily="34" charset="0"/>
-                <a:ea typeface="Cambria" pitchFamily="34" charset="-122"/>
-                <a:cs typeface="Cambria" pitchFamily="34" charset="-120"/>
-              </a:rPr>
-              <a:t>The Migration Sequence Is the Change-Management Plan</a:t>
-            </a:r>
-            <a:endParaRPr lang="en-US" sz="3200" dirty="0"/>
-          </a:p>
-        </p:txBody>
-      </p:sp>
-      <p:sp>
-        <p:nvSpPr>
-          <p:cNvPr id="6" name="Shape 3"/>
-          <p:cNvSpPr/>
-          <p:nvPr/>
-        </p:nvSpPr>
-        <p:spPr>
-          <a:xfrm>
-            <a:off x="548640" y="1691640"/>
-            <a:ext cx="2560320" cy="3794760"/>
-          </a:xfrm>
-          <a:prstGeom prst="roundRect">
-            <a:avLst>
-              <a:gd name="adj" fmla="val 4286"/>
-            </a:avLst>
-          </a:prstGeom>
-          <a:solidFill>
-            <a:srgbClr val="F7F6F2"/>
-          </a:solidFill>
-          <a:ln w="12700">
-            <a:solidFill>
-              <a:srgbClr val="DDD8CC"/>
-            </a:solidFill>
-            <a:prstDash val="solid"/>
-          </a:ln>
-          <a:effectLst>
-            <a:outerShdw blurRad="76200" dist="25400" dir="5400000" algn="bl" rotWithShape="0">
-              <a:srgbClr val="000000">
-                <a:alpha val="12000"/>
-              </a:srgbClr>
-            </a:outerShdw>
-          </a:effectLst>
-        </p:spPr>
-        <p:txBody>
-          <a:bodyPr/>
-          <a:lstStyle/>
-          <a:p>
-            <a:endParaRPr lang="en-US"/>
-          </a:p>
-        </p:txBody>
-      </p:sp>
-      <p:sp>
-        <p:nvSpPr>
-          <p:cNvPr id="7" name="Shape 4"/>
-          <p:cNvSpPr/>
-          <p:nvPr/>
-        </p:nvSpPr>
-        <p:spPr>
-          <a:xfrm>
-            <a:off x="777240" y="1920240"/>
-            <a:ext cx="457200" cy="457200"/>
-          </a:xfrm>
-          <a:prstGeom prst="ellipse">
-            <a:avLst/>
-          </a:prstGeom>
-          <a:solidFill>
-            <a:srgbClr val="C1440E"/>
-          </a:solidFill>
-          <a:ln/>
-        </p:spPr>
-        <p:txBody>
-          <a:bodyPr/>
-          <a:lstStyle/>
-          <a:p>
-            <a:endParaRPr lang="en-US"/>
-          </a:p>
-        </p:txBody>
-      </p:sp>
-      <p:sp>
-        <p:nvSpPr>
-          <p:cNvPr id="8" name="Text 5"/>
-          <p:cNvSpPr txBox="1"/>
-          <p:nvPr/>
-        </p:nvSpPr>
-        <p:spPr>
-          <a:xfrm>
-            <a:off x="777240" y="1920240"/>
-            <a:ext cx="457200" cy="457200"/>
-          </a:xfrm>
-          <a:prstGeom prst="rect">
-            <a:avLst/>
-          </a:prstGeom>
-          <a:noFill/>
-          <a:ln/>
-        </p:spPr>
-        <p:txBody>
-          <a:bodyPr wrap="square" lIns="0" tIns="0" rIns="0" bIns="0" rtlCol="0" anchor="ctr"/>
-          <a:lstStyle/>
-          <a:p>
-            <a:pPr marL="0" indent="0" algn="ctr">
-              <a:buNone/>
-            </a:pPr>
-            <a:r>
-              <a:rPr lang="en-US" sz="1700" b="1" dirty="0">
-                <a:solidFill>
-                  <a:srgbClr val="F5F5F0"/>
-                </a:solidFill>
-                <a:latin typeface="Cambria" pitchFamily="34" charset="0"/>
-                <a:ea typeface="Cambria" pitchFamily="34" charset="-122"/>
-                <a:cs typeface="Cambria" pitchFamily="34" charset="-120"/>
-              </a:rPr>
-              <a:t>1</a:t>
-            </a:r>
-            <a:endParaRPr lang="en-US" sz="1700" dirty="0"/>
-          </a:p>
-        </p:txBody>
-      </p:sp>
-      <p:sp>
-        <p:nvSpPr>
-          <p:cNvPr id="9" name="Text 6"/>
-          <p:cNvSpPr txBox="1"/>
-          <p:nvPr/>
-        </p:nvSpPr>
-        <p:spPr>
-          <a:xfrm>
-            <a:off x="731520" y="2514600"/>
-            <a:ext cx="2194560" cy="822960"/>
-          </a:xfrm>
-          <a:prstGeom prst="rect">
-            <a:avLst/>
-          </a:prstGeom>
-          <a:noFill/>
-          <a:ln/>
-        </p:spPr>
-        <p:txBody>
-          <a:bodyPr wrap="square" lIns="0" tIns="0" rIns="0" bIns="0" rtlCol="0" anchor="ctr"/>
-          <a:lstStyle/>
-          <a:p>
-            <a:pPr marL="0" indent="0" algn="l">
-              <a:buNone/>
-            </a:pPr>
-            <a:r>
-              <a:rPr lang="en-US" sz="1470" b="1">
-                <a:solidFill>
-                  <a:srgbClr val="1F3D2C"/>
-                </a:solidFill>
-                <a:latin typeface="Cambria"/>
-              </a:rPr>
-              <a:t>Define authority &amp; traceability</a:t>
-            </a:r>
-            <a:endParaRPr lang="en-US" sz="1550"/>
-          </a:p>
-        </p:txBody>
-      </p:sp>
-      <p:sp>
-        <p:nvSpPr>
-          <p:cNvPr id="10" name="Text 7"/>
-          <p:cNvSpPr txBox="1"/>
-          <p:nvPr/>
-        </p:nvSpPr>
-        <p:spPr>
-          <a:xfrm>
-            <a:off x="731520" y="3337560"/>
-            <a:ext cx="2194560" cy="2011680"/>
-          </a:xfrm>
-          <a:prstGeom prst="rect">
-            <a:avLst/>
-          </a:prstGeom>
-          <a:noFill/>
-          <a:ln/>
-        </p:spPr>
-        <p:txBody>
-          <a:bodyPr wrap="square" lIns="0" tIns="0" rIns="0" bIns="0" rtlCol="0" anchor="ctr"/>
-          <a:lstStyle/>
-          <a:p>
-            <a:pPr marL="0" indent="0" algn="l">
-              <a:lnSpc>
-                <a:spcPct val="110000"/>
-              </a:lnSpc>
-              <a:buNone/>
-            </a:pPr>
-            <a:r>
-              <a:rPr lang="en-US" sz="1400">
-                <a:solidFill>
-                  <a:srgbClr val="2B2B2B"/>
-                </a:solidFill>
-                <a:latin typeface="Calibri"/>
-              </a:rPr>
-              <a:t>Connect Boards, name the source of truth, owners, and rollback authority.</a:t>
-            </a:r>
-            <a:endParaRPr lang="en-US" sz="1250"/>
-          </a:p>
-        </p:txBody>
-      </p:sp>
-      <p:sp>
-        <p:nvSpPr>
-          <p:cNvPr id="11" name="Shape 8"/>
-          <p:cNvSpPr/>
-          <p:nvPr/>
-        </p:nvSpPr>
-        <p:spPr>
-          <a:xfrm>
-            <a:off x="3337560" y="1691640"/>
-            <a:ext cx="2560320" cy="3794760"/>
-          </a:xfrm>
-          <a:prstGeom prst="roundRect">
-            <a:avLst>
-              <a:gd name="adj" fmla="val 4286"/>
-            </a:avLst>
-          </a:prstGeom>
-          <a:solidFill>
-            <a:srgbClr val="F7F6F2"/>
-          </a:solidFill>
-          <a:ln w="12700">
-            <a:solidFill>
-              <a:srgbClr val="DDD8CC"/>
-            </a:solidFill>
-            <a:prstDash val="solid"/>
-          </a:ln>
-          <a:effectLst>
-            <a:outerShdw blurRad="76200" dist="25400" dir="5400000" algn="bl" rotWithShape="0">
-              <a:srgbClr val="000000">
-                <a:alpha val="12000"/>
-              </a:srgbClr>
-            </a:outerShdw>
-          </a:effectLst>
-        </p:spPr>
-        <p:txBody>
-          <a:bodyPr/>
-          <a:lstStyle/>
-          <a:p>
-            <a:endParaRPr lang="en-US"/>
-          </a:p>
-        </p:txBody>
-      </p:sp>
-      <p:sp>
-        <p:nvSpPr>
-          <p:cNvPr id="12" name="Shape 9"/>
-          <p:cNvSpPr/>
-          <p:nvPr/>
-        </p:nvSpPr>
-        <p:spPr>
-          <a:xfrm>
-            <a:off x="3566160" y="1920240"/>
-            <a:ext cx="457200" cy="457200"/>
-          </a:xfrm>
-          <a:prstGeom prst="ellipse">
-            <a:avLst/>
-          </a:prstGeom>
-          <a:solidFill>
-            <a:srgbClr val="C1440E"/>
-          </a:solidFill>
-          <a:ln/>
-        </p:spPr>
-        <p:txBody>
-          <a:bodyPr/>
-          <a:lstStyle/>
-          <a:p>
-            <a:endParaRPr lang="en-US"/>
-          </a:p>
-        </p:txBody>
-      </p:sp>
-      <p:sp>
-        <p:nvSpPr>
-          <p:cNvPr id="13" name="Text 10"/>
-          <p:cNvSpPr txBox="1"/>
-          <p:nvPr/>
-        </p:nvSpPr>
-        <p:spPr>
-          <a:xfrm>
-            <a:off x="3566160" y="1920240"/>
-            <a:ext cx="457200" cy="457200"/>
-          </a:xfrm>
-          <a:prstGeom prst="rect">
-            <a:avLst/>
-          </a:prstGeom>
-          <a:noFill/>
-          <a:ln/>
-        </p:spPr>
-        <p:txBody>
-          <a:bodyPr wrap="square" lIns="0" tIns="0" rIns="0" bIns="0" rtlCol="0" anchor="ctr"/>
-          <a:lstStyle/>
-          <a:p>
-            <a:pPr marL="0" indent="0" algn="ctr">
-              <a:buNone/>
-            </a:pPr>
-            <a:r>
-              <a:rPr lang="en-US" sz="1700" b="1" dirty="0">
-                <a:solidFill>
-                  <a:srgbClr val="F5F5F0"/>
-                </a:solidFill>
-                <a:latin typeface="Cambria" pitchFamily="34" charset="0"/>
-                <a:ea typeface="Cambria" pitchFamily="34" charset="-122"/>
-                <a:cs typeface="Cambria" pitchFamily="34" charset="-120"/>
-              </a:rPr>
-              <a:t>2</a:t>
-            </a:r>
-            <a:endParaRPr lang="en-US" sz="1700" dirty="0"/>
-          </a:p>
-        </p:txBody>
-      </p:sp>
-      <p:sp>
-        <p:nvSpPr>
-          <p:cNvPr id="14" name="Text 11"/>
-          <p:cNvSpPr txBox="1"/>
-          <p:nvPr/>
-        </p:nvSpPr>
-        <p:spPr>
-          <a:xfrm>
-            <a:off x="3520440" y="2514600"/>
-            <a:ext cx="2194560" cy="822960"/>
-          </a:xfrm>
-          <a:prstGeom prst="rect">
-            <a:avLst/>
-          </a:prstGeom>
-          <a:noFill/>
-          <a:ln/>
-        </p:spPr>
-        <p:txBody>
-          <a:bodyPr wrap="square" lIns="0" tIns="0" rIns="0" bIns="0" rtlCol="0" anchor="ctr"/>
-          <a:lstStyle/>
-          <a:p>
-            <a:pPr marL="0" indent="0" algn="l">
-              <a:buNone/>
-            </a:pPr>
-            <a:r>
-              <a:rPr lang="en-US" sz="1470" b="1">
-                <a:solidFill>
-                  <a:srgbClr val="1F3D2C"/>
-                </a:solidFill>
-                <a:latin typeface="Cambria"/>
-              </a:rPr>
-              <a:t>Trial one repo end-to-end</a:t>
-            </a:r>
-            <a:endParaRPr lang="en-US" sz="1550"/>
-          </a:p>
-        </p:txBody>
-      </p:sp>
-      <p:sp>
-        <p:nvSpPr>
-          <p:cNvPr id="15" name="Text 12"/>
-          <p:cNvSpPr txBox="1"/>
-          <p:nvPr/>
-        </p:nvSpPr>
-        <p:spPr>
-          <a:xfrm>
-            <a:off x="3520440" y="3337560"/>
-            <a:ext cx="2194560" cy="2011680"/>
-          </a:xfrm>
-          <a:prstGeom prst="rect">
-            <a:avLst/>
-          </a:prstGeom>
-          <a:noFill/>
-          <a:ln/>
-        </p:spPr>
-        <p:txBody>
-          <a:bodyPr wrap="square" lIns="0" tIns="0" rIns="0" bIns="0" rtlCol="0" anchor="ctr"/>
-          <a:lstStyle/>
-          <a:p>
-            <a:pPr marL="0" indent="0" algn="l">
-              <a:lnSpc>
-                <a:spcPct val="110000"/>
-              </a:lnSpc>
-              <a:buNone/>
-            </a:pPr>
-            <a:r>
-              <a:rPr lang="en-US" sz="1400">
-                <a:solidFill>
-                  <a:srgbClr val="2B2B2B"/>
-                </a:solidFill>
-                <a:latin typeface="Calibri"/>
-              </a:rPr>
-              <a:t>Exercise repository data, automation, and validation before scaling.</a:t>
-            </a:r>
-            <a:endParaRPr lang="en-US" sz="1250"/>
-          </a:p>
-        </p:txBody>
-      </p:sp>
-      <p:sp>
-        <p:nvSpPr>
-          <p:cNvPr id="16" name="Shape 13"/>
-          <p:cNvSpPr/>
-          <p:nvPr/>
-        </p:nvSpPr>
-        <p:spPr>
-          <a:xfrm>
-            <a:off x="6126480" y="1691640"/>
-            <a:ext cx="2560320" cy="3794760"/>
-          </a:xfrm>
-          <a:prstGeom prst="roundRect">
-            <a:avLst>
-              <a:gd name="adj" fmla="val 4286"/>
-            </a:avLst>
-          </a:prstGeom>
-          <a:solidFill>
-            <a:srgbClr val="F7F6F2"/>
-          </a:solidFill>
-          <a:ln w="12700">
-            <a:solidFill>
-              <a:srgbClr val="DDD8CC"/>
-            </a:solidFill>
-            <a:prstDash val="solid"/>
-          </a:ln>
-          <a:effectLst>
-            <a:outerShdw blurRad="76200" dist="25400" dir="5400000" algn="bl" rotWithShape="0">
-              <a:srgbClr val="000000">
-                <a:alpha val="12000"/>
-              </a:srgbClr>
-            </a:outerShdw>
-          </a:effectLst>
-        </p:spPr>
-        <p:txBody>
-          <a:bodyPr/>
-          <a:lstStyle/>
-          <a:p>
-            <a:endParaRPr lang="en-US"/>
-          </a:p>
-        </p:txBody>
-      </p:sp>
-      <p:sp>
-        <p:nvSpPr>
-          <p:cNvPr id="17" name="Shape 14"/>
-          <p:cNvSpPr/>
-          <p:nvPr/>
-        </p:nvSpPr>
-        <p:spPr>
-          <a:xfrm>
-            <a:off x="6355080" y="1920240"/>
-            <a:ext cx="457200" cy="457200"/>
-          </a:xfrm>
-          <a:prstGeom prst="ellipse">
-            <a:avLst/>
-          </a:prstGeom>
-          <a:solidFill>
-            <a:srgbClr val="C1440E"/>
-          </a:solidFill>
-          <a:ln/>
-        </p:spPr>
-        <p:txBody>
-          <a:bodyPr/>
-          <a:lstStyle/>
-          <a:p>
-            <a:endParaRPr lang="en-US"/>
-          </a:p>
-        </p:txBody>
-      </p:sp>
-      <p:sp>
-        <p:nvSpPr>
-          <p:cNvPr id="18" name="Text 15"/>
-          <p:cNvSpPr txBox="1"/>
-          <p:nvPr/>
-        </p:nvSpPr>
-        <p:spPr>
-          <a:xfrm>
-            <a:off x="6355080" y="1920240"/>
-            <a:ext cx="457200" cy="457200"/>
-          </a:xfrm>
-          <a:prstGeom prst="rect">
-            <a:avLst/>
-          </a:prstGeom>
-          <a:noFill/>
-          <a:ln/>
-        </p:spPr>
-        <p:txBody>
-          <a:bodyPr wrap="square" lIns="0" tIns="0" rIns="0" bIns="0" rtlCol="0" anchor="ctr"/>
-          <a:lstStyle/>
-          <a:p>
-            <a:pPr marL="0" indent="0" algn="ctr">
-              <a:buNone/>
-            </a:pPr>
-            <a:r>
-              <a:rPr lang="en-US" sz="1700" b="1" dirty="0">
-                <a:solidFill>
-                  <a:srgbClr val="F5F5F0"/>
-                </a:solidFill>
-                <a:latin typeface="Cambria" pitchFamily="34" charset="0"/>
-                <a:ea typeface="Cambria" pitchFamily="34" charset="-122"/>
-                <a:cs typeface="Cambria" pitchFamily="34" charset="-120"/>
-              </a:rPr>
-              <a:t>3</a:t>
-            </a:r>
-            <a:endParaRPr lang="en-US" sz="1700" dirty="0"/>
-          </a:p>
-        </p:txBody>
-      </p:sp>
-      <p:sp>
-        <p:nvSpPr>
-          <p:cNvPr id="19" name="Text 16"/>
-          <p:cNvSpPr txBox="1"/>
-          <p:nvPr/>
-        </p:nvSpPr>
-        <p:spPr>
-          <a:xfrm>
-            <a:off x="6309360" y="2514600"/>
-            <a:ext cx="2194560" cy="822960"/>
-          </a:xfrm>
-          <a:prstGeom prst="rect">
-            <a:avLst/>
-          </a:prstGeom>
-          <a:noFill/>
-          <a:ln/>
-        </p:spPr>
-        <p:txBody>
-          <a:bodyPr wrap="square" lIns="0" tIns="0" rIns="0" bIns="0" rtlCol="0" anchor="ctr"/>
-          <a:lstStyle/>
-          <a:p>
-            <a:pPr marL="0" indent="0" algn="l">
-              <a:buNone/>
-            </a:pPr>
-            <a:r>
-              <a:rPr lang="en-US" sz="1470" b="1">
-                <a:solidFill>
-                  <a:srgbClr val="1F3D2C"/>
-                </a:solidFill>
-                <a:latin typeface="Cambria"/>
-              </a:rPr>
-              <a:t>Migrate in evidence-based waves</a:t>
-            </a:r>
-            <a:endParaRPr lang="en-US" sz="1550"/>
-          </a:p>
-        </p:txBody>
-      </p:sp>
-      <p:sp>
-        <p:nvSpPr>
-          <p:cNvPr id="20" name="Text 17"/>
-          <p:cNvSpPr txBox="1"/>
-          <p:nvPr/>
-        </p:nvSpPr>
-        <p:spPr>
-          <a:xfrm>
-            <a:off x="6309360" y="3337560"/>
-            <a:ext cx="2194560" cy="2011680"/>
-          </a:xfrm>
-          <a:prstGeom prst="rect">
-            <a:avLst/>
-          </a:prstGeom>
-          <a:noFill/>
-          <a:ln/>
-        </p:spPr>
-        <p:txBody>
-          <a:bodyPr wrap="square" lIns="0" tIns="0" rIns="0" bIns="0" rtlCol="0" anchor="ctr"/>
-          <a:lstStyle/>
-          <a:p>
-            <a:pPr marL="0" indent="0" algn="l">
-              <a:lnSpc>
-                <a:spcPct val="110000"/>
-              </a:lnSpc>
-              <a:buNone/>
-            </a:pPr>
-            <a:r>
-              <a:rPr lang="en-US" sz="1400">
-                <a:solidFill>
-                  <a:srgbClr val="2B2B2B"/>
-                </a:solidFill>
-                <a:latin typeface="Calibri"/>
-              </a:rPr>
-              <a:t>Entry criteria: identity ready, pipeline classified, runner path and rollback defined.</a:t>
-            </a:r>
-            <a:endParaRPr lang="en-US" sz="1250"/>
-          </a:p>
-        </p:txBody>
-      </p:sp>
-      <p:sp>
-        <p:nvSpPr>
-          <p:cNvPr id="21" name="Shape 18"/>
-          <p:cNvSpPr/>
-          <p:nvPr/>
-        </p:nvSpPr>
-        <p:spPr>
-          <a:xfrm>
-            <a:off x="8915400" y="1691640"/>
-            <a:ext cx="2560320" cy="3794760"/>
-          </a:xfrm>
-          <a:prstGeom prst="roundRect">
-            <a:avLst>
-              <a:gd name="adj" fmla="val 4286"/>
-            </a:avLst>
-          </a:prstGeom>
-          <a:solidFill>
-            <a:srgbClr val="F7F6F2"/>
-          </a:solidFill>
-          <a:ln w="12700">
-            <a:solidFill>
-              <a:srgbClr val="DDD8CC"/>
-            </a:solidFill>
-            <a:prstDash val="solid"/>
-          </a:ln>
-          <a:effectLst>
-            <a:outerShdw blurRad="76200" dist="25400" dir="5400000" algn="bl" rotWithShape="0">
-              <a:srgbClr val="000000">
-                <a:alpha val="12000"/>
-              </a:srgbClr>
-            </a:outerShdw>
-          </a:effectLst>
-        </p:spPr>
-        <p:txBody>
-          <a:bodyPr/>
-          <a:lstStyle/>
-          <a:p>
-            <a:endParaRPr lang="en-US"/>
-          </a:p>
-        </p:txBody>
-      </p:sp>
-      <p:sp>
-        <p:nvSpPr>
-          <p:cNvPr id="22" name="Shape 19"/>
-          <p:cNvSpPr/>
-          <p:nvPr/>
-        </p:nvSpPr>
-        <p:spPr>
-          <a:xfrm>
-            <a:off x="9144000" y="1920240"/>
-            <a:ext cx="457200" cy="457200"/>
-          </a:xfrm>
-          <a:prstGeom prst="ellipse">
-            <a:avLst/>
-          </a:prstGeom>
-          <a:solidFill>
-            <a:srgbClr val="C1440E"/>
-          </a:solidFill>
-          <a:ln/>
-        </p:spPr>
-        <p:txBody>
-          <a:bodyPr/>
-          <a:lstStyle/>
-          <a:p>
-            <a:endParaRPr lang="en-US"/>
-          </a:p>
-        </p:txBody>
-      </p:sp>
-      <p:sp>
-        <p:nvSpPr>
-          <p:cNvPr id="23" name="Text 20"/>
-          <p:cNvSpPr txBox="1"/>
-          <p:nvPr/>
-        </p:nvSpPr>
-        <p:spPr>
-          <a:xfrm>
-            <a:off x="9144000" y="1920240"/>
-            <a:ext cx="457200" cy="457200"/>
-          </a:xfrm>
-          <a:prstGeom prst="rect">
-            <a:avLst/>
-          </a:prstGeom>
-          <a:noFill/>
-          <a:ln/>
-        </p:spPr>
-        <p:txBody>
-          <a:bodyPr wrap="square" lIns="0" tIns="0" rIns="0" bIns="0" rtlCol="0" anchor="ctr"/>
-          <a:lstStyle/>
-          <a:p>
-            <a:pPr marL="0" indent="0" algn="ctr">
-              <a:buNone/>
-            </a:pPr>
-            <a:r>
-              <a:rPr lang="en-US" sz="1700" b="1" dirty="0">
-                <a:solidFill>
-                  <a:srgbClr val="F5F5F0"/>
-                </a:solidFill>
-                <a:latin typeface="Cambria" pitchFamily="34" charset="0"/>
-                <a:ea typeface="Cambria" pitchFamily="34" charset="-122"/>
-                <a:cs typeface="Cambria" pitchFamily="34" charset="-120"/>
-              </a:rPr>
-              <a:t>4</a:t>
-            </a:r>
-            <a:endParaRPr lang="en-US" sz="1700" dirty="0"/>
-          </a:p>
-        </p:txBody>
-      </p:sp>
-      <p:sp>
-        <p:nvSpPr>
-          <p:cNvPr id="24" name="Text 21"/>
-          <p:cNvSpPr txBox="1"/>
-          <p:nvPr/>
-        </p:nvSpPr>
-        <p:spPr>
-          <a:xfrm>
-            <a:off x="9098280" y="2514600"/>
-            <a:ext cx="2194560" cy="822960"/>
-          </a:xfrm>
-          <a:prstGeom prst="rect">
-            <a:avLst/>
-          </a:prstGeom>
-          <a:noFill/>
-          <a:ln/>
-        </p:spPr>
-        <p:txBody>
-          <a:bodyPr wrap="square" lIns="0" tIns="0" rIns="0" bIns="0" rtlCol="0" anchor="ctr"/>
-          <a:lstStyle/>
-          <a:p>
-            <a:pPr marL="0" indent="0" algn="l">
-              <a:buNone/>
-            </a:pPr>
-            <a:r>
-              <a:rPr lang="en-US" sz="1470" b="1">
-                <a:solidFill>
-                  <a:srgbClr val="1F3D2C"/>
-                </a:solidFill>
-                <a:latin typeface="Cambria"/>
-              </a:rPr>
-              <a:t>Cut over, monitor, decommission</a:t>
-            </a:r>
-            <a:endParaRPr lang="en-US" sz="1550"/>
-          </a:p>
-        </p:txBody>
-      </p:sp>
-      <p:sp>
-        <p:nvSpPr>
-          <p:cNvPr id="25" name="Text 22"/>
-          <p:cNvSpPr txBox="1"/>
-          <p:nvPr/>
-        </p:nvSpPr>
-        <p:spPr>
-          <a:xfrm>
-            <a:off x="9098280" y="3337560"/>
-            <a:ext cx="2194560" cy="2011680"/>
-          </a:xfrm>
-          <a:prstGeom prst="rect">
-            <a:avLst/>
-          </a:prstGeom>
-          <a:noFill/>
-          <a:ln/>
-        </p:spPr>
-        <p:txBody>
-          <a:bodyPr wrap="square" lIns="0" tIns="0" rIns="0" bIns="0" rtlCol="0" anchor="ctr"/>
-          <a:lstStyle/>
-          <a:p>
-            <a:pPr marL="0" indent="0" algn="l">
-              <a:lnSpc>
-                <a:spcPct val="110000"/>
-              </a:lnSpc>
-              <a:buNone/>
-            </a:pPr>
-            <a:r>
-              <a:rPr lang="en-US" sz="1400">
-                <a:solidFill>
-                  <a:srgbClr val="2B2B2B"/>
-                </a:solidFill>
-                <a:latin typeface="Calibri"/>
-              </a:rPr>
-              <a:t>Make the old repo read-only; retire it only after long-tail checks pass.</a:t>
-            </a:r>
-            <a:endParaRPr lang="en-US" sz="1250"/>
-          </a:p>
-        </p:txBody>
-      </p:sp>
-      <p:sp>
-        <p:nvSpPr>
-          <p:cNvPr id="27" name="Rounded Rectangle 26"/>
-          <p:cNvSpPr/>
-          <p:nvPr/>
-        </p:nvSpPr>
-        <p:spPr>
-          <a:xfrm>
-            <a:off x="548640" y="5522976"/>
-            <a:ext cx="11064240" cy="813816"/>
-          </a:xfrm>
-          <a:prstGeom prst="roundRect">
-            <a:avLst>
-              <a:gd name="adj" fmla="val 12632"/>
-            </a:avLst>
-          </a:prstGeom>
-          <a:solidFill>
-            <a:srgbClr val="1F3D2C"/>
-          </a:solidFill>
-          <a:ln>
-            <a:noFill/>
-          </a:ln>
-          <a:effectLst/>
-        </p:spPr>
-        <p:txBody>
-          <a:bodyPr rtlCol="0" anchor="ctr"/>
-          <a:lstStyle/>
-          <a:p>
-            <a:pPr algn="ctr"/>
-            <a:endParaRPr/>
-          </a:p>
-        </p:txBody>
-      </p:sp>
-      <p:sp>
-        <p:nvSpPr>
-          <p:cNvPr id="26" name="Text 23"/>
-          <p:cNvSpPr txBox="1"/>
-          <p:nvPr/>
-        </p:nvSpPr>
-        <p:spPr>
-          <a:xfrm>
-            <a:off x="548640" y="5522976"/>
-            <a:ext cx="11064240" cy="813816"/>
-          </a:xfrm>
-          <a:prstGeom prst="rect">
-            <a:avLst/>
-          </a:prstGeom>
-          <a:noFill/>
-          <a:ln/>
-        </p:spPr>
-        <p:txBody>
-          <a:bodyPr wrap="square" lIns="256032" tIns="54864" rIns="256032" bIns="54864" rtlCol="0" anchor="ctr"/>
-          <a:lstStyle/>
-          <a:p>
-            <a:pPr marL="0" indent="0" algn="l">
-              <a:buNone/>
-            </a:pPr>
-            <a:r>
-              <a:rPr sz="1050" b="1" spc="120">
-                <a:solidFill>
-                  <a:srgbClr val="8C6A3F"/>
-                </a:solidFill>
-                <a:latin typeface="Calibri"/>
-              </a:rPr>
-              <a:t>TAKEAWAY </a:t>
-            </a:r>
-            <a:r>
-              <a:rPr sz="1500" b="0">
-                <a:solidFill>
-                  <a:srgbClr val="F5F5F0"/>
-                </a:solidFill>
-                <a:latin typeface="Calibri"/>
-              </a:rPr>
-              <a:t>Sequencing, entry criteria, evidence, and ownership are the change-management plan.</a:t>
-            </a:r>
-            <a:endParaRPr lang="en-US" sz="1600" dirty="0"/>
           </a:p>
         </p:txBody>
       </p:sp>
@@ -23821,7 +24661,7 @@
             <a:r>
               <a:rPr lang="en-US" sz="1700" b="1" kern="0" spc="300" dirty="0">
                 <a:solidFill>
-                  <a:srgbClr val="8C6A3F"/>
+                  <a:srgbClr val="E0B85C"/>
                 </a:solidFill>
                 <a:latin typeface="Calibri" pitchFamily="34" charset="0"/>
                 <a:ea typeface="Calibri" pitchFamily="34" charset="-122"/>
@@ -23925,7 +24765,7 @@
             <a:r>
               <a:rPr lang="en-US" sz="2000" i="1" dirty="0">
                 <a:solidFill>
-                  <a:srgbClr val="8C6A3F"/>
+                  <a:srgbClr val="E0B85C"/>
                 </a:solidFill>
                 <a:latin typeface="Calibri" pitchFamily="34" charset="0"/>
                 <a:ea typeface="Calibri" pitchFamily="34" charset="-122"/>
@@ -23964,6 +24804,37 @@
           <a:lstStyle/>
           <a:p>
             <a:endParaRPr lang="en-US"/>
+          </a:p>
+        </p:txBody>
+      </p:sp>
+      <p:sp>
+        <p:nvSpPr>
+          <p:cNvPr id="8" name="Slide Number Placeholder"/>
+          <p:cNvSpPr>
+            <a:spLocks noGrp="1"/>
+          </p:cNvSpPr>
+          <p:nvPr>
+            <p:ph type="sldNum" sz="quarter" idx="10"/>
+          </p:nvPr>
+        </p:nvSpPr>
+        <p:spPr/>
+        <p:txBody>
+          <a:bodyPr/>
+          <a:lstStyle/>
+          <a:p>
+            <a:fld id="{BCB632DE-6AD4-40F1-944C-28C0E9BF62DC}" type="slidenum">
+              <a:rPr lang="en-US">
+                <a:solidFill>
+                  <a:srgbClr val="E0B85C"/>
+                </a:solidFill>
+              </a:rPr>
+              <a:t>4</a:t>
+            </a:fld>
+            <a:endParaRPr lang="en-US">
+              <a:solidFill>
+                <a:srgbClr val="E0B85C"/>
+              </a:solidFill>
+            </a:endParaRPr>
           </a:p>
         </p:txBody>
       </p:sp>
@@ -23976,6 +24847,1006 @@
 </file>
 
 <file path=ppt/slides/slide40.xml><?xml version="1.0" encoding="utf-8"?>
+<p:sld xmlns:a="http://schemas.openxmlformats.org/drawingml/2006/main" xmlns:r="http://schemas.openxmlformats.org/officeDocument/2006/relationships" xmlns:p="http://schemas.openxmlformats.org/presentationml/2006/main">
+  <p:cSld name="Slide 46">
+    <p:bg>
+      <p:bgPr>
+        <a:solidFill>
+          <a:srgbClr val="FFFFFF"/>
+        </a:solidFill>
+        <a:effectLst/>
+      </p:bgPr>
+    </p:bg>
+    <p:spTree>
+      <p:nvGrpSpPr>
+        <p:cNvPr id="1" name=""/>
+        <p:cNvGrpSpPr/>
+        <p:nvPr/>
+      </p:nvGrpSpPr>
+      <p:grpSpPr>
+        <a:xfrm>
+          <a:off x="0" y="0"/>
+          <a:ext cx="0" cy="0"/>
+          <a:chOff x="0" y="0"/>
+          <a:chExt cx="0" cy="0"/>
+        </a:xfrm>
+      </p:grpSpPr>
+      <p:sp>
+        <p:nvSpPr>
+          <p:cNvPr id="2" name="Shape 0"/>
+          <p:cNvSpPr/>
+          <p:nvPr/>
+        </p:nvSpPr>
+        <p:spPr>
+          <a:xfrm>
+            <a:off x="548640" y="457200"/>
+            <a:ext cx="566928" cy="566928"/>
+          </a:xfrm>
+          <a:prstGeom prst="ellipse">
+            <a:avLst/>
+          </a:prstGeom>
+          <a:solidFill>
+            <a:srgbClr val="C1440E"/>
+          </a:solidFill>
+          <a:ln/>
+        </p:spPr>
+        <p:txBody>
+          <a:bodyPr/>
+          <a:lstStyle/>
+          <a:p>
+            <a:endParaRPr lang="en-US"/>
+          </a:p>
+        </p:txBody>
+      </p:sp>
+      <p:pic>
+        <p:nvPicPr>
+          <p:cNvPr id="3" name="Image 0" descr="/home/claude/pptx-build/assets/icons/FaRoute-FFFFFF-200.png"/>
+          <p:cNvPicPr>
+            <a:picLocks noChangeAspect="1"/>
+          </p:cNvPicPr>
+          <p:nvPr/>
+        </p:nvPicPr>
+        <p:blipFill>
+          <a:blip r:embed="rId3"/>
+          <a:stretch>
+            <a:fillRect/>
+          </a:stretch>
+        </p:blipFill>
+        <p:spPr>
+          <a:xfrm>
+            <a:off x="685800" y="594360"/>
+            <a:ext cx="292608" cy="292608"/>
+          </a:xfrm>
+          <a:prstGeom prst="rect">
+            <a:avLst/>
+          </a:prstGeom>
+        </p:spPr>
+      </p:pic>
+      <p:sp>
+        <p:nvSpPr>
+          <p:cNvPr id="4" name="Text 1"/>
+          <p:cNvSpPr txBox="1"/>
+          <p:nvPr/>
+        </p:nvSpPr>
+        <p:spPr>
+          <a:xfrm>
+            <a:off x="1234440" y="420624"/>
+            <a:ext cx="9875520" cy="320040"/>
+          </a:xfrm>
+          <a:prstGeom prst="rect">
+            <a:avLst/>
+          </a:prstGeom>
+          <a:noFill/>
+          <a:ln/>
+        </p:spPr>
+        <p:txBody>
+          <a:bodyPr wrap="square" lIns="0" tIns="0" rIns="0" bIns="0" rtlCol="0" anchor="ctr"/>
+          <a:lstStyle/>
+          <a:p>
+            <a:pPr marL="0" indent="0">
+              <a:buNone/>
+            </a:pPr>
+            <a:r>
+              <a:rPr lang="en-US" sz="1500" b="1" kern="0" spc="200" dirty="0">
+                <a:solidFill>
+                  <a:srgbClr val="C1440E"/>
+                </a:solidFill>
+                <a:latin typeface="Calibri" pitchFamily="34" charset="0"/>
+                <a:ea typeface="Calibri" pitchFamily="34" charset="-122"/>
+                <a:cs typeface="Calibri" pitchFamily="34" charset="-120"/>
+              </a:rPr>
+              <a:t>THE SENIOR ENGINEER DEFENDS AN ANCIENT PIPELINE</a:t>
+            </a:r>
+            <a:endParaRPr lang="en-US" sz="1500" dirty="0"/>
+          </a:p>
+        </p:txBody>
+      </p:sp>
+      <p:sp>
+        <p:nvSpPr>
+          <p:cNvPr id="5" name="Text 2"/>
+          <p:cNvSpPr txBox="1"/>
+          <p:nvPr/>
+        </p:nvSpPr>
+        <p:spPr>
+          <a:xfrm>
+            <a:off x="1234440" y="804672"/>
+            <a:ext cx="10515600" cy="658368"/>
+          </a:xfrm>
+          <a:prstGeom prst="rect">
+            <a:avLst/>
+          </a:prstGeom>
+          <a:noFill/>
+          <a:ln/>
+        </p:spPr>
+        <p:txBody>
+          <a:bodyPr wrap="square" lIns="0" tIns="0" rIns="0" bIns="0" rtlCol="0" anchor="t"/>
+          <a:lstStyle/>
+          <a:p>
+            <a:pPr marL="0" indent="0">
+              <a:buNone/>
+            </a:pPr>
+            <a:r>
+              <a:rPr lang="en-US" sz="2800" b="1" dirty="0">
+                <a:solidFill>
+                  <a:srgbClr val="1F3D2C"/>
+                </a:solidFill>
+                <a:latin typeface="Cambria" pitchFamily="34" charset="0"/>
+                <a:ea typeface="Cambria" pitchFamily="34" charset="-122"/>
+                <a:cs typeface="Cambria" pitchFamily="34" charset="-120"/>
+              </a:rPr>
+              <a:t>The Migration Sequence Is the Change-Management Plan</a:t>
+            </a:r>
+            <a:endParaRPr lang="en-US" sz="3200" dirty="0"/>
+          </a:p>
+        </p:txBody>
+      </p:sp>
+      <p:sp>
+        <p:nvSpPr>
+          <p:cNvPr id="6" name="Shape 3"/>
+          <p:cNvSpPr/>
+          <p:nvPr/>
+        </p:nvSpPr>
+        <p:spPr>
+          <a:xfrm>
+            <a:off x="548640" y="1691640"/>
+            <a:ext cx="2560320" cy="3794760"/>
+          </a:xfrm>
+          <a:prstGeom prst="roundRect">
+            <a:avLst>
+              <a:gd name="adj" fmla="val 4286"/>
+            </a:avLst>
+          </a:prstGeom>
+          <a:solidFill>
+            <a:srgbClr val="F7F6F2"/>
+          </a:solidFill>
+          <a:ln w="12700">
+            <a:solidFill>
+              <a:srgbClr val="DDD8CC"/>
+            </a:solidFill>
+            <a:prstDash val="solid"/>
+          </a:ln>
+          <a:effectLst>
+            <a:outerShdw blurRad="76200" dist="25400" dir="5400000" algn="bl" rotWithShape="0">
+              <a:srgbClr val="000000">
+                <a:alpha val="12000"/>
+              </a:srgbClr>
+            </a:outerShdw>
+          </a:effectLst>
+        </p:spPr>
+        <p:txBody>
+          <a:bodyPr/>
+          <a:lstStyle/>
+          <a:p>
+            <a:endParaRPr lang="en-US"/>
+          </a:p>
+        </p:txBody>
+      </p:sp>
+      <p:sp>
+        <p:nvSpPr>
+          <p:cNvPr id="7" name="Shape 4"/>
+          <p:cNvSpPr/>
+          <p:nvPr/>
+        </p:nvSpPr>
+        <p:spPr>
+          <a:xfrm>
+            <a:off x="777240" y="1920240"/>
+            <a:ext cx="457200" cy="457200"/>
+          </a:xfrm>
+          <a:prstGeom prst="ellipse">
+            <a:avLst/>
+          </a:prstGeom>
+          <a:solidFill>
+            <a:srgbClr val="C1440E"/>
+          </a:solidFill>
+          <a:ln/>
+        </p:spPr>
+        <p:txBody>
+          <a:bodyPr/>
+          <a:lstStyle/>
+          <a:p>
+            <a:endParaRPr lang="en-US"/>
+          </a:p>
+        </p:txBody>
+      </p:sp>
+      <p:sp>
+        <p:nvSpPr>
+          <p:cNvPr id="8" name="Text 5"/>
+          <p:cNvSpPr txBox="1"/>
+          <p:nvPr/>
+        </p:nvSpPr>
+        <p:spPr>
+          <a:xfrm>
+            <a:off x="777240" y="1920240"/>
+            <a:ext cx="457200" cy="457200"/>
+          </a:xfrm>
+          <a:prstGeom prst="rect">
+            <a:avLst/>
+          </a:prstGeom>
+          <a:noFill/>
+          <a:ln/>
+        </p:spPr>
+        <p:txBody>
+          <a:bodyPr wrap="square" lIns="0" tIns="0" rIns="0" bIns="0" rtlCol="0" anchor="ctr"/>
+          <a:lstStyle/>
+          <a:p>
+            <a:pPr marL="0" indent="0" algn="ctr">
+              <a:buNone/>
+            </a:pPr>
+            <a:r>
+              <a:rPr lang="en-US" sz="1700" b="1" dirty="0">
+                <a:solidFill>
+                  <a:srgbClr val="F5F5F0"/>
+                </a:solidFill>
+                <a:latin typeface="Cambria" pitchFamily="34" charset="0"/>
+                <a:ea typeface="Cambria" pitchFamily="34" charset="-122"/>
+                <a:cs typeface="Cambria" pitchFamily="34" charset="-120"/>
+              </a:rPr>
+              <a:t>1</a:t>
+            </a:r>
+            <a:endParaRPr lang="en-US" sz="1700" dirty="0"/>
+          </a:p>
+        </p:txBody>
+      </p:sp>
+      <p:sp>
+        <p:nvSpPr>
+          <p:cNvPr id="9" name="Text 6"/>
+          <p:cNvSpPr txBox="1"/>
+          <p:nvPr/>
+        </p:nvSpPr>
+        <p:spPr>
+          <a:xfrm>
+            <a:off x="731520" y="2514600"/>
+            <a:ext cx="2194560" cy="822960"/>
+          </a:xfrm>
+          <a:prstGeom prst="rect">
+            <a:avLst/>
+          </a:prstGeom>
+          <a:noFill/>
+          <a:ln/>
+        </p:spPr>
+        <p:txBody>
+          <a:bodyPr wrap="square" lIns="0" tIns="0" rIns="0" bIns="0" rtlCol="0" anchor="ctr"/>
+          <a:lstStyle/>
+          <a:p>
+            <a:pPr marL="0" indent="0" algn="l">
+              <a:buNone/>
+            </a:pPr>
+            <a:r>
+              <a:rPr lang="en-US" sz="1470" b="1">
+                <a:solidFill>
+                  <a:srgbClr val="1F3D2C"/>
+                </a:solidFill>
+                <a:latin typeface="Cambria"/>
+              </a:rPr>
+              <a:t>Define authority &amp; traceability</a:t>
+            </a:r>
+            <a:endParaRPr lang="en-US" sz="1550"/>
+          </a:p>
+        </p:txBody>
+      </p:sp>
+      <p:sp>
+        <p:nvSpPr>
+          <p:cNvPr id="10" name="Text 7"/>
+          <p:cNvSpPr txBox="1"/>
+          <p:nvPr/>
+        </p:nvSpPr>
+        <p:spPr>
+          <a:xfrm>
+            <a:off x="731520" y="3337560"/>
+            <a:ext cx="2194560" cy="2011680"/>
+          </a:xfrm>
+          <a:prstGeom prst="rect">
+            <a:avLst/>
+          </a:prstGeom>
+          <a:noFill/>
+          <a:ln/>
+        </p:spPr>
+        <p:txBody>
+          <a:bodyPr wrap="square" lIns="0" tIns="0" rIns="0" bIns="0" rtlCol="0" anchor="ctr"/>
+          <a:lstStyle/>
+          <a:p>
+            <a:pPr marL="0" indent="0" algn="l">
+              <a:lnSpc>
+                <a:spcPct val="110000"/>
+              </a:lnSpc>
+              <a:buNone/>
+            </a:pPr>
+            <a:r>
+              <a:rPr lang="en-US" sz="1400">
+                <a:solidFill>
+                  <a:srgbClr val="2B2B2B"/>
+                </a:solidFill>
+                <a:latin typeface="Calibri"/>
+              </a:rPr>
+              <a:t>Connect Boards, name the source of truth, owners, and rollback authority.</a:t>
+            </a:r>
+            <a:endParaRPr lang="en-US" sz="1250"/>
+          </a:p>
+        </p:txBody>
+      </p:sp>
+      <p:sp>
+        <p:nvSpPr>
+          <p:cNvPr id="11" name="Shape 8"/>
+          <p:cNvSpPr/>
+          <p:nvPr/>
+        </p:nvSpPr>
+        <p:spPr>
+          <a:xfrm>
+            <a:off x="3337560" y="1691640"/>
+            <a:ext cx="2560320" cy="3794760"/>
+          </a:xfrm>
+          <a:prstGeom prst="roundRect">
+            <a:avLst>
+              <a:gd name="adj" fmla="val 4286"/>
+            </a:avLst>
+          </a:prstGeom>
+          <a:solidFill>
+            <a:srgbClr val="F7F6F2"/>
+          </a:solidFill>
+          <a:ln w="12700">
+            <a:solidFill>
+              <a:srgbClr val="DDD8CC"/>
+            </a:solidFill>
+            <a:prstDash val="solid"/>
+          </a:ln>
+          <a:effectLst>
+            <a:outerShdw blurRad="76200" dist="25400" dir="5400000" algn="bl" rotWithShape="0">
+              <a:srgbClr val="000000">
+                <a:alpha val="12000"/>
+              </a:srgbClr>
+            </a:outerShdw>
+          </a:effectLst>
+        </p:spPr>
+        <p:txBody>
+          <a:bodyPr/>
+          <a:lstStyle/>
+          <a:p>
+            <a:endParaRPr lang="en-US"/>
+          </a:p>
+        </p:txBody>
+      </p:sp>
+      <p:sp>
+        <p:nvSpPr>
+          <p:cNvPr id="12" name="Shape 9"/>
+          <p:cNvSpPr/>
+          <p:nvPr/>
+        </p:nvSpPr>
+        <p:spPr>
+          <a:xfrm>
+            <a:off x="3566160" y="1920240"/>
+            <a:ext cx="457200" cy="457200"/>
+          </a:xfrm>
+          <a:prstGeom prst="ellipse">
+            <a:avLst/>
+          </a:prstGeom>
+          <a:solidFill>
+            <a:srgbClr val="C1440E"/>
+          </a:solidFill>
+          <a:ln/>
+        </p:spPr>
+        <p:txBody>
+          <a:bodyPr/>
+          <a:lstStyle/>
+          <a:p>
+            <a:endParaRPr lang="en-US"/>
+          </a:p>
+        </p:txBody>
+      </p:sp>
+      <p:sp>
+        <p:nvSpPr>
+          <p:cNvPr id="13" name="Text 10"/>
+          <p:cNvSpPr txBox="1"/>
+          <p:nvPr/>
+        </p:nvSpPr>
+        <p:spPr>
+          <a:xfrm>
+            <a:off x="3566160" y="1920240"/>
+            <a:ext cx="457200" cy="457200"/>
+          </a:xfrm>
+          <a:prstGeom prst="rect">
+            <a:avLst/>
+          </a:prstGeom>
+          <a:noFill/>
+          <a:ln/>
+        </p:spPr>
+        <p:txBody>
+          <a:bodyPr wrap="square" lIns="0" tIns="0" rIns="0" bIns="0" rtlCol="0" anchor="ctr"/>
+          <a:lstStyle/>
+          <a:p>
+            <a:pPr marL="0" indent="0" algn="ctr">
+              <a:buNone/>
+            </a:pPr>
+            <a:r>
+              <a:rPr lang="en-US" sz="1700" b="1" dirty="0">
+                <a:solidFill>
+                  <a:srgbClr val="F5F5F0"/>
+                </a:solidFill>
+                <a:latin typeface="Cambria" pitchFamily="34" charset="0"/>
+                <a:ea typeface="Cambria" pitchFamily="34" charset="-122"/>
+                <a:cs typeface="Cambria" pitchFamily="34" charset="-120"/>
+              </a:rPr>
+              <a:t>2</a:t>
+            </a:r>
+            <a:endParaRPr lang="en-US" sz="1700" dirty="0"/>
+          </a:p>
+        </p:txBody>
+      </p:sp>
+      <p:sp>
+        <p:nvSpPr>
+          <p:cNvPr id="14" name="Text 11"/>
+          <p:cNvSpPr txBox="1"/>
+          <p:nvPr/>
+        </p:nvSpPr>
+        <p:spPr>
+          <a:xfrm>
+            <a:off x="3520440" y="2514600"/>
+            <a:ext cx="2194560" cy="822960"/>
+          </a:xfrm>
+          <a:prstGeom prst="rect">
+            <a:avLst/>
+          </a:prstGeom>
+          <a:noFill/>
+          <a:ln/>
+        </p:spPr>
+        <p:txBody>
+          <a:bodyPr wrap="square" lIns="0" tIns="0" rIns="0" bIns="0" rtlCol="0" anchor="ctr"/>
+          <a:lstStyle/>
+          <a:p>
+            <a:pPr marL="0" indent="0" algn="l">
+              <a:buNone/>
+            </a:pPr>
+            <a:r>
+              <a:rPr lang="en-US" sz="1470" b="1">
+                <a:solidFill>
+                  <a:srgbClr val="1F3D2C"/>
+                </a:solidFill>
+                <a:latin typeface="Cambria"/>
+              </a:rPr>
+              <a:t>Trial one repo end-to-end</a:t>
+            </a:r>
+            <a:endParaRPr lang="en-US" sz="1550"/>
+          </a:p>
+        </p:txBody>
+      </p:sp>
+      <p:sp>
+        <p:nvSpPr>
+          <p:cNvPr id="15" name="Text 12"/>
+          <p:cNvSpPr txBox="1"/>
+          <p:nvPr/>
+        </p:nvSpPr>
+        <p:spPr>
+          <a:xfrm>
+            <a:off x="3520440" y="3337560"/>
+            <a:ext cx="2194560" cy="2011680"/>
+          </a:xfrm>
+          <a:prstGeom prst="rect">
+            <a:avLst/>
+          </a:prstGeom>
+          <a:noFill/>
+          <a:ln/>
+        </p:spPr>
+        <p:txBody>
+          <a:bodyPr wrap="square" lIns="0" tIns="0" rIns="0" bIns="0" rtlCol="0" anchor="ctr"/>
+          <a:lstStyle/>
+          <a:p>
+            <a:pPr marL="0" indent="0" algn="l">
+              <a:lnSpc>
+                <a:spcPct val="110000"/>
+              </a:lnSpc>
+              <a:buNone/>
+            </a:pPr>
+            <a:r>
+              <a:rPr lang="en-US" sz="1400">
+                <a:solidFill>
+                  <a:srgbClr val="2B2B2B"/>
+                </a:solidFill>
+                <a:latin typeface="Calibri"/>
+              </a:rPr>
+              <a:t>Exercise repository data, automation, and validation before scaling.</a:t>
+            </a:r>
+            <a:endParaRPr lang="en-US" sz="1250"/>
+          </a:p>
+        </p:txBody>
+      </p:sp>
+      <p:sp>
+        <p:nvSpPr>
+          <p:cNvPr id="16" name="Shape 13"/>
+          <p:cNvSpPr/>
+          <p:nvPr/>
+        </p:nvSpPr>
+        <p:spPr>
+          <a:xfrm>
+            <a:off x="6126480" y="1691640"/>
+            <a:ext cx="2560320" cy="3794760"/>
+          </a:xfrm>
+          <a:prstGeom prst="roundRect">
+            <a:avLst>
+              <a:gd name="adj" fmla="val 4286"/>
+            </a:avLst>
+          </a:prstGeom>
+          <a:solidFill>
+            <a:srgbClr val="F7F6F2"/>
+          </a:solidFill>
+          <a:ln w="12700">
+            <a:solidFill>
+              <a:srgbClr val="DDD8CC"/>
+            </a:solidFill>
+            <a:prstDash val="solid"/>
+          </a:ln>
+          <a:effectLst>
+            <a:outerShdw blurRad="76200" dist="25400" dir="5400000" algn="bl" rotWithShape="0">
+              <a:srgbClr val="000000">
+                <a:alpha val="12000"/>
+              </a:srgbClr>
+            </a:outerShdw>
+          </a:effectLst>
+        </p:spPr>
+        <p:txBody>
+          <a:bodyPr/>
+          <a:lstStyle/>
+          <a:p>
+            <a:endParaRPr lang="en-US"/>
+          </a:p>
+        </p:txBody>
+      </p:sp>
+      <p:sp>
+        <p:nvSpPr>
+          <p:cNvPr id="17" name="Shape 14"/>
+          <p:cNvSpPr/>
+          <p:nvPr/>
+        </p:nvSpPr>
+        <p:spPr>
+          <a:xfrm>
+            <a:off x="6355080" y="1920240"/>
+            <a:ext cx="457200" cy="457200"/>
+          </a:xfrm>
+          <a:prstGeom prst="ellipse">
+            <a:avLst/>
+          </a:prstGeom>
+          <a:solidFill>
+            <a:srgbClr val="C1440E"/>
+          </a:solidFill>
+          <a:ln/>
+        </p:spPr>
+        <p:txBody>
+          <a:bodyPr/>
+          <a:lstStyle/>
+          <a:p>
+            <a:endParaRPr lang="en-US"/>
+          </a:p>
+        </p:txBody>
+      </p:sp>
+      <p:sp>
+        <p:nvSpPr>
+          <p:cNvPr id="18" name="Text 15"/>
+          <p:cNvSpPr txBox="1"/>
+          <p:nvPr/>
+        </p:nvSpPr>
+        <p:spPr>
+          <a:xfrm>
+            <a:off x="6355080" y="1920240"/>
+            <a:ext cx="457200" cy="457200"/>
+          </a:xfrm>
+          <a:prstGeom prst="rect">
+            <a:avLst/>
+          </a:prstGeom>
+          <a:noFill/>
+          <a:ln/>
+        </p:spPr>
+        <p:txBody>
+          <a:bodyPr wrap="square" lIns="0" tIns="0" rIns="0" bIns="0" rtlCol="0" anchor="ctr"/>
+          <a:lstStyle/>
+          <a:p>
+            <a:pPr marL="0" indent="0" algn="ctr">
+              <a:buNone/>
+            </a:pPr>
+            <a:r>
+              <a:rPr lang="en-US" sz="1700" b="1" dirty="0">
+                <a:solidFill>
+                  <a:srgbClr val="F5F5F0"/>
+                </a:solidFill>
+                <a:latin typeface="Cambria" pitchFamily="34" charset="0"/>
+                <a:ea typeface="Cambria" pitchFamily="34" charset="-122"/>
+                <a:cs typeface="Cambria" pitchFamily="34" charset="-120"/>
+              </a:rPr>
+              <a:t>3</a:t>
+            </a:r>
+            <a:endParaRPr lang="en-US" sz="1700" dirty="0"/>
+          </a:p>
+        </p:txBody>
+      </p:sp>
+      <p:sp>
+        <p:nvSpPr>
+          <p:cNvPr id="19" name="Text 16"/>
+          <p:cNvSpPr txBox="1"/>
+          <p:nvPr/>
+        </p:nvSpPr>
+        <p:spPr>
+          <a:xfrm>
+            <a:off x="6309360" y="2514600"/>
+            <a:ext cx="2194560" cy="822960"/>
+          </a:xfrm>
+          <a:prstGeom prst="rect">
+            <a:avLst/>
+          </a:prstGeom>
+          <a:noFill/>
+          <a:ln/>
+        </p:spPr>
+        <p:txBody>
+          <a:bodyPr wrap="square" lIns="0" tIns="0" rIns="0" bIns="0" rtlCol="0" anchor="ctr"/>
+          <a:lstStyle/>
+          <a:p>
+            <a:pPr marL="0" indent="0" algn="l">
+              <a:buNone/>
+            </a:pPr>
+            <a:r>
+              <a:rPr lang="en-US" sz="1470" b="1">
+                <a:solidFill>
+                  <a:srgbClr val="1F3D2C"/>
+                </a:solidFill>
+                <a:latin typeface="Cambria"/>
+              </a:rPr>
+              <a:t>Migrate in evidence-based waves</a:t>
+            </a:r>
+            <a:endParaRPr lang="en-US" sz="1550"/>
+          </a:p>
+        </p:txBody>
+      </p:sp>
+      <p:sp>
+        <p:nvSpPr>
+          <p:cNvPr id="20" name="Text 17"/>
+          <p:cNvSpPr txBox="1"/>
+          <p:nvPr/>
+        </p:nvSpPr>
+        <p:spPr>
+          <a:xfrm>
+            <a:off x="6309360" y="3337560"/>
+            <a:ext cx="2194560" cy="2011680"/>
+          </a:xfrm>
+          <a:prstGeom prst="rect">
+            <a:avLst/>
+          </a:prstGeom>
+          <a:noFill/>
+          <a:ln/>
+        </p:spPr>
+        <p:txBody>
+          <a:bodyPr wrap="square" lIns="0" tIns="0" rIns="0" bIns="0" rtlCol="0" anchor="ctr"/>
+          <a:lstStyle/>
+          <a:p>
+            <a:pPr marL="0" indent="0" algn="l">
+              <a:lnSpc>
+                <a:spcPct val="110000"/>
+              </a:lnSpc>
+              <a:buNone/>
+            </a:pPr>
+            <a:r>
+              <a:rPr lang="en-US" sz="1400">
+                <a:solidFill>
+                  <a:srgbClr val="2B2B2B"/>
+                </a:solidFill>
+                <a:latin typeface="Calibri"/>
+              </a:rPr>
+              <a:t>Entry criteria: identity ready, pipeline classified, runner path and rollback defined.</a:t>
+            </a:r>
+            <a:endParaRPr lang="en-US" sz="1250"/>
+          </a:p>
+        </p:txBody>
+      </p:sp>
+      <p:sp>
+        <p:nvSpPr>
+          <p:cNvPr id="21" name="Shape 18"/>
+          <p:cNvSpPr/>
+          <p:nvPr/>
+        </p:nvSpPr>
+        <p:spPr>
+          <a:xfrm>
+            <a:off x="8915400" y="1691640"/>
+            <a:ext cx="2560320" cy="3794760"/>
+          </a:xfrm>
+          <a:prstGeom prst="roundRect">
+            <a:avLst>
+              <a:gd name="adj" fmla="val 4286"/>
+            </a:avLst>
+          </a:prstGeom>
+          <a:solidFill>
+            <a:srgbClr val="F7F6F2"/>
+          </a:solidFill>
+          <a:ln w="12700">
+            <a:solidFill>
+              <a:srgbClr val="DDD8CC"/>
+            </a:solidFill>
+            <a:prstDash val="solid"/>
+          </a:ln>
+          <a:effectLst>
+            <a:outerShdw blurRad="76200" dist="25400" dir="5400000" algn="bl" rotWithShape="0">
+              <a:srgbClr val="000000">
+                <a:alpha val="12000"/>
+              </a:srgbClr>
+            </a:outerShdw>
+          </a:effectLst>
+        </p:spPr>
+        <p:txBody>
+          <a:bodyPr/>
+          <a:lstStyle/>
+          <a:p>
+            <a:endParaRPr lang="en-US"/>
+          </a:p>
+        </p:txBody>
+      </p:sp>
+      <p:sp>
+        <p:nvSpPr>
+          <p:cNvPr id="22" name="Shape 19"/>
+          <p:cNvSpPr/>
+          <p:nvPr/>
+        </p:nvSpPr>
+        <p:spPr>
+          <a:xfrm>
+            <a:off x="9144000" y="1920240"/>
+            <a:ext cx="457200" cy="457200"/>
+          </a:xfrm>
+          <a:prstGeom prst="ellipse">
+            <a:avLst/>
+          </a:prstGeom>
+          <a:solidFill>
+            <a:srgbClr val="C1440E"/>
+          </a:solidFill>
+          <a:ln/>
+        </p:spPr>
+        <p:txBody>
+          <a:bodyPr/>
+          <a:lstStyle/>
+          <a:p>
+            <a:endParaRPr lang="en-US"/>
+          </a:p>
+        </p:txBody>
+      </p:sp>
+      <p:sp>
+        <p:nvSpPr>
+          <p:cNvPr id="23" name="Text 20"/>
+          <p:cNvSpPr txBox="1"/>
+          <p:nvPr/>
+        </p:nvSpPr>
+        <p:spPr>
+          <a:xfrm>
+            <a:off x="9144000" y="1920240"/>
+            <a:ext cx="457200" cy="457200"/>
+          </a:xfrm>
+          <a:prstGeom prst="rect">
+            <a:avLst/>
+          </a:prstGeom>
+          <a:noFill/>
+          <a:ln/>
+        </p:spPr>
+        <p:txBody>
+          <a:bodyPr wrap="square" lIns="0" tIns="0" rIns="0" bIns="0" rtlCol="0" anchor="ctr"/>
+          <a:lstStyle/>
+          <a:p>
+            <a:pPr marL="0" indent="0" algn="ctr">
+              <a:buNone/>
+            </a:pPr>
+            <a:r>
+              <a:rPr lang="en-US" sz="1700" b="1" dirty="0">
+                <a:solidFill>
+                  <a:srgbClr val="F5F5F0"/>
+                </a:solidFill>
+                <a:latin typeface="Cambria" pitchFamily="34" charset="0"/>
+                <a:ea typeface="Cambria" pitchFamily="34" charset="-122"/>
+                <a:cs typeface="Cambria" pitchFamily="34" charset="-120"/>
+              </a:rPr>
+              <a:t>4</a:t>
+            </a:r>
+            <a:endParaRPr lang="en-US" sz="1700" dirty="0"/>
+          </a:p>
+        </p:txBody>
+      </p:sp>
+      <p:sp>
+        <p:nvSpPr>
+          <p:cNvPr id="24" name="Text 21"/>
+          <p:cNvSpPr txBox="1"/>
+          <p:nvPr/>
+        </p:nvSpPr>
+        <p:spPr>
+          <a:xfrm>
+            <a:off x="9098280" y="2514600"/>
+            <a:ext cx="2194560" cy="822960"/>
+          </a:xfrm>
+          <a:prstGeom prst="rect">
+            <a:avLst/>
+          </a:prstGeom>
+          <a:noFill/>
+          <a:ln/>
+        </p:spPr>
+        <p:txBody>
+          <a:bodyPr wrap="square" lIns="0" tIns="0" rIns="0" bIns="0" rtlCol="0" anchor="ctr"/>
+          <a:lstStyle/>
+          <a:p>
+            <a:pPr marL="0" indent="0" algn="l">
+              <a:buNone/>
+            </a:pPr>
+            <a:r>
+              <a:rPr lang="en-US" sz="1470" b="1">
+                <a:solidFill>
+                  <a:srgbClr val="1F3D2C"/>
+                </a:solidFill>
+                <a:latin typeface="Cambria"/>
+              </a:rPr>
+              <a:t>Cut over, monitor, decommission</a:t>
+            </a:r>
+            <a:endParaRPr lang="en-US" sz="1550"/>
+          </a:p>
+        </p:txBody>
+      </p:sp>
+      <p:sp>
+        <p:nvSpPr>
+          <p:cNvPr id="25" name="Text 22"/>
+          <p:cNvSpPr txBox="1"/>
+          <p:nvPr/>
+        </p:nvSpPr>
+        <p:spPr>
+          <a:xfrm>
+            <a:off x="9098280" y="3337560"/>
+            <a:ext cx="2194560" cy="2011680"/>
+          </a:xfrm>
+          <a:prstGeom prst="rect">
+            <a:avLst/>
+          </a:prstGeom>
+          <a:noFill/>
+          <a:ln/>
+        </p:spPr>
+        <p:txBody>
+          <a:bodyPr wrap="square" lIns="0" tIns="0" rIns="0" bIns="0" rtlCol="0" anchor="ctr"/>
+          <a:lstStyle/>
+          <a:p>
+            <a:pPr marL="0" indent="0" algn="l">
+              <a:lnSpc>
+                <a:spcPct val="110000"/>
+              </a:lnSpc>
+              <a:buNone/>
+            </a:pPr>
+            <a:r>
+              <a:rPr lang="en-US" sz="1400">
+                <a:solidFill>
+                  <a:srgbClr val="2B2B2B"/>
+                </a:solidFill>
+                <a:latin typeface="Calibri"/>
+              </a:rPr>
+              <a:t>Make the old repo read-only; retire it only after long-tail checks pass.</a:t>
+            </a:r>
+            <a:endParaRPr lang="en-US" sz="1250"/>
+          </a:p>
+        </p:txBody>
+      </p:sp>
+      <p:sp>
+        <p:nvSpPr>
+          <p:cNvPr id="27" name="Rounded Rectangle 26"/>
+          <p:cNvSpPr/>
+          <p:nvPr/>
+        </p:nvSpPr>
+        <p:spPr>
+          <a:xfrm>
+            <a:off x="548640" y="5522976"/>
+            <a:ext cx="11064240" cy="813816"/>
+          </a:xfrm>
+          <a:prstGeom prst="roundRect">
+            <a:avLst>
+              <a:gd name="adj" fmla="val 12632"/>
+            </a:avLst>
+          </a:prstGeom>
+          <a:solidFill>
+            <a:srgbClr val="1F3D2C"/>
+          </a:solidFill>
+          <a:ln>
+            <a:noFill/>
+          </a:ln>
+          <a:effectLst/>
+        </p:spPr>
+        <p:txBody>
+          <a:bodyPr rtlCol="0" anchor="ctr"/>
+          <a:lstStyle/>
+          <a:p>
+            <a:pPr algn="ctr"/>
+            <a:endParaRPr/>
+          </a:p>
+        </p:txBody>
+      </p:sp>
+      <p:sp>
+        <p:nvSpPr>
+          <p:cNvPr id="26" name="Text 23"/>
+          <p:cNvSpPr txBox="1"/>
+          <p:nvPr/>
+        </p:nvSpPr>
+        <p:spPr>
+          <a:xfrm>
+            <a:off x="548640" y="5522976"/>
+            <a:ext cx="11064240" cy="813816"/>
+          </a:xfrm>
+          <a:prstGeom prst="rect">
+            <a:avLst/>
+          </a:prstGeom>
+          <a:noFill/>
+          <a:ln/>
+        </p:spPr>
+        <p:txBody>
+          <a:bodyPr wrap="square" lIns="256032" tIns="54864" rIns="256032" bIns="54864" rtlCol="0" anchor="ctr"/>
+          <a:lstStyle/>
+          <a:p>
+            <a:pPr marL="0" indent="0" algn="l">
+              <a:buNone/>
+            </a:pPr>
+            <a:r>
+              <a:rPr sz="1250" b="1" spc="120">
+                <a:solidFill>
+                  <a:srgbClr val="E0B85C"/>
+                </a:solidFill>
+                <a:latin typeface="Calibri"/>
+              </a:rPr>
+              <a:t>TAKEAWAY </a:t>
+            </a:r>
+            <a:r>
+              <a:rPr sz="1500" b="0">
+                <a:solidFill>
+                  <a:srgbClr val="F5F5F0"/>
+                </a:solidFill>
+                <a:latin typeface="Calibri"/>
+              </a:rPr>
+              <a:t>Sequencing, entry criteria, evidence, and ownership are the change-management plan.</a:t>
+            </a:r>
+            <a:endParaRPr lang="en-US" sz="1600" dirty="0"/>
+          </a:p>
+        </p:txBody>
+      </p:sp>
+      <p:sp>
+        <p:nvSpPr>
+          <p:cNvPr id="28" name="Slide Number Placeholder"/>
+          <p:cNvSpPr>
+            <a:spLocks noGrp="1"/>
+          </p:cNvSpPr>
+          <p:nvPr>
+            <p:ph type="sldNum" sz="quarter" idx="10"/>
+          </p:nvPr>
+        </p:nvSpPr>
+        <p:spPr/>
+        <p:txBody>
+          <a:bodyPr/>
+          <a:lstStyle/>
+          <a:p>
+            <a:fld id="{BCB632DE-6AD4-40F1-944C-28C0E9BF62DC}" type="slidenum">
+              <a:rPr lang="en-US"/>
+              <a:t>40</a:t>
+            </a:fld>
+            <a:endParaRPr lang="en-US"/>
+          </a:p>
+        </p:txBody>
+      </p:sp>
+    </p:spTree>
+  </p:cSld>
+  <p:clrMapOvr>
+    <a:masterClrMapping/>
+  </p:clrMapOvr>
+</p:sld>
+</file>
+
+<file path=ppt/slides/slide41.xml><?xml version="1.0" encoding="utf-8"?>
 <p:sld xmlns:a="http://schemas.openxmlformats.org/drawingml/2006/main" xmlns:r="http://schemas.openxmlformats.org/officeDocument/2006/relationships" xmlns:p="http://schemas.openxmlformats.org/presentationml/2006/main">
   <p:cSld name="Slide 45">
     <p:bg>
@@ -24290,7 +26161,7 @@
               <a:buNone/>
             </a:pPr>
             <a:r>
-              <a:rPr sz="1050" b="1" spc="120">
+              <a:rPr sz="1250" b="1" spc="120">
                 <a:solidFill>
                   <a:srgbClr val="C1440E"/>
                 </a:solidFill>
@@ -24308,6 +26179,29 @@
               <a:t>Price the migration and the steady state separately, and count the months when both platforms are billing at once.</a:t>
             </a:r>
             <a:endParaRPr lang="en-US" sz="1500" dirty="0"/>
+          </a:p>
+        </p:txBody>
+      </p:sp>
+      <p:sp>
+        <p:nvSpPr>
+          <p:cNvPr id="10" name="Slide Number Placeholder"/>
+          <p:cNvSpPr>
+            <a:spLocks noGrp="1"/>
+          </p:cNvSpPr>
+          <p:nvPr>
+            <p:ph type="sldNum" sz="quarter" idx="10"/>
+          </p:nvPr>
+        </p:nvSpPr>
+        <p:spPr/>
+        <p:txBody>
+          <a:bodyPr/>
+          <a:lstStyle/>
+          <a:p>
+            <a:fld id="{BCB632DE-6AD4-40F1-944C-28C0E9BF62DC}" type="slidenum">
+              <a:rPr lang="en-US"/>
+              <a:t>41</a:t>
+            </a:fld>
+            <a:endParaRPr lang="en-US"/>
           </a:p>
         </p:txBody>
       </p:sp>
@@ -24319,7 +26213,7 @@
 </p:sld>
 </file>
 
-<file path=ppt/slides/slide41.xml><?xml version="1.0" encoding="utf-8"?>
+<file path=ppt/slides/slide42.xml><?xml version="1.0" encoding="utf-8"?>
 <p:sld xmlns:a="http://schemas.openxmlformats.org/drawingml/2006/main" xmlns:r="http://schemas.openxmlformats.org/officeDocument/2006/relationships" xmlns:p="http://schemas.openxmlformats.org/presentationml/2006/main">
   <p:cSld name="Slide 47">
     <p:bg>
@@ -24709,9 +26603,9 @@
               <a:buNone/>
             </a:pPr>
             <a:r>
-              <a:rPr sz="1050" b="1" spc="120" dirty="0">
-                <a:solidFill>
-                  <a:srgbClr val="8C6A3F"/>
+              <a:rPr sz="1250" b="1" spc="120" dirty="0">
+                <a:solidFill>
+                  <a:srgbClr val="E0B85C"/>
                 </a:solidFill>
                 <a:latin typeface="Calibri"/>
               </a:rPr>
@@ -24727,6 +26621,29 @@
               <a:t>These are preconditions, not nice-to-haves. Budget for them before you promise anyone the AI payoff.</a:t>
             </a:r>
             <a:endParaRPr lang="en-US" sz="1600" dirty="0"/>
+          </a:p>
+        </p:txBody>
+      </p:sp>
+      <p:sp>
+        <p:nvSpPr>
+          <p:cNvPr id="10" name="Slide Number Placeholder"/>
+          <p:cNvSpPr>
+            <a:spLocks noGrp="1"/>
+          </p:cNvSpPr>
+          <p:nvPr>
+            <p:ph type="sldNum" sz="quarter" idx="10"/>
+          </p:nvPr>
+        </p:nvSpPr>
+        <p:spPr/>
+        <p:txBody>
+          <a:bodyPr/>
+          <a:lstStyle/>
+          <a:p>
+            <a:fld id="{BCB632DE-6AD4-40F1-944C-28C0E9BF62DC}" type="slidenum">
+              <a:rPr lang="en-US"/>
+              <a:t>42</a:t>
+            </a:fld>
+            <a:endParaRPr lang="en-US"/>
           </a:p>
         </p:txBody>
       </p:sp>
@@ -24738,7 +26655,7 @@
 </p:sld>
 </file>
 
-<file path=ppt/slides/slide42.xml><?xml version="1.0" encoding="utf-8"?>
+<file path=ppt/slides/slide43.xml><?xml version="1.0" encoding="utf-8"?>
 <p:sld xmlns:a="http://schemas.openxmlformats.org/drawingml/2006/main" xmlns:r="http://schemas.openxmlformats.org/officeDocument/2006/relationships" xmlns:p="http://schemas.openxmlformats.org/presentationml/2006/main">
   <p:cSld name="Slide 48">
     <p:bg>
@@ -25031,7 +26948,7 @@
             </a:avLst>
           </a:prstGeom>
           <a:solidFill>
-            <a:srgbClr val="1F3D2C"/>
+            <a:srgbClr val="F7F6F2"/>
           </a:solidFill>
           <a:ln w="12700">
             <a:solidFill>
@@ -25082,7 +26999,7 @@
             <a:r>
               <a:rPr lang="en-US" sz="1600" b="1" dirty="0">
                 <a:solidFill>
-                  <a:srgbClr val="F5F5F0"/>
+                  <a:srgbClr val="1F3D2C"/>
                 </a:solidFill>
                 <a:latin typeface="Cambria" pitchFamily="34" charset="0"/>
                 <a:ea typeface="Cambria" pitchFamily="34" charset="-122"/>
@@ -25090,7 +27007,11 @@
               </a:rPr>
               <a:t>Scaled agile, regulated, multi-team</a:t>
             </a:r>
-            <a:endParaRPr lang="en-US" sz="1600" dirty="0"/>
+            <a:endParaRPr lang="en-US" sz="1600" dirty="0">
+              <a:solidFill>
+                <a:srgbClr val="1F3D2C"/>
+              </a:solidFill>
+            </a:endParaRPr>
           </a:p>
         </p:txBody>
       </p:sp>
@@ -25124,7 +27045,7 @@
             <a:r>
               <a:rPr lang="en-US" sz="1350" dirty="0">
                 <a:solidFill>
-                  <a:srgbClr val="F5F5F0"/>
+                  <a:srgbClr val="373636"/>
                 </a:solidFill>
                 <a:latin typeface="Calibri" pitchFamily="34" charset="0"/>
                 <a:ea typeface="Calibri" pitchFamily="34" charset="-122"/>
@@ -25132,7 +27053,11 @@
               </a:rPr>
               <a:t>Azure Boards’ hierarchy and reporting earn their keep here.</a:t>
             </a:r>
-            <a:endParaRPr lang="en-US" sz="1350" dirty="0"/>
+            <a:endParaRPr lang="en-US" sz="1350" dirty="0">
+              <a:solidFill>
+                <a:srgbClr val="373636"/>
+              </a:solidFill>
+            </a:endParaRPr>
           </a:p>
         </p:txBody>
       </p:sp>
@@ -25266,8 +27191,8 @@
         </p:nvSpPr>
         <p:spPr>
           <a:xfrm>
-            <a:off x="548640" y="4617720"/>
-            <a:ext cx="11064240" cy="1600200"/>
+            <a:off x="548640" y="4952198"/>
+            <a:ext cx="11064240" cy="895149"/>
           </a:xfrm>
           <a:prstGeom prst="roundRect">
             <a:avLst>
@@ -25305,8 +27230,8 @@
         </p:nvSpPr>
         <p:spPr>
           <a:xfrm>
-            <a:off x="548640" y="4617720"/>
-            <a:ext cx="11064240" cy="1600200"/>
+            <a:off x="548640" y="4901665"/>
+            <a:ext cx="11064240" cy="1032309"/>
           </a:xfrm>
           <a:prstGeom prst="rect">
             <a:avLst/>
@@ -25325,7 +27250,7 @@
               <a:buNone/>
             </a:pPr>
             <a:r>
-              <a:rPr sz="1050" b="1" spc="120">
+              <a:rPr sz="1250" b="1" spc="120" dirty="0">
                 <a:solidFill>
                   <a:srgbClr val="C1440E"/>
                 </a:solidFill>
@@ -25334,7 +27259,7 @@
               <a:t>ASIDE </a:t>
             </a:r>
             <a:r>
-              <a:rPr sz="1500" b="0">
+              <a:rPr sz="1500" b="0" dirty="0">
                 <a:solidFill>
                   <a:srgbClr val="2B2B2B"/>
                 </a:solidFill>
@@ -25343,6 +27268,29 @@
               <a:t>The Senior Engineer guarding that ancient pipeline isn’t wrong to be cautious — they’re defending it with the wrong argument (“it’s always worked”) instead of the right one (“here’s what the audit says”).</a:t>
             </a:r>
             <a:endParaRPr lang="en-US" sz="1450" dirty="0"/>
+          </a:p>
+        </p:txBody>
+      </p:sp>
+      <p:sp>
+        <p:nvSpPr>
+          <p:cNvPr id="17" name="Slide Number Placeholder"/>
+          <p:cNvSpPr>
+            <a:spLocks noGrp="1"/>
+          </p:cNvSpPr>
+          <p:nvPr>
+            <p:ph type="sldNum" sz="quarter" idx="10"/>
+          </p:nvPr>
+        </p:nvSpPr>
+        <p:spPr/>
+        <p:txBody>
+          <a:bodyPr/>
+          <a:lstStyle/>
+          <a:p>
+            <a:fld id="{BCB632DE-6AD4-40F1-944C-28C0E9BF62DC}" type="slidenum">
+              <a:rPr lang="en-US"/>
+              <a:t>43</a:t>
+            </a:fld>
+            <a:endParaRPr lang="en-US"/>
           </a:p>
         </p:txBody>
       </p:sp>
@@ -25354,7 +27302,7 @@
 </p:sld>
 </file>
 
-<file path=ppt/slides/slide43.xml><?xml version="1.0" encoding="utf-8"?>
+<file path=ppt/slides/slide44.xml><?xml version="1.0" encoding="utf-8"?>
 <p:sld xmlns:a="http://schemas.openxmlformats.org/drawingml/2006/main" xmlns:r="http://schemas.openxmlformats.org/officeDocument/2006/relationships" xmlns:p="http://schemas.openxmlformats.org/presentationml/2006/main">
   <p:cSld name="Slide 49">
     <p:bg>
@@ -25445,7 +27393,7 @@
             <a:r>
               <a:rPr lang="en-US" sz="1900" i="1" dirty="0">
                 <a:solidFill>
-                  <a:srgbClr val="8C6A3F"/>
+                  <a:srgbClr val="E0B85C"/>
                 </a:solidFill>
                 <a:latin typeface="Calibri" pitchFamily="34" charset="0"/>
                 <a:ea typeface="Calibri" pitchFamily="34" charset="-122"/>
@@ -25454,6 +27402,37 @@
               <a:t>One quick question before we leave Section 5 — The Senior Engineer Defends an Ancient Pipeline</a:t>
             </a:r>
             <a:endParaRPr lang="en-US" sz="1900" dirty="0"/>
+          </a:p>
+        </p:txBody>
+      </p:sp>
+      <p:sp>
+        <p:nvSpPr>
+          <p:cNvPr id="4" name="Slide Number Placeholder"/>
+          <p:cNvSpPr>
+            <a:spLocks noGrp="1"/>
+          </p:cNvSpPr>
+          <p:nvPr>
+            <p:ph type="sldNum" sz="quarter" idx="10"/>
+          </p:nvPr>
+        </p:nvSpPr>
+        <p:spPr/>
+        <p:txBody>
+          <a:bodyPr/>
+          <a:lstStyle/>
+          <a:p>
+            <a:fld id="{BCB632DE-6AD4-40F1-944C-28C0E9BF62DC}" type="slidenum">
+              <a:rPr lang="en-US">
+                <a:solidFill>
+                  <a:srgbClr val="E0B85C"/>
+                </a:solidFill>
+              </a:rPr>
+              <a:t>44</a:t>
+            </a:fld>
+            <a:endParaRPr lang="en-US">
+              <a:solidFill>
+                <a:srgbClr val="E0B85C"/>
+              </a:solidFill>
+            </a:endParaRPr>
           </a:p>
         </p:txBody>
       </p:sp>
@@ -25465,7 +27444,7 @@
 </p:sld>
 </file>
 
-<file path=ppt/slides/slide44.xml><?xml version="1.0" encoding="utf-8"?>
+<file path=ppt/slides/slide45.xml><?xml version="1.0" encoding="utf-8"?>
 <p:sld xmlns:a="http://schemas.openxmlformats.org/drawingml/2006/main" xmlns:r="http://schemas.openxmlformats.org/officeDocument/2006/relationships" xmlns:p="http://schemas.openxmlformats.org/presentationml/2006/main">
   <p:cSld name="Slide 50">
     <p:bg>
@@ -25544,7 +27523,7 @@
             <a:r>
               <a:rPr lang="en-US" sz="1700" b="1" kern="0" spc="300" dirty="0">
                 <a:solidFill>
-                  <a:srgbClr val="8C6A3F"/>
+                  <a:srgbClr val="E0B85C"/>
                 </a:solidFill>
                 <a:latin typeface="Calibri" pitchFamily="34" charset="0"/>
                 <a:ea typeface="Calibri" pitchFamily="34" charset="-122"/>
@@ -25574,7 +27553,7 @@
         </p:blipFill>
         <p:spPr>
           <a:xfrm>
-            <a:off x="9692640" y="2194560"/>
+            <a:off x="10154652" y="2194560"/>
             <a:ext cx="1463040" cy="1463040"/>
           </a:xfrm>
           <a:prstGeom prst="rect">
@@ -25648,7 +27627,7 @@
             <a:r>
               <a:rPr lang="en-US" sz="2000" i="1" dirty="0">
                 <a:solidFill>
-                  <a:srgbClr val="8C6A3F"/>
+                  <a:srgbClr val="E0B85C"/>
                 </a:solidFill>
                 <a:latin typeface="Calibri" pitchFamily="34" charset="0"/>
                 <a:ea typeface="Calibri" pitchFamily="34" charset="-122"/>
@@ -25687,6 +27666,37 @@
           <a:lstStyle/>
           <a:p>
             <a:endParaRPr lang="en-US"/>
+          </a:p>
+        </p:txBody>
+      </p:sp>
+      <p:sp>
+        <p:nvSpPr>
+          <p:cNvPr id="8" name="Slide Number Placeholder"/>
+          <p:cNvSpPr>
+            <a:spLocks noGrp="1"/>
+          </p:cNvSpPr>
+          <p:nvPr>
+            <p:ph type="sldNum" sz="quarter" idx="10"/>
+          </p:nvPr>
+        </p:nvSpPr>
+        <p:spPr/>
+        <p:txBody>
+          <a:bodyPr/>
+          <a:lstStyle/>
+          <a:p>
+            <a:fld id="{BCB632DE-6AD4-40F1-944C-28C0E9BF62DC}" type="slidenum">
+              <a:rPr lang="en-US">
+                <a:solidFill>
+                  <a:srgbClr val="E0B85C"/>
+                </a:solidFill>
+              </a:rPr>
+              <a:t>45</a:t>
+            </a:fld>
+            <a:endParaRPr lang="en-US">
+              <a:solidFill>
+                <a:srgbClr val="E0B85C"/>
+              </a:solidFill>
+            </a:endParaRPr>
           </a:p>
         </p:txBody>
       </p:sp>
@@ -25698,7 +27708,7 @@
 </p:sld>
 </file>
 
-<file path=ppt/slides/slide45.xml><?xml version="1.0" encoding="utf-8"?>
+<file path=ppt/slides/slide46.xml><?xml version="1.0" encoding="utf-8"?>
 <p:sld xmlns:a="http://schemas.openxmlformats.org/drawingml/2006/main" xmlns:r="http://schemas.openxmlformats.org/officeDocument/2006/relationships" xmlns:p="http://schemas.openxmlformats.org/presentationml/2006/main">
   <p:cSld name="Slide 51">
     <p:bg>
@@ -26240,7 +28250,7 @@
               <a:buNone/>
             </a:pPr>
             <a:r>
-              <a:rPr sz="1000" b="1" spc="120">
+              <a:rPr sz="1250" b="1" spc="120">
                 <a:solidFill>
                   <a:srgbClr val="C1440E"/>
                 </a:solidFill>
@@ -26341,6 +28351,29 @@
           </a:p>
         </p:txBody>
       </p:sp>
+      <p:sp>
+        <p:nvSpPr>
+          <p:cNvPr id="22" name="Slide Number Placeholder"/>
+          <p:cNvSpPr>
+            <a:spLocks noGrp="1"/>
+          </p:cNvSpPr>
+          <p:nvPr>
+            <p:ph type="sldNum" sz="quarter" idx="10"/>
+          </p:nvPr>
+        </p:nvSpPr>
+        <p:spPr/>
+        <p:txBody>
+          <a:bodyPr/>
+          <a:lstStyle/>
+          <a:p>
+            <a:fld id="{BCB632DE-6AD4-40F1-944C-28C0E9BF62DC}" type="slidenum">
+              <a:rPr lang="en-US"/>
+              <a:t>46</a:t>
+            </a:fld>
+            <a:endParaRPr lang="en-US"/>
+          </a:p>
+        </p:txBody>
+      </p:sp>
     </p:spTree>
   </p:cSld>
   <p:clrMapOvr>
@@ -26349,7 +28382,7 @@
 </p:sld>
 </file>
 
-<file path=ppt/slides/slide46.xml><?xml version="1.0" encoding="utf-8"?>
+<file path=ppt/slides/slide47.xml><?xml version="1.0" encoding="utf-8"?>
 <p:sld xmlns:a="http://schemas.openxmlformats.org/drawingml/2006/main" xmlns:r="http://schemas.openxmlformats.org/officeDocument/2006/relationships" xmlns:p="http://schemas.openxmlformats.org/presentationml/2006/main">
   <p:cSld name="Slide 52">
     <p:bg>
@@ -26511,7 +28544,7 @@
         </p:nvSpPr>
         <p:spPr>
           <a:xfrm>
-            <a:off x="548640" y="1417320"/>
+            <a:off x="548640" y="1792702"/>
             <a:ext cx="11064240" cy="1097280"/>
           </a:xfrm>
           <a:prstGeom prst="roundRect">
@@ -26552,7 +28585,7 @@
         </p:nvSpPr>
         <p:spPr>
           <a:xfrm>
-            <a:off x="868680" y="1572768"/>
+            <a:off x="868680" y="1948150"/>
             <a:ext cx="10424160" cy="822960"/>
           </a:xfrm>
           <a:prstGeom prst="rect">
@@ -26602,7 +28635,7 @@
         </p:nvSpPr>
         <p:spPr>
           <a:xfrm>
-            <a:off x="548640" y="2697480"/>
+            <a:off x="548640" y="3072862"/>
             <a:ext cx="11064240" cy="1280160"/>
           </a:xfrm>
           <a:prstGeom prst="roundRect">
@@ -26631,7 +28664,7 @@
         </p:nvSpPr>
         <p:spPr>
           <a:xfrm>
-            <a:off x="868680" y="2862072"/>
+            <a:off x="868680" y="3237454"/>
             <a:ext cx="10424160" cy="960120"/>
           </a:xfrm>
           <a:prstGeom prst="rect">
@@ -26669,7 +28702,7 @@
         </p:nvSpPr>
         <p:spPr>
           <a:xfrm>
-            <a:off x="548640" y="4160520"/>
+            <a:off x="548640" y="4535902"/>
             <a:ext cx="11064240" cy="859536"/>
           </a:xfrm>
           <a:prstGeom prst="roundRect">
@@ -26702,7 +28735,7 @@
         </p:nvSpPr>
         <p:spPr>
           <a:xfrm>
-            <a:off x="548640" y="4160520"/>
+            <a:off x="548640" y="4535902"/>
             <a:ext cx="11064240" cy="859536"/>
           </a:xfrm>
           <a:prstGeom prst="rect">
@@ -26719,9 +28752,9 @@
               <a:buNone/>
             </a:pPr>
             <a:r>
-              <a:rPr sz="1050" b="1" spc="120">
-                <a:solidFill>
-                  <a:srgbClr val="8C6A3F"/>
+              <a:rPr sz="1250" b="1" spc="120">
+                <a:solidFill>
+                  <a:srgbClr val="E0B85C"/>
                 </a:solidFill>
                 <a:latin typeface="Calibri"/>
               </a:rPr>
@@ -26748,7 +28781,7 @@
         </p:nvSpPr>
         <p:spPr>
           <a:xfrm>
-            <a:off x="548640" y="5257800"/>
+            <a:off x="563880" y="5897880"/>
             <a:ext cx="11064240" cy="0"/>
           </a:xfrm>
           <a:prstGeom prst="line">
@@ -26778,7 +28811,7 @@
         </p:nvSpPr>
         <p:spPr>
           <a:xfrm>
-            <a:off x="548640" y="5367528"/>
+            <a:off x="563880" y="6007608"/>
             <a:ext cx="11064240" cy="640080"/>
           </a:xfrm>
           <a:prstGeom prst="rect">
@@ -26806,6 +28839,29 @@
               <a:t>DOCUMENTARY ASIDE — a herd of placeholder accounts, grazing quietly in the repo’s activity feed at this section’s watering hole, waiting for someone to notice they’re there.</a:t>
             </a:r>
             <a:endParaRPr lang="en-US" sz="1300" dirty="0"/>
+          </a:p>
+        </p:txBody>
+      </p:sp>
+      <p:sp>
+        <p:nvSpPr>
+          <p:cNvPr id="14" name="Slide Number Placeholder"/>
+          <p:cNvSpPr>
+            <a:spLocks noGrp="1"/>
+          </p:cNvSpPr>
+          <p:nvPr>
+            <p:ph type="sldNum" sz="quarter" idx="10"/>
+          </p:nvPr>
+        </p:nvSpPr>
+        <p:spPr/>
+        <p:txBody>
+          <a:bodyPr/>
+          <a:lstStyle/>
+          <a:p>
+            <a:fld id="{BCB632DE-6AD4-40F1-944C-28C0E9BF62DC}" type="slidenum">
+              <a:rPr lang="en-US"/>
+              <a:t>47</a:t>
+            </a:fld>
+            <a:endParaRPr lang="en-US"/>
           </a:p>
         </p:txBody>
       </p:sp>
@@ -26817,7 +28873,7 @@
 </p:sld>
 </file>
 
-<file path=ppt/slides/slide47.xml><?xml version="1.0" encoding="utf-8"?>
+<file path=ppt/slides/slide48.xml><?xml version="1.0" encoding="utf-8"?>
 <p:sld xmlns:a="http://schemas.openxmlformats.org/drawingml/2006/main" xmlns:r="http://schemas.openxmlformats.org/officeDocument/2006/relationships" xmlns:p="http://schemas.openxmlformats.org/presentationml/2006/main">
   <p:cSld name="Slide 54">
     <p:bg>
@@ -28031,6 +30087,29 @@
           </a:p>
         </p:txBody>
       </p:sp>
+      <p:sp>
+        <p:nvSpPr>
+          <p:cNvPr id="36" name="Slide Number Placeholder"/>
+          <p:cNvSpPr>
+            <a:spLocks noGrp="1"/>
+          </p:cNvSpPr>
+          <p:nvPr>
+            <p:ph type="sldNum" sz="quarter" idx="10"/>
+          </p:nvPr>
+        </p:nvSpPr>
+        <p:spPr/>
+        <p:txBody>
+          <a:bodyPr/>
+          <a:lstStyle/>
+          <a:p>
+            <a:fld id="{BCB632DE-6AD4-40F1-944C-28C0E9BF62DC}" type="slidenum">
+              <a:rPr lang="en-US"/>
+              <a:t>48</a:t>
+            </a:fld>
+            <a:endParaRPr lang="en-US"/>
+          </a:p>
+        </p:txBody>
+      </p:sp>
     </p:spTree>
   </p:cSld>
   <p:clrMapOvr>
@@ -28039,7 +30118,7 @@
 </p:sld>
 </file>
 
-<file path=ppt/slides/slide48.xml><?xml version="1.0" encoding="utf-8"?>
+<file path=ppt/slides/slide49.xml><?xml version="1.0" encoding="utf-8"?>
 <p:sld xmlns:a="http://schemas.openxmlformats.org/drawingml/2006/main" xmlns:r="http://schemas.openxmlformats.org/officeDocument/2006/relationships" xmlns:p="http://schemas.openxmlformats.org/presentationml/2006/main">
   <p:cSld name="Slide 53">
     <p:bg>
@@ -28154,196 +30233,26 @@
           </a:p>
         </p:txBody>
       </p:sp>
-    </p:spTree>
-  </p:cSld>
-  <p:clrMapOvr>
-    <a:masterClrMapping/>
-  </p:clrMapOvr>
-</p:sld>
-</file>
-
-<file path=ppt/slides/slide49.xml><?xml version="1.0" encoding="utf-8"?>
-<p:sld xmlns:a="http://schemas.openxmlformats.org/drawingml/2006/main" xmlns:r="http://schemas.openxmlformats.org/officeDocument/2006/relationships" xmlns:p="http://schemas.openxmlformats.org/presentationml/2006/main">
-  <p:cSld name="Slide 56">
-    <p:bg>
-      <p:bgPr>
-        <a:solidFill>
-          <a:srgbClr val="142A1D"/>
-        </a:solidFill>
-        <a:effectLst/>
-      </p:bgPr>
-    </p:bg>
-    <p:spTree>
-      <p:nvGrpSpPr>
-        <p:cNvPr id="1" name=""/>
-        <p:cNvGrpSpPr/>
-        <p:nvPr/>
-      </p:nvGrpSpPr>
-      <p:grpSpPr>
-        <a:xfrm>
-          <a:off x="0" y="0"/>
-          <a:ext cx="0" cy="0"/>
-          <a:chOff x="0" y="0"/>
-          <a:chExt cx="0" cy="0"/>
-        </a:xfrm>
-      </p:grpSpPr>
-      <p:sp>
-        <p:nvSpPr>
-          <p:cNvPr id="2" name="Shape 0"/>
-          <p:cNvSpPr/>
-          <p:nvPr/>
-        </p:nvSpPr>
-        <p:spPr>
-          <a:xfrm>
-            <a:off x="0" y="0"/>
-            <a:ext cx="12191695" cy="6858000"/>
-          </a:xfrm>
-          <a:prstGeom prst="rect">
-            <a:avLst/>
-          </a:prstGeom>
-          <a:solidFill>
-            <a:srgbClr val="1F3D2C"/>
-          </a:solidFill>
-          <a:ln/>
-        </p:spPr>
+      <p:sp>
+        <p:nvSpPr>
+          <p:cNvPr id="7" name="Slide Number Placeholder"/>
+          <p:cNvSpPr>
+            <a:spLocks noGrp="1"/>
+          </p:cNvSpPr>
+          <p:nvPr>
+            <p:ph type="sldNum" sz="quarter" idx="10"/>
+          </p:nvPr>
+        </p:nvSpPr>
+        <p:spPr/>
         <p:txBody>
           <a:bodyPr/>
           <a:lstStyle/>
           <a:p>
+            <a:fld id="{BCB632DE-6AD4-40F1-944C-28C0E9BF62DC}" type="slidenum">
+              <a:rPr lang="en-US"/>
+              <a:t>49</a:t>
+            </a:fld>
             <a:endParaRPr lang="en-US"/>
-          </a:p>
-        </p:txBody>
-      </p:sp>
-      <p:sp>
-        <p:nvSpPr>
-          <p:cNvPr id="3" name="Shape 1"/>
-          <p:cNvSpPr/>
-          <p:nvPr/>
-        </p:nvSpPr>
-        <p:spPr>
-          <a:xfrm>
-            <a:off x="0" y="0"/>
-            <a:ext cx="12191695" cy="128016"/>
-          </a:xfrm>
-          <a:prstGeom prst="rect">
-            <a:avLst/>
-          </a:prstGeom>
-          <a:solidFill>
-            <a:srgbClr val="C1440E"/>
-          </a:solidFill>
-          <a:ln/>
-        </p:spPr>
-        <p:txBody>
-          <a:bodyPr/>
-          <a:lstStyle/>
-          <a:p>
-            <a:endParaRPr lang="en-US"/>
-          </a:p>
-        </p:txBody>
-      </p:sp>
-      <p:sp>
-        <p:nvSpPr>
-          <p:cNvPr id="4" name="Text 2"/>
-          <p:cNvSpPr txBox="1"/>
-          <p:nvPr/>
-        </p:nvSpPr>
-        <p:spPr>
-          <a:xfrm>
-            <a:off x="1188720" y="2103120"/>
-            <a:ext cx="9784080" cy="2926080"/>
-          </a:xfrm>
-          <a:prstGeom prst="rect">
-            <a:avLst/>
-          </a:prstGeom>
-          <a:noFill/>
-          <a:ln/>
-        </p:spPr>
-        <p:txBody>
-          <a:bodyPr wrap="square" lIns="0" tIns="0" rIns="0" bIns="0" rtlCol="0" anchor="ctr"/>
-          <a:lstStyle/>
-          <a:p>
-            <a:pPr marL="0" indent="0" algn="ctr">
-              <a:buNone/>
-            </a:pPr>
-            <a:r>
-              <a:rPr sz="2800" b="1">
-                <a:solidFill>
-                  <a:srgbClr val="F5F5F0"/>
-                </a:solidFill>
-                <a:latin typeface="Cambria"/>
-              </a:rPr>
-              <a:t>The herd has crossed. The builds are green. The watering hole is quiet.</a:t>
-            </a:r>
-            <a:endParaRPr lang="en-US" sz="3000" dirty="0"/>
-          </a:p>
-          <a:p>
-            <a:pPr algn="ctr">
-              <a:spcBef>
-                <a:spcPts val="1400"/>
-              </a:spcBef>
-            </a:pPr>
-            <a:r>
-              <a:rPr sz="2800" b="1">
-                <a:solidFill>
-                  <a:srgbClr val="F5F5F0"/>
-                </a:solidFill>
-                <a:latin typeface="Cambria"/>
-              </a:rPr>
-              <a:t>On the far bank, one pipeline still runs every Tuesday at 3 a.m. — triggered by nothing, owned by no one.</a:t>
-            </a:r>
-          </a:p>
-          <a:p>
-            <a:pPr algn="ctr">
-              <a:spcBef>
-                <a:spcPts val="1400"/>
-              </a:spcBef>
-            </a:pPr>
-            <a:r>
-              <a:rPr sz="2800" b="1">
-                <a:solidFill>
-                  <a:srgbClr val="F5F5F0"/>
-                </a:solidFill>
-                <a:latin typeface="Cambria"/>
-              </a:rPr>
-              <a:t>Nobody told it the herd had moved.</a:t>
-            </a:r>
-          </a:p>
-        </p:txBody>
-      </p:sp>
-      <p:sp>
-        <p:nvSpPr>
-          <p:cNvPr id="5" name="Text 3"/>
-          <p:cNvSpPr txBox="1"/>
-          <p:nvPr/>
-        </p:nvSpPr>
-        <p:spPr>
-          <a:xfrm>
-            <a:off x="548640" y="5989320"/>
-            <a:ext cx="11064240" cy="411480"/>
-          </a:xfrm>
-          <a:prstGeom prst="rect">
-            <a:avLst/>
-          </a:prstGeom>
-          <a:noFill/>
-          <a:ln/>
-        </p:spPr>
-        <p:txBody>
-          <a:bodyPr wrap="square" lIns="0" tIns="0" rIns="0" bIns="0" rtlCol="0" anchor="ctr"/>
-          <a:lstStyle/>
-          <a:p>
-            <a:pPr marL="0" indent="0" algn="ctr">
-              <a:buNone/>
-            </a:pPr>
-            <a:r>
-              <a:rPr sz="1300">
-                <a:solidFill>
-                  <a:srgbClr val="8C6A3F"/>
-                </a:solidFill>
-                <a:latin typeface="Calibri"/>
-              </a:rPr>
-              <a:t>— CLOSING NARRATION, FROM THE FAR BANK</a:t>
-            </a:r>
-            <a:endParaRPr lang="en-US" sz="1300" dirty="0"/>
           </a:p>
         </p:txBody>
       </p:sp>
@@ -29635,7 +31544,7 @@
           <a:p>
             <a:pPr algn="l"/>
             <a:r>
-              <a:rPr sz="1050" b="1" spc="120">
+              <a:rPr sz="1250" b="1" spc="120">
                 <a:solidFill>
                   <a:srgbClr val="C1440E"/>
                 </a:solidFill>
@@ -29728,6 +31637,29 @@
           </a:p>
         </p:txBody>
       </p:sp>
+      <p:sp>
+        <p:nvSpPr>
+          <p:cNvPr id="14" name="Slide Number Placeholder"/>
+          <p:cNvSpPr>
+            <a:spLocks noGrp="1"/>
+          </p:cNvSpPr>
+          <p:nvPr>
+            <p:ph type="sldNum" sz="quarter" idx="10"/>
+          </p:nvPr>
+        </p:nvSpPr>
+        <p:spPr/>
+        <p:txBody>
+          <a:bodyPr/>
+          <a:lstStyle/>
+          <a:p>
+            <a:fld id="{BCB632DE-6AD4-40F1-944C-28C0E9BF62DC}" type="slidenum">
+              <a:rPr lang="en-US"/>
+              <a:t>5</a:t>
+            </a:fld>
+            <a:endParaRPr lang="en-US"/>
+          </a:p>
+        </p:txBody>
+      </p:sp>
     </p:spTree>
   </p:cSld>
   <p:clrMapOvr>
@@ -29737,6 +31669,230 @@
 </file>
 
 <file path=ppt/slides/slide50.xml><?xml version="1.0" encoding="utf-8"?>
+<p:sld xmlns:a="http://schemas.openxmlformats.org/drawingml/2006/main" xmlns:r="http://schemas.openxmlformats.org/officeDocument/2006/relationships" xmlns:p="http://schemas.openxmlformats.org/presentationml/2006/main">
+  <p:cSld name="Slide 56">
+    <p:bg>
+      <p:bgPr>
+        <a:solidFill>
+          <a:srgbClr val="142A1D"/>
+        </a:solidFill>
+        <a:effectLst/>
+      </p:bgPr>
+    </p:bg>
+    <p:spTree>
+      <p:nvGrpSpPr>
+        <p:cNvPr id="1" name=""/>
+        <p:cNvGrpSpPr/>
+        <p:nvPr/>
+      </p:nvGrpSpPr>
+      <p:grpSpPr>
+        <a:xfrm>
+          <a:off x="0" y="0"/>
+          <a:ext cx="0" cy="0"/>
+          <a:chOff x="0" y="0"/>
+          <a:chExt cx="0" cy="0"/>
+        </a:xfrm>
+      </p:grpSpPr>
+      <p:sp>
+        <p:nvSpPr>
+          <p:cNvPr id="2" name="Shape 0"/>
+          <p:cNvSpPr/>
+          <p:nvPr/>
+        </p:nvSpPr>
+        <p:spPr>
+          <a:xfrm>
+            <a:off x="0" y="0"/>
+            <a:ext cx="12191695" cy="6858000"/>
+          </a:xfrm>
+          <a:prstGeom prst="rect">
+            <a:avLst/>
+          </a:prstGeom>
+          <a:solidFill>
+            <a:srgbClr val="1F3D2C"/>
+          </a:solidFill>
+          <a:ln/>
+        </p:spPr>
+        <p:txBody>
+          <a:bodyPr/>
+          <a:lstStyle/>
+          <a:p>
+            <a:endParaRPr lang="en-US"/>
+          </a:p>
+        </p:txBody>
+      </p:sp>
+      <p:sp>
+        <p:nvSpPr>
+          <p:cNvPr id="3" name="Shape 1"/>
+          <p:cNvSpPr/>
+          <p:nvPr/>
+        </p:nvSpPr>
+        <p:spPr>
+          <a:xfrm>
+            <a:off x="0" y="0"/>
+            <a:ext cx="12191695" cy="128016"/>
+          </a:xfrm>
+          <a:prstGeom prst="rect">
+            <a:avLst/>
+          </a:prstGeom>
+          <a:solidFill>
+            <a:srgbClr val="C1440E"/>
+          </a:solidFill>
+          <a:ln/>
+        </p:spPr>
+        <p:txBody>
+          <a:bodyPr/>
+          <a:lstStyle/>
+          <a:p>
+            <a:endParaRPr lang="en-US"/>
+          </a:p>
+        </p:txBody>
+      </p:sp>
+      <p:sp>
+        <p:nvSpPr>
+          <p:cNvPr id="4" name="Text 2"/>
+          <p:cNvSpPr txBox="1"/>
+          <p:nvPr/>
+        </p:nvSpPr>
+        <p:spPr>
+          <a:xfrm>
+            <a:off x="1188720" y="2103120"/>
+            <a:ext cx="9784080" cy="2926080"/>
+          </a:xfrm>
+          <a:prstGeom prst="rect">
+            <a:avLst/>
+          </a:prstGeom>
+          <a:noFill/>
+          <a:ln/>
+        </p:spPr>
+        <p:txBody>
+          <a:bodyPr wrap="square" lIns="0" tIns="0" rIns="0" bIns="0" rtlCol="0" anchor="ctr"/>
+          <a:lstStyle/>
+          <a:p>
+            <a:pPr marL="0" indent="0" algn="ctr">
+              <a:buNone/>
+            </a:pPr>
+            <a:r>
+              <a:rPr sz="2800" b="1">
+                <a:solidFill>
+                  <a:srgbClr val="F5F5F0"/>
+                </a:solidFill>
+                <a:latin typeface="Cambria"/>
+              </a:rPr>
+              <a:t>The herd has crossed. The builds are green. The watering hole is quiet.</a:t>
+            </a:r>
+            <a:endParaRPr lang="en-US" sz="3000" dirty="0"/>
+          </a:p>
+          <a:p>
+            <a:pPr algn="ctr">
+              <a:spcBef>
+                <a:spcPts val="1400"/>
+              </a:spcBef>
+            </a:pPr>
+            <a:r>
+              <a:rPr sz="2800" b="1">
+                <a:solidFill>
+                  <a:srgbClr val="F5F5F0"/>
+                </a:solidFill>
+                <a:latin typeface="Cambria"/>
+              </a:rPr>
+              <a:t>On the far bank, one pipeline still runs every Tuesday at 3 a.m. — triggered by nothing, owned by no one.</a:t>
+            </a:r>
+          </a:p>
+          <a:p>
+            <a:pPr algn="ctr">
+              <a:spcBef>
+                <a:spcPts val="1400"/>
+              </a:spcBef>
+            </a:pPr>
+            <a:r>
+              <a:rPr sz="2800" b="1">
+                <a:solidFill>
+                  <a:srgbClr val="F5F5F0"/>
+                </a:solidFill>
+                <a:latin typeface="Cambria"/>
+              </a:rPr>
+              <a:t>Nobody told it the herd had moved.</a:t>
+            </a:r>
+          </a:p>
+        </p:txBody>
+      </p:sp>
+      <p:sp>
+        <p:nvSpPr>
+          <p:cNvPr id="5" name="Text 3"/>
+          <p:cNvSpPr txBox="1"/>
+          <p:nvPr/>
+        </p:nvSpPr>
+        <p:spPr>
+          <a:xfrm>
+            <a:off x="548640" y="5989320"/>
+            <a:ext cx="11064240" cy="411480"/>
+          </a:xfrm>
+          <a:prstGeom prst="rect">
+            <a:avLst/>
+          </a:prstGeom>
+          <a:noFill/>
+          <a:ln/>
+        </p:spPr>
+        <p:txBody>
+          <a:bodyPr wrap="square" lIns="0" tIns="0" rIns="0" bIns="0" rtlCol="0" anchor="ctr"/>
+          <a:lstStyle/>
+          <a:p>
+            <a:pPr marL="0" indent="0" algn="ctr">
+              <a:buNone/>
+            </a:pPr>
+            <a:r>
+              <a:rPr sz="1300">
+                <a:solidFill>
+                  <a:srgbClr val="E0B85C"/>
+                </a:solidFill>
+                <a:latin typeface="Calibri"/>
+              </a:rPr>
+              <a:t>— CLOSING NARRATION, FROM THE FAR BANK</a:t>
+            </a:r>
+            <a:endParaRPr lang="en-US" sz="1300" dirty="0"/>
+          </a:p>
+        </p:txBody>
+      </p:sp>
+      <p:sp>
+        <p:nvSpPr>
+          <p:cNvPr id="6" name="Slide Number Placeholder"/>
+          <p:cNvSpPr>
+            <a:spLocks noGrp="1"/>
+          </p:cNvSpPr>
+          <p:nvPr>
+            <p:ph type="sldNum" sz="quarter" idx="10"/>
+          </p:nvPr>
+        </p:nvSpPr>
+        <p:spPr/>
+        <p:txBody>
+          <a:bodyPr/>
+          <a:lstStyle/>
+          <a:p>
+            <a:fld id="{BCB632DE-6AD4-40F1-944C-28C0E9BF62DC}" type="slidenum">
+              <a:rPr lang="en-US">
+                <a:solidFill>
+                  <a:srgbClr val="E0B85C"/>
+                </a:solidFill>
+              </a:rPr>
+              <a:t>50</a:t>
+            </a:fld>
+            <a:endParaRPr lang="en-US">
+              <a:solidFill>
+                <a:srgbClr val="E0B85C"/>
+              </a:solidFill>
+            </a:endParaRPr>
+          </a:p>
+        </p:txBody>
+      </p:sp>
+    </p:spTree>
+  </p:cSld>
+  <p:clrMapOvr>
+    <a:masterClrMapping/>
+  </p:clrMapOvr>
+</p:sld>
+</file>
+
+<file path=ppt/slides/slide51.xml><?xml version="1.0" encoding="utf-8"?>
 <p:sld xmlns:a="http://schemas.openxmlformats.org/drawingml/2006/main" xmlns:r="http://schemas.openxmlformats.org/officeDocument/2006/relationships" xmlns:p="http://schemas.openxmlformats.org/presentationml/2006/main">
   <p:cSld name="Slide 57">
     <p:bg>
@@ -29833,7 +31989,7 @@
         </p:nvSpPr>
         <p:spPr>
           <a:xfrm>
-            <a:off x="777240" y="2926080"/>
+            <a:off x="777240" y="2776886"/>
             <a:ext cx="6035040" cy="731520"/>
           </a:xfrm>
           <a:prstGeom prst="rect">
@@ -29850,7 +32006,7 @@
               <a:buNone/>
             </a:pPr>
             <a:r>
-              <a:rPr sz="1800" b="0">
+              <a:rPr sz="1800" b="0" dirty="0">
                 <a:solidFill>
                   <a:srgbClr val="6B6B63"/>
                 </a:solidFill>
@@ -29870,7 +32026,7 @@
         </p:nvSpPr>
         <p:spPr>
           <a:xfrm>
-            <a:off x="777240" y="3931920"/>
+            <a:off x="777240" y="3656066"/>
             <a:ext cx="6035040" cy="411480"/>
           </a:xfrm>
           <a:prstGeom prst="rect">
@@ -29887,7 +32043,7 @@
               <a:buNone/>
             </a:pPr>
             <a:r>
-              <a:rPr sz="2000" b="1">
+              <a:rPr sz="2000" b="1" dirty="0">
                 <a:solidFill>
                   <a:srgbClr val="1F3D2C"/>
                 </a:solidFill>
@@ -29907,7 +32063,7 @@
         </p:nvSpPr>
         <p:spPr>
           <a:xfrm>
-            <a:off x="777240" y="4370832"/>
+            <a:off x="777240" y="4094978"/>
             <a:ext cx="6035040" cy="365760"/>
           </a:xfrm>
           <a:prstGeom prst="rect">
@@ -29924,7 +32080,7 @@
               <a:buNone/>
             </a:pPr>
             <a:r>
-              <a:rPr sz="1500" b="0">
+              <a:rPr sz="1500" b="0" dirty="0">
                 <a:solidFill>
                   <a:srgbClr val="2B2B2B"/>
                 </a:solidFill>
@@ -29944,7 +32100,7 @@
         </p:nvSpPr>
         <p:spPr>
           <a:xfrm>
-            <a:off x="777240" y="5212080"/>
+            <a:off x="777240" y="4786465"/>
             <a:ext cx="6035040" cy="411480"/>
           </a:xfrm>
           <a:prstGeom prst="rect">
@@ -29961,7 +32117,7 @@
               <a:buNone/>
             </a:pPr>
             <a:r>
-              <a:rPr sz="1700" b="0">
+              <a:rPr sz="1700" b="0" dirty="0">
                 <a:solidFill>
                   <a:srgbClr val="C1440E"/>
                 </a:solidFill>
@@ -29981,8 +32137,8 @@
         </p:nvSpPr>
         <p:spPr>
           <a:xfrm>
-            <a:off x="7360920" y="1783080"/>
-            <a:ext cx="4297680" cy="4206240"/>
+            <a:off x="7443196" y="1433090"/>
+            <a:ext cx="4297680" cy="5059150"/>
           </a:xfrm>
           <a:prstGeom prst="roundRect">
             <a:avLst>
@@ -30013,7 +32169,7 @@
         </p:nvSpPr>
         <p:spPr>
           <a:xfrm>
-            <a:off x="7360920" y="1938528"/>
+            <a:off x="7443196" y="2011680"/>
             <a:ext cx="4297680" cy="292608"/>
           </a:xfrm>
           <a:prstGeom prst="rect">
@@ -30029,7 +32185,7 @@
           <a:p>
             <a:pPr algn="ctr"/>
             <a:r>
-              <a:rPr sz="1100" b="1">
+              <a:rPr sz="1300" b="1" dirty="0">
                 <a:solidFill>
                   <a:srgbClr val="C1440E"/>
                 </a:solidFill>
@@ -30056,7 +32212,7 @@
         </p:blipFill>
         <p:spPr>
           <a:xfrm>
-            <a:off x="8458200" y="2304288"/>
+            <a:off x="8540476" y="2377440"/>
             <a:ext cx="2103120" cy="2103120"/>
           </a:xfrm>
           <a:prstGeom prst="rect">
@@ -30072,7 +32228,7 @@
         </p:nvSpPr>
         <p:spPr>
           <a:xfrm>
-            <a:off x="7360920" y="4526280"/>
+            <a:off x="7443196" y="4599432"/>
             <a:ext cx="4297680" cy="292608"/>
           </a:xfrm>
           <a:prstGeom prst="rect">
@@ -30107,8 +32263,8 @@
         </p:nvSpPr>
         <p:spPr>
           <a:xfrm>
-            <a:off x="7543800" y="4919472"/>
-            <a:ext cx="3931920" cy="960120"/>
+            <a:off x="7626076" y="4992624"/>
+            <a:ext cx="3931920" cy="700192"/>
           </a:xfrm>
           <a:prstGeom prst="rect">
             <a:avLst/>
@@ -30123,7 +32279,7 @@
           <a:p>
             <a:pPr algn="ctr"/>
             <a:r>
-              <a:rPr sz="1150" b="0">
+              <a:rPr sz="1150" b="0" dirty="0">
                 <a:solidFill>
                   <a:srgbClr val="2B2B2B"/>
                 </a:solidFill>
@@ -30139,13 +32295,31 @@
               </a:spcBef>
             </a:pPr>
             <a:r>
-              <a:rPr sz="1150" b="0">
+              <a:rPr sz="1150" b="0" dirty="0">
                 <a:solidFill>
                   <a:srgbClr val="2B2B2B"/>
                 </a:solidFill>
                 <a:latin typeface="Calibri"/>
               </a:rPr>
-              <a:t>gh-ado2gh  ·  gh-actions-importer</a:t>
+              <a:t>gh-ado2gh  ·  </a:t>
+            </a:r>
+            <a:r>
+              <a:rPr sz="1150" b="0" dirty="0" err="1">
+                <a:solidFill>
+                  <a:srgbClr val="2B2B2B"/>
+                </a:solidFill>
+                <a:latin typeface="Calibri"/>
+              </a:rPr>
+              <a:t>gh</a:t>
+            </a:r>
+            <a:r>
+              <a:rPr sz="1150" b="0" dirty="0">
+                <a:solidFill>
+                  <a:srgbClr val="2B2B2B"/>
+                </a:solidFill>
+                <a:latin typeface="Calibri"/>
+              </a:rPr>
+              <a:t>-actions-importer</a:t>
             </a:r>
           </a:p>
           <a:p>
@@ -30155,760 +32329,107 @@
               </a:spcBef>
             </a:pPr>
             <a:r>
-              <a:rPr sz="1150" b="0">
+              <a:rPr sz="1150" b="0" dirty="0">
                 <a:solidFill>
                   <a:srgbClr val="2B2B2B"/>
                 </a:solidFill>
                 <a:latin typeface="Calibri"/>
               </a:rPr>
-              <a:t>AI analyze / convert / validate prompts</a:t>
-            </a:r>
-          </a:p>
-          <a:p>
-            <a:pPr algn="ctr">
-              <a:spcBef>
-                <a:spcPts val="300"/>
-              </a:spcBef>
+              <a:t>Every note behind this talk</a:t>
+            </a:r>
+          </a:p>
+        </p:txBody>
+      </p:sp>
+      <p:sp>
+        <p:nvSpPr>
+          <p:cNvPr id="15" name="Slide Number Placeholder"/>
+          <p:cNvSpPr>
+            <a:spLocks noGrp="1"/>
+          </p:cNvSpPr>
+          <p:nvPr>
+            <p:ph type="sldNum" sz="quarter" idx="10"/>
+          </p:nvPr>
+        </p:nvSpPr>
+        <p:spPr/>
+        <p:txBody>
+          <a:bodyPr/>
+          <a:lstStyle/>
+          <a:p>
+            <a:fld id="{BCB632DE-6AD4-40F1-944C-28C0E9BF62DC}" type="slidenum">
+              <a:rPr lang="en-US"/>
+              <a:t>51</a:t>
+            </a:fld>
+            <a:endParaRPr lang="en-US"/>
+          </a:p>
+        </p:txBody>
+      </p:sp>
+      <p:sp>
+        <p:nvSpPr>
+          <p:cNvPr id="20" name="Text 5">
+            <a:extLst>
+              <a:ext uri="{FF2B5EF4-FFF2-40B4-BE49-F238E27FC236}">
+                <a16:creationId xmlns:a16="http://schemas.microsoft.com/office/drawing/2014/main" id="{CB8717A8-9D3F-256D-9992-560C6C010532}"/>
+              </a:ext>
+            </a:extLst>
+          </p:cNvPr>
+          <p:cNvSpPr txBox="1"/>
+          <p:nvPr/>
+        </p:nvSpPr>
+        <p:spPr>
+          <a:xfrm>
+            <a:off x="2044969" y="5939697"/>
+            <a:ext cx="1443170" cy="365760"/>
+          </a:xfrm>
+          <a:prstGeom prst="rect">
+            <a:avLst/>
+          </a:prstGeom>
+          <a:noFill/>
+          <a:ln/>
+        </p:spPr>
+        <p:txBody>
+          <a:bodyPr wrap="square" lIns="0" tIns="0" rIns="0" bIns="0" rtlCol="0" anchor="ctr"/>
+          <a:lstStyle/>
+          <a:p>
+            <a:pPr marL="0" indent="0" algn="l">
+              <a:buNone/>
             </a:pPr>
             <a:r>
-              <a:rPr sz="1150" b="0">
-                <a:solidFill>
-                  <a:srgbClr val="2B2B2B"/>
-                </a:solidFill>
-                <a:latin typeface="Calibri"/>
-              </a:rPr>
-              <a:t>Every note behind this talk</a:t>
-            </a:r>
-          </a:p>
-        </p:txBody>
-      </p:sp>
-    </p:spTree>
-  </p:cSld>
-  <p:clrMapOvr>
-    <a:masterClrMapping/>
-  </p:clrMapOvr>
-</p:sld>
-</file>
-
-<file path=ppt/slides/slide51.xml><?xml version="1.0" encoding="utf-8"?>
-<p:sld xmlns:a="http://schemas.openxmlformats.org/drawingml/2006/main" xmlns:r="http://schemas.openxmlformats.org/officeDocument/2006/relationships" xmlns:p="http://schemas.openxmlformats.org/presentationml/2006/main">
-  <p:cSld name="Slide 27">
-    <p:bg>
-      <p:bgPr>
-        <a:solidFill>
-          <a:srgbClr val="FFFFFF"/>
-        </a:solidFill>
-        <a:effectLst/>
-      </p:bgPr>
-    </p:bg>
-    <p:spTree>
-      <p:nvGrpSpPr>
-        <p:cNvPr id="1" name=""/>
-        <p:cNvGrpSpPr/>
-        <p:nvPr/>
-      </p:nvGrpSpPr>
-      <p:grpSpPr>
-        <a:xfrm>
-          <a:off x="0" y="0"/>
-          <a:ext cx="0" cy="0"/>
-          <a:chOff x="0" y="0"/>
-          <a:chExt cx="0" cy="0"/>
-        </a:xfrm>
-      </p:grpSpPr>
-      <p:sp>
-        <p:nvSpPr>
-          <p:cNvPr id="2" name="Shape 0"/>
-          <p:cNvSpPr/>
-          <p:nvPr/>
-        </p:nvSpPr>
-        <p:spPr>
-          <a:xfrm>
-            <a:off x="548640" y="457200"/>
-            <a:ext cx="566928" cy="566928"/>
-          </a:xfrm>
-          <a:prstGeom prst="ellipse">
-            <a:avLst/>
-          </a:prstGeom>
-          <a:solidFill>
-            <a:srgbClr val="C1440E"/>
-          </a:solidFill>
-          <a:ln/>
-        </p:spPr>
-        <p:txBody>
-          <a:bodyPr/>
-          <a:lstStyle/>
-          <a:p>
-            <a:endParaRPr lang="en-US"/>
+              <a:rPr lang="en-US" sz="1500" dirty="0"/>
+              <a:t>Careers @ Hunter</a:t>
+            </a:r>
           </a:p>
         </p:txBody>
       </p:sp>
       <p:pic>
         <p:nvPicPr>
-          <p:cNvPr id="3" name="Image 0" descr="/home/claude/pptx-build/assets/icons/FaFlask-FFFFFF-200.png"/>
+          <p:cNvPr id="22" name="Picture 21">
+            <a:extLst>
+              <a:ext uri="{FF2B5EF4-FFF2-40B4-BE49-F238E27FC236}">
+                <a16:creationId xmlns:a16="http://schemas.microsoft.com/office/drawing/2014/main" id="{3D11451F-32AE-DE63-753E-822486F5602F}"/>
+              </a:ext>
+            </a:extLst>
+          </p:cNvPr>
           <p:cNvPicPr>
             <a:picLocks noChangeAspect="1"/>
           </p:cNvPicPr>
           <p:nvPr/>
         </p:nvPicPr>
         <p:blipFill>
-          <a:blip r:embed="rId3"/>
+          <a:blip r:embed="rId4"/>
           <a:stretch>
             <a:fillRect/>
           </a:stretch>
         </p:blipFill>
         <p:spPr>
           <a:xfrm>
-            <a:off x="685800" y="594360"/>
-            <a:ext cx="292608" cy="292608"/>
+            <a:off x="736332" y="5523672"/>
+            <a:ext cx="1197811" cy="1197811"/>
           </a:xfrm>
           <a:prstGeom prst="rect">
             <a:avLst/>
           </a:prstGeom>
         </p:spPr>
       </p:pic>
-      <p:sp>
-        <p:nvSpPr>
-          <p:cNvPr id="4" name="Text 1"/>
-          <p:cNvSpPr txBox="1"/>
-          <p:nvPr/>
-        </p:nvSpPr>
-        <p:spPr>
-          <a:xfrm>
-            <a:off x="1234440" y="420624"/>
-            <a:ext cx="9875520" cy="320040"/>
-          </a:xfrm>
-          <a:prstGeom prst="rect">
-            <a:avLst/>
-          </a:prstGeom>
-          <a:noFill/>
-          <a:ln/>
-        </p:spPr>
-        <p:txBody>
-          <a:bodyPr wrap="square" lIns="0" tIns="0" rIns="0" bIns="0" rtlCol="0" anchor="ctr"/>
-          <a:lstStyle/>
-          <a:p>
-            <a:pPr marL="0" indent="0">
-              <a:buNone/>
-            </a:pPr>
-            <a:r>
-              <a:rPr lang="en-US" sz="1500" b="1" kern="0" spc="200" dirty="0">
-                <a:solidFill>
-                  <a:srgbClr val="C1440E"/>
-                </a:solidFill>
-                <a:latin typeface="Calibri" pitchFamily="34" charset="0"/>
-                <a:ea typeface="Calibri" pitchFamily="34" charset="-122"/>
-                <a:cs typeface="Calibri" pitchFamily="34" charset="-120"/>
-              </a:rPr>
-              <a:t>APPENDIX  ·  CROSSING THE RIVER</a:t>
-            </a:r>
-            <a:endParaRPr lang="en-US" sz="1500" dirty="0"/>
-          </a:p>
-        </p:txBody>
-      </p:sp>
-      <p:sp>
-        <p:nvSpPr>
-          <p:cNvPr id="5" name="Text 2"/>
-          <p:cNvSpPr txBox="1"/>
-          <p:nvPr/>
-        </p:nvSpPr>
-        <p:spPr>
-          <a:xfrm>
-            <a:off x="1234440" y="749808"/>
-            <a:ext cx="10515600" cy="868680"/>
-          </a:xfrm>
-          <a:prstGeom prst="rect">
-            <a:avLst/>
-          </a:prstGeom>
-          <a:noFill/>
-          <a:ln/>
-        </p:spPr>
-        <p:txBody>
-          <a:bodyPr wrap="square" lIns="0" tIns="0" rIns="0" bIns="0" rtlCol="0" anchor="t"/>
-          <a:lstStyle/>
-          <a:p>
-            <a:pPr marL="0" indent="0">
-              <a:buNone/>
-            </a:pPr>
-            <a:r>
-              <a:rPr lang="en-US" sz="3200" b="1">
-                <a:solidFill>
-                  <a:srgbClr val="1F3D2C"/>
-                </a:solidFill>
-                <a:latin typeface="Cambria"/>
-              </a:rPr>
-              <a:t>Repository Plane — ELM Reduces Cutover Disruption</a:t>
-            </a:r>
-            <a:endParaRPr lang="en-US" sz="3200" dirty="0"/>
-          </a:p>
-        </p:txBody>
-      </p:sp>
-      <p:sp>
-        <p:nvSpPr>
-          <p:cNvPr id="6" name="Shape 3"/>
-          <p:cNvSpPr/>
-          <p:nvPr/>
-        </p:nvSpPr>
-        <p:spPr>
-          <a:xfrm>
-            <a:off x="548640" y="1531034"/>
-            <a:ext cx="11064240" cy="813816"/>
-          </a:xfrm>
-          <a:prstGeom prst="roundRect">
-            <a:avLst>
-              <a:gd name="adj" fmla="val 8000"/>
-            </a:avLst>
-          </a:prstGeom>
-          <a:solidFill>
-            <a:srgbClr val="F7F6F2"/>
-          </a:solidFill>
-          <a:ln w="12700">
-            <a:solidFill>
-              <a:srgbClr val="DDD8CC"/>
-            </a:solidFill>
-            <a:prstDash val="solid"/>
-          </a:ln>
-          <a:effectLst>
-            <a:outerShdw blurRad="76200" dist="25400" dir="5400000" algn="bl" rotWithShape="0">
-              <a:srgbClr val="000000">
-                <a:alpha val="12000"/>
-              </a:srgbClr>
-            </a:outerShdw>
-          </a:effectLst>
-        </p:spPr>
-        <p:txBody>
-          <a:bodyPr/>
-          <a:lstStyle/>
-          <a:p>
-            <a:endParaRPr lang="en-US"/>
-          </a:p>
-        </p:txBody>
-      </p:sp>
-      <p:sp>
-        <p:nvSpPr>
-          <p:cNvPr id="7" name="Text 4"/>
-          <p:cNvSpPr txBox="1"/>
-          <p:nvPr/>
-        </p:nvSpPr>
-        <p:spPr>
-          <a:xfrm>
-            <a:off x="822960" y="1430450"/>
-            <a:ext cx="10515600" cy="1097280"/>
-          </a:xfrm>
-          <a:prstGeom prst="rect">
-            <a:avLst/>
-          </a:prstGeom>
-          <a:noFill/>
-          <a:ln/>
-        </p:spPr>
-        <p:txBody>
-          <a:bodyPr wrap="square" lIns="0" tIns="0" rIns="0" bIns="0" rtlCol="0" anchor="ctr"/>
-          <a:lstStyle/>
-          <a:p>
-            <a:pPr marL="0" indent="0">
-              <a:lnSpc>
-                <a:spcPct val="115000"/>
-              </a:lnSpc>
-              <a:buNone/>
-            </a:pPr>
-            <a:r>
-              <a:rPr lang="en-US" sz="1650" b="0" dirty="0">
-                <a:solidFill>
-                  <a:srgbClr val="2B2B2B"/>
-                </a:solidFill>
-                <a:latin typeface="Calibri"/>
-              </a:rPr>
-              <a:t>Enterprise Live Migrations (ELM) is in public preview for the Azure DevOps path, targeting GitHub Enterprise Cloud with data residency. Its differentiator is continuous sync plus a customer-scheduled cutover.</a:t>
-            </a:r>
-            <a:endParaRPr lang="en-US" sz="1700" dirty="0"/>
-          </a:p>
-        </p:txBody>
-      </p:sp>
-      <p:sp>
-        <p:nvSpPr>
-          <p:cNvPr id="8" name="Shape 5"/>
-          <p:cNvSpPr/>
-          <p:nvPr/>
-        </p:nvSpPr>
-        <p:spPr>
-          <a:xfrm>
-            <a:off x="548640" y="2527730"/>
-            <a:ext cx="5349240" cy="2912950"/>
-          </a:xfrm>
-          <a:prstGeom prst="roundRect">
-            <a:avLst>
-              <a:gd name="adj" fmla="val 4800"/>
-            </a:avLst>
-          </a:prstGeom>
-          <a:solidFill>
-            <a:srgbClr val="F7F6F2"/>
-          </a:solidFill>
-          <a:ln w="12700">
-            <a:solidFill>
-              <a:srgbClr val="DDD8CC"/>
-            </a:solidFill>
-            <a:prstDash val="solid"/>
-          </a:ln>
-          <a:effectLst>
-            <a:outerShdw blurRad="76200" dist="25400" dir="5400000" algn="bl" rotWithShape="0">
-              <a:srgbClr val="000000">
-                <a:alpha val="12000"/>
-              </a:srgbClr>
-            </a:outerShdw>
-          </a:effectLst>
-        </p:spPr>
-        <p:txBody>
-          <a:bodyPr/>
-          <a:lstStyle/>
-          <a:p>
-            <a:endParaRPr lang="en-US"/>
-          </a:p>
-        </p:txBody>
-      </p:sp>
-      <p:sp>
-        <p:nvSpPr>
-          <p:cNvPr id="9" name="Text 6"/>
-          <p:cNvSpPr txBox="1"/>
-          <p:nvPr/>
-        </p:nvSpPr>
-        <p:spPr>
-          <a:xfrm>
-            <a:off x="899160" y="2749765"/>
-            <a:ext cx="4800600" cy="411480"/>
-          </a:xfrm>
-          <a:prstGeom prst="rect">
-            <a:avLst/>
-          </a:prstGeom>
-          <a:noFill/>
-          <a:ln/>
-        </p:spPr>
-        <p:txBody>
-          <a:bodyPr wrap="square" lIns="0" tIns="0" rIns="0" bIns="0" rtlCol="0" anchor="ctr"/>
-          <a:lstStyle/>
-          <a:p>
-            <a:pPr marL="0" indent="0">
-              <a:buNone/>
-            </a:pPr>
-            <a:r>
-              <a:rPr lang="en-US" sz="1700" b="1" dirty="0">
-                <a:solidFill>
-                  <a:srgbClr val="1F3D2C"/>
-                </a:solidFill>
-                <a:latin typeface="Cambria"/>
-              </a:rPr>
-              <a:t>What It Adds</a:t>
-            </a:r>
-            <a:endParaRPr lang="en-US" sz="1700" dirty="0"/>
-          </a:p>
-        </p:txBody>
-      </p:sp>
-      <p:sp>
-        <p:nvSpPr>
-          <p:cNvPr id="10" name="Text 7"/>
-          <p:cNvSpPr txBox="1"/>
-          <p:nvPr/>
-        </p:nvSpPr>
-        <p:spPr>
-          <a:xfrm>
-            <a:off x="822960" y="3161245"/>
-            <a:ext cx="4800600" cy="2233715"/>
-          </a:xfrm>
-          <a:prstGeom prst="rect">
-            <a:avLst/>
-          </a:prstGeom>
-          <a:noFill/>
-          <a:ln/>
-        </p:spPr>
-        <p:txBody>
-          <a:bodyPr wrap="square" lIns="0" tIns="0" rIns="0" bIns="0" rtlCol="0" anchor="t"/>
-          <a:lstStyle/>
-          <a:p>
-            <a:pPr marL="285750" indent="-285750">
-              <a:lnSpc>
-                <a:spcPct val="105000"/>
-              </a:lnSpc>
-              <a:spcAft>
-                <a:spcPts val="800"/>
-              </a:spcAft>
-              <a:buSzPct val="100000"/>
-              <a:buFont typeface="Arial" panose="020B0604020202020204" pitchFamily="34" charset="0"/>
-              <a:buChar char="•"/>
-            </a:pPr>
-            <a:r>
-              <a:rPr lang="en-US" sz="1400" dirty="0">
-                <a:solidFill>
-                  <a:srgbClr val="2B2B2B"/>
-                </a:solidFill>
-                <a:latin typeface="Calibri"/>
-              </a:rPr>
-              <a:t>Pre-migration checks and target creation</a:t>
-            </a:r>
-            <a:endParaRPr lang="en-US" sz="1350" dirty="0"/>
-          </a:p>
-          <a:p>
-            <a:pPr marL="285750" indent="-285750">
-              <a:spcAft>
-                <a:spcPts val="800"/>
-              </a:spcAft>
-              <a:buFont typeface="Arial" panose="020B0604020202020204" pitchFamily="34" charset="0"/>
-              <a:buChar char="•"/>
-            </a:pPr>
-            <a:r>
-              <a:rPr lang="en-US" sz="1400" dirty="0">
-                <a:solidFill>
-                  <a:srgbClr val="2B2B2B"/>
-                </a:solidFill>
-                <a:latin typeface="Calibri"/>
-              </a:rPr>
-              <a:t>Git, PR, and policy delta synchronization</a:t>
-            </a:r>
-          </a:p>
-          <a:p>
-            <a:pPr marL="285750" indent="-285750">
-              <a:spcAft>
-                <a:spcPts val="800"/>
-              </a:spcAft>
-              <a:buFont typeface="Arial" panose="020B0604020202020204" pitchFamily="34" charset="0"/>
-              <a:buChar char="•"/>
-            </a:pPr>
-            <a:r>
-              <a:rPr lang="en-US" sz="1400" dirty="0">
-                <a:solidFill>
-                  <a:srgbClr val="2B2B2B"/>
-                </a:solidFill>
-                <a:latin typeface="Calibri"/>
-              </a:rPr>
-              <a:t>Boards connection and pipeline rewiring</a:t>
-            </a:r>
-          </a:p>
-          <a:p>
-            <a:pPr marL="285750" indent="-285750">
-              <a:spcAft>
-                <a:spcPts val="800"/>
-              </a:spcAft>
-              <a:buFont typeface="Arial" panose="020B0604020202020204" pitchFamily="34" charset="0"/>
-              <a:buChar char="•"/>
-            </a:pPr>
-            <a:r>
-              <a:rPr lang="en-US" sz="1400" dirty="0">
-                <a:solidFill>
-                  <a:srgbClr val="2B2B2B"/>
-                </a:solidFill>
-                <a:latin typeface="Calibri"/>
-              </a:rPr>
-              <a:t>A scheduled read-only cutover window under 30 minutes</a:t>
-            </a:r>
-          </a:p>
-        </p:txBody>
-      </p:sp>
-      <p:sp>
-        <p:nvSpPr>
-          <p:cNvPr id="11" name="Shape 8"/>
-          <p:cNvSpPr/>
-          <p:nvPr/>
-        </p:nvSpPr>
-        <p:spPr>
-          <a:xfrm>
-            <a:off x="6263640" y="2527730"/>
-            <a:ext cx="5349240" cy="2912950"/>
-          </a:xfrm>
-          <a:prstGeom prst="roundRect">
-            <a:avLst>
-              <a:gd name="adj" fmla="val 4800"/>
-            </a:avLst>
-          </a:prstGeom>
-          <a:solidFill>
-            <a:srgbClr val="1F3D2C"/>
-          </a:solidFill>
-          <a:ln w="12700">
-            <a:solidFill>
-              <a:srgbClr val="DDD8CC"/>
-            </a:solidFill>
-            <a:prstDash val="solid"/>
-          </a:ln>
-          <a:effectLst>
-            <a:outerShdw blurRad="76200" dist="25400" dir="5400000" algn="bl" rotWithShape="0">
-              <a:srgbClr val="000000">
-                <a:alpha val="12000"/>
-              </a:srgbClr>
-            </a:outerShdw>
-          </a:effectLst>
-        </p:spPr>
-        <p:txBody>
-          <a:bodyPr/>
-          <a:lstStyle/>
-          <a:p>
-            <a:endParaRPr lang="en-US"/>
-          </a:p>
-        </p:txBody>
-      </p:sp>
-      <p:sp>
-        <p:nvSpPr>
-          <p:cNvPr id="12" name="Text 9"/>
-          <p:cNvSpPr txBox="1"/>
-          <p:nvPr/>
-        </p:nvSpPr>
-        <p:spPr>
-          <a:xfrm>
-            <a:off x="6492240" y="2749765"/>
-            <a:ext cx="4800600" cy="411480"/>
-          </a:xfrm>
-          <a:prstGeom prst="rect">
-            <a:avLst/>
-          </a:prstGeom>
-          <a:noFill/>
-          <a:ln/>
-        </p:spPr>
-        <p:txBody>
-          <a:bodyPr wrap="square" lIns="0" tIns="0" rIns="0" bIns="0" rtlCol="0" anchor="ctr"/>
-          <a:lstStyle/>
-          <a:p>
-            <a:pPr marL="0" indent="0">
-              <a:buNone/>
-            </a:pPr>
-            <a:r>
-              <a:rPr lang="en-US" sz="1700" b="1" dirty="0">
-                <a:solidFill>
-                  <a:srgbClr val="F5F5F0"/>
-                </a:solidFill>
-                <a:latin typeface="Cambria"/>
-              </a:rPr>
-              <a:t>Limits and What Remains</a:t>
-            </a:r>
-            <a:endParaRPr lang="en-US" sz="1700" dirty="0"/>
-          </a:p>
-        </p:txBody>
-      </p:sp>
-      <p:sp>
-        <p:nvSpPr>
-          <p:cNvPr id="13" name="Text 10"/>
-          <p:cNvSpPr txBox="1"/>
-          <p:nvPr/>
-        </p:nvSpPr>
-        <p:spPr>
-          <a:xfrm>
-            <a:off x="6537960" y="3161245"/>
-            <a:ext cx="4800600" cy="2233715"/>
-          </a:xfrm>
-          <a:prstGeom prst="rect">
-            <a:avLst/>
-          </a:prstGeom>
-          <a:noFill/>
-          <a:ln/>
-        </p:spPr>
-        <p:txBody>
-          <a:bodyPr wrap="square" lIns="0" tIns="0" rIns="0" bIns="0" rtlCol="0" anchor="t"/>
-          <a:lstStyle/>
-          <a:p>
-            <a:pPr marL="285750" indent="-285750">
-              <a:lnSpc>
-                <a:spcPct val="105000"/>
-              </a:lnSpc>
-              <a:spcAft>
-                <a:spcPts val="800"/>
-              </a:spcAft>
-              <a:buSzPct val="100000"/>
-              <a:buFont typeface="Arial" panose="020B0604020202020204" pitchFamily="34" charset="0"/>
-              <a:buChar char="•"/>
-            </a:pPr>
-            <a:r>
-              <a:rPr lang="en-US" sz="1400" dirty="0">
-                <a:solidFill>
-                  <a:srgbClr val="F5F5F0"/>
-                </a:solidFill>
-                <a:latin typeface="Calibri"/>
-              </a:rPr>
-              <a:t>Repositories only — 30 max (20 initial + 10 more)</a:t>
-            </a:r>
-            <a:endParaRPr lang="en-US" sz="1350" dirty="0"/>
-          </a:p>
-          <a:p>
-            <a:pPr marL="285750" indent="-285750">
-              <a:spcAft>
-                <a:spcPts val="800"/>
-              </a:spcAft>
-              <a:buFont typeface="Arial" panose="020B0604020202020204" pitchFamily="34" charset="0"/>
-              <a:buChar char="•"/>
-            </a:pPr>
-            <a:r>
-              <a:rPr lang="en-US" sz="1400" dirty="0">
-                <a:solidFill>
-                  <a:srgbClr val="F5F5F0"/>
-                </a:solidFill>
-                <a:latin typeface="Calibri"/>
-              </a:rPr>
-              <a:t>Cutover must finish within 21 days of starting</a:t>
-            </a:r>
-          </a:p>
-          <a:p>
-            <a:pPr marL="285750" indent="-285750">
-              <a:spcAft>
-                <a:spcPts val="800"/>
-              </a:spcAft>
-              <a:buFont typeface="Arial" panose="020B0604020202020204" pitchFamily="34" charset="0"/>
-              <a:buChar char="•"/>
-            </a:pPr>
-            <a:r>
-              <a:rPr lang="en-US" sz="1400" dirty="0">
-                <a:solidFill>
-                  <a:srgbClr val="F5F5F0"/>
-                </a:solidFill>
-                <a:latin typeface="Calibri"/>
-              </a:rPr>
-              <a:t>Access, permissions, and ruleset verification</a:t>
-            </a:r>
-          </a:p>
-          <a:p>
-            <a:pPr marL="285750" indent="-285750">
-              <a:spcAft>
-                <a:spcPts val="800"/>
-              </a:spcAft>
-              <a:buFont typeface="Arial" panose="020B0604020202020204" pitchFamily="34" charset="0"/>
-              <a:buChar char="•"/>
-            </a:pPr>
-            <a:r>
-              <a:rPr lang="en-US" sz="1400" dirty="0">
-                <a:solidFill>
-                  <a:srgbClr val="F5F5F0"/>
-                </a:solidFill>
-                <a:latin typeface="Calibri"/>
-              </a:rPr>
-              <a:t>Hardcoded URLs and other long-tail cleanup</a:t>
-            </a:r>
-          </a:p>
-          <a:p>
-            <a:pPr marL="285750" indent="-285750">
-              <a:spcAft>
-                <a:spcPts val="800"/>
-              </a:spcAft>
-              <a:buFont typeface="Arial" panose="020B0604020202020204" pitchFamily="34" charset="0"/>
-              <a:buChar char="•"/>
-            </a:pPr>
-            <a:r>
-              <a:rPr lang="en-US" sz="1400" dirty="0">
-                <a:solidFill>
-                  <a:srgbClr val="F5F5F0"/>
-                </a:solidFill>
-                <a:latin typeface="Calibri"/>
-              </a:rPr>
-              <a:t>Pipeline logic, work items, wikis, and other non-repository data</a:t>
-            </a:r>
-          </a:p>
-          <a:p>
-            <a:pPr marL="285750" indent="-285750">
-              <a:spcAft>
-                <a:spcPts val="800"/>
-              </a:spcAft>
-              <a:buFont typeface="Arial" panose="020B0604020202020204" pitchFamily="34" charset="0"/>
-              <a:buChar char="•"/>
-            </a:pPr>
-            <a:r>
-              <a:rPr lang="en-US" sz="1400" dirty="0">
-                <a:solidFill>
-                  <a:srgbClr val="F5F5F0"/>
-                </a:solidFill>
-                <a:latin typeface="Calibri"/>
-              </a:rPr>
-              <a:t>Post-cutover validation and decommissioning</a:t>
-            </a:r>
-          </a:p>
-        </p:txBody>
-      </p:sp>
-      <p:sp>
-        <p:nvSpPr>
-          <p:cNvPr id="16" name="Shape 3">
-            <a:extLst>
-              <a:ext uri="{FF2B5EF4-FFF2-40B4-BE49-F238E27FC236}">
-                <a16:creationId xmlns:a16="http://schemas.microsoft.com/office/drawing/2014/main" id="{2FACEC23-AB46-4DCB-0463-00C487B44704}"/>
-              </a:ext>
-            </a:extLst>
-          </p:cNvPr>
-          <p:cNvSpPr/>
-          <p:nvPr/>
-        </p:nvSpPr>
-        <p:spPr>
-          <a:xfrm>
-            <a:off x="548640" y="5628132"/>
-            <a:ext cx="11064240" cy="960120"/>
-          </a:xfrm>
-          <a:prstGeom prst="roundRect">
-            <a:avLst>
-              <a:gd name="adj" fmla="val 12632"/>
-            </a:avLst>
-          </a:prstGeom>
-          <a:solidFill>
-            <a:srgbClr val="1F3D2C"/>
-          </a:solidFill>
-          <a:ln w="12700">
-            <a:noFill/>
-            <a:prstDash val="solid"/>
-          </a:ln>
-          <a:effectLst>
-            <a:outerShdw blurRad="76200" dist="25400" dir="5400000" algn="bl" rotWithShape="0">
-              <a:srgbClr val="000000">
-                <a:alpha val="12000"/>
-              </a:srgbClr>
-            </a:outerShdw>
-          </a:effectLst>
-        </p:spPr>
-        <p:txBody>
-          <a:bodyPr/>
-          <a:lstStyle/>
-          <a:p>
-            <a:endParaRPr lang="en-US"/>
-          </a:p>
-        </p:txBody>
-      </p:sp>
-      <p:sp>
-        <p:nvSpPr>
-          <p:cNvPr id="18" name="Text 4">
-            <a:extLst>
-              <a:ext uri="{FF2B5EF4-FFF2-40B4-BE49-F238E27FC236}">
-                <a16:creationId xmlns:a16="http://schemas.microsoft.com/office/drawing/2014/main" id="{DA49AD78-DE17-95B0-86BA-23572C08058F}"/>
-              </a:ext>
-            </a:extLst>
-          </p:cNvPr>
-          <p:cNvSpPr txBox="1"/>
-          <p:nvPr/>
-        </p:nvSpPr>
-        <p:spPr>
-          <a:xfrm>
-            <a:off x="548640" y="5628132"/>
-            <a:ext cx="11064240" cy="960120"/>
-          </a:xfrm>
-          <a:prstGeom prst="rect">
-            <a:avLst/>
-          </a:prstGeom>
-          <a:noFill/>
-          <a:ln/>
-        </p:spPr>
-        <p:txBody>
-          <a:bodyPr wrap="square" lIns="256032" tIns="54864" rIns="256032" bIns="54864" rtlCol="0" anchor="ctr"/>
-          <a:lstStyle/>
-          <a:p>
-            <a:pPr marL="0" indent="0" algn="l">
-              <a:buNone/>
-            </a:pPr>
-            <a:r>
-              <a:rPr sz="1050" b="1" spc="120">
-                <a:solidFill>
-                  <a:srgbClr val="8C6A3F"/>
-                </a:solidFill>
-                <a:latin typeface="Calibri"/>
-              </a:rPr>
-              <a:t>TAKEAWAY </a:t>
-            </a:r>
-            <a:r>
-              <a:rPr sz="1500">
-                <a:solidFill>
-                  <a:srgbClr val="F5F5F0"/>
-                </a:solidFill>
-                <a:latin typeface="Calibri"/>
-              </a:rPr>
-              <a:t>ELM changes the synchronization and cutover experience — not the boundaries of what must be migrated and validated.</a:t>
-            </a:r>
-          </a:p>
-        </p:txBody>
-      </p:sp>
     </p:spTree>
   </p:cSld>
   <p:clrMapOvr>
@@ -31569,9 +33090,9 @@
               <a:buNone/>
             </a:pPr>
             <a:r>
-              <a:rPr sz="1050" b="1" spc="120">
-                <a:solidFill>
-                  <a:srgbClr val="8C6A3F"/>
+              <a:rPr sz="1250" b="1" spc="120">
+                <a:solidFill>
+                  <a:srgbClr val="E0B85C"/>
                 </a:solidFill>
                 <a:latin typeface="Calibri"/>
               </a:rPr>
@@ -31586,6 +33107,29 @@
               </a:rPr>
               <a:t>The platform decision did not disappear. It merely acquired more adapters.</a:t>
             </a:r>
+          </a:p>
+        </p:txBody>
+      </p:sp>
+      <p:sp>
+        <p:nvSpPr>
+          <p:cNvPr id="34" name="Slide Number Placeholder"/>
+          <p:cNvSpPr>
+            <a:spLocks noGrp="1"/>
+          </p:cNvSpPr>
+          <p:nvPr>
+            <p:ph type="sldNum" sz="quarter" idx="10"/>
+          </p:nvPr>
+        </p:nvSpPr>
+        <p:spPr/>
+        <p:txBody>
+          <a:bodyPr/>
+          <a:lstStyle/>
+          <a:p>
+            <a:fld id="{BCB632DE-6AD4-40F1-944C-28C0E9BF62DC}" type="slidenum">
+              <a:rPr lang="en-US"/>
+              <a:t>6</a:t>
+            </a:fld>
+            <a:endParaRPr lang="en-US"/>
           </a:p>
         </p:txBody>
       </p:sp>
@@ -32601,6 +34145,29 @@
           </a:p>
         </p:txBody>
       </p:sp>
+      <p:sp>
+        <p:nvSpPr>
+          <p:cNvPr id="31" name="Slide Number Placeholder"/>
+          <p:cNvSpPr>
+            <a:spLocks noGrp="1"/>
+          </p:cNvSpPr>
+          <p:nvPr>
+            <p:ph type="sldNum" sz="quarter" idx="10"/>
+          </p:nvPr>
+        </p:nvSpPr>
+        <p:spPr/>
+        <p:txBody>
+          <a:bodyPr/>
+          <a:lstStyle/>
+          <a:p>
+            <a:fld id="{BCB632DE-6AD4-40F1-944C-28C0E9BF62DC}" type="slidenum">
+              <a:rPr lang="en-US"/>
+              <a:t>7</a:t>
+            </a:fld>
+            <a:endParaRPr lang="en-US"/>
+          </a:p>
+        </p:txBody>
+      </p:sp>
     </p:spTree>
   </p:cSld>
   <p:clrMapOvr>
@@ -32688,7 +34255,7 @@
             <a:r>
               <a:rPr lang="en-US" sz="1700" b="1" kern="0" spc="300" dirty="0">
                 <a:solidFill>
-                  <a:srgbClr val="8C6A3F"/>
+                  <a:srgbClr val="E0B85C"/>
                 </a:solidFill>
                 <a:latin typeface="Calibri" pitchFamily="34" charset="0"/>
                 <a:ea typeface="Calibri" pitchFamily="34" charset="-122"/>
@@ -32792,7 +34359,7 @@
             <a:r>
               <a:rPr lang="en-US" sz="2000" i="1" dirty="0">
                 <a:solidFill>
-                  <a:srgbClr val="8C6A3F"/>
+                  <a:srgbClr val="E0B85C"/>
                 </a:solidFill>
                 <a:latin typeface="Calibri" pitchFamily="34" charset="0"/>
                 <a:ea typeface="Calibri" pitchFamily="34" charset="-122"/>
@@ -32831,6 +34398,37 @@
           <a:lstStyle/>
           <a:p>
             <a:endParaRPr lang="en-US"/>
+          </a:p>
+        </p:txBody>
+      </p:sp>
+      <p:sp>
+        <p:nvSpPr>
+          <p:cNvPr id="8" name="Slide Number Placeholder"/>
+          <p:cNvSpPr>
+            <a:spLocks noGrp="1"/>
+          </p:cNvSpPr>
+          <p:nvPr>
+            <p:ph type="sldNum" sz="quarter" idx="10"/>
+          </p:nvPr>
+        </p:nvSpPr>
+        <p:spPr/>
+        <p:txBody>
+          <a:bodyPr/>
+          <a:lstStyle/>
+          <a:p>
+            <a:fld id="{BCB632DE-6AD4-40F1-944C-28C0E9BF62DC}" type="slidenum">
+              <a:rPr lang="en-US">
+                <a:solidFill>
+                  <a:srgbClr val="E0B85C"/>
+                </a:solidFill>
+              </a:rPr>
+              <a:t>8</a:t>
+            </a:fld>
+            <a:endParaRPr lang="en-US">
+              <a:solidFill>
+                <a:srgbClr val="E0B85C"/>
+              </a:solidFill>
+            </a:endParaRPr>
           </a:p>
         </p:txBody>
       </p:sp>
@@ -33330,7 +34928,7 @@
                         <a:buNone/>
                       </a:pPr>
                       <a:r>
-                        <a:rPr lang="en-US" sz="1150" b="1" dirty="0">
+                        <a:rPr lang="en-US" sz="1350" b="1" dirty="0">
                           <a:solidFill>
                             <a:srgbClr val="F5F5F0"/>
                           </a:solidFill>
@@ -33541,7 +35139,7 @@
                         <a:buNone/>
                       </a:pPr>
                       <a:r>
-                        <a:rPr lang="en-US" sz="1150" b="1" dirty="0">
+                        <a:rPr lang="en-US" sz="1350" b="1" dirty="0">
                           <a:solidFill>
                             <a:srgbClr val="F5F5F0"/>
                           </a:solidFill>
@@ -33752,7 +35350,7 @@
                         <a:buNone/>
                       </a:pPr>
                       <a:r>
-                        <a:rPr lang="en-US" sz="1150" b="1" dirty="0">
+                        <a:rPr lang="en-US" sz="1350" b="1" dirty="0">
                           <a:solidFill>
                             <a:srgbClr val="F5F5F0"/>
                           </a:solidFill>
@@ -33963,7 +35561,7 @@
                         <a:buNone/>
                       </a:pPr>
                       <a:r>
-                        <a:rPr lang="en-US" sz="1150" b="1" dirty="0">
+                        <a:rPr lang="en-US" sz="1350" b="1" dirty="0">
                           <a:solidFill>
                             <a:srgbClr val="F5F5F0"/>
                           </a:solidFill>
@@ -34174,7 +35772,7 @@
                         <a:buNone/>
                       </a:pPr>
                       <a:r>
-                        <a:rPr lang="en-US" sz="1150" b="1" dirty="0">
+                        <a:rPr lang="en-US" sz="1350" b="1" dirty="0">
                           <a:solidFill>
                             <a:srgbClr val="F5F5F0"/>
                           </a:solidFill>
@@ -34385,7 +35983,7 @@
                         <a:buNone/>
                       </a:pPr>
                       <a:r>
-                        <a:rPr lang="en-US" sz="1150" b="1" dirty="0">
+                        <a:rPr lang="en-US" sz="1350" b="1" dirty="0">
                           <a:solidFill>
                             <a:srgbClr val="F5F5F0"/>
                           </a:solidFill>
@@ -34596,7 +36194,7 @@
                         <a:buNone/>
                       </a:pPr>
                       <a:r>
-                        <a:rPr lang="en-US" sz="1150" b="1" dirty="0">
+                        <a:rPr lang="en-US" sz="1350" b="1" dirty="0">
                           <a:solidFill>
                             <a:srgbClr val="F5F5F0"/>
                           </a:solidFill>
@@ -34733,6 +36331,29 @@
           </a:graphicData>
         </a:graphic>
       </p:graphicFrame>
+      <p:sp>
+        <p:nvSpPr>
+          <p:cNvPr id="15" name="Slide Number Placeholder"/>
+          <p:cNvSpPr>
+            <a:spLocks noGrp="1"/>
+          </p:cNvSpPr>
+          <p:nvPr>
+            <p:ph type="sldNum" sz="quarter" idx="10"/>
+          </p:nvPr>
+        </p:nvSpPr>
+        <p:spPr/>
+        <p:txBody>
+          <a:bodyPr/>
+          <a:lstStyle/>
+          <a:p>
+            <a:fld id="{BCB632DE-6AD4-40F1-944C-28C0E9BF62DC}" type="slidenum">
+              <a:rPr lang="en-US"/>
+              <a:t>9</a:t>
+            </a:fld>
+            <a:endParaRPr lang="en-US"/>
+          </a:p>
+        </p:txBody>
+      </p:sp>
     </p:spTree>
   </p:cSld>
   <p:clrMapOvr>

--- a/presentation/azure-devops-to-github-the-great-migration-FULL-DECK.pptx
+++ b/presentation/azure-devops-to-github-the-great-migration-FULL-DECK.pptx
@@ -6816,6 +6816,90 @@
               <a:t>Identities carried over as mannequins</a:t>
             </a:r>
             <a:endParaRPr lang="en-US" sz="1600" dirty="0"/>
+          </a:p>
+        </p:txBody>
+      </p:sp>
+      <p:sp>
+        <p:nvSpPr>
+          <p:cNvPr id="13" name="Shape 13"/>
+          <p:cNvSpPr/>
+          <p:nvPr/>
+        </p:nvSpPr>
+        <p:spPr>
+          <a:xfrm>
+            <a:off x="548640" y="5852160"/>
+            <a:ext cx="11064240" cy="868680"/>
+          </a:xfrm>
+          <a:prstGeom prst="roundRect">
+            <a:avLst>
+              <a:gd name="adj" fmla="val 12632"/>
+            </a:avLst>
+          </a:prstGeom>
+          <a:solidFill>
+            <a:srgbClr val="1F3D2C"/>
+          </a:solidFill>
+          <a:ln w="12700">
+            <a:noFill/>
+            <a:prstDash val="solid"/>
+          </a:ln>
+          <a:effectLst>
+            <a:outerShdw blurRad="76200" dist="25400" dir="5400000" algn="bl" rotWithShape="0">
+              <a:srgbClr val="000000">
+                <a:alpha val="12000"/>
+              </a:srgbClr>
+            </a:outerShdw>
+          </a:effectLst>
+        </p:spPr>
+        <p:txBody>
+          <a:bodyPr/>
+          <a:lstStyle/>
+          <a:p>
+            <a:endParaRPr lang="en-US"/>
+          </a:p>
+        </p:txBody>
+      </p:sp>
+      <p:sp>
+        <p:nvSpPr>
+          <p:cNvPr id="14" name="Text 14"/>
+          <p:cNvSpPr txBox="1"/>
+          <p:nvPr/>
+        </p:nvSpPr>
+        <p:spPr>
+          <a:xfrm>
+            <a:off x="548640" y="5852160"/>
+            <a:ext cx="11064240" cy="868680"/>
+          </a:xfrm>
+          <a:prstGeom prst="rect">
+            <a:avLst/>
+          </a:prstGeom>
+          <a:noFill/>
+          <a:ln/>
+        </p:spPr>
+        <p:txBody>
+          <a:bodyPr wrap="square" lIns="256032" tIns="54864" rIns="256032" bIns="54864" rtlCol="0" anchor="ctr"/>
+          <a:lstStyle/>
+          <a:p>
+            <a:pPr marL="0" indent="0" algn="l">
+              <a:buNone/>
+            </a:pPr>
+            <a:r>
+              <a:rPr sz="1250" b="1" spc="120">
+                <a:solidFill>
+                  <a:srgbClr val="E0B85C"/>
+                </a:solidFill>
+                <a:latin typeface="Calibri"/>
+              </a:rPr>
+              <a:t>TAKEAWAY </a:t>
+            </a:r>
+            <a:r>
+              <a:rPr sz="1500" b="0">
+                <a:solidFill>
+                  <a:srgbClr val="F5F5F0"/>
+                </a:solidFill>
+                <a:latin typeface="Calibri"/>
+              </a:rPr>
+              <a:t>The word “repo” survives the migration. The project-level boundary it used to sit inside — shared config, ownership, access — doesn’t come with it.</a:t>
+            </a:r>
           </a:p>
         </p:txBody>
       </p:sp>
@@ -13091,22 +13175,35 @@
               <a:buChar char="•"/>
             </a:pPr>
             <a:r>
-              <a:rPr lang="en-US" sz="1450" dirty="0"/>
-              <a:t>GitHub Enterprise Importer (GEI) is a set of GitHub CLI extensions, with </a:t>
-            </a:r>
-            <a:r>
               <a:rPr lang="en-US" sz="1450" dirty="0">
+                <a:solidFill>
+                  <a:srgbClr val="2B2B2B"/>
+                </a:solidFill>
+              </a:rPr>
+              <a:t>GitHub Enterprise Importer (GEI) is a set of GitHub CLI extensions (including </a:t>
+            </a:r>
+            <a:r>
+              <a:rPr lang="en-US" sz="1450" dirty="0">
+                <a:solidFill>
+                  <a:srgbClr val="2B2B2B"/>
+                </a:solidFill>
                 <a:latin typeface="Cascadia Code" panose="020B0609020000020004" pitchFamily="49" charset="0"/>
                 <a:cs typeface="Cascadia Code" panose="020B0609020000020004" pitchFamily="49" charset="0"/>
               </a:rPr>
-              <a:t>gh-ado2gh</a:t>
-            </a:r>
-            <a:r>
-              <a:rPr lang="en-US" sz="1450" dirty="0"/>
-              <a:t> specifically for ADO</a:t>
+              <a:t>ado2gh</a:t>
+            </a:r>
+            <a:r>
+              <a:rPr lang="en-US" sz="1450" dirty="0">
+                <a:solidFill>
+                  <a:srgbClr val="2B2B2B"/>
+                </a:solidFill>
+              </a:rPr>
+              <a:t>)</a:t>
             </a:r>
             <a:endParaRPr lang="en-US" sz="1450" dirty="0">
-              <a:latin typeface="Cascadia Mono" panose="020B0609020000020004" pitchFamily="49" charset="0"/>
+              <a:solidFill>
+                <a:srgbClr val="2B2B2B"/>
+              </a:solidFill>
               <a:ea typeface="Cascadia Mono" panose="020B0609020000020004" pitchFamily="49" charset="0"/>
               <a:cs typeface="Cascadia Mono" panose="020B0609020000020004" pitchFamily="49" charset="0"/>
             </a:endParaRPr>
@@ -13462,64 +13559,6 @@
           </a:p>
         </p:txBody>
       </p:sp>
-      <p:sp>
-        <p:nvSpPr>
-          <p:cNvPr id="14" name="Shape 11"/>
-          <p:cNvSpPr/>
-          <p:nvPr/>
-        </p:nvSpPr>
-        <p:spPr>
-          <a:xfrm>
-            <a:off x="10351008" y="5340096"/>
-            <a:ext cx="923544" cy="923544"/>
-          </a:xfrm>
-          <a:prstGeom prst="roundRect">
-            <a:avLst>
-              <a:gd name="adj" fmla="val 5941"/>
-            </a:avLst>
-          </a:prstGeom>
-          <a:solidFill>
-            <a:srgbClr val="FFFFFF"/>
-          </a:solidFill>
-          <a:ln w="15875">
-            <a:solidFill>
-              <a:srgbClr val="1F3D2C"/>
-            </a:solidFill>
-            <a:prstDash val="solid"/>
-          </a:ln>
-        </p:spPr>
-        <p:txBody>
-          <a:bodyPr/>
-          <a:lstStyle/>
-          <a:p>
-            <a:endParaRPr lang="en-US"/>
-          </a:p>
-        </p:txBody>
-      </p:sp>
-      <p:pic>
-        <p:nvPicPr>
-          <p:cNvPr id="15" name="Image 1" descr="/home/claude/pptx-build/assets/qr-sec3-ado2gh.png"/>
-          <p:cNvPicPr>
-            <a:picLocks noChangeAspect="1"/>
-          </p:cNvPicPr>
-          <p:nvPr/>
-        </p:nvPicPr>
-        <p:blipFill>
-          <a:blip r:embed="rId4"/>
-          <a:stretch>
-            <a:fillRect/>
-          </a:stretch>
-        </p:blipFill>
-        <p:spPr>
-          <a:xfrm>
-            <a:off x="10424160" y="5413248"/>
-            <a:ext cx="777240" cy="777240"/>
-          </a:xfrm>
-          <a:prstGeom prst="rect">
-            <a:avLst/>
-          </a:prstGeom>
-        </p:spPr>
-      </p:pic>
       <p:sp>
         <p:nvSpPr>
           <p:cNvPr id="16" name="Slide Number Placeholder"/>
@@ -14595,7 +14634,7 @@
               <a:buNone/>
             </a:pPr>
             <a:r>
-              <a:rPr lang="en-US" sz="1450" b="0" dirty="0">
+              <a:rPr lang="en-US" sz="1600" b="0" dirty="0">
                 <a:solidFill>
                   <a:srgbClr val="F5F5F0"/>
                 </a:solidFill>
@@ -14613,7 +14652,7 @@
               <a:buChar char="•"/>
             </a:pPr>
             <a:r>
-              <a:rPr lang="en-US" sz="1450" b="0" dirty="0">
+              <a:rPr lang="en-US" sz="1600" b="0" dirty="0">
                 <a:solidFill>
                   <a:srgbClr val="F5F5F0"/>
                 </a:solidFill>
@@ -14631,7 +14670,7 @@
               <a:buChar char="•"/>
             </a:pPr>
             <a:r>
-              <a:rPr lang="en-US" sz="1450" b="0" dirty="0">
+              <a:rPr lang="en-US" sz="1600" b="0" dirty="0">
                 <a:solidFill>
                   <a:srgbClr val="F5F5F0"/>
                 </a:solidFill>
@@ -14649,7 +14688,7 @@
               <a:buChar char="•"/>
             </a:pPr>
             <a:r>
-              <a:rPr lang="en-US" sz="1450" b="0" dirty="0">
+              <a:rPr lang="en-US" sz="1600" b="0" dirty="0">
                 <a:solidFill>
                   <a:srgbClr val="F5F5F0"/>
                 </a:solidFill>
@@ -14667,7 +14706,7 @@
               <a:buChar char="•"/>
             </a:pPr>
             <a:r>
-              <a:rPr lang="en-US" sz="1450" b="0" dirty="0">
+              <a:rPr lang="en-US" sz="1600" b="0" dirty="0">
                 <a:solidFill>
                   <a:srgbClr val="F5F5F0"/>
                 </a:solidFill>
@@ -14685,7 +14724,7 @@
               <a:buChar char="•"/>
             </a:pPr>
             <a:r>
-              <a:rPr lang="en-US" sz="1450" b="0" dirty="0">
+              <a:rPr lang="en-US" sz="1600" b="0" dirty="0">
                 <a:solidFill>
                   <a:srgbClr val="F5F5F0"/>
                 </a:solidFill>
@@ -14703,7 +14742,7 @@
               <a:buChar char="•"/>
             </a:pPr>
             <a:r>
-              <a:rPr lang="en-US" sz="1450" b="0" dirty="0">
+              <a:rPr lang="en-US" sz="1600" b="0" dirty="0">
                 <a:solidFill>
                   <a:srgbClr val="F5F5F0"/>
                 </a:solidFill>
@@ -14711,7 +14750,7 @@
               </a:rPr>
               <a:t>owner for migration failures</a:t>
             </a:r>
-            <a:endParaRPr lang="en-US" sz="1500" dirty="0"/>
+            <a:endParaRPr lang="en-US" sz="1600" dirty="0"/>
           </a:p>
         </p:txBody>
       </p:sp>

--- a/presentation/azure-devops-to-github-the-great-migration-FULL-DECK.pptx
+++ b/presentation/azure-devops-to-github-the-great-migration-FULL-DECK.pptx
@@ -1399,8 +1399,13 @@
           <a:p>
             <a:r>
               <a:rPr lang="en-US" dirty="0"/>
-              <a:t>Standard sponsor-thanks slide — event organizer will tell you if this is required and what logos go here. Placeholder only; swap in real sponsor logos once the summit sends them.</a:t>
-            </a:r>
+              <a:t>Standard </a:t>
+            </a:r>
+            <a:r>
+              <a:rPr lang="en-US"/>
+              <a:t>sponsor-thanks slide</a:t>
+            </a:r>
+            <a:endParaRPr lang="en-US" dirty="0"/>
           </a:p>
         </p:txBody>
       </p:sp>
@@ -11289,125 +11294,6 @@
       </p:grpSpPr>
       <p:sp>
         <p:nvSpPr>
-          <p:cNvPr id="2" name="Text 0"/>
-          <p:cNvSpPr txBox="1"/>
-          <p:nvPr/>
-        </p:nvSpPr>
-        <p:spPr>
-          <a:xfrm>
-            <a:off x="548640" y="502920"/>
-            <a:ext cx="10515600" cy="685800"/>
-          </a:xfrm>
-          <a:prstGeom prst="rect">
-            <a:avLst/>
-          </a:prstGeom>
-          <a:noFill/>
-          <a:ln/>
-        </p:spPr>
-        <p:txBody>
-          <a:bodyPr wrap="square" lIns="0" tIns="0" rIns="0" bIns="0" rtlCol="0" anchor="ctr"/>
-          <a:lstStyle/>
-          <a:p>
-            <a:pPr marL="0" indent="0">
-              <a:buNone/>
-            </a:pPr>
-            <a:r>
-              <a:rPr lang="en-US" sz="3200" b="1" dirty="0">
-                <a:solidFill>
-                  <a:srgbClr val="1F3D2C"/>
-                </a:solidFill>
-                <a:latin typeface="Cambria" pitchFamily="34" charset="0"/>
-                <a:ea typeface="Cambria" pitchFamily="34" charset="-122"/>
-                <a:cs typeface="Cambria" pitchFamily="34" charset="-120"/>
-              </a:rPr>
-              <a:t>Thank You to Our Sponsors</a:t>
-            </a:r>
-            <a:endParaRPr lang="en-US" sz="3200" dirty="0"/>
-          </a:p>
-        </p:txBody>
-      </p:sp>
-      <p:sp>
-        <p:nvSpPr>
-          <p:cNvPr id="3" name="Shape 1"/>
-          <p:cNvSpPr/>
-          <p:nvPr/>
-        </p:nvSpPr>
-        <p:spPr>
-          <a:xfrm>
-            <a:off x="548640" y="1645920"/>
-            <a:ext cx="11064240" cy="3931920"/>
-          </a:xfrm>
-          <a:prstGeom prst="roundRect">
-            <a:avLst>
-              <a:gd name="adj" fmla="val 2791"/>
-            </a:avLst>
-          </a:prstGeom>
-          <a:solidFill>
-            <a:srgbClr val="F7F6F2"/>
-          </a:solidFill>
-          <a:ln w="12700">
-            <a:solidFill>
-              <a:srgbClr val="DDD8CC"/>
-            </a:solidFill>
-            <a:prstDash val="solid"/>
-          </a:ln>
-          <a:effectLst>
-            <a:outerShdw blurRad="76200" dist="25400" dir="5400000" algn="bl" rotWithShape="0">
-              <a:srgbClr val="000000">
-                <a:alpha val="12000"/>
-              </a:srgbClr>
-            </a:outerShdw>
-          </a:effectLst>
-        </p:spPr>
-        <p:txBody>
-          <a:bodyPr/>
-          <a:lstStyle/>
-          <a:p>
-            <a:endParaRPr lang="en-US"/>
-          </a:p>
-        </p:txBody>
-      </p:sp>
-      <p:sp>
-        <p:nvSpPr>
-          <p:cNvPr id="4" name="Text 2"/>
-          <p:cNvSpPr txBox="1"/>
-          <p:nvPr/>
-        </p:nvSpPr>
-        <p:spPr>
-          <a:xfrm>
-            <a:off x="914400" y="3200400"/>
-            <a:ext cx="10332720" cy="640080"/>
-          </a:xfrm>
-          <a:prstGeom prst="rect">
-            <a:avLst/>
-          </a:prstGeom>
-          <a:noFill/>
-          <a:ln/>
-        </p:spPr>
-        <p:txBody>
-          <a:bodyPr wrap="square" lIns="0" tIns="0" rIns="0" bIns="0" rtlCol="0" anchor="ctr"/>
-          <a:lstStyle/>
-          <a:p>
-            <a:pPr marL="0" indent="0" algn="ctr">
-              <a:buNone/>
-            </a:pPr>
-            <a:r>
-              <a:rPr lang="en-US" sz="2000" i="1" dirty="0">
-                <a:solidFill>
-                  <a:srgbClr val="6B6B63"/>
-                </a:solidFill>
-                <a:latin typeface="Calibri" pitchFamily="34" charset="0"/>
-                <a:ea typeface="Calibri" pitchFamily="34" charset="-122"/>
-                <a:cs typeface="Calibri" pitchFamily="34" charset="-120"/>
-              </a:rPr>
-              <a:t>[PLACEHOLDER — drop in actual sponsor logos before the talk]</a:t>
-            </a:r>
-            <a:endParaRPr lang="en-US" sz="2000" dirty="0"/>
-          </a:p>
-        </p:txBody>
-      </p:sp>
-      <p:sp>
-        <p:nvSpPr>
           <p:cNvPr id="5" name="Slide Number Placeholder"/>
           <p:cNvSpPr>
             <a:spLocks noGrp="1"/>
@@ -11429,6 +11315,36 @@
           </a:p>
         </p:txBody>
       </p:sp>
+      <p:pic>
+        <p:nvPicPr>
+          <p:cNvPr id="7" name="Picture 6">
+            <a:extLst>
+              <a:ext uri="{FF2B5EF4-FFF2-40B4-BE49-F238E27FC236}">
+                <a16:creationId xmlns:a16="http://schemas.microsoft.com/office/drawing/2014/main" id="{62312F7A-D149-7F69-75D6-2B4AA23FC0C3}"/>
+              </a:ext>
+            </a:extLst>
+          </p:cNvPr>
+          <p:cNvPicPr>
+            <a:picLocks noChangeAspect="1"/>
+          </p:cNvPicPr>
+          <p:nvPr/>
+        </p:nvPicPr>
+        <p:blipFill>
+          <a:blip r:embed="rId3"/>
+          <a:stretch>
+            <a:fillRect/>
+          </a:stretch>
+        </p:blipFill>
+        <p:spPr>
+          <a:xfrm>
+            <a:off x="0" y="0"/>
+            <a:ext cx="12192000" cy="6858000"/>
+          </a:xfrm>
+          <a:prstGeom prst="rect">
+            <a:avLst/>
+          </a:prstGeom>
+        </p:spPr>
+      </p:pic>
     </p:spTree>
   </p:cSld>
   <p:clrMapOvr>

--- a/presentation/azure-devops-to-github-the-great-migration-FULL-DECK.pptx
+++ b/presentation/azure-devops-to-github-the-great-migration-FULL-DECK.pptx
@@ -27,11 +27,11 @@
     <p:sldId id="275" r:id="rId18"/>
     <p:sldId id="276" r:id="rId19"/>
     <p:sldId id="277" r:id="rId20"/>
-    <p:sldId id="278" r:id="rId21"/>
-    <p:sldId id="279" r:id="rId22"/>
-    <p:sldId id="282" r:id="rId23"/>
-    <p:sldId id="280" r:id="rId24"/>
-    <p:sldId id="281" r:id="rId25"/>
+    <p:sldId id="279" r:id="rId21"/>
+    <p:sldId id="282" r:id="rId22"/>
+    <p:sldId id="280" r:id="rId23"/>
+    <p:sldId id="281" r:id="rId24"/>
+    <p:sldId id="278" r:id="rId25"/>
     <p:sldId id="313" r:id="rId26"/>
     <p:sldId id="283" r:id="rId27"/>
     <p:sldId id="284" r:id="rId28"/>
@@ -419,45 +419,36 @@
           <a:lstStyle/>
           <a:p>
             <a:r>
+              <a:rPr dirty="0"/>
               <a:t>Straight delivery. Git is Git, so commit history is easy, and pull requests plus most branch policies migrate without much drama through GitHub Enterprise Importer.</a:t>
             </a:r>
-          </a:p>
-          <a:p>
-            <a:endParaRPr/>
-          </a:p>
-          <a:p>
-            <a:r>
-              <a:t>The asterisk is what doesn’t:</a:t>
-            </a:r>
-          </a:p>
-          <a:p>
-            <a:r>
-              <a:t>- Repo permissions get rebuilt as two GitHub teams per team project.</a:t>
-            </a:r>
-          </a:p>
-          <a:p>
-            <a:r>
-              <a:t>- Git LFS objects are not migrated. GEI moves the repository; you push the LFS objects separately.</a:t>
-            </a:r>
-          </a:p>
-          <a:p>
-            <a:r>
-              <a:t>- User-scoped and cross-repo branch policies need rebuilding by hand.</a:t>
-            </a:r>
-          </a:p>
-          <a:p>
-            <a:endParaRPr/>
-          </a:p>
-          <a:p>
-            <a:r>
+            <a:br>
+              <a:rPr lang="en-US" dirty="0"/>
+            </a:br>
+            <a:br>
+              <a:rPr lang="en-US" dirty="0"/>
+            </a:br>
+            <a:r>
+              <a:rPr lang="en-US" dirty="0"/>
+              <a:t>Highlight that ADO Repos != GitHub Repos</a:t>
+            </a:r>
+            <a:endParaRPr dirty="0"/>
+          </a:p>
+          <a:p>
+            <a:endParaRPr dirty="0"/>
+          </a:p>
+          <a:p>
+            <a:r>
+              <a:rPr dirty="0"/>
               <a:t>Verify target visibility during the trial migration. Migration scripts can preserve or explicitly set visibility, but enterprise policies and managed-user configurations may constrain the available choices.</a:t>
             </a:r>
           </a:p>
           <a:p>
-            <a:endParaRPr/>
-          </a:p>
-          <a:p>
-            <a:r>
+            <a:endParaRPr dirty="0"/>
+          </a:p>
+          <a:p>
+            <a:r>
+              <a:rPr dirty="0"/>
               <a:t>If there’s time, mention the hard limits: during migration, 40 GiB per repository and 400 MiB per file; afterwards, GitHub’s normal 100 MiB per file, 2 GiB per commit and 2 GiB per push. Don’t recite them from the slide.</a:t>
             </a:r>
           </a:p>
@@ -1209,22 +1200,25 @@
           <a:lstStyle/>
           <a:p>
             <a:r>
+              <a:rPr dirty="0"/>
               <a:t>Straight delivery, and take this one slowly — the rest of the section depends on the distinction.</a:t>
             </a:r>
           </a:p>
           <a:p>
-            <a:endParaRPr/>
-          </a:p>
-          <a:p>
-            <a:r>
+            <a:endParaRPr dirty="0"/>
+          </a:p>
+          <a:p>
+            <a:r>
+              <a:rPr dirty="0"/>
               <a:t>Repository data, automation, and validation are the architectural planes: the three places migration risk actually lives. Manual judgment, official tooling, and AI assistance are methods, and any of them can operate inside any plane. They are not a fourth plane, and they are not three competing migration strategies — which is how most migration talks get this wrong.</a:t>
             </a:r>
           </a:p>
           <a:p>
-            <a:endParaRPr/>
-          </a:p>
-          <a:p>
-            <a:r>
+            <a:endParaRPr dirty="0"/>
+          </a:p>
+          <a:p>
+            <a:r>
+              <a:rPr dirty="0"/>
               <a:t>Everything from here follows the planes.</a:t>
             </a:r>
           </a:p>
@@ -1491,7 +1485,7 @@
           <a:p>
             <a:r>
               <a:rPr dirty="0"/>
-              <a:t>Open the slide with the line: “Both platforms use YAML, in the same way that Java and JavaScript both contain the word ‘Java.’” It is also in the session abstract, so deliver it as a callback. It gets the laugh and it is the slide’s entire thesis: same syntax, different language. Say it once and move on.</a:t>
+              <a:t>Straight delivery. Spend twenty seconds getting the naming right, because the docs don't and everyone who goes looking afterwards hits the same confusion.</a:t>
             </a:r>
           </a:p>
           <a:p>
@@ -1500,24 +1494,7 @@
           <a:p>
             <a:r>
               <a:rPr dirty="0"/>
-              <a:t>Straight delivery after that. Use the table as a vocabulary guide, not a transliteration recipe. Ask what security or lifecycle boundary each stage represented. Manual judgment is needed where service connections, templates, approvals, runners, conditions and failure behavior do not map one to one. Worth saying out loud: Actions has no stages, so a multi-stage pipeline becomes jobs linked by needs, usually with environments carrying the approvals.</a:t>
-            </a:r>
-          </a:p>
-          <a:p>
-            <a:endParaRPr dirty="0"/>
-          </a:p>
-          <a:p>
-            <a:r>
-              <a:rPr dirty="0"/>
-              <a:t>OPTIONAL LAUGH LINE — stop on the Service Connection row: “Two words on the left, </a:t>
-            </a:r>
-            <a:r>
-              <a:rPr lang="en-US" dirty="0"/>
-              <a:t>two</a:t>
-            </a:r>
-            <a:r>
-              <a:rPr dirty="0"/>
-              <a:t> on the right, and about three weeks in between.” This is the row the whole room has personally lost a sprint to.</a:t>
+              <a:t>Review the generated PowerShell as migration code, not disposable output — that is the bottom line on the slide.</a:t>
             </a:r>
           </a:p>
         </p:txBody>
@@ -1603,8 +1580,17 @@
           <a:lstStyle/>
           <a:p>
             <a:r>
+              <a:rPr lang="en-US" dirty="0"/>
+              <a:t>Straight delivery. Briefly mention it, but don’t spend much time on it. </a:t>
+            </a:r>
+          </a:p>
+          <a:p>
+            <a:endParaRPr dirty="0"/>
+          </a:p>
+          <a:p>
+            <a:r>
               <a:rPr dirty="0"/>
-              <a:t>Straight delivery. Spend twenty seconds getting the naming right, because the docs don't and everyone who goes looking afterwards hits the same confusion.</a:t>
+              <a:t>STATUS, stated precisely, because the two paths differ: GitHub Enterprise Server to GHEC-with-data-residency went GA on 1 September 2026, but the AZURE DEVOPS path — the only one that matters here — is still public preview. Say “public preview for the Azure DevOps path,” not just “preview,” or somebody who read the GA changelog will correct you.</a:t>
             </a:r>
           </a:p>
           <a:p>
@@ -1613,8 +1599,65 @@
           <a:p>
             <a:r>
               <a:rPr dirty="0"/>
-              <a:t>Review the generated PowerShell as migration code, not disposable output — that is the bottom line on the slide.</a:t>
-            </a:r>
+              <a:t>It is also research-only for us: Hunter's current tenant does not meet the data-residency prerequisite, so we have not run it.</a:t>
+            </a:r>
+          </a:p>
+          <a:p>
+            <a:endParaRPr dirty="0"/>
+          </a:p>
+          <a:p>
+            <a:r>
+              <a:rPr dirty="0"/>
+              <a:t>THE CAPS ARE THE POINT. Thirty repositories total — twenty initial, ten incremental — and the cutover has to complete within twenty-one days of starting. Repositories only: no work items, pipelines, wikis, test plans or artifacts. That reframes ELM from “the better option” to “a pilot mechanism,” which is the more useful thing for this room to hear. If anyone is picturing it as the way to move a thousand repositories, the 30-repo cap answers that before they build a plan around it.</a:t>
+            </a:r>
+          </a:p>
+          <a:p>
+            <a:endParaRPr dirty="0"/>
+          </a:p>
+          <a:p>
+            <a:r>
+              <a:rPr dirty="0"/>
+              <a:t>Keep the GEI comparison honest: gh-ado2gh --all already does the configuration work. What ELM genuinely adds is continuous delta synchronization and a scheduled cutover with a read-only window under thirty minutes. Pipeline logic and non-repository systems still need separate migration and validation — that is the takeaway line.</a:t>
+            </a:r>
+          </a:p>
+          <a:p>
+            <a:endParaRPr dirty="0"/>
+          </a:p>
+          <a:p>
+            <a:r>
+              <a:rPr dirty="0"/>
+              <a:t>GitHub Enterprise Cloud (GHEC) with Data Residency is a distinct deployment model where:</a:t>
+            </a:r>
+          </a:p>
+          <a:p>
+            <a:r>
+              <a:rPr dirty="0"/>
+              <a:t> - Your enterprise is hosted on a dedicated ghe.com subdomain (instead of github.com&lt;org&gt;).</a:t>
+            </a:r>
+          </a:p>
+          <a:p>
+            <a:r>
+              <a:rPr dirty="0"/>
+              <a:t> - You choose the geographic region where your code and repository data are stored (currently including U.S., EU, Australia, and Japan).</a:t>
+            </a:r>
+          </a:p>
+          <a:p>
+            <a:r>
+              <a:rPr dirty="0"/>
+              <a:t> - The environment is isolated from the broader github.com ecosystem.</a:t>
+            </a:r>
+          </a:p>
+          <a:p>
+            <a:r>
+              <a:rPr dirty="0"/>
+              <a:t> - It requires Enterprise Managed Users (EMU). </a:t>
+            </a:r>
+          </a:p>
+          <a:p>
+            <a:endParaRPr dirty="0"/>
+          </a:p>
+          <a:p>
+            <a:endParaRPr dirty="0"/>
           </a:p>
         </p:txBody>
       </p:sp>
@@ -1699,8 +1742,8 @@
           <a:lstStyle/>
           <a:p>
             <a:r>
-              <a:rPr lang="en-US" dirty="0"/>
-              <a:t>Straight delivery. Briefly mention it, but don’t spend much time on it. </a:t>
+              <a:rPr dirty="0"/>
+              <a:t>Straight delivery. Keep the non-negotiable order: install the Azure Pipelines GitHub App first and plan identity mapping before mannequins are created. Also decide account model, team structure, repository naming and visibility, system-of-record during transition, change freeze or reconciliation, and failure ownership before the first production run.</a:t>
             </a:r>
           </a:p>
           <a:p>
@@ -1709,74 +1752,8 @@
           <a:p>
             <a:r>
               <a:rPr dirty="0"/>
-              <a:t>STATUS, stated precisely, because the two paths differ: GitHub Enterprise Server to GHEC-with-data-residency went GA on 1 September 2026, but the AZURE DEVOPS path — the only one that matters here — is still public preview. Say “public preview for the Azure DevOps path,” not just “preview,” or somebody who read the GA changelog will correct you.</a:t>
-            </a:r>
-          </a:p>
-          <a:p>
-            <a:endParaRPr dirty="0"/>
-          </a:p>
-          <a:p>
-            <a:r>
-              <a:rPr dirty="0"/>
-              <a:t>It is also research-only for us: Hunter's current tenant does not meet the data-residency prerequisite, so we have not run it.</a:t>
-            </a:r>
-          </a:p>
-          <a:p>
-            <a:endParaRPr dirty="0"/>
-          </a:p>
-          <a:p>
-            <a:r>
-              <a:rPr dirty="0"/>
-              <a:t>THE CAPS ARE THE POINT. Thirty repositories total — twenty initial, ten incremental — and the cutover has to complete within twenty-one days of starting. Repositories only: no work items, pipelines, wikis, test plans or artifacts. That reframes ELM from “the better option” to “a pilot mechanism,” which is the more useful thing for this room to hear. If anyone is picturing it as the way to move a thousand repositories, the 30-repo cap answers that before they build a plan around it.</a:t>
-            </a:r>
-          </a:p>
-          <a:p>
-            <a:endParaRPr dirty="0"/>
-          </a:p>
-          <a:p>
-            <a:r>
-              <a:rPr dirty="0"/>
-              <a:t>Keep the GEI comparison honest: gh-ado2gh --all already does the configuration work. What ELM genuinely adds is continuous delta synchronization and a scheduled cutover with a read-only window under thirty minutes. Pipeline logic and non-repository systems still need separate migration and validation — that is the takeaway line.</a:t>
-            </a:r>
-          </a:p>
-          <a:p>
-            <a:endParaRPr dirty="0"/>
-          </a:p>
-          <a:p>
-            <a:r>
-              <a:rPr dirty="0"/>
-              <a:t>GitHub Enterprise Cloud (GHEC) with Data Residency is a distinct deployment model where:</a:t>
-            </a:r>
-          </a:p>
-          <a:p>
-            <a:r>
-              <a:rPr dirty="0"/>
-              <a:t> - Your enterprise is hosted on a dedicated ghe.com subdomain (instead of github.com&lt;org&gt;).</a:t>
-            </a:r>
-          </a:p>
-          <a:p>
-            <a:r>
-              <a:rPr dirty="0"/>
-              <a:t> - You choose the geographic region where your code and repository data are stored (currently including U.S., EU, Australia, and Japan).</a:t>
-            </a:r>
-          </a:p>
-          <a:p>
-            <a:r>
-              <a:rPr dirty="0"/>
-              <a:t> - The environment is isolated from the broader github.com ecosystem.</a:t>
-            </a:r>
-          </a:p>
-          <a:p>
-            <a:r>
-              <a:rPr dirty="0"/>
-              <a:t> - It requires Enterprise Managed Users (EMU). </a:t>
-            </a:r>
-          </a:p>
-          <a:p>
-            <a:endParaRPr dirty="0"/>
-          </a:p>
-          <a:p>
-            <a:endParaRPr dirty="0"/>
+              <a:t>OPTIONAL LAUGH LINE — after reading the six decisions: “You are going to make all six of these decisions either way. The only question is whether you make them now, or at two in the morning, under pressure, by accident.”</a:t>
+            </a:r>
           </a:p>
         </p:txBody>
       </p:sp>
@@ -1861,16 +1838,155 @@
           <a:lstStyle/>
           <a:p>
             <a:r>
-              <a:t>Straight delivery. Keep the non-negotiable order: install the Azure Pipelines GitHub App first and plan identity mapping before mannequins are created. Also decide account model, team structure, repository naming and visibility, system-of-record during transition, change freeze or reconciliation, and failure ownership before the first production run.</a:t>
-            </a:r>
-          </a:p>
-          <a:p>
-            <a:endParaRPr/>
-          </a:p>
-          <a:p>
-            <a:r>
-              <a:t>OPTIONAL LAUGH LINE — after reading the six decisions: “You are going to make all six of these decisions either way. The only question is whether you make them now, or at two in the morning, under pressure, by accident.”</a:t>
-            </a:r>
+              <a:rPr dirty="0"/>
+              <a:t>Straight delivery. This is the automation-plane tool. The audit breakdown is the planning artifact: it turns “this looks hard” into a backlog with counts.</a:t>
+            </a:r>
+          </a:p>
+          <a:p>
+            <a:endParaRPr dirty="0"/>
+          </a:p>
+          <a:p>
+            <a:r>
+              <a:rPr dirty="0"/>
+              <a:t>Use the tool's own four buckets — successful, partially successful, unsupported, failed — and make the point that unsupported and failed are different problems. Unsupported means the construct has no Actions equivalent and somebody has to make a design decision. Failed means the importer choked and somebody has to go look. Those land in different columns of the backlog.</a:t>
+            </a:r>
+          </a:p>
+          <a:p>
+            <a:endParaRPr dirty="0"/>
+          </a:p>
+          <a:p>
+            <a:r>
+              <a:rPr dirty="0"/>
+              <a:t>Conversion still leaves secrets, service connections, runner and network strategy, environments, approvals, custom tasks, and unsupported triggers for engineering judgment and validation.</a:t>
+            </a:r>
+            <a:endParaRPr lang="en-US" dirty="0"/>
+          </a:p>
+          <a:p>
+            <a:endParaRPr lang="en-US" dirty="0"/>
+          </a:p>
+          <a:p>
+            <a:pPr lvl="0"/>
+            <a:r>
+              <a:rPr lang="en-US" dirty="0"/>
+              <a:t>Supported platforms:</a:t>
+            </a:r>
+            <a:br>
+              <a:rPr lang="en-US" dirty="0"/>
+            </a:br>
+            <a:r>
+              <a:rPr lang="en-US" sz="1200" b="0" i="0" kern="1200" dirty="0">
+                <a:solidFill>
+                  <a:schemeClr val="tx1"/>
+                </a:solidFill>
+                <a:effectLst/>
+                <a:latin typeface="+mn-lt"/>
+                <a:ea typeface="+mn-ea"/>
+                <a:cs typeface="+mn-cs"/>
+              </a:rPr>
+              <a:t>Azure DevOps</a:t>
+            </a:r>
+          </a:p>
+          <a:p>
+            <a:pPr lvl="0"/>
+            <a:r>
+              <a:rPr lang="en-US" sz="1200" b="0" i="0" kern="1200" dirty="0">
+                <a:solidFill>
+                  <a:schemeClr val="tx1"/>
+                </a:solidFill>
+                <a:effectLst/>
+                <a:latin typeface="+mn-lt"/>
+                <a:ea typeface="+mn-ea"/>
+                <a:cs typeface="+mn-cs"/>
+              </a:rPr>
+              <a:t>Bamboo</a:t>
+            </a:r>
+          </a:p>
+          <a:p>
+            <a:pPr lvl="0"/>
+            <a:r>
+              <a:rPr lang="en-US" sz="1200" b="0" i="0" kern="1200" dirty="0">
+                <a:solidFill>
+                  <a:schemeClr val="tx1"/>
+                </a:solidFill>
+                <a:effectLst/>
+                <a:latin typeface="+mn-lt"/>
+                <a:ea typeface="+mn-ea"/>
+                <a:cs typeface="+mn-cs"/>
+              </a:rPr>
+              <a:t>Bitbucket Pipelines</a:t>
+            </a:r>
+          </a:p>
+          <a:p>
+            <a:pPr lvl="0"/>
+            <a:r>
+              <a:rPr lang="en-US" sz="1200" b="0" i="0" kern="1200" dirty="0" err="1">
+                <a:solidFill>
+                  <a:schemeClr val="tx1"/>
+                </a:solidFill>
+                <a:effectLst/>
+                <a:latin typeface="+mn-lt"/>
+                <a:ea typeface="+mn-ea"/>
+                <a:cs typeface="+mn-cs"/>
+              </a:rPr>
+              <a:t>CircleCI</a:t>
+            </a:r>
+            <a:endParaRPr lang="en-US" sz="1200" b="0" i="0" kern="1200" dirty="0">
+              <a:solidFill>
+                <a:schemeClr val="tx1"/>
+              </a:solidFill>
+              <a:effectLst/>
+              <a:latin typeface="+mn-lt"/>
+              <a:ea typeface="+mn-ea"/>
+              <a:cs typeface="+mn-cs"/>
+            </a:endParaRPr>
+          </a:p>
+          <a:p>
+            <a:pPr lvl="0"/>
+            <a:r>
+              <a:rPr lang="en-US" sz="1200" b="0" i="0" kern="1200" dirty="0">
+                <a:solidFill>
+                  <a:schemeClr val="tx1"/>
+                </a:solidFill>
+                <a:effectLst/>
+                <a:latin typeface="+mn-lt"/>
+                <a:ea typeface="+mn-ea"/>
+                <a:cs typeface="+mn-cs"/>
+              </a:rPr>
+              <a:t>GitLab (both cloud and self-hosted)</a:t>
+            </a:r>
+          </a:p>
+          <a:p>
+            <a:pPr lvl="0"/>
+            <a:r>
+              <a:rPr lang="en-US" sz="1200" b="0" i="0" kern="1200" dirty="0">
+                <a:solidFill>
+                  <a:schemeClr val="tx1"/>
+                </a:solidFill>
+                <a:effectLst/>
+                <a:latin typeface="+mn-lt"/>
+                <a:ea typeface="+mn-ea"/>
+                <a:cs typeface="+mn-cs"/>
+              </a:rPr>
+              <a:t>Jenkins</a:t>
+            </a:r>
+          </a:p>
+          <a:p>
+            <a:pPr lvl="0"/>
+            <a:r>
+              <a:rPr lang="en-US" sz="1200" b="0" i="0" kern="1200" dirty="0">
+                <a:solidFill>
+                  <a:schemeClr val="tx1"/>
+                </a:solidFill>
+                <a:effectLst/>
+                <a:latin typeface="+mn-lt"/>
+                <a:ea typeface="+mn-ea"/>
+                <a:cs typeface="+mn-cs"/>
+              </a:rPr>
+              <a:t>Travis CI</a:t>
+            </a:r>
+          </a:p>
+          <a:p>
+            <a:endParaRPr dirty="0"/>
           </a:p>
         </p:txBody>
       </p:sp>
@@ -1956,7 +2072,7 @@
           <a:p>
             <a:r>
               <a:rPr dirty="0"/>
-              <a:t>Straight delivery. This is the automation-plane tool. The audit breakdown is the planning artifact: it turns “this looks hard” into a backlog with counts.</a:t>
+              <a:t>Open the slide with the line: “Both platforms use YAML, in the same way that Java and JavaScript both contain the word ‘Java.’” It is also in the session abstract, so deliver it as a callback. It gets the laugh and it is the slide’s entire thesis: same syntax, different language. Say it once and move on.</a:t>
             </a:r>
           </a:p>
           <a:p>
@@ -1965,7 +2081,7 @@
           <a:p>
             <a:r>
               <a:rPr dirty="0"/>
-              <a:t>Use the tool's own four buckets — successful, partially successful, unsupported, failed — and make the point that unsupported and failed are different problems. Unsupported means the construct has no Actions equivalent and somebody has to make a design decision. Failed means the importer choked and somebody has to go look. Those land in different columns of the backlog.</a:t>
+              <a:t>Straight delivery after that. Use the table as a vocabulary guide, not a transliteration recipe. Ask what security or lifecycle boundary each stage represented. Manual judgment is needed where service connections, templates, approvals, runners, conditions and failure behavior do not map one to one. Worth saying out loud: Actions has no stages, so a multi-stage pipeline becomes jobs linked by needs, usually with environments carrying the approvals.</a:t>
             </a:r>
           </a:p>
           <a:p>
@@ -1974,136 +2090,16 @@
           <a:p>
             <a:r>
               <a:rPr dirty="0"/>
-              <a:t>Conversion still leaves secrets, service connections, runner and network strategy, environments, approvals, custom tasks, and unsupported triggers for engineering judgment and validation.</a:t>
-            </a:r>
-            <a:endParaRPr lang="en-US" dirty="0"/>
-          </a:p>
-          <a:p>
-            <a:endParaRPr lang="en-US" dirty="0"/>
-          </a:p>
-          <a:p>
-            <a:pPr lvl="0"/>
+              <a:t>OPTIONAL LAUGH LINE — stop on the Service Connection row: “Two words on the left, </a:t>
+            </a:r>
             <a:r>
               <a:rPr lang="en-US" dirty="0"/>
-              <a:t>Supported platforms:</a:t>
-            </a:r>
-            <a:br>
-              <a:rPr lang="en-US" dirty="0"/>
-            </a:br>
-            <a:r>
-              <a:rPr lang="en-US" sz="1200" b="0" i="0" kern="1200" dirty="0">
-                <a:solidFill>
-                  <a:schemeClr val="tx1"/>
-                </a:solidFill>
-                <a:effectLst/>
-                <a:latin typeface="+mn-lt"/>
-                <a:ea typeface="+mn-ea"/>
-                <a:cs typeface="+mn-cs"/>
-              </a:rPr>
-              <a:t>Azure DevOps</a:t>
-            </a:r>
-          </a:p>
-          <a:p>
-            <a:pPr lvl="0"/>
-            <a:r>
-              <a:rPr lang="en-US" sz="1200" b="0" i="0" kern="1200" dirty="0">
-                <a:solidFill>
-                  <a:schemeClr val="tx1"/>
-                </a:solidFill>
-                <a:effectLst/>
-                <a:latin typeface="+mn-lt"/>
-                <a:ea typeface="+mn-ea"/>
-                <a:cs typeface="+mn-cs"/>
-              </a:rPr>
-              <a:t>Bamboo</a:t>
-            </a:r>
-          </a:p>
-          <a:p>
-            <a:pPr lvl="0"/>
-            <a:r>
-              <a:rPr lang="en-US" sz="1200" b="0" i="0" kern="1200" dirty="0">
-                <a:solidFill>
-                  <a:schemeClr val="tx1"/>
-                </a:solidFill>
-                <a:effectLst/>
-                <a:latin typeface="+mn-lt"/>
-                <a:ea typeface="+mn-ea"/>
-                <a:cs typeface="+mn-cs"/>
-              </a:rPr>
-              <a:t>Bitbucket Pipelines</a:t>
-            </a:r>
-          </a:p>
-          <a:p>
-            <a:pPr lvl="0"/>
-            <a:r>
-              <a:rPr lang="en-US" sz="1200" b="0" i="0" kern="1200" dirty="0" err="1">
-                <a:solidFill>
-                  <a:schemeClr val="tx1"/>
-                </a:solidFill>
-                <a:effectLst/>
-                <a:latin typeface="+mn-lt"/>
-                <a:ea typeface="+mn-ea"/>
-                <a:cs typeface="+mn-cs"/>
-              </a:rPr>
-              <a:t>CircleCI</a:t>
-            </a:r>
-            <a:endParaRPr lang="en-US" sz="1200" b="0" i="0" kern="1200" dirty="0">
-              <a:solidFill>
-                <a:schemeClr val="tx1"/>
-              </a:solidFill>
-              <a:effectLst/>
-              <a:latin typeface="+mn-lt"/>
-              <a:ea typeface="+mn-ea"/>
-              <a:cs typeface="+mn-cs"/>
-            </a:endParaRPr>
-          </a:p>
-          <a:p>
-            <a:pPr lvl="0"/>
-            <a:r>
-              <a:rPr lang="en-US" sz="1200" b="0" i="0" kern="1200" dirty="0">
-                <a:solidFill>
-                  <a:schemeClr val="tx1"/>
-                </a:solidFill>
-                <a:effectLst/>
-                <a:latin typeface="+mn-lt"/>
-                <a:ea typeface="+mn-ea"/>
-                <a:cs typeface="+mn-cs"/>
-              </a:rPr>
-              <a:t>GitLab (both cloud and self-hosted)</a:t>
-            </a:r>
-          </a:p>
-          <a:p>
-            <a:pPr lvl="0"/>
-            <a:r>
-              <a:rPr lang="en-US" sz="1200" b="0" i="0" kern="1200" dirty="0">
-                <a:solidFill>
-                  <a:schemeClr val="tx1"/>
-                </a:solidFill>
-                <a:effectLst/>
-                <a:latin typeface="+mn-lt"/>
-                <a:ea typeface="+mn-ea"/>
-                <a:cs typeface="+mn-cs"/>
-              </a:rPr>
-              <a:t>Jenkins</a:t>
-            </a:r>
-          </a:p>
-          <a:p>
-            <a:pPr lvl="0"/>
-            <a:r>
-              <a:rPr lang="en-US" sz="1200" b="0" i="0" kern="1200" dirty="0">
-                <a:solidFill>
-                  <a:schemeClr val="tx1"/>
-                </a:solidFill>
-                <a:effectLst/>
-                <a:latin typeface="+mn-lt"/>
-                <a:ea typeface="+mn-ea"/>
-                <a:cs typeface="+mn-cs"/>
-              </a:rPr>
-              <a:t>Travis CI</a:t>
-            </a:r>
-          </a:p>
-          <a:p>
-            <a:endParaRPr dirty="0"/>
+              <a:t>two</a:t>
+            </a:r>
+            <a:r>
+              <a:rPr dirty="0"/>
+              <a:t> on the right, and about three weeks in between.” This is the row the whole room has personally lost a sprint to.</a:t>
+            </a:r>
           </a:p>
         </p:txBody>
       </p:sp>
@@ -4019,54 +4015,68 @@
           <a:lstStyle/>
           <a:p>
             <a:r>
+              <a:rPr dirty="0"/>
               <a:t>Straight delivery. This is the counterweight to section 1. AI is the honest reason most teams are migrating — this slide is where you pay that argument down so it reads as analysis rather than a pitch. Frame the four as a to-do list, not as reasons to doubt the move.</a:t>
             </a:r>
           </a:p>
           <a:p>
-            <a:endParaRPr/>
-          </a:p>
-          <a:p>
-            <a:r>
+            <a:endParaRPr dirty="0"/>
+          </a:p>
+          <a:p>
+            <a:r>
+              <a:rPr dirty="0"/>
               <a:t>1. WORK ITEMS. Verified behavior, and it closes the loop with the Boards recommendation in section 4: when the Copilot cloud agent is triggered from an Azure Boards work item it captures the text fields — description, repro steps — plus the last 50 comments. So keeping Boards does not cost you the AI payoff; it just means the Boards item literally is the prompt.</a:t>
             </a:r>
           </a:p>
           <a:p>
-            <a:endParaRPr/>
-          </a:p>
-          <a:p>
-            <a:r>
-              <a:t>   WORTH SAYING FOR A REGULATED ROOM: that captured context is stored in the pull request and is visible to anyone with access to the repository. A work item that was private in Azure DevOps becomes readable in GitHub the moment an agent picks it up. Most people have not thought about that, and for anyone with compliance obligations it is the most useful thirty seconds on the slide.</a:t>
-            </a:r>
-          </a:p>
-          <a:p>
-            <a:endParaRPr/>
-          </a:p>
-          <a:p>
-            <a:r>
-              <a:t>2. CONVENTIONS. Three supported files: .github/copilot-instructions.md repository-wide, path-specific NAME.instructions.md under .github/instructions (cloud agent and code review only), and AGENTS.md anywhere in the tree, nearest one winning. Without them the agent infers house style from whatever it can see, which on a large legacy repo is whatever is oldest.</a:t>
-            </a:r>
-          </a:p>
-          <a:p>
-            <a:endParaRPr/>
-          </a:p>
-          <a:p>
-            <a:r>
+            <a:endParaRPr dirty="0"/>
+          </a:p>
+          <a:p>
+            <a:r>
+              <a:rPr dirty="0"/>
+              <a:t>2. CONVENTIONS. Three supported files: .</a:t>
+            </a:r>
+            <a:r>
+              <a:rPr dirty="0" err="1"/>
+              <a:t>github</a:t>
+            </a:r>
+            <a:r>
+              <a:rPr dirty="0"/>
+              <a:t>/copilot-instructions.md repository-wide, path-specific NAME.instructions.md under .</a:t>
+            </a:r>
+            <a:r>
+              <a:rPr dirty="0" err="1"/>
+              <a:t>github</a:t>
+            </a:r>
+            <a:r>
+              <a:rPr dirty="0"/>
+              <a:t>/instructions (cloud agent and code review only), and AGENTS.md anywhere in the tree, nearest one winning. Without them the agent infers house style from whatever it can see, which on a large legacy repo is whatever is oldest.</a:t>
+            </a:r>
+          </a:p>
+          <a:p>
+            <a:endParaRPr dirty="0"/>
+          </a:p>
+          <a:p>
+            <a:r>
+              <a:rPr dirty="0"/>
               <a:t>3. TESTS. Tie this back to the crossing section — a green build is evidence, not acceptance. Agent throughput is capped by human review capacity until CI carries real weight, so teams with thin or flaky suites do not get faster, they just move the bottleneck onto reviewers.</a:t>
             </a:r>
           </a:p>
           <a:p>
-            <a:endParaRPr/>
-          </a:p>
-          <a:p>
-            <a:r>
+            <a:endParaRPr dirty="0"/>
+          </a:p>
+          <a:p>
+            <a:r>
+              <a:rPr dirty="0"/>
               <a:t>4. LICENSING. Moving the repository turns nothing on. The cloud agent needs a paid Copilot plan, it must be enabled on each connected repository, and an organization owner has to install the Azure Boards GitHub app before anyone can use the integration.</a:t>
             </a:r>
           </a:p>
           <a:p>
-            <a:endParaRPr/>
-          </a:p>
-          <a:p>
-            <a:r>
+            <a:endParaRPr dirty="0"/>
+          </a:p>
+          <a:p>
+            <a:r>
+              <a:rPr dirty="0"/>
               <a:t>OPTIONAL LAUGH LINE — after “The work item is the prompt”: “Garbage in, garbage out — except now the garbage arrives with unit tests and a confident summary.”</a:t>
             </a:r>
           </a:p>
@@ -4153,7 +4163,26 @@
           <a:lstStyle/>
           <a:p>
             <a:r>
-              <a:t>Documentary aside — same voice as the opener cards, played for a beat, then straight delivery resumes. This is the section's closing synthesis: startups and one-to-three-squad teams should just take GitHub Projects' lightweight fit, no enterprise overhead needed. Scaled agile, regulated industries, and multi-team portfolios are exactly where Azure Boards' hierarchy and reporting earn their keep. Mixed estates get the hybrid pattern, deliberately — a fit, not a compromise. Then the documentary callback: the Senior Engineer from the opener card isn't wrong to be cautious about change, they're just defending the old pipeline with the wrong argument ('it's always worked') instead of the right one ('here's what the audit says'). Land this warmly, not as a dunk — the point is to hear the objection out and then hand them the Actions Importer audit from section 3. The bucket their pipeline landed in is the conversation.</a:t>
+              <a:rPr dirty="0"/>
+              <a:t>Documentary aside — same voice as the opener cards, played for a beat, then straight delivery resumes. This is the section's closing synthesis: startups and one-to-three-squad teams should just take GitHub Projects' lightweight fit, no enterprise overhead needed. Scaled agile, regulated industries, and multi-team portfolios are exactly where Azure Boards' hierarchy and reporting earn their keep. Mixed estates get the hybrid pattern, deliberately — a fit, not a compromise. </a:t>
+            </a:r>
+            <a:endParaRPr lang="en-US" dirty="0"/>
+          </a:p>
+          <a:p>
+            <a:endParaRPr lang="en-US" dirty="0"/>
+          </a:p>
+          <a:p>
+            <a:r>
+              <a:rPr dirty="0"/>
+              <a:t>Then the documentary callback: the Senior Engineer from the opener card isn't wrong to be cautious about change, they're just defending the old pipeline with the wrong argument ('it's always worked') instead of the right one ('here's what the audit </a:t>
+            </a:r>
+            <a:r>
+              <a:rPr dirty="0" err="1"/>
+              <a:t>says'</a:t>
+            </a:r>
+            <a:r>
+              <a:rPr dirty="0"/>
+              <a:t>). Land this warmly, not as a dunk — the point is to hear the objection out and then hand them the Actions Importer audit from section 3. The bucket their pipeline landed in is the conversation.</a:t>
             </a:r>
           </a:p>
         </p:txBody>
@@ -4702,22 +4731,41 @@
           <a:lstStyle/>
           <a:p>
             <a:r>
+              <a:rPr dirty="0"/>
               <a:t>STRAIGHT delivery, and let it land quieter than anything around it. This is the deck's thesis in one sentence, and it now sits where it earns the most: the recap just handed them six things to remember, and this is the one thing to feel.</a:t>
             </a:r>
           </a:p>
           <a:p>
-            <a:endParaRPr/>
-          </a:p>
-          <a:p>
-            <a:r>
-              <a:t>The slide is built as a statement, not a section card — light ground, no motif, sentence centred, nothing on it competing with the line. Deliver the first sentence flat, then pause before the last clause. “And got fixed by people in the room” is the payoff and it is set in the accent colour for exactly that reason: land it on the people, not the checklist.</a:t>
-            </a:r>
-          </a:p>
-          <a:p>
-            <a:endParaRPr/>
-          </a:p>
-          <a:p>
-            <a:r>
+            <a:endParaRPr dirty="0"/>
+          </a:p>
+          <a:p>
+            <a:r>
+              <a:rPr dirty="0"/>
+              <a:t>The slide is built as a statement, not a section card — light ground, no motif, sentence </a:t>
+            </a:r>
+            <a:r>
+              <a:rPr dirty="0" err="1"/>
+              <a:t>centred</a:t>
+            </a:r>
+            <a:r>
+              <a:rPr dirty="0"/>
+              <a:t>, nothing on it competing with the line. Deliver the first sentence flat, then pause before the last clause. “And got fixed by people in the room” is the payoff and it is set in the accent </a:t>
+            </a:r>
+            <a:r>
+              <a:rPr dirty="0" err="1"/>
+              <a:t>colour</a:t>
+            </a:r>
+            <a:r>
+              <a:rPr dirty="0"/>
+              <a:t> for exactly that reason: land it on the people, not the checklist.</a:t>
+            </a:r>
+          </a:p>
+          <a:p>
+            <a:endParaRPr dirty="0"/>
+          </a:p>
+          <a:p>
+            <a:r>
+              <a:rPr dirty="0"/>
               <a:t>Then go straight into the documentary closer. These two are twins — the same thought in two registers, plain-spoken in light, documentary in dark — so do not take a long pause here and another one there. This slide sets the closer up; the closer gets the silence.</a:t>
             </a:r>
           </a:p>
@@ -5003,46 +5051,60 @@
           <a:lstStyle/>
           <a:p>
             <a:r>
+              <a:rPr dirty="0"/>
               <a:t>DOCUMENTARY VOICE — spoken live, slower than anything else in the deck.</a:t>
             </a:r>
           </a:p>
           <a:p>
-            <a:endParaRPr/>
-          </a:p>
-          <a:p>
-            <a:r>
+            <a:endParaRPr dirty="0"/>
+          </a:p>
+          <a:p>
+            <a:r>
+              <a:rPr dirty="0"/>
               <a:t>Three beats, and they are paced differently. The first line is calm and satisfied: everything worked. The second is where the joke builds — take your time on “every Tuesday at 3 a.m., triggered by nothing, owned by no one,” because the specificity is what makes it funny. Then a real pause, and the last line flat: “Nobody told it the herd had moved.”</a:t>
             </a:r>
           </a:p>
           <a:p>
-            <a:endParaRPr/>
-          </a:p>
-          <a:p>
-            <a:r>
+            <a:endParaRPr dirty="0"/>
+          </a:p>
+          <a:p>
+            <a:r>
+              <a:rPr dirty="0"/>
               <a:t>That last line is the callback to section 6's title, so it should land as a click rather than a punchline. Let the silence sit for two full seconds before advancing — do not rush into the thank-you slide, and do not add another joke on top of it.</a:t>
             </a:r>
           </a:p>
           <a:p>
-            <a:endParaRPr/>
-          </a:p>
-          <a:p>
-            <a:r>
-              <a:t>Note the division of labour with the Unglamorous Truth slide two back: that one is the sincere version in your own voice, this one is the funny version in the documentary voice. Sincerity first, laugh last.</a:t>
-            </a:r>
-          </a:p>
-          <a:p>
-            <a:endParaRPr/>
-          </a:p>
-          <a:p>
-            <a:r>
+            <a:endParaRPr dirty="0"/>
+          </a:p>
+          <a:p>
+            <a:r>
+              <a:rPr dirty="0"/>
+              <a:t>Note the division of </a:t>
+            </a:r>
+            <a:r>
+              <a:rPr dirty="0" err="1"/>
+              <a:t>labour</a:t>
+            </a:r>
+            <a:r>
+              <a:rPr dirty="0"/>
+              <a:t> with the Unglamorous Truth slide two back: that one is the sincere version in your own voice, this one is the funny version in the documentary voice. Sincerity first, laugh last.</a:t>
+            </a:r>
+          </a:p>
+          <a:p>
+            <a:endParaRPr dirty="0"/>
+          </a:p>
+          <a:p>
+            <a:r>
+              <a:rPr dirty="0"/>
               <a:t>---- ALTERNATE CLOSER, if this one doesn't fit on the night ----</a:t>
             </a:r>
           </a:p>
           <a:p>
-            <a:endParaRPr/>
-          </a:p>
-          <a:p>
-            <a:r>
+            <a:endParaRPr dirty="0"/>
+          </a:p>
+          <a:p>
+            <a:r>
+              <a:rPr dirty="0"/>
               <a:t>WARMER: “The herd has crossed. They pause on the far bank, survey the new territory — and immediately begin recreating the folder structure they left behind. They will learn. They always do.”  (Use if you want to end on warmth rather than a laugh. Overlaps slightly with the Unglamorous Truth slide.)</a:t>
             </a:r>
           </a:p>
@@ -6597,7 +6659,7 @@
                 <a:ea typeface="Calibri" pitchFamily="34" charset="-122"/>
                 <a:cs typeface="Calibri" pitchFamily="34" charset="-120"/>
               </a:rPr>
-              <a:t>Most branch policies — the ones scoped to a single repo</a:t>
+              <a:t>Most branch policies — the ones scoped to a single repo (again via GEI)</a:t>
             </a:r>
             <a:endParaRPr lang="en-US" sz="1600" dirty="0"/>
           </a:p>
@@ -7216,7 +7278,7 @@
                 <a:ea typeface="Calibri" pitchFamily="34" charset="-122"/>
                 <a:cs typeface="Calibri" pitchFamily="34" charset="-120"/>
               </a:rPr>
-              <a:t>page order and nesting (Azure DevOps’ .order files and folders; GitHub’s wiki page list is flat), and Azure DevOps-only markdown such as [[_TOC_]], ::: mermaid blocks and #123 work-item links.</a:t>
+              <a:t>page order and nesting (Azure DevOps’ .order files and folders; GitHub’s wiki page list is flat), and Azure DevOps-only markdown such as [[_TOC_]] and #123 work-item links.</a:t>
             </a:r>
             <a:endParaRPr lang="en-US" sz="2000" dirty="0"/>
           </a:p>
@@ -10712,14 +10774,14 @@
           <p:nvPr>
             <p:extLst>
               <p:ext uri="{D42A27DB-BD31-4B8C-83A1-F6EECF244321}">
-                <p14:modId xmlns:p14="http://schemas.microsoft.com/office/powerpoint/2010/main" val="3373412851"/>
+                <p14:modId xmlns:p14="http://schemas.microsoft.com/office/powerpoint/2010/main" val="4102190004"/>
               </p:ext>
             </p:extLst>
           </p:nvPr>
         </p:nvGraphicFramePr>
         <p:xfrm>
           <a:off x="548640" y="1508760"/>
-          <a:ext cx="11091672" cy="4160520"/>
+          <a:ext cx="11045952" cy="4160520"/>
         </p:xfrm>
         <a:graphic>
           <a:graphicData uri="http://schemas.openxmlformats.org/drawingml/2006/table">
@@ -10728,28 +10790,28 @@
                 <a:tableStyleId>{5C22544A-7EE6-4342-B048-85BDC9FD1C3A}</a:tableStyleId>
               </a:tblPr>
               <a:tblGrid>
-                <a:gridCol w="1965960">
+                <a:gridCol w="1449034">
                   <a:extLst>
                     <a:ext uri="{9D8B030D-6E8A-4147-A177-3AD203B41FA5}">
                       <a16:colId xmlns:a16="http://schemas.microsoft.com/office/drawing/2014/main" val="20000"/>
                     </a:ext>
                   </a:extLst>
                 </a:gridCol>
-                <a:gridCol w="2880360">
+                <a:gridCol w="3023688">
+                  <a:extLst>
+                    <a:ext uri="{9D8B030D-6E8A-4147-A177-3AD203B41FA5}">
+                      <a16:colId xmlns:a16="http://schemas.microsoft.com/office/drawing/2014/main" val="3429812597"/>
+                    </a:ext>
+                  </a:extLst>
+                </a:gridCol>
+                <a:gridCol w="3312741">
                   <a:extLst>
                     <a:ext uri="{9D8B030D-6E8A-4147-A177-3AD203B41FA5}">
                       <a16:colId xmlns:a16="http://schemas.microsoft.com/office/drawing/2014/main" val="20001"/>
                     </a:ext>
                   </a:extLst>
                 </a:gridCol>
-                <a:gridCol w="3017520">
-                  <a:extLst>
-                    <a:ext uri="{9D8B030D-6E8A-4147-A177-3AD203B41FA5}">
-                      <a16:colId xmlns:a16="http://schemas.microsoft.com/office/drawing/2014/main" val="20002"/>
-                    </a:ext>
-                  </a:extLst>
-                </a:gridCol>
-                <a:gridCol w="3227832">
+                <a:gridCol w="3260489">
                   <a:extLst>
                     <a:ext uri="{9D8B030D-6E8A-4147-A177-3AD203B41FA5}">
                       <a16:colId xmlns:a16="http://schemas.microsoft.com/office/drawing/2014/main" val="20003"/>
@@ -10788,13 +10850,13 @@
                     <a:p>
                       <a:pPr algn="l"/>
                       <a:r>
-                        <a:rPr sz="1400" b="1">
+                        <a:rPr sz="1400" b="1" dirty="0">
                           <a:solidFill>
                             <a:srgbClr val="F5F5F0"/>
                           </a:solidFill>
                           <a:latin typeface="Calibri"/>
                         </a:rPr>
-                        <a:t>MANUAL JUDGMENT</a:t>
+                        <a:t>OFFICIAL TOOLING</a:t>
                       </a:r>
                     </a:p>
                   </a:txBody>
@@ -10811,13 +10873,13 @@
                     <a:p>
                       <a:pPr algn="l"/>
                       <a:r>
-                        <a:rPr sz="1400" b="1">
+                        <a:rPr sz="1400" b="1" dirty="0">
                           <a:solidFill>
                             <a:srgbClr val="F5F5F0"/>
                           </a:solidFill>
                           <a:latin typeface="Calibri"/>
                         </a:rPr>
-                        <a:t>OFFICIAL TOOLING</a:t>
+                        <a:t>MANUAL JUDGMENT</a:t>
                       </a:r>
                     </a:p>
                   </a:txBody>
@@ -10887,13 +10949,13 @@
                     <a:p>
                       <a:pPr algn="l"/>
                       <a:r>
-                        <a:rPr sz="1400" b="0">
+                        <a:rPr sz="1400" b="0" dirty="0">
                           <a:solidFill>
                             <a:srgbClr val="2B2B2B"/>
                           </a:solidFill>
                           <a:latin typeface="Calibri"/>
                         </a:rPr>
-                        <a:t>Resolve identity, permissions, visibility, and policy exceptions.</a:t>
+                        <a:t>GEI / gh-ado2gh; Enterprise Live Migrations (ELM) where eligible.</a:t>
                       </a:r>
                     </a:p>
                   </a:txBody>
@@ -10916,7 +10978,7 @@
                           </a:solidFill>
                           <a:latin typeface="Calibri"/>
                         </a:rPr>
-                        <a:t>GEI / gh-ado2gh; Enterprise Live Migrations (ELM) where eligible.</a:t>
+                        <a:t>Resolve identity, permissions, visibility, and policy exceptions.</a:t>
                       </a:r>
                     </a:p>
                   </a:txBody>
@@ -10986,13 +11048,13 @@
                     <a:p>
                       <a:pPr algn="l"/>
                       <a:r>
-                        <a:rPr sz="1400" b="0">
+                        <a:rPr sz="1400" b="0" dirty="0">
                           <a:solidFill>
                             <a:srgbClr val="2B2B2B"/>
                           </a:solidFill>
                           <a:latin typeface="Calibri"/>
                         </a:rPr>
-                        <a:t>Redesign approvals, secrets, runners, environments, and lifecycle boundaries.</a:t>
+                        <a:t>Actions Importer audits and converts supported constructs.</a:t>
                       </a:r>
                     </a:p>
                   </a:txBody>
@@ -11009,13 +11071,13 @@
                     <a:p>
                       <a:pPr algn="l"/>
                       <a:r>
-                        <a:rPr sz="1400" b="0" dirty="0">
+                        <a:rPr sz="1400" b="0">
                           <a:solidFill>
                             <a:srgbClr val="2B2B2B"/>
                           </a:solidFill>
                           <a:latin typeface="Calibri"/>
                         </a:rPr>
-                        <a:t>Actions Importer audits and converts supported constructs.</a:t>
+                        <a:t>Redesign approvals, secrets, runners, environments, and lifecycle boundaries.</a:t>
                       </a:r>
                     </a:p>
                   </a:txBody>
@@ -11091,7 +11153,7 @@
                           </a:solidFill>
                           <a:latin typeface="Calibri"/>
                         </a:rPr>
-                        <a:t>Own acceptance criteria, risk decisions, cutover, and rollback.</a:t>
+                        <a:t>Tests, scanners, deployment gates, and observability.</a:t>
                       </a:r>
                     </a:p>
                   </a:txBody>
@@ -11114,7 +11176,7 @@
                           </a:solidFill>
                           <a:latin typeface="Calibri"/>
                         </a:rPr>
-                        <a:t>Tests, scanners, deployment gates, and observability.</a:t>
+                        <a:t>Own acceptance criteria, risk decisions, cutover, and rollback.</a:t>
                       </a:r>
                     </a:p>
                   </a:txBody>
@@ -11165,7 +11227,7 @@
         </p:nvSpPr>
         <p:spPr>
           <a:xfrm>
-            <a:off x="548640" y="5568696"/>
+            <a:off x="548640" y="5782926"/>
             <a:ext cx="11064240" cy="731520"/>
           </a:xfrm>
           <a:prstGeom prst="roundRect">
@@ -11200,7 +11262,7 @@
         </p:nvSpPr>
         <p:spPr>
           <a:xfrm>
-            <a:off x="548640" y="5568696"/>
+            <a:off x="548640" y="5782926"/>
             <a:ext cx="11064240" cy="731520"/>
           </a:xfrm>
           <a:prstGeom prst="rect">
@@ -11216,7 +11278,7 @@
           <a:p>
             <a:pPr algn="l"/>
             <a:r>
-              <a:rPr sz="1250" b="1" spc="120">
+              <a:rPr sz="1250" b="1" spc="120" dirty="0">
                 <a:solidFill>
                   <a:srgbClr val="E0B85C"/>
                 </a:solidFill>
@@ -11225,7 +11287,7 @@
               <a:t>TAKEAWAY </a:t>
             </a:r>
             <a:r>
-              <a:rPr sz="1500" b="0">
+              <a:rPr sz="1500" b="0" dirty="0">
                 <a:solidFill>
                   <a:srgbClr val="F5F5F0"/>
                 </a:solidFill>
@@ -11354,6 +11416,2546 @@
 </file>
 
 <file path=ppt/slides/slide20.xml><?xml version="1.0" encoding="utf-8"?>
+<p:sld xmlns:a="http://schemas.openxmlformats.org/drawingml/2006/main" xmlns:r="http://schemas.openxmlformats.org/officeDocument/2006/relationships" xmlns:p="http://schemas.openxmlformats.org/presentationml/2006/main">
+  <p:cSld name="Slide 24">
+    <p:bg>
+      <p:bgPr>
+        <a:solidFill>
+          <a:srgbClr val="FFFFFF"/>
+        </a:solidFill>
+        <a:effectLst/>
+      </p:bgPr>
+    </p:bg>
+    <p:spTree>
+      <p:nvGrpSpPr>
+        <p:cNvPr id="1" name=""/>
+        <p:cNvGrpSpPr/>
+        <p:nvPr/>
+      </p:nvGrpSpPr>
+      <p:grpSpPr>
+        <a:xfrm>
+          <a:off x="0" y="0"/>
+          <a:ext cx="0" cy="0"/>
+          <a:chOff x="0" y="0"/>
+          <a:chExt cx="0" cy="0"/>
+        </a:xfrm>
+      </p:grpSpPr>
+      <p:sp>
+        <p:nvSpPr>
+          <p:cNvPr id="2" name="Shape 0"/>
+          <p:cNvSpPr/>
+          <p:nvPr/>
+        </p:nvSpPr>
+        <p:spPr>
+          <a:xfrm>
+            <a:off x="548640" y="457200"/>
+            <a:ext cx="566928" cy="566928"/>
+          </a:xfrm>
+          <a:prstGeom prst="ellipse">
+            <a:avLst/>
+          </a:prstGeom>
+          <a:solidFill>
+            <a:srgbClr val="C1440E"/>
+          </a:solidFill>
+          <a:ln/>
+        </p:spPr>
+        <p:txBody>
+          <a:bodyPr/>
+          <a:lstStyle/>
+          <a:p>
+            <a:endParaRPr lang="en-US"/>
+          </a:p>
+        </p:txBody>
+      </p:sp>
+      <p:pic>
+        <p:nvPicPr>
+          <p:cNvPr id="3" name="Image 0" descr="/home/claude/pptx-build/assets/icons/FaDatabase-FFFFFF-200.png"/>
+          <p:cNvPicPr>
+            <a:picLocks noChangeAspect="1"/>
+          </p:cNvPicPr>
+          <p:nvPr/>
+        </p:nvPicPr>
+        <p:blipFill>
+          <a:blip r:embed="rId3"/>
+          <a:stretch>
+            <a:fillRect/>
+          </a:stretch>
+        </p:blipFill>
+        <p:spPr>
+          <a:xfrm>
+            <a:off x="685800" y="594360"/>
+            <a:ext cx="292608" cy="292608"/>
+          </a:xfrm>
+          <a:prstGeom prst="rect">
+            <a:avLst/>
+          </a:prstGeom>
+        </p:spPr>
+      </p:pic>
+      <p:sp>
+        <p:nvSpPr>
+          <p:cNvPr id="4" name="Text 1"/>
+          <p:cNvSpPr txBox="1"/>
+          <p:nvPr/>
+        </p:nvSpPr>
+        <p:spPr>
+          <a:xfrm>
+            <a:off x="1234440" y="420624"/>
+            <a:ext cx="9875520" cy="320040"/>
+          </a:xfrm>
+          <a:prstGeom prst="rect">
+            <a:avLst/>
+          </a:prstGeom>
+          <a:noFill/>
+          <a:ln/>
+        </p:spPr>
+        <p:txBody>
+          <a:bodyPr wrap="square" lIns="0" tIns="0" rIns="0" bIns="0" rtlCol="0" anchor="ctr"/>
+          <a:lstStyle/>
+          <a:p>
+            <a:pPr marL="0" indent="0">
+              <a:buNone/>
+            </a:pPr>
+            <a:r>
+              <a:rPr lang="en-US" sz="1500" b="1" kern="0" spc="200" dirty="0">
+                <a:solidFill>
+                  <a:srgbClr val="C1440E"/>
+                </a:solidFill>
+                <a:latin typeface="Calibri" pitchFamily="34" charset="0"/>
+                <a:ea typeface="Calibri" pitchFamily="34" charset="-122"/>
+                <a:cs typeface="Calibri" pitchFamily="34" charset="-120"/>
+              </a:rPr>
+              <a:t>CROSSING THE RIVER</a:t>
+            </a:r>
+            <a:endParaRPr lang="en-US" sz="1500" dirty="0"/>
+          </a:p>
+        </p:txBody>
+      </p:sp>
+      <p:sp>
+        <p:nvSpPr>
+          <p:cNvPr id="5" name="Text 2"/>
+          <p:cNvSpPr txBox="1"/>
+          <p:nvPr/>
+        </p:nvSpPr>
+        <p:spPr>
+          <a:xfrm>
+            <a:off x="1234440" y="749808"/>
+            <a:ext cx="10515600" cy="868680"/>
+          </a:xfrm>
+          <a:prstGeom prst="rect">
+            <a:avLst/>
+          </a:prstGeom>
+          <a:noFill/>
+          <a:ln/>
+        </p:spPr>
+        <p:txBody>
+          <a:bodyPr wrap="square" lIns="0" tIns="0" rIns="0" bIns="0" rtlCol="0" anchor="t"/>
+          <a:lstStyle/>
+          <a:p>
+            <a:pPr marL="0" indent="0">
+              <a:buNone/>
+            </a:pPr>
+            <a:r>
+              <a:rPr lang="en-US" sz="3200" b="1">
+                <a:solidFill>
+                  <a:srgbClr val="1F3D2C"/>
+                </a:solidFill>
+                <a:latin typeface="Cambria"/>
+              </a:rPr>
+              <a:t>Repository Plane — gh-ado2gh Orchestrates the Move</a:t>
+            </a:r>
+            <a:endParaRPr lang="en-US" sz="3200" dirty="0"/>
+          </a:p>
+        </p:txBody>
+      </p:sp>
+      <p:sp>
+        <p:nvSpPr>
+          <p:cNvPr id="6" name="Shape 3"/>
+          <p:cNvSpPr/>
+          <p:nvPr/>
+        </p:nvSpPr>
+        <p:spPr>
+          <a:xfrm>
+            <a:off x="548640" y="1645920"/>
+            <a:ext cx="5349240" cy="3429000"/>
+          </a:xfrm>
+          <a:prstGeom prst="roundRect">
+            <a:avLst>
+              <a:gd name="adj" fmla="val 3200"/>
+            </a:avLst>
+          </a:prstGeom>
+          <a:solidFill>
+            <a:srgbClr val="F7F6F2"/>
+          </a:solidFill>
+          <a:ln w="12700">
+            <a:solidFill>
+              <a:srgbClr val="DDD8CC"/>
+            </a:solidFill>
+            <a:prstDash val="solid"/>
+          </a:ln>
+          <a:effectLst>
+            <a:outerShdw blurRad="76200" dist="25400" dir="5400000" algn="bl" rotWithShape="0">
+              <a:srgbClr val="000000">
+                <a:alpha val="12000"/>
+              </a:srgbClr>
+            </a:outerShdw>
+          </a:effectLst>
+        </p:spPr>
+        <p:txBody>
+          <a:bodyPr/>
+          <a:lstStyle/>
+          <a:p>
+            <a:endParaRPr lang="en-US"/>
+          </a:p>
+        </p:txBody>
+      </p:sp>
+      <p:sp>
+        <p:nvSpPr>
+          <p:cNvPr id="7" name="Text 4"/>
+          <p:cNvSpPr txBox="1"/>
+          <p:nvPr/>
+        </p:nvSpPr>
+        <p:spPr>
+          <a:xfrm>
+            <a:off x="822960" y="1828800"/>
+            <a:ext cx="4800600" cy="457200"/>
+          </a:xfrm>
+          <a:prstGeom prst="rect">
+            <a:avLst/>
+          </a:prstGeom>
+          <a:noFill/>
+          <a:ln/>
+        </p:spPr>
+        <p:txBody>
+          <a:bodyPr wrap="square" lIns="0" tIns="0" rIns="0" bIns="0" rtlCol="0" anchor="ctr"/>
+          <a:lstStyle/>
+          <a:p>
+            <a:pPr marL="0" indent="0">
+              <a:buNone/>
+            </a:pPr>
+            <a:r>
+              <a:rPr lang="en-US" sz="1900" b="1">
+                <a:solidFill>
+                  <a:srgbClr val="1F3D2C"/>
+                </a:solidFill>
+                <a:latin typeface="Cambria"/>
+              </a:rPr>
+              <a:t>What It Does</a:t>
+            </a:r>
+            <a:endParaRPr lang="en-US" sz="1900" dirty="0"/>
+          </a:p>
+        </p:txBody>
+      </p:sp>
+      <p:sp>
+        <p:nvSpPr>
+          <p:cNvPr id="8" name="Text 5"/>
+          <p:cNvSpPr txBox="1"/>
+          <p:nvPr/>
+        </p:nvSpPr>
+        <p:spPr>
+          <a:xfrm>
+            <a:off x="822960" y="2331720"/>
+            <a:ext cx="4800600" cy="2651760"/>
+          </a:xfrm>
+          <a:prstGeom prst="rect">
+            <a:avLst/>
+          </a:prstGeom>
+          <a:noFill/>
+          <a:ln/>
+        </p:spPr>
+        <p:txBody>
+          <a:bodyPr wrap="square" lIns="0" tIns="0" rIns="0" bIns="0" rtlCol="0" anchor="ctr"/>
+          <a:lstStyle/>
+          <a:p>
+            <a:pPr marL="285750" indent="-285750">
+              <a:lnSpc>
+                <a:spcPct val="110000"/>
+              </a:lnSpc>
+              <a:spcAft>
+                <a:spcPts val="800"/>
+              </a:spcAft>
+              <a:buSzPct val="100000"/>
+              <a:buFont typeface="Arial" panose="020B0604020202020204" pitchFamily="34" charset="0"/>
+              <a:buChar char="•"/>
+            </a:pPr>
+            <a:r>
+              <a:rPr lang="en-US" sz="1450" dirty="0">
+                <a:solidFill>
+                  <a:srgbClr val="2B2B2B"/>
+                </a:solidFill>
+              </a:rPr>
+              <a:t>GitHub Enterprise Importer (GEI) is a set of GitHub CLI extensions (including </a:t>
+            </a:r>
+            <a:r>
+              <a:rPr lang="en-US" sz="1450" dirty="0">
+                <a:solidFill>
+                  <a:srgbClr val="2B2B2B"/>
+                </a:solidFill>
+                <a:latin typeface="Cascadia Code" panose="020B0609020000020004" pitchFamily="49" charset="0"/>
+                <a:cs typeface="Cascadia Code" panose="020B0609020000020004" pitchFamily="49" charset="0"/>
+              </a:rPr>
+              <a:t>ado2gh</a:t>
+            </a:r>
+            <a:r>
+              <a:rPr lang="en-US" sz="1450" dirty="0">
+                <a:solidFill>
+                  <a:srgbClr val="2B2B2B"/>
+                </a:solidFill>
+              </a:rPr>
+              <a:t>)</a:t>
+            </a:r>
+            <a:endParaRPr lang="en-US" sz="1450" dirty="0">
+              <a:solidFill>
+                <a:srgbClr val="2B2B2B"/>
+              </a:solidFill>
+              <a:ea typeface="Cascadia Mono" panose="020B0609020000020004" pitchFamily="49" charset="0"/>
+              <a:cs typeface="Cascadia Mono" panose="020B0609020000020004" pitchFamily="49" charset="0"/>
+            </a:endParaRPr>
+          </a:p>
+          <a:p>
+            <a:pPr marL="285750" indent="-285750">
+              <a:lnSpc>
+                <a:spcPct val="110000"/>
+              </a:lnSpc>
+              <a:spcAft>
+                <a:spcPts val="800"/>
+              </a:spcAft>
+              <a:buSzPct val="100000"/>
+              <a:buFont typeface="Arial" panose="020B0604020202020204" pitchFamily="34" charset="0"/>
+              <a:buChar char="•"/>
+            </a:pPr>
+            <a:r>
+              <a:rPr lang="en-US" sz="1450" dirty="0">
+                <a:solidFill>
+                  <a:srgbClr val="2B2B2B"/>
+                </a:solidFill>
+                <a:latin typeface="Cascadia Code" panose="020B0609020000020004" pitchFamily="49" charset="0"/>
+                <a:ea typeface="Cascadia Mono" panose="020B0609020000020004" pitchFamily="49" charset="0"/>
+                <a:cs typeface="Cascadia Code" panose="020B0609020000020004" pitchFamily="49" charset="0"/>
+              </a:rPr>
+              <a:t>inventory-report</a:t>
+            </a:r>
+            <a:r>
+              <a:rPr lang="en-US" sz="1450" dirty="0">
+                <a:solidFill>
+                  <a:srgbClr val="2B2B2B"/>
+                </a:solidFill>
+                <a:latin typeface="Calibri"/>
+              </a:rPr>
+              <a:t> profiles repositories and PR volume</a:t>
+            </a:r>
+            <a:endParaRPr lang="en-US" sz="1450" dirty="0"/>
+          </a:p>
+          <a:p>
+            <a:pPr marL="285750" indent="-285750">
+              <a:spcAft>
+                <a:spcPts val="800"/>
+              </a:spcAft>
+              <a:buFont typeface="Arial" panose="020B0604020202020204" pitchFamily="34" charset="0"/>
+              <a:buChar char="•"/>
+            </a:pPr>
+            <a:r>
+              <a:rPr lang="en-US" sz="1450" dirty="0">
+                <a:solidFill>
+                  <a:srgbClr val="2B2B2B"/>
+                </a:solidFill>
+                <a:latin typeface="Cascadia Code" panose="020B0609020000020004" pitchFamily="49" charset="0"/>
+                <a:ea typeface="Cascadia Mono" panose="020B0609020000020004" pitchFamily="49" charset="0"/>
+                <a:cs typeface="Cascadia Code" panose="020B0609020000020004" pitchFamily="49" charset="0"/>
+              </a:rPr>
+              <a:t>generate-script</a:t>
+            </a:r>
+            <a:r>
+              <a:rPr lang="en-US" sz="1450" dirty="0">
+                <a:solidFill>
+                  <a:srgbClr val="2B2B2B"/>
+                </a:solidFill>
+                <a:latin typeface="Calibri"/>
+              </a:rPr>
+              <a:t> creates reviewable migration code</a:t>
+            </a:r>
+          </a:p>
+          <a:p>
+            <a:pPr marL="285750" indent="-285750">
+              <a:spcAft>
+                <a:spcPts val="800"/>
+              </a:spcAft>
+              <a:buFont typeface="Arial" panose="020B0604020202020204" pitchFamily="34" charset="0"/>
+              <a:buChar char="•"/>
+            </a:pPr>
+            <a:r>
+              <a:rPr lang="en-US" sz="1450" dirty="0">
+                <a:solidFill>
+                  <a:srgbClr val="2B2B2B"/>
+                </a:solidFill>
+                <a:latin typeface="Cascadia Code" panose="020B0609020000020004" pitchFamily="49" charset="0"/>
+                <a:ea typeface="Cascadia Mono" panose="020B0609020000020004" pitchFamily="49" charset="0"/>
+                <a:cs typeface="Cascadia Code" panose="020B0609020000020004" pitchFamily="49" charset="0"/>
+              </a:rPr>
+              <a:t>--all </a:t>
+            </a:r>
+            <a:r>
+              <a:rPr lang="en-US" sz="1450" dirty="0">
+                <a:solidFill>
+                  <a:srgbClr val="2B2B2B"/>
+                </a:solidFill>
+                <a:latin typeface="Calibri"/>
+              </a:rPr>
+              <a:t>adds team creation, Boards integration, and pipeline rewiring</a:t>
+            </a:r>
+          </a:p>
+        </p:txBody>
+      </p:sp>
+      <p:sp>
+        <p:nvSpPr>
+          <p:cNvPr id="9" name="Shape 6"/>
+          <p:cNvSpPr/>
+          <p:nvPr/>
+        </p:nvSpPr>
+        <p:spPr>
+          <a:xfrm>
+            <a:off x="6263640" y="1645920"/>
+            <a:ext cx="5349240" cy="3429000"/>
+          </a:xfrm>
+          <a:prstGeom prst="roundRect">
+            <a:avLst>
+              <a:gd name="adj" fmla="val 3200"/>
+            </a:avLst>
+          </a:prstGeom>
+          <a:solidFill>
+            <a:srgbClr val="1F3D2C"/>
+          </a:solidFill>
+          <a:ln w="12700">
+            <a:solidFill>
+              <a:srgbClr val="DDD8CC"/>
+            </a:solidFill>
+            <a:prstDash val="solid"/>
+          </a:ln>
+          <a:effectLst>
+            <a:outerShdw blurRad="76200" dist="25400" dir="5400000" algn="bl" rotWithShape="0">
+              <a:srgbClr val="000000">
+                <a:alpha val="12000"/>
+              </a:srgbClr>
+            </a:outerShdw>
+          </a:effectLst>
+        </p:spPr>
+        <p:txBody>
+          <a:bodyPr/>
+          <a:lstStyle/>
+          <a:p>
+            <a:endParaRPr lang="en-US"/>
+          </a:p>
+        </p:txBody>
+      </p:sp>
+      <p:sp>
+        <p:nvSpPr>
+          <p:cNvPr id="10" name="Text 7"/>
+          <p:cNvSpPr txBox="1"/>
+          <p:nvPr/>
+        </p:nvSpPr>
+        <p:spPr>
+          <a:xfrm>
+            <a:off x="6537960" y="1828800"/>
+            <a:ext cx="4800600" cy="457200"/>
+          </a:xfrm>
+          <a:prstGeom prst="rect">
+            <a:avLst/>
+          </a:prstGeom>
+          <a:noFill/>
+          <a:ln/>
+        </p:spPr>
+        <p:txBody>
+          <a:bodyPr wrap="square" lIns="0" tIns="0" rIns="0" bIns="0" rtlCol="0" anchor="ctr"/>
+          <a:lstStyle/>
+          <a:p>
+            <a:pPr marL="0" indent="0">
+              <a:buNone/>
+            </a:pPr>
+            <a:r>
+              <a:rPr lang="en-US" sz="1900" b="1" dirty="0">
+                <a:solidFill>
+                  <a:srgbClr val="F5F5F0"/>
+                </a:solidFill>
+                <a:latin typeface="Cambria"/>
+              </a:rPr>
+              <a:t>Where the Boundary Is</a:t>
+            </a:r>
+            <a:endParaRPr lang="en-US" sz="1900" dirty="0"/>
+          </a:p>
+        </p:txBody>
+      </p:sp>
+      <p:sp>
+        <p:nvSpPr>
+          <p:cNvPr id="11" name="Text 8"/>
+          <p:cNvSpPr txBox="1"/>
+          <p:nvPr/>
+        </p:nvSpPr>
+        <p:spPr>
+          <a:xfrm>
+            <a:off x="6537960" y="2331720"/>
+            <a:ext cx="4800600" cy="2651760"/>
+          </a:xfrm>
+          <a:prstGeom prst="rect">
+            <a:avLst/>
+          </a:prstGeom>
+          <a:noFill/>
+          <a:ln/>
+        </p:spPr>
+        <p:txBody>
+          <a:bodyPr wrap="square" lIns="0" tIns="0" rIns="0" bIns="0" rtlCol="0" anchor="ctr"/>
+          <a:lstStyle/>
+          <a:p>
+            <a:pPr marL="285750" indent="-285750">
+              <a:spcBef>
+                <a:spcPts val="800"/>
+              </a:spcBef>
+              <a:buFont typeface="Arial" panose="020B0604020202020204" pitchFamily="34" charset="0"/>
+              <a:buChar char="•"/>
+            </a:pPr>
+            <a:r>
+              <a:rPr sz="1450" dirty="0">
+                <a:solidFill>
+                  <a:srgbClr val="F5F5F0"/>
+                </a:solidFill>
+                <a:latin typeface="Calibri"/>
+              </a:rPr>
+              <a:t>Pipeline-logic conversion belongs to </a:t>
+            </a:r>
+            <a:r>
+              <a:rPr lang="en-US" sz="1450" dirty="0">
+                <a:solidFill>
+                  <a:srgbClr val="F5F5F0"/>
+                </a:solidFill>
+                <a:latin typeface="Calibri"/>
+              </a:rPr>
+              <a:t>elsewhere (</a:t>
+            </a:r>
+            <a:r>
+              <a:rPr sz="1450" dirty="0">
+                <a:solidFill>
+                  <a:srgbClr val="F5F5F0"/>
+                </a:solidFill>
+                <a:latin typeface="Calibri"/>
+              </a:rPr>
+              <a:t>Actions Importer</a:t>
+            </a:r>
+            <a:r>
+              <a:rPr lang="en-US" sz="1450" dirty="0">
+                <a:solidFill>
+                  <a:srgbClr val="F5F5F0"/>
+                </a:solidFill>
+                <a:latin typeface="Calibri"/>
+              </a:rPr>
+              <a:t>)</a:t>
+            </a:r>
+            <a:endParaRPr sz="1450" dirty="0">
+              <a:solidFill>
+                <a:srgbClr val="F5F5F0"/>
+              </a:solidFill>
+              <a:latin typeface="Calibri"/>
+            </a:endParaRPr>
+          </a:p>
+          <a:p>
+            <a:pPr marL="285750" indent="-285750">
+              <a:spcBef>
+                <a:spcPts val="800"/>
+              </a:spcBef>
+              <a:buFont typeface="Arial" panose="020B0604020202020204" pitchFamily="34" charset="0"/>
+              <a:buChar char="•"/>
+            </a:pPr>
+            <a:r>
+              <a:rPr sz="1450" dirty="0">
+                <a:solidFill>
+                  <a:srgbClr val="F5F5F0"/>
+                </a:solidFill>
+                <a:latin typeface="Calibri"/>
+              </a:rPr>
+              <a:t>LFS transfer and identity decisions remain separate work</a:t>
+            </a:r>
+          </a:p>
+        </p:txBody>
+      </p:sp>
+      <p:sp>
+        <p:nvSpPr>
+          <p:cNvPr id="12" name="Shape 9"/>
+          <p:cNvSpPr/>
+          <p:nvPr/>
+        </p:nvSpPr>
+        <p:spPr>
+          <a:xfrm>
+            <a:off x="548640" y="5257800"/>
+            <a:ext cx="11064240" cy="1234440"/>
+          </a:xfrm>
+          <a:prstGeom prst="roundRect">
+            <a:avLst>
+              <a:gd name="adj" fmla="val 12632"/>
+            </a:avLst>
+          </a:prstGeom>
+          <a:solidFill>
+            <a:srgbClr val="F7F6F2"/>
+          </a:solidFill>
+          <a:ln w="12700">
+            <a:noFill/>
+            <a:prstDash val="solid"/>
+          </a:ln>
+          <a:effectLst>
+            <a:outerShdw blurRad="76200" dist="25400" dir="5400000" algn="bl" rotWithShape="0">
+              <a:srgbClr val="000000">
+                <a:alpha val="12000"/>
+              </a:srgbClr>
+            </a:outerShdw>
+          </a:effectLst>
+        </p:spPr>
+        <p:txBody>
+          <a:bodyPr/>
+          <a:lstStyle/>
+          <a:p>
+            <a:endParaRPr lang="en-US"/>
+          </a:p>
+        </p:txBody>
+      </p:sp>
+      <p:sp>
+        <p:nvSpPr>
+          <p:cNvPr id="13" name="Text 10"/>
+          <p:cNvSpPr txBox="1"/>
+          <p:nvPr/>
+        </p:nvSpPr>
+        <p:spPr>
+          <a:xfrm>
+            <a:off x="548640" y="5257800"/>
+            <a:ext cx="11064240" cy="1234440"/>
+          </a:xfrm>
+          <a:prstGeom prst="rect">
+            <a:avLst/>
+          </a:prstGeom>
+          <a:noFill/>
+          <a:ln/>
+        </p:spPr>
+        <p:txBody>
+          <a:bodyPr wrap="square" lIns="256032" tIns="54864" rIns="256032" bIns="54864" rtlCol="0" anchor="ctr"/>
+          <a:lstStyle/>
+          <a:p>
+            <a:pPr marL="0" indent="0" algn="l">
+              <a:lnSpc>
+                <a:spcPct val="110000"/>
+              </a:lnSpc>
+              <a:buNone/>
+            </a:pPr>
+            <a:r>
+              <a:rPr sz="1250" b="1" spc="120">
+                <a:solidFill>
+                  <a:srgbClr val="C1440E"/>
+                </a:solidFill>
+                <a:latin typeface="Calibri"/>
+              </a:rPr>
+              <a:t>DO THIS </a:t>
+            </a:r>
+            <a:r>
+              <a:rPr sz="1500" b="0">
+                <a:solidFill>
+                  <a:srgbClr val="2B2B2B"/>
+                </a:solidFill>
+                <a:latin typeface="Calibri"/>
+              </a:rPr>
+              <a:t>Treat the generated script as production migration code: review it, version it, and make ownership explicit.</a:t>
+            </a:r>
+            <a:endParaRPr lang="en-US" sz="1450" dirty="0"/>
+          </a:p>
+        </p:txBody>
+      </p:sp>
+      <p:sp>
+        <p:nvSpPr>
+          <p:cNvPr id="16" name="Slide Number Placeholder"/>
+          <p:cNvSpPr>
+            <a:spLocks noGrp="1"/>
+          </p:cNvSpPr>
+          <p:nvPr>
+            <p:ph type="sldNum" sz="quarter" idx="10"/>
+          </p:nvPr>
+        </p:nvSpPr>
+        <p:spPr/>
+        <p:txBody>
+          <a:bodyPr/>
+          <a:lstStyle/>
+          <a:p>
+            <a:fld id="{BCB632DE-6AD4-40F1-944C-28C0E9BF62DC}" type="slidenum">
+              <a:rPr lang="en-US"/>
+              <a:t>20</a:t>
+            </a:fld>
+            <a:endParaRPr lang="en-US" dirty="0"/>
+          </a:p>
+        </p:txBody>
+      </p:sp>
+    </p:spTree>
+  </p:cSld>
+  <p:clrMapOvr>
+    <a:masterClrMapping/>
+  </p:clrMapOvr>
+</p:sld>
+</file>
+
+<file path=ppt/slides/slide21.xml><?xml version="1.0" encoding="utf-8"?>
+<p:sld xmlns:a="http://schemas.openxmlformats.org/drawingml/2006/main" xmlns:r="http://schemas.openxmlformats.org/officeDocument/2006/relationships" xmlns:p="http://schemas.openxmlformats.org/presentationml/2006/main">
+  <p:cSld>
+    <p:spTree>
+      <p:nvGrpSpPr>
+        <p:cNvPr id="1" name=""/>
+        <p:cNvGrpSpPr/>
+        <p:nvPr/>
+      </p:nvGrpSpPr>
+      <p:grpSpPr>
+        <a:xfrm>
+          <a:off x="0" y="0"/>
+          <a:ext cx="0" cy="0"/>
+          <a:chOff x="0" y="0"/>
+          <a:chExt cx="0" cy="0"/>
+        </a:xfrm>
+      </p:grpSpPr>
+      <p:sp>
+        <p:nvSpPr>
+          <p:cNvPr id="2" name="Shape 0"/>
+          <p:cNvSpPr/>
+          <p:nvPr/>
+        </p:nvSpPr>
+        <p:spPr>
+          <a:xfrm>
+            <a:off x="548640" y="457200"/>
+            <a:ext cx="566928" cy="566928"/>
+          </a:xfrm>
+          <a:prstGeom prst="ellipse">
+            <a:avLst/>
+          </a:prstGeom>
+          <a:solidFill>
+            <a:srgbClr val="C1440E"/>
+          </a:solidFill>
+          <a:ln/>
+        </p:spPr>
+        <p:txBody>
+          <a:bodyPr/>
+          <a:lstStyle/>
+          <a:p>
+            <a:endParaRPr lang="en-US"/>
+          </a:p>
+        </p:txBody>
+      </p:sp>
+      <p:pic>
+        <p:nvPicPr>
+          <p:cNvPr id="3" name="Image 0" descr="/home/claude/pptx-build/assets/icons/FaFlask-FFFFFF-200.png"/>
+          <p:cNvPicPr>
+            <a:picLocks noChangeAspect="1"/>
+          </p:cNvPicPr>
+          <p:nvPr/>
+        </p:nvPicPr>
+        <p:blipFill>
+          <a:blip r:embed="rId3"/>
+          <a:stretch>
+            <a:fillRect/>
+          </a:stretch>
+        </p:blipFill>
+        <p:spPr>
+          <a:xfrm>
+            <a:off x="685800" y="594360"/>
+            <a:ext cx="292608" cy="292608"/>
+          </a:xfrm>
+          <a:prstGeom prst="rect">
+            <a:avLst/>
+          </a:prstGeom>
+        </p:spPr>
+      </p:pic>
+      <p:sp>
+        <p:nvSpPr>
+          <p:cNvPr id="4" name="Text 1"/>
+          <p:cNvSpPr txBox="1"/>
+          <p:nvPr/>
+        </p:nvSpPr>
+        <p:spPr>
+          <a:xfrm>
+            <a:off x="1234440" y="420624"/>
+            <a:ext cx="9875520" cy="320040"/>
+          </a:xfrm>
+          <a:prstGeom prst="rect">
+            <a:avLst/>
+          </a:prstGeom>
+          <a:noFill/>
+          <a:ln/>
+        </p:spPr>
+        <p:txBody>
+          <a:bodyPr wrap="square" lIns="0" tIns="0" rIns="0" bIns="0" rtlCol="0" anchor="ctr"/>
+          <a:lstStyle/>
+          <a:p>
+            <a:pPr marL="0" indent="0">
+              <a:buNone/>
+            </a:pPr>
+            <a:r>
+              <a:rPr lang="en-US" sz="1500" b="1" kern="0" spc="200" dirty="0">
+                <a:solidFill>
+                  <a:srgbClr val="C1440E"/>
+                </a:solidFill>
+                <a:latin typeface="Calibri" pitchFamily="34" charset="0"/>
+                <a:ea typeface="Calibri" pitchFamily="34" charset="-122"/>
+                <a:cs typeface="Calibri" pitchFamily="34" charset="-120"/>
+              </a:rPr>
+              <a:t>CROSSING THE RIVER</a:t>
+            </a:r>
+            <a:endParaRPr lang="en-US" sz="1500" dirty="0"/>
+          </a:p>
+        </p:txBody>
+      </p:sp>
+      <p:sp>
+        <p:nvSpPr>
+          <p:cNvPr id="5" name="Text 2"/>
+          <p:cNvSpPr txBox="1"/>
+          <p:nvPr/>
+        </p:nvSpPr>
+        <p:spPr>
+          <a:xfrm>
+            <a:off x="1234440" y="749808"/>
+            <a:ext cx="10515600" cy="868680"/>
+          </a:xfrm>
+          <a:prstGeom prst="rect">
+            <a:avLst/>
+          </a:prstGeom>
+          <a:noFill/>
+          <a:ln/>
+        </p:spPr>
+        <p:txBody>
+          <a:bodyPr wrap="square" lIns="0" tIns="0" rIns="0" bIns="0" rtlCol="0" anchor="t"/>
+          <a:lstStyle/>
+          <a:p>
+            <a:pPr marL="0" indent="0">
+              <a:buNone/>
+            </a:pPr>
+            <a:r>
+              <a:rPr lang="en-US" sz="3200" b="1">
+                <a:solidFill>
+                  <a:srgbClr val="1F3D2C"/>
+                </a:solidFill>
+                <a:latin typeface="Cambria"/>
+              </a:rPr>
+              <a:t>Repository Plane — ELM Reduces Cutover Disruption</a:t>
+            </a:r>
+            <a:endParaRPr lang="en-US" sz="3200" dirty="0"/>
+          </a:p>
+        </p:txBody>
+      </p:sp>
+      <p:sp>
+        <p:nvSpPr>
+          <p:cNvPr id="6" name="Shape 3"/>
+          <p:cNvSpPr/>
+          <p:nvPr/>
+        </p:nvSpPr>
+        <p:spPr>
+          <a:xfrm>
+            <a:off x="548640" y="1531034"/>
+            <a:ext cx="11064240" cy="813816"/>
+          </a:xfrm>
+          <a:prstGeom prst="roundRect">
+            <a:avLst>
+              <a:gd name="adj" fmla="val 8000"/>
+            </a:avLst>
+          </a:prstGeom>
+          <a:solidFill>
+            <a:srgbClr val="F7F6F2"/>
+          </a:solidFill>
+          <a:ln w="12700">
+            <a:solidFill>
+              <a:srgbClr val="DDD8CC"/>
+            </a:solidFill>
+            <a:prstDash val="solid"/>
+          </a:ln>
+          <a:effectLst>
+            <a:outerShdw blurRad="76200" dist="25400" dir="5400000" algn="bl" rotWithShape="0">
+              <a:srgbClr val="000000">
+                <a:alpha val="12000"/>
+              </a:srgbClr>
+            </a:outerShdw>
+          </a:effectLst>
+        </p:spPr>
+        <p:txBody>
+          <a:bodyPr/>
+          <a:lstStyle/>
+          <a:p>
+            <a:endParaRPr lang="en-US"/>
+          </a:p>
+        </p:txBody>
+      </p:sp>
+      <p:sp>
+        <p:nvSpPr>
+          <p:cNvPr id="7" name="Text 4"/>
+          <p:cNvSpPr txBox="1"/>
+          <p:nvPr/>
+        </p:nvSpPr>
+        <p:spPr>
+          <a:xfrm>
+            <a:off x="822960" y="1430450"/>
+            <a:ext cx="10515600" cy="1097280"/>
+          </a:xfrm>
+          <a:prstGeom prst="rect">
+            <a:avLst/>
+          </a:prstGeom>
+          <a:noFill/>
+          <a:ln/>
+        </p:spPr>
+        <p:txBody>
+          <a:bodyPr wrap="square" lIns="0" tIns="0" rIns="0" bIns="0" rtlCol="0" anchor="ctr"/>
+          <a:lstStyle/>
+          <a:p>
+            <a:pPr marL="0" indent="0">
+              <a:lnSpc>
+                <a:spcPct val="115000"/>
+              </a:lnSpc>
+              <a:buNone/>
+            </a:pPr>
+            <a:r>
+              <a:rPr lang="en-US" sz="1650" b="0" dirty="0">
+                <a:solidFill>
+                  <a:srgbClr val="2B2B2B"/>
+                </a:solidFill>
+                <a:latin typeface="Calibri"/>
+              </a:rPr>
+              <a:t>Enterprise Live Migrations (ELM) is in public preview for the Azure DevOps path, targeting GitHub Enterprise Cloud with data residency. Its differentiator is continuous sync plus a customer-scheduled cutover.</a:t>
+            </a:r>
+            <a:endParaRPr lang="en-US" sz="1700" dirty="0"/>
+          </a:p>
+        </p:txBody>
+      </p:sp>
+      <p:sp>
+        <p:nvSpPr>
+          <p:cNvPr id="8" name="Shape 5"/>
+          <p:cNvSpPr/>
+          <p:nvPr/>
+        </p:nvSpPr>
+        <p:spPr>
+          <a:xfrm>
+            <a:off x="548640" y="2527730"/>
+            <a:ext cx="5349240" cy="2912950"/>
+          </a:xfrm>
+          <a:prstGeom prst="roundRect">
+            <a:avLst>
+              <a:gd name="adj" fmla="val 4800"/>
+            </a:avLst>
+          </a:prstGeom>
+          <a:solidFill>
+            <a:srgbClr val="F7F6F2"/>
+          </a:solidFill>
+          <a:ln w="12700">
+            <a:solidFill>
+              <a:srgbClr val="DDD8CC"/>
+            </a:solidFill>
+            <a:prstDash val="solid"/>
+          </a:ln>
+          <a:effectLst>
+            <a:outerShdw blurRad="76200" dist="25400" dir="5400000" algn="bl" rotWithShape="0">
+              <a:srgbClr val="000000">
+                <a:alpha val="12000"/>
+              </a:srgbClr>
+            </a:outerShdw>
+          </a:effectLst>
+        </p:spPr>
+        <p:txBody>
+          <a:bodyPr/>
+          <a:lstStyle/>
+          <a:p>
+            <a:endParaRPr lang="en-US"/>
+          </a:p>
+        </p:txBody>
+      </p:sp>
+      <p:sp>
+        <p:nvSpPr>
+          <p:cNvPr id="9" name="Text 6"/>
+          <p:cNvSpPr txBox="1"/>
+          <p:nvPr/>
+        </p:nvSpPr>
+        <p:spPr>
+          <a:xfrm>
+            <a:off x="899160" y="2749765"/>
+            <a:ext cx="4800600" cy="411480"/>
+          </a:xfrm>
+          <a:prstGeom prst="rect">
+            <a:avLst/>
+          </a:prstGeom>
+          <a:noFill/>
+          <a:ln/>
+        </p:spPr>
+        <p:txBody>
+          <a:bodyPr wrap="square" lIns="0" tIns="0" rIns="0" bIns="0" rtlCol="0" anchor="ctr"/>
+          <a:lstStyle/>
+          <a:p>
+            <a:pPr marL="0" indent="0">
+              <a:buNone/>
+            </a:pPr>
+            <a:r>
+              <a:rPr lang="en-US" sz="1700" b="1" dirty="0">
+                <a:solidFill>
+                  <a:srgbClr val="1F3D2C"/>
+                </a:solidFill>
+                <a:latin typeface="Cambria"/>
+              </a:rPr>
+              <a:t>What It Adds</a:t>
+            </a:r>
+            <a:endParaRPr lang="en-US" sz="1700" dirty="0"/>
+          </a:p>
+        </p:txBody>
+      </p:sp>
+      <p:sp>
+        <p:nvSpPr>
+          <p:cNvPr id="10" name="Text 7"/>
+          <p:cNvSpPr txBox="1"/>
+          <p:nvPr/>
+        </p:nvSpPr>
+        <p:spPr>
+          <a:xfrm>
+            <a:off x="822960" y="3161245"/>
+            <a:ext cx="4800600" cy="2233715"/>
+          </a:xfrm>
+          <a:prstGeom prst="rect">
+            <a:avLst/>
+          </a:prstGeom>
+          <a:noFill/>
+          <a:ln/>
+        </p:spPr>
+        <p:txBody>
+          <a:bodyPr wrap="square" lIns="0" tIns="0" rIns="0" bIns="0" rtlCol="0" anchor="t"/>
+          <a:lstStyle/>
+          <a:p>
+            <a:pPr marL="285750" indent="-285750">
+              <a:lnSpc>
+                <a:spcPct val="105000"/>
+              </a:lnSpc>
+              <a:spcAft>
+                <a:spcPts val="800"/>
+              </a:spcAft>
+              <a:buSzPct val="100000"/>
+              <a:buFont typeface="Arial" panose="020B0604020202020204" pitchFamily="34" charset="0"/>
+              <a:buChar char="•"/>
+            </a:pPr>
+            <a:r>
+              <a:rPr lang="en-US" sz="1400" dirty="0">
+                <a:solidFill>
+                  <a:srgbClr val="2B2B2B"/>
+                </a:solidFill>
+                <a:latin typeface="Calibri"/>
+              </a:rPr>
+              <a:t>Pre-migration checks and target creation</a:t>
+            </a:r>
+            <a:endParaRPr lang="en-US" sz="1350" dirty="0"/>
+          </a:p>
+          <a:p>
+            <a:pPr marL="285750" indent="-285750">
+              <a:spcAft>
+                <a:spcPts val="800"/>
+              </a:spcAft>
+              <a:buFont typeface="Arial" panose="020B0604020202020204" pitchFamily="34" charset="0"/>
+              <a:buChar char="•"/>
+            </a:pPr>
+            <a:r>
+              <a:rPr lang="en-US" sz="1400" dirty="0">
+                <a:solidFill>
+                  <a:srgbClr val="2B2B2B"/>
+                </a:solidFill>
+                <a:latin typeface="Calibri"/>
+              </a:rPr>
+              <a:t>Git, PR, and policy delta synchronization</a:t>
+            </a:r>
+          </a:p>
+          <a:p>
+            <a:pPr marL="285750" indent="-285750">
+              <a:spcAft>
+                <a:spcPts val="800"/>
+              </a:spcAft>
+              <a:buFont typeface="Arial" panose="020B0604020202020204" pitchFamily="34" charset="0"/>
+              <a:buChar char="•"/>
+            </a:pPr>
+            <a:r>
+              <a:rPr lang="en-US" sz="1400" dirty="0">
+                <a:solidFill>
+                  <a:srgbClr val="2B2B2B"/>
+                </a:solidFill>
+                <a:latin typeface="Calibri"/>
+              </a:rPr>
+              <a:t>Boards connection and pipeline rewiring</a:t>
+            </a:r>
+          </a:p>
+          <a:p>
+            <a:pPr marL="285750" indent="-285750">
+              <a:spcAft>
+                <a:spcPts val="800"/>
+              </a:spcAft>
+              <a:buFont typeface="Arial" panose="020B0604020202020204" pitchFamily="34" charset="0"/>
+              <a:buChar char="•"/>
+            </a:pPr>
+            <a:r>
+              <a:rPr lang="en-US" sz="1400" dirty="0">
+                <a:solidFill>
+                  <a:srgbClr val="2B2B2B"/>
+                </a:solidFill>
+                <a:latin typeface="Calibri"/>
+              </a:rPr>
+              <a:t>A scheduled read-only cutover window under 30 minutes</a:t>
+            </a:r>
+          </a:p>
+        </p:txBody>
+      </p:sp>
+      <p:sp>
+        <p:nvSpPr>
+          <p:cNvPr id="11" name="Shape 8"/>
+          <p:cNvSpPr/>
+          <p:nvPr/>
+        </p:nvSpPr>
+        <p:spPr>
+          <a:xfrm>
+            <a:off x="6263640" y="2527730"/>
+            <a:ext cx="5349240" cy="2912950"/>
+          </a:xfrm>
+          <a:prstGeom prst="roundRect">
+            <a:avLst>
+              <a:gd name="adj" fmla="val 4800"/>
+            </a:avLst>
+          </a:prstGeom>
+          <a:solidFill>
+            <a:srgbClr val="1F3D2C"/>
+          </a:solidFill>
+          <a:ln w="12700">
+            <a:solidFill>
+              <a:srgbClr val="DDD8CC"/>
+            </a:solidFill>
+            <a:prstDash val="solid"/>
+          </a:ln>
+          <a:effectLst>
+            <a:outerShdw blurRad="76200" dist="25400" dir="5400000" algn="bl" rotWithShape="0">
+              <a:srgbClr val="000000">
+                <a:alpha val="12000"/>
+              </a:srgbClr>
+            </a:outerShdw>
+          </a:effectLst>
+        </p:spPr>
+        <p:txBody>
+          <a:bodyPr/>
+          <a:lstStyle/>
+          <a:p>
+            <a:endParaRPr lang="en-US"/>
+          </a:p>
+        </p:txBody>
+      </p:sp>
+      <p:sp>
+        <p:nvSpPr>
+          <p:cNvPr id="12" name="Text 9"/>
+          <p:cNvSpPr txBox="1"/>
+          <p:nvPr/>
+        </p:nvSpPr>
+        <p:spPr>
+          <a:xfrm>
+            <a:off x="6492240" y="2749765"/>
+            <a:ext cx="4800600" cy="411480"/>
+          </a:xfrm>
+          <a:prstGeom prst="rect">
+            <a:avLst/>
+          </a:prstGeom>
+          <a:noFill/>
+          <a:ln/>
+        </p:spPr>
+        <p:txBody>
+          <a:bodyPr wrap="square" lIns="0" tIns="0" rIns="0" bIns="0" rtlCol="0" anchor="ctr"/>
+          <a:lstStyle/>
+          <a:p>
+            <a:pPr marL="0" indent="0">
+              <a:buNone/>
+            </a:pPr>
+            <a:r>
+              <a:rPr lang="en-US" sz="1700" b="1" dirty="0">
+                <a:solidFill>
+                  <a:srgbClr val="F5F5F0"/>
+                </a:solidFill>
+                <a:latin typeface="Cambria"/>
+              </a:rPr>
+              <a:t>Limits and What Remains</a:t>
+            </a:r>
+            <a:endParaRPr lang="en-US" sz="1700" dirty="0"/>
+          </a:p>
+        </p:txBody>
+      </p:sp>
+      <p:sp>
+        <p:nvSpPr>
+          <p:cNvPr id="13" name="Text 10"/>
+          <p:cNvSpPr txBox="1"/>
+          <p:nvPr/>
+        </p:nvSpPr>
+        <p:spPr>
+          <a:xfrm>
+            <a:off x="6537960" y="3161245"/>
+            <a:ext cx="4800600" cy="2233715"/>
+          </a:xfrm>
+          <a:prstGeom prst="rect">
+            <a:avLst/>
+          </a:prstGeom>
+          <a:noFill/>
+          <a:ln/>
+        </p:spPr>
+        <p:txBody>
+          <a:bodyPr wrap="square" lIns="0" tIns="0" rIns="0" bIns="0" rtlCol="0" anchor="t"/>
+          <a:lstStyle/>
+          <a:p>
+            <a:pPr marL="285750" indent="-285750">
+              <a:lnSpc>
+                <a:spcPct val="105000"/>
+              </a:lnSpc>
+              <a:spcAft>
+                <a:spcPts val="800"/>
+              </a:spcAft>
+              <a:buSzPct val="100000"/>
+              <a:buFont typeface="Arial" panose="020B0604020202020204" pitchFamily="34" charset="0"/>
+              <a:buChar char="•"/>
+            </a:pPr>
+            <a:r>
+              <a:rPr lang="en-US" sz="1400" dirty="0">
+                <a:solidFill>
+                  <a:srgbClr val="F5F5F0"/>
+                </a:solidFill>
+                <a:latin typeface="Calibri"/>
+              </a:rPr>
+              <a:t>Repositories only — 30 max (20 initial + 10 more)</a:t>
+            </a:r>
+            <a:endParaRPr lang="en-US" sz="1350" dirty="0"/>
+          </a:p>
+          <a:p>
+            <a:pPr marL="285750" indent="-285750">
+              <a:spcAft>
+                <a:spcPts val="800"/>
+              </a:spcAft>
+              <a:buFont typeface="Arial" panose="020B0604020202020204" pitchFamily="34" charset="0"/>
+              <a:buChar char="•"/>
+            </a:pPr>
+            <a:r>
+              <a:rPr lang="en-US" sz="1400" dirty="0">
+                <a:solidFill>
+                  <a:srgbClr val="F5F5F0"/>
+                </a:solidFill>
+                <a:latin typeface="Calibri"/>
+              </a:rPr>
+              <a:t>Cutover must finish within 21 days of starting</a:t>
+            </a:r>
+          </a:p>
+          <a:p>
+            <a:pPr marL="285750" indent="-285750">
+              <a:spcAft>
+                <a:spcPts val="800"/>
+              </a:spcAft>
+              <a:buFont typeface="Arial" panose="020B0604020202020204" pitchFamily="34" charset="0"/>
+              <a:buChar char="•"/>
+            </a:pPr>
+            <a:r>
+              <a:rPr lang="en-US" sz="1400" dirty="0">
+                <a:solidFill>
+                  <a:srgbClr val="F5F5F0"/>
+                </a:solidFill>
+                <a:latin typeface="Calibri"/>
+              </a:rPr>
+              <a:t>Access, permissions, and ruleset verification</a:t>
+            </a:r>
+          </a:p>
+          <a:p>
+            <a:pPr marL="285750" indent="-285750">
+              <a:spcAft>
+                <a:spcPts val="800"/>
+              </a:spcAft>
+              <a:buFont typeface="Arial" panose="020B0604020202020204" pitchFamily="34" charset="0"/>
+              <a:buChar char="•"/>
+            </a:pPr>
+            <a:r>
+              <a:rPr lang="en-US" sz="1400" dirty="0">
+                <a:solidFill>
+                  <a:srgbClr val="F5F5F0"/>
+                </a:solidFill>
+                <a:latin typeface="Calibri"/>
+              </a:rPr>
+              <a:t>Hardcoded URLs and other long-tail cleanup</a:t>
+            </a:r>
+          </a:p>
+          <a:p>
+            <a:pPr marL="285750" indent="-285750">
+              <a:spcAft>
+                <a:spcPts val="800"/>
+              </a:spcAft>
+              <a:buFont typeface="Arial" panose="020B0604020202020204" pitchFamily="34" charset="0"/>
+              <a:buChar char="•"/>
+            </a:pPr>
+            <a:r>
+              <a:rPr lang="en-US" sz="1400" dirty="0">
+                <a:solidFill>
+                  <a:srgbClr val="F5F5F0"/>
+                </a:solidFill>
+                <a:latin typeface="Calibri"/>
+              </a:rPr>
+              <a:t>Pipeline logic, work items, wikis, and other non-repository data</a:t>
+            </a:r>
+          </a:p>
+          <a:p>
+            <a:pPr marL="285750" indent="-285750">
+              <a:spcAft>
+                <a:spcPts val="800"/>
+              </a:spcAft>
+              <a:buFont typeface="Arial" panose="020B0604020202020204" pitchFamily="34" charset="0"/>
+              <a:buChar char="•"/>
+            </a:pPr>
+            <a:r>
+              <a:rPr lang="en-US" sz="1400" dirty="0">
+                <a:solidFill>
+                  <a:srgbClr val="F5F5F0"/>
+                </a:solidFill>
+                <a:latin typeface="Calibri"/>
+              </a:rPr>
+              <a:t>Post-cutover validation and decommissioning</a:t>
+            </a:r>
+          </a:p>
+        </p:txBody>
+      </p:sp>
+      <p:sp>
+        <p:nvSpPr>
+          <p:cNvPr id="16" name="Shape 3">
+            <a:extLst>
+              <a:ext uri="{FF2B5EF4-FFF2-40B4-BE49-F238E27FC236}">
+                <a16:creationId xmlns:a16="http://schemas.microsoft.com/office/drawing/2014/main" id="{2FACEC23-AB46-4DCB-0463-00C487B44704}"/>
+              </a:ext>
+            </a:extLst>
+          </p:cNvPr>
+          <p:cNvSpPr/>
+          <p:nvPr/>
+        </p:nvSpPr>
+        <p:spPr>
+          <a:xfrm>
+            <a:off x="548640" y="5628132"/>
+            <a:ext cx="11064240" cy="960120"/>
+          </a:xfrm>
+          <a:prstGeom prst="roundRect">
+            <a:avLst>
+              <a:gd name="adj" fmla="val 12632"/>
+            </a:avLst>
+          </a:prstGeom>
+          <a:solidFill>
+            <a:srgbClr val="1F3D2C"/>
+          </a:solidFill>
+          <a:ln w="12700">
+            <a:noFill/>
+            <a:prstDash val="solid"/>
+          </a:ln>
+          <a:effectLst>
+            <a:outerShdw blurRad="76200" dist="25400" dir="5400000" algn="bl" rotWithShape="0">
+              <a:srgbClr val="000000">
+                <a:alpha val="12000"/>
+              </a:srgbClr>
+            </a:outerShdw>
+          </a:effectLst>
+        </p:spPr>
+        <p:txBody>
+          <a:bodyPr/>
+          <a:lstStyle/>
+          <a:p>
+            <a:endParaRPr lang="en-US"/>
+          </a:p>
+        </p:txBody>
+      </p:sp>
+      <p:sp>
+        <p:nvSpPr>
+          <p:cNvPr id="18" name="Text 4">
+            <a:extLst>
+              <a:ext uri="{FF2B5EF4-FFF2-40B4-BE49-F238E27FC236}">
+                <a16:creationId xmlns:a16="http://schemas.microsoft.com/office/drawing/2014/main" id="{DA49AD78-DE17-95B0-86BA-23572C08058F}"/>
+              </a:ext>
+            </a:extLst>
+          </p:cNvPr>
+          <p:cNvSpPr txBox="1"/>
+          <p:nvPr/>
+        </p:nvSpPr>
+        <p:spPr>
+          <a:xfrm>
+            <a:off x="563880" y="5628132"/>
+            <a:ext cx="11064240" cy="960120"/>
+          </a:xfrm>
+          <a:prstGeom prst="rect">
+            <a:avLst/>
+          </a:prstGeom>
+          <a:noFill/>
+          <a:ln/>
+        </p:spPr>
+        <p:txBody>
+          <a:bodyPr wrap="square" lIns="256032" tIns="54864" rIns="256032" bIns="54864" rtlCol="0" anchor="ctr"/>
+          <a:lstStyle/>
+          <a:p>
+            <a:pPr marL="0" indent="0" algn="l">
+              <a:buNone/>
+            </a:pPr>
+            <a:r>
+              <a:rPr sz="1250" b="1" spc="120">
+                <a:solidFill>
+                  <a:srgbClr val="E0B85C"/>
+                </a:solidFill>
+                <a:latin typeface="Calibri"/>
+              </a:rPr>
+              <a:t>TAKEAWAY </a:t>
+            </a:r>
+            <a:r>
+              <a:rPr sz="1500">
+                <a:solidFill>
+                  <a:srgbClr val="F5F5F0"/>
+                </a:solidFill>
+                <a:latin typeface="Calibri"/>
+              </a:rPr>
+              <a:t>ELM changes the synchronization and cutover experience — not the boundaries of what must be migrated and validated.</a:t>
+            </a:r>
+          </a:p>
+        </p:txBody>
+      </p:sp>
+      <p:sp>
+        <p:nvSpPr>
+          <p:cNvPr id="19" name="Slide Number Placeholder"/>
+          <p:cNvSpPr>
+            <a:spLocks noGrp="1"/>
+          </p:cNvSpPr>
+          <p:nvPr>
+            <p:ph type="sldNum" sz="quarter" idx="10"/>
+          </p:nvPr>
+        </p:nvSpPr>
+        <p:spPr/>
+        <p:txBody>
+          <a:bodyPr/>
+          <a:lstStyle/>
+          <a:p>
+            <a:fld id="{BCB632DE-6AD4-40F1-944C-28C0E9BF62DC}" type="slidenum">
+              <a:rPr lang="en-US"/>
+              <a:t>21</a:t>
+            </a:fld>
+            <a:endParaRPr lang="en-US"/>
+          </a:p>
+        </p:txBody>
+      </p:sp>
+    </p:spTree>
+  </p:cSld>
+  <p:clrMapOvr>
+    <a:masterClrMapping/>
+  </p:clrMapOvr>
+</p:sld>
+</file>
+
+<file path=ppt/slides/slide22.xml><?xml version="1.0" encoding="utf-8"?>
+<p:sld xmlns:a="http://schemas.openxmlformats.org/drawingml/2006/main" xmlns:r="http://schemas.openxmlformats.org/officeDocument/2006/relationships" xmlns:p="http://schemas.openxmlformats.org/presentationml/2006/main">
+  <p:cSld name="Slide 25">
+    <p:bg>
+      <p:bgPr>
+        <a:solidFill>
+          <a:srgbClr val="FFFFFF"/>
+        </a:solidFill>
+        <a:effectLst/>
+      </p:bgPr>
+    </p:bg>
+    <p:spTree>
+      <p:nvGrpSpPr>
+        <p:cNvPr id="1" name=""/>
+        <p:cNvGrpSpPr/>
+        <p:nvPr/>
+      </p:nvGrpSpPr>
+      <p:grpSpPr>
+        <a:xfrm>
+          <a:off x="0" y="0"/>
+          <a:ext cx="0" cy="0"/>
+          <a:chOff x="0" y="0"/>
+          <a:chExt cx="0" cy="0"/>
+        </a:xfrm>
+      </p:grpSpPr>
+      <p:sp>
+        <p:nvSpPr>
+          <p:cNvPr id="2" name="Shape 0"/>
+          <p:cNvSpPr/>
+          <p:nvPr/>
+        </p:nvSpPr>
+        <p:spPr>
+          <a:xfrm>
+            <a:off x="548640" y="457200"/>
+            <a:ext cx="566928" cy="566928"/>
+          </a:xfrm>
+          <a:prstGeom prst="ellipse">
+            <a:avLst/>
+          </a:prstGeom>
+          <a:solidFill>
+            <a:srgbClr val="C1440E"/>
+          </a:solidFill>
+          <a:ln/>
+        </p:spPr>
+        <p:txBody>
+          <a:bodyPr/>
+          <a:lstStyle/>
+          <a:p>
+            <a:endParaRPr lang="en-US"/>
+          </a:p>
+        </p:txBody>
+      </p:sp>
+      <p:pic>
+        <p:nvPicPr>
+          <p:cNvPr id="3" name="Image 0" descr="/home/claude/pptx-build/assets/icons/FaListOl-FFFFFF-200.png"/>
+          <p:cNvPicPr>
+            <a:picLocks noChangeAspect="1"/>
+          </p:cNvPicPr>
+          <p:nvPr/>
+        </p:nvPicPr>
+        <p:blipFill>
+          <a:blip r:embed="rId3"/>
+          <a:stretch>
+            <a:fillRect/>
+          </a:stretch>
+        </p:blipFill>
+        <p:spPr>
+          <a:xfrm>
+            <a:off x="685800" y="594360"/>
+            <a:ext cx="292608" cy="292608"/>
+          </a:xfrm>
+          <a:prstGeom prst="rect">
+            <a:avLst/>
+          </a:prstGeom>
+        </p:spPr>
+      </p:pic>
+      <p:sp>
+        <p:nvSpPr>
+          <p:cNvPr id="4" name="Text 1"/>
+          <p:cNvSpPr txBox="1"/>
+          <p:nvPr/>
+        </p:nvSpPr>
+        <p:spPr>
+          <a:xfrm>
+            <a:off x="1234440" y="420624"/>
+            <a:ext cx="9875520" cy="320040"/>
+          </a:xfrm>
+          <a:prstGeom prst="rect">
+            <a:avLst/>
+          </a:prstGeom>
+          <a:noFill/>
+          <a:ln/>
+        </p:spPr>
+        <p:txBody>
+          <a:bodyPr wrap="square" lIns="0" tIns="0" rIns="0" bIns="0" rtlCol="0" anchor="ctr"/>
+          <a:lstStyle/>
+          <a:p>
+            <a:pPr marL="0" indent="0">
+              <a:buNone/>
+            </a:pPr>
+            <a:r>
+              <a:rPr lang="en-US" sz="1500" b="1" kern="0" spc="200" dirty="0">
+                <a:solidFill>
+                  <a:srgbClr val="C1440E"/>
+                </a:solidFill>
+                <a:latin typeface="Calibri" pitchFamily="34" charset="0"/>
+                <a:ea typeface="Calibri" pitchFamily="34" charset="-122"/>
+                <a:cs typeface="Calibri" pitchFamily="34" charset="-120"/>
+              </a:rPr>
+              <a:t>CROSSING THE RIVER</a:t>
+            </a:r>
+            <a:endParaRPr lang="en-US" sz="1500" dirty="0"/>
+          </a:p>
+        </p:txBody>
+      </p:sp>
+      <p:sp>
+        <p:nvSpPr>
+          <p:cNvPr id="5" name="Text 2"/>
+          <p:cNvSpPr txBox="1"/>
+          <p:nvPr/>
+        </p:nvSpPr>
+        <p:spPr>
+          <a:xfrm>
+            <a:off x="1234440" y="749808"/>
+            <a:ext cx="10515600" cy="868680"/>
+          </a:xfrm>
+          <a:prstGeom prst="rect">
+            <a:avLst/>
+          </a:prstGeom>
+          <a:noFill/>
+          <a:ln/>
+        </p:spPr>
+        <p:txBody>
+          <a:bodyPr wrap="square" lIns="0" tIns="0" rIns="0" bIns="0" rtlCol="0" anchor="t"/>
+          <a:lstStyle/>
+          <a:p>
+            <a:pPr marL="0" indent="0">
+              <a:buNone/>
+            </a:pPr>
+            <a:r>
+              <a:rPr lang="en-US" sz="3200" b="1" dirty="0">
+                <a:solidFill>
+                  <a:srgbClr val="1F3D2C"/>
+                </a:solidFill>
+                <a:latin typeface="Cambria"/>
+              </a:rPr>
+              <a:t>Repository Plane — Decisions</a:t>
+            </a:r>
+            <a:endParaRPr lang="en-US" sz="3200" dirty="0"/>
+          </a:p>
+        </p:txBody>
+      </p:sp>
+      <p:sp>
+        <p:nvSpPr>
+          <p:cNvPr id="6" name="Shape 3"/>
+          <p:cNvSpPr/>
+          <p:nvPr/>
+        </p:nvSpPr>
+        <p:spPr>
+          <a:xfrm>
+            <a:off x="548640" y="4556259"/>
+            <a:ext cx="11064240" cy="1358289"/>
+          </a:xfrm>
+          <a:prstGeom prst="roundRect">
+            <a:avLst>
+              <a:gd name="adj" fmla="val 4138"/>
+            </a:avLst>
+          </a:prstGeom>
+          <a:solidFill>
+            <a:srgbClr val="F7F6F2"/>
+          </a:solidFill>
+          <a:ln w="12700">
+            <a:solidFill>
+              <a:srgbClr val="DDD8CC"/>
+            </a:solidFill>
+            <a:prstDash val="solid"/>
+          </a:ln>
+          <a:effectLst>
+            <a:outerShdw blurRad="76200" dist="25400" dir="5400000" algn="bl" rotWithShape="0">
+              <a:srgbClr val="000000">
+                <a:alpha val="12000"/>
+              </a:srgbClr>
+            </a:outerShdw>
+          </a:effectLst>
+        </p:spPr>
+        <p:txBody>
+          <a:bodyPr/>
+          <a:lstStyle/>
+          <a:p>
+            <a:endParaRPr lang="en-US"/>
+          </a:p>
+        </p:txBody>
+      </p:sp>
+      <p:sp>
+        <p:nvSpPr>
+          <p:cNvPr id="7" name="Text 4"/>
+          <p:cNvSpPr txBox="1"/>
+          <p:nvPr/>
+        </p:nvSpPr>
+        <p:spPr>
+          <a:xfrm>
+            <a:off x="822960" y="4674899"/>
+            <a:ext cx="10332720" cy="1124101"/>
+          </a:xfrm>
+          <a:prstGeom prst="rect">
+            <a:avLst/>
+          </a:prstGeom>
+          <a:noFill/>
+          <a:ln/>
+        </p:spPr>
+        <p:txBody>
+          <a:bodyPr wrap="square" lIns="0" tIns="0" rIns="0" bIns="0" rtlCol="0" anchor="ctr"/>
+          <a:lstStyle/>
+          <a:p>
+            <a:pPr marL="0" indent="0">
+              <a:lnSpc>
+                <a:spcPct val="130000"/>
+              </a:lnSpc>
+              <a:buNone/>
+            </a:pPr>
+            <a:r>
+              <a:rPr lang="en-US" sz="1850" b="0" dirty="0">
+                <a:solidFill>
+                  <a:srgbClr val="2B2B2B"/>
+                </a:solidFill>
+                <a:latin typeface="Calibri"/>
+              </a:rPr>
+              <a:t>Install the Azure Pipelines App in your GitHub Org before migrating repositories. That enables migration orchestration to reconnect pipeline references; it does not convert the pipeline logic itself.</a:t>
+            </a:r>
+            <a:endParaRPr lang="en-US" sz="1900" dirty="0"/>
+          </a:p>
+        </p:txBody>
+      </p:sp>
+      <p:sp>
+        <p:nvSpPr>
+          <p:cNvPr id="8" name="Shape 5"/>
+          <p:cNvSpPr/>
+          <p:nvPr/>
+        </p:nvSpPr>
+        <p:spPr>
+          <a:xfrm>
+            <a:off x="548640" y="1549966"/>
+            <a:ext cx="11064240" cy="2638449"/>
+          </a:xfrm>
+          <a:prstGeom prst="roundRect">
+            <a:avLst>
+              <a:gd name="adj" fmla="val 7742"/>
+            </a:avLst>
+          </a:prstGeom>
+          <a:solidFill>
+            <a:srgbClr val="1F3D2C"/>
+          </a:solidFill>
+          <a:ln w="12700">
+            <a:solidFill>
+              <a:srgbClr val="DDD8CC"/>
+            </a:solidFill>
+            <a:prstDash val="solid"/>
+          </a:ln>
+          <a:effectLst>
+            <a:outerShdw blurRad="76200" dist="25400" dir="5400000" algn="bl" rotWithShape="0">
+              <a:srgbClr val="000000">
+                <a:alpha val="12000"/>
+              </a:srgbClr>
+            </a:outerShdw>
+          </a:effectLst>
+        </p:spPr>
+        <p:txBody>
+          <a:bodyPr/>
+          <a:lstStyle/>
+          <a:p>
+            <a:endParaRPr lang="en-US"/>
+          </a:p>
+        </p:txBody>
+      </p:sp>
+      <p:sp>
+        <p:nvSpPr>
+          <p:cNvPr id="9" name="Text 6"/>
+          <p:cNvSpPr txBox="1"/>
+          <p:nvPr/>
+        </p:nvSpPr>
+        <p:spPr>
+          <a:xfrm>
+            <a:off x="838200" y="1721272"/>
+            <a:ext cx="10515600" cy="2257295"/>
+          </a:xfrm>
+          <a:prstGeom prst="rect">
+            <a:avLst/>
+          </a:prstGeom>
+          <a:noFill/>
+          <a:ln/>
+        </p:spPr>
+        <p:txBody>
+          <a:bodyPr wrap="square" lIns="0" tIns="0" rIns="0" bIns="0" rtlCol="0" anchor="ctr"/>
+          <a:lstStyle/>
+          <a:p>
+            <a:pPr marL="0" indent="0">
+              <a:lnSpc>
+                <a:spcPct val="115000"/>
+              </a:lnSpc>
+              <a:buNone/>
+            </a:pPr>
+            <a:r>
+              <a:rPr lang="en-US" sz="1600" b="0" dirty="0">
+                <a:solidFill>
+                  <a:srgbClr val="F5F5F0"/>
+                </a:solidFill>
+                <a:latin typeface="Calibri"/>
+              </a:rPr>
+              <a:t>Decide before the first migration: </a:t>
+            </a:r>
+          </a:p>
+          <a:p>
+            <a:pPr marL="285750" indent="-285750">
+              <a:lnSpc>
+                <a:spcPct val="115000"/>
+              </a:lnSpc>
+              <a:buFont typeface="Arial" panose="020B0604020202020204" pitchFamily="34" charset="0"/>
+              <a:buChar char="•"/>
+            </a:pPr>
+            <a:r>
+              <a:rPr lang="en-US" sz="1600" b="0" dirty="0">
+                <a:solidFill>
+                  <a:srgbClr val="F5F5F0"/>
+                </a:solidFill>
+                <a:latin typeface="Calibri"/>
+              </a:rPr>
+              <a:t>target enterprise and organization model  </a:t>
+            </a:r>
+          </a:p>
+          <a:p>
+            <a:pPr marL="285750" indent="-285750">
+              <a:lnSpc>
+                <a:spcPct val="115000"/>
+              </a:lnSpc>
+              <a:buFont typeface="Arial" panose="020B0604020202020204" pitchFamily="34" charset="0"/>
+              <a:buChar char="•"/>
+            </a:pPr>
+            <a:r>
+              <a:rPr lang="en-US" sz="1600" b="0" dirty="0">
+                <a:solidFill>
+                  <a:srgbClr val="F5F5F0"/>
+                </a:solidFill>
+                <a:latin typeface="Calibri"/>
+              </a:rPr>
+              <a:t>authentication and identity mapping  </a:t>
+            </a:r>
+          </a:p>
+          <a:p>
+            <a:pPr marL="285750" indent="-285750">
+              <a:lnSpc>
+                <a:spcPct val="115000"/>
+              </a:lnSpc>
+              <a:buFont typeface="Arial" panose="020B0604020202020204" pitchFamily="34" charset="0"/>
+              <a:buChar char="•"/>
+            </a:pPr>
+            <a:r>
+              <a:rPr lang="en-US" sz="1600" b="0" dirty="0">
+                <a:solidFill>
+                  <a:srgbClr val="F5F5F0"/>
+                </a:solidFill>
+                <a:latin typeface="Calibri"/>
+              </a:rPr>
+              <a:t>team and visibility policy  </a:t>
+            </a:r>
+          </a:p>
+          <a:p>
+            <a:pPr marL="285750" indent="-285750">
+              <a:lnSpc>
+                <a:spcPct val="115000"/>
+              </a:lnSpc>
+              <a:buFont typeface="Arial" panose="020B0604020202020204" pitchFamily="34" charset="0"/>
+              <a:buChar char="•"/>
+            </a:pPr>
+            <a:r>
+              <a:rPr lang="en-US" sz="1600" b="0" dirty="0">
+                <a:solidFill>
+                  <a:srgbClr val="F5F5F0"/>
+                </a:solidFill>
+                <a:latin typeface="Calibri"/>
+              </a:rPr>
+              <a:t>Boards/Pipelines integration  </a:t>
+            </a:r>
+          </a:p>
+          <a:p>
+            <a:pPr marL="285750" indent="-285750">
+              <a:lnSpc>
+                <a:spcPct val="115000"/>
+              </a:lnSpc>
+              <a:buFont typeface="Arial" panose="020B0604020202020204" pitchFamily="34" charset="0"/>
+              <a:buChar char="•"/>
+            </a:pPr>
+            <a:r>
+              <a:rPr lang="en-US" sz="1600" b="0" dirty="0">
+                <a:solidFill>
+                  <a:srgbClr val="F5F5F0"/>
+                </a:solidFill>
+                <a:latin typeface="Calibri"/>
+              </a:rPr>
+              <a:t>freeze or change-reconciliation approach  </a:t>
+            </a:r>
+          </a:p>
+          <a:p>
+            <a:pPr marL="285750" indent="-285750">
+              <a:lnSpc>
+                <a:spcPct val="115000"/>
+              </a:lnSpc>
+              <a:buFont typeface="Arial" panose="020B0604020202020204" pitchFamily="34" charset="0"/>
+              <a:buChar char="•"/>
+            </a:pPr>
+            <a:r>
+              <a:rPr lang="en-US" sz="1600" b="0" dirty="0">
+                <a:solidFill>
+                  <a:srgbClr val="F5F5F0"/>
+                </a:solidFill>
+                <a:latin typeface="Calibri"/>
+              </a:rPr>
+              <a:t>owner for migration failures</a:t>
+            </a:r>
+            <a:endParaRPr lang="en-US" sz="1600" dirty="0"/>
+          </a:p>
+        </p:txBody>
+      </p:sp>
+      <p:sp>
+        <p:nvSpPr>
+          <p:cNvPr id="10" name="Slide Number Placeholder"/>
+          <p:cNvSpPr>
+            <a:spLocks noGrp="1"/>
+          </p:cNvSpPr>
+          <p:nvPr>
+            <p:ph type="sldNum" sz="quarter" idx="10"/>
+          </p:nvPr>
+        </p:nvSpPr>
+        <p:spPr/>
+        <p:txBody>
+          <a:bodyPr/>
+          <a:lstStyle/>
+          <a:p>
+            <a:fld id="{BCB632DE-6AD4-40F1-944C-28C0E9BF62DC}" type="slidenum">
+              <a:rPr lang="en-US"/>
+              <a:t>22</a:t>
+            </a:fld>
+            <a:endParaRPr lang="en-US"/>
+          </a:p>
+        </p:txBody>
+      </p:sp>
+    </p:spTree>
+  </p:cSld>
+  <p:clrMapOvr>
+    <a:masterClrMapping/>
+  </p:clrMapOvr>
+</p:sld>
+</file>
+
+<file path=ppt/slides/slide23.xml><?xml version="1.0" encoding="utf-8"?>
+<p:sld xmlns:a="http://schemas.openxmlformats.org/drawingml/2006/main" xmlns:r="http://schemas.openxmlformats.org/officeDocument/2006/relationships" xmlns:p="http://schemas.openxmlformats.org/presentationml/2006/main">
+  <p:cSld name="Slide 26">
+    <p:bg>
+      <p:bgPr>
+        <a:solidFill>
+          <a:srgbClr val="FFFFFF"/>
+        </a:solidFill>
+        <a:effectLst/>
+      </p:bgPr>
+    </p:bg>
+    <p:spTree>
+      <p:nvGrpSpPr>
+        <p:cNvPr id="1" name=""/>
+        <p:cNvGrpSpPr/>
+        <p:nvPr/>
+      </p:nvGrpSpPr>
+      <p:grpSpPr>
+        <a:xfrm>
+          <a:off x="0" y="0"/>
+          <a:ext cx="0" cy="0"/>
+          <a:chOff x="0" y="0"/>
+          <a:chExt cx="0" cy="0"/>
+        </a:xfrm>
+      </p:grpSpPr>
+      <p:sp>
+        <p:nvSpPr>
+          <p:cNvPr id="2" name="Shape 0"/>
+          <p:cNvSpPr/>
+          <p:nvPr/>
+        </p:nvSpPr>
+        <p:spPr>
+          <a:xfrm>
+            <a:off x="548640" y="457200"/>
+            <a:ext cx="566928" cy="566928"/>
+          </a:xfrm>
+          <a:prstGeom prst="ellipse">
+            <a:avLst/>
+          </a:prstGeom>
+          <a:solidFill>
+            <a:srgbClr val="C1440E"/>
+          </a:solidFill>
+          <a:ln/>
+        </p:spPr>
+        <p:txBody>
+          <a:bodyPr/>
+          <a:lstStyle/>
+          <a:p>
+            <a:endParaRPr lang="en-US"/>
+          </a:p>
+        </p:txBody>
+      </p:sp>
+      <p:pic>
+        <p:nvPicPr>
+          <p:cNvPr id="3" name="Image 0" descr="/home/claude/pptx-build/assets/icons/FaClipboardCheck-FFFFFF-200.png"/>
+          <p:cNvPicPr>
+            <a:picLocks noChangeAspect="1"/>
+          </p:cNvPicPr>
+          <p:nvPr/>
+        </p:nvPicPr>
+        <p:blipFill>
+          <a:blip r:embed="rId3"/>
+          <a:stretch>
+            <a:fillRect/>
+          </a:stretch>
+        </p:blipFill>
+        <p:spPr>
+          <a:xfrm>
+            <a:off x="685800" y="594360"/>
+            <a:ext cx="292608" cy="292608"/>
+          </a:xfrm>
+          <a:prstGeom prst="rect">
+            <a:avLst/>
+          </a:prstGeom>
+        </p:spPr>
+      </p:pic>
+      <p:sp>
+        <p:nvSpPr>
+          <p:cNvPr id="4" name="Text 1"/>
+          <p:cNvSpPr txBox="1"/>
+          <p:nvPr/>
+        </p:nvSpPr>
+        <p:spPr>
+          <a:xfrm>
+            <a:off x="1234440" y="420624"/>
+            <a:ext cx="9875520" cy="320040"/>
+          </a:xfrm>
+          <a:prstGeom prst="rect">
+            <a:avLst/>
+          </a:prstGeom>
+          <a:noFill/>
+          <a:ln/>
+        </p:spPr>
+        <p:txBody>
+          <a:bodyPr wrap="square" lIns="0" tIns="0" rIns="0" bIns="0" rtlCol="0" anchor="ctr"/>
+          <a:lstStyle/>
+          <a:p>
+            <a:pPr marL="0" indent="0">
+              <a:buNone/>
+            </a:pPr>
+            <a:r>
+              <a:rPr lang="en-US" sz="1500" b="1" kern="0" spc="200" dirty="0">
+                <a:solidFill>
+                  <a:srgbClr val="C1440E"/>
+                </a:solidFill>
+                <a:latin typeface="Calibri" pitchFamily="34" charset="0"/>
+                <a:ea typeface="Calibri" pitchFamily="34" charset="-122"/>
+                <a:cs typeface="Calibri" pitchFamily="34" charset="-120"/>
+              </a:rPr>
+              <a:t>CROSSING THE RIVER</a:t>
+            </a:r>
+            <a:endParaRPr lang="en-US" sz="1500" dirty="0"/>
+          </a:p>
+        </p:txBody>
+      </p:sp>
+      <p:sp>
+        <p:nvSpPr>
+          <p:cNvPr id="5" name="Text 2"/>
+          <p:cNvSpPr txBox="1"/>
+          <p:nvPr/>
+        </p:nvSpPr>
+        <p:spPr>
+          <a:xfrm>
+            <a:off x="1234440" y="749808"/>
+            <a:ext cx="10515600" cy="594360"/>
+          </a:xfrm>
+          <a:prstGeom prst="rect">
+            <a:avLst/>
+          </a:prstGeom>
+          <a:noFill/>
+          <a:ln/>
+        </p:spPr>
+        <p:txBody>
+          <a:bodyPr wrap="square" lIns="0" tIns="0" rIns="0" bIns="0" rtlCol="0" anchor="ctr"/>
+          <a:lstStyle/>
+          <a:p>
+            <a:pPr marL="0" indent="0">
+              <a:buNone/>
+            </a:pPr>
+            <a:r>
+              <a:rPr lang="en-US" sz="3200" b="1" dirty="0">
+                <a:solidFill>
+                  <a:srgbClr val="1F3D2C"/>
+                </a:solidFill>
+                <a:latin typeface="Cambria"/>
+              </a:rPr>
+              <a:t>Automation Plane — GitHub Actions Importer</a:t>
+            </a:r>
+            <a:endParaRPr lang="en-US" sz="3200" dirty="0"/>
+          </a:p>
+        </p:txBody>
+      </p:sp>
+      <p:sp>
+        <p:nvSpPr>
+          <p:cNvPr id="6" name="Shape 3"/>
+          <p:cNvSpPr/>
+          <p:nvPr/>
+        </p:nvSpPr>
+        <p:spPr>
+          <a:xfrm>
+            <a:off x="548640" y="1645920"/>
+            <a:ext cx="5349240" cy="3429000"/>
+          </a:xfrm>
+          <a:prstGeom prst="roundRect">
+            <a:avLst>
+              <a:gd name="adj" fmla="val 3200"/>
+            </a:avLst>
+          </a:prstGeom>
+          <a:solidFill>
+            <a:srgbClr val="F7F6F2"/>
+          </a:solidFill>
+          <a:ln w="12700">
+            <a:solidFill>
+              <a:srgbClr val="DDD8CC"/>
+            </a:solidFill>
+            <a:prstDash val="solid"/>
+          </a:ln>
+          <a:effectLst>
+            <a:outerShdw blurRad="76200" dist="25400" dir="5400000" algn="bl" rotWithShape="0">
+              <a:srgbClr val="000000">
+                <a:alpha val="12000"/>
+              </a:srgbClr>
+            </a:outerShdw>
+          </a:effectLst>
+        </p:spPr>
+        <p:txBody>
+          <a:bodyPr/>
+          <a:lstStyle/>
+          <a:p>
+            <a:endParaRPr lang="en-US"/>
+          </a:p>
+        </p:txBody>
+      </p:sp>
+      <p:sp>
+        <p:nvSpPr>
+          <p:cNvPr id="7" name="Text 4"/>
+          <p:cNvSpPr txBox="1"/>
+          <p:nvPr/>
+        </p:nvSpPr>
+        <p:spPr>
+          <a:xfrm>
+            <a:off x="822960" y="1828800"/>
+            <a:ext cx="4800600" cy="457200"/>
+          </a:xfrm>
+          <a:prstGeom prst="rect">
+            <a:avLst/>
+          </a:prstGeom>
+          <a:noFill/>
+          <a:ln/>
+        </p:spPr>
+        <p:txBody>
+          <a:bodyPr wrap="square" lIns="0" tIns="0" rIns="0" bIns="0" rtlCol="0" anchor="ctr"/>
+          <a:lstStyle/>
+          <a:p>
+            <a:pPr marL="0" indent="0">
+              <a:buNone/>
+            </a:pPr>
+            <a:r>
+              <a:rPr lang="en-US" sz="1900" b="1">
+                <a:solidFill>
+                  <a:srgbClr val="1F3D2C"/>
+                </a:solidFill>
+                <a:latin typeface="Cambria"/>
+              </a:rPr>
+              <a:t>What It Does</a:t>
+            </a:r>
+            <a:endParaRPr lang="en-US" sz="1900" dirty="0"/>
+          </a:p>
+        </p:txBody>
+      </p:sp>
+      <p:sp>
+        <p:nvSpPr>
+          <p:cNvPr id="8" name="Text 5"/>
+          <p:cNvSpPr txBox="1"/>
+          <p:nvPr/>
+        </p:nvSpPr>
+        <p:spPr>
+          <a:xfrm>
+            <a:off x="822960" y="2331720"/>
+            <a:ext cx="4800600" cy="2651760"/>
+          </a:xfrm>
+          <a:prstGeom prst="rect">
+            <a:avLst/>
+          </a:prstGeom>
+          <a:noFill/>
+          <a:ln/>
+        </p:spPr>
+        <p:txBody>
+          <a:bodyPr wrap="square" lIns="0" tIns="0" rIns="0" bIns="0" rtlCol="0" anchor="ctr"/>
+          <a:lstStyle/>
+          <a:p>
+            <a:pPr marL="285750" indent="-285750">
+              <a:lnSpc>
+                <a:spcPct val="100000"/>
+              </a:lnSpc>
+              <a:spcAft>
+                <a:spcPts val="800"/>
+              </a:spcAft>
+              <a:buSzPct val="100000"/>
+              <a:buFont typeface="Arial" panose="020B0604020202020204" pitchFamily="34" charset="0"/>
+              <a:buChar char="•"/>
+            </a:pPr>
+            <a:r>
+              <a:rPr lang="en-US" sz="1450" dirty="0">
+                <a:solidFill>
+                  <a:srgbClr val="2B2B2B"/>
+                </a:solidFill>
+                <a:cs typeface="Cascadia Code" panose="020B0609020000020004" pitchFamily="49" charset="0"/>
+              </a:rPr>
+              <a:t>Actions Importer is a GitHub CLI extension to migrate CI/CD pipelines</a:t>
+            </a:r>
+          </a:p>
+          <a:p>
+            <a:pPr marL="285750" indent="-285750">
+              <a:lnSpc>
+                <a:spcPct val="110000"/>
+              </a:lnSpc>
+              <a:spcAft>
+                <a:spcPts val="800"/>
+              </a:spcAft>
+              <a:buSzPct val="100000"/>
+              <a:buFont typeface="Arial" panose="020B0604020202020204" pitchFamily="34" charset="0"/>
+              <a:buChar char="•"/>
+            </a:pPr>
+            <a:r>
+              <a:rPr lang="en-US" sz="1450" dirty="0">
+                <a:solidFill>
+                  <a:srgbClr val="2B2B2B"/>
+                </a:solidFill>
+                <a:latin typeface="Cascadia Code" panose="020B0609020000020004" pitchFamily="49" charset="0"/>
+                <a:cs typeface="Cascadia Code" panose="020B0609020000020004" pitchFamily="49" charset="0"/>
+              </a:rPr>
+              <a:t>audit</a:t>
+            </a:r>
+            <a:r>
+              <a:rPr lang="en-US" sz="1450" dirty="0">
+                <a:solidFill>
+                  <a:srgbClr val="2B2B2B"/>
+                </a:solidFill>
+                <a:latin typeface="Calibri"/>
+              </a:rPr>
+              <a:t> buckets pipelines: successful, partially successful, unsupported, failed</a:t>
+            </a:r>
+            <a:endParaRPr lang="en-US" sz="1450" dirty="0"/>
+          </a:p>
+          <a:p>
+            <a:pPr marL="285750" indent="-285750">
+              <a:spcAft>
+                <a:spcPts val="800"/>
+              </a:spcAft>
+              <a:buFont typeface="Arial" panose="020B0604020202020204" pitchFamily="34" charset="0"/>
+              <a:buChar char="•"/>
+            </a:pPr>
+            <a:r>
+              <a:rPr lang="en-US" sz="1450" dirty="0">
+                <a:solidFill>
+                  <a:srgbClr val="2B2B2B"/>
+                </a:solidFill>
+                <a:latin typeface="Cascadia Code" panose="020B0609020000020004" pitchFamily="49" charset="0"/>
+                <a:cs typeface="Cascadia Code" panose="020B0609020000020004" pitchFamily="49" charset="0"/>
+              </a:rPr>
+              <a:t>dry-run</a:t>
+            </a:r>
+            <a:r>
+              <a:rPr lang="en-US" sz="1450" dirty="0">
+                <a:solidFill>
+                  <a:srgbClr val="2B2B2B"/>
+                </a:solidFill>
+                <a:latin typeface="Calibri"/>
+              </a:rPr>
+              <a:t> shows the candidate workflow before commit</a:t>
+            </a:r>
+          </a:p>
+          <a:p>
+            <a:pPr marL="285750" indent="-285750">
+              <a:spcAft>
+                <a:spcPts val="800"/>
+              </a:spcAft>
+              <a:buFont typeface="Arial" panose="020B0604020202020204" pitchFamily="34" charset="0"/>
+              <a:buChar char="•"/>
+            </a:pPr>
+            <a:r>
+              <a:rPr lang="en-US" sz="1450" dirty="0">
+                <a:solidFill>
+                  <a:srgbClr val="2B2B2B"/>
+                </a:solidFill>
+                <a:latin typeface="Cascadia Code" panose="020B0609020000020004" pitchFamily="49" charset="0"/>
+                <a:cs typeface="Cascadia Code" panose="020B0609020000020004" pitchFamily="49" charset="0"/>
+              </a:rPr>
+              <a:t>forecast</a:t>
+            </a:r>
+            <a:r>
+              <a:rPr lang="en-US" sz="1450" dirty="0">
+                <a:solidFill>
+                  <a:srgbClr val="2B2B2B"/>
+                </a:solidFill>
+              </a:rPr>
+              <a:t> calculates expected Actions usage </a:t>
+            </a:r>
+          </a:p>
+          <a:p>
+            <a:pPr marL="285750" indent="-285750">
+              <a:spcAft>
+                <a:spcPts val="800"/>
+              </a:spcAft>
+              <a:buFont typeface="Arial" panose="020B0604020202020204" pitchFamily="34" charset="0"/>
+              <a:buChar char="•"/>
+            </a:pPr>
+            <a:r>
+              <a:rPr lang="en-US" sz="1450" dirty="0">
+                <a:solidFill>
+                  <a:srgbClr val="2B2B2B"/>
+                </a:solidFill>
+                <a:latin typeface="Cascadia Code" panose="020B0609020000020004" pitchFamily="49" charset="0"/>
+                <a:cs typeface="Cascadia Code" panose="020B0609020000020004" pitchFamily="49" charset="0"/>
+              </a:rPr>
+              <a:t>migrate</a:t>
+            </a:r>
+            <a:r>
+              <a:rPr lang="en-US" sz="1450" dirty="0">
+                <a:solidFill>
+                  <a:srgbClr val="2B2B2B"/>
+                </a:solidFill>
+              </a:rPr>
+              <a:t> converts the pipeline to Actions equivalent and creates PR </a:t>
+            </a:r>
+          </a:p>
+        </p:txBody>
+      </p:sp>
+      <p:sp>
+        <p:nvSpPr>
+          <p:cNvPr id="9" name="Shape 6"/>
+          <p:cNvSpPr/>
+          <p:nvPr/>
+        </p:nvSpPr>
+        <p:spPr>
+          <a:xfrm>
+            <a:off x="6263640" y="1645920"/>
+            <a:ext cx="5349240" cy="3429000"/>
+          </a:xfrm>
+          <a:prstGeom prst="roundRect">
+            <a:avLst>
+              <a:gd name="adj" fmla="val 3200"/>
+            </a:avLst>
+          </a:prstGeom>
+          <a:solidFill>
+            <a:srgbClr val="1F3D2C"/>
+          </a:solidFill>
+          <a:ln w="12700">
+            <a:solidFill>
+              <a:srgbClr val="DDD8CC"/>
+            </a:solidFill>
+            <a:prstDash val="solid"/>
+          </a:ln>
+          <a:effectLst>
+            <a:outerShdw blurRad="76200" dist="25400" dir="5400000" algn="bl" rotWithShape="0">
+              <a:srgbClr val="000000">
+                <a:alpha val="12000"/>
+              </a:srgbClr>
+            </a:outerShdw>
+          </a:effectLst>
+        </p:spPr>
+        <p:txBody>
+          <a:bodyPr/>
+          <a:lstStyle/>
+          <a:p>
+            <a:endParaRPr lang="en-US"/>
+          </a:p>
+        </p:txBody>
+      </p:sp>
+      <p:sp>
+        <p:nvSpPr>
+          <p:cNvPr id="10" name="Text 7"/>
+          <p:cNvSpPr txBox="1"/>
+          <p:nvPr/>
+        </p:nvSpPr>
+        <p:spPr>
+          <a:xfrm>
+            <a:off x="6537960" y="1828800"/>
+            <a:ext cx="4800600" cy="457200"/>
+          </a:xfrm>
+          <a:prstGeom prst="rect">
+            <a:avLst/>
+          </a:prstGeom>
+          <a:noFill/>
+          <a:ln/>
+        </p:spPr>
+        <p:txBody>
+          <a:bodyPr wrap="square" lIns="0" tIns="0" rIns="0" bIns="0" rtlCol="0" anchor="ctr"/>
+          <a:lstStyle/>
+          <a:p>
+            <a:pPr marL="0" indent="0">
+              <a:buNone/>
+            </a:pPr>
+            <a:r>
+              <a:rPr lang="en-US" sz="1900" b="1" dirty="0">
+                <a:solidFill>
+                  <a:srgbClr val="F5F5F0"/>
+                </a:solidFill>
+                <a:latin typeface="Cambria"/>
+              </a:rPr>
+              <a:t>What Remains</a:t>
+            </a:r>
+            <a:endParaRPr lang="en-US" sz="1900" dirty="0"/>
+          </a:p>
+        </p:txBody>
+      </p:sp>
+      <p:sp>
+        <p:nvSpPr>
+          <p:cNvPr id="11" name="Text 8"/>
+          <p:cNvSpPr txBox="1"/>
+          <p:nvPr/>
+        </p:nvSpPr>
+        <p:spPr>
+          <a:xfrm>
+            <a:off x="6537960" y="2331720"/>
+            <a:ext cx="5074920" cy="2651760"/>
+          </a:xfrm>
+          <a:prstGeom prst="rect">
+            <a:avLst/>
+          </a:prstGeom>
+          <a:noFill/>
+          <a:ln/>
+        </p:spPr>
+        <p:txBody>
+          <a:bodyPr wrap="square" lIns="0" tIns="0" rIns="0" bIns="0" rtlCol="0" anchor="ctr"/>
+          <a:lstStyle/>
+          <a:p>
+            <a:pPr marL="285750" indent="-285750">
+              <a:lnSpc>
+                <a:spcPct val="110000"/>
+              </a:lnSpc>
+              <a:spcAft>
+                <a:spcPts val="800"/>
+              </a:spcAft>
+              <a:buSzPct val="100000"/>
+              <a:buFont typeface="Arial" panose="020B0604020202020204" pitchFamily="34" charset="0"/>
+              <a:buChar char="•"/>
+            </a:pPr>
+            <a:r>
+              <a:rPr lang="en-US" sz="1420" dirty="0">
+                <a:solidFill>
+                  <a:srgbClr val="F5F5F0"/>
+                </a:solidFill>
+                <a:latin typeface="Calibri"/>
+              </a:rPr>
+              <a:t>Secrets and service connections</a:t>
+            </a:r>
+            <a:endParaRPr lang="en-US" sz="1450" dirty="0"/>
+          </a:p>
+          <a:p>
+            <a:pPr marL="285750" indent="-285750">
+              <a:spcAft>
+                <a:spcPts val="800"/>
+              </a:spcAft>
+              <a:buFont typeface="Arial" panose="020B0604020202020204" pitchFamily="34" charset="0"/>
+              <a:buChar char="•"/>
+            </a:pPr>
+            <a:r>
+              <a:rPr lang="en-US" sz="1420" dirty="0">
+                <a:solidFill>
+                  <a:srgbClr val="F5F5F0"/>
+                </a:solidFill>
+                <a:latin typeface="Calibri"/>
+              </a:rPr>
+              <a:t>Runners, private networks, and toolchains</a:t>
+            </a:r>
+          </a:p>
+          <a:p>
+            <a:pPr marL="285750" indent="-285750">
+              <a:spcAft>
+                <a:spcPts val="800"/>
+              </a:spcAft>
+              <a:buFont typeface="Arial" panose="020B0604020202020204" pitchFamily="34" charset="0"/>
+              <a:buChar char="•"/>
+            </a:pPr>
+            <a:r>
+              <a:rPr lang="en-US" sz="1420" dirty="0">
+                <a:solidFill>
+                  <a:srgbClr val="F5F5F0"/>
+                </a:solidFill>
+                <a:latin typeface="Calibri"/>
+              </a:rPr>
+              <a:t>Environments, approvals, gates, custom/unsupported tasks, and unsupported triggers</a:t>
+            </a:r>
+          </a:p>
+        </p:txBody>
+      </p:sp>
+      <p:sp>
+        <p:nvSpPr>
+          <p:cNvPr id="12" name="Shape 9"/>
+          <p:cNvSpPr/>
+          <p:nvPr/>
+        </p:nvSpPr>
+        <p:spPr>
+          <a:xfrm>
+            <a:off x="548640" y="5257800"/>
+            <a:ext cx="11064240" cy="1234440"/>
+          </a:xfrm>
+          <a:prstGeom prst="roundRect">
+            <a:avLst>
+              <a:gd name="adj" fmla="val 12632"/>
+            </a:avLst>
+          </a:prstGeom>
+          <a:solidFill>
+            <a:srgbClr val="F7F6F2"/>
+          </a:solidFill>
+          <a:ln w="12700">
+            <a:noFill/>
+            <a:prstDash val="solid"/>
+          </a:ln>
+          <a:effectLst>
+            <a:outerShdw blurRad="76200" dist="25400" dir="5400000" algn="bl" rotWithShape="0">
+              <a:srgbClr val="000000">
+                <a:alpha val="12000"/>
+              </a:srgbClr>
+            </a:outerShdw>
+          </a:effectLst>
+        </p:spPr>
+        <p:txBody>
+          <a:bodyPr/>
+          <a:lstStyle/>
+          <a:p>
+            <a:endParaRPr lang="en-US"/>
+          </a:p>
+        </p:txBody>
+      </p:sp>
+      <p:sp>
+        <p:nvSpPr>
+          <p:cNvPr id="13" name="Text 10"/>
+          <p:cNvSpPr txBox="1"/>
+          <p:nvPr/>
+        </p:nvSpPr>
+        <p:spPr>
+          <a:xfrm>
+            <a:off x="548640" y="5257800"/>
+            <a:ext cx="11064240" cy="1234440"/>
+          </a:xfrm>
+          <a:prstGeom prst="rect">
+            <a:avLst/>
+          </a:prstGeom>
+          <a:noFill/>
+          <a:ln/>
+        </p:spPr>
+        <p:txBody>
+          <a:bodyPr wrap="square" lIns="256032" tIns="54864" rIns="256032" bIns="54864" rtlCol="0" anchor="ctr"/>
+          <a:lstStyle/>
+          <a:p>
+            <a:pPr marL="0" indent="0" algn="l">
+              <a:lnSpc>
+                <a:spcPct val="110000"/>
+              </a:lnSpc>
+              <a:buNone/>
+            </a:pPr>
+            <a:r>
+              <a:rPr sz="1250" b="1" spc="120" dirty="0">
+                <a:solidFill>
+                  <a:srgbClr val="C1440E"/>
+                </a:solidFill>
+                <a:latin typeface="Calibri"/>
+              </a:rPr>
+              <a:t>DO THIS </a:t>
+            </a:r>
+            <a:r>
+              <a:rPr sz="1500" b="0" dirty="0">
+                <a:solidFill>
+                  <a:srgbClr val="2B2B2B"/>
+                </a:solidFill>
+                <a:latin typeface="Calibri"/>
+              </a:rPr>
+              <a:t>Use the audit output to build the migration backlog and recalibrate the planning estimate with evidence.</a:t>
+            </a:r>
+            <a:endParaRPr lang="en-US" sz="1450" dirty="0"/>
+          </a:p>
+        </p:txBody>
+      </p:sp>
+      <p:sp>
+        <p:nvSpPr>
+          <p:cNvPr id="16" name="Slide Number Placeholder"/>
+          <p:cNvSpPr>
+            <a:spLocks noGrp="1"/>
+          </p:cNvSpPr>
+          <p:nvPr>
+            <p:ph type="sldNum" sz="quarter" idx="10"/>
+          </p:nvPr>
+        </p:nvSpPr>
+        <p:spPr/>
+        <p:txBody>
+          <a:bodyPr/>
+          <a:lstStyle/>
+          <a:p>
+            <a:fld id="{BCB632DE-6AD4-40F1-944C-28C0E9BF62DC}" type="slidenum">
+              <a:rPr lang="en-US"/>
+              <a:t>23</a:t>
+            </a:fld>
+            <a:endParaRPr lang="en-US"/>
+          </a:p>
+        </p:txBody>
+      </p:sp>
+    </p:spTree>
+  </p:cSld>
+  <p:clrMapOvr>
+    <a:masterClrMapping/>
+  </p:clrMapOvr>
+</p:sld>
+</file>
+
+<file path=ppt/slides/slide24.xml><?xml version="1.0" encoding="utf-8"?>
 <p:sld xmlns:a="http://schemas.openxmlformats.org/drawingml/2006/main" xmlns:r="http://schemas.openxmlformats.org/officeDocument/2006/relationships" xmlns:p="http://schemas.openxmlformats.org/presentationml/2006/main">
   <p:cSld name="Slide 23">
     <p:bg>
@@ -12814,2568 +15416,6 @@
           <a:p>
             <a:fld id="{BCB632DE-6AD4-40F1-944C-28C0E9BF62DC}" type="slidenum">
               <a:rPr lang="en-US"/>
-              <a:t>20</a:t>
-            </a:fld>
-            <a:endParaRPr lang="en-US"/>
-          </a:p>
-        </p:txBody>
-      </p:sp>
-    </p:spTree>
-  </p:cSld>
-  <p:clrMapOvr>
-    <a:masterClrMapping/>
-  </p:clrMapOvr>
-</p:sld>
-</file>
-
-<file path=ppt/slides/slide21.xml><?xml version="1.0" encoding="utf-8"?>
-<p:sld xmlns:a="http://schemas.openxmlformats.org/drawingml/2006/main" xmlns:r="http://schemas.openxmlformats.org/officeDocument/2006/relationships" xmlns:p="http://schemas.openxmlformats.org/presentationml/2006/main">
-  <p:cSld name="Slide 24">
-    <p:bg>
-      <p:bgPr>
-        <a:solidFill>
-          <a:srgbClr val="FFFFFF"/>
-        </a:solidFill>
-        <a:effectLst/>
-      </p:bgPr>
-    </p:bg>
-    <p:spTree>
-      <p:nvGrpSpPr>
-        <p:cNvPr id="1" name=""/>
-        <p:cNvGrpSpPr/>
-        <p:nvPr/>
-      </p:nvGrpSpPr>
-      <p:grpSpPr>
-        <a:xfrm>
-          <a:off x="0" y="0"/>
-          <a:ext cx="0" cy="0"/>
-          <a:chOff x="0" y="0"/>
-          <a:chExt cx="0" cy="0"/>
-        </a:xfrm>
-      </p:grpSpPr>
-      <p:sp>
-        <p:nvSpPr>
-          <p:cNvPr id="2" name="Shape 0"/>
-          <p:cNvSpPr/>
-          <p:nvPr/>
-        </p:nvSpPr>
-        <p:spPr>
-          <a:xfrm>
-            <a:off x="548640" y="457200"/>
-            <a:ext cx="566928" cy="566928"/>
-          </a:xfrm>
-          <a:prstGeom prst="ellipse">
-            <a:avLst/>
-          </a:prstGeom>
-          <a:solidFill>
-            <a:srgbClr val="C1440E"/>
-          </a:solidFill>
-          <a:ln/>
-        </p:spPr>
-        <p:txBody>
-          <a:bodyPr/>
-          <a:lstStyle/>
-          <a:p>
-            <a:endParaRPr lang="en-US"/>
-          </a:p>
-        </p:txBody>
-      </p:sp>
-      <p:pic>
-        <p:nvPicPr>
-          <p:cNvPr id="3" name="Image 0" descr="/home/claude/pptx-build/assets/icons/FaDatabase-FFFFFF-200.png"/>
-          <p:cNvPicPr>
-            <a:picLocks noChangeAspect="1"/>
-          </p:cNvPicPr>
-          <p:nvPr/>
-        </p:nvPicPr>
-        <p:blipFill>
-          <a:blip r:embed="rId3"/>
-          <a:stretch>
-            <a:fillRect/>
-          </a:stretch>
-        </p:blipFill>
-        <p:spPr>
-          <a:xfrm>
-            <a:off x="685800" y="594360"/>
-            <a:ext cx="292608" cy="292608"/>
-          </a:xfrm>
-          <a:prstGeom prst="rect">
-            <a:avLst/>
-          </a:prstGeom>
-        </p:spPr>
-      </p:pic>
-      <p:sp>
-        <p:nvSpPr>
-          <p:cNvPr id="4" name="Text 1"/>
-          <p:cNvSpPr txBox="1"/>
-          <p:nvPr/>
-        </p:nvSpPr>
-        <p:spPr>
-          <a:xfrm>
-            <a:off x="1234440" y="420624"/>
-            <a:ext cx="9875520" cy="320040"/>
-          </a:xfrm>
-          <a:prstGeom prst="rect">
-            <a:avLst/>
-          </a:prstGeom>
-          <a:noFill/>
-          <a:ln/>
-        </p:spPr>
-        <p:txBody>
-          <a:bodyPr wrap="square" lIns="0" tIns="0" rIns="0" bIns="0" rtlCol="0" anchor="ctr"/>
-          <a:lstStyle/>
-          <a:p>
-            <a:pPr marL="0" indent="0">
-              <a:buNone/>
-            </a:pPr>
-            <a:r>
-              <a:rPr lang="en-US" sz="1500" b="1" kern="0" spc="200" dirty="0">
-                <a:solidFill>
-                  <a:srgbClr val="C1440E"/>
-                </a:solidFill>
-                <a:latin typeface="Calibri" pitchFamily="34" charset="0"/>
-                <a:ea typeface="Calibri" pitchFamily="34" charset="-122"/>
-                <a:cs typeface="Calibri" pitchFamily="34" charset="-120"/>
-              </a:rPr>
-              <a:t>CROSSING THE RIVER</a:t>
-            </a:r>
-            <a:endParaRPr lang="en-US" sz="1500" dirty="0"/>
-          </a:p>
-        </p:txBody>
-      </p:sp>
-      <p:sp>
-        <p:nvSpPr>
-          <p:cNvPr id="5" name="Text 2"/>
-          <p:cNvSpPr txBox="1"/>
-          <p:nvPr/>
-        </p:nvSpPr>
-        <p:spPr>
-          <a:xfrm>
-            <a:off x="1234440" y="749808"/>
-            <a:ext cx="10515600" cy="868680"/>
-          </a:xfrm>
-          <a:prstGeom prst="rect">
-            <a:avLst/>
-          </a:prstGeom>
-          <a:noFill/>
-          <a:ln/>
-        </p:spPr>
-        <p:txBody>
-          <a:bodyPr wrap="square" lIns="0" tIns="0" rIns="0" bIns="0" rtlCol="0" anchor="t"/>
-          <a:lstStyle/>
-          <a:p>
-            <a:pPr marL="0" indent="0">
-              <a:buNone/>
-            </a:pPr>
-            <a:r>
-              <a:rPr lang="en-US" sz="3200" b="1">
-                <a:solidFill>
-                  <a:srgbClr val="1F3D2C"/>
-                </a:solidFill>
-                <a:latin typeface="Cambria"/>
-              </a:rPr>
-              <a:t>Repository Plane — gh-ado2gh Orchestrates the Move</a:t>
-            </a:r>
-            <a:endParaRPr lang="en-US" sz="3200" dirty="0"/>
-          </a:p>
-        </p:txBody>
-      </p:sp>
-      <p:sp>
-        <p:nvSpPr>
-          <p:cNvPr id="6" name="Shape 3"/>
-          <p:cNvSpPr/>
-          <p:nvPr/>
-        </p:nvSpPr>
-        <p:spPr>
-          <a:xfrm>
-            <a:off x="548640" y="1645920"/>
-            <a:ext cx="5349240" cy="3429000"/>
-          </a:xfrm>
-          <a:prstGeom prst="roundRect">
-            <a:avLst>
-              <a:gd name="adj" fmla="val 3200"/>
-            </a:avLst>
-          </a:prstGeom>
-          <a:solidFill>
-            <a:srgbClr val="F7F6F2"/>
-          </a:solidFill>
-          <a:ln w="12700">
-            <a:solidFill>
-              <a:srgbClr val="DDD8CC"/>
-            </a:solidFill>
-            <a:prstDash val="solid"/>
-          </a:ln>
-          <a:effectLst>
-            <a:outerShdw blurRad="76200" dist="25400" dir="5400000" algn="bl" rotWithShape="0">
-              <a:srgbClr val="000000">
-                <a:alpha val="12000"/>
-              </a:srgbClr>
-            </a:outerShdw>
-          </a:effectLst>
-        </p:spPr>
-        <p:txBody>
-          <a:bodyPr/>
-          <a:lstStyle/>
-          <a:p>
-            <a:endParaRPr lang="en-US"/>
-          </a:p>
-        </p:txBody>
-      </p:sp>
-      <p:sp>
-        <p:nvSpPr>
-          <p:cNvPr id="7" name="Text 4"/>
-          <p:cNvSpPr txBox="1"/>
-          <p:nvPr/>
-        </p:nvSpPr>
-        <p:spPr>
-          <a:xfrm>
-            <a:off x="822960" y="1828800"/>
-            <a:ext cx="4800600" cy="457200"/>
-          </a:xfrm>
-          <a:prstGeom prst="rect">
-            <a:avLst/>
-          </a:prstGeom>
-          <a:noFill/>
-          <a:ln/>
-        </p:spPr>
-        <p:txBody>
-          <a:bodyPr wrap="square" lIns="0" tIns="0" rIns="0" bIns="0" rtlCol="0" anchor="ctr"/>
-          <a:lstStyle/>
-          <a:p>
-            <a:pPr marL="0" indent="0">
-              <a:buNone/>
-            </a:pPr>
-            <a:r>
-              <a:rPr lang="en-US" sz="1900" b="1">
-                <a:solidFill>
-                  <a:srgbClr val="1F3D2C"/>
-                </a:solidFill>
-                <a:latin typeface="Cambria"/>
-              </a:rPr>
-              <a:t>What It Does</a:t>
-            </a:r>
-            <a:endParaRPr lang="en-US" sz="1900" dirty="0"/>
-          </a:p>
-        </p:txBody>
-      </p:sp>
-      <p:sp>
-        <p:nvSpPr>
-          <p:cNvPr id="8" name="Text 5"/>
-          <p:cNvSpPr txBox="1"/>
-          <p:nvPr/>
-        </p:nvSpPr>
-        <p:spPr>
-          <a:xfrm>
-            <a:off x="822960" y="2331720"/>
-            <a:ext cx="4800600" cy="2651760"/>
-          </a:xfrm>
-          <a:prstGeom prst="rect">
-            <a:avLst/>
-          </a:prstGeom>
-          <a:noFill/>
-          <a:ln/>
-        </p:spPr>
-        <p:txBody>
-          <a:bodyPr wrap="square" lIns="0" tIns="0" rIns="0" bIns="0" rtlCol="0" anchor="ctr"/>
-          <a:lstStyle/>
-          <a:p>
-            <a:pPr marL="285750" indent="-285750">
-              <a:lnSpc>
-                <a:spcPct val="110000"/>
-              </a:lnSpc>
-              <a:spcAft>
-                <a:spcPts val="800"/>
-              </a:spcAft>
-              <a:buSzPct val="100000"/>
-              <a:buFont typeface="Arial" panose="020B0604020202020204" pitchFamily="34" charset="0"/>
-              <a:buChar char="•"/>
-            </a:pPr>
-            <a:r>
-              <a:rPr lang="en-US" sz="1450" dirty="0">
-                <a:solidFill>
-                  <a:srgbClr val="2B2B2B"/>
-                </a:solidFill>
-              </a:rPr>
-              <a:t>GitHub Enterprise Importer (GEI) is a set of GitHub CLI extensions (including </a:t>
-            </a:r>
-            <a:r>
-              <a:rPr lang="en-US" sz="1450" dirty="0">
-                <a:solidFill>
-                  <a:srgbClr val="2B2B2B"/>
-                </a:solidFill>
-                <a:latin typeface="Cascadia Code" panose="020B0609020000020004" pitchFamily="49" charset="0"/>
-                <a:cs typeface="Cascadia Code" panose="020B0609020000020004" pitchFamily="49" charset="0"/>
-              </a:rPr>
-              <a:t>ado2gh</a:t>
-            </a:r>
-            <a:r>
-              <a:rPr lang="en-US" sz="1450" dirty="0">
-                <a:solidFill>
-                  <a:srgbClr val="2B2B2B"/>
-                </a:solidFill>
-              </a:rPr>
-              <a:t>)</a:t>
-            </a:r>
-            <a:endParaRPr lang="en-US" sz="1450" dirty="0">
-              <a:solidFill>
-                <a:srgbClr val="2B2B2B"/>
-              </a:solidFill>
-              <a:ea typeface="Cascadia Mono" panose="020B0609020000020004" pitchFamily="49" charset="0"/>
-              <a:cs typeface="Cascadia Mono" panose="020B0609020000020004" pitchFamily="49" charset="0"/>
-            </a:endParaRPr>
-          </a:p>
-          <a:p>
-            <a:pPr marL="285750" indent="-285750">
-              <a:lnSpc>
-                <a:spcPct val="110000"/>
-              </a:lnSpc>
-              <a:spcAft>
-                <a:spcPts val="800"/>
-              </a:spcAft>
-              <a:buSzPct val="100000"/>
-              <a:buFont typeface="Arial" panose="020B0604020202020204" pitchFamily="34" charset="0"/>
-              <a:buChar char="•"/>
-            </a:pPr>
-            <a:r>
-              <a:rPr lang="en-US" sz="1450" dirty="0">
-                <a:solidFill>
-                  <a:srgbClr val="2B2B2B"/>
-                </a:solidFill>
-                <a:latin typeface="Cascadia Code" panose="020B0609020000020004" pitchFamily="49" charset="0"/>
-                <a:ea typeface="Cascadia Mono" panose="020B0609020000020004" pitchFamily="49" charset="0"/>
-                <a:cs typeface="Cascadia Code" panose="020B0609020000020004" pitchFamily="49" charset="0"/>
-              </a:rPr>
-              <a:t>inventory-report</a:t>
-            </a:r>
-            <a:r>
-              <a:rPr lang="en-US" sz="1450" dirty="0">
-                <a:solidFill>
-                  <a:srgbClr val="2B2B2B"/>
-                </a:solidFill>
-                <a:latin typeface="Calibri"/>
-              </a:rPr>
-              <a:t> profiles repositories and PR volume</a:t>
-            </a:r>
-            <a:endParaRPr lang="en-US" sz="1450" dirty="0"/>
-          </a:p>
-          <a:p>
-            <a:pPr marL="285750" indent="-285750">
-              <a:spcAft>
-                <a:spcPts val="800"/>
-              </a:spcAft>
-              <a:buFont typeface="Arial" panose="020B0604020202020204" pitchFamily="34" charset="0"/>
-              <a:buChar char="•"/>
-            </a:pPr>
-            <a:r>
-              <a:rPr lang="en-US" sz="1450" dirty="0">
-                <a:solidFill>
-                  <a:srgbClr val="2B2B2B"/>
-                </a:solidFill>
-                <a:latin typeface="Cascadia Code" panose="020B0609020000020004" pitchFamily="49" charset="0"/>
-                <a:ea typeface="Cascadia Mono" panose="020B0609020000020004" pitchFamily="49" charset="0"/>
-                <a:cs typeface="Cascadia Code" panose="020B0609020000020004" pitchFamily="49" charset="0"/>
-              </a:rPr>
-              <a:t>generate-script</a:t>
-            </a:r>
-            <a:r>
-              <a:rPr lang="en-US" sz="1450" dirty="0">
-                <a:solidFill>
-                  <a:srgbClr val="2B2B2B"/>
-                </a:solidFill>
-                <a:latin typeface="Calibri"/>
-              </a:rPr>
-              <a:t> creates reviewable migration code</a:t>
-            </a:r>
-          </a:p>
-          <a:p>
-            <a:pPr marL="285750" indent="-285750">
-              <a:spcAft>
-                <a:spcPts val="800"/>
-              </a:spcAft>
-              <a:buFont typeface="Arial" panose="020B0604020202020204" pitchFamily="34" charset="0"/>
-              <a:buChar char="•"/>
-            </a:pPr>
-            <a:r>
-              <a:rPr lang="en-US" sz="1450" dirty="0">
-                <a:solidFill>
-                  <a:srgbClr val="2B2B2B"/>
-                </a:solidFill>
-                <a:latin typeface="Cascadia Code" panose="020B0609020000020004" pitchFamily="49" charset="0"/>
-                <a:ea typeface="Cascadia Mono" panose="020B0609020000020004" pitchFamily="49" charset="0"/>
-                <a:cs typeface="Cascadia Code" panose="020B0609020000020004" pitchFamily="49" charset="0"/>
-              </a:rPr>
-              <a:t>--all </a:t>
-            </a:r>
-            <a:r>
-              <a:rPr lang="en-US" sz="1450" dirty="0">
-                <a:solidFill>
-                  <a:srgbClr val="2B2B2B"/>
-                </a:solidFill>
-                <a:latin typeface="Calibri"/>
-              </a:rPr>
-              <a:t>adds team creation, Boards integration, and pipeline rewiring</a:t>
-            </a:r>
-          </a:p>
-        </p:txBody>
-      </p:sp>
-      <p:sp>
-        <p:nvSpPr>
-          <p:cNvPr id="9" name="Shape 6"/>
-          <p:cNvSpPr/>
-          <p:nvPr/>
-        </p:nvSpPr>
-        <p:spPr>
-          <a:xfrm>
-            <a:off x="6263640" y="1645920"/>
-            <a:ext cx="5349240" cy="3429000"/>
-          </a:xfrm>
-          <a:prstGeom prst="roundRect">
-            <a:avLst>
-              <a:gd name="adj" fmla="val 3200"/>
-            </a:avLst>
-          </a:prstGeom>
-          <a:solidFill>
-            <a:srgbClr val="1F3D2C"/>
-          </a:solidFill>
-          <a:ln w="12700">
-            <a:solidFill>
-              <a:srgbClr val="DDD8CC"/>
-            </a:solidFill>
-            <a:prstDash val="solid"/>
-          </a:ln>
-          <a:effectLst>
-            <a:outerShdw blurRad="76200" dist="25400" dir="5400000" algn="bl" rotWithShape="0">
-              <a:srgbClr val="000000">
-                <a:alpha val="12000"/>
-              </a:srgbClr>
-            </a:outerShdw>
-          </a:effectLst>
-        </p:spPr>
-        <p:txBody>
-          <a:bodyPr/>
-          <a:lstStyle/>
-          <a:p>
-            <a:endParaRPr lang="en-US"/>
-          </a:p>
-        </p:txBody>
-      </p:sp>
-      <p:sp>
-        <p:nvSpPr>
-          <p:cNvPr id="10" name="Text 7"/>
-          <p:cNvSpPr txBox="1"/>
-          <p:nvPr/>
-        </p:nvSpPr>
-        <p:spPr>
-          <a:xfrm>
-            <a:off x="6537960" y="1828800"/>
-            <a:ext cx="4800600" cy="457200"/>
-          </a:xfrm>
-          <a:prstGeom prst="rect">
-            <a:avLst/>
-          </a:prstGeom>
-          <a:noFill/>
-          <a:ln/>
-        </p:spPr>
-        <p:txBody>
-          <a:bodyPr wrap="square" lIns="0" tIns="0" rIns="0" bIns="0" rtlCol="0" anchor="ctr"/>
-          <a:lstStyle/>
-          <a:p>
-            <a:pPr marL="0" indent="0">
-              <a:buNone/>
-            </a:pPr>
-            <a:r>
-              <a:rPr lang="en-US" sz="1900" b="1" dirty="0">
-                <a:solidFill>
-                  <a:srgbClr val="F5F5F0"/>
-                </a:solidFill>
-                <a:latin typeface="Cambria"/>
-              </a:rPr>
-              <a:t>Where the Boundary Is</a:t>
-            </a:r>
-            <a:endParaRPr lang="en-US" sz="1900" dirty="0"/>
-          </a:p>
-        </p:txBody>
-      </p:sp>
-      <p:sp>
-        <p:nvSpPr>
-          <p:cNvPr id="11" name="Text 8"/>
-          <p:cNvSpPr txBox="1"/>
-          <p:nvPr/>
-        </p:nvSpPr>
-        <p:spPr>
-          <a:xfrm>
-            <a:off x="6537960" y="2331720"/>
-            <a:ext cx="4800600" cy="2651760"/>
-          </a:xfrm>
-          <a:prstGeom prst="rect">
-            <a:avLst/>
-          </a:prstGeom>
-          <a:noFill/>
-          <a:ln/>
-        </p:spPr>
-        <p:txBody>
-          <a:bodyPr wrap="square" lIns="0" tIns="0" rIns="0" bIns="0" rtlCol="0" anchor="ctr"/>
-          <a:lstStyle/>
-          <a:p>
-            <a:pPr marL="285750" indent="-285750">
-              <a:spcBef>
-                <a:spcPts val="800"/>
-              </a:spcBef>
-              <a:buFont typeface="Arial" panose="020B0604020202020204" pitchFamily="34" charset="0"/>
-              <a:buChar char="•"/>
-            </a:pPr>
-            <a:r>
-              <a:rPr sz="1450" dirty="0">
-                <a:solidFill>
-                  <a:srgbClr val="F5F5F0"/>
-                </a:solidFill>
-                <a:latin typeface="Calibri"/>
-              </a:rPr>
-              <a:t>Pipeline-logic conversion belongs to </a:t>
-            </a:r>
-            <a:r>
-              <a:rPr lang="en-US" sz="1450" dirty="0">
-                <a:solidFill>
-                  <a:srgbClr val="F5F5F0"/>
-                </a:solidFill>
-                <a:latin typeface="Calibri"/>
-              </a:rPr>
-              <a:t>elsewhere (</a:t>
-            </a:r>
-            <a:r>
-              <a:rPr sz="1450" dirty="0">
-                <a:solidFill>
-                  <a:srgbClr val="F5F5F0"/>
-                </a:solidFill>
-                <a:latin typeface="Calibri"/>
-              </a:rPr>
-              <a:t>Actions Importer</a:t>
-            </a:r>
-            <a:r>
-              <a:rPr lang="en-US" sz="1450" dirty="0">
-                <a:solidFill>
-                  <a:srgbClr val="F5F5F0"/>
-                </a:solidFill>
-                <a:latin typeface="Calibri"/>
-              </a:rPr>
-              <a:t>)</a:t>
-            </a:r>
-            <a:endParaRPr sz="1450" dirty="0">
-              <a:solidFill>
-                <a:srgbClr val="F5F5F0"/>
-              </a:solidFill>
-              <a:latin typeface="Calibri"/>
-            </a:endParaRPr>
-          </a:p>
-          <a:p>
-            <a:pPr marL="285750" indent="-285750">
-              <a:spcBef>
-                <a:spcPts val="800"/>
-              </a:spcBef>
-              <a:buFont typeface="Arial" panose="020B0604020202020204" pitchFamily="34" charset="0"/>
-              <a:buChar char="•"/>
-            </a:pPr>
-            <a:r>
-              <a:rPr sz="1450" dirty="0">
-                <a:solidFill>
-                  <a:srgbClr val="F5F5F0"/>
-                </a:solidFill>
-                <a:latin typeface="Calibri"/>
-              </a:rPr>
-              <a:t>LFS transfer and identity decisions remain separate work</a:t>
-            </a:r>
-          </a:p>
-        </p:txBody>
-      </p:sp>
-      <p:sp>
-        <p:nvSpPr>
-          <p:cNvPr id="12" name="Shape 9"/>
-          <p:cNvSpPr/>
-          <p:nvPr/>
-        </p:nvSpPr>
-        <p:spPr>
-          <a:xfrm>
-            <a:off x="548640" y="5257800"/>
-            <a:ext cx="11064240" cy="1234440"/>
-          </a:xfrm>
-          <a:prstGeom prst="roundRect">
-            <a:avLst>
-              <a:gd name="adj" fmla="val 12632"/>
-            </a:avLst>
-          </a:prstGeom>
-          <a:solidFill>
-            <a:srgbClr val="F7F6F2"/>
-          </a:solidFill>
-          <a:ln w="12700">
-            <a:noFill/>
-            <a:prstDash val="solid"/>
-          </a:ln>
-          <a:effectLst>
-            <a:outerShdw blurRad="76200" dist="25400" dir="5400000" algn="bl" rotWithShape="0">
-              <a:srgbClr val="000000">
-                <a:alpha val="12000"/>
-              </a:srgbClr>
-            </a:outerShdw>
-          </a:effectLst>
-        </p:spPr>
-        <p:txBody>
-          <a:bodyPr/>
-          <a:lstStyle/>
-          <a:p>
-            <a:endParaRPr lang="en-US"/>
-          </a:p>
-        </p:txBody>
-      </p:sp>
-      <p:sp>
-        <p:nvSpPr>
-          <p:cNvPr id="13" name="Text 10"/>
-          <p:cNvSpPr txBox="1"/>
-          <p:nvPr/>
-        </p:nvSpPr>
-        <p:spPr>
-          <a:xfrm>
-            <a:off x="548640" y="5257800"/>
-            <a:ext cx="11064240" cy="1234440"/>
-          </a:xfrm>
-          <a:prstGeom prst="rect">
-            <a:avLst/>
-          </a:prstGeom>
-          <a:noFill/>
-          <a:ln/>
-        </p:spPr>
-        <p:txBody>
-          <a:bodyPr wrap="square" lIns="256032" tIns="54864" rIns="256032" bIns="54864" rtlCol="0" anchor="ctr"/>
-          <a:lstStyle/>
-          <a:p>
-            <a:pPr marL="0" indent="0" algn="l">
-              <a:lnSpc>
-                <a:spcPct val="110000"/>
-              </a:lnSpc>
-              <a:buNone/>
-            </a:pPr>
-            <a:r>
-              <a:rPr sz="1250" b="1" spc="120">
-                <a:solidFill>
-                  <a:srgbClr val="C1440E"/>
-                </a:solidFill>
-                <a:latin typeface="Calibri"/>
-              </a:rPr>
-              <a:t>DO THIS </a:t>
-            </a:r>
-            <a:r>
-              <a:rPr sz="1500" b="0">
-                <a:solidFill>
-                  <a:srgbClr val="2B2B2B"/>
-                </a:solidFill>
-                <a:latin typeface="Calibri"/>
-              </a:rPr>
-              <a:t>Treat the generated script as production migration code: review it, version it, and make ownership explicit.</a:t>
-            </a:r>
-            <a:endParaRPr lang="en-US" sz="1450" dirty="0"/>
-          </a:p>
-        </p:txBody>
-      </p:sp>
-      <p:sp>
-        <p:nvSpPr>
-          <p:cNvPr id="16" name="Slide Number Placeholder"/>
-          <p:cNvSpPr>
-            <a:spLocks noGrp="1"/>
-          </p:cNvSpPr>
-          <p:nvPr>
-            <p:ph type="sldNum" sz="quarter" idx="10"/>
-          </p:nvPr>
-        </p:nvSpPr>
-        <p:spPr/>
-        <p:txBody>
-          <a:bodyPr/>
-          <a:lstStyle/>
-          <a:p>
-            <a:fld id="{BCB632DE-6AD4-40F1-944C-28C0E9BF62DC}" type="slidenum">
-              <a:rPr lang="en-US"/>
-              <a:t>21</a:t>
-            </a:fld>
-            <a:endParaRPr lang="en-US" dirty="0"/>
-          </a:p>
-        </p:txBody>
-      </p:sp>
-    </p:spTree>
-  </p:cSld>
-  <p:clrMapOvr>
-    <a:masterClrMapping/>
-  </p:clrMapOvr>
-</p:sld>
-</file>
-
-<file path=ppt/slides/slide22.xml><?xml version="1.0" encoding="utf-8"?>
-<p:sld xmlns:a="http://schemas.openxmlformats.org/drawingml/2006/main" xmlns:r="http://schemas.openxmlformats.org/officeDocument/2006/relationships" xmlns:p="http://schemas.openxmlformats.org/presentationml/2006/main">
-  <p:cSld>
-    <p:spTree>
-      <p:nvGrpSpPr>
-        <p:cNvPr id="1" name=""/>
-        <p:cNvGrpSpPr/>
-        <p:nvPr/>
-      </p:nvGrpSpPr>
-      <p:grpSpPr>
-        <a:xfrm>
-          <a:off x="0" y="0"/>
-          <a:ext cx="0" cy="0"/>
-          <a:chOff x="0" y="0"/>
-          <a:chExt cx="0" cy="0"/>
-        </a:xfrm>
-      </p:grpSpPr>
-      <p:sp>
-        <p:nvSpPr>
-          <p:cNvPr id="2" name="Shape 0"/>
-          <p:cNvSpPr/>
-          <p:nvPr/>
-        </p:nvSpPr>
-        <p:spPr>
-          <a:xfrm>
-            <a:off x="548640" y="457200"/>
-            <a:ext cx="566928" cy="566928"/>
-          </a:xfrm>
-          <a:prstGeom prst="ellipse">
-            <a:avLst/>
-          </a:prstGeom>
-          <a:solidFill>
-            <a:srgbClr val="C1440E"/>
-          </a:solidFill>
-          <a:ln/>
-        </p:spPr>
-        <p:txBody>
-          <a:bodyPr/>
-          <a:lstStyle/>
-          <a:p>
-            <a:endParaRPr lang="en-US"/>
-          </a:p>
-        </p:txBody>
-      </p:sp>
-      <p:pic>
-        <p:nvPicPr>
-          <p:cNvPr id="3" name="Image 0" descr="/home/claude/pptx-build/assets/icons/FaFlask-FFFFFF-200.png"/>
-          <p:cNvPicPr>
-            <a:picLocks noChangeAspect="1"/>
-          </p:cNvPicPr>
-          <p:nvPr/>
-        </p:nvPicPr>
-        <p:blipFill>
-          <a:blip r:embed="rId3"/>
-          <a:stretch>
-            <a:fillRect/>
-          </a:stretch>
-        </p:blipFill>
-        <p:spPr>
-          <a:xfrm>
-            <a:off x="685800" y="594360"/>
-            <a:ext cx="292608" cy="292608"/>
-          </a:xfrm>
-          <a:prstGeom prst="rect">
-            <a:avLst/>
-          </a:prstGeom>
-        </p:spPr>
-      </p:pic>
-      <p:sp>
-        <p:nvSpPr>
-          <p:cNvPr id="4" name="Text 1"/>
-          <p:cNvSpPr txBox="1"/>
-          <p:nvPr/>
-        </p:nvSpPr>
-        <p:spPr>
-          <a:xfrm>
-            <a:off x="1234440" y="420624"/>
-            <a:ext cx="9875520" cy="320040"/>
-          </a:xfrm>
-          <a:prstGeom prst="rect">
-            <a:avLst/>
-          </a:prstGeom>
-          <a:noFill/>
-          <a:ln/>
-        </p:spPr>
-        <p:txBody>
-          <a:bodyPr wrap="square" lIns="0" tIns="0" rIns="0" bIns="0" rtlCol="0" anchor="ctr"/>
-          <a:lstStyle/>
-          <a:p>
-            <a:pPr marL="0" indent="0">
-              <a:buNone/>
-            </a:pPr>
-            <a:r>
-              <a:rPr lang="en-US" sz="1500" b="1" kern="0" spc="200" dirty="0">
-                <a:solidFill>
-                  <a:srgbClr val="C1440E"/>
-                </a:solidFill>
-                <a:latin typeface="Calibri" pitchFamily="34" charset="0"/>
-                <a:ea typeface="Calibri" pitchFamily="34" charset="-122"/>
-                <a:cs typeface="Calibri" pitchFamily="34" charset="-120"/>
-              </a:rPr>
-              <a:t>CROSSING THE RIVER</a:t>
-            </a:r>
-            <a:endParaRPr lang="en-US" sz="1500" dirty="0"/>
-          </a:p>
-        </p:txBody>
-      </p:sp>
-      <p:sp>
-        <p:nvSpPr>
-          <p:cNvPr id="5" name="Text 2"/>
-          <p:cNvSpPr txBox="1"/>
-          <p:nvPr/>
-        </p:nvSpPr>
-        <p:spPr>
-          <a:xfrm>
-            <a:off x="1234440" y="749808"/>
-            <a:ext cx="10515600" cy="868680"/>
-          </a:xfrm>
-          <a:prstGeom prst="rect">
-            <a:avLst/>
-          </a:prstGeom>
-          <a:noFill/>
-          <a:ln/>
-        </p:spPr>
-        <p:txBody>
-          <a:bodyPr wrap="square" lIns="0" tIns="0" rIns="0" bIns="0" rtlCol="0" anchor="t"/>
-          <a:lstStyle/>
-          <a:p>
-            <a:pPr marL="0" indent="0">
-              <a:buNone/>
-            </a:pPr>
-            <a:r>
-              <a:rPr lang="en-US" sz="3200" b="1">
-                <a:solidFill>
-                  <a:srgbClr val="1F3D2C"/>
-                </a:solidFill>
-                <a:latin typeface="Cambria"/>
-              </a:rPr>
-              <a:t>Repository Plane — ELM Reduces Cutover Disruption</a:t>
-            </a:r>
-            <a:endParaRPr lang="en-US" sz="3200" dirty="0"/>
-          </a:p>
-        </p:txBody>
-      </p:sp>
-      <p:sp>
-        <p:nvSpPr>
-          <p:cNvPr id="6" name="Shape 3"/>
-          <p:cNvSpPr/>
-          <p:nvPr/>
-        </p:nvSpPr>
-        <p:spPr>
-          <a:xfrm>
-            <a:off x="548640" y="1531034"/>
-            <a:ext cx="11064240" cy="813816"/>
-          </a:xfrm>
-          <a:prstGeom prst="roundRect">
-            <a:avLst>
-              <a:gd name="adj" fmla="val 8000"/>
-            </a:avLst>
-          </a:prstGeom>
-          <a:solidFill>
-            <a:srgbClr val="F7F6F2"/>
-          </a:solidFill>
-          <a:ln w="12700">
-            <a:solidFill>
-              <a:srgbClr val="DDD8CC"/>
-            </a:solidFill>
-            <a:prstDash val="solid"/>
-          </a:ln>
-          <a:effectLst>
-            <a:outerShdw blurRad="76200" dist="25400" dir="5400000" algn="bl" rotWithShape="0">
-              <a:srgbClr val="000000">
-                <a:alpha val="12000"/>
-              </a:srgbClr>
-            </a:outerShdw>
-          </a:effectLst>
-        </p:spPr>
-        <p:txBody>
-          <a:bodyPr/>
-          <a:lstStyle/>
-          <a:p>
-            <a:endParaRPr lang="en-US"/>
-          </a:p>
-        </p:txBody>
-      </p:sp>
-      <p:sp>
-        <p:nvSpPr>
-          <p:cNvPr id="7" name="Text 4"/>
-          <p:cNvSpPr txBox="1"/>
-          <p:nvPr/>
-        </p:nvSpPr>
-        <p:spPr>
-          <a:xfrm>
-            <a:off x="822960" y="1430450"/>
-            <a:ext cx="10515600" cy="1097280"/>
-          </a:xfrm>
-          <a:prstGeom prst="rect">
-            <a:avLst/>
-          </a:prstGeom>
-          <a:noFill/>
-          <a:ln/>
-        </p:spPr>
-        <p:txBody>
-          <a:bodyPr wrap="square" lIns="0" tIns="0" rIns="0" bIns="0" rtlCol="0" anchor="ctr"/>
-          <a:lstStyle/>
-          <a:p>
-            <a:pPr marL="0" indent="0">
-              <a:lnSpc>
-                <a:spcPct val="115000"/>
-              </a:lnSpc>
-              <a:buNone/>
-            </a:pPr>
-            <a:r>
-              <a:rPr lang="en-US" sz="1650" b="0" dirty="0">
-                <a:solidFill>
-                  <a:srgbClr val="2B2B2B"/>
-                </a:solidFill>
-                <a:latin typeface="Calibri"/>
-              </a:rPr>
-              <a:t>Enterprise Live Migrations (ELM) is in public preview for the Azure DevOps path, targeting GitHub Enterprise Cloud with data residency. Its differentiator is continuous sync plus a customer-scheduled cutover.</a:t>
-            </a:r>
-            <a:endParaRPr lang="en-US" sz="1700" dirty="0"/>
-          </a:p>
-        </p:txBody>
-      </p:sp>
-      <p:sp>
-        <p:nvSpPr>
-          <p:cNvPr id="8" name="Shape 5"/>
-          <p:cNvSpPr/>
-          <p:nvPr/>
-        </p:nvSpPr>
-        <p:spPr>
-          <a:xfrm>
-            <a:off x="548640" y="2527730"/>
-            <a:ext cx="5349240" cy="2912950"/>
-          </a:xfrm>
-          <a:prstGeom prst="roundRect">
-            <a:avLst>
-              <a:gd name="adj" fmla="val 4800"/>
-            </a:avLst>
-          </a:prstGeom>
-          <a:solidFill>
-            <a:srgbClr val="F7F6F2"/>
-          </a:solidFill>
-          <a:ln w="12700">
-            <a:solidFill>
-              <a:srgbClr val="DDD8CC"/>
-            </a:solidFill>
-            <a:prstDash val="solid"/>
-          </a:ln>
-          <a:effectLst>
-            <a:outerShdw blurRad="76200" dist="25400" dir="5400000" algn="bl" rotWithShape="0">
-              <a:srgbClr val="000000">
-                <a:alpha val="12000"/>
-              </a:srgbClr>
-            </a:outerShdw>
-          </a:effectLst>
-        </p:spPr>
-        <p:txBody>
-          <a:bodyPr/>
-          <a:lstStyle/>
-          <a:p>
-            <a:endParaRPr lang="en-US"/>
-          </a:p>
-        </p:txBody>
-      </p:sp>
-      <p:sp>
-        <p:nvSpPr>
-          <p:cNvPr id="9" name="Text 6"/>
-          <p:cNvSpPr txBox="1"/>
-          <p:nvPr/>
-        </p:nvSpPr>
-        <p:spPr>
-          <a:xfrm>
-            <a:off x="899160" y="2749765"/>
-            <a:ext cx="4800600" cy="411480"/>
-          </a:xfrm>
-          <a:prstGeom prst="rect">
-            <a:avLst/>
-          </a:prstGeom>
-          <a:noFill/>
-          <a:ln/>
-        </p:spPr>
-        <p:txBody>
-          <a:bodyPr wrap="square" lIns="0" tIns="0" rIns="0" bIns="0" rtlCol="0" anchor="ctr"/>
-          <a:lstStyle/>
-          <a:p>
-            <a:pPr marL="0" indent="0">
-              <a:buNone/>
-            </a:pPr>
-            <a:r>
-              <a:rPr lang="en-US" sz="1700" b="1" dirty="0">
-                <a:solidFill>
-                  <a:srgbClr val="1F3D2C"/>
-                </a:solidFill>
-                <a:latin typeface="Cambria"/>
-              </a:rPr>
-              <a:t>What It Adds</a:t>
-            </a:r>
-            <a:endParaRPr lang="en-US" sz="1700" dirty="0"/>
-          </a:p>
-        </p:txBody>
-      </p:sp>
-      <p:sp>
-        <p:nvSpPr>
-          <p:cNvPr id="10" name="Text 7"/>
-          <p:cNvSpPr txBox="1"/>
-          <p:nvPr/>
-        </p:nvSpPr>
-        <p:spPr>
-          <a:xfrm>
-            <a:off x="822960" y="3161245"/>
-            <a:ext cx="4800600" cy="2233715"/>
-          </a:xfrm>
-          <a:prstGeom prst="rect">
-            <a:avLst/>
-          </a:prstGeom>
-          <a:noFill/>
-          <a:ln/>
-        </p:spPr>
-        <p:txBody>
-          <a:bodyPr wrap="square" lIns="0" tIns="0" rIns="0" bIns="0" rtlCol="0" anchor="t"/>
-          <a:lstStyle/>
-          <a:p>
-            <a:pPr marL="285750" indent="-285750">
-              <a:lnSpc>
-                <a:spcPct val="105000"/>
-              </a:lnSpc>
-              <a:spcAft>
-                <a:spcPts val="800"/>
-              </a:spcAft>
-              <a:buSzPct val="100000"/>
-              <a:buFont typeface="Arial" panose="020B0604020202020204" pitchFamily="34" charset="0"/>
-              <a:buChar char="•"/>
-            </a:pPr>
-            <a:r>
-              <a:rPr lang="en-US" sz="1400" dirty="0">
-                <a:solidFill>
-                  <a:srgbClr val="2B2B2B"/>
-                </a:solidFill>
-                <a:latin typeface="Calibri"/>
-              </a:rPr>
-              <a:t>Pre-migration checks and target creation</a:t>
-            </a:r>
-            <a:endParaRPr lang="en-US" sz="1350" dirty="0"/>
-          </a:p>
-          <a:p>
-            <a:pPr marL="285750" indent="-285750">
-              <a:spcAft>
-                <a:spcPts val="800"/>
-              </a:spcAft>
-              <a:buFont typeface="Arial" panose="020B0604020202020204" pitchFamily="34" charset="0"/>
-              <a:buChar char="•"/>
-            </a:pPr>
-            <a:r>
-              <a:rPr lang="en-US" sz="1400" dirty="0">
-                <a:solidFill>
-                  <a:srgbClr val="2B2B2B"/>
-                </a:solidFill>
-                <a:latin typeface="Calibri"/>
-              </a:rPr>
-              <a:t>Git, PR, and policy delta synchronization</a:t>
-            </a:r>
-          </a:p>
-          <a:p>
-            <a:pPr marL="285750" indent="-285750">
-              <a:spcAft>
-                <a:spcPts val="800"/>
-              </a:spcAft>
-              <a:buFont typeface="Arial" panose="020B0604020202020204" pitchFamily="34" charset="0"/>
-              <a:buChar char="•"/>
-            </a:pPr>
-            <a:r>
-              <a:rPr lang="en-US" sz="1400" dirty="0">
-                <a:solidFill>
-                  <a:srgbClr val="2B2B2B"/>
-                </a:solidFill>
-                <a:latin typeface="Calibri"/>
-              </a:rPr>
-              <a:t>Boards connection and pipeline rewiring</a:t>
-            </a:r>
-          </a:p>
-          <a:p>
-            <a:pPr marL="285750" indent="-285750">
-              <a:spcAft>
-                <a:spcPts val="800"/>
-              </a:spcAft>
-              <a:buFont typeface="Arial" panose="020B0604020202020204" pitchFamily="34" charset="0"/>
-              <a:buChar char="•"/>
-            </a:pPr>
-            <a:r>
-              <a:rPr lang="en-US" sz="1400" dirty="0">
-                <a:solidFill>
-                  <a:srgbClr val="2B2B2B"/>
-                </a:solidFill>
-                <a:latin typeface="Calibri"/>
-              </a:rPr>
-              <a:t>A scheduled read-only cutover window under 30 minutes</a:t>
-            </a:r>
-          </a:p>
-        </p:txBody>
-      </p:sp>
-      <p:sp>
-        <p:nvSpPr>
-          <p:cNvPr id="11" name="Shape 8"/>
-          <p:cNvSpPr/>
-          <p:nvPr/>
-        </p:nvSpPr>
-        <p:spPr>
-          <a:xfrm>
-            <a:off x="6263640" y="2527730"/>
-            <a:ext cx="5349240" cy="2912950"/>
-          </a:xfrm>
-          <a:prstGeom prst="roundRect">
-            <a:avLst>
-              <a:gd name="adj" fmla="val 4800"/>
-            </a:avLst>
-          </a:prstGeom>
-          <a:solidFill>
-            <a:srgbClr val="1F3D2C"/>
-          </a:solidFill>
-          <a:ln w="12700">
-            <a:solidFill>
-              <a:srgbClr val="DDD8CC"/>
-            </a:solidFill>
-            <a:prstDash val="solid"/>
-          </a:ln>
-          <a:effectLst>
-            <a:outerShdw blurRad="76200" dist="25400" dir="5400000" algn="bl" rotWithShape="0">
-              <a:srgbClr val="000000">
-                <a:alpha val="12000"/>
-              </a:srgbClr>
-            </a:outerShdw>
-          </a:effectLst>
-        </p:spPr>
-        <p:txBody>
-          <a:bodyPr/>
-          <a:lstStyle/>
-          <a:p>
-            <a:endParaRPr lang="en-US"/>
-          </a:p>
-        </p:txBody>
-      </p:sp>
-      <p:sp>
-        <p:nvSpPr>
-          <p:cNvPr id="12" name="Text 9"/>
-          <p:cNvSpPr txBox="1"/>
-          <p:nvPr/>
-        </p:nvSpPr>
-        <p:spPr>
-          <a:xfrm>
-            <a:off x="6492240" y="2749765"/>
-            <a:ext cx="4800600" cy="411480"/>
-          </a:xfrm>
-          <a:prstGeom prst="rect">
-            <a:avLst/>
-          </a:prstGeom>
-          <a:noFill/>
-          <a:ln/>
-        </p:spPr>
-        <p:txBody>
-          <a:bodyPr wrap="square" lIns="0" tIns="0" rIns="0" bIns="0" rtlCol="0" anchor="ctr"/>
-          <a:lstStyle/>
-          <a:p>
-            <a:pPr marL="0" indent="0">
-              <a:buNone/>
-            </a:pPr>
-            <a:r>
-              <a:rPr lang="en-US" sz="1700" b="1" dirty="0">
-                <a:solidFill>
-                  <a:srgbClr val="F5F5F0"/>
-                </a:solidFill>
-                <a:latin typeface="Cambria"/>
-              </a:rPr>
-              <a:t>Limits and What Remains</a:t>
-            </a:r>
-            <a:endParaRPr lang="en-US" sz="1700" dirty="0"/>
-          </a:p>
-        </p:txBody>
-      </p:sp>
-      <p:sp>
-        <p:nvSpPr>
-          <p:cNvPr id="13" name="Text 10"/>
-          <p:cNvSpPr txBox="1"/>
-          <p:nvPr/>
-        </p:nvSpPr>
-        <p:spPr>
-          <a:xfrm>
-            <a:off x="6537960" y="3161245"/>
-            <a:ext cx="4800600" cy="2233715"/>
-          </a:xfrm>
-          <a:prstGeom prst="rect">
-            <a:avLst/>
-          </a:prstGeom>
-          <a:noFill/>
-          <a:ln/>
-        </p:spPr>
-        <p:txBody>
-          <a:bodyPr wrap="square" lIns="0" tIns="0" rIns="0" bIns="0" rtlCol="0" anchor="t"/>
-          <a:lstStyle/>
-          <a:p>
-            <a:pPr marL="285750" indent="-285750">
-              <a:lnSpc>
-                <a:spcPct val="105000"/>
-              </a:lnSpc>
-              <a:spcAft>
-                <a:spcPts val="800"/>
-              </a:spcAft>
-              <a:buSzPct val="100000"/>
-              <a:buFont typeface="Arial" panose="020B0604020202020204" pitchFamily="34" charset="0"/>
-              <a:buChar char="•"/>
-            </a:pPr>
-            <a:r>
-              <a:rPr lang="en-US" sz="1400" dirty="0">
-                <a:solidFill>
-                  <a:srgbClr val="F5F5F0"/>
-                </a:solidFill>
-                <a:latin typeface="Calibri"/>
-              </a:rPr>
-              <a:t>Repositories only — 30 max (20 initial + 10 more)</a:t>
-            </a:r>
-            <a:endParaRPr lang="en-US" sz="1350" dirty="0"/>
-          </a:p>
-          <a:p>
-            <a:pPr marL="285750" indent="-285750">
-              <a:spcAft>
-                <a:spcPts val="800"/>
-              </a:spcAft>
-              <a:buFont typeface="Arial" panose="020B0604020202020204" pitchFamily="34" charset="0"/>
-              <a:buChar char="•"/>
-            </a:pPr>
-            <a:r>
-              <a:rPr lang="en-US" sz="1400" dirty="0">
-                <a:solidFill>
-                  <a:srgbClr val="F5F5F0"/>
-                </a:solidFill>
-                <a:latin typeface="Calibri"/>
-              </a:rPr>
-              <a:t>Cutover must finish within 21 days of starting</a:t>
-            </a:r>
-          </a:p>
-          <a:p>
-            <a:pPr marL="285750" indent="-285750">
-              <a:spcAft>
-                <a:spcPts val="800"/>
-              </a:spcAft>
-              <a:buFont typeface="Arial" panose="020B0604020202020204" pitchFamily="34" charset="0"/>
-              <a:buChar char="•"/>
-            </a:pPr>
-            <a:r>
-              <a:rPr lang="en-US" sz="1400" dirty="0">
-                <a:solidFill>
-                  <a:srgbClr val="F5F5F0"/>
-                </a:solidFill>
-                <a:latin typeface="Calibri"/>
-              </a:rPr>
-              <a:t>Access, permissions, and ruleset verification</a:t>
-            </a:r>
-          </a:p>
-          <a:p>
-            <a:pPr marL="285750" indent="-285750">
-              <a:spcAft>
-                <a:spcPts val="800"/>
-              </a:spcAft>
-              <a:buFont typeface="Arial" panose="020B0604020202020204" pitchFamily="34" charset="0"/>
-              <a:buChar char="•"/>
-            </a:pPr>
-            <a:r>
-              <a:rPr lang="en-US" sz="1400" dirty="0">
-                <a:solidFill>
-                  <a:srgbClr val="F5F5F0"/>
-                </a:solidFill>
-                <a:latin typeface="Calibri"/>
-              </a:rPr>
-              <a:t>Hardcoded URLs and other long-tail cleanup</a:t>
-            </a:r>
-          </a:p>
-          <a:p>
-            <a:pPr marL="285750" indent="-285750">
-              <a:spcAft>
-                <a:spcPts val="800"/>
-              </a:spcAft>
-              <a:buFont typeface="Arial" panose="020B0604020202020204" pitchFamily="34" charset="0"/>
-              <a:buChar char="•"/>
-            </a:pPr>
-            <a:r>
-              <a:rPr lang="en-US" sz="1400" dirty="0">
-                <a:solidFill>
-                  <a:srgbClr val="F5F5F0"/>
-                </a:solidFill>
-                <a:latin typeface="Calibri"/>
-              </a:rPr>
-              <a:t>Pipeline logic, work items, wikis, and other non-repository data</a:t>
-            </a:r>
-          </a:p>
-          <a:p>
-            <a:pPr marL="285750" indent="-285750">
-              <a:spcAft>
-                <a:spcPts val="800"/>
-              </a:spcAft>
-              <a:buFont typeface="Arial" panose="020B0604020202020204" pitchFamily="34" charset="0"/>
-              <a:buChar char="•"/>
-            </a:pPr>
-            <a:r>
-              <a:rPr lang="en-US" sz="1400" dirty="0">
-                <a:solidFill>
-                  <a:srgbClr val="F5F5F0"/>
-                </a:solidFill>
-                <a:latin typeface="Calibri"/>
-              </a:rPr>
-              <a:t>Post-cutover validation and decommissioning</a:t>
-            </a:r>
-          </a:p>
-        </p:txBody>
-      </p:sp>
-      <p:sp>
-        <p:nvSpPr>
-          <p:cNvPr id="16" name="Shape 3">
-            <a:extLst>
-              <a:ext uri="{FF2B5EF4-FFF2-40B4-BE49-F238E27FC236}">
-                <a16:creationId xmlns:a16="http://schemas.microsoft.com/office/drawing/2014/main" id="{2FACEC23-AB46-4DCB-0463-00C487B44704}"/>
-              </a:ext>
-            </a:extLst>
-          </p:cNvPr>
-          <p:cNvSpPr/>
-          <p:nvPr/>
-        </p:nvSpPr>
-        <p:spPr>
-          <a:xfrm>
-            <a:off x="548640" y="5628132"/>
-            <a:ext cx="11064240" cy="960120"/>
-          </a:xfrm>
-          <a:prstGeom prst="roundRect">
-            <a:avLst>
-              <a:gd name="adj" fmla="val 12632"/>
-            </a:avLst>
-          </a:prstGeom>
-          <a:solidFill>
-            <a:srgbClr val="1F3D2C"/>
-          </a:solidFill>
-          <a:ln w="12700">
-            <a:noFill/>
-            <a:prstDash val="solid"/>
-          </a:ln>
-          <a:effectLst>
-            <a:outerShdw blurRad="76200" dist="25400" dir="5400000" algn="bl" rotWithShape="0">
-              <a:srgbClr val="000000">
-                <a:alpha val="12000"/>
-              </a:srgbClr>
-            </a:outerShdw>
-          </a:effectLst>
-        </p:spPr>
-        <p:txBody>
-          <a:bodyPr/>
-          <a:lstStyle/>
-          <a:p>
-            <a:endParaRPr lang="en-US"/>
-          </a:p>
-        </p:txBody>
-      </p:sp>
-      <p:sp>
-        <p:nvSpPr>
-          <p:cNvPr id="18" name="Text 4">
-            <a:extLst>
-              <a:ext uri="{FF2B5EF4-FFF2-40B4-BE49-F238E27FC236}">
-                <a16:creationId xmlns:a16="http://schemas.microsoft.com/office/drawing/2014/main" id="{DA49AD78-DE17-95B0-86BA-23572C08058F}"/>
-              </a:ext>
-            </a:extLst>
-          </p:cNvPr>
-          <p:cNvSpPr txBox="1"/>
-          <p:nvPr/>
-        </p:nvSpPr>
-        <p:spPr>
-          <a:xfrm>
-            <a:off x="563880" y="5628132"/>
-            <a:ext cx="11064240" cy="960120"/>
-          </a:xfrm>
-          <a:prstGeom prst="rect">
-            <a:avLst/>
-          </a:prstGeom>
-          <a:noFill/>
-          <a:ln/>
-        </p:spPr>
-        <p:txBody>
-          <a:bodyPr wrap="square" lIns="256032" tIns="54864" rIns="256032" bIns="54864" rtlCol="0" anchor="ctr"/>
-          <a:lstStyle/>
-          <a:p>
-            <a:pPr marL="0" indent="0" algn="l">
-              <a:buNone/>
-            </a:pPr>
-            <a:r>
-              <a:rPr sz="1250" b="1" spc="120">
-                <a:solidFill>
-                  <a:srgbClr val="E0B85C"/>
-                </a:solidFill>
-                <a:latin typeface="Calibri"/>
-              </a:rPr>
-              <a:t>TAKEAWAY </a:t>
-            </a:r>
-            <a:r>
-              <a:rPr sz="1500">
-                <a:solidFill>
-                  <a:srgbClr val="F5F5F0"/>
-                </a:solidFill>
-                <a:latin typeface="Calibri"/>
-              </a:rPr>
-              <a:t>ELM changes the synchronization and cutover experience — not the boundaries of what must be migrated and validated.</a:t>
-            </a:r>
-          </a:p>
-        </p:txBody>
-      </p:sp>
-      <p:sp>
-        <p:nvSpPr>
-          <p:cNvPr id="19" name="Slide Number Placeholder"/>
-          <p:cNvSpPr>
-            <a:spLocks noGrp="1"/>
-          </p:cNvSpPr>
-          <p:nvPr>
-            <p:ph type="sldNum" sz="quarter" idx="10"/>
-          </p:nvPr>
-        </p:nvSpPr>
-        <p:spPr/>
-        <p:txBody>
-          <a:bodyPr/>
-          <a:lstStyle/>
-          <a:p>
-            <a:fld id="{BCB632DE-6AD4-40F1-944C-28C0E9BF62DC}" type="slidenum">
-              <a:rPr lang="en-US"/>
-              <a:t>22</a:t>
-            </a:fld>
-            <a:endParaRPr lang="en-US"/>
-          </a:p>
-        </p:txBody>
-      </p:sp>
-    </p:spTree>
-  </p:cSld>
-  <p:clrMapOvr>
-    <a:masterClrMapping/>
-  </p:clrMapOvr>
-</p:sld>
-</file>
-
-<file path=ppt/slides/slide23.xml><?xml version="1.0" encoding="utf-8"?>
-<p:sld xmlns:a="http://schemas.openxmlformats.org/drawingml/2006/main" xmlns:r="http://schemas.openxmlformats.org/officeDocument/2006/relationships" xmlns:p="http://schemas.openxmlformats.org/presentationml/2006/main">
-  <p:cSld name="Slide 25">
-    <p:bg>
-      <p:bgPr>
-        <a:solidFill>
-          <a:srgbClr val="FFFFFF"/>
-        </a:solidFill>
-        <a:effectLst/>
-      </p:bgPr>
-    </p:bg>
-    <p:spTree>
-      <p:nvGrpSpPr>
-        <p:cNvPr id="1" name=""/>
-        <p:cNvGrpSpPr/>
-        <p:nvPr/>
-      </p:nvGrpSpPr>
-      <p:grpSpPr>
-        <a:xfrm>
-          <a:off x="0" y="0"/>
-          <a:ext cx="0" cy="0"/>
-          <a:chOff x="0" y="0"/>
-          <a:chExt cx="0" cy="0"/>
-        </a:xfrm>
-      </p:grpSpPr>
-      <p:sp>
-        <p:nvSpPr>
-          <p:cNvPr id="2" name="Shape 0"/>
-          <p:cNvSpPr/>
-          <p:nvPr/>
-        </p:nvSpPr>
-        <p:spPr>
-          <a:xfrm>
-            <a:off x="548640" y="457200"/>
-            <a:ext cx="566928" cy="566928"/>
-          </a:xfrm>
-          <a:prstGeom prst="ellipse">
-            <a:avLst/>
-          </a:prstGeom>
-          <a:solidFill>
-            <a:srgbClr val="C1440E"/>
-          </a:solidFill>
-          <a:ln/>
-        </p:spPr>
-        <p:txBody>
-          <a:bodyPr/>
-          <a:lstStyle/>
-          <a:p>
-            <a:endParaRPr lang="en-US"/>
-          </a:p>
-        </p:txBody>
-      </p:sp>
-      <p:pic>
-        <p:nvPicPr>
-          <p:cNvPr id="3" name="Image 0" descr="/home/claude/pptx-build/assets/icons/FaListOl-FFFFFF-200.png"/>
-          <p:cNvPicPr>
-            <a:picLocks noChangeAspect="1"/>
-          </p:cNvPicPr>
-          <p:nvPr/>
-        </p:nvPicPr>
-        <p:blipFill>
-          <a:blip r:embed="rId3"/>
-          <a:stretch>
-            <a:fillRect/>
-          </a:stretch>
-        </p:blipFill>
-        <p:spPr>
-          <a:xfrm>
-            <a:off x="685800" y="594360"/>
-            <a:ext cx="292608" cy="292608"/>
-          </a:xfrm>
-          <a:prstGeom prst="rect">
-            <a:avLst/>
-          </a:prstGeom>
-        </p:spPr>
-      </p:pic>
-      <p:sp>
-        <p:nvSpPr>
-          <p:cNvPr id="4" name="Text 1"/>
-          <p:cNvSpPr txBox="1"/>
-          <p:nvPr/>
-        </p:nvSpPr>
-        <p:spPr>
-          <a:xfrm>
-            <a:off x="1234440" y="420624"/>
-            <a:ext cx="9875520" cy="320040"/>
-          </a:xfrm>
-          <a:prstGeom prst="rect">
-            <a:avLst/>
-          </a:prstGeom>
-          <a:noFill/>
-          <a:ln/>
-        </p:spPr>
-        <p:txBody>
-          <a:bodyPr wrap="square" lIns="0" tIns="0" rIns="0" bIns="0" rtlCol="0" anchor="ctr"/>
-          <a:lstStyle/>
-          <a:p>
-            <a:pPr marL="0" indent="0">
-              <a:buNone/>
-            </a:pPr>
-            <a:r>
-              <a:rPr lang="en-US" sz="1500" b="1" kern="0" spc="200" dirty="0">
-                <a:solidFill>
-                  <a:srgbClr val="C1440E"/>
-                </a:solidFill>
-                <a:latin typeface="Calibri" pitchFamily="34" charset="0"/>
-                <a:ea typeface="Calibri" pitchFamily="34" charset="-122"/>
-                <a:cs typeface="Calibri" pitchFamily="34" charset="-120"/>
-              </a:rPr>
-              <a:t>CROSSING THE RIVER</a:t>
-            </a:r>
-            <a:endParaRPr lang="en-US" sz="1500" dirty="0"/>
-          </a:p>
-        </p:txBody>
-      </p:sp>
-      <p:sp>
-        <p:nvSpPr>
-          <p:cNvPr id="5" name="Text 2"/>
-          <p:cNvSpPr txBox="1"/>
-          <p:nvPr/>
-        </p:nvSpPr>
-        <p:spPr>
-          <a:xfrm>
-            <a:off x="1234440" y="749808"/>
-            <a:ext cx="10515600" cy="868680"/>
-          </a:xfrm>
-          <a:prstGeom prst="rect">
-            <a:avLst/>
-          </a:prstGeom>
-          <a:noFill/>
-          <a:ln/>
-        </p:spPr>
-        <p:txBody>
-          <a:bodyPr wrap="square" lIns="0" tIns="0" rIns="0" bIns="0" rtlCol="0" anchor="t"/>
-          <a:lstStyle/>
-          <a:p>
-            <a:pPr marL="0" indent="0">
-              <a:buNone/>
-            </a:pPr>
-            <a:r>
-              <a:rPr lang="en-US" sz="3200" b="1">
-                <a:solidFill>
-                  <a:srgbClr val="1F3D2C"/>
-                </a:solidFill>
-                <a:latin typeface="Cambria"/>
-              </a:rPr>
-              <a:t>Repository Plane — Decide Before the First Migration</a:t>
-            </a:r>
-            <a:endParaRPr lang="en-US" sz="3200" dirty="0"/>
-          </a:p>
-        </p:txBody>
-      </p:sp>
-      <p:sp>
-        <p:nvSpPr>
-          <p:cNvPr id="6" name="Shape 3"/>
-          <p:cNvSpPr/>
-          <p:nvPr/>
-        </p:nvSpPr>
-        <p:spPr>
-          <a:xfrm>
-            <a:off x="548640" y="4556259"/>
-            <a:ext cx="11064240" cy="1358289"/>
-          </a:xfrm>
-          <a:prstGeom prst="roundRect">
-            <a:avLst>
-              <a:gd name="adj" fmla="val 4138"/>
-            </a:avLst>
-          </a:prstGeom>
-          <a:solidFill>
-            <a:srgbClr val="F7F6F2"/>
-          </a:solidFill>
-          <a:ln w="12700">
-            <a:solidFill>
-              <a:srgbClr val="DDD8CC"/>
-            </a:solidFill>
-            <a:prstDash val="solid"/>
-          </a:ln>
-          <a:effectLst>
-            <a:outerShdw blurRad="76200" dist="25400" dir="5400000" algn="bl" rotWithShape="0">
-              <a:srgbClr val="000000">
-                <a:alpha val="12000"/>
-              </a:srgbClr>
-            </a:outerShdw>
-          </a:effectLst>
-        </p:spPr>
-        <p:txBody>
-          <a:bodyPr/>
-          <a:lstStyle/>
-          <a:p>
-            <a:endParaRPr lang="en-US"/>
-          </a:p>
-        </p:txBody>
-      </p:sp>
-      <p:sp>
-        <p:nvSpPr>
-          <p:cNvPr id="7" name="Text 4"/>
-          <p:cNvSpPr txBox="1"/>
-          <p:nvPr/>
-        </p:nvSpPr>
-        <p:spPr>
-          <a:xfrm>
-            <a:off x="822960" y="4674899"/>
-            <a:ext cx="10332720" cy="1124101"/>
-          </a:xfrm>
-          <a:prstGeom prst="rect">
-            <a:avLst/>
-          </a:prstGeom>
-          <a:noFill/>
-          <a:ln/>
-        </p:spPr>
-        <p:txBody>
-          <a:bodyPr wrap="square" lIns="0" tIns="0" rIns="0" bIns="0" rtlCol="0" anchor="ctr"/>
-          <a:lstStyle/>
-          <a:p>
-            <a:pPr marL="0" indent="0">
-              <a:lnSpc>
-                <a:spcPct val="130000"/>
-              </a:lnSpc>
-              <a:buNone/>
-            </a:pPr>
-            <a:r>
-              <a:rPr lang="en-US" sz="1850" b="0" dirty="0">
-                <a:solidFill>
-                  <a:srgbClr val="2B2B2B"/>
-                </a:solidFill>
-                <a:latin typeface="Calibri"/>
-              </a:rPr>
-              <a:t>Install the Azure Pipelines App in your GitHub Org before migrating repositories. That enables migration orchestration to reconnect pipeline references; it does not convert the pipeline logic itself.</a:t>
-            </a:r>
-            <a:endParaRPr lang="en-US" sz="1900" dirty="0"/>
-          </a:p>
-        </p:txBody>
-      </p:sp>
-      <p:sp>
-        <p:nvSpPr>
-          <p:cNvPr id="8" name="Shape 5"/>
-          <p:cNvSpPr/>
-          <p:nvPr/>
-        </p:nvSpPr>
-        <p:spPr>
-          <a:xfrm>
-            <a:off x="548640" y="1549966"/>
-            <a:ext cx="11064240" cy="2638449"/>
-          </a:xfrm>
-          <a:prstGeom prst="roundRect">
-            <a:avLst>
-              <a:gd name="adj" fmla="val 7742"/>
-            </a:avLst>
-          </a:prstGeom>
-          <a:solidFill>
-            <a:srgbClr val="1F3D2C"/>
-          </a:solidFill>
-          <a:ln w="12700">
-            <a:solidFill>
-              <a:srgbClr val="DDD8CC"/>
-            </a:solidFill>
-            <a:prstDash val="solid"/>
-          </a:ln>
-          <a:effectLst>
-            <a:outerShdw blurRad="76200" dist="25400" dir="5400000" algn="bl" rotWithShape="0">
-              <a:srgbClr val="000000">
-                <a:alpha val="12000"/>
-              </a:srgbClr>
-            </a:outerShdw>
-          </a:effectLst>
-        </p:spPr>
-        <p:txBody>
-          <a:bodyPr/>
-          <a:lstStyle/>
-          <a:p>
-            <a:endParaRPr lang="en-US"/>
-          </a:p>
-        </p:txBody>
-      </p:sp>
-      <p:sp>
-        <p:nvSpPr>
-          <p:cNvPr id="9" name="Text 6"/>
-          <p:cNvSpPr txBox="1"/>
-          <p:nvPr/>
-        </p:nvSpPr>
-        <p:spPr>
-          <a:xfrm>
-            <a:off x="822960" y="1775672"/>
-            <a:ext cx="10515600" cy="2257295"/>
-          </a:xfrm>
-          <a:prstGeom prst="rect">
-            <a:avLst/>
-          </a:prstGeom>
-          <a:noFill/>
-          <a:ln/>
-        </p:spPr>
-        <p:txBody>
-          <a:bodyPr wrap="square" lIns="0" tIns="0" rIns="0" bIns="0" rtlCol="0" anchor="ctr"/>
-          <a:lstStyle/>
-          <a:p>
-            <a:pPr marL="0" indent="0">
-              <a:lnSpc>
-                <a:spcPct val="115000"/>
-              </a:lnSpc>
-              <a:buNone/>
-            </a:pPr>
-            <a:r>
-              <a:rPr lang="en-US" sz="1600" b="0" dirty="0">
-                <a:solidFill>
-                  <a:srgbClr val="F5F5F0"/>
-                </a:solidFill>
-                <a:latin typeface="Calibri"/>
-              </a:rPr>
-              <a:t>Before the first run: </a:t>
-            </a:r>
-          </a:p>
-          <a:p>
-            <a:pPr marL="285750" indent="-285750">
-              <a:lnSpc>
-                <a:spcPct val="115000"/>
-              </a:lnSpc>
-              <a:buFont typeface="Arial" panose="020B0604020202020204" pitchFamily="34" charset="0"/>
-              <a:buChar char="•"/>
-            </a:pPr>
-            <a:r>
-              <a:rPr lang="en-US" sz="1600" b="0" dirty="0">
-                <a:solidFill>
-                  <a:srgbClr val="F5F5F0"/>
-                </a:solidFill>
-                <a:latin typeface="Calibri"/>
-              </a:rPr>
-              <a:t>target enterprise and organization model  </a:t>
-            </a:r>
-          </a:p>
-          <a:p>
-            <a:pPr marL="285750" indent="-285750">
-              <a:lnSpc>
-                <a:spcPct val="115000"/>
-              </a:lnSpc>
-              <a:buFont typeface="Arial" panose="020B0604020202020204" pitchFamily="34" charset="0"/>
-              <a:buChar char="•"/>
-            </a:pPr>
-            <a:r>
-              <a:rPr lang="en-US" sz="1600" b="0" dirty="0">
-                <a:solidFill>
-                  <a:srgbClr val="F5F5F0"/>
-                </a:solidFill>
-                <a:latin typeface="Calibri"/>
-              </a:rPr>
-              <a:t>authentication and identity mapping  </a:t>
-            </a:r>
-          </a:p>
-          <a:p>
-            <a:pPr marL="285750" indent="-285750">
-              <a:lnSpc>
-                <a:spcPct val="115000"/>
-              </a:lnSpc>
-              <a:buFont typeface="Arial" panose="020B0604020202020204" pitchFamily="34" charset="0"/>
-              <a:buChar char="•"/>
-            </a:pPr>
-            <a:r>
-              <a:rPr lang="en-US" sz="1600" b="0" dirty="0">
-                <a:solidFill>
-                  <a:srgbClr val="F5F5F0"/>
-                </a:solidFill>
-                <a:latin typeface="Calibri"/>
-              </a:rPr>
-              <a:t>team and visibility policy  </a:t>
-            </a:r>
-          </a:p>
-          <a:p>
-            <a:pPr marL="285750" indent="-285750">
-              <a:lnSpc>
-                <a:spcPct val="115000"/>
-              </a:lnSpc>
-              <a:buFont typeface="Arial" panose="020B0604020202020204" pitchFamily="34" charset="0"/>
-              <a:buChar char="•"/>
-            </a:pPr>
-            <a:r>
-              <a:rPr lang="en-US" sz="1600" b="0" dirty="0">
-                <a:solidFill>
-                  <a:srgbClr val="F5F5F0"/>
-                </a:solidFill>
-                <a:latin typeface="Calibri"/>
-              </a:rPr>
-              <a:t>Boards/Pipelines integration  </a:t>
-            </a:r>
-          </a:p>
-          <a:p>
-            <a:pPr marL="285750" indent="-285750">
-              <a:lnSpc>
-                <a:spcPct val="115000"/>
-              </a:lnSpc>
-              <a:buFont typeface="Arial" panose="020B0604020202020204" pitchFamily="34" charset="0"/>
-              <a:buChar char="•"/>
-            </a:pPr>
-            <a:r>
-              <a:rPr lang="en-US" sz="1600" b="0" dirty="0">
-                <a:solidFill>
-                  <a:srgbClr val="F5F5F0"/>
-                </a:solidFill>
-                <a:latin typeface="Calibri"/>
-              </a:rPr>
-              <a:t>freeze or change-reconciliation approach  </a:t>
-            </a:r>
-          </a:p>
-          <a:p>
-            <a:pPr marL="285750" indent="-285750">
-              <a:lnSpc>
-                <a:spcPct val="115000"/>
-              </a:lnSpc>
-              <a:buFont typeface="Arial" panose="020B0604020202020204" pitchFamily="34" charset="0"/>
-              <a:buChar char="•"/>
-            </a:pPr>
-            <a:r>
-              <a:rPr lang="en-US" sz="1600" b="0" dirty="0">
-                <a:solidFill>
-                  <a:srgbClr val="F5F5F0"/>
-                </a:solidFill>
-                <a:latin typeface="Calibri"/>
-              </a:rPr>
-              <a:t>owner for migration failures</a:t>
-            </a:r>
-            <a:endParaRPr lang="en-US" sz="1600" dirty="0"/>
-          </a:p>
-        </p:txBody>
-      </p:sp>
-      <p:sp>
-        <p:nvSpPr>
-          <p:cNvPr id="10" name="Slide Number Placeholder"/>
-          <p:cNvSpPr>
-            <a:spLocks noGrp="1"/>
-          </p:cNvSpPr>
-          <p:nvPr>
-            <p:ph type="sldNum" sz="quarter" idx="10"/>
-          </p:nvPr>
-        </p:nvSpPr>
-        <p:spPr/>
-        <p:txBody>
-          <a:bodyPr/>
-          <a:lstStyle/>
-          <a:p>
-            <a:fld id="{BCB632DE-6AD4-40F1-944C-28C0E9BF62DC}" type="slidenum">
-              <a:rPr lang="en-US"/>
-              <a:t>23</a:t>
-            </a:fld>
-            <a:endParaRPr lang="en-US"/>
-          </a:p>
-        </p:txBody>
-      </p:sp>
-    </p:spTree>
-  </p:cSld>
-  <p:clrMapOvr>
-    <a:masterClrMapping/>
-  </p:clrMapOvr>
-</p:sld>
-</file>
-
-<file path=ppt/slides/slide24.xml><?xml version="1.0" encoding="utf-8"?>
-<p:sld xmlns:a="http://schemas.openxmlformats.org/drawingml/2006/main" xmlns:r="http://schemas.openxmlformats.org/officeDocument/2006/relationships" xmlns:p="http://schemas.openxmlformats.org/presentationml/2006/main">
-  <p:cSld name="Slide 26">
-    <p:bg>
-      <p:bgPr>
-        <a:solidFill>
-          <a:srgbClr val="FFFFFF"/>
-        </a:solidFill>
-        <a:effectLst/>
-      </p:bgPr>
-    </p:bg>
-    <p:spTree>
-      <p:nvGrpSpPr>
-        <p:cNvPr id="1" name=""/>
-        <p:cNvGrpSpPr/>
-        <p:nvPr/>
-      </p:nvGrpSpPr>
-      <p:grpSpPr>
-        <a:xfrm>
-          <a:off x="0" y="0"/>
-          <a:ext cx="0" cy="0"/>
-          <a:chOff x="0" y="0"/>
-          <a:chExt cx="0" cy="0"/>
-        </a:xfrm>
-      </p:grpSpPr>
-      <p:sp>
-        <p:nvSpPr>
-          <p:cNvPr id="2" name="Shape 0"/>
-          <p:cNvSpPr/>
-          <p:nvPr/>
-        </p:nvSpPr>
-        <p:spPr>
-          <a:xfrm>
-            <a:off x="548640" y="457200"/>
-            <a:ext cx="566928" cy="566928"/>
-          </a:xfrm>
-          <a:prstGeom prst="ellipse">
-            <a:avLst/>
-          </a:prstGeom>
-          <a:solidFill>
-            <a:srgbClr val="C1440E"/>
-          </a:solidFill>
-          <a:ln/>
-        </p:spPr>
-        <p:txBody>
-          <a:bodyPr/>
-          <a:lstStyle/>
-          <a:p>
-            <a:endParaRPr lang="en-US"/>
-          </a:p>
-        </p:txBody>
-      </p:sp>
-      <p:pic>
-        <p:nvPicPr>
-          <p:cNvPr id="3" name="Image 0" descr="/home/claude/pptx-build/assets/icons/FaClipboardCheck-FFFFFF-200.png"/>
-          <p:cNvPicPr>
-            <a:picLocks noChangeAspect="1"/>
-          </p:cNvPicPr>
-          <p:nvPr/>
-        </p:nvPicPr>
-        <p:blipFill>
-          <a:blip r:embed="rId3"/>
-          <a:stretch>
-            <a:fillRect/>
-          </a:stretch>
-        </p:blipFill>
-        <p:spPr>
-          <a:xfrm>
-            <a:off x="685800" y="594360"/>
-            <a:ext cx="292608" cy="292608"/>
-          </a:xfrm>
-          <a:prstGeom prst="rect">
-            <a:avLst/>
-          </a:prstGeom>
-        </p:spPr>
-      </p:pic>
-      <p:sp>
-        <p:nvSpPr>
-          <p:cNvPr id="4" name="Text 1"/>
-          <p:cNvSpPr txBox="1"/>
-          <p:nvPr/>
-        </p:nvSpPr>
-        <p:spPr>
-          <a:xfrm>
-            <a:off x="1234440" y="420624"/>
-            <a:ext cx="9875520" cy="320040"/>
-          </a:xfrm>
-          <a:prstGeom prst="rect">
-            <a:avLst/>
-          </a:prstGeom>
-          <a:noFill/>
-          <a:ln/>
-        </p:spPr>
-        <p:txBody>
-          <a:bodyPr wrap="square" lIns="0" tIns="0" rIns="0" bIns="0" rtlCol="0" anchor="ctr"/>
-          <a:lstStyle/>
-          <a:p>
-            <a:pPr marL="0" indent="0">
-              <a:buNone/>
-            </a:pPr>
-            <a:r>
-              <a:rPr lang="en-US" sz="1500" b="1" kern="0" spc="200" dirty="0">
-                <a:solidFill>
-                  <a:srgbClr val="C1440E"/>
-                </a:solidFill>
-                <a:latin typeface="Calibri" pitchFamily="34" charset="0"/>
-                <a:ea typeface="Calibri" pitchFamily="34" charset="-122"/>
-                <a:cs typeface="Calibri" pitchFamily="34" charset="-120"/>
-              </a:rPr>
-              <a:t>CROSSING THE RIVER</a:t>
-            </a:r>
-            <a:endParaRPr lang="en-US" sz="1500" dirty="0"/>
-          </a:p>
-        </p:txBody>
-      </p:sp>
-      <p:sp>
-        <p:nvSpPr>
-          <p:cNvPr id="5" name="Text 2"/>
-          <p:cNvSpPr txBox="1"/>
-          <p:nvPr/>
-        </p:nvSpPr>
-        <p:spPr>
-          <a:xfrm>
-            <a:off x="1234440" y="749808"/>
-            <a:ext cx="10515600" cy="594360"/>
-          </a:xfrm>
-          <a:prstGeom prst="rect">
-            <a:avLst/>
-          </a:prstGeom>
-          <a:noFill/>
-          <a:ln/>
-        </p:spPr>
-        <p:txBody>
-          <a:bodyPr wrap="square" lIns="0" tIns="0" rIns="0" bIns="0" rtlCol="0" anchor="ctr"/>
-          <a:lstStyle/>
-          <a:p>
-            <a:pPr marL="0" indent="0">
-              <a:buNone/>
-            </a:pPr>
-            <a:r>
-              <a:rPr lang="en-US" sz="3200" b="1" dirty="0">
-                <a:solidFill>
-                  <a:srgbClr val="1F3D2C"/>
-                </a:solidFill>
-                <a:latin typeface="Cambria"/>
-              </a:rPr>
-              <a:t>Automation Plane — GitHub Actions Importer</a:t>
-            </a:r>
-            <a:endParaRPr lang="en-US" sz="3200" dirty="0"/>
-          </a:p>
-        </p:txBody>
-      </p:sp>
-      <p:sp>
-        <p:nvSpPr>
-          <p:cNvPr id="6" name="Shape 3"/>
-          <p:cNvSpPr/>
-          <p:nvPr/>
-        </p:nvSpPr>
-        <p:spPr>
-          <a:xfrm>
-            <a:off x="548640" y="1645920"/>
-            <a:ext cx="5349240" cy="3429000"/>
-          </a:xfrm>
-          <a:prstGeom prst="roundRect">
-            <a:avLst>
-              <a:gd name="adj" fmla="val 3200"/>
-            </a:avLst>
-          </a:prstGeom>
-          <a:solidFill>
-            <a:srgbClr val="F7F6F2"/>
-          </a:solidFill>
-          <a:ln w="12700">
-            <a:solidFill>
-              <a:srgbClr val="DDD8CC"/>
-            </a:solidFill>
-            <a:prstDash val="solid"/>
-          </a:ln>
-          <a:effectLst>
-            <a:outerShdw blurRad="76200" dist="25400" dir="5400000" algn="bl" rotWithShape="0">
-              <a:srgbClr val="000000">
-                <a:alpha val="12000"/>
-              </a:srgbClr>
-            </a:outerShdw>
-          </a:effectLst>
-        </p:spPr>
-        <p:txBody>
-          <a:bodyPr/>
-          <a:lstStyle/>
-          <a:p>
-            <a:endParaRPr lang="en-US"/>
-          </a:p>
-        </p:txBody>
-      </p:sp>
-      <p:sp>
-        <p:nvSpPr>
-          <p:cNvPr id="7" name="Text 4"/>
-          <p:cNvSpPr txBox="1"/>
-          <p:nvPr/>
-        </p:nvSpPr>
-        <p:spPr>
-          <a:xfrm>
-            <a:off x="822960" y="1828800"/>
-            <a:ext cx="4800600" cy="457200"/>
-          </a:xfrm>
-          <a:prstGeom prst="rect">
-            <a:avLst/>
-          </a:prstGeom>
-          <a:noFill/>
-          <a:ln/>
-        </p:spPr>
-        <p:txBody>
-          <a:bodyPr wrap="square" lIns="0" tIns="0" rIns="0" bIns="0" rtlCol="0" anchor="ctr"/>
-          <a:lstStyle/>
-          <a:p>
-            <a:pPr marL="0" indent="0">
-              <a:buNone/>
-            </a:pPr>
-            <a:r>
-              <a:rPr lang="en-US" sz="1900" b="1">
-                <a:solidFill>
-                  <a:srgbClr val="1F3D2C"/>
-                </a:solidFill>
-                <a:latin typeface="Cambria"/>
-              </a:rPr>
-              <a:t>What It Does</a:t>
-            </a:r>
-            <a:endParaRPr lang="en-US" sz="1900" dirty="0"/>
-          </a:p>
-        </p:txBody>
-      </p:sp>
-      <p:sp>
-        <p:nvSpPr>
-          <p:cNvPr id="8" name="Text 5"/>
-          <p:cNvSpPr txBox="1"/>
-          <p:nvPr/>
-        </p:nvSpPr>
-        <p:spPr>
-          <a:xfrm>
-            <a:off x="822960" y="2331720"/>
-            <a:ext cx="4800600" cy="2651760"/>
-          </a:xfrm>
-          <a:prstGeom prst="rect">
-            <a:avLst/>
-          </a:prstGeom>
-          <a:noFill/>
-          <a:ln/>
-        </p:spPr>
-        <p:txBody>
-          <a:bodyPr wrap="square" lIns="0" tIns="0" rIns="0" bIns="0" rtlCol="0" anchor="ctr"/>
-          <a:lstStyle/>
-          <a:p>
-            <a:pPr marL="285750" indent="-285750">
-              <a:lnSpc>
-                <a:spcPct val="100000"/>
-              </a:lnSpc>
-              <a:spcAft>
-                <a:spcPts val="800"/>
-              </a:spcAft>
-              <a:buSzPct val="100000"/>
-              <a:buFont typeface="Arial" panose="020B0604020202020204" pitchFamily="34" charset="0"/>
-              <a:buChar char="•"/>
-            </a:pPr>
-            <a:r>
-              <a:rPr lang="en-US" sz="1450" dirty="0">
-                <a:solidFill>
-                  <a:srgbClr val="2B2B2B"/>
-                </a:solidFill>
-                <a:cs typeface="Cascadia Code" panose="020B0609020000020004" pitchFamily="49" charset="0"/>
-              </a:rPr>
-              <a:t>GitHub CLI extension to migrate CI/CD pipelines</a:t>
-            </a:r>
-          </a:p>
-          <a:p>
-            <a:pPr marL="285750" indent="-285750">
-              <a:lnSpc>
-                <a:spcPct val="110000"/>
-              </a:lnSpc>
-              <a:spcAft>
-                <a:spcPts val="800"/>
-              </a:spcAft>
-              <a:buSzPct val="100000"/>
-              <a:buFont typeface="Arial" panose="020B0604020202020204" pitchFamily="34" charset="0"/>
-              <a:buChar char="•"/>
-            </a:pPr>
-            <a:r>
-              <a:rPr lang="en-US" sz="1450" dirty="0">
-                <a:solidFill>
-                  <a:srgbClr val="2B2B2B"/>
-                </a:solidFill>
-                <a:latin typeface="Cascadia Code" panose="020B0609020000020004" pitchFamily="49" charset="0"/>
-                <a:cs typeface="Cascadia Code" panose="020B0609020000020004" pitchFamily="49" charset="0"/>
-              </a:rPr>
-              <a:t>audit</a:t>
-            </a:r>
-            <a:r>
-              <a:rPr lang="en-US" sz="1450" dirty="0">
-                <a:solidFill>
-                  <a:srgbClr val="2B2B2B"/>
-                </a:solidFill>
-                <a:latin typeface="Calibri"/>
-              </a:rPr>
-              <a:t> buckets pipelines: successful, partially successful, unsupported, failed</a:t>
-            </a:r>
-            <a:endParaRPr lang="en-US" sz="1450" dirty="0"/>
-          </a:p>
-          <a:p>
-            <a:pPr marL="285750" indent="-285750">
-              <a:spcAft>
-                <a:spcPts val="800"/>
-              </a:spcAft>
-              <a:buFont typeface="Arial" panose="020B0604020202020204" pitchFamily="34" charset="0"/>
-              <a:buChar char="•"/>
-            </a:pPr>
-            <a:r>
-              <a:rPr lang="en-US" sz="1450" dirty="0">
-                <a:solidFill>
-                  <a:srgbClr val="2B2B2B"/>
-                </a:solidFill>
-                <a:latin typeface="Cascadia Code" panose="020B0609020000020004" pitchFamily="49" charset="0"/>
-                <a:cs typeface="Cascadia Code" panose="020B0609020000020004" pitchFamily="49" charset="0"/>
-              </a:rPr>
-              <a:t>dry-run</a:t>
-            </a:r>
-            <a:r>
-              <a:rPr lang="en-US" sz="1450" dirty="0">
-                <a:solidFill>
-                  <a:srgbClr val="2B2B2B"/>
-                </a:solidFill>
-                <a:latin typeface="Calibri"/>
-              </a:rPr>
-              <a:t> shows the candidate workflow before commit</a:t>
-            </a:r>
-          </a:p>
-          <a:p>
-            <a:pPr marL="285750" indent="-285750">
-              <a:spcAft>
-                <a:spcPts val="800"/>
-              </a:spcAft>
-              <a:buFont typeface="Arial" panose="020B0604020202020204" pitchFamily="34" charset="0"/>
-              <a:buChar char="•"/>
-            </a:pPr>
-            <a:r>
-              <a:rPr lang="en-US" sz="1450" dirty="0">
-                <a:solidFill>
-                  <a:srgbClr val="2B2B2B"/>
-                </a:solidFill>
-                <a:latin typeface="Calibri"/>
-              </a:rPr>
-              <a:t>The conversion handles supported constructs</a:t>
-            </a:r>
-          </a:p>
-        </p:txBody>
-      </p:sp>
-      <p:sp>
-        <p:nvSpPr>
-          <p:cNvPr id="9" name="Shape 6"/>
-          <p:cNvSpPr/>
-          <p:nvPr/>
-        </p:nvSpPr>
-        <p:spPr>
-          <a:xfrm>
-            <a:off x="6263640" y="1645920"/>
-            <a:ext cx="5349240" cy="3429000"/>
-          </a:xfrm>
-          <a:prstGeom prst="roundRect">
-            <a:avLst>
-              <a:gd name="adj" fmla="val 3200"/>
-            </a:avLst>
-          </a:prstGeom>
-          <a:solidFill>
-            <a:srgbClr val="1F3D2C"/>
-          </a:solidFill>
-          <a:ln w="12700">
-            <a:solidFill>
-              <a:srgbClr val="DDD8CC"/>
-            </a:solidFill>
-            <a:prstDash val="solid"/>
-          </a:ln>
-          <a:effectLst>
-            <a:outerShdw blurRad="76200" dist="25400" dir="5400000" algn="bl" rotWithShape="0">
-              <a:srgbClr val="000000">
-                <a:alpha val="12000"/>
-              </a:srgbClr>
-            </a:outerShdw>
-          </a:effectLst>
-        </p:spPr>
-        <p:txBody>
-          <a:bodyPr/>
-          <a:lstStyle/>
-          <a:p>
-            <a:endParaRPr lang="en-US"/>
-          </a:p>
-        </p:txBody>
-      </p:sp>
-      <p:sp>
-        <p:nvSpPr>
-          <p:cNvPr id="10" name="Text 7"/>
-          <p:cNvSpPr txBox="1"/>
-          <p:nvPr/>
-        </p:nvSpPr>
-        <p:spPr>
-          <a:xfrm>
-            <a:off x="6537960" y="1828800"/>
-            <a:ext cx="4800600" cy="457200"/>
-          </a:xfrm>
-          <a:prstGeom prst="rect">
-            <a:avLst/>
-          </a:prstGeom>
-          <a:noFill/>
-          <a:ln/>
-        </p:spPr>
-        <p:txBody>
-          <a:bodyPr wrap="square" lIns="0" tIns="0" rIns="0" bIns="0" rtlCol="0" anchor="ctr"/>
-          <a:lstStyle/>
-          <a:p>
-            <a:pPr marL="0" indent="0">
-              <a:buNone/>
-            </a:pPr>
-            <a:r>
-              <a:rPr lang="en-US" sz="1900" b="1" dirty="0">
-                <a:solidFill>
-                  <a:srgbClr val="F5F5F0"/>
-                </a:solidFill>
-                <a:latin typeface="Cambria"/>
-              </a:rPr>
-              <a:t>What Remains</a:t>
-            </a:r>
-            <a:endParaRPr lang="en-US" sz="1900" dirty="0"/>
-          </a:p>
-        </p:txBody>
-      </p:sp>
-      <p:sp>
-        <p:nvSpPr>
-          <p:cNvPr id="11" name="Text 8"/>
-          <p:cNvSpPr txBox="1"/>
-          <p:nvPr/>
-        </p:nvSpPr>
-        <p:spPr>
-          <a:xfrm>
-            <a:off x="6537960" y="2331720"/>
-            <a:ext cx="5074920" cy="2651760"/>
-          </a:xfrm>
-          <a:prstGeom prst="rect">
-            <a:avLst/>
-          </a:prstGeom>
-          <a:noFill/>
-          <a:ln/>
-        </p:spPr>
-        <p:txBody>
-          <a:bodyPr wrap="square" lIns="0" tIns="0" rIns="0" bIns="0" rtlCol="0" anchor="ctr"/>
-          <a:lstStyle/>
-          <a:p>
-            <a:pPr marL="285750" indent="-285750">
-              <a:lnSpc>
-                <a:spcPct val="110000"/>
-              </a:lnSpc>
-              <a:spcAft>
-                <a:spcPts val="800"/>
-              </a:spcAft>
-              <a:buSzPct val="100000"/>
-              <a:buFont typeface="Arial" panose="020B0604020202020204" pitchFamily="34" charset="0"/>
-              <a:buChar char="•"/>
-            </a:pPr>
-            <a:r>
-              <a:rPr lang="en-US" sz="1420" dirty="0">
-                <a:solidFill>
-                  <a:srgbClr val="F5F5F0"/>
-                </a:solidFill>
-                <a:latin typeface="Calibri"/>
-              </a:rPr>
-              <a:t>Secrets and service connections</a:t>
-            </a:r>
-            <a:endParaRPr lang="en-US" sz="1450" dirty="0"/>
-          </a:p>
-          <a:p>
-            <a:pPr marL="285750" indent="-285750">
-              <a:spcAft>
-                <a:spcPts val="800"/>
-              </a:spcAft>
-              <a:buFont typeface="Arial" panose="020B0604020202020204" pitchFamily="34" charset="0"/>
-              <a:buChar char="•"/>
-            </a:pPr>
-            <a:r>
-              <a:rPr lang="en-US" sz="1420" dirty="0">
-                <a:solidFill>
-                  <a:srgbClr val="F5F5F0"/>
-                </a:solidFill>
-                <a:latin typeface="Calibri"/>
-              </a:rPr>
-              <a:t>Runners, private networks, and toolchains</a:t>
-            </a:r>
-          </a:p>
-          <a:p>
-            <a:pPr marL="285750" indent="-285750">
-              <a:spcAft>
-                <a:spcPts val="800"/>
-              </a:spcAft>
-              <a:buFont typeface="Arial" panose="020B0604020202020204" pitchFamily="34" charset="0"/>
-              <a:buChar char="•"/>
-            </a:pPr>
-            <a:r>
-              <a:rPr lang="en-US" sz="1420" dirty="0">
-                <a:solidFill>
-                  <a:srgbClr val="F5F5F0"/>
-                </a:solidFill>
-                <a:latin typeface="Calibri"/>
-              </a:rPr>
-              <a:t>Environments, approvals, gates, custom tasks, and unsupported triggers</a:t>
-            </a:r>
-          </a:p>
-        </p:txBody>
-      </p:sp>
-      <p:sp>
-        <p:nvSpPr>
-          <p:cNvPr id="12" name="Shape 9"/>
-          <p:cNvSpPr/>
-          <p:nvPr/>
-        </p:nvSpPr>
-        <p:spPr>
-          <a:xfrm>
-            <a:off x="548640" y="5257800"/>
-            <a:ext cx="11064240" cy="1234440"/>
-          </a:xfrm>
-          <a:prstGeom prst="roundRect">
-            <a:avLst>
-              <a:gd name="adj" fmla="val 12632"/>
-            </a:avLst>
-          </a:prstGeom>
-          <a:solidFill>
-            <a:srgbClr val="F7F6F2"/>
-          </a:solidFill>
-          <a:ln w="12700">
-            <a:noFill/>
-            <a:prstDash val="solid"/>
-          </a:ln>
-          <a:effectLst>
-            <a:outerShdw blurRad="76200" dist="25400" dir="5400000" algn="bl" rotWithShape="0">
-              <a:srgbClr val="000000">
-                <a:alpha val="12000"/>
-              </a:srgbClr>
-            </a:outerShdw>
-          </a:effectLst>
-        </p:spPr>
-        <p:txBody>
-          <a:bodyPr/>
-          <a:lstStyle/>
-          <a:p>
-            <a:endParaRPr lang="en-US"/>
-          </a:p>
-        </p:txBody>
-      </p:sp>
-      <p:sp>
-        <p:nvSpPr>
-          <p:cNvPr id="13" name="Text 10"/>
-          <p:cNvSpPr txBox="1"/>
-          <p:nvPr/>
-        </p:nvSpPr>
-        <p:spPr>
-          <a:xfrm>
-            <a:off x="548640" y="5257800"/>
-            <a:ext cx="11064240" cy="1234440"/>
-          </a:xfrm>
-          <a:prstGeom prst="rect">
-            <a:avLst/>
-          </a:prstGeom>
-          <a:noFill/>
-          <a:ln/>
-        </p:spPr>
-        <p:txBody>
-          <a:bodyPr wrap="square" lIns="256032" tIns="54864" rIns="256032" bIns="54864" rtlCol="0" anchor="ctr"/>
-          <a:lstStyle/>
-          <a:p>
-            <a:pPr marL="0" indent="0" algn="l">
-              <a:lnSpc>
-                <a:spcPct val="110000"/>
-              </a:lnSpc>
-              <a:buNone/>
-            </a:pPr>
-            <a:r>
-              <a:rPr sz="1250" b="1" spc="120">
-                <a:solidFill>
-                  <a:srgbClr val="C1440E"/>
-                </a:solidFill>
-                <a:latin typeface="Calibri"/>
-              </a:rPr>
-              <a:t>DO THIS </a:t>
-            </a:r>
-            <a:r>
-              <a:rPr sz="1500" b="0">
-                <a:solidFill>
-                  <a:srgbClr val="2B2B2B"/>
-                </a:solidFill>
-                <a:latin typeface="Calibri"/>
-              </a:rPr>
-              <a:t>Use the audit output to build the migration backlog and recalibrate the planning estimate with evidence.</a:t>
-            </a:r>
-            <a:endParaRPr lang="en-US" sz="1450" dirty="0"/>
-          </a:p>
-        </p:txBody>
-      </p:sp>
-      <p:sp>
-        <p:nvSpPr>
-          <p:cNvPr id="14" name="Shape 11"/>
-          <p:cNvSpPr/>
-          <p:nvPr/>
-        </p:nvSpPr>
-        <p:spPr>
-          <a:xfrm>
-            <a:off x="10351008" y="5340096"/>
-            <a:ext cx="923544" cy="923544"/>
-          </a:xfrm>
-          <a:prstGeom prst="roundRect">
-            <a:avLst>
-              <a:gd name="adj" fmla="val 5941"/>
-            </a:avLst>
-          </a:prstGeom>
-          <a:solidFill>
-            <a:srgbClr val="FFFFFF"/>
-          </a:solidFill>
-          <a:ln w="15875">
-            <a:solidFill>
-              <a:srgbClr val="1F3D2C"/>
-            </a:solidFill>
-            <a:prstDash val="solid"/>
-          </a:ln>
-        </p:spPr>
-        <p:txBody>
-          <a:bodyPr/>
-          <a:lstStyle/>
-          <a:p>
-            <a:endParaRPr lang="en-US"/>
-          </a:p>
-        </p:txBody>
-      </p:sp>
-      <p:pic>
-        <p:nvPicPr>
-          <p:cNvPr id="15" name="Image 1" descr="/home/claude/pptx-build/assets/qr-sec3-actions-importer.png"/>
-          <p:cNvPicPr>
-            <a:picLocks noChangeAspect="1"/>
-          </p:cNvPicPr>
-          <p:nvPr/>
-        </p:nvPicPr>
-        <p:blipFill>
-          <a:blip r:embed="rId4"/>
-          <a:stretch>
-            <a:fillRect/>
-          </a:stretch>
-        </p:blipFill>
-        <p:spPr>
-          <a:xfrm>
-            <a:off x="10424160" y="5413248"/>
-            <a:ext cx="777240" cy="777240"/>
-          </a:xfrm>
-          <a:prstGeom prst="rect">
-            <a:avLst/>
-          </a:prstGeom>
-        </p:spPr>
-      </p:pic>
-      <p:sp>
-        <p:nvSpPr>
-          <p:cNvPr id="16" name="Slide Number Placeholder"/>
-          <p:cNvSpPr>
-            <a:spLocks noGrp="1"/>
-          </p:cNvSpPr>
-          <p:nvPr>
-            <p:ph type="sldNum" sz="quarter" idx="10"/>
-          </p:nvPr>
-        </p:nvSpPr>
-        <p:spPr/>
-        <p:txBody>
-          <a:bodyPr/>
-          <a:lstStyle/>
-          <a:p>
-            <a:fld id="{BCB632DE-6AD4-40F1-944C-28C0E9BF62DC}" type="slidenum">
-              <a:rPr lang="en-US"/>
               <a:t>24</a:t>
             </a:fld>
             <a:endParaRPr lang="en-US"/>
@@ -19454,7 +19494,18 @@
                 <a:ea typeface="Calibri" pitchFamily="34" charset="-122"/>
                 <a:cs typeface="Calibri" pitchFamily="34" charset="-120"/>
               </a:rPr>
-              <a:t>Non-goal: comparing GitHub with every competing platform.</a:t>
+              <a:t>Non-goal: </a:t>
+            </a:r>
+            <a:r>
+              <a:rPr lang="en-US" sz="1500" dirty="0">
+                <a:solidFill>
+                  <a:srgbClr val="F5F5F0"/>
+                </a:solidFill>
+                <a:latin typeface="Calibri" pitchFamily="34" charset="0"/>
+                <a:ea typeface="Calibri" pitchFamily="34" charset="-122"/>
+                <a:cs typeface="Calibri" pitchFamily="34" charset="-120"/>
+              </a:rPr>
+              <a:t>comparing GitHub with every competing platform.</a:t>
             </a:r>
           </a:p>
           <a:p>
@@ -19464,7 +19515,7 @@
               </a:lnSpc>
               <a:buSzPct val="100000"/>
             </a:pPr>
-            <a:endParaRPr lang="en-US" sz="1500" b="1" i="1" dirty="0">
+            <a:endParaRPr lang="en-US" sz="1500" i="1" dirty="0">
               <a:solidFill>
                 <a:srgbClr val="F5F5F0"/>
               </a:solidFill>
@@ -24964,7 +25015,7 @@
         <p:spPr>
           <a:xfrm>
             <a:off x="548640" y="1691640"/>
-            <a:ext cx="2560320" cy="3794760"/>
+            <a:ext cx="2560320" cy="3547872"/>
           </a:xfrm>
           <a:prstGeom prst="roundRect">
             <a:avLst>
@@ -25127,7 +25178,7 @@
               <a:buNone/>
             </a:pPr>
             <a:r>
-              <a:rPr lang="en-US" sz="1400">
+              <a:rPr lang="en-US" sz="1400" dirty="0">
                 <a:solidFill>
                   <a:srgbClr val="2B2B2B"/>
                 </a:solidFill>
@@ -25135,7 +25186,7 @@
               </a:rPr>
               <a:t>Connect Boards, name the source of truth, owners, and rollback authority.</a:t>
             </a:r>
-            <a:endParaRPr lang="en-US" sz="1250"/>
+            <a:endParaRPr lang="en-US" sz="1250" dirty="0"/>
           </a:p>
         </p:txBody>
       </p:sp>
@@ -25148,7 +25199,7 @@
         <p:spPr>
           <a:xfrm>
             <a:off x="3337560" y="1691640"/>
-            <a:ext cx="2560320" cy="3794760"/>
+            <a:ext cx="2560320" cy="3547872"/>
           </a:xfrm>
           <a:prstGeom prst="roundRect">
             <a:avLst>
@@ -25332,7 +25383,7 @@
         <p:spPr>
           <a:xfrm>
             <a:off x="6126480" y="1691640"/>
-            <a:ext cx="2560320" cy="3794760"/>
+            <a:ext cx="2560320" cy="3547872"/>
           </a:xfrm>
           <a:prstGeom prst="roundRect">
             <a:avLst>
@@ -25516,7 +25567,7 @@
         <p:spPr>
           <a:xfrm>
             <a:off x="8915400" y="1691640"/>
-            <a:ext cx="2560320" cy="3794760"/>
+            <a:ext cx="2560320" cy="3547872"/>
           </a:xfrm>
           <a:prstGeom prst="roundRect">
             <a:avLst>
@@ -26397,7 +26448,16 @@
                 </a:solidFill>
                 <a:latin typeface="Calibri"/>
               </a:rPr>
-              <a:t>Moving the code unlocks the tooling. Four other things decide whether it pays off.</a:t>
+              <a:t>Moving the code unlocks the tooling. Four other things decide whether it pays off</a:t>
+            </a:r>
+            <a:r>
+              <a:rPr lang="en-US" sz="1800" b="1" dirty="0">
+                <a:solidFill>
+                  <a:srgbClr val="2B2B2B"/>
+                </a:solidFill>
+                <a:latin typeface="Calibri"/>
+              </a:rPr>
+              <a:t>:</a:t>
             </a:r>
             <a:endParaRPr lang="en-US" sz="2000" dirty="0"/>
           </a:p>
@@ -26838,7 +26898,7 @@
                 <a:ea typeface="Cambria" pitchFamily="34" charset="-122"/>
                 <a:cs typeface="Cambria" pitchFamily="34" charset="-120"/>
               </a:rPr>
-              <a:t>Startups &amp; 1–3 squads</a:t>
+              <a:t>Startups &amp; 1–3 teams</a:t>
             </a:r>
             <a:endParaRPr lang="en-US" sz="1600" dirty="0"/>
           </a:p>
@@ -28205,7 +28265,7 @@
               <a:buNone/>
             </a:pPr>
             <a:r>
-              <a:rPr sz="1250" b="1" spc="120">
+              <a:rPr sz="1250" b="1" spc="120" dirty="0">
                 <a:solidFill>
                   <a:srgbClr val="C1440E"/>
                 </a:solidFill>
@@ -28214,7 +28274,7 @@
               <a:t>DO THIS </a:t>
             </a:r>
             <a:r>
-              <a:rPr sz="1300">
+              <a:rPr sz="1300" dirty="0">
                 <a:solidFill>
                   <a:srgbClr val="2B2B2B"/>
                 </a:solidFill>
@@ -29154,7 +29214,7 @@
                 <a:ea typeface="Calibri" pitchFamily="34" charset="-122"/>
                 <a:cs typeface="Calibri" pitchFamily="34" charset="-120"/>
               </a:rPr>
-              <a:t>AI is one of the real reasons — but it needs structured work items to pay off.</a:t>
+              <a:t>AI is one of the real reasons — but it needs planning to pay off.</a:t>
             </a:r>
             <a:endParaRPr lang="en-US" sz="1350" dirty="0"/>
           </a:p>
@@ -32124,7 +32184,7 @@
         </p:nvSpPr>
         <p:spPr>
           <a:xfrm>
-            <a:off x="7443196" y="2011680"/>
+            <a:off x="7443196" y="2184110"/>
             <a:ext cx="4297680" cy="292608"/>
           </a:xfrm>
           <a:prstGeom prst="rect">
@@ -32167,7 +32227,7 @@
         </p:blipFill>
         <p:spPr>
           <a:xfrm>
-            <a:off x="8540476" y="2377440"/>
+            <a:off x="8540476" y="2549870"/>
             <a:ext cx="2103120" cy="2103120"/>
           </a:xfrm>
           <a:prstGeom prst="rect">
@@ -32183,7 +32243,7 @@
         </p:nvSpPr>
         <p:spPr>
           <a:xfrm>
-            <a:off x="7443196" y="4599432"/>
+            <a:off x="7443196" y="4771862"/>
             <a:ext cx="4297680" cy="292608"/>
           </a:xfrm>
           <a:prstGeom prst="rect">
@@ -32218,7 +32278,7 @@
         </p:nvSpPr>
         <p:spPr>
           <a:xfrm>
-            <a:off x="7626076" y="4992624"/>
+            <a:off x="7626076" y="5165054"/>
             <a:ext cx="3931920" cy="700192"/>
           </a:xfrm>
           <a:prstGeom prst="rect">

--- a/presentation/azure-devops-to-github-the-great-migration-FULL-DECK.pptx
+++ b/presentation/azure-devops-to-github-the-great-migration-FULL-DECK.pptx
@@ -332,6 +332,23 @@
           <a:lstStyle/>
           <a:p>
             <a:r>
+              <a:rPr lang="en-US" b="1" dirty="0"/>
+              <a:t>TIMING: </a:t>
+            </a:r>
+            <a:r>
+              <a:rPr lang="en-US" b="1"/>
+              <a:t>budget 0:15 </a:t>
+            </a:r>
+            <a:r>
+              <a:rPr lang="en-US" b="1" dirty="0"/>
+              <a:t>for this slide (cum 0:00-0:15 of 90:00).</a:t>
+            </a:r>
+          </a:p>
+          <a:p>
+            <a:endParaRPr lang="en-US" b="1" dirty="0"/>
+          </a:p>
+          <a:p>
+            <a:r>
               <a:rPr lang="en-US" dirty="0"/>
               <a:t>Open cold — no 'hi, I'm Kevin' throat-clearing. Let the title sit for a beat, then deliver the tagline in the documentary voice (calm, declarative, faintly awed — never winking). That's the only line spoken in that register on this slide; the rest of the intro is normal conference delivery. This sets up the conceit for the whole talk: six section-opener cards plus a closer, all in this voice, everything else played straight.</a:t>
             </a:r>
@@ -418,6 +435,33 @@
           <a:bodyPr/>
           <a:lstStyle/>
           <a:p>
+            <a:pPr marL="0" marR="0" lvl="0" indent="0" algn="l" defTabSz="914400" rtl="0" eaLnBrk="1" fontAlgn="auto" latinLnBrk="0" hangingPunct="1">
+              <a:lnSpc>
+                <a:spcPct val="100000"/>
+              </a:lnSpc>
+              <a:spcBef>
+                <a:spcPts val="0"/>
+              </a:spcBef>
+              <a:spcAft>
+                <a:spcPts val="0"/>
+              </a:spcAft>
+              <a:buClrTx/>
+              <a:buSzTx/>
+              <a:buFontTx/>
+              <a:buNone/>
+              <a:tabLst/>
+              <a:defRPr/>
+            </a:pPr>
+            <a:r>
+              <a:rPr lang="en-US" b="1" dirty="0"/>
+              <a:t>TIMING: budget 1:45 for this slide (cum 10:25-12:10 of 90:00).</a:t>
+            </a:r>
+            <a:endParaRPr dirty="0"/>
+          </a:p>
+          <a:p>
+            <a:endParaRPr dirty="0"/>
+          </a:p>
+          <a:p>
             <a:r>
               <a:rPr dirty="0"/>
               <a:t>Straight delivery. Git is Git, so commit history is easy, and pull requests plus most branch policies migrate without much drama through GitHub Enterprise Importer.</a:t>
@@ -535,8 +579,21 @@
           <a:lstStyle/>
           <a:p>
             <a:r>
+              <a:rPr lang="en-US" b="1" dirty="0"/>
+              <a:t>TIMING: budget 1:45 for this slide (cum 12:10-13:55 of 90:00).</a:t>
+            </a:r>
+          </a:p>
+          <a:p>
+            <a:endParaRPr lang="en-US" b="1" dirty="0"/>
+          </a:p>
+          <a:p>
+            <a:r>
               <a:rPr dirty="0"/>
-              <a:t>Straight delivery, quick. Both wikis are Git repos, so the pages themselves copy with a clone and a push. The work is everything the Azure DevOps wiki layered on top: .order files and nested folders set page order and hierarchy, and GitHub’s wiki doesn’t read .order and shows a flat page list; Azure DevOps-only markdown ([[_TOC_]], ::: mermaid blocks, #123 work-item links, @mentions) renders as plain text or breaks; attachments live in a .attachments folder that page links point into.</a:t>
+              <a:t>Straight delivery, quick. Both wikis are Git repos, so the pages themselves copy with a clone and a push. The work is everything the Azure DevOps wiki layered on top: .order files and nested folders set page order and hierarchy, and GitHub’s wiki doesn’t read .order and shows a flat page list</a:t>
+            </a:r>
+            <a:r>
+              <a:rPr lang="en-US" dirty="0"/>
+              <a:t>.</a:t>
             </a:r>
           </a:p>
           <a:p>
@@ -634,6 +691,15 @@
           <a:lstStyle/>
           <a:p>
             <a:r>
+              <a:rPr lang="en-US" b="1"/>
+              <a:t>TIMING: budget 1:45 for this slide (cum 13:55-15:40 of 90:00).</a:t>
+            </a:r>
+          </a:p>
+          <a:p>
+            <a:endParaRPr lang="en-US" b="1"/>
+          </a:p>
+          <a:p>
+            <a:r>
               <a:t>Straight delivery. Unlike Repos or Wiki, this one isn't a clean migration path — it's a genuine three-way decision: keep Azure Artifacts as-is, move fully to GitHub Packages, or dual-publish during a transition window. The realistic PoC target for most enterprises is the first option done well: GitHub Actions publishing to and consuming from an existing Azure Artifacts feed, because repointing every downstream consumer at cutover usually isn't realistic. This is a decision, not a rewrite — say that line plainly, it's the slide's title for a reason.</a:t>
             </a:r>
           </a:p>
@@ -728,6 +794,15 @@
           <a:lstStyle/>
           <a:p>
             <a:r>
+              <a:rPr lang="en-US" b="1"/>
+              <a:t>TIMING: budget 2:05 for this slide (cum 15:40-17:45 of 90:00).</a:t>
+            </a:r>
+          </a:p>
+          <a:p>
+            <a:endParaRPr lang="en-US" b="1"/>
+          </a:p>
+          <a:p>
+            <a:r>
               <a:t>Straight delivery, and lead with the correction rather than burying it: GitHub does not ship a DORA dashboard.</a:t>
             </a:r>
           </a:p>
@@ -830,6 +905,15 @@
           <a:lstStyle/>
           <a:p>
             <a:r>
+              <a:rPr lang="en-US" b="1"/>
+              <a:t>TIMING: budget 1:05 for this slide (cum 17:45-18:50 of 90:00).</a:t>
+            </a:r>
+          </a:p>
+          <a:p>
+            <a:endParaRPr lang="en-US" b="1"/>
+          </a:p>
+          <a:p>
+            <a:r>
               <a:rPr lang="en-US" dirty="0"/>
               <a:t>Straight delivery, deliberately slow — this line is the whole talk in one sentence, worth letting it land before moving on. Everything that's file-based and version-controlled — repos, wiki — travels cleanly because Git is Git on both sides. Everything backed by a proprietary database with its own data model — dashboards here, and Boards plus Test Plans in the next section — needs either a rewrite, a decision, or in Test Plans' case, doesn't come at all. This sets up sections 3 and 4 directly.</a:t>
             </a:r>
@@ -917,6 +1001,15 @@
           <a:lstStyle/>
           <a:p>
             <a:r>
+              <a:rPr lang="en-US" b="1"/>
+              <a:t>TIMING: budget 2:10 for this slide (cum 18:50-21:00 of 90:00).</a:t>
+            </a:r>
+          </a:p>
+          <a:p>
+            <a:endParaRPr lang="en-US" b="1"/>
+          </a:p>
+          <a:p>
+            <a:r>
               <a:t>Straight delivery, land this one deliberately — it’s the thesis the whole talk hangs on. Three audiences, one pattern: developers move to GitHub and get Copilot and Actions; managers keep Azure Boards, capacity charts and Power BI exactly as they are; and the budget conversation starts easier because GitHub Enterprise Cloud includes Azure DevOps Basic access for users who sign in with Entra ID.</a:t>
             </a:r>
           </a:p>
@@ -1027,6 +1120,15 @@
           <a:lstStyle/>
           <a:p>
             <a:r>
+              <a:rPr lang="en-US" b="1"/>
+              <a:t>TIMING: budget 1:00 for this slide (cum 21:00-22:00 of 90:00).</a:t>
+            </a:r>
+          </a:p>
+          <a:p>
+            <a:endParaRPr lang="en-US" b="1"/>
+          </a:p>
+          <a:p>
+            <a:r>
               <a:t>Brief check-in, not a discussion window — about a minute. Take one quick question if a hand is up, otherwise move straight into section 3. The real Q&amp;A time is banked for the open Q&amp;A at the end.</a:t>
             </a:r>
           </a:p>
@@ -1113,6 +1215,15 @@
           <a:lstStyle/>
           <a:p>
             <a:r>
+              <a:rPr lang="en-US" b="1"/>
+              <a:t>TIMING: budget 0:25 for this slide (cum 22:00-22:25 of 90:00).</a:t>
+            </a:r>
+          </a:p>
+          <a:p>
+            <a:endParaRPr lang="en-US" b="1"/>
+          </a:p>
+          <a:p>
+            <a:r>
               <a:rPr lang="en-US"/>
               <a:t>DOCUMENTARY VOICE — deliver slowly and deadpan. The new metaphor introduces three migration planes: repository data, automation, and validation. Pause, then return to straight technical delivery. This is the heaviest section, so keep the framing concise.</a:t>
             </a:r>
@@ -1200,6 +1311,15 @@
           <a:lstStyle/>
           <a:p>
             <a:r>
+              <a:rPr lang="en-US" b="1"/>
+              <a:t>TIMING: budget 1:35 for this slide (cum 22:25-24:00 of 90:00).</a:t>
+            </a:r>
+          </a:p>
+          <a:p>
+            <a:endParaRPr lang="en-US" b="1"/>
+          </a:p>
+          <a:p>
+            <a:r>
               <a:rPr dirty="0"/>
               <a:t>Straight delivery, and take this one slowly — the rest of the section depends on the distinction.</a:t>
             </a:r>
@@ -1305,6 +1425,15 @@
           <a:lstStyle/>
           <a:p>
             <a:r>
+              <a:rPr lang="en-US" b="1"/>
+              <a:t>TIMING: budget 1:35 for this slide (cum 24:00-25:35 of 90:00).</a:t>
+            </a:r>
+          </a:p>
+          <a:p>
+            <a:endParaRPr lang="en-US" b="1"/>
+          </a:p>
+          <a:p>
+            <a:r>
               <a:rPr lang="en-US" dirty="0"/>
               <a:t>Straight delivery. Read by row, not by column. Repository data uses GEI or ELM but still needs human decisions and troubleshooting. Automation uses Actions Importer plus engineering and AI reasoning. Validation uses deterministic evidence and accountable human decisions; AI can assist but cannot declare the migration complete.</a:t>
             </a:r>
@@ -1391,15 +1520,36 @@
           <a:bodyPr/>
           <a:lstStyle/>
           <a:p>
+            <a:pPr marL="0" marR="0" lvl="0" indent="0" algn="l" defTabSz="914400" rtl="0" eaLnBrk="1" fontAlgn="auto" latinLnBrk="0" hangingPunct="1">
+              <a:lnSpc>
+                <a:spcPct val="100000"/>
+              </a:lnSpc>
+              <a:spcBef>
+                <a:spcPts val="0"/>
+              </a:spcBef>
+              <a:spcAft>
+                <a:spcPts val="0"/>
+              </a:spcAft>
+              <a:buClrTx/>
+              <a:buSzTx/>
+              <a:buFontTx/>
+              <a:buNone/>
+              <a:tabLst/>
+              <a:defRPr/>
+            </a:pPr>
+            <a:r>
+              <a:rPr lang="en-US" b="1" dirty="0"/>
+              <a:t>TIMING: budget 0:30 for this slide (cum 0:15-0:45 of 90:00).</a:t>
+            </a:r>
+          </a:p>
+          <a:p>
+            <a:endParaRPr lang="en-US" dirty="0"/>
+          </a:p>
+          <a:p>
             <a:r>
               <a:rPr lang="en-US" dirty="0"/>
-              <a:t>Standard </a:t>
-            </a:r>
-            <a:r>
-              <a:rPr lang="en-US"/>
-              <a:t>sponsor-thanks slide</a:t>
-            </a:r>
-            <a:endParaRPr lang="en-US" dirty="0"/>
+              <a:t>Standard sponsor-thanks slide</a:t>
+            </a:r>
           </a:p>
         </p:txBody>
       </p:sp>
@@ -1484,6 +1634,15 @@
           <a:lstStyle/>
           <a:p>
             <a:r>
+              <a:rPr lang="en-US" b="1"/>
+              <a:t>TIMING: budget 1:15 for this slide (cum 25:35-26:50 of 90:00).</a:t>
+            </a:r>
+          </a:p>
+          <a:p>
+            <a:endParaRPr lang="en-US" b="1"/>
+          </a:p>
+          <a:p>
+            <a:r>
               <a:rPr dirty="0"/>
               <a:t>Straight delivery. Spend twenty seconds getting the naming right, because the docs don't and everyone who goes looking afterwards hits the same confusion.</a:t>
             </a:r>
@@ -1580,6 +1739,15 @@
           <a:lstStyle/>
           <a:p>
             <a:r>
+              <a:rPr lang="en-US" b="1"/>
+              <a:t>TIMING: budget 1:35 for this slide (cum 26:50-28:25 of 90:00).</a:t>
+            </a:r>
+          </a:p>
+          <a:p>
+            <a:endParaRPr lang="en-US" b="1"/>
+          </a:p>
+          <a:p>
+            <a:r>
               <a:rPr lang="en-US" dirty="0"/>
               <a:t>Straight delivery. Briefly mention it, but don’t spend much time on it. </a:t>
             </a:r>
@@ -1742,6 +1910,15 @@
           <a:lstStyle/>
           <a:p>
             <a:r>
+              <a:rPr lang="en-US" b="1"/>
+              <a:t>TIMING: budget 1:55 for this slide (cum 28:25-30:20 of 90:00).</a:t>
+            </a:r>
+          </a:p>
+          <a:p>
+            <a:endParaRPr lang="en-US" b="1"/>
+          </a:p>
+          <a:p>
+            <a:r>
               <a:rPr dirty="0"/>
               <a:t>Straight delivery. Keep the non-negotiable order: install the Azure Pipelines GitHub App first and plan identity mapping before mannequins are created. Also decide account model, team structure, repository naming and visibility, system-of-record during transition, change freeze or reconciliation, and failure ownership before the first production run.</a:t>
             </a:r>
@@ -1838,6 +2015,15 @@
           <a:lstStyle/>
           <a:p>
             <a:r>
+              <a:rPr lang="en-US" b="1"/>
+              <a:t>TIMING: budget 1:55 for this slide (cum 30:20-32:15 of 90:00).</a:t>
+            </a:r>
+          </a:p>
+          <a:p>
+            <a:endParaRPr lang="en-US" b="1"/>
+          </a:p>
+          <a:p>
+            <a:r>
               <a:rPr dirty="0"/>
               <a:t>Straight delivery. This is the automation-plane tool. The audit breakdown is the planning artifact: it turns “this looks hard” into a backlog with counts.</a:t>
             </a:r>
@@ -2071,6 +2257,15 @@
           <a:lstStyle/>
           <a:p>
             <a:r>
+              <a:rPr lang="en-US" b="1"/>
+              <a:t>TIMING: budget 2:35 for this slide (cum 32:15-34:50 of 90:00).</a:t>
+            </a:r>
+          </a:p>
+          <a:p>
+            <a:endParaRPr lang="en-US" b="1"/>
+          </a:p>
+          <a:p>
+            <a:r>
               <a:rPr dirty="0"/>
               <a:t>Open the slide with the line: “Both platforms use YAML, in the same way that Java and JavaScript both contain the word ‘Java.’” It is also in the session abstract, so deliver it as a callback. It gets the laugh and it is the slide’s entire thesis: same syntax, different language. Say it once and move on.</a:t>
             </a:r>
@@ -2191,6 +2386,15 @@
           <a:lstStyle/>
           <a:p>
             <a:r>
+              <a:rPr lang="en-US" b="1"/>
+              <a:t>TIMING: budget 3:25 for this slide (cum 34:50-38:15 of 90:00).</a:t>
+            </a:r>
+          </a:p>
+          <a:p>
+            <a:endParaRPr lang="en-US" b="1"/>
+          </a:p>
+          <a:p>
+            <a:r>
               <a:rPr dirty="0"/>
               <a:t>Straight delivery, and slow down here — for an enterprise room this is the slide that separates a migration talk from a migration.</a:t>
             </a:r>
@@ -2312,6 +2516,15 @@
         <p:txBody>
           <a:bodyPr/>
           <a:lstStyle/>
+          <a:p>
+            <a:r>
+              <a:rPr lang="en-US" b="1"/>
+              <a:t>TIMING: budget 1:15 for this slide (cum 38:15-39:30 of 90:00).</a:t>
+            </a:r>
+          </a:p>
+          <a:p>
+            <a:endParaRPr lang="en-US" b="1"/>
+          </a:p>
           <a:p>
             <a:r>
               <a:rPr lang="en-US"/>
@@ -2401,6 +2614,15 @@
           <a:lstStyle/>
           <a:p>
             <a:r>
+              <a:rPr lang="en-US" b="1"/>
+              <a:t>TIMING: budget 1:55 for this slide (cum 39:30-41:25 of 90:00).</a:t>
+            </a:r>
+          </a:p>
+          <a:p>
+            <a:endParaRPr lang="en-US" b="1"/>
+          </a:p>
+          <a:p>
+            <a:r>
               <a:t>Straight delivery. Walk the five steps across all three planes. Inventory before moving; trial-migrate repository data; rebuild automation semantics and the execution environment; prove equivalence and deployability; then cut over with monitoring and rollback ready.</a:t>
             </a:r>
           </a:p>
@@ -2495,6 +2717,15 @@
           <a:lstStyle/>
           <a:p>
             <a:r>
+              <a:rPr lang="en-US" b="1"/>
+              <a:t>TIMING: budget 1:35 for this slide (cum 41:25-43:00 of 90:00).</a:t>
+            </a:r>
+          </a:p>
+          <a:p>
+            <a:endParaRPr lang="en-US" b="1"/>
+          </a:p>
+          <a:p>
+            <a:r>
               <a:t>Straight delivery. This is a reusable acceptance checklist — tell the room to photograph it, it is the most portable thing in the talk.</a:t>
             </a:r>
           </a:p>
@@ -2589,6 +2820,15 @@
           <a:lstStyle/>
           <a:p>
             <a:r>
+              <a:rPr lang="en-US" b="1"/>
+              <a:t>TIMING: budget 1:00 for this slide (cum 43:00-44:00 of 90:00).</a:t>
+            </a:r>
+          </a:p>
+          <a:p>
+            <a:endParaRPr lang="en-US" b="1"/>
+          </a:p>
+          <a:p>
+            <a:r>
               <a:t>Brief check-in, not a discussion window — about 30 seconds given how much ground this section covers. Take one quick question if a hand is up, otherwise move straight into section 4. The real Q&amp;A time is banked for the open Q&amp;A at the end.</a:t>
             </a:r>
           </a:p>
@@ -2675,6 +2915,15 @@
           <a:lstStyle/>
           <a:p>
             <a:r>
+              <a:rPr lang="en-US" b="1"/>
+              <a:t>TIMING: budget 0:50 for this slide (cum 0:45-1:35 of 90:00).</a:t>
+            </a:r>
+          </a:p>
+          <a:p>
+            <a:endParaRPr lang="en-US" b="1"/>
+          </a:p>
+          <a:p>
+            <a:r>
               <a:t>Straight delivery. Walk the six legs quickly. Budget for the 90-minute slot: section 1 about 8 minutes (including the opening), section 2 about 13, section 3 about 21, section 4 about 10, section 5 about 12, section 6 about 8. That is roughly 72 minutes of content plus four one-minute Q&amp;A pockets, which leaves about 14 minutes of open Q&amp;A on the thank-you slide. Section 3 includes the ELM slide; give it a few seconds and move on.</a:t>
             </a:r>
           </a:p>
@@ -2769,6 +3018,15 @@
           <a:lstStyle/>
           <a:p>
             <a:r>
+              <a:rPr lang="en-US" b="1"/>
+              <a:t>TIMING: budget 0:25 for this slide (cum 44:00-44:25 of 90:00).</a:t>
+            </a:r>
+          </a:p>
+          <a:p>
+            <a:endParaRPr lang="en-US" b="1"/>
+          </a:p>
+          <a:p>
+            <a:r>
               <a:t>DOCUMENTARY VOICE — the only register for this slide. Deliver slowly, deadpan, faintly awed, same conceit as the earlier section openers. Pause after the line, then go straight back to normal delivery for the Boards-vs-Projects framing slide. Keep this section brisk: five slides, and the payoff is the Test Plans slide and the recommendation, not length.</a:t>
             </a:r>
           </a:p>
@@ -2855,6 +3113,15 @@
           <a:lstStyle/>
           <a:p>
             <a:r>
+              <a:rPr lang="en-US" b="1"/>
+              <a:t>TIMING: budget 2:00 for this slide (cum 44:25-46:25 of 90:00).</a:t>
+            </a:r>
+          </a:p>
+          <a:p>
+            <a:endParaRPr lang="en-US" b="1"/>
+          </a:p>
+          <a:p>
+            <a:r>
               <a:rPr dirty="0"/>
               <a:t>Straight delivery. Frame this before comparing feature by feature — Azure Boards and GitHub Projects are not two competitors in one category, they are two different models.</a:t>
             </a:r>
@@ -2969,6 +3236,15 @@
           <a:lstStyle/>
           <a:p>
             <a:r>
+              <a:rPr lang="en-US" b="1"/>
+              <a:t>TIMING: budget 2:25 for this slide (cum 46:25-48:50 of 90:00).</a:t>
+            </a:r>
+          </a:p>
+          <a:p>
+            <a:endParaRPr lang="en-US" b="1"/>
+          </a:p>
+          <a:p>
+            <a:r>
               <a:t>Straight delivery. Take each tool on its own terms before comparing what a migration loses.</a:t>
             </a:r>
           </a:p>
@@ -3079,6 +3355,15 @@
           <a:lstStyle/>
           <a:p>
             <a:r>
+              <a:rPr lang="en-US" b="1"/>
+              <a:t>TIMING: budget 2:15 for this slide (cum 48:50-51:05 of 90:00).</a:t>
+            </a:r>
+          </a:p>
+          <a:p>
+            <a:endParaRPr lang="en-US" b="1"/>
+          </a:p>
+          <a:p>
+            <a:r>
               <a:t>Straight delivery. Be concrete about the loss: sprint history and capacity data, custom process fields and rules, the process template itself, and the Project / Team / Area Path structure have no clean landing spot in GitHub Projects. Parent-child links are the exception; they can map to sub-issues, which go up to eight levels deep.</a:t>
             </a:r>
           </a:p>
@@ -3181,6 +3466,15 @@
           <a:lstStyle/>
           <a:p>
             <a:r>
+              <a:rPr lang="en-US" b="1"/>
+              <a:t>TIMING: budget 0:40 for this slide (cum 51:05-51:45 of 90:00).</a:t>
+            </a:r>
+          </a:p>
+          <a:p>
+            <a:endParaRPr lang="en-US" b="1"/>
+          </a:p>
+          <a:p>
+            <a:r>
               <a:rPr lang="en-US" dirty="0"/>
               <a:t>Straight delivery, and let this one land plainly — it's probably the best-received slide in the whole deck precisely because it doesn't try to spin anything. </a:t>
             </a:r>
@@ -3277,6 +3571,15 @@
           <a:lstStyle/>
           <a:p>
             <a:r>
+              <a:rPr lang="en-US" b="1"/>
+              <a:t>TIMING: budget 2:15 for this slide (cum 51:45-54:00 of 90:00).</a:t>
+            </a:r>
+          </a:p>
+          <a:p>
+            <a:endParaRPr lang="en-US" b="1"/>
+          </a:p>
+          <a:p>
+            <a:r>
               <a:t>Straight delivery. This is the explicit takeaway for the section, and it is section 2’s hybrid pattern applied to planning: connect Azure Boards to your GitHub repos before touching anything else. Developers work in GitHub, next to Copilot and their pull requests; managers keep the sprint hub, capacity charts and Power BI reporting exactly where they are. The Azure Boards app for GitHub links commits and PRs back to work items with AB# mentions, and the Copilot cloud agent can be started from a Boards item.</a:t>
             </a:r>
           </a:p>
@@ -3379,6 +3682,15 @@
           <a:lstStyle/>
           <a:p>
             <a:r>
+              <a:rPr lang="en-US" b="1"/>
+              <a:t>TIMING: budget 1:00 for this slide (cum 54:00-55:00 of 90:00).</a:t>
+            </a:r>
+          </a:p>
+          <a:p>
+            <a:endParaRPr lang="en-US" b="1"/>
+          </a:p>
+          <a:p>
+            <a:r>
               <a:t>Brief check-in, not a discussion window — about a minute. Take one quick question if a hand is up, otherwise move straight into section 5. The real Q&amp;A time is banked for the open Q&amp;A at the end.</a:t>
             </a:r>
           </a:p>
@@ -3465,6 +3777,15 @@
           <a:lstStyle/>
           <a:p>
             <a:r>
+              <a:rPr lang="en-US" b="1"/>
+              <a:t>TIMING: budget 0:25 for this slide (cum 55:00-55:25 of 90:00).</a:t>
+            </a:r>
+          </a:p>
+          <a:p>
+            <a:endParaRPr lang="en-US" b="1"/>
+          </a:p>
+          <a:p>
+            <a:r>
               <a:rPr lang="en-US" dirty="0"/>
               <a:t>DOCUMENTARY VOICE — the only register for this slide. Deliver slowly, deadpan, faintly awed, same conceit as the earlier section openers. Pause after the line, then go straight back to normal delivery for the thesis slide. This section's closing slide comes back to this exact character — plant it here without over-explaining, the payoff lands later.</a:t>
             </a:r>
@@ -3552,6 +3873,15 @@
           <a:lstStyle/>
           <a:p>
             <a:r>
+              <a:rPr lang="en-US" b="1"/>
+              <a:t>TIMING: budget 1:30 for this slide (cum 55:25-56:55 of 90:00).</a:t>
+            </a:r>
+          </a:p>
+          <a:p>
+            <a:endParaRPr lang="en-US" b="1"/>
+          </a:p>
+          <a:p>
+            <a:r>
               <a:t>Straight delivery. This is the section’s thesis — land it early and come back to it. Most migrations that fail don’t fail in the converter; gh-ado2gh and Actions Importer do what they say. The execution-environment work from section 3 is real, but it is engineering you can plan. What sinks migrations is three predictable human failures: no real selection process (a choice made by momentum rather than evaluated on merit), customization starting before anyone understood the new tool, and a rollout that felt done TO people rather than WITH them. The rest of this section is about avoiding those three.</a:t>
             </a:r>
           </a:p>
@@ -3638,6 +3968,15 @@
           <a:lstStyle/>
           <a:p>
             <a:r>
+              <a:rPr lang="en-US" b="1"/>
+              <a:t>TIMING: budget 2:20 for this slide (cum 56:55-59:15 of 90:00).</a:t>
+            </a:r>
+          </a:p>
+          <a:p>
+            <a:endParaRPr lang="en-US" b="1"/>
+          </a:p>
+          <a:p>
+            <a:r>
               <a:t>Before walking the steps: “In most organizations the real selection process is that somebody senior used it at their last job.” OPTIONAL LAUGH LINE, and it is precisely failure mode one from the previous slide.</a:t>
             </a:r>
           </a:p>
@@ -3740,6 +4079,15 @@
           <a:lstStyle/>
           <a:p>
             <a:r>
+              <a:rPr lang="en-US" b="1"/>
+              <a:t>TIMING: budget 0:20 for this slide (cum 1:35-1:55 of 90:00).</a:t>
+            </a:r>
+          </a:p>
+          <a:p>
+            <a:endParaRPr lang="en-US" b="1"/>
+          </a:p>
+          <a:p>
+            <a:r>
               <a:t>DOCUMENTARY VOICE — the only register for this slide. Deliver slowly, deadpan, faintly awed. Do not wink at the joke. This is the first of six opener cards plus a closer — it establishes the conceit. Pause after delivering the line before moving on. The next slide goes straight back to normal delivery.</a:t>
             </a:r>
           </a:p>
@@ -3826,6 +4174,15 @@
           <a:lstStyle/>
           <a:p>
             <a:r>
+              <a:rPr lang="en-US" b="1"/>
+              <a:t>TIMING: budget 1:30 for this slide (cum 59:15-60:45 of 90:00).</a:t>
+            </a:r>
+          </a:p>
+          <a:p>
+            <a:endParaRPr lang="en-US" b="1"/>
+          </a:p>
+          <a:p>
+            <a:r>
               <a:rPr lang="en-US"/>
               <a:t>Straight delivery. Align the rollout with the three-plane model. Define authority and traceability first, prove one repository end-to-end, then scale in waves with explicit entry criteria. Cut over only with validation and rollback ready; decommission after long-tail checks, not immediately after migration.</a:t>
             </a:r>
@@ -3913,6 +4270,15 @@
           <a:lstStyle/>
           <a:p>
             <a:r>
+              <a:rPr lang="en-US" b="1"/>
+              <a:t>TIMING: budget 1:50 for this slide (cum 60:45-62:35 of 90:00).</a:t>
+            </a:r>
+          </a:p>
+          <a:p>
+            <a:endParaRPr lang="en-US" b="1"/>
+          </a:p>
+          <a:p>
+            <a:r>
               <a:t>Straight delivery. Sticker-price comparisons are the easiest way to make a bad decision look rigorous. Compare the whole bill: licensing tiers; GitHub Secret Protection and GitHub Code Security, which since April 2025 are sold as two separate add-ons rather than one Advanced Security bundle (Azure DevOps sells the same two products, so security alone doesn’t tip the decision); runner and compute minutes; and the real admin and migration effort, which is easy to leave off a spreadsheet entirely.</a:t>
             </a:r>
           </a:p>
@@ -4015,6 +4381,15 @@
           <a:lstStyle/>
           <a:p>
             <a:r>
+              <a:rPr lang="en-US" b="1" dirty="0"/>
+              <a:t>TIMING: budget 2:35 for this slide (cum 62:35-65:10 of 90:00).</a:t>
+            </a:r>
+          </a:p>
+          <a:p>
+            <a:endParaRPr lang="en-US" b="1" dirty="0"/>
+          </a:p>
+          <a:p>
+            <a:r>
               <a:rPr dirty="0"/>
               <a:t>Straight delivery. This is the counterweight to section 1. AI is the honest reason most teams are migrating — this slide is where you pay that argument down so it reads as analysis rather than a pitch. Frame the four as a to-do list, not as reasons to doubt the move.</a:t>
             </a:r>
@@ -4162,6 +4537,33 @@
           <a:bodyPr/>
           <a:lstStyle/>
           <a:p>
+            <a:pPr marL="0" marR="0" lvl="0" indent="0" algn="l" defTabSz="914400" rtl="0" eaLnBrk="1" fontAlgn="auto" latinLnBrk="0" hangingPunct="1">
+              <a:lnSpc>
+                <a:spcPct val="100000"/>
+              </a:lnSpc>
+              <a:spcBef>
+                <a:spcPts val="0"/>
+              </a:spcBef>
+              <a:spcAft>
+                <a:spcPts val="0"/>
+              </a:spcAft>
+              <a:buClrTx/>
+              <a:buSzTx/>
+              <a:buFontTx/>
+              <a:buNone/>
+              <a:tabLst/>
+              <a:defRPr/>
+            </a:pPr>
+            <a:r>
+              <a:rPr lang="en-US" b="1" dirty="0"/>
+              <a:t>TIMING: budget 2:35 for this slide (cum 65:10-67:00 of 90:00).</a:t>
+            </a:r>
+            <a:endParaRPr lang="en-US" dirty="0"/>
+          </a:p>
+          <a:p>
+            <a:endParaRPr lang="en-US" dirty="0"/>
+          </a:p>
+          <a:p>
             <a:r>
               <a:rPr dirty="0"/>
               <a:t>Documentary aside — same voice as the opener cards, played for a beat, then straight delivery resumes. This is the section's closing synthesis: startups and one-to-three-squad teams should just take GitHub Projects' lightweight fit, no enterprise overhead needed. Scaled agile, regulated industries, and multi-team portfolios are exactly where Azure Boards' hierarchy and reporting earn their keep. Mixed estates get the hybrid pattern, deliberately — a fit, not a compromise. </a:t>
@@ -4268,6 +4670,15 @@
           <a:lstStyle/>
           <a:p>
             <a:r>
+              <a:rPr lang="en-US" b="1"/>
+              <a:t>TIMING: budget 1:00 for this slide (cum 67:00-68:00 of 90:00).</a:t>
+            </a:r>
+          </a:p>
+          <a:p>
+            <a:endParaRPr lang="en-US" b="1"/>
+          </a:p>
+          <a:p>
+            <a:r>
               <a:t>Brief check-in, not a discussion window — about a minute. Take one quick question if a hand is up, otherwise move straight into section 6, the final section. The real Q&amp;A time is banked for the open Q&amp;A at the end.</a:t>
             </a:r>
           </a:p>
@@ -4354,6 +4765,15 @@
           <a:lstStyle/>
           <a:p>
             <a:r>
+              <a:rPr lang="en-US" b="1"/>
+              <a:t>TIMING: budget 0:25 for this slide (cum 68:00-68:25 of 90:00).</a:t>
+            </a:r>
+          </a:p>
+          <a:p>
+            <a:endParaRPr lang="en-US" b="1"/>
+          </a:p>
+          <a:p>
+            <a:r>
               <a:rPr lang="en-US" dirty="0"/>
               <a:t>DOCUMENTARY VOICE — spoken live, not read. This is the section opener: slow down, let the metaphor land. We are closing the loop on the "field guide to a new habitat" framing from the whole talk — this section is about what still limps back to the old watering hole after everyone else has moved on.</a:t>
             </a:r>
@@ -4441,6 +4861,15 @@
           <a:lstStyle/>
           <a:p>
             <a:r>
+              <a:rPr lang="en-US" b="1"/>
+              <a:t>TIMING: budget 1:50 for this slide (cum 68:25-70:15 of 90:00).</a:t>
+            </a:r>
+          </a:p>
+          <a:p>
+            <a:endParaRPr lang="en-US" b="1"/>
+          </a:p>
+          <a:p>
+            <a:r>
               <a:t>STRAIGHT delivery. This is the practical, checklist-voiced part of the section. The five rows are meant to be read as "here is where these hide" — invite the room to mentally add their own sixth row, because every org has one nobody else would guess.</a:t>
             </a:r>
           </a:p>
@@ -4527,6 +4956,15 @@
           <a:lstStyle/>
           <a:p>
             <a:r>
+              <a:rPr lang="en-US" b="1"/>
+              <a:t>TIMING: budget 2:20 for this slide (cum 70:15-72:35 of 90:00).</a:t>
+            </a:r>
+          </a:p>
+          <a:p>
+            <a:endParaRPr lang="en-US" b="1"/>
+          </a:p>
+          <a:p>
+            <a:r>
               <a:t>Two registers on this one slide. STRAIGHT for the top two cards — this is real mechanical risk, say it plainly.</a:t>
             </a:r>
           </a:p>
@@ -4637,6 +5075,15 @@
           <a:lstStyle/>
           <a:p>
             <a:r>
+              <a:rPr lang="en-US" b="1"/>
+              <a:t>TIMING: budget 1:35 for this slide (cum 72:35-74:10 of 90:00).</a:t>
+            </a:r>
+          </a:p>
+          <a:p>
+            <a:endParaRPr lang="en-US" b="1"/>
+          </a:p>
+          <a:p>
+            <a:r>
               <a:t>STRAIGHT delivery, briskly. For item three, recap the three planes and the cross-plane methods. For item five, reinforce that migration is an operating model: ownership, entry criteria, evidence, rollback, and decommissioning—not merely a tooling sequence.</a:t>
             </a:r>
           </a:p>
@@ -4731,6 +5178,15 @@
           <a:lstStyle/>
           <a:p>
             <a:r>
+              <a:rPr lang="en-US" b="1"/>
+              <a:t>TIMING: budget 1:50 for this slide (cum 74:10-76:00 of 90:00).</a:t>
+            </a:r>
+          </a:p>
+          <a:p>
+            <a:endParaRPr lang="en-US" b="1"/>
+          </a:p>
+          <a:p>
+            <a:r>
               <a:rPr dirty="0"/>
               <a:t>STRAIGHT delivery, and let it land quieter than anything around it. This is the deck's thesis in one sentence, and it now sits where it earns the most: the recap just handed them six things to remember, and this is the one thing to feel.</a:t>
             </a:r>
@@ -4852,6 +5308,15 @@
           <a:lstStyle/>
           <a:p>
             <a:r>
+              <a:rPr lang="en-US" b="1"/>
+              <a:t>TIMING: budget 2:35 for this slide (cum 1:55-4:30 of 90:00).</a:t>
+            </a:r>
+          </a:p>
+          <a:p>
+            <a:endParaRPr lang="en-US" b="1"/>
+          </a:p>
+          <a:p>
+            <a:r>
               <a:rPr dirty="0"/>
               <a:t>Straight delivery. Name the real reason teams migrate before the polite reasons: most of the agentic Copilot work (cloud agent, agentic code review, agentic </a:t>
             </a:r>
@@ -5051,6 +5516,15 @@
           <a:lstStyle/>
           <a:p>
             <a:r>
+              <a:rPr lang="en-US" b="1"/>
+              <a:t>TIMING: budget 1:00 for this slide (cum 76:00-77:00 of 90:00).</a:t>
+            </a:r>
+          </a:p>
+          <a:p>
+            <a:endParaRPr lang="en-US" b="1"/>
+          </a:p>
+          <a:p>
+            <a:r>
               <a:rPr dirty="0"/>
               <a:t>DOCUMENTARY VOICE — spoken live, slower than anything else in the deck.</a:t>
             </a:r>
@@ -5191,6 +5665,15 @@
           <a:lstStyle/>
           <a:p>
             <a:r>
+              <a:rPr lang="en-US" b="1"/>
+              <a:t>TIMING: budget 1:00 for this slide (cum 77:00-78:00 of 90:00), then open Q&amp;A gets ~12:00 to 90:00.</a:t>
+            </a:r>
+          </a:p>
+          <a:p>
+            <a:endParaRPr lang="en-US" b="1"/>
+          </a:p>
+          <a:p>
+            <a:r>
               <a:t>STRAIGHT delivery, warm. This is the handoff into the open Q&amp;A, roughly 14 minutes — there has been no interim pocket since section 5, so the room has been banking questions. Invite them explicitly rather than just stopping talking.</a:t>
             </a:r>
           </a:p>
@@ -5293,6 +5776,15 @@
           <a:lstStyle/>
           <a:p>
             <a:r>
+              <a:rPr lang="en-US" b="1"/>
+              <a:t>TIMING: budget 1:15 for this slide (cum 4:30-5:45 of 90:00).</a:t>
+            </a:r>
+          </a:p>
+          <a:p>
+            <a:endParaRPr lang="en-US" b="1"/>
+          </a:p>
+          <a:p>
+            <a:r>
               <a:t>Straight delivery, and keep it brisk — this is a framing slide, not a deep dive.</a:t>
             </a:r>
           </a:p>
@@ -5403,6 +5895,15 @@
           <a:lstStyle/>
           <a:p>
             <a:r>
+              <a:rPr lang="en-US" b="1"/>
+              <a:t>TIMING: budget 2:15 for this slide (cum 5:45-8:00 of 90:00).</a:t>
+            </a:r>
+          </a:p>
+          <a:p>
+            <a:endParaRPr lang="en-US" b="1"/>
+          </a:p>
+          <a:p>
+            <a:r>
               <a:t>Straight delivery, move quickly — five rows, roughly fifteen seconds each, do not read them verbatim. Frame it up front as “even if you delete the entire AI argument, here is why teams still move.”</a:t>
             </a:r>
           </a:p>
@@ -5505,6 +6006,15 @@
           <a:lstStyle/>
           <a:p>
             <a:r>
+              <a:rPr lang="en-US" b="1"/>
+              <a:t>TIMING: budget 0:20 for this slide (cum 8:00-8:20 of 90:00).</a:t>
+            </a:r>
+          </a:p>
+          <a:p>
+            <a:endParaRPr lang="en-US" b="1"/>
+          </a:p>
+          <a:p>
+            <a:r>
               <a:rPr lang="en-US" dirty="0"/>
               <a:t>DOCUMENTARY VOICE — the only register for this slide. Deliver slowly, deadpan, faintly awed, same conceit as section 1's opener. Pause after the line, then go straight back to normal delivery for the scorecard slide.</a:t>
             </a:r>
@@ -5590,6 +6100,15 @@
         <p:txBody>
           <a:bodyPr/>
           <a:lstStyle/>
+          <a:p>
+            <a:r>
+              <a:rPr lang="en-US" b="1"/>
+              <a:t>TIMING: budget 2:05 for this slide (cum 8:20-10:25 of 90:00).</a:t>
+            </a:r>
+          </a:p>
+          <a:p>
+            <a:endParaRPr lang="en-US" b="1"/>
+          </a:p>
           <a:p>
             <a:r>
               <a:rPr dirty="0"/>
@@ -32004,7 +32523,7 @@
         </p:nvSpPr>
         <p:spPr>
           <a:xfrm>
-            <a:off x="777240" y="2776886"/>
+            <a:off x="777240" y="2766436"/>
             <a:ext cx="6035040" cy="731520"/>
           </a:xfrm>
           <a:prstGeom prst="rect">
@@ -32115,7 +32634,7 @@
         </p:nvSpPr>
         <p:spPr>
           <a:xfrm>
-            <a:off x="777240" y="4786465"/>
+            <a:off x="777240" y="4723765"/>
             <a:ext cx="6035040" cy="411480"/>
           </a:xfrm>
           <a:prstGeom prst="rect">
@@ -32279,7 +32798,7 @@
         <p:spPr>
           <a:xfrm>
             <a:off x="7626076" y="5165054"/>
-            <a:ext cx="3931920" cy="700192"/>
+            <a:ext cx="3931920" cy="915635"/>
           </a:xfrm>
           <a:prstGeom prst="rect">
             <a:avLst/>
@@ -32352,6 +32871,34 @@
               </a:rPr>
               <a:t>Every note behind this talk</a:t>
             </a:r>
+            <a:endParaRPr lang="en-US" sz="1150" b="0" dirty="0">
+              <a:solidFill>
+                <a:srgbClr val="2B2B2B"/>
+              </a:solidFill>
+              <a:latin typeface="Calibri"/>
+            </a:endParaRPr>
+          </a:p>
+          <a:p>
+            <a:pPr algn="ctr">
+              <a:spcBef>
+                <a:spcPts val="300"/>
+              </a:spcBef>
+            </a:pPr>
+            <a:r>
+              <a:rPr lang="en-US" sz="1150" dirty="0">
+                <a:solidFill>
+                  <a:srgbClr val="2B2B2B"/>
+                </a:solidFill>
+                <a:latin typeface="Calibri"/>
+              </a:rPr>
+              <a:t>Link to session feedback</a:t>
+            </a:r>
+            <a:endParaRPr sz="1150" b="0" dirty="0">
+              <a:solidFill>
+                <a:srgbClr val="2B2B2B"/>
+              </a:solidFill>
+              <a:latin typeface="Calibri"/>
+            </a:endParaRPr>
           </a:p>
         </p:txBody>
       </p:sp>
